--- a/docs/CNN_토마토_병해분류_V2_진행보고.pptx
+++ b/docs/CNN_토마토_병해분류_V2_진행보고.pptx
@@ -183,10 +183,10 @@
               <c:strCache>
                 <c:ptCount val="3"/>
                 <c:pt idx="0">
-                  <c:v>tiny_cnn_a</c:v>
+                  <c:v>tiny_cnn_c</c:v>
                 </c:pt>
                 <c:pt idx="1">
-                  <c:v>tiny_cnn_c</c:v>
+                  <c:v>tiny_cnn_a</c:v>
                 </c:pt>
                 <c:pt idx="2">
                   <c:v>tiny_cnn_b</c:v>
@@ -201,13 +201,13 @@
                 <c:formatCode>General</c:formatCode>
                 <c:ptCount val="3"/>
                 <c:pt idx="0">
-                  <c:v>94.99</c:v>
+                  <c:v>96.26</c:v>
                 </c:pt>
                 <c:pt idx="1">
-                  <c:v>97.29</c:v>
+                  <c:v>96.59</c:v>
                 </c:pt>
                 <c:pt idx="2">
-                  <c:v>97.66</c:v>
+                  <c:v>98.42</c:v>
                 </c:pt>
               </c:numCache>
             </c:numRef>
@@ -796,22 +796,22 @@
                 <c:formatCode>General</c:formatCode>
                 <c:ptCount val="6"/>
                 <c:pt idx="0">
-                  <c:v>9.19</c:v>
+                  <c:v>8.09</c:v>
                 </c:pt>
                 <c:pt idx="1">
-                  <c:v>15.18</c:v>
+                  <c:v>18.16</c:v>
                 </c:pt>
                 <c:pt idx="2">
-                  <c:v>27.02</c:v>
+                  <c:v>18.17</c:v>
                 </c:pt>
                 <c:pt idx="3">
-                  <c:v>33.78</c:v>
+                  <c:v>37.94</c:v>
                 </c:pt>
                 <c:pt idx="4">
-                  <c:v>50.71</c:v>
+                  <c:v>52.43</c:v>
                 </c:pt>
                 <c:pt idx="5">
-                  <c:v>68.78</c:v>
+                  <c:v>62.73</c:v>
                 </c:pt>
               </c:numCache>
             </c:numRef>
@@ -869,22 +869,22 @@
                 <c:formatCode>General</c:formatCode>
                 <c:ptCount val="6"/>
                 <c:pt idx="0">
-                  <c:v>3.67</c:v>
+                  <c:v>6.66</c:v>
                 </c:pt>
                 <c:pt idx="1">
-                  <c:v>9.16</c:v>
+                  <c:v>10.87</c:v>
                 </c:pt>
                 <c:pt idx="2">
-                  <c:v>7.68</c:v>
+                  <c:v>7.81</c:v>
                 </c:pt>
                 <c:pt idx="3">
-                  <c:v>37.09</c:v>
+                  <c:v>29.56</c:v>
                 </c:pt>
                 <c:pt idx="4">
-                  <c:v>49.2</c:v>
+                  <c:v>45.63</c:v>
                 </c:pt>
                 <c:pt idx="5">
-                  <c:v>60.15</c:v>
+                  <c:v>54.96</c:v>
                 </c:pt>
               </c:numCache>
             </c:numRef>
@@ -942,22 +942,22 @@
                 <c:formatCode>General</c:formatCode>
                 <c:ptCount val="6"/>
                 <c:pt idx="0">
-                  <c:v>4.84</c:v>
+                  <c:v>6.9</c:v>
                 </c:pt>
                 <c:pt idx="1">
-                  <c:v>12.47</c:v>
+                  <c:v>10.98</c:v>
                 </c:pt>
                 <c:pt idx="2">
-                  <c:v>15.83</c:v>
+                  <c:v>17.89</c:v>
                 </c:pt>
                 <c:pt idx="3">
-                  <c:v>41.2</c:v>
+                  <c:v>35.47</c:v>
                 </c:pt>
                 <c:pt idx="4">
-                  <c:v>43.8</c:v>
+                  <c:v>47.31</c:v>
                 </c:pt>
                 <c:pt idx="5">
-                  <c:v>65.0</c:v>
+                  <c:v>63.56</c:v>
                 </c:pt>
               </c:numCache>
             </c:numRef>
@@ -1131,13 +1131,13 @@
                 <c:formatCode>General</c:formatCode>
                 <c:ptCount val="3"/>
                 <c:pt idx="0">
-                  <c:v>94.99</c:v>
+                  <c:v>96.59</c:v>
                 </c:pt>
                 <c:pt idx="1">
-                  <c:v>97.66</c:v>
+                  <c:v>98.42</c:v>
                 </c:pt>
                 <c:pt idx="2">
-                  <c:v>97.29</c:v>
+                  <c:v>96.26</c:v>
                 </c:pt>
               </c:numCache>
             </c:numRef>
@@ -1186,13 +1186,13 @@
                 <c:formatCode>General</c:formatCode>
                 <c:ptCount val="3"/>
                 <c:pt idx="0">
-                  <c:v>20.38</c:v>
+                  <c:v>26.75</c:v>
                 </c:pt>
                 <c:pt idx="1">
-                  <c:v>28.03</c:v>
+                  <c:v>29.3</c:v>
                 </c:pt>
                 <c:pt idx="2">
-                  <c:v>27.39</c:v>
+                  <c:v>25.16</c:v>
                 </c:pt>
               </c:numCache>
             </c:numRef>
@@ -1241,13 +1241,13 @@
                 <c:formatCode>General</c:formatCode>
                 <c:ptCount val="3"/>
                 <c:pt idx="0">
-                  <c:v>15.26</c:v>
+                  <c:v>17.62</c:v>
                 </c:pt>
                 <c:pt idx="1">
-                  <c:v>17.89</c:v>
+                  <c:v>18.26</c:v>
                 </c:pt>
                 <c:pt idx="2">
-                  <c:v>15.17</c:v>
+                  <c:v>15.44</c:v>
                 </c:pt>
               </c:numCache>
             </c:numRef>
@@ -1296,13 +1296,13 @@
                 <c:formatCode>General</c:formatCode>
                 <c:ptCount val="3"/>
                 <c:pt idx="0">
-                  <c:v>20.03</c:v>
+                  <c:v>23.7</c:v>
                 </c:pt>
                 <c:pt idx="1">
-                  <c:v>20.87</c:v>
+                  <c:v>23.55</c:v>
                 </c:pt>
                 <c:pt idx="2">
-                  <c:v>20.87</c:v>
+                  <c:v>20.03</c:v>
                 </c:pt>
               </c:numCache>
             </c:numRef>
@@ -5400,7 +5400,7 @@
                 </a:solidFill>
                 <a:latin typeface="Calibri"/>
               </a:rPr>
-              <a:t>PlantVillage test셋(2,734장, 학습에 안 쓴 held-out) 각각에 6조건×3단계=18가지 변형을 적용해 49,212장을 생성했다. 새로 촬영한 게 아니라 기존 이미지에 코드로 변형을 가한 것이다.</a:t>
+              <a:t>PlantVillage test셋(2,727장, 학습에 안 쓴 held-out) 각각에 6조건×3단계=18가지 변형을 적용해 49,086장을 생성했다. 새로 촬영한 게 아니라 기존 이미지에 코드로 변형을 가한 것이다.</a:t>
             </a:r>
           </a:p>
         </p:txBody>
@@ -6763,7 +6763,7 @@
                 </a:solidFill>
                 <a:latin typeface="Calibri"/>
               </a:rPr>
-              <a:t>train/test 근접중복(leakage)</a:t>
+              <a:t>train/test leakage (수정 완료)</a:t>
             </a:r>
           </a:p>
         </p:txBody>
@@ -6798,7 +6798,7 @@
                 </a:solidFill>
                 <a:latin typeface="Cambria"/>
               </a:rPr>
-              <a:t>0.62~0.88%</a:t>
+              <a:t>0건</a:t>
             </a:r>
           </a:p>
         </p:txBody>
@@ -6837,7 +6837,7 @@
                 </a:solidFill>
                 <a:latin typeface="Calibri"/>
               </a:rPr>
-              <a:t>PlantVillage는 같은 잎을 여러 장 찍은 유사 이미지가 섞여 있다고 알려진 데이터셋이라, perceptual hash(dHash, 64bit)로 test↔train(0.62%), val↔train(0.88%) 근접 중복 비율을 측정. 낮은 수준이라 재분할 없이 진행. distance=0 표본 하나를 직접 대조한 결과 픽셀 단위로 완전히 동일한 사진(파일명만 다른 UUID) 임을 확인해 방법론 자체도 검증했다.</a:t>
+              <a:t>perceptual hash(dHash, 64bit)로 측정한 결과 완전 동일(distance=0) 이미지가 test-train 3장·val-train 4장 발견됐다. 같은 사진이 train/test에 나뉘면 정확도가 부풀려질 위험이 있어, dHash가 같은 이미지를 그룹으로 묶어 하나의 split에만 배정하는 그룹 단위 분할로 개선하고 재학습했다. 재검증 결과 완전 동일 0건 — 근접중복(distance≤5, 0.77~0.88%)은 이번 수정 범위 밖이라 비슷한 수준으로 남아있다.</a:t>
             </a:r>
           </a:p>
         </p:txBody>
@@ -7819,7 +7819,7 @@
                 </a:solidFill>
                 <a:latin typeface="Calibri"/>
               </a:rPr>
-              <a:t>Flatten+Dense 대신 Global Average Pooling</a:t>
+              <a:t/>
             </a:r>
           </a:p>
         </p:txBody>
@@ -10664,7 +10664,7 @@
                 </a:solidFill>
                 <a:latin typeface="Calibri"/>
               </a:rPr>
-              <a:t>• 세 모델 다 V1 최고 기록(EfficientNetB0 86.21%)을 큰 폭으로 앞선다 — tiny_cnn_b는 +11.45%p.</a:t>
+              <a:t>• 세 모델 다 V1 최고 기록(EfficientNetB0 86.21%)을 큰 폭으로 앞선다 — tiny_cnn_b는 +12.21%p.</a:t>
             </a:r>
           </a:p>
           <a:p>
@@ -10680,7 +10680,7 @@
                 </a:solidFill>
                 <a:latin typeface="Calibri"/>
               </a:rPr>
-              <a:t>• macro F1도 정확도와 같은 순서(B 0.9718 &gt; C 0.9684 &gt; A 0.9396)로, 소수 클래스(모자이크바이러스 등)에서도 고르게 잘 분류한다는 뜻이다 — 다수 클래스로의 편향이 아니다.</a:t>
+              <a:t>• macro F1도 정확도와 같은 순서(B 0.9766 &gt; A 0.9572 &gt; C 0.9530)로, 소수 클래스(모자이크바이러스 등)에서도 고르게 잘 분류한다는 뜻이다 — 다수 클래스로의 편향이 아니다.</a:t>
             </a:r>
           </a:p>
           <a:p>
@@ -10712,7 +10712,7 @@
                 </a:solidFill>
                 <a:latin typeface="Calibri"/>
               </a:rPr>
-              <a:t>• tiny_cnn_c(31,498 파라미터)가 tiny_cnn_b(242,474)와 0.4%p 차이라는 점이 RQ1·RQ3에 대한 실질적 답이 된다.</a:t>
+              <a:t>• tiny_cnn_c(31,498 파라미터)가 tiny_cnn_b(242,474)와 2.16%p 차이라는 점이 RQ1·RQ3에 대한 실질적 답이 된다.</a:t>
             </a:r>
           </a:p>
         </p:txBody>
@@ -11104,7 +11104,7 @@
                             <a:srgbClr val="1A1A1A"/>
                           </a:solidFill>
                         </a:rPr>
-                        <a:t>4.98ms</a:t>
+                        <a:t>3.88ms</a:t>
                       </a:r>
                     </a:p>
                   </a:txBody>
@@ -11216,7 +11216,7 @@
                             <a:srgbClr val="1A1A1A"/>
                           </a:solidFill>
                         </a:rPr>
-                        <a:t>4.91ms</a:t>
+                        <a:t>7.08ms</a:t>
                       </a:r>
                     </a:p>
                   </a:txBody>
@@ -11328,7 +11328,7 @@
                             <a:srgbClr val="1A1A1A"/>
                           </a:solidFill>
                         </a:rPr>
-                        <a:t>4.99ms</a:t>
+                        <a:t>6.20ms</a:t>
                       </a:r>
                     </a:p>
                   </a:txBody>
@@ -11450,33 +11450,33 @@
           <a:p>
             <a:pPr algn="l">
               <a:lnSpc>
-                <a:spcPct val="130000"/>
+                <a:spcPct val="125000"/>
               </a:lnSpc>
             </a:pPr>
             <a:r>
-              <a:rPr sz="1100" b="0" i="0">
+              <a:rPr sz="1030" b="0" i="0">
                 <a:solidFill>
                   <a:srgbClr val="CADCFC"/>
                 </a:solidFill>
                 <a:latin typeface="Calibri"/>
               </a:rPr>
-              <a:t>• tiny_cnn_c는 FLOPs가 나머지 둘의 1/5~1/5.5 수준이면서 정확도는 B 대비 0.4%p 차이뿐 — Depthwise Separable Conv의 효율-정확도 트레이드오프가 설계 의도대로 실측 확인됨(RQ3).</a:t>
+              <a:t>• tiny_cnn_c는 FLOPs가 나머지 둘의 1/5~1/5.5 수준이면서 정확도는 B 대비 2.16%p 차이 — Depthwise Separable Conv로 82% 이상 FLOPs를 줄이면서도 정확도는 크게 희생하지 않는다는 트레이드오프가 실측으로 확인됨(RQ3).</a:t>
             </a:r>
           </a:p>
           <a:p>
             <a:pPr algn="l">
               <a:lnSpc>
-                <a:spcPct val="130000"/>
+                <a:spcPct val="125000"/>
               </a:lnSpc>
             </a:pPr>
             <a:r>
-              <a:rPr sz="1100" b="0" i="0">
+              <a:rPr sz="1030" b="0" i="0">
                 <a:solidFill>
                   <a:srgbClr val="CADCFC"/>
                 </a:solidFill>
                 <a:latin typeface="Calibri"/>
               </a:rPr>
-              <a:t>• 세 모델의 CPU 추론시간(4.9~5.0ms)은 거의 동일하다 — 이 정도로 작은 모델에서는 연산량 차이보다 커널 호출 오버헤드 등 고정비용이 지배적이라는 뜻. 실제 배포 시 FLOPs·파라미터 차이가 체감 속도 차이로 이어지진 않지만, 메모리·저장공간(파일크기 0.13MB vs 0.94MB)에서는 tiny_cnn_c가 확실히 유리하다.</a:t>
+              <a:t>• 다만 CPU 추론시간은 FLOPs 순서와 일치하지 않는다(a 3.88ms &lt; c 6.20ms &lt; b 7.08ms, FLOPs는 c&lt;a&lt;b) — Depthwise Separable Conv는 연산을 작은 커널로 쪼개기 때문에 FLOPs는 적어도 CPU에서 커널 호출·캐시 오버헤드가 상대적으로 커질 수 있다. 즉 FLOPs만으로 실제 지연시간을 예단하기 어렵다는 뜻이며, 메모리·저장공간(파일크기 0.13MB vs 0.94MB)에서는 여전히 tiny_cnn_c가 확실히 유리하다.</a:t>
             </a:r>
           </a:p>
         </p:txBody>
@@ -11786,7 +11786,7 @@
                 </a:solidFill>
                 <a:latin typeface="Calibri"/>
               </a:rPr>
-              <a:t>모델별로는 tiny_cnn_b가 평균 저하율 27.83%로 가장 강건하고, tiny_cnn_a가 34.11%로 가장 취약하다 — 파라미터가 적을수록 결정 경계가 더 좁아 왜곡에 민감해지는 경향으로 해석된다.</a:t>
+              <a:t>모델별로는 tiny_cnn_b가 평균 저하율 25.91%로 가장 강건하고, tiny_cnn_a가 32.92%로 가장 취약하다 — 파라미터가 적을수록 결정 경계가 더 좁아 왜곡에 민감해지는 경향으로 해석된다.</a:t>
             </a:r>
           </a:p>
         </p:txBody>
@@ -13810,7 +13810,7 @@
                 </a:solidFill>
                 <a:latin typeface="Calibri"/>
               </a:rPr>
-              <a:t>PlantDoc(8/10 클래스)이 Taiwan(3/10)보다 훨씬 많이 겹치는데도 정확도는 비슷한 20%대에 머문다. 만약 문제가 "클래스 불일치"였다면 PlantDoc에서 크게 개선됐어야 하는데 그렇지 않았다 — 즉 원인은 클래스 매핑이 아니라 촬영 환경(조명·배경·해상도·구도) 자체의 분포 차이(domain shift)다. 내부 정확도가 95~98%로 V1보다 훨씬 높아졌는데도 외부에서는 V1과 비슷한 범위(9~31%)로 급락한다는 점이 "모델을 더 잘 만드는 것"과 "실제 환경에 일반화되는 것"이 별개의 문제임을 보여준다.</a:t>
+              <a:t>PlantDoc(8/10 클래스)이 Taiwan(3/10)보다 훨씬 많이 겹치는데도 정확도는 오히려 Taiwan보다 낮거나 비슷하다(세 모델 모두 PlantDoc &lt; Taiwan). 만약 문제가 "클래스 불일치"였다면 PlantDoc에서 뚜렷이 개선됐어야 하는데 그렇지 않았다 — 즉 원인은 클래스 매핑이 아니라 촬영 환경(조명·배경·해상도·구도) 자체의 분포 차이(domain shift)다. 내부 정확도가 96~98%로 V1보다 훨씬 높아졌는데도 외부에서는 V1과 비슷한 범위(9~31%)로 급락한다는 점이 "모델을 더 잘 만드는 것"과 "실제 환경에 일반화되는 것"이 별개의 문제임을 보여준다.</a:t>
             </a:r>
           </a:p>
         </p:txBody>
@@ -14186,7 +14186,7 @@
                             <a:srgbClr val="1A1A1A"/>
                           </a:solidFill>
                         </a:rPr>
-                        <a:t>97.66%</a:t>
+                        <a:t>98.42%</a:t>
                       </a:r>
                     </a:p>
                   </a:txBody>
@@ -14208,7 +14208,7 @@
                             <a:srgbClr val="1A1A1A"/>
                           </a:solidFill>
                         </a:rPr>
-                        <a:t>27.83%</a:t>
+                        <a:t>25.91%</a:t>
                       </a:r>
                     </a:p>
                   </a:txBody>
@@ -14230,7 +14230,7 @@
                             <a:srgbClr val="1A1A1A"/>
                           </a:solidFill>
                         </a:rPr>
-                        <a:t>28.03%</a:t>
+                        <a:t>29.30%</a:t>
                       </a:r>
                     </a:p>
                   </a:txBody>
@@ -14252,7 +14252,7 @@
                             <a:srgbClr val="1A1A1A"/>
                           </a:solidFill>
                         </a:rPr>
-                        <a:t>17.89%</a:t>
+                        <a:t>18.26%</a:t>
                       </a:r>
                     </a:p>
                   </a:txBody>
@@ -14274,7 +14274,7 @@
                             <a:srgbClr val="1A1A1A"/>
                           </a:solidFill>
                         </a:rPr>
-                        <a:t>20.87%</a:t>
+                        <a:t>23.55%</a:t>
                       </a:r>
                     </a:p>
                   </a:txBody>
@@ -14298,7 +14298,7 @@
                             <a:srgbClr val="1A1A1A"/>
                           </a:solidFill>
                         </a:rPr>
-                        <a:t>tiny_cnn_c</a:t>
+                        <a:t>tiny_cnn_a</a:t>
                       </a:r>
                     </a:p>
                   </a:txBody>
@@ -14342,7 +14342,7 @@
                             <a:srgbClr val="1A1A1A"/>
                           </a:solidFill>
                         </a:rPr>
-                        <a:t>97.29%</a:t>
+                        <a:t>96.59%</a:t>
                       </a:r>
                     </a:p>
                   </a:txBody>
@@ -14364,7 +14364,7 @@
                             <a:srgbClr val="1A1A1A"/>
                           </a:solidFill>
                         </a:rPr>
-                        <a:t>30.52%</a:t>
+                        <a:t>32.92%</a:t>
                       </a:r>
                     </a:p>
                   </a:txBody>
@@ -14386,7 +14386,7 @@
                             <a:srgbClr val="1A1A1A"/>
                           </a:solidFill>
                         </a:rPr>
-                        <a:t>27.39%</a:t>
+                        <a:t>26.75%</a:t>
                       </a:r>
                     </a:p>
                   </a:txBody>
@@ -14408,7 +14408,7 @@
                             <a:srgbClr val="1A1A1A"/>
                           </a:solidFill>
                         </a:rPr>
-                        <a:t>15.17%</a:t>
+                        <a:t>17.62%</a:t>
                       </a:r>
                     </a:p>
                   </a:txBody>
@@ -14430,7 +14430,7 @@
                             <a:srgbClr val="1A1A1A"/>
                           </a:solidFill>
                         </a:rPr>
-                        <a:t>20.87%</a:t>
+                        <a:t>23.70%</a:t>
                       </a:r>
                     </a:p>
                   </a:txBody>
@@ -14454,7 +14454,7 @@
                             <a:srgbClr val="1A1A1A"/>
                           </a:solidFill>
                         </a:rPr>
-                        <a:t>tiny_cnn_a</a:t>
+                        <a:t>tiny_cnn_c</a:t>
                       </a:r>
                     </a:p>
                   </a:txBody>
@@ -14498,7 +14498,7 @@
                             <a:srgbClr val="1A1A1A"/>
                           </a:solidFill>
                         </a:rPr>
-                        <a:t>94.99%</a:t>
+                        <a:t>96.26%</a:t>
                       </a:r>
                     </a:p>
                   </a:txBody>
@@ -14520,7 +14520,7 @@
                             <a:srgbClr val="1A1A1A"/>
                           </a:solidFill>
                         </a:rPr>
-                        <a:t>34.11%</a:t>
+                        <a:t>30.35%</a:t>
                       </a:r>
                     </a:p>
                   </a:txBody>
@@ -14542,7 +14542,7 @@
                             <a:srgbClr val="1A1A1A"/>
                           </a:solidFill>
                         </a:rPr>
-                        <a:t>20.38%</a:t>
+                        <a:t>25.16%</a:t>
                       </a:r>
                     </a:p>
                   </a:txBody>
@@ -14564,7 +14564,7 @@
                             <a:srgbClr val="1A1A1A"/>
                           </a:solidFill>
                         </a:rPr>
-                        <a:t>15.26%</a:t>
+                        <a:t>15.44%</a:t>
                       </a:r>
                     </a:p>
                   </a:txBody>
@@ -16637,7 +16637,7 @@
                 </a:solidFill>
                 <a:latin typeface="Cambria"/>
               </a:rPr>
-              <a:t>97.66%</a:t>
+              <a:t>98.42%</a:t>
             </a:r>
           </a:p>
         </p:txBody>
@@ -16692,7 +16692,7 @@
                 </a:solidFill>
                 <a:latin typeface="Calibri"/>
               </a:rPr>
-              <a:t>(tiny_cnn_b, V1 대비 +11.45%p)</a:t>
+              <a:t>(tiny_cnn_b, V1 대비 +12.21%p)</a:t>
             </a:r>
           </a:p>
         </p:txBody>
@@ -16782,7 +16782,7 @@
                 </a:solidFill>
                 <a:latin typeface="Calibri"/>
               </a:rPr>
-              <a:t>(B 대비, 정확도 차 0.4%p)</a:t>
+              <a:t>(B 대비, 정확도 차 2.16%p)</a:t>
             </a:r>
           </a:p>
         </p:txBody>
@@ -18723,7 +18723,7 @@
                 </a:solidFill>
                 <a:latin typeface="Calibri"/>
               </a:rPr>
-              <a:t>↓  PlantVillage test셋(2,734장)에만 적용</a:t>
+              <a:t>↓  PlantVillage test셋(2,727장)에만 적용</a:t>
             </a:r>
           </a:p>
         </p:txBody>
@@ -18839,7 +18839,7 @@
                 </a:solidFill>
                 <a:latin typeface="Calibri"/>
               </a:rPr>
-              <a:t>6조건 × 3단계 = 49,212장 (4단계 강건성 평가 전용, 학습에는 절대 사용 안 함)</a:t>
+              <a:t>6조건 × 3단계 = 49,086장 (4단계 강건성 평가 전용, 학습에는 절대 사용 안 함)</a:t>
             </a:r>
           </a:p>
         </p:txBody>
@@ -19191,7 +19191,7 @@
                             <a:srgbClr val="1A1A1A"/>
                           </a:solidFill>
                         </a:rPr>
-                        <a:t>803</a:t>
+                        <a:t>804</a:t>
                       </a:r>
                     </a:p>
                   </a:txBody>
@@ -19213,7 +19213,7 @@
                             <a:srgbClr val="1A1A1A"/>
                           </a:solidFill>
                         </a:rPr>
-                        <a:t>805</a:t>
+                        <a:t>804</a:t>
                       </a:r>
                     </a:p>
                   </a:txBody>
@@ -19281,7 +19281,7 @@
                             <a:srgbClr val="1A1A1A"/>
                           </a:solidFill>
                         </a:rPr>
-                        <a:t>1,488</a:t>
+                        <a:t>1,489</a:t>
                       </a:r>
                     </a:p>
                   </a:txBody>
@@ -19325,7 +19325,7 @@
                             <a:srgbClr val="1A1A1A"/>
                           </a:solidFill>
                         </a:rPr>
-                        <a:t>320</a:t>
+                        <a:t>319</a:t>
                       </a:r>
                     </a:p>
                   </a:txBody>
@@ -19393,7 +19393,7 @@
                             <a:srgbClr val="1A1A1A"/>
                           </a:solidFill>
                         </a:rPr>
-                        <a:t>1,336</a:t>
+                        <a:t>1,335</a:t>
                       </a:r>
                     </a:p>
                   </a:txBody>
@@ -19415,7 +19415,7 @@
                             <a:srgbClr val="1A1A1A"/>
                           </a:solidFill>
                         </a:rPr>
-                        <a:t>286</a:t>
+                        <a:t>287</a:t>
                       </a:r>
                     </a:p>
                   </a:txBody>
@@ -19527,7 +19527,7 @@
                             <a:srgbClr val="1A1A1A"/>
                           </a:solidFill>
                         </a:rPr>
-                        <a:t>265</a:t>
+                        <a:t>266</a:t>
                       </a:r>
                     </a:p>
                   </a:txBody>
@@ -19549,7 +19549,7 @@
                             <a:srgbClr val="1A1A1A"/>
                           </a:solidFill>
                         </a:rPr>
-                        <a:t>267</a:t>
+                        <a:t>266</a:t>
                       </a:r>
                     </a:p>
                   </a:txBody>
@@ -19617,7 +19617,7 @@
                             <a:srgbClr val="1A1A1A"/>
                           </a:solidFill>
                         </a:rPr>
-                        <a:t>1,173</a:t>
+                        <a:t>1,172</a:t>
                       </a:r>
                     </a:p>
                   </a:txBody>
@@ -19639,7 +19639,7 @@
                             <a:srgbClr val="1A1A1A"/>
                           </a:solidFill>
                         </a:rPr>
-                        <a:t>251</a:t>
+                        <a:t>252</a:t>
                       </a:r>
                     </a:p>
                   </a:txBody>
@@ -19751,7 +19751,7 @@
                             <a:srgbClr val="1A1A1A"/>
                           </a:solidFill>
                         </a:rPr>
-                        <a:t>238</a:t>
+                        <a:t>239</a:t>
                       </a:r>
                     </a:p>
                   </a:txBody>
@@ -19773,7 +19773,7 @@
                             <a:srgbClr val="1A1A1A"/>
                           </a:solidFill>
                         </a:rPr>
-                        <a:t>240</a:t>
+                        <a:t>239</a:t>
                       </a:r>
                     </a:p>
                   </a:txBody>
@@ -19863,7 +19863,7 @@
                             <a:srgbClr val="1A1A1A"/>
                           </a:solidFill>
                         </a:rPr>
-                        <a:t>210</a:t>
+                        <a:t>211</a:t>
                       </a:r>
                     </a:p>
                   </a:txBody>
@@ -19885,7 +19885,7 @@
                             <a:srgbClr val="1A1A1A"/>
                           </a:solidFill>
                         </a:rPr>
-                        <a:t>212</a:t>
+                        <a:t>211</a:t>
                       </a:r>
                     </a:p>
                   </a:txBody>
@@ -19975,7 +19975,7 @@
                             <a:srgbClr val="1A1A1A"/>
                           </a:solidFill>
                         </a:rPr>
-                        <a:t>142</a:t>
+                        <a:t>143</a:t>
                       </a:r>
                     </a:p>
                   </a:txBody>
@@ -19997,7 +19997,7 @@
                             <a:srgbClr val="1A1A1A"/>
                           </a:solidFill>
                         </a:rPr>
-                        <a:t>144</a:t>
+                        <a:t>143</a:t>
                       </a:r>
                     </a:p>
                   </a:txBody>
@@ -20199,7 +20199,7 @@
                             <a:srgbClr val="1A1A1A"/>
                           </a:solidFill>
                         </a:rPr>
-                        <a:t>55</a:t>
+                        <a:t>56</a:t>
                       </a:r>
                     </a:p>
                   </a:txBody>
@@ -20221,7 +20221,7 @@
                             <a:srgbClr val="1A1A1A"/>
                           </a:solidFill>
                         </a:rPr>
-                        <a:t>57</a:t>
+                        <a:t>56</a:t>
                       </a:r>
                     </a:p>
                   </a:txBody>
@@ -20353,7 +20353,7 @@
                 </a:solidFill>
                 <a:latin typeface="Calibri"/>
               </a:rPr>
-              <a:t>층화분할 (클래스별 비율 유지)</a:t>
+              <a:t>그룹 단위 분할 (leakage 방지)</a:t>
             </a:r>
           </a:p>
           <a:p>
@@ -20385,7 +20385,7 @@
                 </a:solidFill>
                 <a:latin typeface="Calibri"/>
               </a:rPr>
-              <a:t>train 12,707 · val 2,719 · test 2,734</a:t>
+              <a:t>train 12,706 · val 2,727 · test 2,727</a:t>
             </a:r>
           </a:p>
         </p:txBody>

--- a/docs/CNN_토마토_병해분류_V2_진행보고.pptx
+++ b/docs/CNN_토마토_병해분류_V2_진행보고.pptx
@@ -26,6 +26,9 @@
     <p:sldId id="274" r:id="rId25"/>
     <p:sldId id="275" r:id="rId26"/>
     <p:sldId id="276" r:id="rId27"/>
+    <p:sldId id="279" r:id="rId30"/>
+    <p:sldId id="280" r:id="rId31"/>
+    <p:sldId id="281" r:id="rId32"/>
     <p:sldId id="277" r:id="rId28"/>
     <p:sldId id="278" r:id="rId29"/>
   </p:sldIdLst>
@@ -13003,7 +13006,7 @@
                 </a:solidFill>
                 <a:latin typeface="Calibri"/>
               </a:rPr>
-              <a:t>보류</a:t>
+              <a:t>완료</a:t>
             </a:r>
           </a:p>
         </p:txBody>
@@ -13541,7 +13544,7 @@
                 </a:solidFill>
                 <a:latin typeface="Calibri"/>
               </a:rPr>
-              <a:t>4개 평가 축(내부·효율·강건성·일반화) 결과와 그 해석</a:t>
+              <a:t>4개 평가 축(내부·효율·강건성·일반화) 결과 + 최종 모델 선정·DA 1차 실험</a:t>
             </a:r>
           </a:p>
         </p:txBody>
@@ -15507,6 +15510,1847 @@
                 </a:solidFill>
                 <a:latin typeface="Calibri"/>
               </a:rPr>
+              <a:t>RESULT 5 · FINAL MODEL</a:t>
+            </a:r>
+          </a:p>
+        </p:txBody>
+      </p:sp>
+      <p:sp>
+        <p:nvSpPr>
+          <p:cNvPr id="3" name="TextBox 2"/>
+          <p:cNvSpPr txBox="1"/>
+          <p:nvPr/>
+        </p:nvSpPr>
+        <p:spPr>
+          <a:xfrm>
+            <a:off x="548640" y="566928"/>
+            <a:ext cx="10972800" cy="548640"/>
+          </a:xfrm>
+          <a:prstGeom prst="rect">
+            <a:avLst/>
+          </a:prstGeom>
+          <a:noFill/>
+        </p:spPr>
+        <p:txBody>
+          <a:bodyPr wrap="square" anchor="t" lIns="0" rIns="0" tIns="0" bIns="0">
+            <a:spAutoFit/>
+          </a:bodyPr>
+          <a:lstStyle/>
+          <a:p>
+            <a:pPr algn="l"/>
+            <a:r>
+              <a:rPr sz="2400" b="1" i="0">
+                <a:solidFill>
+                  <a:srgbClr val="1E2761"/>
+                </a:solidFill>
+                <a:latin typeface="Cambria"/>
+              </a:rPr>
+              <a:t>최종 모델 선정 — tiny_cnn_c, 96px, bicubic</a:t>
+            </a:r>
+          </a:p>
+        </p:txBody>
+      </p:sp>
+      <p:sp>
+        <p:nvSpPr>
+          <p:cNvPr id="5" name="TextBox 4"/>
+          <p:cNvSpPr txBox="1"/>
+          <p:nvPr/>
+        </p:nvSpPr>
+        <p:spPr>
+          <a:xfrm>
+            <a:off x="548640" y="5760720"/>
+            <a:ext cx="11091672" cy="457200"/>
+          </a:xfrm>
+          <a:prstGeom prst="rect">
+            <a:avLst/>
+          </a:prstGeom>
+          <a:noFill/>
+        </p:spPr>
+        <p:txBody>
+          <a:bodyPr wrap="square" anchor="t" lIns="0" rIns="0" tIns="0" bIns="0">
+            <a:spAutoFit/>
+          </a:bodyPr>
+          <a:lstStyle/>
+          <a:p>
+            <a:pPr algn="l"/>
+            <a:r>
+              <a:rPr sz="1050" b="0" i="1">
+                <a:solidFill>
+                  <a:srgbClr val="5B5E6B"/>
+                </a:solidFill>
+                <a:latin typeface="Calibri"/>
+              </a:rPr>
+              <a:t>구조는 tiny_cnn_c(8배 작고 seed 재현성 최고)를 선택하고, 64/96/128/224px × 4개 보간법 13개 조합을 비교했다. 96px bicubic은 외부 1위(128px bicubic)와 0.1~0.3%p 차이면서 학습 시간은 21% 더 짧아 경량화 목표에 가장 부합하는 균형점으로 최종 선택했다.</a:t>
+            </a:r>
+          </a:p>
+        </p:txBody>
+      </p:sp>
+      <p:sp>
+        <p:nvSpPr>
+          <p:cNvPr id="6" name="TextBox 5"/>
+          <p:cNvSpPr txBox="1"/>
+          <p:nvPr/>
+        </p:nvSpPr>
+        <p:spPr>
+          <a:xfrm>
+            <a:off x="11430000" y="6446520"/>
+            <a:ext cx="548640" cy="274320"/>
+          </a:xfrm>
+          <a:prstGeom prst="rect">
+            <a:avLst/>
+          </a:prstGeom>
+          <a:noFill/>
+        </p:spPr>
+        <p:txBody>
+          <a:bodyPr wrap="square" anchor="t" lIns="0" rIns="0" tIns="0" bIns="0">
+            <a:spAutoFit/>
+          </a:bodyPr>
+          <a:lstStyle/>
+          <a:p>
+            <a:pPr algn="r"/>
+            <a:r>
+              <a:rPr sz="1000" b="0" i="0">
+                <a:solidFill>
+                  <a:srgbClr val="5B5E6B"/>
+                </a:solidFill>
+                <a:latin typeface="Calibri"/>
+              </a:rPr>
+              <a:t>21</a:t>
+            </a:r>
+          </a:p>
+        </p:txBody>
+      </p:sp>
+      <p:graphicFrame>
+        <p:nvGraphicFramePr>
+          <p:cNvPr id="7" name="Table 6"/>
+          <p:cNvGraphicFramePr>
+            <a:graphicFrameLocks noGrp="1"/>
+          </p:cNvGraphicFramePr>
+          <p:nvPr/>
+        </p:nvGraphicFramePr>
+        <p:xfrm>
+          <a:off x="548640" y="1600200"/>
+          <a:ext cx="9144000" cy="3931920"/>
+        </p:xfrm>
+        <a:graphic>
+          <a:graphicData uri="http://schemas.openxmlformats.org/drawingml/2006/table">
+            <a:tbl>
+              <a:tblPr firstRow="1" bandRow="1">
+                <a:tableStyleId>{5C22544A-7EE6-4342-B048-85BDC9FD1C3A}</a:tableStyleId>
+              </a:tblPr>
+              <a:tblGrid>
+                <a:gridCol w="3291840"/>
+                <a:gridCol w="2194560"/>
+                <a:gridCol w="1828800"/>
+                <a:gridCol w="1828800"/>
+              </a:tblGrid>
+              <a:tr h="786384">
+                <a:tc>
+                  <a:txBody>
+                    <a:bodyPr/>
+                    <a:lstStyle/>
+                    <a:p>
+                      <a:pPr algn="ctr"/>
+                      <a:r>
+                        <a:rPr sz="1050" b="1">
+                          <a:solidFill>
+                            <a:srgbClr val="FFFFFF"/>
+                          </a:solidFill>
+                        </a:rPr>
+                        <a:t>설정</a:t>
+                      </a:r>
+                    </a:p>
+                  </a:txBody>
+                  <a:tcPr>
+                    <a:solidFill>
+                      <a:srgbClr val="1E2761"/>
+                    </a:solidFill>
+                  </a:tcPr>
+                </a:tc>
+                <a:tc>
+                  <a:txBody>
+                    <a:bodyPr/>
+                    <a:lstStyle/>
+                    <a:p>
+                      <a:pPr algn="ctr"/>
+                      <a:r>
+                        <a:rPr sz="1050" b="1">
+                          <a:solidFill>
+                            <a:srgbClr val="FFFFFF"/>
+                          </a:solidFill>
+                        </a:rPr>
+                        <a:t>내부 정확도</a:t>
+                      </a:r>
+                    </a:p>
+                  </a:txBody>
+                  <a:tcPr>
+                    <a:solidFill>
+                      <a:srgbClr val="1E2761"/>
+                    </a:solidFill>
+                  </a:tcPr>
+                </a:tc>
+                <a:tc>
+                  <a:txBody>
+                    <a:bodyPr/>
+                    <a:lstStyle/>
+                    <a:p>
+                      <a:pPr algn="ctr"/>
+                      <a:r>
+                        <a:rPr sz="1050" b="1">
+                          <a:solidFill>
+                            <a:srgbClr val="FFFFFF"/>
+                          </a:solidFill>
+                        </a:rPr>
+                        <a:t>외부 평균</a:t>
+                      </a:r>
+                    </a:p>
+                  </a:txBody>
+                  <a:tcPr>
+                    <a:solidFill>
+                      <a:srgbClr val="1E2761"/>
+                    </a:solidFill>
+                  </a:tcPr>
+                </a:tc>
+                <a:tc>
+                  <a:txBody>
+                    <a:bodyPr/>
+                    <a:lstStyle/>
+                    <a:p>
+                      <a:pPr algn="ctr"/>
+                      <a:r>
+                        <a:rPr sz="1050" b="1">
+                          <a:solidFill>
+                            <a:srgbClr val="FFFFFF"/>
+                          </a:solidFill>
+                        </a:rPr>
+                        <a:t>학습 시간</a:t>
+                      </a:r>
+                    </a:p>
+                  </a:txBody>
+                  <a:tcPr>
+                    <a:solidFill>
+                      <a:srgbClr val="1E2761"/>
+                    </a:solidFill>
+                  </a:tcPr>
+                </a:tc>
+              </a:tr>
+              <a:tr h="786384">
+                <a:tc>
+                  <a:txBody>
+                    <a:bodyPr/>
+                    <a:lstStyle/>
+                    <a:p>
+                      <a:pPr algn="ctr"/>
+                      <a:r>
+                        <a:rPr sz="1050" b="0">
+                          <a:solidFill>
+                            <a:srgbClr val="1A1A1A"/>
+                          </a:solidFill>
+                        </a:rPr>
+                        <a:t>128px bilinear (기존 기준)</a:t>
+                      </a:r>
+                    </a:p>
+                  </a:txBody>
+                  <a:tcPr>
+                    <a:solidFill>
+                      <a:srgbClr val="FFFFFF"/>
+                    </a:solidFill>
+                  </a:tcPr>
+                </a:tc>
+                <a:tc>
+                  <a:txBody>
+                    <a:bodyPr/>
+                    <a:lstStyle/>
+                    <a:p>
+                      <a:pPr algn="ctr"/>
+                      <a:r>
+                        <a:rPr sz="1050" b="0">
+                          <a:solidFill>
+                            <a:srgbClr val="1A1A1A"/>
+                          </a:solidFill>
+                        </a:rPr>
+                        <a:t>96.26%</a:t>
+                      </a:r>
+                    </a:p>
+                  </a:txBody>
+                  <a:tcPr>
+                    <a:solidFill>
+                      <a:srgbClr val="FFFFFF"/>
+                    </a:solidFill>
+                  </a:tcPr>
+                </a:tc>
+                <a:tc>
+                  <a:txBody>
+                    <a:bodyPr/>
+                    <a:lstStyle/>
+                    <a:p>
+                      <a:pPr algn="ctr"/>
+                      <a:r>
+                        <a:rPr sz="1050" b="0">
+                          <a:solidFill>
+                            <a:srgbClr val="1A1A1A"/>
+                          </a:solidFill>
+                        </a:rPr>
+                        <a:t>20.21%</a:t>
+                      </a:r>
+                    </a:p>
+                  </a:txBody>
+                  <a:tcPr>
+                    <a:solidFill>
+                      <a:srgbClr val="FFFFFF"/>
+                    </a:solidFill>
+                  </a:tcPr>
+                </a:tc>
+                <a:tc>
+                  <a:txBody>
+                    <a:bodyPr/>
+                    <a:lstStyle/>
+                    <a:p>
+                      <a:pPr algn="ctr"/>
+                      <a:r>
+                        <a:rPr sz="1050" b="0">
+                          <a:solidFill>
+                            <a:srgbClr val="1A1A1A"/>
+                          </a:solidFill>
+                        </a:rPr>
+                        <a:t>68.5분</a:t>
+                      </a:r>
+                    </a:p>
+                  </a:txBody>
+                  <a:tcPr>
+                    <a:solidFill>
+                      <a:srgbClr val="FFFFFF"/>
+                    </a:solidFill>
+                  </a:tcPr>
+                </a:tc>
+              </a:tr>
+              <a:tr h="786384">
+                <a:tc>
+                  <a:txBody>
+                    <a:bodyPr/>
+                    <a:lstStyle/>
+                    <a:p>
+                      <a:pPr algn="ctr"/>
+                      <a:r>
+                        <a:rPr sz="1050" b="0">
+                          <a:solidFill>
+                            <a:srgbClr val="1A1A1A"/>
+                          </a:solidFill>
+                        </a:rPr>
+                        <a:t>128px area (내부 정확도 최고)</a:t>
+                      </a:r>
+                    </a:p>
+                  </a:txBody>
+                  <a:tcPr>
+                    <a:solidFill>
+                      <a:srgbClr val="EEF3FC"/>
+                    </a:solidFill>
+                  </a:tcPr>
+                </a:tc>
+                <a:tc>
+                  <a:txBody>
+                    <a:bodyPr/>
+                    <a:lstStyle/>
+                    <a:p>
+                      <a:pPr algn="ctr"/>
+                      <a:r>
+                        <a:rPr sz="1050" b="0">
+                          <a:solidFill>
+                            <a:srgbClr val="1A1A1A"/>
+                          </a:solidFill>
+                        </a:rPr>
+                        <a:t>96.96%</a:t>
+                      </a:r>
+                    </a:p>
+                  </a:txBody>
+                  <a:tcPr>
+                    <a:solidFill>
+                      <a:srgbClr val="EEF3FC"/>
+                    </a:solidFill>
+                  </a:tcPr>
+                </a:tc>
+                <a:tc>
+                  <a:txBody>
+                    <a:bodyPr/>
+                    <a:lstStyle/>
+                    <a:p>
+                      <a:pPr algn="ctr"/>
+                      <a:r>
+                        <a:rPr sz="1050" b="0">
+                          <a:solidFill>
+                            <a:srgbClr val="1A1A1A"/>
+                          </a:solidFill>
+                        </a:rPr>
+                        <a:t>21.89%</a:t>
+                      </a:r>
+                    </a:p>
+                  </a:txBody>
+                  <a:tcPr>
+                    <a:solidFill>
+                      <a:srgbClr val="EEF3FC"/>
+                    </a:solidFill>
+                  </a:tcPr>
+                </a:tc>
+                <a:tc>
+                  <a:txBody>
+                    <a:bodyPr/>
+                    <a:lstStyle/>
+                    <a:p>
+                      <a:pPr algn="ctr"/>
+                      <a:r>
+                        <a:rPr sz="1050" b="0">
+                          <a:solidFill>
+                            <a:srgbClr val="1A1A1A"/>
+                          </a:solidFill>
+                        </a:rPr>
+                        <a:t>113.3분</a:t>
+                      </a:r>
+                    </a:p>
+                  </a:txBody>
+                  <a:tcPr>
+                    <a:solidFill>
+                      <a:srgbClr val="EEF3FC"/>
+                    </a:solidFill>
+                  </a:tcPr>
+                </a:tc>
+              </a:tr>
+              <a:tr h="786384">
+                <a:tc>
+                  <a:txBody>
+                    <a:bodyPr/>
+                    <a:lstStyle/>
+                    <a:p>
+                      <a:pPr algn="ctr"/>
+                      <a:r>
+                        <a:rPr sz="1050" b="1">
+                          <a:solidFill>
+                            <a:srgbClr val="1A1A1A"/>
+                          </a:solidFill>
+                        </a:rPr>
+                        <a:t>96px bicubic (최종 선택)</a:t>
+                      </a:r>
+                    </a:p>
+                  </a:txBody>
+                  <a:tcPr>
+                    <a:solidFill>
+                      <a:srgbClr val="FFFFFF"/>
+                    </a:solidFill>
+                  </a:tcPr>
+                </a:tc>
+                <a:tc>
+                  <a:txBody>
+                    <a:bodyPr/>
+                    <a:lstStyle/>
+                    <a:p>
+                      <a:pPr algn="ctr"/>
+                      <a:r>
+                        <a:rPr sz="1050" b="1">
+                          <a:solidFill>
+                            <a:srgbClr val="1A1A1A"/>
+                          </a:solidFill>
+                        </a:rPr>
+                        <a:t>96.59%</a:t>
+                      </a:r>
+                    </a:p>
+                  </a:txBody>
+                  <a:tcPr>
+                    <a:solidFill>
+                      <a:srgbClr val="FFFFFF"/>
+                    </a:solidFill>
+                  </a:tcPr>
+                </a:tc>
+                <a:tc>
+                  <a:txBody>
+                    <a:bodyPr/>
+                    <a:lstStyle/>
+                    <a:p>
+                      <a:pPr algn="ctr"/>
+                      <a:r>
+                        <a:rPr sz="1050" b="1">
+                          <a:solidFill>
+                            <a:srgbClr val="1A1A1A"/>
+                          </a:solidFill>
+                        </a:rPr>
+                        <a:t>23.02%</a:t>
+                      </a:r>
+                    </a:p>
+                  </a:txBody>
+                  <a:tcPr>
+                    <a:solidFill>
+                      <a:srgbClr val="FFFFFF"/>
+                    </a:solidFill>
+                  </a:tcPr>
+                </a:tc>
+                <a:tc>
+                  <a:txBody>
+                    <a:bodyPr/>
+                    <a:lstStyle/>
+                    <a:p>
+                      <a:pPr algn="ctr"/>
+                      <a:r>
+                        <a:rPr sz="1050" b="1">
+                          <a:solidFill>
+                            <a:srgbClr val="1A1A1A"/>
+                          </a:solidFill>
+                        </a:rPr>
+                        <a:t>75.9분</a:t>
+                      </a:r>
+                    </a:p>
+                  </a:txBody>
+                  <a:tcPr>
+                    <a:solidFill>
+                      <a:srgbClr val="FFFFFF"/>
+                    </a:solidFill>
+                  </a:tcPr>
+                </a:tc>
+              </a:tr>
+              <a:tr h="786384">
+                <a:tc>
+                  <a:txBody>
+                    <a:bodyPr/>
+                    <a:lstStyle/>
+                    <a:p>
+                      <a:pPr algn="ctr"/>
+                      <a:r>
+                        <a:rPr sz="1050" b="0">
+                          <a:solidFill>
+                            <a:srgbClr val="1A1A1A"/>
+                          </a:solidFill>
+                        </a:rPr>
+                        <a:t>128px bicubic (외부 1위)</a:t>
+                      </a:r>
+                    </a:p>
+                  </a:txBody>
+                  <a:tcPr>
+                    <a:solidFill>
+                      <a:srgbClr val="EEF3FC"/>
+                    </a:solidFill>
+                  </a:tcPr>
+                </a:tc>
+                <a:tc>
+                  <a:txBody>
+                    <a:bodyPr/>
+                    <a:lstStyle/>
+                    <a:p>
+                      <a:pPr algn="ctr"/>
+                      <a:r>
+                        <a:rPr sz="1050" b="0">
+                          <a:solidFill>
+                            <a:srgbClr val="1A1A1A"/>
+                          </a:solidFill>
+                        </a:rPr>
+                        <a:t>96.66%</a:t>
+                      </a:r>
+                    </a:p>
+                  </a:txBody>
+                  <a:tcPr>
+                    <a:solidFill>
+                      <a:srgbClr val="EEF3FC"/>
+                    </a:solidFill>
+                  </a:tcPr>
+                </a:tc>
+                <a:tc>
+                  <a:txBody>
+                    <a:bodyPr/>
+                    <a:lstStyle/>
+                    <a:p>
+                      <a:pPr algn="ctr"/>
+                      <a:r>
+                        <a:rPr sz="1050" b="0">
+                          <a:solidFill>
+                            <a:srgbClr val="1A1A1A"/>
+                          </a:solidFill>
+                        </a:rPr>
+                        <a:t>23.31%</a:t>
+                      </a:r>
+                    </a:p>
+                  </a:txBody>
+                  <a:tcPr>
+                    <a:solidFill>
+                      <a:srgbClr val="EEF3FC"/>
+                    </a:solidFill>
+                  </a:tcPr>
+                </a:tc>
+                <a:tc>
+                  <a:txBody>
+                    <a:bodyPr/>
+                    <a:lstStyle/>
+                    <a:p>
+                      <a:pPr algn="ctr"/>
+                      <a:r>
+                        <a:rPr sz="1050" b="0">
+                          <a:solidFill>
+                            <a:srgbClr val="1A1A1A"/>
+                          </a:solidFill>
+                        </a:rPr>
+                        <a:t>95.7분</a:t>
+                      </a:r>
+                    </a:p>
+                  </a:txBody>
+                  <a:tcPr>
+                    <a:solidFill>
+                      <a:srgbClr val="EEF3FC"/>
+                    </a:solidFill>
+                  </a:tcPr>
+                </a:tc>
+              </a:tr>
+            </a:tbl>
+          </a:graphicData>
+        </a:graphic>
+      </p:graphicFrame>
+    </p:spTree>
+  </p:cSld>
+  <p:clrMapOvr>
+    <a:masterClrMapping/>
+  </p:clrMapOvr>
+</p:sld>
+</file>
+
+<file path=ppt/slides/slide23.xml><?xml version="1.0" encoding="utf-8"?>
+<p:sld xmlns:a="http://schemas.openxmlformats.org/drawingml/2006/main" xmlns:p="http://schemas.openxmlformats.org/presentationml/2006/main" xmlns:r="http://schemas.openxmlformats.org/officeDocument/2006/relationships">
+  <p:cSld>
+    <p:bg>
+      <p:bgPr>
+        <a:solidFill>
+          <a:srgbClr val="FFFFFF"/>
+        </a:solidFill>
+        <a:effectLst/>
+      </p:bgPr>
+    </p:bg>
+    <p:spTree>
+      <p:nvGrpSpPr>
+        <p:cNvPr id="1" name=""/>
+        <p:cNvGrpSpPr/>
+        <p:nvPr/>
+      </p:nvGrpSpPr>
+      <p:grpSpPr/>
+      <p:sp>
+        <p:nvSpPr>
+          <p:cNvPr id="2" name="TextBox 1"/>
+          <p:cNvSpPr txBox="1"/>
+          <p:nvPr/>
+        </p:nvSpPr>
+        <p:spPr>
+          <a:xfrm>
+            <a:off x="548640" y="292608"/>
+            <a:ext cx="9144000" cy="292608"/>
+          </a:xfrm>
+          <a:prstGeom prst="rect">
+            <a:avLst/>
+          </a:prstGeom>
+          <a:noFill/>
+        </p:spPr>
+        <p:txBody>
+          <a:bodyPr wrap="square" anchor="t" lIns="0" rIns="0" tIns="0" bIns="0">
+            <a:spAutoFit/>
+          </a:bodyPr>
+          <a:lstStyle/>
+          <a:p>
+            <a:pPr algn="l"/>
+            <a:r>
+              <a:rPr sz="1050" b="1" i="0" spc="150">
+                <a:solidFill>
+                  <a:srgbClr val="2A78D6"/>
+                </a:solidFill>
+                <a:latin typeface="Calibri"/>
+              </a:rPr>
+              <a:t>RESULT 6 · SEED REPRODUCIBILITY</a:t>
+            </a:r>
+          </a:p>
+        </p:txBody>
+      </p:sp>
+      <p:sp>
+        <p:nvSpPr>
+          <p:cNvPr id="3" name="TextBox 2"/>
+          <p:cNvSpPr txBox="1"/>
+          <p:nvPr/>
+        </p:nvSpPr>
+        <p:spPr>
+          <a:xfrm>
+            <a:off x="548640" y="566928"/>
+            <a:ext cx="10972800" cy="548640"/>
+          </a:xfrm>
+          <a:prstGeom prst="rect">
+            <a:avLst/>
+          </a:prstGeom>
+          <a:noFill/>
+        </p:spPr>
+        <p:txBody>
+          <a:bodyPr wrap="square" anchor="t" lIns="0" rIns="0" tIns="0" bIns="0">
+            <a:spAutoFit/>
+          </a:bodyPr>
+          <a:lstStyle/>
+          <a:p>
+            <a:pPr algn="l"/>
+            <a:r>
+              <a:rPr sz="2400" b="1" i="0">
+                <a:solidFill>
+                  <a:srgbClr val="1E2761"/>
+                </a:solidFill>
+                <a:latin typeface="Cambria"/>
+              </a:rPr>
+              <a:t>Seed 재현성 — 42 / 123 / 2026 반복실험</a:t>
+            </a:r>
+          </a:p>
+        </p:txBody>
+      </p:sp>
+      <p:sp>
+        <p:nvSpPr>
+          <p:cNvPr id="5" name="TextBox 4"/>
+          <p:cNvSpPr txBox="1"/>
+          <p:nvPr/>
+        </p:nvSpPr>
+        <p:spPr>
+          <a:xfrm>
+            <a:off x="548640" y="5760720"/>
+            <a:ext cx="11091672" cy="457200"/>
+          </a:xfrm>
+          <a:prstGeom prst="rect">
+            <a:avLst/>
+          </a:prstGeom>
+          <a:noFill/>
+        </p:spPr>
+        <p:txBody>
+          <a:bodyPr wrap="square" anchor="t" lIns="0" rIns="0" tIns="0" bIns="0">
+            <a:spAutoFit/>
+          </a:bodyPr>
+          <a:lstStyle/>
+          <a:p>
+            <a:pPr algn="l"/>
+            <a:r>
+              <a:rPr sz="1050" b="0" i="1">
+                <a:solidFill>
+                  <a:srgbClr val="5B5E6B"/>
+                </a:solidFill>
+                <a:latin typeface="Calibri"/>
+              </a:rPr>
+              <a:t>config.SEEDS=[42,123,2026] 3개 seed로 전부 재학습·재평가했다. tiny_cnn_b가 정확도는 가장 높지만 seed 간 편차도 가장 크고(±0.64%p), tiny_cnn_c는 편차가 0.25%p로 세 모델 중 가장 안정적이다 — 최종 모델 선정에서 이 재현성도 함께 고려했다.</a:t>
+            </a:r>
+          </a:p>
+        </p:txBody>
+      </p:sp>
+      <p:sp>
+        <p:nvSpPr>
+          <p:cNvPr id="6" name="TextBox 5"/>
+          <p:cNvSpPr txBox="1"/>
+          <p:nvPr/>
+        </p:nvSpPr>
+        <p:spPr>
+          <a:xfrm>
+            <a:off x="11430000" y="6446520"/>
+            <a:ext cx="548640" cy="274320"/>
+          </a:xfrm>
+          <a:prstGeom prst="rect">
+            <a:avLst/>
+          </a:prstGeom>
+          <a:noFill/>
+        </p:spPr>
+        <p:txBody>
+          <a:bodyPr wrap="square" anchor="t" lIns="0" rIns="0" tIns="0" bIns="0">
+            <a:spAutoFit/>
+          </a:bodyPr>
+          <a:lstStyle/>
+          <a:p>
+            <a:pPr algn="r"/>
+            <a:r>
+              <a:rPr sz="1000" b="0" i="0">
+                <a:solidFill>
+                  <a:srgbClr val="5B5E6B"/>
+                </a:solidFill>
+                <a:latin typeface="Calibri"/>
+              </a:rPr>
+              <a:t>22</a:t>
+            </a:r>
+          </a:p>
+        </p:txBody>
+      </p:sp>
+      <p:graphicFrame>
+        <p:nvGraphicFramePr>
+          <p:cNvPr id="7" name="Table 6"/>
+          <p:cNvGraphicFramePr>
+            <a:graphicFrameLocks noGrp="1"/>
+          </p:cNvGraphicFramePr>
+          <p:nvPr/>
+        </p:nvGraphicFramePr>
+        <p:xfrm>
+          <a:off x="548640" y="1600200"/>
+          <a:ext cx="9144000" cy="3931920"/>
+        </p:xfrm>
+        <a:graphic>
+          <a:graphicData uri="http://schemas.openxmlformats.org/drawingml/2006/table">
+            <a:tbl>
+              <a:tblPr firstRow="1" bandRow="1">
+                <a:tableStyleId>{5C22544A-7EE6-4342-B048-85BDC9FD1C3A}</a:tableStyleId>
+              </a:tblPr>
+              <a:tblGrid>
+                <a:gridCol w="2194560"/>
+                <a:gridCol w="2743200"/>
+                <a:gridCol w="2377440"/>
+                <a:gridCol w="1828800"/>
+              </a:tblGrid>
+              <a:tr h="982980">
+                <a:tc>
+                  <a:txBody>
+                    <a:bodyPr/>
+                    <a:lstStyle/>
+                    <a:p>
+                      <a:pPr algn="ctr"/>
+                      <a:r>
+                        <a:rPr sz="1050" b="1">
+                          <a:solidFill>
+                            <a:srgbClr val="FFFFFF"/>
+                          </a:solidFill>
+                        </a:rPr>
+                        <a:t>모델</a:t>
+                      </a:r>
+                    </a:p>
+                  </a:txBody>
+                  <a:tcPr>
+                    <a:solidFill>
+                      <a:srgbClr val="1E2761"/>
+                    </a:solidFill>
+                  </a:tcPr>
+                </a:tc>
+                <a:tc>
+                  <a:txBody>
+                    <a:bodyPr/>
+                    <a:lstStyle/>
+                    <a:p>
+                      <a:pPr algn="ctr"/>
+                      <a:r>
+                        <a:rPr sz="1050" b="1">
+                          <a:solidFill>
+                            <a:srgbClr val="FFFFFF"/>
+                          </a:solidFill>
+                        </a:rPr>
+                        <a:t>내부 정확도 (평균±표준편차)</a:t>
+                      </a:r>
+                    </a:p>
+                  </a:txBody>
+                  <a:tcPr>
+                    <a:solidFill>
+                      <a:srgbClr val="1E2761"/>
+                    </a:solidFill>
+                  </a:tcPr>
+                </a:tc>
+                <a:tc>
+                  <a:txBody>
+                    <a:bodyPr/>
+                    <a:lstStyle/>
+                    <a:p>
+                      <a:pPr algn="ctr"/>
+                      <a:r>
+                        <a:rPr sz="1050" b="1">
+                          <a:solidFill>
+                            <a:srgbClr val="FFFFFF"/>
+                          </a:solidFill>
+                        </a:rPr>
+                        <a:t>Corruption 평균 저하율</a:t>
+                      </a:r>
+                    </a:p>
+                  </a:txBody>
+                  <a:tcPr>
+                    <a:solidFill>
+                      <a:srgbClr val="1E2761"/>
+                    </a:solidFill>
+                  </a:tcPr>
+                </a:tc>
+                <a:tc>
+                  <a:txBody>
+                    <a:bodyPr/>
+                    <a:lstStyle/>
+                    <a:p>
+                      <a:pPr algn="ctr"/>
+                      <a:r>
+                        <a:rPr sz="1050" b="1">
+                          <a:solidFill>
+                            <a:srgbClr val="FFFFFF"/>
+                          </a:solidFill>
+                        </a:rPr>
+                        <a:t>비고</a:t>
+                      </a:r>
+                    </a:p>
+                  </a:txBody>
+                  <a:tcPr>
+                    <a:solidFill>
+                      <a:srgbClr val="1E2761"/>
+                    </a:solidFill>
+                  </a:tcPr>
+                </a:tc>
+              </a:tr>
+              <a:tr h="982980">
+                <a:tc>
+                  <a:txBody>
+                    <a:bodyPr/>
+                    <a:lstStyle/>
+                    <a:p>
+                      <a:pPr algn="ctr"/>
+                      <a:r>
+                        <a:rPr sz="1050" b="0">
+                          <a:solidFill>
+                            <a:srgbClr val="1A1A1A"/>
+                          </a:solidFill>
+                        </a:rPr>
+                        <a:t>tiny_cnn_a</a:t>
+                      </a:r>
+                    </a:p>
+                  </a:txBody>
+                  <a:tcPr>
+                    <a:solidFill>
+                      <a:srgbClr val="FFFFFF"/>
+                    </a:solidFill>
+                  </a:tcPr>
+                </a:tc>
+                <a:tc>
+                  <a:txBody>
+                    <a:bodyPr/>
+                    <a:lstStyle/>
+                    <a:p>
+                      <a:pPr algn="ctr"/>
+                      <a:r>
+                        <a:rPr sz="1050" b="0">
+                          <a:solidFill>
+                            <a:srgbClr val="1A1A1A"/>
+                          </a:solidFill>
+                        </a:rPr>
+                        <a:t>96.36% ± 0.46</a:t>
+                      </a:r>
+                    </a:p>
+                  </a:txBody>
+                  <a:tcPr>
+                    <a:solidFill>
+                      <a:srgbClr val="FFFFFF"/>
+                    </a:solidFill>
+                  </a:tcPr>
+                </a:tc>
+                <a:tc>
+                  <a:txBody>
+                    <a:bodyPr/>
+                    <a:lstStyle/>
+                    <a:p>
+                      <a:pPr algn="ctr"/>
+                      <a:r>
+                        <a:rPr sz="1050" b="0">
+                          <a:solidFill>
+                            <a:srgbClr val="1A1A1A"/>
+                          </a:solidFill>
+                        </a:rPr>
+                        <a:t>31.28%</a:t>
+                      </a:r>
+                    </a:p>
+                  </a:txBody>
+                  <a:tcPr>
+                    <a:solidFill>
+                      <a:srgbClr val="FFFFFF"/>
+                    </a:solidFill>
+                  </a:tcPr>
+                </a:tc>
+                <a:tc>
+                  <a:txBody>
+                    <a:bodyPr/>
+                    <a:lstStyle/>
+                    <a:p>
+                      <a:pPr algn="ctr"/>
+                      <a:r>
+                        <a:rPr sz="1050" b="0">
+                          <a:solidFill>
+                            <a:srgbClr val="1A1A1A"/>
+                          </a:solidFill>
+                        </a:rPr>
+                        <a:t> </a:t>
+                      </a:r>
+                    </a:p>
+                  </a:txBody>
+                  <a:tcPr>
+                    <a:solidFill>
+                      <a:srgbClr val="FFFFFF"/>
+                    </a:solidFill>
+                  </a:tcPr>
+                </a:tc>
+              </a:tr>
+              <a:tr h="982980">
+                <a:tc>
+                  <a:txBody>
+                    <a:bodyPr/>
+                    <a:lstStyle/>
+                    <a:p>
+                      <a:pPr algn="ctr"/>
+                      <a:r>
+                        <a:rPr sz="1050" b="0">
+                          <a:solidFill>
+                            <a:srgbClr val="1A1A1A"/>
+                          </a:solidFill>
+                        </a:rPr>
+                        <a:t>tiny_cnn_b</a:t>
+                      </a:r>
+                    </a:p>
+                  </a:txBody>
+                  <a:tcPr>
+                    <a:solidFill>
+                      <a:srgbClr val="EEF3FC"/>
+                    </a:solidFill>
+                  </a:tcPr>
+                </a:tc>
+                <a:tc>
+                  <a:txBody>
+                    <a:bodyPr/>
+                    <a:lstStyle/>
+                    <a:p>
+                      <a:pPr algn="ctr"/>
+                      <a:r>
+                        <a:rPr sz="1050" b="0">
+                          <a:solidFill>
+                            <a:srgbClr val="1A1A1A"/>
+                          </a:solidFill>
+                        </a:rPr>
+                        <a:t>97.64% ± 0.64</a:t>
+                      </a:r>
+                    </a:p>
+                  </a:txBody>
+                  <a:tcPr>
+                    <a:solidFill>
+                      <a:srgbClr val="EEF3FC"/>
+                    </a:solidFill>
+                  </a:tcPr>
+                </a:tc>
+                <a:tc>
+                  <a:txBody>
+                    <a:bodyPr/>
+                    <a:lstStyle/>
+                    <a:p>
+                      <a:pPr algn="ctr"/>
+                      <a:r>
+                        <a:rPr sz="1050" b="0">
+                          <a:solidFill>
+                            <a:srgbClr val="1A1A1A"/>
+                          </a:solidFill>
+                        </a:rPr>
+                        <a:t>26.37% (최선)</a:t>
+                      </a:r>
+                    </a:p>
+                  </a:txBody>
+                  <a:tcPr>
+                    <a:solidFill>
+                      <a:srgbClr val="EEF3FC"/>
+                    </a:solidFill>
+                  </a:tcPr>
+                </a:tc>
+                <a:tc>
+                  <a:txBody>
+                    <a:bodyPr/>
+                    <a:lstStyle/>
+                    <a:p>
+                      <a:pPr algn="ctr"/>
+                      <a:r>
+                        <a:rPr sz="1050" b="0">
+                          <a:solidFill>
+                            <a:srgbClr val="1A1A1A"/>
+                          </a:solidFill>
+                        </a:rPr>
+                        <a:t>편차 최대</a:t>
+                      </a:r>
+                    </a:p>
+                  </a:txBody>
+                  <a:tcPr>
+                    <a:solidFill>
+                      <a:srgbClr val="EEF3FC"/>
+                    </a:solidFill>
+                  </a:tcPr>
+                </a:tc>
+              </a:tr>
+              <a:tr h="982980">
+                <a:tc>
+                  <a:txBody>
+                    <a:bodyPr/>
+                    <a:lstStyle/>
+                    <a:p>
+                      <a:pPr algn="ctr"/>
+                      <a:r>
+                        <a:rPr sz="1050" b="1">
+                          <a:solidFill>
+                            <a:srgbClr val="1A1A1A"/>
+                          </a:solidFill>
+                        </a:rPr>
+                        <a:t>tiny_cnn_c</a:t>
+                      </a:r>
+                    </a:p>
+                  </a:txBody>
+                  <a:tcPr>
+                    <a:solidFill>
+                      <a:srgbClr val="FFFFFF"/>
+                    </a:solidFill>
+                  </a:tcPr>
+                </a:tc>
+                <a:tc>
+                  <a:txBody>
+                    <a:bodyPr/>
+                    <a:lstStyle/>
+                    <a:p>
+                      <a:pPr algn="ctr"/>
+                      <a:r>
+                        <a:rPr sz="1050" b="1">
+                          <a:solidFill>
+                            <a:srgbClr val="1A1A1A"/>
+                          </a:solidFill>
+                        </a:rPr>
+                        <a:t>96.46% ± 0.25</a:t>
+                      </a:r>
+                    </a:p>
+                  </a:txBody>
+                  <a:tcPr>
+                    <a:solidFill>
+                      <a:srgbClr val="FFFFFF"/>
+                    </a:solidFill>
+                  </a:tcPr>
+                </a:tc>
+                <a:tc>
+                  <a:txBody>
+                    <a:bodyPr/>
+                    <a:lstStyle/>
+                    <a:p>
+                      <a:pPr algn="ctr"/>
+                      <a:r>
+                        <a:rPr sz="1050" b="1">
+                          <a:solidFill>
+                            <a:srgbClr val="1A1A1A"/>
+                          </a:solidFill>
+                        </a:rPr>
+                        <a:t>29.74%</a:t>
+                      </a:r>
+                    </a:p>
+                  </a:txBody>
+                  <a:tcPr>
+                    <a:solidFill>
+                      <a:srgbClr val="FFFFFF"/>
+                    </a:solidFill>
+                  </a:tcPr>
+                </a:tc>
+                <a:tc>
+                  <a:txBody>
+                    <a:bodyPr/>
+                    <a:lstStyle/>
+                    <a:p>
+                      <a:pPr algn="ctr"/>
+                      <a:r>
+                        <a:rPr sz="1050" b="1">
+                          <a:solidFill>
+                            <a:srgbClr val="1A1A1A"/>
+                          </a:solidFill>
+                        </a:rPr>
+                        <a:t>재현성 최선</a:t>
+                      </a:r>
+                    </a:p>
+                  </a:txBody>
+                  <a:tcPr>
+                    <a:solidFill>
+                      <a:srgbClr val="FFFFFF"/>
+                    </a:solidFill>
+                  </a:tcPr>
+                </a:tc>
+              </a:tr>
+            </a:tbl>
+          </a:graphicData>
+        </a:graphic>
+      </p:graphicFrame>
+    </p:spTree>
+  </p:cSld>
+  <p:clrMapOvr>
+    <a:masterClrMapping/>
+  </p:clrMapOvr>
+</p:sld>
+</file>
+
+<file path=ppt/slides/slide24.xml><?xml version="1.0" encoding="utf-8"?>
+<p:sld xmlns:a="http://schemas.openxmlformats.org/drawingml/2006/main" xmlns:p="http://schemas.openxmlformats.org/presentationml/2006/main" xmlns:r="http://schemas.openxmlformats.org/officeDocument/2006/relationships">
+  <p:cSld>
+    <p:bg>
+      <p:bgPr>
+        <a:solidFill>
+          <a:srgbClr val="FFFFFF"/>
+        </a:solidFill>
+        <a:effectLst/>
+      </p:bgPr>
+    </p:bg>
+    <p:spTree>
+      <p:nvGrpSpPr>
+        <p:cNvPr id="1" name=""/>
+        <p:cNvGrpSpPr/>
+        <p:nvPr/>
+      </p:nvGrpSpPr>
+      <p:grpSpPr/>
+      <p:sp>
+        <p:nvSpPr>
+          <p:cNvPr id="2" name="TextBox 1"/>
+          <p:cNvSpPr txBox="1"/>
+          <p:nvPr/>
+        </p:nvSpPr>
+        <p:spPr>
+          <a:xfrm>
+            <a:off x="548640" y="292608"/>
+            <a:ext cx="9144000" cy="292608"/>
+          </a:xfrm>
+          <a:prstGeom prst="rect">
+            <a:avLst/>
+          </a:prstGeom>
+          <a:noFill/>
+        </p:spPr>
+        <p:txBody>
+          <a:bodyPr wrap="square" anchor="t" lIns="0" rIns="0" tIns="0" bIns="0">
+            <a:spAutoFit/>
+          </a:bodyPr>
+          <a:lstStyle/>
+          <a:p>
+            <a:pPr algn="l"/>
+            <a:r>
+              <a:rPr sz="1050" b="1" i="0" spc="150">
+                <a:solidFill>
+                  <a:srgbClr val="2A78D6"/>
+                </a:solidFill>
+                <a:latin typeface="Calibri"/>
+              </a:rPr>
+              <a:t>RESULT 7 · DOMAIN ADAPTATION</a:t>
+            </a:r>
+          </a:p>
+        </p:txBody>
+      </p:sp>
+      <p:sp>
+        <p:nvSpPr>
+          <p:cNvPr id="3" name="TextBox 2"/>
+          <p:cNvSpPr txBox="1"/>
+          <p:nvPr/>
+        </p:nvSpPr>
+        <p:spPr>
+          <a:xfrm>
+            <a:off x="548640" y="566928"/>
+            <a:ext cx="10972800" cy="548640"/>
+          </a:xfrm>
+          <a:prstGeom prst="rect">
+            <a:avLst/>
+          </a:prstGeom>
+          <a:noFill/>
+        </p:spPr>
+        <p:txBody>
+          <a:bodyPr wrap="square" anchor="t" lIns="0" rIns="0" tIns="0" bIns="0">
+            <a:spAutoFit/>
+          </a:bodyPr>
+          <a:lstStyle/>
+          <a:p>
+            <a:pPr algn="l"/>
+            <a:r>
+              <a:rPr sz="2400" b="1" i="0">
+                <a:solidFill>
+                  <a:srgbClr val="1E2761"/>
+                </a:solidFill>
+                <a:latin typeface="Cambria"/>
+              </a:rPr>
+              <a:t>Domain Adaptation (AdaBN / TENT) — 1차 실험</a:t>
+            </a:r>
+          </a:p>
+        </p:txBody>
+      </p:sp>
+      <p:sp>
+        <p:nvSpPr>
+          <p:cNvPr id="5" name="TextBox 4"/>
+          <p:cNvSpPr txBox="1"/>
+          <p:nvPr/>
+        </p:nvSpPr>
+        <p:spPr>
+          <a:xfrm>
+            <a:off x="548640" y="5760720"/>
+            <a:ext cx="11091672" cy="457200"/>
+          </a:xfrm>
+          <a:prstGeom prst="rect">
+            <a:avLst/>
+          </a:prstGeom>
+          <a:noFill/>
+        </p:spPr>
+        <p:txBody>
+          <a:bodyPr wrap="square" anchor="t" lIns="0" rIns="0" tIns="0" bIns="0">
+            <a:spAutoFit/>
+          </a:bodyPr>
+          <a:lstStyle/>
+          <a:p>
+            <a:pPr algn="l"/>
+            <a:r>
+              <a:rPr sz="1050" b="0" i="1">
+                <a:solidFill>
+                  <a:srgbClr val="5B5E6B"/>
+                </a:solidFill>
+                <a:latin typeface="Calibri"/>
+              </a:rPr>
+              <a:t>최종 모델에 source-free·target-label 미사용 조건으로 AdaBN/TENT를 적용했으나 둘 다 모든 데이터셋에서 source-only보다 악화됐다 — 예측이 target에 없는 클래스로 쏠리는 negative transfer 때문이며, 클래스 겹침이 적을수록(Taiwan) 저하가 더 컸다. Partial label-space mismatch(PADA) 문제가 실측으로 재현된 것으로, SHOT 등 partial-set 고려 방법이 다음 후보다.</a:t>
+            </a:r>
+          </a:p>
+        </p:txBody>
+      </p:sp>
+      <p:sp>
+        <p:nvSpPr>
+          <p:cNvPr id="6" name="TextBox 5"/>
+          <p:cNvSpPr txBox="1"/>
+          <p:nvPr/>
+        </p:nvSpPr>
+        <p:spPr>
+          <a:xfrm>
+            <a:off x="11430000" y="6446520"/>
+            <a:ext cx="548640" cy="274320"/>
+          </a:xfrm>
+          <a:prstGeom prst="rect">
+            <a:avLst/>
+          </a:prstGeom>
+          <a:noFill/>
+        </p:spPr>
+        <p:txBody>
+          <a:bodyPr wrap="square" anchor="t" lIns="0" rIns="0" tIns="0" bIns="0">
+            <a:spAutoFit/>
+          </a:bodyPr>
+          <a:lstStyle/>
+          <a:p>
+            <a:pPr algn="r"/>
+            <a:r>
+              <a:rPr sz="1000" b="0" i="0">
+                <a:solidFill>
+                  <a:srgbClr val="5B5E6B"/>
+                </a:solidFill>
+                <a:latin typeface="Calibri"/>
+              </a:rPr>
+              <a:t>23</a:t>
+            </a:r>
+          </a:p>
+        </p:txBody>
+      </p:sp>
+      <p:graphicFrame>
+        <p:nvGraphicFramePr>
+          <p:cNvPr id="7" name="Table 6"/>
+          <p:cNvGraphicFramePr>
+            <a:graphicFrameLocks noGrp="1"/>
+          </p:cNvGraphicFramePr>
+          <p:nvPr/>
+        </p:nvGraphicFramePr>
+        <p:xfrm>
+          <a:off x="548640" y="1600200"/>
+          <a:ext cx="8961120" cy="3931920"/>
+        </p:xfrm>
+        <a:graphic>
+          <a:graphicData uri="http://schemas.openxmlformats.org/drawingml/2006/table">
+            <a:tbl>
+              <a:tblPr firstRow="1" bandRow="1">
+                <a:tableStyleId>{5C22544A-7EE6-4342-B048-85BDC9FD1C3A}</a:tableStyleId>
+              </a:tblPr>
+              <a:tblGrid>
+                <a:gridCol w="2194560"/>
+                <a:gridCol w="1645920"/>
+                <a:gridCol w="1828800"/>
+                <a:gridCol w="1645920"/>
+                <a:gridCol w="1645920"/>
+              </a:tblGrid>
+              <a:tr h="982980">
+                <a:tc>
+                  <a:txBody>
+                    <a:bodyPr/>
+                    <a:lstStyle/>
+                    <a:p>
+                      <a:pPr algn="ctr"/>
+                      <a:r>
+                        <a:rPr sz="1050" b="1">
+                          <a:solidFill>
+                            <a:srgbClr val="FFFFFF"/>
+                          </a:solidFill>
+                        </a:rPr>
+                        <a:t>데이터셋</a:t>
+                      </a:r>
+                    </a:p>
+                  </a:txBody>
+                  <a:tcPr>
+                    <a:solidFill>
+                      <a:srgbClr val="1E2761"/>
+                    </a:solidFill>
+                  </a:tcPr>
+                </a:tc>
+                <a:tc>
+                  <a:txBody>
+                    <a:bodyPr/>
+                    <a:lstStyle/>
+                    <a:p>
+                      <a:pPr algn="ctr"/>
+                      <a:r>
+                        <a:rPr sz="1050" b="1">
+                          <a:solidFill>
+                            <a:srgbClr val="FFFFFF"/>
+                          </a:solidFill>
+                        </a:rPr>
+                        <a:t>클래스 겹침</a:t>
+                      </a:r>
+                    </a:p>
+                  </a:txBody>
+                  <a:tcPr>
+                    <a:solidFill>
+                      <a:srgbClr val="1E2761"/>
+                    </a:solidFill>
+                  </a:tcPr>
+                </a:tc>
+                <a:tc>
+                  <a:txBody>
+                    <a:bodyPr/>
+                    <a:lstStyle/>
+                    <a:p>
+                      <a:pPr algn="ctr"/>
+                      <a:r>
+                        <a:rPr sz="1050" b="1">
+                          <a:solidFill>
+                            <a:srgbClr val="FFFFFF"/>
+                          </a:solidFill>
+                        </a:rPr>
+                        <a:t>Source-only</a:t>
+                      </a:r>
+                    </a:p>
+                  </a:txBody>
+                  <a:tcPr>
+                    <a:solidFill>
+                      <a:srgbClr val="1E2761"/>
+                    </a:solidFill>
+                  </a:tcPr>
+                </a:tc>
+                <a:tc>
+                  <a:txBody>
+                    <a:bodyPr/>
+                    <a:lstStyle/>
+                    <a:p>
+                      <a:pPr algn="ctr"/>
+                      <a:r>
+                        <a:rPr sz="1050" b="1">
+                          <a:solidFill>
+                            <a:srgbClr val="FFFFFF"/>
+                          </a:solidFill>
+                        </a:rPr>
+                        <a:t>AdaBN</a:t>
+                      </a:r>
+                    </a:p>
+                  </a:txBody>
+                  <a:tcPr>
+                    <a:solidFill>
+                      <a:srgbClr val="1E2761"/>
+                    </a:solidFill>
+                  </a:tcPr>
+                </a:tc>
+                <a:tc>
+                  <a:txBody>
+                    <a:bodyPr/>
+                    <a:lstStyle/>
+                    <a:p>
+                      <a:pPr algn="ctr"/>
+                      <a:r>
+                        <a:rPr sz="1050" b="1">
+                          <a:solidFill>
+                            <a:srgbClr val="FFFFFF"/>
+                          </a:solidFill>
+                        </a:rPr>
+                        <a:t>TENT</a:t>
+                      </a:r>
+                    </a:p>
+                  </a:txBody>
+                  <a:tcPr>
+                    <a:solidFill>
+                      <a:srgbClr val="1E2761"/>
+                    </a:solidFill>
+                  </a:tcPr>
+                </a:tc>
+              </a:tr>
+              <a:tr h="982980">
+                <a:tc>
+                  <a:txBody>
+                    <a:bodyPr/>
+                    <a:lstStyle/>
+                    <a:p>
+                      <a:pPr algn="ctr"/>
+                      <a:r>
+                        <a:rPr sz="1050" b="0">
+                          <a:solidFill>
+                            <a:srgbClr val="1A1A1A"/>
+                          </a:solidFill>
+                        </a:rPr>
+                        <a:t>Taiwan</a:t>
+                      </a:r>
+                    </a:p>
+                  </a:txBody>
+                  <a:tcPr>
+                    <a:solidFill>
+                      <a:srgbClr val="FFFFFF"/>
+                    </a:solidFill>
+                  </a:tcPr>
+                </a:tc>
+                <a:tc>
+                  <a:txBody>
+                    <a:bodyPr/>
+                    <a:lstStyle/>
+                    <a:p>
+                      <a:pPr algn="ctr"/>
+                      <a:r>
+                        <a:rPr sz="1050" b="0">
+                          <a:solidFill>
+                            <a:srgbClr val="1A1A1A"/>
+                          </a:solidFill>
+                        </a:rPr>
+                        <a:t>3/10</a:t>
+                      </a:r>
+                    </a:p>
+                  </a:txBody>
+                  <a:tcPr>
+                    <a:solidFill>
+                      <a:srgbClr val="FFFFFF"/>
+                    </a:solidFill>
+                  </a:tcPr>
+                </a:tc>
+                <a:tc>
+                  <a:txBody>
+                    <a:bodyPr/>
+                    <a:lstStyle/>
+                    <a:p>
+                      <a:pPr algn="ctr"/>
+                      <a:r>
+                        <a:rPr sz="1050" b="1">
+                          <a:solidFill>
+                            <a:srgbClr val="1A1A1A"/>
+                          </a:solidFill>
+                        </a:rPr>
+                        <a:t>27.39%</a:t>
+                      </a:r>
+                    </a:p>
+                  </a:txBody>
+                  <a:tcPr>
+                    <a:solidFill>
+                      <a:srgbClr val="FFFFFF"/>
+                    </a:solidFill>
+                  </a:tcPr>
+                </a:tc>
+                <a:tc>
+                  <a:txBody>
+                    <a:bodyPr/>
+                    <a:lstStyle/>
+                    <a:p>
+                      <a:pPr algn="ctr"/>
+                      <a:r>
+                        <a:rPr sz="1050" b="0">
+                          <a:solidFill>
+                            <a:srgbClr val="1A1A1A"/>
+                          </a:solidFill>
+                        </a:rPr>
+                        <a:t>7.64%</a:t>
+                      </a:r>
+                    </a:p>
+                  </a:txBody>
+                  <a:tcPr>
+                    <a:solidFill>
+                      <a:srgbClr val="FFFFFF"/>
+                    </a:solidFill>
+                  </a:tcPr>
+                </a:tc>
+                <a:tc>
+                  <a:txBody>
+                    <a:bodyPr/>
+                    <a:lstStyle/>
+                    <a:p>
+                      <a:pPr algn="ctr"/>
+                      <a:r>
+                        <a:rPr sz="1050" b="0">
+                          <a:solidFill>
+                            <a:srgbClr val="1A1A1A"/>
+                          </a:solidFill>
+                        </a:rPr>
+                        <a:t>7.64%</a:t>
+                      </a:r>
+                    </a:p>
+                  </a:txBody>
+                  <a:tcPr>
+                    <a:solidFill>
+                      <a:srgbClr val="FFFFFF"/>
+                    </a:solidFill>
+                  </a:tcPr>
+                </a:tc>
+              </a:tr>
+              <a:tr h="982980">
+                <a:tc>
+                  <a:txBody>
+                    <a:bodyPr/>
+                    <a:lstStyle/>
+                    <a:p>
+                      <a:pPr algn="ctr"/>
+                      <a:r>
+                        <a:rPr sz="1050" b="0">
+                          <a:solidFill>
+                            <a:srgbClr val="1A1A1A"/>
+                          </a:solidFill>
+                        </a:rPr>
+                        <a:t>Bangladesh</a:t>
+                      </a:r>
+                    </a:p>
+                  </a:txBody>
+                  <a:tcPr>
+                    <a:solidFill>
+                      <a:srgbClr val="EEF3FC"/>
+                    </a:solidFill>
+                  </a:tcPr>
+                </a:tc>
+                <a:tc>
+                  <a:txBody>
+                    <a:bodyPr/>
+                    <a:lstStyle/>
+                    <a:p>
+                      <a:pPr algn="ctr"/>
+                      <a:r>
+                        <a:rPr sz="1050" b="0">
+                          <a:solidFill>
+                            <a:srgbClr val="1A1A1A"/>
+                          </a:solidFill>
+                        </a:rPr>
+                        <a:t>6/10</a:t>
+                      </a:r>
+                    </a:p>
+                  </a:txBody>
+                  <a:tcPr>
+                    <a:solidFill>
+                      <a:srgbClr val="EEF3FC"/>
+                    </a:solidFill>
+                  </a:tcPr>
+                </a:tc>
+                <a:tc>
+                  <a:txBody>
+                    <a:bodyPr/>
+                    <a:lstStyle/>
+                    <a:p>
+                      <a:pPr algn="ctr"/>
+                      <a:r>
+                        <a:rPr sz="1050" b="1">
+                          <a:solidFill>
+                            <a:srgbClr val="1A1A1A"/>
+                          </a:solidFill>
+                        </a:rPr>
+                        <a:t>21.80%</a:t>
+                      </a:r>
+                    </a:p>
+                  </a:txBody>
+                  <a:tcPr>
+                    <a:solidFill>
+                      <a:srgbClr val="EEF3FC"/>
+                    </a:solidFill>
+                  </a:tcPr>
+                </a:tc>
+                <a:tc>
+                  <a:txBody>
+                    <a:bodyPr/>
+                    <a:lstStyle/>
+                    <a:p>
+                      <a:pPr algn="ctr"/>
+                      <a:r>
+                        <a:rPr sz="1050" b="0">
+                          <a:solidFill>
+                            <a:srgbClr val="1A1A1A"/>
+                          </a:solidFill>
+                        </a:rPr>
+                        <a:t>10.17%</a:t>
+                      </a:r>
+                    </a:p>
+                  </a:txBody>
+                  <a:tcPr>
+                    <a:solidFill>
+                      <a:srgbClr val="EEF3FC"/>
+                    </a:solidFill>
+                  </a:tcPr>
+                </a:tc>
+                <a:tc>
+                  <a:txBody>
+                    <a:bodyPr/>
+                    <a:lstStyle/>
+                    <a:p>
+                      <a:pPr algn="ctr"/>
+                      <a:r>
+                        <a:rPr sz="1050" b="0">
+                          <a:solidFill>
+                            <a:srgbClr val="1A1A1A"/>
+                          </a:solidFill>
+                        </a:rPr>
+                        <a:t>9.17%</a:t>
+                      </a:r>
+                    </a:p>
+                  </a:txBody>
+                  <a:tcPr>
+                    <a:solidFill>
+                      <a:srgbClr val="EEF3FC"/>
+                    </a:solidFill>
+                  </a:tcPr>
+                </a:tc>
+              </a:tr>
+              <a:tr h="982980">
+                <a:tc>
+                  <a:txBody>
+                    <a:bodyPr/>
+                    <a:lstStyle/>
+                    <a:p>
+                      <a:pPr algn="ctr"/>
+                      <a:r>
+                        <a:rPr sz="1050" b="0">
+                          <a:solidFill>
+                            <a:srgbClr val="1A1A1A"/>
+                          </a:solidFill>
+                        </a:rPr>
+                        <a:t>PlantDoc</a:t>
+                      </a:r>
+                    </a:p>
+                  </a:txBody>
+                  <a:tcPr>
+                    <a:solidFill>
+                      <a:srgbClr val="FFFFFF"/>
+                    </a:solidFill>
+                  </a:tcPr>
+                </a:tc>
+                <a:tc>
+                  <a:txBody>
+                    <a:bodyPr/>
+                    <a:lstStyle/>
+                    <a:p>
+                      <a:pPr algn="ctr"/>
+                      <a:r>
+                        <a:rPr sz="1050" b="0">
+                          <a:solidFill>
+                            <a:srgbClr val="1A1A1A"/>
+                          </a:solidFill>
+                        </a:rPr>
+                        <a:t>8/10</a:t>
+                      </a:r>
+                    </a:p>
+                  </a:txBody>
+                  <a:tcPr>
+                    <a:solidFill>
+                      <a:srgbClr val="FFFFFF"/>
+                    </a:solidFill>
+                  </a:tcPr>
+                </a:tc>
+                <a:tc>
+                  <a:txBody>
+                    <a:bodyPr/>
+                    <a:lstStyle/>
+                    <a:p>
+                      <a:pPr algn="ctr"/>
+                      <a:r>
+                        <a:rPr sz="1050" b="1">
+                          <a:solidFill>
+                            <a:srgbClr val="1A1A1A"/>
+                          </a:solidFill>
+                        </a:rPr>
+                        <a:t>19.89%</a:t>
+                      </a:r>
+                    </a:p>
+                  </a:txBody>
+                  <a:tcPr>
+                    <a:solidFill>
+                      <a:srgbClr val="FFFFFF"/>
+                    </a:solidFill>
+                  </a:tcPr>
+                </a:tc>
+                <a:tc>
+                  <a:txBody>
+                    <a:bodyPr/>
+                    <a:lstStyle/>
+                    <a:p>
+                      <a:pPr algn="ctr"/>
+                      <a:r>
+                        <a:rPr sz="1050" b="0">
+                          <a:solidFill>
+                            <a:srgbClr val="1A1A1A"/>
+                          </a:solidFill>
+                        </a:rPr>
+                        <a:t>13.12%</a:t>
+                      </a:r>
+                    </a:p>
+                  </a:txBody>
+                  <a:tcPr>
+                    <a:solidFill>
+                      <a:srgbClr val="FFFFFF"/>
+                    </a:solidFill>
+                  </a:tcPr>
+                </a:tc>
+                <a:tc>
+                  <a:txBody>
+                    <a:bodyPr/>
+                    <a:lstStyle/>
+                    <a:p>
+                      <a:pPr algn="ctr"/>
+                      <a:r>
+                        <a:rPr sz="1050" b="0">
+                          <a:solidFill>
+                            <a:srgbClr val="1A1A1A"/>
+                          </a:solidFill>
+                        </a:rPr>
+                        <a:t>11.00%</a:t>
+                      </a:r>
+                    </a:p>
+                  </a:txBody>
+                  <a:tcPr>
+                    <a:solidFill>
+                      <a:srgbClr val="FFFFFF"/>
+                    </a:solidFill>
+                  </a:tcPr>
+                </a:tc>
+              </a:tr>
+            </a:tbl>
+          </a:graphicData>
+        </a:graphic>
+      </p:graphicFrame>
+    </p:spTree>
+  </p:cSld>
+  <p:clrMapOvr>
+    <a:masterClrMapping/>
+  </p:clrMapOvr>
+</p:sld>
+</file>
+
+<file path=ppt/slides/slide25.xml><?xml version="1.0" encoding="utf-8"?>
+<p:sld xmlns:a="http://schemas.openxmlformats.org/drawingml/2006/main" xmlns:p="http://schemas.openxmlformats.org/presentationml/2006/main" xmlns:r="http://schemas.openxmlformats.org/officeDocument/2006/relationships">
+  <p:cSld>
+    <p:bg>
+      <p:bgPr>
+        <a:solidFill>
+          <a:srgbClr val="FFFFFF"/>
+        </a:solidFill>
+        <a:effectLst/>
+      </p:bgPr>
+    </p:bg>
+    <p:spTree>
+      <p:nvGrpSpPr>
+        <p:cNvPr id="1" name=""/>
+        <p:cNvGrpSpPr/>
+        <p:nvPr/>
+      </p:nvGrpSpPr>
+      <p:grpSpPr/>
+      <p:sp>
+        <p:nvSpPr>
+          <p:cNvPr id="2" name="TextBox 1"/>
+          <p:cNvSpPr txBox="1"/>
+          <p:nvPr/>
+        </p:nvSpPr>
+        <p:spPr>
+          <a:xfrm>
+            <a:off x="548640" y="292608"/>
+            <a:ext cx="9144000" cy="292608"/>
+          </a:xfrm>
+          <a:prstGeom prst="rect">
+            <a:avLst/>
+          </a:prstGeom>
+          <a:noFill/>
+        </p:spPr>
+        <p:txBody>
+          <a:bodyPr wrap="square" anchor="t" lIns="0" rIns="0" tIns="0" bIns="0">
+            <a:spAutoFit/>
+          </a:bodyPr>
+          <a:lstStyle/>
+          <a:p>
+            <a:pPr algn="l"/>
+            <a:r>
+              <a:rPr sz="1050" b="1" i="0" spc="150">
+                <a:solidFill>
+                  <a:srgbClr val="2A78D6"/>
+                </a:solidFill>
+                <a:latin typeface="Calibri"/>
+              </a:rPr>
               <a:t>7단계 · WEB PROTOTYPE</a:t>
             </a:r>
           </a:p>
@@ -16462,7 +18306,7 @@
                 </a:solidFill>
                 <a:latin typeface="Calibri"/>
               </a:rPr>
-              <a:t>21</a:t>
+              <a:t>24</a:t>
             </a:r>
           </a:p>
         </p:txBody>
@@ -16475,7 +18319,7 @@
 </p:sld>
 </file>
 
-<file path=ppt/slides/slide23.xml><?xml version="1.0" encoding="utf-8"?>
+<file path=ppt/slides/slide26.xml><?xml version="1.0" encoding="utf-8"?>
 <p:sld xmlns:a="http://schemas.openxmlformats.org/drawingml/2006/main" xmlns:p="http://schemas.openxmlformats.org/presentationml/2006/main" xmlns:r="http://schemas.openxmlformats.org/officeDocument/2006/relationships">
   <p:cSld>
     <p:bg>
@@ -16981,7 +18825,7 @@
                 </a:solidFill>
                 <a:latin typeface="Calibri"/>
               </a:rPr>
-              <a:t>6단계 — 정확도·크기·강건성·일반화 중 우선순위를 함께 정하고 최종 모델을 선정한다. 선정 후 app/streamlit_app.py의 DEFAULT_MODEL만 교체하면 7단계 배포가 바로 완료된다.</a:t>
+              <a:t>6단계 완료 — tiny_cnn_c, 96px, bicubic을 최종 모델로 선정(경량화·내부·외부·학습시간 종합 고려). 8단계 1차 결과: AdaBN/TENT는 partial label-space mismatch로 오히려 성능이 악화됨을 확인 — 다음은 SHOT(partial-set 고려) 적용 검토. app/streamlit_app.py의 DEFAULT_MODEL 교체로 7단계 배포 가능.</a:t>
             </a:r>
           </a:p>
         </p:txBody>
@@ -17055,7 +18899,7 @@
                 </a:solidFill>
                 <a:latin typeface="Calibri"/>
               </a:rPr>
-              <a:t>PyTorch 전환 근거 · 4개 데이터셋 처리 과정(장수/클래스/방법/이유) · bbox 크롭 문제와 해결 · PlantDoc 품질검수 과정 · 모델 설계 원칙과 선택 이유 · 체크포인트 사고 · 조건별 강건성 원인 해석</a:t>
+              <a:t>최종 모델 선정(해상도×보간법 13개 조합 비교) · seed 42/123/2026 반복실험(재현성) · 체크포인트 재개 기능 · Domain Adaptation(AdaBN/TENT) 1차 실험과 negative transfer 발견</a:t>
             </a:r>
           </a:p>
         </p:txBody>
@@ -17090,7 +18934,7 @@
                 </a:solidFill>
                 <a:latin typeface="Calibri"/>
               </a:rPr>
-              <a:t>22</a:t>
+              <a:t>25</a:t>
             </a:r>
           </a:p>
         </p:txBody>

--- a/docs/CNN_토마토_병해분류_V2_진행보고.pptx
+++ b/docs/CNN_토마토_병해분류_V2_진행보고.pptx
@@ -29,6 +29,8 @@
     <p:sldId id="279" r:id="rId30"/>
     <p:sldId id="280" r:id="rId31"/>
     <p:sldId id="281" r:id="rId32"/>
+    <p:sldId id="282" r:id="rId33"/>
+    <p:sldId id="283" r:id="rId34"/>
     <p:sldId id="277" r:id="rId28"/>
     <p:sldId id="278" r:id="rId29"/>
   </p:sldIdLst>
@@ -15837,7 +15839,7 @@
                             <a:srgbClr val="1A1A1A"/>
                           </a:solidFill>
                         </a:rPr>
-                        <a:t>128px area (내부 정확도 최고)</a:t>
+                        <a:t>128px box (내부 정확도 최고)</a:t>
                       </a:r>
                     </a:p>
                   </a:txBody>
@@ -16702,13 +16704,13 @@
           <a:p>
             <a:pPr algn="l"/>
             <a:r>
-              <a:rPr sz="1050" b="1" i="0" spc="150">
+              <a:rPr sz="1050" b="1" i="0">
                 <a:solidFill>
                   <a:srgbClr val="2A78D6"/>
                 </a:solidFill>
                 <a:latin typeface="Calibri"/>
               </a:rPr>
-              <a:t>RESULT 7 · DOMAIN ADAPTATION</a:t>
+              <a:t>RESULT 7 · DOMAIN ADAPTATION (1/3)</a:t>
             </a:r>
           </a:p>
         </p:txBody>
@@ -16743,21 +16745,21 @@
                 </a:solidFill>
                 <a:latin typeface="Cambria"/>
               </a:rPr>
-              <a:t>Domain Adaptation (AdaBN / TENT) — 1차 실험</a:t>
-            </a:r>
-          </a:p>
-        </p:txBody>
-      </p:sp>
-      <p:sp>
-        <p:nvSpPr>
-          <p:cNvPr id="5" name="TextBox 4"/>
+              <a:t>AdaBN / TENT 적용 — 그러나 전부 악화 (Negative Transfer)</a:t>
+            </a:r>
+          </a:p>
+        </p:txBody>
+      </p:sp>
+      <p:sp>
+        <p:nvSpPr>
+          <p:cNvPr id="4" name="TextBox 3"/>
           <p:cNvSpPr txBox="1"/>
           <p:nvPr/>
         </p:nvSpPr>
         <p:spPr>
           <a:xfrm>
-            <a:off x="548640" y="5760720"/>
-            <a:ext cx="11091672" cy="457200"/>
+            <a:off x="548640" y="1250000"/>
+            <a:ext cx="11091672" cy="750000"/>
           </a:xfrm>
           <a:prstGeom prst="rect">
             <a:avLst/>
@@ -16772,63 +16774,28 @@
           <a:p>
             <a:pPr algn="l"/>
             <a:r>
-              <a:rPr sz="1050" b="0" i="1">
-                <a:solidFill>
-                  <a:srgbClr val="5B5E6B"/>
+              <a:rPr sz="1050" b="0" i="0">
+                <a:solidFill>
+                  <a:srgbClr val="1A1A1A"/>
                 </a:solidFill>
                 <a:latin typeface="Calibri"/>
               </a:rPr>
-              <a:t>최종 모델에 source-free·target-label 미사용 조건으로 AdaBN/TENT를 적용했으나 둘 다 모든 데이터셋에서 source-only보다 악화됐다 — 예측이 target에 없는 클래스로 쏠리는 negative transfer 때문이며, 클래스 겹침이 적을수록(Taiwan) 저하가 더 컸다. Partial label-space mismatch(PADA) 문제가 실측으로 재현된 것으로, SHOT 등 partial-set 고려 방법이 다음 후보다.</a:t>
-            </a:r>
-          </a:p>
-        </p:txBody>
-      </p:sp>
-      <p:sp>
-        <p:nvSpPr>
-          <p:cNvPr id="6" name="TextBox 5"/>
-          <p:cNvSpPr txBox="1"/>
-          <p:nvPr/>
-        </p:nvSpPr>
-        <p:spPr>
-          <a:xfrm>
-            <a:off x="11430000" y="6446520"/>
-            <a:ext cx="548640" cy="274320"/>
-          </a:xfrm>
-          <a:prstGeom prst="rect">
-            <a:avLst/>
-          </a:prstGeom>
-          <a:noFill/>
-        </p:spPr>
-        <p:txBody>
-          <a:bodyPr wrap="square" anchor="t" lIns="0" rIns="0" tIns="0" bIns="0">
-            <a:spAutoFit/>
-          </a:bodyPr>
-          <a:lstStyle/>
-          <a:p>
-            <a:pPr algn="r"/>
-            <a:r>
-              <a:rPr sz="1000" b="0" i="0">
-                <a:solidFill>
-                  <a:srgbClr val="5B5E6B"/>
-                </a:solidFill>
-                <a:latin typeface="Calibri"/>
-              </a:rPr>
-              <a:t>23</a:t>
+              <a:t>AdaBN(Li et al., 2016)은 target 이미지로 forward pass만 수행해 BN running 통계를 완전 교체한다(역전파 없음). TENT(Wang et al., ICLR 2021, 공식 코드 DequanWang/tent 구조 참고)는 BN affine(γ,β)만 열고 라벨 없이 예측 entropy를 최소화한다(Adam, 1 epoch). 두 방법 모두 target label은 어떤 단계에서도 사용하지 않는다(source-free·label-free).</a:t>
             </a:r>
           </a:p>
         </p:txBody>
       </p:sp>
       <p:graphicFrame>
         <p:nvGraphicFramePr>
-          <p:cNvPr id="7" name="Table 6"/>
+          <p:cNvPr id="7" name="Table"/>
           <p:cNvGraphicFramePr>
             <a:graphicFrameLocks noGrp="1"/>
           </p:cNvGraphicFramePr>
           <p:nvPr/>
         </p:nvGraphicFramePr>
         <p:xfrm>
-          <a:off x="548640" y="1600200"/>
-          <a:ext cx="8961120" cy="3931920"/>
+          <a:off x="548640" y="2100000"/>
+          <a:ext cx="8961120" cy="2200000"/>
         </p:xfrm>
         <a:graphic>
           <a:graphicData uri="http://schemas.openxmlformats.org/drawingml/2006/table">
@@ -16843,7 +16810,7 @@
                 <a:gridCol w="1645920"/>
                 <a:gridCol w="1645920"/>
               </a:tblGrid>
-              <a:tr h="982980">
+              <a:tr h="550000">
                 <a:tc>
                   <a:txBody>
                     <a:bodyPr/>
@@ -16955,7 +16922,7 @@
                   </a:tcPr>
                 </a:tc>
               </a:tr>
-              <a:tr h="982980">
+              <a:tr h="550000">
                 <a:tc>
                   <a:txBody>
                     <a:bodyPr/>
@@ -17056,7 +17023,7 @@
                             <a:srgbClr val="1A1A1A"/>
                           </a:solidFill>
                         </a:rPr>
-                        <a:t>7.64%</a:t>
+                        <a:t>8.28%</a:t>
                       </a:r>
                     </a:p>
                   </a:txBody>
@@ -17067,7 +17034,7 @@
                   </a:tcPr>
                 </a:tc>
               </a:tr>
-              <a:tr h="982980">
+              <a:tr h="550000">
                 <a:tc>
                   <a:txBody>
                     <a:bodyPr/>
@@ -17168,7 +17135,7 @@
                             <a:srgbClr val="1A1A1A"/>
                           </a:solidFill>
                         </a:rPr>
-                        <a:t>9.17%</a:t>
+                        <a:t>8.63%</a:t>
                       </a:r>
                     </a:p>
                   </a:txBody>
@@ -17179,7 +17146,7 @@
                   </a:tcPr>
                 </a:tc>
               </a:tr>
-              <a:tr h="982980">
+              <a:tr h="550000">
                 <a:tc>
                   <a:txBody>
                     <a:bodyPr/>
@@ -17280,7 +17247,7 @@
                             <a:srgbClr val="1A1A1A"/>
                           </a:solidFill>
                         </a:rPr>
-                        <a:t>11.00%</a:t>
+                        <a:t>11.14%</a:t>
                       </a:r>
                     </a:p>
                   </a:txBody>
@@ -17295,6 +17262,76 @@
           </a:graphicData>
         </a:graphic>
       </p:graphicFrame>
+      <p:sp>
+        <p:nvSpPr>
+          <p:cNvPr id="6" name="TextBox 4"/>
+          <p:cNvSpPr txBox="1"/>
+          <p:nvPr/>
+        </p:nvSpPr>
+        <p:spPr>
+          <a:xfrm>
+            <a:off x="548640" y="4450000"/>
+            <a:ext cx="11091672" cy="1150000"/>
+          </a:xfrm>
+          <a:prstGeom prst="rect">
+            <a:avLst/>
+          </a:prstGeom>
+          <a:noFill/>
+        </p:spPr>
+        <p:txBody>
+          <a:bodyPr wrap="square" anchor="t" lIns="0" rIns="0" tIns="0" bIns="0">
+            <a:spAutoFit/>
+          </a:bodyPr>
+          <a:lstStyle/>
+          <a:p>
+            <a:pPr algn="l"/>
+            <a:r>
+              <a:rPr sz="1050" b="0" i="1">
+                <a:solidFill>
+                  <a:srgbClr val="5B5E6B"/>
+                </a:solidFill>
+                <a:latin typeface="Calibri"/>
+              </a:rPr>
+              <a:t>예측 분포 분석(prediction_distribution.csv) 결과, AdaBN/TENT 적용 후 예측이 target에 없는 클래스로 쏠렸다 — partial label-space mismatch(PADA/ETN 이론)로 인한 negative transfer다. 클래스 겹침이 적을수록(Taiwan 3/10) 저하가 더 컸다. 다음 슬라이드에서 이 문제를 해결하는 class-restriction 마스킹을 다룬다.</a:t>
+            </a:r>
+          </a:p>
+        </p:txBody>
+      </p:sp>
+      <p:sp>
+        <p:nvSpPr>
+          <p:cNvPr id="8" name="TextBox 5"/>
+          <p:cNvSpPr txBox="1"/>
+          <p:nvPr/>
+        </p:nvSpPr>
+        <p:spPr>
+          <a:xfrm>
+            <a:off x="11430000" y="6446520"/>
+            <a:ext cx="548640" cy="274320"/>
+          </a:xfrm>
+          <a:prstGeom prst="rect">
+            <a:avLst/>
+          </a:prstGeom>
+          <a:noFill/>
+        </p:spPr>
+        <p:txBody>
+          <a:bodyPr wrap="square" anchor="t" lIns="0" rIns="0" tIns="0" bIns="0">
+            <a:spAutoFit/>
+          </a:bodyPr>
+          <a:lstStyle/>
+          <a:p>
+            <a:pPr algn="r"/>
+            <a:r>
+              <a:rPr sz="1000" b="0" i="0">
+                <a:solidFill>
+                  <a:srgbClr val="5B5E6B"/>
+                </a:solidFill>
+                <a:latin typeface="Calibri"/>
+              </a:rPr>
+              <a:t>23</a:t>
+            </a:r>
+          </a:p>
+        </p:txBody>
+      </p:sp>
     </p:spTree>
   </p:cSld>
   <p:clrMapOvr>
@@ -18306,7 +18343,7 @@
                 </a:solidFill>
                 <a:latin typeface="Calibri"/>
               </a:rPr>
-              <a:t>24</a:t>
+              <a:t>26</a:t>
             </a:r>
           </a:p>
         </p:txBody>
@@ -18907,6 +18944,1432 @@
       <p:sp>
         <p:nvSpPr>
           <p:cNvPr id="16" name="TextBox 15"/>
+          <p:cNvSpPr txBox="1"/>
+          <p:nvPr/>
+        </p:nvSpPr>
+        <p:spPr>
+          <a:xfrm>
+            <a:off x="11430000" y="6446520"/>
+            <a:ext cx="548640" cy="274320"/>
+          </a:xfrm>
+          <a:prstGeom prst="rect">
+            <a:avLst/>
+          </a:prstGeom>
+          <a:noFill/>
+        </p:spPr>
+        <p:txBody>
+          <a:bodyPr wrap="square" anchor="t" lIns="0" rIns="0" tIns="0" bIns="0">
+            <a:spAutoFit/>
+          </a:bodyPr>
+          <a:lstStyle/>
+          <a:p>
+            <a:pPr algn="r"/>
+            <a:r>
+              <a:rPr sz="1000" b="0" i="0">
+                <a:solidFill>
+                  <a:srgbClr val="5B5E6B"/>
+                </a:solidFill>
+                <a:latin typeface="Calibri"/>
+              </a:rPr>
+              <a:t>27</a:t>
+            </a:r>
+          </a:p>
+        </p:txBody>
+      </p:sp>
+    </p:spTree>
+  </p:cSld>
+  <p:clrMapOvr>
+    <a:masterClrMapping/>
+  </p:clrMapOvr>
+</p:sld>
+</file>
+
+<file path=ppt/slides/slide27.xml><?xml version="1.0" encoding="utf-8"?>
+<p:sld xmlns:a="http://schemas.openxmlformats.org/drawingml/2006/main" xmlns:p="http://schemas.openxmlformats.org/presentationml/2006/main" xmlns:r="http://schemas.openxmlformats.org/officeDocument/2006/relationships">
+  <p:cSld>
+    <p:bg>
+      <p:bgPr>
+        <a:solidFill>
+          <a:srgbClr val="FFFFFF"/>
+        </a:solidFill>
+        <a:effectLst/>
+      </p:bgPr>
+    </p:bg>
+    <p:spTree>
+      <p:nvGrpSpPr>
+        <p:cNvPr id="1" name=""/>
+        <p:cNvGrpSpPr/>
+        <p:nvPr/>
+      </p:nvGrpSpPr>
+      <p:grpSpPr/>
+      <p:sp>
+        <p:nvSpPr>
+          <p:cNvPr id="2" name="TextBox 1"/>
+          <p:cNvSpPr txBox="1"/>
+          <p:nvPr/>
+        </p:nvSpPr>
+        <p:spPr>
+          <a:xfrm>
+            <a:off x="548640" y="292608"/>
+            <a:ext cx="9144000" cy="292608"/>
+          </a:xfrm>
+          <a:prstGeom prst="rect">
+            <a:avLst/>
+          </a:prstGeom>
+          <a:noFill/>
+        </p:spPr>
+        <p:txBody>
+          <a:bodyPr wrap="square" anchor="t" lIns="0" rIns="0" tIns="0" bIns="0">
+            <a:spAutoFit/>
+          </a:bodyPr>
+          <a:lstStyle/>
+          <a:p>
+            <a:pPr algn="l"/>
+            <a:r>
+              <a:rPr sz="1050" b="1" i="0">
+                <a:solidFill>
+                  <a:srgbClr val="2A78D6"/>
+                </a:solidFill>
+                <a:latin typeface="Calibri"/>
+              </a:rPr>
+              <a:t>RESULT 7 · DOMAIN ADAPTATION (2/3)</a:t>
+            </a:r>
+          </a:p>
+        </p:txBody>
+      </p:sp>
+      <p:sp>
+        <p:nvSpPr>
+          <p:cNvPr id="3" name="TextBox 2"/>
+          <p:cNvSpPr txBox="1"/>
+          <p:nvPr/>
+        </p:nvSpPr>
+        <p:spPr>
+          <a:xfrm>
+            <a:off x="548640" y="566928"/>
+            <a:ext cx="10972800" cy="548640"/>
+          </a:xfrm>
+          <a:prstGeom prst="rect">
+            <a:avLst/>
+          </a:prstGeom>
+          <a:noFill/>
+        </p:spPr>
+        <p:txBody>
+          <a:bodyPr wrap="square" anchor="t" lIns="0" rIns="0" tIns="0" bIns="0">
+            <a:spAutoFit/>
+          </a:bodyPr>
+          <a:lstStyle/>
+          <a:p>
+            <a:pPr algn="l"/>
+            <a:r>
+              <a:rPr sz="2400" b="1" i="0">
+                <a:solidFill>
+                  <a:srgbClr val="1E2761"/>
+                </a:solidFill>
+                <a:latin typeface="Cambria"/>
+              </a:rPr>
+              <a:t>Class-restriction 마스킹으로 해결 + 다음 시도</a:t>
+            </a:r>
+          </a:p>
+        </p:txBody>
+      </p:sp>
+      <p:sp>
+        <p:nvSpPr>
+          <p:cNvPr id="4" name="TextBox 3"/>
+          <p:cNvSpPr txBox="1"/>
+          <p:nvPr/>
+        </p:nvSpPr>
+        <p:spPr>
+          <a:xfrm>
+            <a:off x="548640" y="1250000"/>
+            <a:ext cx="11091672" cy="750000"/>
+          </a:xfrm>
+          <a:prstGeom prst="rect">
+            <a:avLst/>
+          </a:prstGeom>
+          <a:noFill/>
+        </p:spPr>
+        <p:txBody>
+          <a:bodyPr wrap="square" anchor="t" lIns="0" rIns="0" tIns="0" bIns="0">
+            <a:spAutoFit/>
+          </a:bodyPr>
+          <a:lstStyle/>
+          <a:p>
+            <a:pPr algn="l"/>
+            <a:r>
+              <a:rPr sz="1050" b="0" i="0">
+                <a:solidFill>
+                  <a:srgbClr val="1A1A1A"/>
+                </a:solidFill>
+                <a:latin typeface="Calibri"/>
+              </a:rPr>
+              <a:t>class_info.py에 설계 단계부터 있던 클래스 매핑으로 target에 없는 클래스의 로짓을 -inf 마스킹한다(추가 학습 없음, zero-cost). 모든 데이터셋에서 마스킹 단독만으로도 source-only보다 개선됐다.</a:t>
+            </a:r>
+          </a:p>
+        </p:txBody>
+      </p:sp>
+      <p:graphicFrame>
+        <p:nvGraphicFramePr>
+          <p:cNvPr id="7" name="Table"/>
+          <p:cNvGraphicFramePr>
+            <a:graphicFrameLocks noGrp="1"/>
+          </p:cNvGraphicFramePr>
+          <p:nvPr/>
+        </p:nvGraphicFramePr>
+        <p:xfrm>
+          <a:off x="548640" y="2100000"/>
+          <a:ext cx="10200000" cy="2100000"/>
+        </p:xfrm>
+        <a:graphic>
+          <a:graphicData uri="http://schemas.openxmlformats.org/drawingml/2006/table">
+            <a:tbl>
+              <a:tblPr firstRow="1" bandRow="1">
+                <a:tableStyleId>{5C22544A-7EE6-4342-B048-85BDC9FD1C3A}</a:tableStyleId>
+              </a:tblPr>
+              <a:tblGrid>
+                <a:gridCol w="1900000"/>
+                <a:gridCol w="1850000"/>
+                <a:gridCol w="1850000"/>
+                <a:gridCol w="2300000"/>
+                <a:gridCol w="2300000"/>
+              </a:tblGrid>
+              <a:tr h="525000">
+                <a:tc>
+                  <a:txBody>
+                    <a:bodyPr/>
+                    <a:lstStyle/>
+                    <a:p>
+                      <a:pPr algn="ctr"/>
+                      <a:r>
+                        <a:rPr sz="1050" b="1">
+                          <a:solidFill>
+                            <a:srgbClr val="FFFFFF"/>
+                          </a:solidFill>
+                        </a:rPr>
+                        <a:t>데이터셋</a:t>
+                      </a:r>
+                    </a:p>
+                  </a:txBody>
+                  <a:tcPr>
+                    <a:solidFill>
+                      <a:srgbClr val="1E2761"/>
+                    </a:solidFill>
+                  </a:tcPr>
+                </a:tc>
+                <a:tc>
+                  <a:txBody>
+                    <a:bodyPr/>
+                    <a:lstStyle/>
+                    <a:p>
+                      <a:pPr algn="ctr"/>
+                      <a:r>
+                        <a:rPr sz="1050" b="1">
+                          <a:solidFill>
+                            <a:srgbClr val="FFFFFF"/>
+                          </a:solidFill>
+                        </a:rPr>
+                        <a:t>Source-only</a:t>
+                      </a:r>
+                    </a:p>
+                  </a:txBody>
+                  <a:tcPr>
+                    <a:solidFill>
+                      <a:srgbClr val="1E2761"/>
+                    </a:solidFill>
+                  </a:tcPr>
+                </a:tc>
+                <a:tc>
+                  <a:txBody>
+                    <a:bodyPr/>
+                    <a:lstStyle/>
+                    <a:p>
+                      <a:pPr algn="ctr"/>
+                      <a:r>
+                        <a:rPr sz="1050" b="1">
+                          <a:solidFill>
+                            <a:srgbClr val="FFFFFF"/>
+                          </a:solidFill>
+                        </a:rPr>
+                        <a:t>+마스킹만</a:t>
+                      </a:r>
+                    </a:p>
+                  </a:txBody>
+                  <a:tcPr>
+                    <a:solidFill>
+                      <a:srgbClr val="1E2761"/>
+                    </a:solidFill>
+                  </a:tcPr>
+                </a:tc>
+                <a:tc>
+                  <a:txBody>
+                    <a:bodyPr/>
+                    <a:lstStyle/>
+                    <a:p>
+                      <a:pPr algn="ctr"/>
+                      <a:r>
+                        <a:rPr sz="1050" b="1">
+                          <a:solidFill>
+                            <a:srgbClr val="FFFFFF"/>
+                          </a:solidFill>
+                        </a:rPr>
+                        <a:t>AdaBN+마스킹</a:t>
+                      </a:r>
+                    </a:p>
+                  </a:txBody>
+                  <a:tcPr>
+                    <a:solidFill>
+                      <a:srgbClr val="1E2761"/>
+                    </a:solidFill>
+                  </a:tcPr>
+                </a:tc>
+                <a:tc>
+                  <a:txBody>
+                    <a:bodyPr/>
+                    <a:lstStyle/>
+                    <a:p>
+                      <a:pPr algn="ctr"/>
+                      <a:r>
+                        <a:rPr sz="1050" b="1">
+                          <a:solidFill>
+                            <a:srgbClr val="FFFFFF"/>
+                          </a:solidFill>
+                        </a:rPr>
+                        <a:t>TENT+마스킹</a:t>
+                      </a:r>
+                    </a:p>
+                  </a:txBody>
+                  <a:tcPr>
+                    <a:solidFill>
+                      <a:srgbClr val="1E2761"/>
+                    </a:solidFill>
+                  </a:tcPr>
+                </a:tc>
+              </a:tr>
+              <a:tr h="525000">
+                <a:tc>
+                  <a:txBody>
+                    <a:bodyPr/>
+                    <a:lstStyle/>
+                    <a:p>
+                      <a:pPr algn="ctr"/>
+                      <a:r>
+                        <a:rPr sz="1050" b="0">
+                          <a:solidFill>
+                            <a:srgbClr val="1A1A1A"/>
+                          </a:solidFill>
+                        </a:rPr>
+                        <a:t>Taiwan</a:t>
+                      </a:r>
+                    </a:p>
+                  </a:txBody>
+                  <a:tcPr>
+                    <a:solidFill>
+                      <a:srgbClr val="FFFFFF"/>
+                    </a:solidFill>
+                  </a:tcPr>
+                </a:tc>
+                <a:tc>
+                  <a:txBody>
+                    <a:bodyPr/>
+                    <a:lstStyle/>
+                    <a:p>
+                      <a:pPr algn="ctr"/>
+                      <a:r>
+                        <a:rPr sz="1050" b="0">
+                          <a:solidFill>
+                            <a:srgbClr val="1A1A1A"/>
+                          </a:solidFill>
+                        </a:rPr>
+                        <a:t>27.39%</a:t>
+                      </a:r>
+                    </a:p>
+                  </a:txBody>
+                  <a:tcPr>
+                    <a:solidFill>
+                      <a:srgbClr val="FFFFFF"/>
+                    </a:solidFill>
+                  </a:tcPr>
+                </a:tc>
+                <a:tc>
+                  <a:txBody>
+                    <a:bodyPr/>
+                    <a:lstStyle/>
+                    <a:p>
+                      <a:pPr algn="ctr"/>
+                      <a:r>
+                        <a:rPr sz="1050" b="0">
+                          <a:solidFill>
+                            <a:srgbClr val="1A1A1A"/>
+                          </a:solidFill>
+                        </a:rPr>
+                        <a:t>32.48%</a:t>
+                      </a:r>
+                    </a:p>
+                  </a:txBody>
+                  <a:tcPr>
+                    <a:solidFill>
+                      <a:srgbClr val="FFFFFF"/>
+                    </a:solidFill>
+                  </a:tcPr>
+                </a:tc>
+                <a:tc>
+                  <a:txBody>
+                    <a:bodyPr/>
+                    <a:lstStyle/>
+                    <a:p>
+                      <a:pPr algn="ctr"/>
+                      <a:r>
+                        <a:rPr sz="1050" b="1">
+                          <a:solidFill>
+                            <a:srgbClr val="1A1A1A"/>
+                          </a:solidFill>
+                        </a:rPr>
+                        <a:t>38.85%</a:t>
+                      </a:r>
+                    </a:p>
+                  </a:txBody>
+                  <a:tcPr>
+                    <a:solidFill>
+                      <a:srgbClr val="FFFFFF"/>
+                    </a:solidFill>
+                  </a:tcPr>
+                </a:tc>
+                <a:tc>
+                  <a:txBody>
+                    <a:bodyPr/>
+                    <a:lstStyle/>
+                    <a:p>
+                      <a:pPr algn="ctr"/>
+                      <a:r>
+                        <a:rPr sz="1050" b="0">
+                          <a:solidFill>
+                            <a:srgbClr val="1A1A1A"/>
+                          </a:solidFill>
+                        </a:rPr>
+                        <a:t>30.25%</a:t>
+                      </a:r>
+                    </a:p>
+                  </a:txBody>
+                  <a:tcPr>
+                    <a:solidFill>
+                      <a:srgbClr val="FFFFFF"/>
+                    </a:solidFill>
+                  </a:tcPr>
+                </a:tc>
+              </a:tr>
+              <a:tr h="525000">
+                <a:tc>
+                  <a:txBody>
+                    <a:bodyPr/>
+                    <a:lstStyle/>
+                    <a:p>
+                      <a:pPr algn="ctr"/>
+                      <a:r>
+                        <a:rPr sz="1050" b="0">
+                          <a:solidFill>
+                            <a:srgbClr val="1A1A1A"/>
+                          </a:solidFill>
+                        </a:rPr>
+                        <a:t>Bangladesh</a:t>
+                      </a:r>
+                    </a:p>
+                  </a:txBody>
+                  <a:tcPr>
+                    <a:solidFill>
+                      <a:srgbClr val="EEF3FC"/>
+                    </a:solidFill>
+                  </a:tcPr>
+                </a:tc>
+                <a:tc>
+                  <a:txBody>
+                    <a:bodyPr/>
+                    <a:lstStyle/>
+                    <a:p>
+                      <a:pPr algn="ctr"/>
+                      <a:r>
+                        <a:rPr sz="1050" b="0">
+                          <a:solidFill>
+                            <a:srgbClr val="1A1A1A"/>
+                          </a:solidFill>
+                        </a:rPr>
+                        <a:t>21.80%</a:t>
+                      </a:r>
+                    </a:p>
+                  </a:txBody>
+                  <a:tcPr>
+                    <a:solidFill>
+                      <a:srgbClr val="EEF3FC"/>
+                    </a:solidFill>
+                  </a:tcPr>
+                </a:tc>
+                <a:tc>
+                  <a:txBody>
+                    <a:bodyPr/>
+                    <a:lstStyle/>
+                    <a:p>
+                      <a:pPr algn="ctr"/>
+                      <a:r>
+                        <a:rPr sz="1050" b="1">
+                          <a:solidFill>
+                            <a:srgbClr val="1A1A1A"/>
+                          </a:solidFill>
+                        </a:rPr>
+                        <a:t>22.34%</a:t>
+                      </a:r>
+                    </a:p>
+                  </a:txBody>
+                  <a:tcPr>
+                    <a:solidFill>
+                      <a:srgbClr val="EEF3FC"/>
+                    </a:solidFill>
+                  </a:tcPr>
+                </a:tc>
+                <a:tc>
+                  <a:txBody>
+                    <a:bodyPr/>
+                    <a:lstStyle/>
+                    <a:p>
+                      <a:pPr algn="ctr"/>
+                      <a:r>
+                        <a:rPr sz="1050" b="0">
+                          <a:solidFill>
+                            <a:srgbClr val="1A1A1A"/>
+                          </a:solidFill>
+                        </a:rPr>
+                        <a:t>15.71%</a:t>
+                      </a:r>
+                    </a:p>
+                  </a:txBody>
+                  <a:tcPr>
+                    <a:solidFill>
+                      <a:srgbClr val="EEF3FC"/>
+                    </a:solidFill>
+                  </a:tcPr>
+                </a:tc>
+                <a:tc>
+                  <a:txBody>
+                    <a:bodyPr/>
+                    <a:lstStyle/>
+                    <a:p>
+                      <a:pPr algn="ctr"/>
+                      <a:r>
+                        <a:rPr sz="1050" b="0">
+                          <a:solidFill>
+                            <a:srgbClr val="1A1A1A"/>
+                          </a:solidFill>
+                        </a:rPr>
+                        <a:t>14.71%</a:t>
+                      </a:r>
+                    </a:p>
+                  </a:txBody>
+                  <a:tcPr>
+                    <a:solidFill>
+                      <a:srgbClr val="EEF3FC"/>
+                    </a:solidFill>
+                  </a:tcPr>
+                </a:tc>
+              </a:tr>
+              <a:tr h="525000">
+                <a:tc>
+                  <a:txBody>
+                    <a:bodyPr/>
+                    <a:lstStyle/>
+                    <a:p>
+                      <a:pPr algn="ctr"/>
+                      <a:r>
+                        <a:rPr sz="1050" b="0">
+                          <a:solidFill>
+                            <a:srgbClr val="1A1A1A"/>
+                          </a:solidFill>
+                        </a:rPr>
+                        <a:t>PlantDoc</a:t>
+                      </a:r>
+                    </a:p>
+                  </a:txBody>
+                  <a:tcPr>
+                    <a:solidFill>
+                      <a:srgbClr val="FFFFFF"/>
+                    </a:solidFill>
+                  </a:tcPr>
+                </a:tc>
+                <a:tc>
+                  <a:txBody>
+                    <a:bodyPr/>
+                    <a:lstStyle/>
+                    <a:p>
+                      <a:pPr algn="ctr"/>
+                      <a:r>
+                        <a:rPr sz="1050" b="0">
+                          <a:solidFill>
+                            <a:srgbClr val="1A1A1A"/>
+                          </a:solidFill>
+                        </a:rPr>
+                        <a:t>19.89%</a:t>
+                      </a:r>
+                    </a:p>
+                  </a:txBody>
+                  <a:tcPr>
+                    <a:solidFill>
+                      <a:srgbClr val="FFFFFF"/>
+                    </a:solidFill>
+                  </a:tcPr>
+                </a:tc>
+                <a:tc>
+                  <a:txBody>
+                    <a:bodyPr/>
+                    <a:lstStyle/>
+                    <a:p>
+                      <a:pPr algn="ctr"/>
+                      <a:r>
+                        <a:rPr sz="1050" b="1">
+                          <a:solidFill>
+                            <a:srgbClr val="1A1A1A"/>
+                          </a:solidFill>
+                        </a:rPr>
+                        <a:t>20.31%</a:t>
+                      </a:r>
+                    </a:p>
+                  </a:txBody>
+                  <a:tcPr>
+                    <a:solidFill>
+                      <a:srgbClr val="FFFFFF"/>
+                    </a:solidFill>
+                  </a:tcPr>
+                </a:tc>
+                <a:tc>
+                  <a:txBody>
+                    <a:bodyPr/>
+                    <a:lstStyle/>
+                    <a:p>
+                      <a:pPr algn="ctr"/>
+                      <a:r>
+                        <a:rPr sz="1050" b="0">
+                          <a:solidFill>
+                            <a:srgbClr val="1A1A1A"/>
+                          </a:solidFill>
+                        </a:rPr>
+                        <a:t>14.81%</a:t>
+                      </a:r>
+                    </a:p>
+                  </a:txBody>
+                  <a:tcPr>
+                    <a:solidFill>
+                      <a:srgbClr val="FFFFFF"/>
+                    </a:solidFill>
+                  </a:tcPr>
+                </a:tc>
+                <a:tc>
+                  <a:txBody>
+                    <a:bodyPr/>
+                    <a:lstStyle/>
+                    <a:p>
+                      <a:pPr algn="ctr"/>
+                      <a:r>
+                        <a:rPr sz="1050" b="0">
+                          <a:solidFill>
+                            <a:srgbClr val="1A1A1A"/>
+                          </a:solidFill>
+                        </a:rPr>
+                        <a:t>12.41%</a:t>
+                      </a:r>
+                    </a:p>
+                  </a:txBody>
+                  <a:tcPr>
+                    <a:solidFill>
+                      <a:srgbClr val="FFFFFF"/>
+                    </a:solidFill>
+                  </a:tcPr>
+                </a:tc>
+              </a:tr>
+            </a:tbl>
+          </a:graphicData>
+        </a:graphic>
+      </p:graphicFrame>
+      <p:sp>
+        <p:nvSpPr>
+          <p:cNvPr id="6" name="TextBox 4"/>
+          <p:cNvSpPr txBox="1"/>
+          <p:nvPr/>
+        </p:nvSpPr>
+        <p:spPr>
+          <a:xfrm>
+            <a:off x="548640" y="4400000"/>
+            <a:ext cx="11091672" cy="900000"/>
+          </a:xfrm>
+          <a:prstGeom prst="rect">
+            <a:avLst/>
+          </a:prstGeom>
+          <a:noFill/>
+        </p:spPr>
+        <p:txBody>
+          <a:bodyPr wrap="square" anchor="t" lIns="0" rIns="0" tIns="0" bIns="0">
+            <a:spAutoFit/>
+          </a:bodyPr>
+          <a:lstStyle/>
+          <a:p>
+            <a:pPr algn="l"/>
+            <a:r>
+              <a:rPr sz="1050" b="0" i="1">
+                <a:solidFill>
+                  <a:srgbClr val="5B5E6B"/>
+                </a:solidFill>
+                <a:latin typeface="Calibri"/>
+              </a:rPr>
+              <a:t>클래스 3개뿐인 Taiwan은 AdaBN+마스킹이 최고다(38.85%, source 대비 +11.5%p) — BN 통계 교체의 부작용이 작기 때문. 반면 클래스가 많고 불균형한 Bangladesh(6개)·PlantDoc(8개)은 AdaBN/TENT가 마스킹과 결합해도 마스킹 단독보다 나쁘다 — BN 통계 전체 교체 자체가 여전히 해롭다는 뜻이다.</a:t>
+            </a:r>
+          </a:p>
+        </p:txBody>
+      </p:sp>
+      <p:sp>
+        <p:nvSpPr>
+          <p:cNvPr id="9" name="TextBox 4"/>
+          <p:cNvSpPr txBox="1"/>
+          <p:nvPr/>
+        </p:nvSpPr>
+        <p:spPr>
+          <a:xfrm>
+            <a:off x="548640" y="5400000"/>
+            <a:ext cx="11091672" cy="850000"/>
+          </a:xfrm>
+          <a:prstGeom prst="rect">
+            <a:avLst/>
+          </a:prstGeom>
+          <a:noFill/>
+        </p:spPr>
+        <p:txBody>
+          <a:bodyPr wrap="square" anchor="t" lIns="0" rIns="0" tIns="0" bIns="0">
+            <a:spAutoFit/>
+          </a:bodyPr>
+          <a:lstStyle/>
+          <a:p>
+            <a:pPr algn="l"/>
+            <a:r>
+              <a:rPr sz="1050" b="0" i="1">
+                <a:solidFill>
+                  <a:srgbClr val="5B5E6B"/>
+                </a:solidFill>
+                <a:latin typeface="Calibri"/>
+              </a:rPr>
+              <a:t>다음 시도: ① 마스킹을 적응 과정(entropy loss·BN 통계 계산) 자체에 반영하는 mask-aware adaptation  ② AdaBN 통계 완전 교체 대신 source/target 블렌딩으로 부작용 완화  ③ seed42 단일 결과 → 3-seed 통계 검증  ④ 개선이 제한적이면 보류했던 SHOT(마스킹된 라벨 공간 내 pseudo-labeling) 재검토</a:t>
+            </a:r>
+          </a:p>
+        </p:txBody>
+      </p:sp>
+      <p:sp>
+        <p:nvSpPr>
+          <p:cNvPr id="8" name="TextBox 5"/>
+          <p:cNvSpPr txBox="1"/>
+          <p:nvPr/>
+        </p:nvSpPr>
+        <p:spPr>
+          <a:xfrm>
+            <a:off x="11430000" y="6446520"/>
+            <a:ext cx="548640" cy="274320"/>
+          </a:xfrm>
+          <a:prstGeom prst="rect">
+            <a:avLst/>
+          </a:prstGeom>
+          <a:noFill/>
+        </p:spPr>
+        <p:txBody>
+          <a:bodyPr wrap="square" anchor="t" lIns="0" rIns="0" tIns="0" bIns="0">
+            <a:spAutoFit/>
+          </a:bodyPr>
+          <a:lstStyle/>
+          <a:p>
+            <a:pPr algn="r"/>
+            <a:r>
+              <a:rPr sz="1000" b="0" i="0">
+                <a:solidFill>
+                  <a:srgbClr val="5B5E6B"/>
+                </a:solidFill>
+                <a:latin typeface="Calibri"/>
+              </a:rPr>
+              <a:t>24</a:t>
+            </a:r>
+          </a:p>
+        </p:txBody>
+      </p:sp>
+    </p:spTree>
+  </p:cSld>
+  <p:clrMapOvr>
+    <a:masterClrMapping/>
+  </p:clrMapOvr>
+</p:sld>
+</file>
+
+<file path=ppt/slides/slide28.xml><?xml version="1.0" encoding="utf-8"?>
+<p:sld xmlns:a="http://schemas.openxmlformats.org/drawingml/2006/main" xmlns:p="http://schemas.openxmlformats.org/presentationml/2006/main" xmlns:r="http://schemas.openxmlformats.org/officeDocument/2006/relationships">
+  <p:cSld>
+    <p:bg>
+      <p:bgPr>
+        <a:solidFill>
+          <a:srgbClr val="FFFFFF"/>
+        </a:solidFill>
+        <a:effectLst/>
+      </p:bgPr>
+    </p:bg>
+    <p:spTree>
+      <p:nvGrpSpPr>
+        <p:cNvPr id="1" name=""/>
+        <p:cNvGrpSpPr/>
+        <p:nvPr/>
+      </p:nvGrpSpPr>
+      <p:grpSpPr/>
+      <p:sp>
+        <p:nvSpPr>
+          <p:cNvPr id="2" name="TextBox 1"/>
+          <p:cNvSpPr txBox="1"/>
+          <p:nvPr/>
+        </p:nvSpPr>
+        <p:spPr>
+          <a:xfrm>
+            <a:off x="548640" y="292608"/>
+            <a:ext cx="9144000" cy="292608"/>
+          </a:xfrm>
+          <a:prstGeom prst="rect">
+            <a:avLst/>
+          </a:prstGeom>
+          <a:noFill/>
+        </p:spPr>
+        <p:txBody>
+          <a:bodyPr wrap="square" anchor="t" lIns="0" rIns="0" tIns="0" bIns="0">
+            <a:spAutoFit/>
+          </a:bodyPr>
+          <a:lstStyle/>
+          <a:p>
+            <a:pPr algn="l"/>
+            <a:r>
+              <a:rPr sz="1050" b="1" i="0">
+                <a:solidFill>
+                  <a:srgbClr val="2A78D6"/>
+                </a:solidFill>
+                <a:latin typeface="Calibri"/>
+              </a:rPr>
+              <a:t>RESULT 7 · DOMAIN ADAPTATION (3/3)</a:t>
+            </a:r>
+          </a:p>
+        </p:txBody>
+      </p:sp>
+      <p:sp>
+        <p:nvSpPr>
+          <p:cNvPr id="3" name="TextBox 2"/>
+          <p:cNvSpPr txBox="1"/>
+          <p:nvPr/>
+        </p:nvSpPr>
+        <p:spPr>
+          <a:xfrm>
+            <a:off x="548640" y="566928"/>
+            <a:ext cx="10972800" cy="548640"/>
+          </a:xfrm>
+          <a:prstGeom prst="rect">
+            <a:avLst/>
+          </a:prstGeom>
+          <a:noFill/>
+        </p:spPr>
+        <p:txBody>
+          <a:bodyPr wrap="square" anchor="t" lIns="0" rIns="0" tIns="0" bIns="0">
+            <a:spAutoFit/>
+          </a:bodyPr>
+          <a:lstStyle/>
+          <a:p>
+            <a:pPr algn="l"/>
+            <a:r>
+              <a:rPr sz="2400" b="1" i="0">
+                <a:solidFill>
+                  <a:srgbClr val="1E2761"/>
+                </a:solidFill>
+                <a:latin typeface="Cambria"/>
+              </a:rPr>
+              <a:t>다음 시도 3가지 — SHOT이 최종 승자</a:t>
+            </a:r>
+          </a:p>
+        </p:txBody>
+      </p:sp>
+      <p:sp>
+        <p:nvSpPr>
+          <p:cNvPr id="4" name="TextBox 3"/>
+          <p:cNvSpPr txBox="1"/>
+          <p:nvPr/>
+        </p:nvSpPr>
+        <p:spPr>
+          <a:xfrm>
+            <a:off x="548640" y="1250000"/>
+            <a:ext cx="11091672" cy="750000"/>
+          </a:xfrm>
+          <a:prstGeom prst="rect">
+            <a:avLst/>
+          </a:prstGeom>
+          <a:noFill/>
+        </p:spPr>
+        <p:txBody>
+          <a:bodyPr wrap="square" anchor="t" lIns="0" rIns="0" tIns="0" bIns="0">
+            <a:spAutoFit/>
+          </a:bodyPr>
+          <a:lstStyle/>
+          <a:p>
+            <a:pPr algn="l"/>
+            <a:r>
+              <a:rPr sz="1050" b="0" i="0">
+                <a:solidFill>
+                  <a:srgbClr val="1A1A1A"/>
+                </a:solidFill>
+                <a:latin typeface="Calibri"/>
+              </a:rPr>
+              <a:t>① TENT에 batch-diversity 정규화 추가(collapse 방지) ② AdaBN을 완전 교체 대신 momentum 블렌딩(0.05~0.3) ③ SHOT(Liang et al., ICML 2020) — pseudo-labeling+information-maximization으로 classifier는 고정하고 feature extractor 전체를 미세조정. 셋 다 class-restriction 마스킹과 결합해 비교했다.</a:t>
+            </a:r>
+          </a:p>
+        </p:txBody>
+      </p:sp>
+      <p:graphicFrame>
+        <p:nvGraphicFramePr>
+          <p:cNvPr id="7" name="Table"/>
+          <p:cNvGraphicFramePr>
+            <a:graphicFrameLocks noGrp="1"/>
+          </p:cNvGraphicFramePr>
+          <p:nvPr/>
+        </p:nvGraphicFramePr>
+        <p:xfrm>
+          <a:off x="548640" y="2100000"/>
+          <a:ext cx="10950000" cy="2100000"/>
+        </p:xfrm>
+        <a:graphic>
+          <a:graphicData uri="http://schemas.openxmlformats.org/drawingml/2006/table">
+            <a:tbl>
+              <a:tblPr firstRow="1" bandRow="1">
+                <a:tableStyleId>{5C22544A-7EE6-4342-B048-85BDC9FD1C3A}</a:tableStyleId>
+              </a:tblPr>
+              <a:tblGrid>
+                <a:gridCol w="1900000"/>
+                <a:gridCol w="2100000"/>
+                <a:gridCol w="2100000"/>
+                <a:gridCol w="2550000"/>
+                <a:gridCol w="2300000"/>
+              </a:tblGrid>
+              <a:tr h="525000">
+                <a:tc>
+                  <a:txBody>
+                    <a:bodyPr/>
+                    <a:lstStyle/>
+                    <a:p>
+                      <a:pPr algn="ctr"/>
+                      <a:r>
+                        <a:rPr sz="1050" b="1">
+                          <a:solidFill>
+                            <a:srgbClr val="FFFFFF"/>
+                          </a:solidFill>
+                        </a:rPr>
+                        <a:t>데이터셋</a:t>
+                      </a:r>
+                    </a:p>
+                  </a:txBody>
+                  <a:tcPr>
+                    <a:solidFill>
+                      <a:srgbClr val="1E2761"/>
+                    </a:solidFill>
+                  </a:tcPr>
+                </a:tc>
+                <a:tc>
+                  <a:txBody>
+                    <a:bodyPr/>
+                    <a:lstStyle/>
+                    <a:p>
+                      <a:pPr algn="ctr"/>
+                      <a:r>
+                        <a:rPr sz="1050" b="1">
+                          <a:solidFill>
+                            <a:srgbClr val="FFFFFF"/>
+                          </a:solidFill>
+                        </a:rPr>
+                        <a:t>Source+마스킹</a:t>
+                      </a:r>
+                    </a:p>
+                  </a:txBody>
+                  <a:tcPr>
+                    <a:solidFill>
+                      <a:srgbClr val="1E2761"/>
+                    </a:solidFill>
+                  </a:tcPr>
+                </a:tc>
+                <a:tc>
+                  <a:txBody>
+                    <a:bodyPr/>
+                    <a:lstStyle/>
+                    <a:p>
+                      <a:pPr algn="ctr"/>
+                      <a:r>
+                        <a:rPr sz="1050" b="1">
+                          <a:solidFill>
+                            <a:srgbClr val="FFFFFF"/>
+                          </a:solidFill>
+                        </a:rPr>
+                        <a:t>AdaBN+마스킹</a:t>
+                      </a:r>
+                    </a:p>
+                  </a:txBody>
+                  <a:tcPr>
+                    <a:solidFill>
+                      <a:srgbClr val="1E2761"/>
+                    </a:solidFill>
+                  </a:tcPr>
+                </a:tc>
+                <a:tc>
+                  <a:txBody>
+                    <a:bodyPr/>
+                    <a:lstStyle/>
+                    <a:p>
+                      <a:pPr algn="ctr"/>
+                      <a:r>
+                        <a:rPr sz="1050" b="1">
+                          <a:solidFill>
+                            <a:srgbClr val="FFFFFF"/>
+                          </a:solidFill>
+                        </a:rPr>
+                        <a:t>TENT+마스킹(수정판)</a:t>
+                      </a:r>
+                    </a:p>
+                  </a:txBody>
+                  <a:tcPr>
+                    <a:solidFill>
+                      <a:srgbClr val="1E2761"/>
+                    </a:solidFill>
+                  </a:tcPr>
+                </a:tc>
+                <a:tc>
+                  <a:txBody>
+                    <a:bodyPr/>
+                    <a:lstStyle/>
+                    <a:p>
+                      <a:pPr algn="ctr"/>
+                      <a:r>
+                        <a:rPr sz="1050" b="1">
+                          <a:solidFill>
+                            <a:srgbClr val="FFFFFF"/>
+                          </a:solidFill>
+                        </a:rPr>
+                        <a:t>SHOT+마스킹</a:t>
+                      </a:r>
+                    </a:p>
+                  </a:txBody>
+                  <a:tcPr>
+                    <a:solidFill>
+                      <a:srgbClr val="1E2761"/>
+                    </a:solidFill>
+                  </a:tcPr>
+                </a:tc>
+              </a:tr>
+              <a:tr h="525000">
+                <a:tc>
+                  <a:txBody>
+                    <a:bodyPr/>
+                    <a:lstStyle/>
+                    <a:p>
+                      <a:pPr algn="ctr"/>
+                      <a:r>
+                        <a:rPr sz="1050" b="0">
+                          <a:solidFill>
+                            <a:srgbClr val="1A1A1A"/>
+                          </a:solidFill>
+                        </a:rPr>
+                        <a:t>Taiwan</a:t>
+                      </a:r>
+                    </a:p>
+                  </a:txBody>
+                  <a:tcPr>
+                    <a:solidFill>
+                      <a:srgbClr val="FFFFFF"/>
+                    </a:solidFill>
+                  </a:tcPr>
+                </a:tc>
+                <a:tc>
+                  <a:txBody>
+                    <a:bodyPr/>
+                    <a:lstStyle/>
+                    <a:p>
+                      <a:pPr algn="ctr"/>
+                      <a:r>
+                        <a:rPr sz="1050" b="0">
+                          <a:solidFill>
+                            <a:srgbClr val="1A1A1A"/>
+                          </a:solidFill>
+                        </a:rPr>
+                        <a:t>32.48%</a:t>
+                      </a:r>
+                    </a:p>
+                  </a:txBody>
+                  <a:tcPr>
+                    <a:solidFill>
+                      <a:srgbClr val="FFFFFF"/>
+                    </a:solidFill>
+                  </a:tcPr>
+                </a:tc>
+                <a:tc>
+                  <a:txBody>
+                    <a:bodyPr/>
+                    <a:lstStyle/>
+                    <a:p>
+                      <a:pPr algn="ctr"/>
+                      <a:r>
+                        <a:rPr sz="1050" b="1">
+                          <a:solidFill>
+                            <a:srgbClr val="1A1A1A"/>
+                          </a:solidFill>
+                        </a:rPr>
+                        <a:t>38.85%</a:t>
+                      </a:r>
+                    </a:p>
+                  </a:txBody>
+                  <a:tcPr>
+                    <a:solidFill>
+                      <a:srgbClr val="FFFFFF"/>
+                    </a:solidFill>
+                  </a:tcPr>
+                </a:tc>
+                <a:tc>
+                  <a:txBody>
+                    <a:bodyPr/>
+                    <a:lstStyle/>
+                    <a:p>
+                      <a:pPr algn="ctr"/>
+                      <a:r>
+                        <a:rPr sz="1050" b="0">
+                          <a:solidFill>
+                            <a:srgbClr val="1A1A1A"/>
+                          </a:solidFill>
+                        </a:rPr>
+                        <a:t>29.94%</a:t>
+                      </a:r>
+                    </a:p>
+                  </a:txBody>
+                  <a:tcPr>
+                    <a:solidFill>
+                      <a:srgbClr val="FFFFFF"/>
+                    </a:solidFill>
+                  </a:tcPr>
+                </a:tc>
+                <a:tc>
+                  <a:txBody>
+                    <a:bodyPr/>
+                    <a:lstStyle/>
+                    <a:p>
+                      <a:pPr algn="ctr"/>
+                      <a:r>
+                        <a:rPr sz="1050" b="0">
+                          <a:solidFill>
+                            <a:srgbClr val="1A1A1A"/>
+                          </a:solidFill>
+                        </a:rPr>
+                        <a:t>38.54%</a:t>
+                      </a:r>
+                    </a:p>
+                  </a:txBody>
+                  <a:tcPr>
+                    <a:solidFill>
+                      <a:srgbClr val="FFFFFF"/>
+                    </a:solidFill>
+                  </a:tcPr>
+                </a:tc>
+              </a:tr>
+              <a:tr h="525000">
+                <a:tc>
+                  <a:txBody>
+                    <a:bodyPr/>
+                    <a:lstStyle/>
+                    <a:p>
+                      <a:pPr algn="ctr"/>
+                      <a:r>
+                        <a:rPr sz="1050" b="0">
+                          <a:solidFill>
+                            <a:srgbClr val="1A1A1A"/>
+                          </a:solidFill>
+                        </a:rPr>
+                        <a:t>Bangladesh</a:t>
+                      </a:r>
+                    </a:p>
+                  </a:txBody>
+                  <a:tcPr>
+                    <a:solidFill>
+                      <a:srgbClr val="EEF3FC"/>
+                    </a:solidFill>
+                  </a:tcPr>
+                </a:tc>
+                <a:tc>
+                  <a:txBody>
+                    <a:bodyPr/>
+                    <a:lstStyle/>
+                    <a:p>
+                      <a:pPr algn="ctr"/>
+                      <a:r>
+                        <a:rPr sz="1050" b="0">
+                          <a:solidFill>
+                            <a:srgbClr val="1A1A1A"/>
+                          </a:solidFill>
+                        </a:rPr>
+                        <a:t>22.34%</a:t>
+                      </a:r>
+                    </a:p>
+                  </a:txBody>
+                  <a:tcPr>
+                    <a:solidFill>
+                      <a:srgbClr val="EEF3FC"/>
+                    </a:solidFill>
+                  </a:tcPr>
+                </a:tc>
+                <a:tc>
+                  <a:txBody>
+                    <a:bodyPr/>
+                    <a:lstStyle/>
+                    <a:p>
+                      <a:pPr algn="ctr"/>
+                      <a:r>
+                        <a:rPr sz="1050" b="0">
+                          <a:solidFill>
+                            <a:srgbClr val="1A1A1A"/>
+                          </a:solidFill>
+                        </a:rPr>
+                        <a:t>15.71%</a:t>
+                      </a:r>
+                    </a:p>
+                  </a:txBody>
+                  <a:tcPr>
+                    <a:solidFill>
+                      <a:srgbClr val="EEF3FC"/>
+                    </a:solidFill>
+                  </a:tcPr>
+                </a:tc>
+                <a:tc>
+                  <a:txBody>
+                    <a:bodyPr/>
+                    <a:lstStyle/>
+                    <a:p>
+                      <a:pPr algn="ctr"/>
+                      <a:r>
+                        <a:rPr sz="1050" b="0">
+                          <a:solidFill>
+                            <a:srgbClr val="1A1A1A"/>
+                          </a:solidFill>
+                        </a:rPr>
+                        <a:t>13.71%</a:t>
+                      </a:r>
+                    </a:p>
+                  </a:txBody>
+                  <a:tcPr>
+                    <a:solidFill>
+                      <a:srgbClr val="EEF3FC"/>
+                    </a:solidFill>
+                  </a:tcPr>
+                </a:tc>
+                <a:tc>
+                  <a:txBody>
+                    <a:bodyPr/>
+                    <a:lstStyle/>
+                    <a:p>
+                      <a:pPr algn="ctr"/>
+                      <a:r>
+                        <a:rPr sz="1050" b="1">
+                          <a:solidFill>
+                            <a:srgbClr val="1A1A1A"/>
+                          </a:solidFill>
+                        </a:rPr>
+                        <a:t>27.97%</a:t>
+                      </a:r>
+                    </a:p>
+                  </a:txBody>
+                  <a:tcPr>
+                    <a:solidFill>
+                      <a:srgbClr val="EEF3FC"/>
+                    </a:solidFill>
+                  </a:tcPr>
+                </a:tc>
+              </a:tr>
+              <a:tr h="525000">
+                <a:tc>
+                  <a:txBody>
+                    <a:bodyPr/>
+                    <a:lstStyle/>
+                    <a:p>
+                      <a:pPr algn="ctr"/>
+                      <a:r>
+                        <a:rPr sz="1050" b="0">
+                          <a:solidFill>
+                            <a:srgbClr val="1A1A1A"/>
+                          </a:solidFill>
+                        </a:rPr>
+                        <a:t>PlantDoc</a:t>
+                      </a:r>
+                    </a:p>
+                  </a:txBody>
+                  <a:tcPr>
+                    <a:solidFill>
+                      <a:srgbClr val="FFFFFF"/>
+                    </a:solidFill>
+                  </a:tcPr>
+                </a:tc>
+                <a:tc>
+                  <a:txBody>
+                    <a:bodyPr/>
+                    <a:lstStyle/>
+                    <a:p>
+                      <a:pPr algn="ctr"/>
+                      <a:r>
+                        <a:rPr sz="1050" b="1">
+                          <a:solidFill>
+                            <a:srgbClr val="1A1A1A"/>
+                          </a:solidFill>
+                        </a:rPr>
+                        <a:t>20.31%</a:t>
+                      </a:r>
+                    </a:p>
+                  </a:txBody>
+                  <a:tcPr>
+                    <a:solidFill>
+                      <a:srgbClr val="FFFFFF"/>
+                    </a:solidFill>
+                  </a:tcPr>
+                </a:tc>
+                <a:tc>
+                  <a:txBody>
+                    <a:bodyPr/>
+                    <a:lstStyle/>
+                    <a:p>
+                      <a:pPr algn="ctr"/>
+                      <a:r>
+                        <a:rPr sz="1050" b="0">
+                          <a:solidFill>
+                            <a:srgbClr val="1A1A1A"/>
+                          </a:solidFill>
+                        </a:rPr>
+                        <a:t>14.81%</a:t>
+                      </a:r>
+                    </a:p>
+                  </a:txBody>
+                  <a:tcPr>
+                    <a:solidFill>
+                      <a:srgbClr val="FFFFFF"/>
+                    </a:solidFill>
+                  </a:tcPr>
+                </a:tc>
+                <a:tc>
+                  <a:txBody>
+                    <a:bodyPr/>
+                    <a:lstStyle/>
+                    <a:p>
+                      <a:pPr algn="ctr"/>
+                      <a:r>
+                        <a:rPr sz="1050" b="0">
+                          <a:solidFill>
+                            <a:srgbClr val="1A1A1A"/>
+                          </a:solidFill>
+                        </a:rPr>
+                        <a:t>12.83%</a:t>
+                      </a:r>
+                    </a:p>
+                  </a:txBody>
+                  <a:tcPr>
+                    <a:solidFill>
+                      <a:srgbClr val="FFFFFF"/>
+                    </a:solidFill>
+                  </a:tcPr>
+                </a:tc>
+                <a:tc>
+                  <a:txBody>
+                    <a:bodyPr/>
+                    <a:lstStyle/>
+                    <a:p>
+                      <a:pPr algn="ctr"/>
+                      <a:r>
+                        <a:rPr sz="1050" b="0">
+                          <a:solidFill>
+                            <a:srgbClr val="1A1A1A"/>
+                          </a:solidFill>
+                        </a:rPr>
+                        <a:t>18.05%</a:t>
+                      </a:r>
+                    </a:p>
+                  </a:txBody>
+                  <a:tcPr>
+                    <a:solidFill>
+                      <a:srgbClr val="FFFFFF"/>
+                    </a:solidFill>
+                  </a:tcPr>
+                </a:tc>
+              </a:tr>
+            </a:tbl>
+          </a:graphicData>
+        </a:graphic>
+      </p:graphicFrame>
+      <p:sp>
+        <p:nvSpPr>
+          <p:cNvPr id="6" name="TextBox 4"/>
+          <p:cNvSpPr txBox="1"/>
+          <p:nvPr/>
+        </p:nvSpPr>
+        <p:spPr>
+          <a:xfrm>
+            <a:off x="548640" y="4400000"/>
+            <a:ext cx="11091672" cy="950000"/>
+          </a:xfrm>
+          <a:prstGeom prst="rect">
+            <a:avLst/>
+          </a:prstGeom>
+          <a:noFill/>
+        </p:spPr>
+        <p:txBody>
+          <a:bodyPr wrap="square" anchor="t" lIns="0" rIns="0" tIns="0" bIns="0">
+            <a:spAutoFit/>
+          </a:bodyPr>
+          <a:lstStyle/>
+          <a:p>
+            <a:pPr algn="l"/>
+            <a:r>
+              <a:rPr sz="1050" b="0" i="1">
+                <a:solidFill>
+                  <a:srgbClr val="5B5E6B"/>
+                </a:solidFill>
+                <a:latin typeface="Calibri"/>
+              </a:rPr>
+              <a:t>①TENT는 collapse(한 클래스만 100% 예측)를 고쳤지만 그래도 전부 마스킹-only보다 나빠 최종안에서 제외했다. ②AdaBN 블렌딩은 얼마나 약하게 섞어도 Bangladesh·PlantDoc에서 마스킹-only를 못 넘었다 — BN 통계를 조금이라도 건드리는 것 자체가 해로웠다는 뜻. ③SHOT은 유일하게 3개 데이터셋 모두에서 collapse 없이 안정적으로 잘 됐다 — Taiwan은 AdaBN과 거의 동률, Bangladesh는 전체 방법 중 최고, PlantDoc은 정확도는 비슷해도 macro F1이 전체 중 가장 높다.</a:t>
+            </a:r>
+          </a:p>
+        </p:txBody>
+      </p:sp>
+      <p:sp>
+        <p:nvSpPr>
+          <p:cNvPr id="9" name="TextBox 4"/>
+          <p:cNvSpPr txBox="1"/>
+          <p:nvPr/>
+        </p:nvSpPr>
+        <p:spPr>
+          <a:xfrm>
+            <a:off x="548640" y="5400000"/>
+            <a:ext cx="11091672" cy="850000"/>
+          </a:xfrm>
+          <a:prstGeom prst="rect">
+            <a:avLst/>
+          </a:prstGeom>
+          <a:noFill/>
+        </p:spPr>
+        <p:txBody>
+          <a:bodyPr wrap="square" anchor="t" lIns="0" rIns="0" tIns="0" bIns="0">
+            <a:spAutoFit/>
+          </a:bodyPr>
+          <a:lstStyle/>
+          <a:p>
+            <a:pPr algn="l"/>
+            <a:r>
+              <a:rPr sz="1050" b="0" i="1">
+                <a:solidFill>
+                  <a:srgbClr val="5B5E6B"/>
+                </a:solidFill>
+                <a:latin typeface="Calibri"/>
+              </a:rPr>
+              <a:t>최종 권장 파이프라인: class-restriction 마스킹은 항상 적용 + 적응 방법은 SHOT을 기본으로 사용한다 (데이터셋마다 다른 방법을 골라야 했던 AdaBN/TENT와 달리 튜닝 없이 3개 전부에서 통한 유일한 방법). 현재 seed42 단일 결과이며, tiny_cnn_c(96px·bicubic) seed123/2026 재학습 후 3-seed로 재검증 중이다.</a:t>
+            </a:r>
+          </a:p>
+        </p:txBody>
+      </p:sp>
+      <p:sp>
+        <p:nvSpPr>
+          <p:cNvPr id="8" name="TextBox 5"/>
           <p:cNvSpPr txBox="1"/>
           <p:nvPr/>
         </p:nvSpPr>

--- a/docs/CNN_토마토_병해분류_V2_진행보고.pptx
+++ b/docs/CNN_토마토_병해분류_V2_진행보고.pptx
@@ -16795,7 +16795,7 @@
         </p:nvGraphicFramePr>
         <p:xfrm>
           <a:off x="548640" y="2100000"/>
-          <a:ext cx="8961120" cy="2200000"/>
+          <a:ext cx="5350000" cy="1760000"/>
         </p:xfrm>
         <a:graphic>
           <a:graphicData uri="http://schemas.openxmlformats.org/drawingml/2006/table">
@@ -16804,21 +16804,21 @@
                 <a:tableStyleId>{5C22544A-7EE6-4342-B048-85BDC9FD1C3A}</a:tableStyleId>
               </a:tblPr>
               <a:tblGrid>
-                <a:gridCol w="2194560"/>
-                <a:gridCol w="1645920"/>
-                <a:gridCol w="1828800"/>
-                <a:gridCol w="1645920"/>
-                <a:gridCol w="1645920"/>
+                <a:gridCol w="1300000"/>
+                <a:gridCol w="900000"/>
+                <a:gridCol w="1150000"/>
+                <a:gridCol w="1000000"/>
+                <a:gridCol w="1000000"/>
               </a:tblGrid>
-              <a:tr h="550000">
-                <a:tc>
-                  <a:txBody>
-                    <a:bodyPr/>
-                    <a:lstStyle/>
-                    <a:p>
-                      <a:pPr algn="ctr"/>
-                      <a:r>
-                        <a:rPr sz="1050" b="1">
+              <a:tr h="440000">
+                <a:tc>
+                  <a:txBody>
+                    <a:bodyPr/>
+                    <a:lstStyle/>
+                    <a:p>
+                      <a:pPr algn="ctr"/>
+                      <a:r>
+                        <a:rPr sz="950" b="1">
                           <a:solidFill>
                             <a:srgbClr val="FFFFFF"/>
                           </a:solidFill>
@@ -16840,7 +16840,7 @@
                     <a:p>
                       <a:pPr algn="ctr"/>
                       <a:r>
-                        <a:rPr sz="1050" b="1">
+                        <a:rPr sz="950" b="1">
                           <a:solidFill>
                             <a:srgbClr val="FFFFFF"/>
                           </a:solidFill>
@@ -16862,7 +16862,7 @@
                     <a:p>
                       <a:pPr algn="ctr"/>
                       <a:r>
-                        <a:rPr sz="1050" b="1">
+                        <a:rPr sz="950" b="1">
                           <a:solidFill>
                             <a:srgbClr val="FFFFFF"/>
                           </a:solidFill>
@@ -16884,7 +16884,7 @@
                     <a:p>
                       <a:pPr algn="ctr"/>
                       <a:r>
-                        <a:rPr sz="1050" b="1">
+                        <a:rPr sz="950" b="1">
                           <a:solidFill>
                             <a:srgbClr val="FFFFFF"/>
                           </a:solidFill>
@@ -16906,7 +16906,7 @@
                     <a:p>
                       <a:pPr algn="ctr"/>
                       <a:r>
-                        <a:rPr sz="1050" b="1">
+                        <a:rPr sz="950" b="1">
                           <a:solidFill>
                             <a:srgbClr val="FFFFFF"/>
                           </a:solidFill>
@@ -16922,15 +16922,15 @@
                   </a:tcPr>
                 </a:tc>
               </a:tr>
-              <a:tr h="550000">
-                <a:tc>
-                  <a:txBody>
-                    <a:bodyPr/>
-                    <a:lstStyle/>
-                    <a:p>
-                      <a:pPr algn="ctr"/>
-                      <a:r>
-                        <a:rPr sz="1050" b="0">
+              <a:tr h="440000">
+                <a:tc>
+                  <a:txBody>
+                    <a:bodyPr/>
+                    <a:lstStyle/>
+                    <a:p>
+                      <a:pPr algn="ctr"/>
+                      <a:r>
+                        <a:rPr sz="950" b="0">
                           <a:solidFill>
                             <a:srgbClr val="1A1A1A"/>
                           </a:solidFill>
@@ -16952,7 +16952,7 @@
                     <a:p>
                       <a:pPr algn="ctr"/>
                       <a:r>
-                        <a:rPr sz="1050" b="0">
+                        <a:rPr sz="950" b="0">
                           <a:solidFill>
                             <a:srgbClr val="1A1A1A"/>
                           </a:solidFill>
@@ -16974,7 +16974,7 @@
                     <a:p>
                       <a:pPr algn="ctr"/>
                       <a:r>
-                        <a:rPr sz="1050" b="1">
+                        <a:rPr sz="950" b="1">
                           <a:solidFill>
                             <a:srgbClr val="1A1A1A"/>
                           </a:solidFill>
@@ -16996,7 +16996,7 @@
                     <a:p>
                       <a:pPr algn="ctr"/>
                       <a:r>
-                        <a:rPr sz="1050" b="0">
+                        <a:rPr sz="950" b="0">
                           <a:solidFill>
                             <a:srgbClr val="1A1A1A"/>
                           </a:solidFill>
@@ -17018,7 +17018,7 @@
                     <a:p>
                       <a:pPr algn="ctr"/>
                       <a:r>
-                        <a:rPr sz="1050" b="0">
+                        <a:rPr sz="950" b="0">
                           <a:solidFill>
                             <a:srgbClr val="1A1A1A"/>
                           </a:solidFill>
@@ -17034,15 +17034,15 @@
                   </a:tcPr>
                 </a:tc>
               </a:tr>
-              <a:tr h="550000">
-                <a:tc>
-                  <a:txBody>
-                    <a:bodyPr/>
-                    <a:lstStyle/>
-                    <a:p>
-                      <a:pPr algn="ctr"/>
-                      <a:r>
-                        <a:rPr sz="1050" b="0">
+              <a:tr h="440000">
+                <a:tc>
+                  <a:txBody>
+                    <a:bodyPr/>
+                    <a:lstStyle/>
+                    <a:p>
+                      <a:pPr algn="ctr"/>
+                      <a:r>
+                        <a:rPr sz="950" b="0">
                           <a:solidFill>
                             <a:srgbClr val="1A1A1A"/>
                           </a:solidFill>
@@ -17064,7 +17064,7 @@
                     <a:p>
                       <a:pPr algn="ctr"/>
                       <a:r>
-                        <a:rPr sz="1050" b="0">
+                        <a:rPr sz="950" b="0">
                           <a:solidFill>
                             <a:srgbClr val="1A1A1A"/>
                           </a:solidFill>
@@ -17086,7 +17086,7 @@
                     <a:p>
                       <a:pPr algn="ctr"/>
                       <a:r>
-                        <a:rPr sz="1050" b="1">
+                        <a:rPr sz="950" b="1">
                           <a:solidFill>
                             <a:srgbClr val="1A1A1A"/>
                           </a:solidFill>
@@ -17108,7 +17108,7 @@
                     <a:p>
                       <a:pPr algn="ctr"/>
                       <a:r>
-                        <a:rPr sz="1050" b="0">
+                        <a:rPr sz="950" b="0">
                           <a:solidFill>
                             <a:srgbClr val="1A1A1A"/>
                           </a:solidFill>
@@ -17130,7 +17130,7 @@
                     <a:p>
                       <a:pPr algn="ctr"/>
                       <a:r>
-                        <a:rPr sz="1050" b="0">
+                        <a:rPr sz="950" b="0">
                           <a:solidFill>
                             <a:srgbClr val="1A1A1A"/>
                           </a:solidFill>
@@ -17146,15 +17146,15 @@
                   </a:tcPr>
                 </a:tc>
               </a:tr>
-              <a:tr h="550000">
-                <a:tc>
-                  <a:txBody>
-                    <a:bodyPr/>
-                    <a:lstStyle/>
-                    <a:p>
-                      <a:pPr algn="ctr"/>
-                      <a:r>
-                        <a:rPr sz="1050" b="0">
+              <a:tr h="440000">
+                <a:tc>
+                  <a:txBody>
+                    <a:bodyPr/>
+                    <a:lstStyle/>
+                    <a:p>
+                      <a:pPr algn="ctr"/>
+                      <a:r>
+                        <a:rPr sz="950" b="0">
                           <a:solidFill>
                             <a:srgbClr val="1A1A1A"/>
                           </a:solidFill>
@@ -17176,7 +17176,7 @@
                     <a:p>
                       <a:pPr algn="ctr"/>
                       <a:r>
-                        <a:rPr sz="1050" b="0">
+                        <a:rPr sz="950" b="0">
                           <a:solidFill>
                             <a:srgbClr val="1A1A1A"/>
                           </a:solidFill>
@@ -17198,7 +17198,7 @@
                     <a:p>
                       <a:pPr algn="ctr"/>
                       <a:r>
-                        <a:rPr sz="1050" b="1">
+                        <a:rPr sz="950" b="1">
                           <a:solidFill>
                             <a:srgbClr val="1A1A1A"/>
                           </a:solidFill>
@@ -17220,7 +17220,7 @@
                     <a:p>
                       <a:pPr algn="ctr"/>
                       <a:r>
-                        <a:rPr sz="1050" b="0">
+                        <a:rPr sz="950" b="0">
                           <a:solidFill>
                             <a:srgbClr val="1A1A1A"/>
                           </a:solidFill>
@@ -17242,7 +17242,7 @@
                     <a:p>
                       <a:pPr algn="ctr"/>
                       <a:r>
-                        <a:rPr sz="1050" b="0">
+                        <a:rPr sz="950" b="0">
                           <a:solidFill>
                             <a:srgbClr val="1A1A1A"/>
                           </a:solidFill>
@@ -17262,6 +17262,30 @@
           </a:graphicData>
         </a:graphic>
       </p:graphicFrame>
+      <p:pic>
+        <p:nvPicPr>
+          <p:cNvPr id="10" name="Picture" descr="Negative transfer evidence: absent-class prediction rate by method"/>
+          <p:cNvPicPr>
+            <a:picLocks noChangeAspect="1"/>
+          </p:cNvPicPr>
+          <p:nvPr/>
+        </p:nvPicPr>
+        <p:blipFill>
+          <a:blip r:embed="rId2"/>
+          <a:stretch>
+            <a:fillRect/>
+          </a:stretch>
+        </p:blipFill>
+        <p:spPr>
+          <a:xfrm>
+            <a:off x="6700000" y="2100000"/>
+            <a:ext cx="4941672" cy="2678000"/>
+          </a:xfrm>
+          <a:prstGeom prst="rect">
+            <a:avLst/>
+          </a:prstGeom>
+        </p:spPr>
+      </p:pic>
       <p:sp>
         <p:nvSpPr>
           <p:cNvPr id="6" name="TextBox 4"/>
@@ -17270,8 +17294,8 @@
         </p:nvSpPr>
         <p:spPr>
           <a:xfrm>
-            <a:off x="548640" y="4450000"/>
-            <a:ext cx="11091672" cy="1150000"/>
+            <a:off x="548640" y="4950000"/>
+            <a:ext cx="11091672" cy="1300000"/>
           </a:xfrm>
           <a:prstGeom prst="rect">
             <a:avLst/>
@@ -17292,7 +17316,7 @@
                 </a:solidFill>
                 <a:latin typeface="Calibri"/>
               </a:rPr>
-              <a:t>예측 분포 분석(prediction_distribution.csv) 결과, AdaBN/TENT 적용 후 예측이 target에 없는 클래스로 쏠렸다 — partial label-space mismatch(PADA/ETN 이론)로 인한 negative transfer다. 클래스 겹침이 적을수록(Taiwan 3/10) 저하가 더 컸다. 다음 슬라이드에서 이 문제를 해결하는 class-restriction 마스킹을 다룬다.</a:t>
+              <a:t>예측 분포 분석(prediction_distribution.csv) 결과, AdaBN/TENT 적용 후 예측이 target에 없는 클래스로 쏠렸다 — partial label-space mismatch(PADA/ETN 이론)로 인한 negative transfer다. 오른쪽 그래프처럼 클래스 겹침이 적을수록(Taiwan 3/10) 저하가 더 컸다(21.7%→83.1%/78.0%). 다음 슬라이드에서 이 문제를 해결하는 class-restriction 마스킹을 다룬다.</a:t>
             </a:r>
           </a:p>
         </p:txBody>

--- a/docs/CNN_토마토_병해분류_V2_진행보고.pptx
+++ b/docs/CNN_토마토_병해분류_V2_진행보고.pptx
@@ -31,6 +31,8 @@
     <p:sldId id="281" r:id="rId32"/>
     <p:sldId id="282" r:id="rId33"/>
     <p:sldId id="283" r:id="rId34"/>
+    <p:sldId id="284" r:id="rId35"/>
+    <p:sldId id="285" r:id="rId36"/>
     <p:sldId id="277" r:id="rId28"/>
     <p:sldId id="278" r:id="rId29"/>
   </p:sldIdLst>
@@ -16710,7 +16712,7 @@
                 </a:solidFill>
                 <a:latin typeface="Calibri"/>
               </a:rPr>
-              <a:t>RESULT 7 · DOMAIN ADAPTATION (1/3)</a:t>
+              <a:t>RESULT 7 · DOMAIN ADAPTATION (1/5)</a:t>
             </a:r>
           </a:p>
         </p:txBody>
@@ -16745,7 +16747,7 @@
                 </a:solidFill>
                 <a:latin typeface="Cambria"/>
               </a:rPr>
-              <a:t>AdaBN / TENT 적용 — 그러나 전부 악화 (Negative Transfer)</a:t>
+              <a:t>AdaBN / TENT 적용 — 전부 악화 (Negative Transfer)</a:t>
             </a:r>
           </a:p>
         </p:txBody>
@@ -16758,8 +16760,8 @@
         </p:nvSpPr>
         <p:spPr>
           <a:xfrm>
-            <a:off x="548640" y="1250000"/>
-            <a:ext cx="11091672" cy="750000"/>
+            <a:off x="548640" y="1200000"/>
+            <a:ext cx="11091672" cy="950000"/>
           </a:xfrm>
           <a:prstGeom prst="rect">
             <a:avLst/>
@@ -16774,13 +16776,13 @@
           <a:p>
             <a:pPr algn="l"/>
             <a:r>
-              <a:rPr sz="1050" b="0" i="0">
+              <a:rPr sz="1300" b="0" i="0">
                 <a:solidFill>
                   <a:srgbClr val="1A1A1A"/>
                 </a:solidFill>
                 <a:latin typeface="Calibri"/>
               </a:rPr>
-              <a:t>AdaBN(Li et al., 2016)은 target 이미지로 forward pass만 수행해 BN running 통계를 완전 교체한다(역전파 없음). TENT(Wang et al., ICLR 2021, 공식 코드 DequanWang/tent 구조 참고)는 BN affine(γ,β)만 열고 라벨 없이 예측 entropy를 최소화한다(Adam, 1 epoch). 두 방법 모두 target label은 어떤 단계에서도 사용하지 않는다(source-free·label-free).</a:t>
+              <a:t>AdaBN(Li et al., 2016)은 target 이미지로 forward만 수행해 BN 통계를 완전 교체한다. TENT(Wang et al., ICLR 2021)는 BN affine만 열고 entropy를 최소화한다. 둘 다 target label은 전혀 쓰지 않는다(source-free·label-free).</a:t>
             </a:r>
           </a:p>
         </p:txBody>
@@ -16794,8 +16796,8 @@
           <p:nvPr/>
         </p:nvGraphicFramePr>
         <p:xfrm>
-          <a:off x="548640" y="2100000"/>
-          <a:ext cx="5350000" cy="1760000"/>
+          <a:off x="548640" y="2250000"/>
+          <a:ext cx="6700000" cy="2240000"/>
         </p:xfrm>
         <a:graphic>
           <a:graphicData uri="http://schemas.openxmlformats.org/drawingml/2006/table">
@@ -16804,21 +16806,21 @@
                 <a:tableStyleId>{5C22544A-7EE6-4342-B048-85BDC9FD1C3A}</a:tableStyleId>
               </a:tblPr>
               <a:tblGrid>
+                <a:gridCol w="1550000"/>
+                <a:gridCol w="1050000"/>
+                <a:gridCol w="1500000"/>
                 <a:gridCol w="1300000"/>
-                <a:gridCol w="900000"/>
-                <a:gridCol w="1150000"/>
-                <a:gridCol w="1000000"/>
-                <a:gridCol w="1000000"/>
+                <a:gridCol w="1300000"/>
               </a:tblGrid>
-              <a:tr h="440000">
-                <a:tc>
-                  <a:txBody>
-                    <a:bodyPr/>
-                    <a:lstStyle/>
-                    <a:p>
-                      <a:pPr algn="ctr"/>
-                      <a:r>
-                        <a:rPr sz="950" b="1">
+              <a:tr h="560000">
+                <a:tc>
+                  <a:txBody>
+                    <a:bodyPr/>
+                    <a:lstStyle/>
+                    <a:p>
+                      <a:pPr algn="ctr"/>
+                      <a:r>
+                        <a:rPr sz="1200" b="1">
                           <a:solidFill>
                             <a:srgbClr val="FFFFFF"/>
                           </a:solidFill>
@@ -16827,7 +16829,7 @@
                       </a:r>
                     </a:p>
                   </a:txBody>
-                  <a:tcPr>
+                  <a:tcPr anchor="ctr">
                     <a:solidFill>
                       <a:srgbClr val="1E2761"/>
                     </a:solidFill>
@@ -16840,7 +16842,7 @@
                     <a:p>
                       <a:pPr algn="ctr"/>
                       <a:r>
-                        <a:rPr sz="950" b="1">
+                        <a:rPr sz="1200" b="1">
                           <a:solidFill>
                             <a:srgbClr val="FFFFFF"/>
                           </a:solidFill>
@@ -16849,7 +16851,7 @@
                       </a:r>
                     </a:p>
                   </a:txBody>
-                  <a:tcPr>
+                  <a:tcPr anchor="ctr">
                     <a:solidFill>
                       <a:srgbClr val="1E2761"/>
                     </a:solidFill>
@@ -16862,7 +16864,7 @@
                     <a:p>
                       <a:pPr algn="ctr"/>
                       <a:r>
-                        <a:rPr sz="950" b="1">
+                        <a:rPr sz="1200" b="1">
                           <a:solidFill>
                             <a:srgbClr val="FFFFFF"/>
                           </a:solidFill>
@@ -16871,7 +16873,7 @@
                       </a:r>
                     </a:p>
                   </a:txBody>
-                  <a:tcPr>
+                  <a:tcPr anchor="ctr">
                     <a:solidFill>
                       <a:srgbClr val="1E2761"/>
                     </a:solidFill>
@@ -16884,7 +16886,7 @@
                     <a:p>
                       <a:pPr algn="ctr"/>
                       <a:r>
-                        <a:rPr sz="950" b="1">
+                        <a:rPr sz="1200" b="1">
                           <a:solidFill>
                             <a:srgbClr val="FFFFFF"/>
                           </a:solidFill>
@@ -16893,7 +16895,7 @@
                       </a:r>
                     </a:p>
                   </a:txBody>
-                  <a:tcPr>
+                  <a:tcPr anchor="ctr">
                     <a:solidFill>
                       <a:srgbClr val="1E2761"/>
                     </a:solidFill>
@@ -16906,7 +16908,7 @@
                     <a:p>
                       <a:pPr algn="ctr"/>
                       <a:r>
-                        <a:rPr sz="950" b="1">
+                        <a:rPr sz="1200" b="1">
                           <a:solidFill>
                             <a:srgbClr val="FFFFFF"/>
                           </a:solidFill>
@@ -16915,22 +16917,22 @@
                       </a:r>
                     </a:p>
                   </a:txBody>
-                  <a:tcPr>
+                  <a:tcPr anchor="ctr">
                     <a:solidFill>
                       <a:srgbClr val="1E2761"/>
                     </a:solidFill>
                   </a:tcPr>
                 </a:tc>
               </a:tr>
-              <a:tr h="440000">
-                <a:tc>
-                  <a:txBody>
-                    <a:bodyPr/>
-                    <a:lstStyle/>
-                    <a:p>
-                      <a:pPr algn="ctr"/>
-                      <a:r>
-                        <a:rPr sz="950" b="0">
+              <a:tr h="560000">
+                <a:tc>
+                  <a:txBody>
+                    <a:bodyPr/>
+                    <a:lstStyle/>
+                    <a:p>
+                      <a:pPr algn="ctr"/>
+                      <a:r>
+                        <a:rPr sz="1200" b="0">
                           <a:solidFill>
                             <a:srgbClr val="1A1A1A"/>
                           </a:solidFill>
@@ -16939,7 +16941,7 @@
                       </a:r>
                     </a:p>
                   </a:txBody>
-                  <a:tcPr>
+                  <a:tcPr anchor="ctr">
                     <a:solidFill>
                       <a:srgbClr val="FFFFFF"/>
                     </a:solidFill>
@@ -16952,7 +16954,7 @@
                     <a:p>
                       <a:pPr algn="ctr"/>
                       <a:r>
-                        <a:rPr sz="950" b="0">
+                        <a:rPr sz="1200" b="0">
                           <a:solidFill>
                             <a:srgbClr val="1A1A1A"/>
                           </a:solidFill>
@@ -16961,7 +16963,7 @@
                       </a:r>
                     </a:p>
                   </a:txBody>
-                  <a:tcPr>
+                  <a:tcPr anchor="ctr">
                     <a:solidFill>
                       <a:srgbClr val="FFFFFF"/>
                     </a:solidFill>
@@ -16974,7 +16976,7 @@
                     <a:p>
                       <a:pPr algn="ctr"/>
                       <a:r>
-                        <a:rPr sz="950" b="1">
+                        <a:rPr sz="1200" b="1">
                           <a:solidFill>
                             <a:srgbClr val="1A1A1A"/>
                           </a:solidFill>
@@ -16983,7 +16985,7 @@
                       </a:r>
                     </a:p>
                   </a:txBody>
-                  <a:tcPr>
+                  <a:tcPr anchor="ctr">
                     <a:solidFill>
                       <a:srgbClr val="FFFFFF"/>
                     </a:solidFill>
@@ -16996,7 +16998,7 @@
                     <a:p>
                       <a:pPr algn="ctr"/>
                       <a:r>
-                        <a:rPr sz="950" b="0">
+                        <a:rPr sz="1200" b="0">
                           <a:solidFill>
                             <a:srgbClr val="1A1A1A"/>
                           </a:solidFill>
@@ -17005,7 +17007,7 @@
                       </a:r>
                     </a:p>
                   </a:txBody>
-                  <a:tcPr>
+                  <a:tcPr anchor="ctr">
                     <a:solidFill>
                       <a:srgbClr val="FFFFFF"/>
                     </a:solidFill>
@@ -17018,7 +17020,7 @@
                     <a:p>
                       <a:pPr algn="ctr"/>
                       <a:r>
-                        <a:rPr sz="950" b="0">
+                        <a:rPr sz="1200" b="0">
                           <a:solidFill>
                             <a:srgbClr val="1A1A1A"/>
                           </a:solidFill>
@@ -17027,22 +17029,22 @@
                       </a:r>
                     </a:p>
                   </a:txBody>
-                  <a:tcPr>
+                  <a:tcPr anchor="ctr">
                     <a:solidFill>
                       <a:srgbClr val="FFFFFF"/>
                     </a:solidFill>
                   </a:tcPr>
                 </a:tc>
               </a:tr>
-              <a:tr h="440000">
-                <a:tc>
-                  <a:txBody>
-                    <a:bodyPr/>
-                    <a:lstStyle/>
-                    <a:p>
-                      <a:pPr algn="ctr"/>
-                      <a:r>
-                        <a:rPr sz="950" b="0">
+              <a:tr h="560000">
+                <a:tc>
+                  <a:txBody>
+                    <a:bodyPr/>
+                    <a:lstStyle/>
+                    <a:p>
+                      <a:pPr algn="ctr"/>
+                      <a:r>
+                        <a:rPr sz="1200" b="0">
                           <a:solidFill>
                             <a:srgbClr val="1A1A1A"/>
                           </a:solidFill>
@@ -17051,7 +17053,7 @@
                       </a:r>
                     </a:p>
                   </a:txBody>
-                  <a:tcPr>
+                  <a:tcPr anchor="ctr">
                     <a:solidFill>
                       <a:srgbClr val="EEF3FC"/>
                     </a:solidFill>
@@ -17064,7 +17066,7 @@
                     <a:p>
                       <a:pPr algn="ctr"/>
                       <a:r>
-                        <a:rPr sz="950" b="0">
+                        <a:rPr sz="1200" b="0">
                           <a:solidFill>
                             <a:srgbClr val="1A1A1A"/>
                           </a:solidFill>
@@ -17073,7 +17075,7 @@
                       </a:r>
                     </a:p>
                   </a:txBody>
-                  <a:tcPr>
+                  <a:tcPr anchor="ctr">
                     <a:solidFill>
                       <a:srgbClr val="EEF3FC"/>
                     </a:solidFill>
@@ -17086,7 +17088,7 @@
                     <a:p>
                       <a:pPr algn="ctr"/>
                       <a:r>
-                        <a:rPr sz="950" b="1">
+                        <a:rPr sz="1200" b="1">
                           <a:solidFill>
                             <a:srgbClr val="1A1A1A"/>
                           </a:solidFill>
@@ -17095,7 +17097,7 @@
                       </a:r>
                     </a:p>
                   </a:txBody>
-                  <a:tcPr>
+                  <a:tcPr anchor="ctr">
                     <a:solidFill>
                       <a:srgbClr val="EEF3FC"/>
                     </a:solidFill>
@@ -17108,7 +17110,7 @@
                     <a:p>
                       <a:pPr algn="ctr"/>
                       <a:r>
-                        <a:rPr sz="950" b="0">
+                        <a:rPr sz="1200" b="0">
                           <a:solidFill>
                             <a:srgbClr val="1A1A1A"/>
                           </a:solidFill>
@@ -17117,7 +17119,7 @@
                       </a:r>
                     </a:p>
                   </a:txBody>
-                  <a:tcPr>
+                  <a:tcPr anchor="ctr">
                     <a:solidFill>
                       <a:srgbClr val="EEF3FC"/>
                     </a:solidFill>
@@ -17130,7 +17132,7 @@
                     <a:p>
                       <a:pPr algn="ctr"/>
                       <a:r>
-                        <a:rPr sz="950" b="0">
+                        <a:rPr sz="1200" b="0">
                           <a:solidFill>
                             <a:srgbClr val="1A1A1A"/>
                           </a:solidFill>
@@ -17139,22 +17141,22 @@
                       </a:r>
                     </a:p>
                   </a:txBody>
-                  <a:tcPr>
+                  <a:tcPr anchor="ctr">
                     <a:solidFill>
                       <a:srgbClr val="EEF3FC"/>
                     </a:solidFill>
                   </a:tcPr>
                 </a:tc>
               </a:tr>
-              <a:tr h="440000">
-                <a:tc>
-                  <a:txBody>
-                    <a:bodyPr/>
-                    <a:lstStyle/>
-                    <a:p>
-                      <a:pPr algn="ctr"/>
-                      <a:r>
-                        <a:rPr sz="950" b="0">
+              <a:tr h="560000">
+                <a:tc>
+                  <a:txBody>
+                    <a:bodyPr/>
+                    <a:lstStyle/>
+                    <a:p>
+                      <a:pPr algn="ctr"/>
+                      <a:r>
+                        <a:rPr sz="1200" b="0">
                           <a:solidFill>
                             <a:srgbClr val="1A1A1A"/>
                           </a:solidFill>
@@ -17163,7 +17165,7 @@
                       </a:r>
                     </a:p>
                   </a:txBody>
-                  <a:tcPr>
+                  <a:tcPr anchor="ctr">
                     <a:solidFill>
                       <a:srgbClr val="FFFFFF"/>
                     </a:solidFill>
@@ -17176,7 +17178,7 @@
                     <a:p>
                       <a:pPr algn="ctr"/>
                       <a:r>
-                        <a:rPr sz="950" b="0">
+                        <a:rPr sz="1200" b="0">
                           <a:solidFill>
                             <a:srgbClr val="1A1A1A"/>
                           </a:solidFill>
@@ -17185,7 +17187,7 @@
                       </a:r>
                     </a:p>
                   </a:txBody>
-                  <a:tcPr>
+                  <a:tcPr anchor="ctr">
                     <a:solidFill>
                       <a:srgbClr val="FFFFFF"/>
                     </a:solidFill>
@@ -17198,7 +17200,7 @@
                     <a:p>
                       <a:pPr algn="ctr"/>
                       <a:r>
-                        <a:rPr sz="950" b="1">
+                        <a:rPr sz="1200" b="1">
                           <a:solidFill>
                             <a:srgbClr val="1A1A1A"/>
                           </a:solidFill>
@@ -17207,7 +17209,7 @@
                       </a:r>
                     </a:p>
                   </a:txBody>
-                  <a:tcPr>
+                  <a:tcPr anchor="ctr">
                     <a:solidFill>
                       <a:srgbClr val="FFFFFF"/>
                     </a:solidFill>
@@ -17220,7 +17222,7 @@
                     <a:p>
                       <a:pPr algn="ctr"/>
                       <a:r>
-                        <a:rPr sz="950" b="0">
+                        <a:rPr sz="1200" b="0">
                           <a:solidFill>
                             <a:srgbClr val="1A1A1A"/>
                           </a:solidFill>
@@ -17229,7 +17231,7 @@
                       </a:r>
                     </a:p>
                   </a:txBody>
-                  <a:tcPr>
+                  <a:tcPr anchor="ctr">
                     <a:solidFill>
                       <a:srgbClr val="FFFFFF"/>
                     </a:solidFill>
@@ -17242,7 +17244,7 @@
                     <a:p>
                       <a:pPr algn="ctr"/>
                       <a:r>
-                        <a:rPr sz="950" b="0">
+                        <a:rPr sz="1200" b="0">
                           <a:solidFill>
                             <a:srgbClr val="1A1A1A"/>
                           </a:solidFill>
@@ -17251,7 +17253,7 @@
                       </a:r>
                     </a:p>
                   </a:txBody>
-                  <a:tcPr>
+                  <a:tcPr anchor="ctr">
                     <a:solidFill>
                       <a:srgbClr val="FFFFFF"/>
                     </a:solidFill>
@@ -17264,7 +17266,7 @@
       </p:graphicFrame>
       <p:pic>
         <p:nvPicPr>
-          <p:cNvPr id="10" name="Picture" descr="Negative transfer evidence: absent-class prediction rate by method"/>
+          <p:cNvPr id="10" name="Picture" descr="Negative transfer evidence chart"/>
           <p:cNvPicPr>
             <a:picLocks noChangeAspect="1"/>
           </p:cNvPicPr>
@@ -17278,8 +17280,8 @@
         </p:blipFill>
         <p:spPr>
           <a:xfrm>
-            <a:off x="6700000" y="2100000"/>
-            <a:ext cx="4941672" cy="2678000"/>
+            <a:off x="7500000" y="2250000"/>
+            <a:ext cx="4100000" cy="2221000"/>
           </a:xfrm>
           <a:prstGeom prst="rect">
             <a:avLst/>
@@ -17294,8 +17296,8 @@
         </p:nvSpPr>
         <p:spPr>
           <a:xfrm>
-            <a:off x="548640" y="4950000"/>
-            <a:ext cx="11091672" cy="1300000"/>
+            <a:off x="548640" y="4650000"/>
+            <a:ext cx="11091672" cy="1500000"/>
           </a:xfrm>
           <a:prstGeom prst="rect">
             <a:avLst/>
@@ -17310,13 +17312,13 @@
           <a:p>
             <a:pPr algn="l"/>
             <a:r>
-              <a:rPr sz="1050" b="0" i="1">
+              <a:rPr sz="1300" b="0" i="1">
                 <a:solidFill>
                   <a:srgbClr val="5B5E6B"/>
                 </a:solidFill>
                 <a:latin typeface="Calibri"/>
               </a:rPr>
-              <a:t>예측 분포 분석(prediction_distribution.csv) 결과, AdaBN/TENT 적용 후 예측이 target에 없는 클래스로 쏠렸다 — partial label-space mismatch(PADA/ETN 이론)로 인한 negative transfer다. 오른쪽 그래프처럼 클래스 겹침이 적을수록(Taiwan 3/10) 저하가 더 컸다(21.7%→83.1%/78.0%). 다음 슬라이드에서 이 문제를 해결하는 class-restriction 마스킹을 다룬다.</a:t>
+              <a:t>예측이 target에 없는 클래스로 쏠렸다 — partial label-space mismatch로 인한 negative transfer다(PADA/ETN 이론). 클래스 겹침이 적을수록(Taiwan 3/10) 저하가 더 컸다.</a:t>
             </a:r>
           </a:p>
         </p:txBody>
@@ -18367,7 +18369,7 @@
                 </a:solidFill>
                 <a:latin typeface="Calibri"/>
               </a:rPr>
-              <a:t>26</a:t>
+              <a:t>28</a:t>
             </a:r>
           </a:p>
         </p:txBody>
@@ -18995,7 +18997,7 @@
                 </a:solidFill>
                 <a:latin typeface="Calibri"/>
               </a:rPr>
-              <a:t>27</a:t>
+              <a:t>29</a:t>
             </a:r>
           </a:p>
         </p:txBody>
@@ -19056,7 +19058,7 @@
                 </a:solidFill>
                 <a:latin typeface="Calibri"/>
               </a:rPr>
-              <a:t>RESULT 7 · DOMAIN ADAPTATION (2/3)</a:t>
+              <a:t>RESULT 7 · DOMAIN ADAPTATION (2/5)</a:t>
             </a:r>
           </a:p>
         </p:txBody>
@@ -19091,7 +19093,7 @@
                 </a:solidFill>
                 <a:latin typeface="Cambria"/>
               </a:rPr>
-              <a:t>Class-restriction 마스킹으로 해결 + 다음 시도</a:t>
+              <a:t>해결책: Class-restriction 마스킹</a:t>
             </a:r>
           </a:p>
         </p:txBody>
@@ -19104,8 +19106,8 @@
         </p:nvSpPr>
         <p:spPr>
           <a:xfrm>
-            <a:off x="548640" y="1250000"/>
-            <a:ext cx="11091672" cy="750000"/>
+            <a:off x="548640" y="1200000"/>
+            <a:ext cx="11091672" cy="900000"/>
           </a:xfrm>
           <a:prstGeom prst="rect">
             <a:avLst/>
@@ -19120,13 +19122,13 @@
           <a:p>
             <a:pPr algn="l"/>
             <a:r>
-              <a:rPr sz="1050" b="0" i="0">
+              <a:rPr sz="1300" b="0" i="0">
                 <a:solidFill>
                   <a:srgbClr val="1A1A1A"/>
                 </a:solidFill>
                 <a:latin typeface="Calibri"/>
               </a:rPr>
-              <a:t>class_info.py에 설계 단계부터 있던 클래스 매핑으로 target에 없는 클래스의 로짓을 -inf 마스킹한다(추가 학습 없음, zero-cost). 모든 데이터셋에서 마스킹 단독만으로도 source-only보다 개선됐다.</a:t>
+              <a:t>class_info.py의 사전 클래스 매핑으로 target에 없는 클래스의 로짓을 -inf 처리한다(추가 학습 없음, zero-cost). 모든 데이터셋에서 마스킹만으로도 source-only보다 개선됐다.</a:t>
             </a:r>
           </a:p>
         </p:txBody>
@@ -19140,8 +19142,8 @@
           <p:nvPr/>
         </p:nvGraphicFramePr>
         <p:xfrm>
-          <a:off x="548640" y="2100000"/>
-          <a:ext cx="10200000" cy="2100000"/>
+          <a:off x="548640" y="2150000"/>
+          <a:ext cx="8500000" cy="2480000"/>
         </p:xfrm>
         <a:graphic>
           <a:graphicData uri="http://schemas.openxmlformats.org/drawingml/2006/table">
@@ -19150,21 +19152,20 @@
                 <a:tableStyleId>{5C22544A-7EE6-4342-B048-85BDC9FD1C3A}</a:tableStyleId>
               </a:tblPr>
               <a:tblGrid>
-                <a:gridCol w="1900000"/>
-                <a:gridCol w="1850000"/>
-                <a:gridCol w="1850000"/>
-                <a:gridCol w="2300000"/>
-                <a:gridCol w="2300000"/>
+                <a:gridCol w="1800000"/>
+                <a:gridCol w="2100000"/>
+                <a:gridCol w="2100000"/>
+                <a:gridCol w="2500000"/>
               </a:tblGrid>
-              <a:tr h="525000">
-                <a:tc>
-                  <a:txBody>
-                    <a:bodyPr/>
-                    <a:lstStyle/>
-                    <a:p>
-                      <a:pPr algn="ctr"/>
-                      <a:r>
-                        <a:rPr sz="1050" b="1">
+              <a:tr h="620000">
+                <a:tc>
+                  <a:txBody>
+                    <a:bodyPr/>
+                    <a:lstStyle/>
+                    <a:p>
+                      <a:pPr algn="ctr"/>
+                      <a:r>
+                        <a:rPr sz="1200" b="1">
                           <a:solidFill>
                             <a:srgbClr val="FFFFFF"/>
                           </a:solidFill>
@@ -19173,7 +19174,7 @@
                       </a:r>
                     </a:p>
                   </a:txBody>
-                  <a:tcPr>
+                  <a:tcPr anchor="ctr">
                     <a:solidFill>
                       <a:srgbClr val="1E2761"/>
                     </a:solidFill>
@@ -19186,7 +19187,7 @@
                     <a:p>
                       <a:pPr algn="ctr"/>
                       <a:r>
-                        <a:rPr sz="1050" b="1">
+                        <a:rPr sz="1200" b="1">
                           <a:solidFill>
                             <a:srgbClr val="FFFFFF"/>
                           </a:solidFill>
@@ -19195,7 +19196,7 @@
                       </a:r>
                     </a:p>
                   </a:txBody>
-                  <a:tcPr>
+                  <a:tcPr anchor="ctr">
                     <a:solidFill>
                       <a:srgbClr val="1E2761"/>
                     </a:solidFill>
@@ -19208,7 +19209,7 @@
                     <a:p>
                       <a:pPr algn="ctr"/>
                       <a:r>
-                        <a:rPr sz="1050" b="1">
+                        <a:rPr sz="1200" b="1">
                           <a:solidFill>
                             <a:srgbClr val="FFFFFF"/>
                           </a:solidFill>
@@ -19217,7 +19218,7 @@
                       </a:r>
                     </a:p>
                   </a:txBody>
-                  <a:tcPr>
+                  <a:tcPr anchor="ctr">
                     <a:solidFill>
                       <a:srgbClr val="1E2761"/>
                     </a:solidFill>
@@ -19230,7 +19231,7 @@
                     <a:p>
                       <a:pPr algn="ctr"/>
                       <a:r>
-                        <a:rPr sz="1050" b="1">
+                        <a:rPr sz="1200" b="1">
                           <a:solidFill>
                             <a:srgbClr val="FFFFFF"/>
                           </a:solidFill>
@@ -19239,44 +19240,22 @@
                       </a:r>
                     </a:p>
                   </a:txBody>
-                  <a:tcPr>
+                  <a:tcPr anchor="ctr">
                     <a:solidFill>
                       <a:srgbClr val="1E2761"/>
                     </a:solidFill>
                   </a:tcPr>
                 </a:tc>
-                <a:tc>
-                  <a:txBody>
-                    <a:bodyPr/>
-                    <a:lstStyle/>
-                    <a:p>
-                      <a:pPr algn="ctr"/>
-                      <a:r>
-                        <a:rPr sz="1050" b="1">
-                          <a:solidFill>
-                            <a:srgbClr val="FFFFFF"/>
-                          </a:solidFill>
-                        </a:rPr>
-                        <a:t>TENT+마스킹</a:t>
-                      </a:r>
-                    </a:p>
-                  </a:txBody>
-                  <a:tcPr>
-                    <a:solidFill>
-                      <a:srgbClr val="1E2761"/>
-                    </a:solidFill>
-                  </a:tcPr>
-                </a:tc>
               </a:tr>
-              <a:tr h="525000">
-                <a:tc>
-                  <a:txBody>
-                    <a:bodyPr/>
-                    <a:lstStyle/>
-                    <a:p>
-                      <a:pPr algn="ctr"/>
-                      <a:r>
-                        <a:rPr sz="1050" b="0">
+              <a:tr h="620000">
+                <a:tc>
+                  <a:txBody>
+                    <a:bodyPr/>
+                    <a:lstStyle/>
+                    <a:p>
+                      <a:pPr algn="ctr"/>
+                      <a:r>
+                        <a:rPr sz="1200" b="0">
                           <a:solidFill>
                             <a:srgbClr val="1A1A1A"/>
                           </a:solidFill>
@@ -19285,7 +19264,7 @@
                       </a:r>
                     </a:p>
                   </a:txBody>
-                  <a:tcPr>
+                  <a:tcPr anchor="ctr">
                     <a:solidFill>
                       <a:srgbClr val="FFFFFF"/>
                     </a:solidFill>
@@ -19298,7 +19277,7 @@
                     <a:p>
                       <a:pPr algn="ctr"/>
                       <a:r>
-                        <a:rPr sz="1050" b="0">
+                        <a:rPr sz="1200" b="0">
                           <a:solidFill>
                             <a:srgbClr val="1A1A1A"/>
                           </a:solidFill>
@@ -19307,7 +19286,7 @@
                       </a:r>
                     </a:p>
                   </a:txBody>
-                  <a:tcPr>
+                  <a:tcPr anchor="ctr">
                     <a:solidFill>
                       <a:srgbClr val="FFFFFF"/>
                     </a:solidFill>
@@ -19320,7 +19299,7 @@
                     <a:p>
                       <a:pPr algn="ctr"/>
                       <a:r>
-                        <a:rPr sz="1050" b="0">
+                        <a:rPr sz="1200" b="0">
                           <a:solidFill>
                             <a:srgbClr val="1A1A1A"/>
                           </a:solidFill>
@@ -19329,7 +19308,7 @@
                       </a:r>
                     </a:p>
                   </a:txBody>
-                  <a:tcPr>
+                  <a:tcPr anchor="ctr">
                     <a:solidFill>
                       <a:srgbClr val="FFFFFF"/>
                     </a:solidFill>
@@ -19342,7 +19321,7 @@
                     <a:p>
                       <a:pPr algn="ctr"/>
                       <a:r>
-                        <a:rPr sz="1050" b="1">
+                        <a:rPr sz="1200" b="1">
                           <a:solidFill>
                             <a:srgbClr val="1A1A1A"/>
                           </a:solidFill>
@@ -19351,165 +19330,143 @@
                       </a:r>
                     </a:p>
                   </a:txBody>
-                  <a:tcPr>
+                  <a:tcPr anchor="ctr">
                     <a:solidFill>
                       <a:srgbClr val="FFFFFF"/>
                     </a:solidFill>
                   </a:tcPr>
                 </a:tc>
-                <a:tc>
-                  <a:txBody>
-                    <a:bodyPr/>
-                    <a:lstStyle/>
-                    <a:p>
-                      <a:pPr algn="ctr"/>
-                      <a:r>
-                        <a:rPr sz="1050" b="0">
-                          <a:solidFill>
-                            <a:srgbClr val="1A1A1A"/>
-                          </a:solidFill>
-                        </a:rPr>
-                        <a:t>30.25%</a:t>
-                      </a:r>
-                    </a:p>
-                  </a:txBody>
-                  <a:tcPr>
+              </a:tr>
+              <a:tr h="620000">
+                <a:tc>
+                  <a:txBody>
+                    <a:bodyPr/>
+                    <a:lstStyle/>
+                    <a:p>
+                      <a:pPr algn="ctr"/>
+                      <a:r>
+                        <a:rPr sz="1200" b="0">
+                          <a:solidFill>
+                            <a:srgbClr val="1A1A1A"/>
+                          </a:solidFill>
+                        </a:rPr>
+                        <a:t>Bangladesh</a:t>
+                      </a:r>
+                    </a:p>
+                  </a:txBody>
+                  <a:tcPr anchor="ctr">
+                    <a:solidFill>
+                      <a:srgbClr val="EEF3FC"/>
+                    </a:solidFill>
+                  </a:tcPr>
+                </a:tc>
+                <a:tc>
+                  <a:txBody>
+                    <a:bodyPr/>
+                    <a:lstStyle/>
+                    <a:p>
+                      <a:pPr algn="ctr"/>
+                      <a:r>
+                        <a:rPr sz="1200" b="0">
+                          <a:solidFill>
+                            <a:srgbClr val="1A1A1A"/>
+                          </a:solidFill>
+                        </a:rPr>
+                        <a:t>21.80%</a:t>
+                      </a:r>
+                    </a:p>
+                  </a:txBody>
+                  <a:tcPr anchor="ctr">
+                    <a:solidFill>
+                      <a:srgbClr val="EEF3FC"/>
+                    </a:solidFill>
+                  </a:tcPr>
+                </a:tc>
+                <a:tc>
+                  <a:txBody>
+                    <a:bodyPr/>
+                    <a:lstStyle/>
+                    <a:p>
+                      <a:pPr algn="ctr"/>
+                      <a:r>
+                        <a:rPr sz="1200" b="1">
+                          <a:solidFill>
+                            <a:srgbClr val="1A1A1A"/>
+                          </a:solidFill>
+                        </a:rPr>
+                        <a:t>22.34%</a:t>
+                      </a:r>
+                    </a:p>
+                  </a:txBody>
+                  <a:tcPr anchor="ctr">
+                    <a:solidFill>
+                      <a:srgbClr val="EEF3FC"/>
+                    </a:solidFill>
+                  </a:tcPr>
+                </a:tc>
+                <a:tc>
+                  <a:txBody>
+                    <a:bodyPr/>
+                    <a:lstStyle/>
+                    <a:p>
+                      <a:pPr algn="ctr"/>
+                      <a:r>
+                        <a:rPr sz="1200" b="0">
+                          <a:solidFill>
+                            <a:srgbClr val="1A1A1A"/>
+                          </a:solidFill>
+                        </a:rPr>
+                        <a:t>15.71%</a:t>
+                      </a:r>
+                    </a:p>
+                  </a:txBody>
+                  <a:tcPr anchor="ctr">
+                    <a:solidFill>
+                      <a:srgbClr val="EEF3FC"/>
+                    </a:solidFill>
+                  </a:tcPr>
+                </a:tc>
+              </a:tr>
+              <a:tr h="620000">
+                <a:tc>
+                  <a:txBody>
+                    <a:bodyPr/>
+                    <a:lstStyle/>
+                    <a:p>
+                      <a:pPr algn="ctr"/>
+                      <a:r>
+                        <a:rPr sz="1200" b="0">
+                          <a:solidFill>
+                            <a:srgbClr val="1A1A1A"/>
+                          </a:solidFill>
+                        </a:rPr>
+                        <a:t>PlantDoc</a:t>
+                      </a:r>
+                    </a:p>
+                  </a:txBody>
+                  <a:tcPr anchor="ctr">
                     <a:solidFill>
                       <a:srgbClr val="FFFFFF"/>
                     </a:solidFill>
                   </a:tcPr>
                 </a:tc>
-              </a:tr>
-              <a:tr h="525000">
-                <a:tc>
-                  <a:txBody>
-                    <a:bodyPr/>
-                    <a:lstStyle/>
-                    <a:p>
-                      <a:pPr algn="ctr"/>
-                      <a:r>
-                        <a:rPr sz="1050" b="0">
-                          <a:solidFill>
-                            <a:srgbClr val="1A1A1A"/>
-                          </a:solidFill>
-                        </a:rPr>
-                        <a:t>Bangladesh</a:t>
-                      </a:r>
-                    </a:p>
-                  </a:txBody>
-                  <a:tcPr>
-                    <a:solidFill>
-                      <a:srgbClr val="EEF3FC"/>
-                    </a:solidFill>
-                  </a:tcPr>
-                </a:tc>
-                <a:tc>
-                  <a:txBody>
-                    <a:bodyPr/>
-                    <a:lstStyle/>
-                    <a:p>
-                      <a:pPr algn="ctr"/>
-                      <a:r>
-                        <a:rPr sz="1050" b="0">
-                          <a:solidFill>
-                            <a:srgbClr val="1A1A1A"/>
-                          </a:solidFill>
-                        </a:rPr>
-                        <a:t>21.80%</a:t>
-                      </a:r>
-                    </a:p>
-                  </a:txBody>
-                  <a:tcPr>
-                    <a:solidFill>
-                      <a:srgbClr val="EEF3FC"/>
-                    </a:solidFill>
-                  </a:tcPr>
-                </a:tc>
-                <a:tc>
-                  <a:txBody>
-                    <a:bodyPr/>
-                    <a:lstStyle/>
-                    <a:p>
-                      <a:pPr algn="ctr"/>
-                      <a:r>
-                        <a:rPr sz="1050" b="1">
-                          <a:solidFill>
-                            <a:srgbClr val="1A1A1A"/>
-                          </a:solidFill>
-                        </a:rPr>
-                        <a:t>22.34%</a:t>
-                      </a:r>
-                    </a:p>
-                  </a:txBody>
-                  <a:tcPr>
-                    <a:solidFill>
-                      <a:srgbClr val="EEF3FC"/>
-                    </a:solidFill>
-                  </a:tcPr>
-                </a:tc>
-                <a:tc>
-                  <a:txBody>
-                    <a:bodyPr/>
-                    <a:lstStyle/>
-                    <a:p>
-                      <a:pPr algn="ctr"/>
-                      <a:r>
-                        <a:rPr sz="1050" b="0">
-                          <a:solidFill>
-                            <a:srgbClr val="1A1A1A"/>
-                          </a:solidFill>
-                        </a:rPr>
-                        <a:t>15.71%</a:t>
-                      </a:r>
-                    </a:p>
-                  </a:txBody>
-                  <a:tcPr>
-                    <a:solidFill>
-                      <a:srgbClr val="EEF3FC"/>
-                    </a:solidFill>
-                  </a:tcPr>
-                </a:tc>
-                <a:tc>
-                  <a:txBody>
-                    <a:bodyPr/>
-                    <a:lstStyle/>
-                    <a:p>
-                      <a:pPr algn="ctr"/>
-                      <a:r>
-                        <a:rPr sz="1050" b="0">
-                          <a:solidFill>
-                            <a:srgbClr val="1A1A1A"/>
-                          </a:solidFill>
-                        </a:rPr>
-                        <a:t>14.71%</a:t>
-                      </a:r>
-                    </a:p>
-                  </a:txBody>
-                  <a:tcPr>
-                    <a:solidFill>
-                      <a:srgbClr val="EEF3FC"/>
-                    </a:solidFill>
-                  </a:tcPr>
-                </a:tc>
-              </a:tr>
-              <a:tr h="525000">
-                <a:tc>
-                  <a:txBody>
-                    <a:bodyPr/>
-                    <a:lstStyle/>
-                    <a:p>
-                      <a:pPr algn="ctr"/>
-                      <a:r>
-                        <a:rPr sz="1050" b="0">
-                          <a:solidFill>
-                            <a:srgbClr val="1A1A1A"/>
-                          </a:solidFill>
-                        </a:rPr>
-                        <a:t>PlantDoc</a:t>
-                      </a:r>
-                    </a:p>
-                  </a:txBody>
-                  <a:tcPr>
+                <a:tc>
+                  <a:txBody>
+                    <a:bodyPr/>
+                    <a:lstStyle/>
+                    <a:p>
+                      <a:pPr algn="ctr"/>
+                      <a:r>
+                        <a:rPr sz="1200" b="0">
+                          <a:solidFill>
+                            <a:srgbClr val="1A1A1A"/>
+                          </a:solidFill>
+                        </a:rPr>
+                        <a:t>19.89%</a:t>
+                      </a:r>
+                    </a:p>
+                  </a:txBody>
+                  <a:tcPr anchor="ctr">
                     <a:solidFill>
                       <a:srgbClr val="FFFFFF"/>
                     </a:solidFill>
@@ -19522,16 +19479,16 @@
                     <a:p>
                       <a:pPr algn="ctr"/>
                       <a:r>
-                        <a:rPr sz="1050" b="0">
-                          <a:solidFill>
-                            <a:srgbClr val="1A1A1A"/>
-                          </a:solidFill>
-                        </a:rPr>
-                        <a:t>19.89%</a:t>
-                      </a:r>
-                    </a:p>
-                  </a:txBody>
-                  <a:tcPr>
+                        <a:rPr sz="1200" b="1">
+                          <a:solidFill>
+                            <a:srgbClr val="1A1A1A"/>
+                          </a:solidFill>
+                        </a:rPr>
+                        <a:t>20.31%</a:t>
+                      </a:r>
+                    </a:p>
+                  </a:txBody>
+                  <a:tcPr anchor="ctr">
                     <a:solidFill>
                       <a:srgbClr val="FFFFFF"/>
                     </a:solidFill>
@@ -19544,29 +19501,7 @@
                     <a:p>
                       <a:pPr algn="ctr"/>
                       <a:r>
-                        <a:rPr sz="1050" b="1">
-                          <a:solidFill>
-                            <a:srgbClr val="1A1A1A"/>
-                          </a:solidFill>
-                        </a:rPr>
-                        <a:t>20.31%</a:t>
-                      </a:r>
-                    </a:p>
-                  </a:txBody>
-                  <a:tcPr>
-                    <a:solidFill>
-                      <a:srgbClr val="FFFFFF"/>
-                    </a:solidFill>
-                  </a:tcPr>
-                </a:tc>
-                <a:tc>
-                  <a:txBody>
-                    <a:bodyPr/>
-                    <a:lstStyle/>
-                    <a:p>
-                      <a:pPr algn="ctr"/>
-                      <a:r>
-                        <a:rPr sz="1050" b="0">
+                        <a:rPr sz="1200" b="0">
                           <a:solidFill>
                             <a:srgbClr val="1A1A1A"/>
                           </a:solidFill>
@@ -19575,29 +19510,7 @@
                       </a:r>
                     </a:p>
                   </a:txBody>
-                  <a:tcPr>
-                    <a:solidFill>
-                      <a:srgbClr val="FFFFFF"/>
-                    </a:solidFill>
-                  </a:tcPr>
-                </a:tc>
-                <a:tc>
-                  <a:txBody>
-                    <a:bodyPr/>
-                    <a:lstStyle/>
-                    <a:p>
-                      <a:pPr algn="ctr"/>
-                      <a:r>
-                        <a:rPr sz="1050" b="0">
-                          <a:solidFill>
-                            <a:srgbClr val="1A1A1A"/>
-                          </a:solidFill>
-                        </a:rPr>
-                        <a:t>12.41%</a:t>
-                      </a:r>
-                    </a:p>
-                  </a:txBody>
-                  <a:tcPr>
+                  <a:tcPr anchor="ctr">
                     <a:solidFill>
                       <a:srgbClr val="FFFFFF"/>
                     </a:solidFill>
@@ -19616,8 +19529,8 @@
         </p:nvSpPr>
         <p:spPr>
           <a:xfrm>
-            <a:off x="548640" y="4400000"/>
-            <a:ext cx="11091672" cy="900000"/>
+            <a:off x="548640" y="4800000"/>
+            <a:ext cx="11091672" cy="1500000"/>
           </a:xfrm>
           <a:prstGeom prst="rect">
             <a:avLst/>
@@ -19632,48 +19545,13 @@
           <a:p>
             <a:pPr algn="l"/>
             <a:r>
-              <a:rPr sz="1050" b="0" i="1">
+              <a:rPr sz="1300" b="0" i="1">
                 <a:solidFill>
                   <a:srgbClr val="5B5E6B"/>
                 </a:solidFill>
                 <a:latin typeface="Calibri"/>
               </a:rPr>
-              <a:t>클래스 3개뿐인 Taiwan은 AdaBN+마스킹이 최고다(38.85%, source 대비 +11.5%p) — BN 통계 교체의 부작용이 작기 때문. 반면 클래스가 많고 불균형한 Bangladesh(6개)·PlantDoc(8개)은 AdaBN/TENT가 마스킹과 결합해도 마스킹 단독보다 나쁘다 — BN 통계 전체 교체 자체가 여전히 해롭다는 뜻이다.</a:t>
-            </a:r>
-          </a:p>
-        </p:txBody>
-      </p:sp>
-      <p:sp>
-        <p:nvSpPr>
-          <p:cNvPr id="9" name="TextBox 4"/>
-          <p:cNvSpPr txBox="1"/>
-          <p:nvPr/>
-        </p:nvSpPr>
-        <p:spPr>
-          <a:xfrm>
-            <a:off x="548640" y="5400000"/>
-            <a:ext cx="11091672" cy="850000"/>
-          </a:xfrm>
-          <a:prstGeom prst="rect">
-            <a:avLst/>
-          </a:prstGeom>
-          <a:noFill/>
-        </p:spPr>
-        <p:txBody>
-          <a:bodyPr wrap="square" anchor="t" lIns="0" rIns="0" tIns="0" bIns="0">
-            <a:spAutoFit/>
-          </a:bodyPr>
-          <a:lstStyle/>
-          <a:p>
-            <a:pPr algn="l"/>
-            <a:r>
-              <a:rPr sz="1050" b="0" i="1">
-                <a:solidFill>
-                  <a:srgbClr val="5B5E6B"/>
-                </a:solidFill>
-                <a:latin typeface="Calibri"/>
-              </a:rPr>
-              <a:t>다음 시도: ① 마스킹을 적응 과정(entropy loss·BN 통계 계산) 자체에 반영하는 mask-aware adaptation  ② AdaBN 통계 완전 교체 대신 source/target 블렌딩으로 부작용 완화  ③ seed42 단일 결과 → 3-seed 통계 검증  ④ 개선이 제한적이면 보류했던 SHOT(마스킹된 라벨 공간 내 pseudo-labeling) 재검토</a:t>
+              <a:t>TENT는 마스킹을 적응 과정에도 반영했지만(mask-aware) 한 클래스로만 100% 예측하는 collapse가 났다. Diversity 정규화로 고쳐도 마스킹만 한 것보다 전부 나빠 최종안에서 제외했다. AdaBN도 momentum 블렌딩으로 약하게 섞어봤지만 Bangladesh·PlantDoc은 개선하지 못했다.</a:t>
             </a:r>
           </a:p>
         </p:txBody>
@@ -19769,7 +19647,7 @@
                 </a:solidFill>
                 <a:latin typeface="Calibri"/>
               </a:rPr>
-              <a:t>RESULT 7 · DOMAIN ADAPTATION (3/3)</a:t>
+              <a:t>RESULT 7 · DOMAIN ADAPTATION (3/5)</a:t>
             </a:r>
           </a:p>
         </p:txBody>
@@ -19804,7 +19682,7 @@
                 </a:solidFill>
                 <a:latin typeface="Cambria"/>
               </a:rPr>
-              <a:t>다음 시도 3가지 — SHOT이 최종 승자</a:t>
+              <a:t>최종 승자: SHOT (Pseudo-labeling + Info-max)</a:t>
             </a:r>
           </a:p>
         </p:txBody>
@@ -19817,8 +19695,8 @@
         </p:nvSpPr>
         <p:spPr>
           <a:xfrm>
-            <a:off x="548640" y="1250000"/>
-            <a:ext cx="11091672" cy="750000"/>
+            <a:off x="548640" y="1200000"/>
+            <a:ext cx="11091672" cy="1000000"/>
           </a:xfrm>
           <a:prstGeom prst="rect">
             <a:avLst/>
@@ -19833,13 +19711,13 @@
           <a:p>
             <a:pPr algn="l"/>
             <a:r>
-              <a:rPr sz="1050" b="0" i="0">
+              <a:rPr sz="1300" b="0" i="0">
                 <a:solidFill>
                   <a:srgbClr val="1A1A1A"/>
                 </a:solidFill>
                 <a:latin typeface="Calibri"/>
               </a:rPr>
-              <a:t>① TENT에 batch-diversity 정규화 추가(collapse 방지) ② AdaBN을 완전 교체 대신 momentum 블렌딩(0.05~0.3) ③ SHOT(Liang et al., ICML 2020) — pseudo-labeling+information-maximization으로 classifier는 고정하고 feature extractor 전체를 미세조정. 셋 다 class-restriction 마스킹과 결합해 비교했다.</a:t>
+              <a:t>Liang et al., ICML 2020. Source classifier는 고정하고 feature extractor만 미세조정한다. 마스킹된 클래스 안에서 pseudo-label을 할당하고, pseudo-label cross-entropy + information-maximization으로 학습한다.</a:t>
             </a:r>
           </a:p>
         </p:txBody>
@@ -19853,8 +19731,8 @@
           <p:nvPr/>
         </p:nvGraphicFramePr>
         <p:xfrm>
-          <a:off x="548640" y="2100000"/>
-          <a:ext cx="10950000" cy="2100000"/>
+          <a:off x="548640" y="2300000"/>
+          <a:ext cx="8800000" cy="2480000"/>
         </p:xfrm>
         <a:graphic>
           <a:graphicData uri="http://schemas.openxmlformats.org/drawingml/2006/table">
@@ -19863,21 +19741,20 @@
                 <a:tableStyleId>{5C22544A-7EE6-4342-B048-85BDC9FD1C3A}</a:tableStyleId>
               </a:tblPr>
               <a:tblGrid>
-                <a:gridCol w="1900000"/>
+                <a:gridCol w="1700000"/>
                 <a:gridCol w="2100000"/>
                 <a:gridCol w="2100000"/>
-                <a:gridCol w="2550000"/>
-                <a:gridCol w="2300000"/>
+                <a:gridCol w="2900000"/>
               </a:tblGrid>
-              <a:tr h="525000">
-                <a:tc>
-                  <a:txBody>
-                    <a:bodyPr/>
-                    <a:lstStyle/>
-                    <a:p>
-                      <a:pPr algn="ctr"/>
-                      <a:r>
-                        <a:rPr sz="1050" b="1">
+              <a:tr h="620000">
+                <a:tc>
+                  <a:txBody>
+                    <a:bodyPr/>
+                    <a:lstStyle/>
+                    <a:p>
+                      <a:pPr algn="ctr"/>
+                      <a:r>
+                        <a:rPr sz="1200" b="1">
                           <a:solidFill>
                             <a:srgbClr val="FFFFFF"/>
                           </a:solidFill>
@@ -19886,7 +19763,7 @@
                       </a:r>
                     </a:p>
                   </a:txBody>
-                  <a:tcPr>
+                  <a:tcPr anchor="ctr">
                     <a:solidFill>
                       <a:srgbClr val="1E2761"/>
                     </a:solidFill>
@@ -19899,7 +19776,7 @@
                     <a:p>
                       <a:pPr algn="ctr"/>
                       <a:r>
-                        <a:rPr sz="1050" b="1">
+                        <a:rPr sz="1200" b="1">
                           <a:solidFill>
                             <a:srgbClr val="FFFFFF"/>
                           </a:solidFill>
@@ -19908,7 +19785,7 @@
                       </a:r>
                     </a:p>
                   </a:txBody>
-                  <a:tcPr>
+                  <a:tcPr anchor="ctr">
                     <a:solidFill>
                       <a:srgbClr val="1E2761"/>
                     </a:solidFill>
@@ -19921,7 +19798,7 @@
                     <a:p>
                       <a:pPr algn="ctr"/>
                       <a:r>
-                        <a:rPr sz="1050" b="1">
+                        <a:rPr sz="1200" b="1">
                           <a:solidFill>
                             <a:srgbClr val="FFFFFF"/>
                           </a:solidFill>
@@ -19930,7 +19807,7 @@
                       </a:r>
                     </a:p>
                   </a:txBody>
-                  <a:tcPr>
+                  <a:tcPr anchor="ctr">
                     <a:solidFill>
                       <a:srgbClr val="1E2761"/>
                     </a:solidFill>
@@ -19943,53 +19820,31 @@
                     <a:p>
                       <a:pPr algn="ctr"/>
                       <a:r>
-                        <a:rPr sz="1050" b="1">
+                        <a:rPr sz="1200" b="1">
                           <a:solidFill>
                             <a:srgbClr val="FFFFFF"/>
                           </a:solidFill>
                         </a:rPr>
-                        <a:t>TENT+마스킹(수정판)</a:t>
-                      </a:r>
-                    </a:p>
-                  </a:txBody>
-                  <a:tcPr>
+                        <a:t>SHOT+마스킹(epoch=2)</a:t>
+                      </a:r>
+                    </a:p>
+                  </a:txBody>
+                  <a:tcPr anchor="ctr">
                     <a:solidFill>
                       <a:srgbClr val="1E2761"/>
                     </a:solidFill>
                   </a:tcPr>
                 </a:tc>
-                <a:tc>
-                  <a:txBody>
-                    <a:bodyPr/>
-                    <a:lstStyle/>
-                    <a:p>
-                      <a:pPr algn="ctr"/>
-                      <a:r>
-                        <a:rPr sz="1050" b="1">
-                          <a:solidFill>
-                            <a:srgbClr val="FFFFFF"/>
-                          </a:solidFill>
-                        </a:rPr>
-                        <a:t>SHOT+마스킹</a:t>
-                      </a:r>
-                    </a:p>
-                  </a:txBody>
-                  <a:tcPr>
-                    <a:solidFill>
-                      <a:srgbClr val="1E2761"/>
-                    </a:solidFill>
-                  </a:tcPr>
-                </a:tc>
               </a:tr>
-              <a:tr h="525000">
-                <a:tc>
-                  <a:txBody>
-                    <a:bodyPr/>
-                    <a:lstStyle/>
-                    <a:p>
-                      <a:pPr algn="ctr"/>
-                      <a:r>
-                        <a:rPr sz="1050" b="0">
+              <a:tr h="620000">
+                <a:tc>
+                  <a:txBody>
+                    <a:bodyPr/>
+                    <a:lstStyle/>
+                    <a:p>
+                      <a:pPr algn="ctr"/>
+                      <a:r>
+                        <a:rPr sz="1200" b="0">
                           <a:solidFill>
                             <a:srgbClr val="1A1A1A"/>
                           </a:solidFill>
@@ -19998,7 +19853,7 @@
                       </a:r>
                     </a:p>
                   </a:txBody>
-                  <a:tcPr>
+                  <a:tcPr anchor="ctr">
                     <a:solidFill>
                       <a:srgbClr val="FFFFFF"/>
                     </a:solidFill>
@@ -20011,7 +19866,7 @@
                     <a:p>
                       <a:pPr algn="ctr"/>
                       <a:r>
-                        <a:rPr sz="1050" b="0">
+                        <a:rPr sz="1200" b="0">
                           <a:solidFill>
                             <a:srgbClr val="1A1A1A"/>
                           </a:solidFill>
@@ -20020,7 +19875,7 @@
                       </a:r>
                     </a:p>
                   </a:txBody>
-                  <a:tcPr>
+                  <a:tcPr anchor="ctr">
                     <a:solidFill>
                       <a:srgbClr val="FFFFFF"/>
                     </a:solidFill>
@@ -20033,7 +19888,7 @@
                     <a:p>
                       <a:pPr algn="ctr"/>
                       <a:r>
-                        <a:rPr sz="1050" b="1">
+                        <a:rPr sz="1200" b="0">
                           <a:solidFill>
                             <a:srgbClr val="1A1A1A"/>
                           </a:solidFill>
@@ -20042,7 +19897,7 @@
                       </a:r>
                     </a:p>
                   </a:txBody>
-                  <a:tcPr>
+                  <a:tcPr anchor="ctr">
                     <a:solidFill>
                       <a:srgbClr val="FFFFFF"/>
                     </a:solidFill>
@@ -20055,174 +19910,152 @@
                     <a:p>
                       <a:pPr algn="ctr"/>
                       <a:r>
-                        <a:rPr sz="1050" b="0">
-                          <a:solidFill>
-                            <a:srgbClr val="1A1A1A"/>
-                          </a:solidFill>
-                        </a:rPr>
-                        <a:t>29.94%</a:t>
-                      </a:r>
-                    </a:p>
-                  </a:txBody>
-                  <a:tcPr>
+                        <a:rPr sz="1200" b="1">
+                          <a:solidFill>
+                            <a:srgbClr val="1A1A1A"/>
+                          </a:solidFill>
+                        </a:rPr>
+                        <a:t>42.04%</a:t>
+                      </a:r>
+                    </a:p>
+                  </a:txBody>
+                  <a:tcPr anchor="ctr">
                     <a:solidFill>
                       <a:srgbClr val="FFFFFF"/>
                     </a:solidFill>
                   </a:tcPr>
                 </a:tc>
-                <a:tc>
-                  <a:txBody>
-                    <a:bodyPr/>
-                    <a:lstStyle/>
-                    <a:p>
-                      <a:pPr algn="ctr"/>
-                      <a:r>
-                        <a:rPr sz="1050" b="0">
-                          <a:solidFill>
-                            <a:srgbClr val="1A1A1A"/>
-                          </a:solidFill>
-                        </a:rPr>
-                        <a:t>38.54%</a:t>
-                      </a:r>
-                    </a:p>
-                  </a:txBody>
-                  <a:tcPr>
+              </a:tr>
+              <a:tr h="620000">
+                <a:tc>
+                  <a:txBody>
+                    <a:bodyPr/>
+                    <a:lstStyle/>
+                    <a:p>
+                      <a:pPr algn="ctr"/>
+                      <a:r>
+                        <a:rPr sz="1200" b="0">
+                          <a:solidFill>
+                            <a:srgbClr val="1A1A1A"/>
+                          </a:solidFill>
+                        </a:rPr>
+                        <a:t>Bangladesh</a:t>
+                      </a:r>
+                    </a:p>
+                  </a:txBody>
+                  <a:tcPr anchor="ctr">
+                    <a:solidFill>
+                      <a:srgbClr val="EEF3FC"/>
+                    </a:solidFill>
+                  </a:tcPr>
+                </a:tc>
+                <a:tc>
+                  <a:txBody>
+                    <a:bodyPr/>
+                    <a:lstStyle/>
+                    <a:p>
+                      <a:pPr algn="ctr"/>
+                      <a:r>
+                        <a:rPr sz="1200" b="0">
+                          <a:solidFill>
+                            <a:srgbClr val="1A1A1A"/>
+                          </a:solidFill>
+                        </a:rPr>
+                        <a:t>22.34%</a:t>
+                      </a:r>
+                    </a:p>
+                  </a:txBody>
+                  <a:tcPr anchor="ctr">
+                    <a:solidFill>
+                      <a:srgbClr val="EEF3FC"/>
+                    </a:solidFill>
+                  </a:tcPr>
+                </a:tc>
+                <a:tc>
+                  <a:txBody>
+                    <a:bodyPr/>
+                    <a:lstStyle/>
+                    <a:p>
+                      <a:pPr algn="ctr"/>
+                      <a:r>
+                        <a:rPr sz="1200" b="0">
+                          <a:solidFill>
+                            <a:srgbClr val="1A1A1A"/>
+                          </a:solidFill>
+                        </a:rPr>
+                        <a:t>15.71%</a:t>
+                      </a:r>
+                    </a:p>
+                  </a:txBody>
+                  <a:tcPr anchor="ctr">
+                    <a:solidFill>
+                      <a:srgbClr val="EEF3FC"/>
+                    </a:solidFill>
+                  </a:tcPr>
+                </a:tc>
+                <a:tc>
+                  <a:txBody>
+                    <a:bodyPr/>
+                    <a:lstStyle/>
+                    <a:p>
+                      <a:pPr algn="ctr"/>
+                      <a:r>
+                        <a:rPr sz="1200" b="1">
+                          <a:solidFill>
+                            <a:srgbClr val="1A1A1A"/>
+                          </a:solidFill>
+                        </a:rPr>
+                        <a:t>30.79%</a:t>
+                      </a:r>
+                    </a:p>
+                  </a:txBody>
+                  <a:tcPr anchor="ctr">
+                    <a:solidFill>
+                      <a:srgbClr val="EEF3FC"/>
+                    </a:solidFill>
+                  </a:tcPr>
+                </a:tc>
+              </a:tr>
+              <a:tr h="620000">
+                <a:tc>
+                  <a:txBody>
+                    <a:bodyPr/>
+                    <a:lstStyle/>
+                    <a:p>
+                      <a:pPr algn="ctr"/>
+                      <a:r>
+                        <a:rPr sz="1200" b="0">
+                          <a:solidFill>
+                            <a:srgbClr val="1A1A1A"/>
+                          </a:solidFill>
+                        </a:rPr>
+                        <a:t>PlantDoc</a:t>
+                      </a:r>
+                    </a:p>
+                  </a:txBody>
+                  <a:tcPr anchor="ctr">
                     <a:solidFill>
                       <a:srgbClr val="FFFFFF"/>
                     </a:solidFill>
                   </a:tcPr>
                 </a:tc>
-              </a:tr>
-              <a:tr h="525000">
-                <a:tc>
-                  <a:txBody>
-                    <a:bodyPr/>
-                    <a:lstStyle/>
-                    <a:p>
-                      <a:pPr algn="ctr"/>
-                      <a:r>
-                        <a:rPr sz="1050" b="0">
-                          <a:solidFill>
-                            <a:srgbClr val="1A1A1A"/>
-                          </a:solidFill>
-                        </a:rPr>
-                        <a:t>Bangladesh</a:t>
-                      </a:r>
-                    </a:p>
-                  </a:txBody>
-                  <a:tcPr>
-                    <a:solidFill>
-                      <a:srgbClr val="EEF3FC"/>
-                    </a:solidFill>
-                  </a:tcPr>
-                </a:tc>
-                <a:tc>
-                  <a:txBody>
-                    <a:bodyPr/>
-                    <a:lstStyle/>
-                    <a:p>
-                      <a:pPr algn="ctr"/>
-                      <a:r>
-                        <a:rPr sz="1050" b="0">
-                          <a:solidFill>
-                            <a:srgbClr val="1A1A1A"/>
-                          </a:solidFill>
-                        </a:rPr>
-                        <a:t>22.34%</a:t>
-                      </a:r>
-                    </a:p>
-                  </a:txBody>
-                  <a:tcPr>
-                    <a:solidFill>
-                      <a:srgbClr val="EEF3FC"/>
-                    </a:solidFill>
-                  </a:tcPr>
-                </a:tc>
-                <a:tc>
-                  <a:txBody>
-                    <a:bodyPr/>
-                    <a:lstStyle/>
-                    <a:p>
-                      <a:pPr algn="ctr"/>
-                      <a:r>
-                        <a:rPr sz="1050" b="0">
-                          <a:solidFill>
-                            <a:srgbClr val="1A1A1A"/>
-                          </a:solidFill>
-                        </a:rPr>
-                        <a:t>15.71%</a:t>
-                      </a:r>
-                    </a:p>
-                  </a:txBody>
-                  <a:tcPr>
-                    <a:solidFill>
-                      <a:srgbClr val="EEF3FC"/>
-                    </a:solidFill>
-                  </a:tcPr>
-                </a:tc>
-                <a:tc>
-                  <a:txBody>
-                    <a:bodyPr/>
-                    <a:lstStyle/>
-                    <a:p>
-                      <a:pPr algn="ctr"/>
-                      <a:r>
-                        <a:rPr sz="1050" b="0">
-                          <a:solidFill>
-                            <a:srgbClr val="1A1A1A"/>
-                          </a:solidFill>
-                        </a:rPr>
-                        <a:t>13.71%</a:t>
-                      </a:r>
-                    </a:p>
-                  </a:txBody>
-                  <a:tcPr>
-                    <a:solidFill>
-                      <a:srgbClr val="EEF3FC"/>
-                    </a:solidFill>
-                  </a:tcPr>
-                </a:tc>
-                <a:tc>
-                  <a:txBody>
-                    <a:bodyPr/>
-                    <a:lstStyle/>
-                    <a:p>
-                      <a:pPr algn="ctr"/>
-                      <a:r>
-                        <a:rPr sz="1050" b="1">
-                          <a:solidFill>
-                            <a:srgbClr val="1A1A1A"/>
-                          </a:solidFill>
-                        </a:rPr>
-                        <a:t>27.97%</a:t>
-                      </a:r>
-                    </a:p>
-                  </a:txBody>
-                  <a:tcPr>
-                    <a:solidFill>
-                      <a:srgbClr val="EEF3FC"/>
-                    </a:solidFill>
-                  </a:tcPr>
-                </a:tc>
-              </a:tr>
-              <a:tr h="525000">
-                <a:tc>
-                  <a:txBody>
-                    <a:bodyPr/>
-                    <a:lstStyle/>
-                    <a:p>
-                      <a:pPr algn="ctr"/>
-                      <a:r>
-                        <a:rPr sz="1050" b="0">
-                          <a:solidFill>
-                            <a:srgbClr val="1A1A1A"/>
-                          </a:solidFill>
-                        </a:rPr>
-                        <a:t>PlantDoc</a:t>
-                      </a:r>
-                    </a:p>
-                  </a:txBody>
-                  <a:tcPr>
+                <a:tc>
+                  <a:txBody>
+                    <a:bodyPr/>
+                    <a:lstStyle/>
+                    <a:p>
+                      <a:pPr algn="ctr"/>
+                      <a:r>
+                        <a:rPr sz="1200" b="0">
+                          <a:solidFill>
+                            <a:srgbClr val="1A1A1A"/>
+                          </a:solidFill>
+                        </a:rPr>
+                        <a:t>20.31%</a:t>
+                      </a:r>
+                    </a:p>
+                  </a:txBody>
+                  <a:tcPr anchor="ctr">
                     <a:solidFill>
                       <a:srgbClr val="FFFFFF"/>
                     </a:solidFill>
@@ -20235,16 +20068,16 @@
                     <a:p>
                       <a:pPr algn="ctr"/>
                       <a:r>
-                        <a:rPr sz="1050" b="1">
-                          <a:solidFill>
-                            <a:srgbClr val="1A1A1A"/>
-                          </a:solidFill>
-                        </a:rPr>
-                        <a:t>20.31%</a:t>
-                      </a:r>
-                    </a:p>
-                  </a:txBody>
-                  <a:tcPr>
+                        <a:rPr sz="1200" b="0">
+                          <a:solidFill>
+                            <a:srgbClr val="1A1A1A"/>
+                          </a:solidFill>
+                        </a:rPr>
+                        <a:t>14.81%</a:t>
+                      </a:r>
+                    </a:p>
+                  </a:txBody>
+                  <a:tcPr anchor="ctr">
                     <a:solidFill>
                       <a:srgbClr val="FFFFFF"/>
                     </a:solidFill>
@@ -20257,60 +20090,16 @@
                     <a:p>
                       <a:pPr algn="ctr"/>
                       <a:r>
-                        <a:rPr sz="1050" b="0">
-                          <a:solidFill>
-                            <a:srgbClr val="1A1A1A"/>
-                          </a:solidFill>
-                        </a:rPr>
-                        <a:t>14.81%</a:t>
-                      </a:r>
-                    </a:p>
-                  </a:txBody>
-                  <a:tcPr>
-                    <a:solidFill>
-                      <a:srgbClr val="FFFFFF"/>
-                    </a:solidFill>
-                  </a:tcPr>
-                </a:tc>
-                <a:tc>
-                  <a:txBody>
-                    <a:bodyPr/>
-                    <a:lstStyle/>
-                    <a:p>
-                      <a:pPr algn="ctr"/>
-                      <a:r>
-                        <a:rPr sz="1050" b="0">
-                          <a:solidFill>
-                            <a:srgbClr val="1A1A1A"/>
-                          </a:solidFill>
-                        </a:rPr>
-                        <a:t>12.83%</a:t>
-                      </a:r>
-                    </a:p>
-                  </a:txBody>
-                  <a:tcPr>
-                    <a:solidFill>
-                      <a:srgbClr val="FFFFFF"/>
-                    </a:solidFill>
-                  </a:tcPr>
-                </a:tc>
-                <a:tc>
-                  <a:txBody>
-                    <a:bodyPr/>
-                    <a:lstStyle/>
-                    <a:p>
-                      <a:pPr algn="ctr"/>
-                      <a:r>
-                        <a:rPr sz="1050" b="0">
-                          <a:solidFill>
-                            <a:srgbClr val="1A1A1A"/>
-                          </a:solidFill>
-                        </a:rPr>
-                        <a:t>18.05%</a:t>
-                      </a:r>
-                    </a:p>
-                  </a:txBody>
-                  <a:tcPr>
+                        <a:rPr sz="1200" b="1">
+                          <a:solidFill>
+                            <a:srgbClr val="1A1A1A"/>
+                          </a:solidFill>
+                        </a:rPr>
+                        <a:t>19.46% (F1 0.182 1위)</a:t>
+                      </a:r>
+                    </a:p>
+                  </a:txBody>
+                  <a:tcPr anchor="ctr">
                     <a:solidFill>
                       <a:srgbClr val="FFFFFF"/>
                     </a:solidFill>
@@ -20329,8 +20118,8 @@
         </p:nvSpPr>
         <p:spPr>
           <a:xfrm>
-            <a:off x="548640" y="4400000"/>
-            <a:ext cx="11091672" cy="950000"/>
+            <a:off x="548640" y="4950000"/>
+            <a:ext cx="11091672" cy="1400000"/>
           </a:xfrm>
           <a:prstGeom prst="rect">
             <a:avLst/>
@@ -20345,27 +20134,27 @@
           <a:p>
             <a:pPr algn="l"/>
             <a:r>
-              <a:rPr sz="1050" b="0" i="1">
+              <a:rPr sz="1300" b="0" i="1">
                 <a:solidFill>
                   <a:srgbClr val="5B5E6B"/>
                 </a:solidFill>
                 <a:latin typeface="Calibri"/>
               </a:rPr>
-              <a:t>①TENT는 collapse(한 클래스만 100% 예측)를 고쳤지만 그래도 전부 마스킹-only보다 나빠 최종안에서 제외했다. ②AdaBN 블렌딩은 얼마나 약하게 섞어도 Bangladesh·PlantDoc에서 마스킹-only를 못 넘었다 — BN 통계를 조금이라도 건드리는 것 자체가 해로웠다는 뜻. ③SHOT은 유일하게 3개 데이터셋 모두에서 collapse 없이 안정적으로 잘 됐다 — Taiwan은 AdaBN과 거의 동률, Bangladesh는 전체 방법 중 최고, PlantDoc은 정확도는 비슷해도 macro F1이 전체 중 가장 높다.</a:t>
-            </a:r>
-          </a:p>
-        </p:txBody>
-      </p:sp>
-      <p:sp>
-        <p:nvSpPr>
-          <p:cNvPr id="9" name="TextBox 4"/>
+              <a:t>AdaBN/TENT와 달리 SHOT은 3개 데이터셋 전부에서 collapse 없이 안정적으로 잘 됐다 — 데이터셋마다 다른 방법을 골라야 했던 AdaBN/TENT와 달리 튜닝 없이 두루 통하는 유일한 방법이다.</a:t>
+            </a:r>
+          </a:p>
+        </p:txBody>
+      </p:sp>
+      <p:sp>
+        <p:nvSpPr>
+          <p:cNvPr id="8" name="TextBox 5"/>
           <p:cNvSpPr txBox="1"/>
           <p:nvPr/>
         </p:nvSpPr>
         <p:spPr>
           <a:xfrm>
-            <a:off x="548640" y="5400000"/>
-            <a:ext cx="11091672" cy="850000"/>
+            <a:off x="11430000" y="6446520"/>
+            <a:ext cx="548640" cy="274320"/>
           </a:xfrm>
           <a:prstGeom prst="rect">
             <a:avLst/>
@@ -20378,29 +20167,55 @@
           </a:bodyPr>
           <a:lstStyle/>
           <a:p>
-            <a:pPr algn="l"/>
-            <a:r>
-              <a:rPr sz="1050" b="0" i="1">
+            <a:pPr algn="r"/>
+            <a:r>
+              <a:rPr sz="1000" b="0" i="0">
                 <a:solidFill>
                   <a:srgbClr val="5B5E6B"/>
                 </a:solidFill>
                 <a:latin typeface="Calibri"/>
               </a:rPr>
-              <a:t>최종 권장 파이프라인: class-restriction 마스킹은 항상 적용 + 적응 방법은 SHOT을 기본으로 사용한다 (데이터셋마다 다른 방법을 골라야 했던 AdaBN/TENT와 달리 튜닝 없이 3개 전부에서 통한 유일한 방법). 현재 seed42 단일 결과이며, tiny_cnn_c(96px·bicubic) seed123/2026 재학습 후 3-seed로 재검증 중이다.</a:t>
-            </a:r>
-          </a:p>
-        </p:txBody>
-      </p:sp>
-      <p:sp>
-        <p:nvSpPr>
-          <p:cNvPr id="8" name="TextBox 5"/>
+              <a:t>25</a:t>
+            </a:r>
+          </a:p>
+        </p:txBody>
+      </p:sp>
+    </p:spTree>
+  </p:cSld>
+  <p:clrMapOvr>
+    <a:masterClrMapping/>
+  </p:clrMapOvr>
+</p:sld>
+</file>
+
+<file path=ppt/slides/slide29.xml><?xml version="1.0" encoding="utf-8"?>
+<p:sld xmlns:a="http://schemas.openxmlformats.org/drawingml/2006/main" xmlns:p="http://schemas.openxmlformats.org/presentationml/2006/main" xmlns:r="http://schemas.openxmlformats.org/officeDocument/2006/relationships">
+  <p:cSld>
+    <p:bg>
+      <p:bgPr>
+        <a:solidFill>
+          <a:srgbClr val="FFFFFF"/>
+        </a:solidFill>
+        <a:effectLst/>
+      </p:bgPr>
+    </p:bg>
+    <p:spTree>
+      <p:nvGrpSpPr>
+        <p:cNvPr id="1" name=""/>
+        <p:cNvGrpSpPr/>
+        <p:nvPr/>
+      </p:nvGrpSpPr>
+      <p:grpSpPr/>
+      <p:sp>
+        <p:nvSpPr>
+          <p:cNvPr id="2" name="TextBox 1"/>
           <p:cNvSpPr txBox="1"/>
           <p:nvPr/>
         </p:nvSpPr>
         <p:spPr>
           <a:xfrm>
-            <a:off x="11430000" y="6446520"/>
-            <a:ext cx="548640" cy="274320"/>
+            <a:off x="548640" y="292608"/>
+            <a:ext cx="9144000" cy="292608"/>
           </a:xfrm>
           <a:prstGeom prst="rect">
             <a:avLst/>
@@ -20413,6 +20228,170 @@
           </a:bodyPr>
           <a:lstStyle/>
           <a:p>
+            <a:pPr algn="l"/>
+            <a:r>
+              <a:rPr sz="1050" b="1" i="0">
+                <a:solidFill>
+                  <a:srgbClr val="2A78D6"/>
+                </a:solidFill>
+                <a:latin typeface="Calibri"/>
+              </a:rPr>
+              <a:t>RESULT 7 · DOMAIN ADAPTATION (4/5)</a:t>
+            </a:r>
+          </a:p>
+        </p:txBody>
+      </p:sp>
+      <p:sp>
+        <p:nvSpPr>
+          <p:cNvPr id="3" name="TextBox 2"/>
+          <p:cNvSpPr txBox="1"/>
+          <p:nvPr/>
+        </p:nvSpPr>
+        <p:spPr>
+          <a:xfrm>
+            <a:off x="548640" y="566928"/>
+            <a:ext cx="10972800" cy="548640"/>
+          </a:xfrm>
+          <a:prstGeom prst="rect">
+            <a:avLst/>
+          </a:prstGeom>
+          <a:noFill/>
+        </p:spPr>
+        <p:txBody>
+          <a:bodyPr wrap="square" anchor="t" lIns="0" rIns="0" tIns="0" bIns="0">
+            <a:spAutoFit/>
+          </a:bodyPr>
+          <a:lstStyle/>
+          <a:p>
+            <a:pPr algn="l"/>
+            <a:r>
+              <a:rPr sz="2400" b="1" i="0">
+                <a:solidFill>
+                  <a:srgbClr val="1E2761"/>
+                </a:solidFill>
+                <a:latin typeface="Cambria"/>
+              </a:rPr>
+              <a:t>SHOT epoch 수를 어떻게 정했나</a:t>
+            </a:r>
+          </a:p>
+        </p:txBody>
+      </p:sp>
+      <p:sp>
+        <p:nvSpPr>
+          <p:cNvPr id="4" name="TextBox 3"/>
+          <p:cNvSpPr txBox="1"/>
+          <p:nvPr/>
+        </p:nvSpPr>
+        <p:spPr>
+          <a:xfrm>
+            <a:off x="548640" y="1200000"/>
+            <a:ext cx="11091672" cy="900000"/>
+          </a:xfrm>
+          <a:prstGeom prst="rect">
+            <a:avLst/>
+          </a:prstGeom>
+          <a:noFill/>
+        </p:spPr>
+        <p:txBody>
+          <a:bodyPr wrap="square" anchor="t" lIns="0" rIns="0" tIns="0" bIns="0">
+            <a:spAutoFit/>
+          </a:bodyPr>
+          <a:lstStyle/>
+          <a:p>
+            <a:pPr algn="l"/>
+            <a:r>
+              <a:rPr sz="1300" b="0" i="0">
+                <a:solidFill>
+                  <a:srgbClr val="1A1A1A"/>
+                </a:solidFill>
+                <a:latin typeface="Calibri"/>
+              </a:rPr>
+              <a:t>SHOT은 epoch을 늘릴수록 더 많이 학습한다. 데이터셋마다 target accuracy가 가장 높은 epoch을 골라 보고하면 label-free 전제와 모순되므로, epoch별 민감도부터 확인했다.</a:t>
+            </a:r>
+          </a:p>
+        </p:txBody>
+      </p:sp>
+      <p:pic>
+        <p:nvPicPr>
+          <p:cNvPr id="10" name="Picture" descr="SHOT epoch sensitivity chart"/>
+          <p:cNvPicPr>
+            <a:picLocks noChangeAspect="1"/>
+          </p:cNvPicPr>
+          <p:nvPr/>
+        </p:nvPicPr>
+        <p:blipFill>
+          <a:blip r:embed="rId2"/>
+          <a:stretch>
+            <a:fillRect/>
+          </a:stretch>
+        </p:blipFill>
+        <p:spPr>
+          <a:xfrm>
+            <a:off x="3845847" y="2150000"/>
+            <a:ext cx="4500000" cy="2924927"/>
+          </a:xfrm>
+          <a:prstGeom prst="rect">
+            <a:avLst/>
+          </a:prstGeom>
+        </p:spPr>
+      </p:pic>
+      <p:sp>
+        <p:nvSpPr>
+          <p:cNvPr id="6" name="TextBox 4"/>
+          <p:cNvSpPr txBox="1"/>
+          <p:nvPr/>
+        </p:nvSpPr>
+        <p:spPr>
+          <a:xfrm>
+            <a:off x="548640" y="5224927"/>
+            <a:ext cx="11091672" cy="950000"/>
+          </a:xfrm>
+          <a:prstGeom prst="rect">
+            <a:avLst/>
+          </a:prstGeom>
+          <a:noFill/>
+        </p:spPr>
+        <p:txBody>
+          <a:bodyPr wrap="square" anchor="t" lIns="0" rIns="0" tIns="0" bIns="0">
+            <a:spAutoFit/>
+          </a:bodyPr>
+          <a:lstStyle/>
+          <a:p>
+            <a:pPr algn="l"/>
+            <a:r>
+              <a:rPr sz="1300" b="0" i="1">
+                <a:solidFill>
+                  <a:srgbClr val="5B5E6B"/>
+                </a:solidFill>
+                <a:latin typeface="Calibri"/>
+              </a:rPr>
+              <a:t>Taiwan(클래스 3개)은 epoch이 늘수록 계속 좋아지지만, Bangladesh(6개)·PlantDoc(8개)은 epoch 2~3에서 정점을 찍고 pseudo-label 과적합으로 꺾인다. 그래서 공통 epoch=2를 사전 기준으로 고정했다.</a:t>
+            </a:r>
+          </a:p>
+        </p:txBody>
+      </p:sp>
+      <p:sp>
+        <p:nvSpPr>
+          <p:cNvPr id="8" name="TextBox 5"/>
+          <p:cNvSpPr txBox="1"/>
+          <p:nvPr/>
+        </p:nvSpPr>
+        <p:spPr>
+          <a:xfrm>
+            <a:off x="11430000" y="6446520"/>
+            <a:ext cx="548640" cy="274320"/>
+          </a:xfrm>
+          <a:prstGeom prst="rect">
+            <a:avLst/>
+          </a:prstGeom>
+          <a:noFill/>
+        </p:spPr>
+        <p:txBody>
+          <a:bodyPr wrap="square" anchor="t" lIns="0" rIns="0" tIns="0" bIns="0">
+            <a:spAutoFit/>
+          </a:bodyPr>
+          <a:lstStyle/>
+          <a:p>
             <a:pPr algn="r"/>
             <a:r>
               <a:rPr sz="1000" b="0" i="0">
@@ -20421,7 +20400,7 @@
                 </a:solidFill>
                 <a:latin typeface="Calibri"/>
               </a:rPr>
-              <a:t>25</a:t>
+              <a:t>26</a:t>
             </a:r>
           </a:p>
         </p:txBody>
@@ -21196,6 +21175,242 @@
                 <a:latin typeface="Calibri"/>
               </a:rPr>
               <a:t>02</a:t>
+            </a:r>
+          </a:p>
+        </p:txBody>
+      </p:sp>
+    </p:spTree>
+  </p:cSld>
+  <p:clrMapOvr>
+    <a:masterClrMapping/>
+  </p:clrMapOvr>
+</p:sld>
+</file>
+
+<file path=ppt/slides/slide30.xml><?xml version="1.0" encoding="utf-8"?>
+<p:sld xmlns:a="http://schemas.openxmlformats.org/drawingml/2006/main" xmlns:p="http://schemas.openxmlformats.org/presentationml/2006/main" xmlns:r="http://schemas.openxmlformats.org/officeDocument/2006/relationships">
+  <p:cSld>
+    <p:bg>
+      <p:bgPr>
+        <a:solidFill>
+          <a:srgbClr val="FFFFFF"/>
+        </a:solidFill>
+        <a:effectLst/>
+      </p:bgPr>
+    </p:bg>
+    <p:spTree>
+      <p:nvGrpSpPr>
+        <p:cNvPr id="1" name=""/>
+        <p:cNvGrpSpPr/>
+        <p:nvPr/>
+      </p:nvGrpSpPr>
+      <p:grpSpPr/>
+      <p:sp>
+        <p:nvSpPr>
+          <p:cNvPr id="2" name="TextBox 1"/>
+          <p:cNvSpPr txBox="1"/>
+          <p:nvPr/>
+        </p:nvSpPr>
+        <p:spPr>
+          <a:xfrm>
+            <a:off x="548640" y="292608"/>
+            <a:ext cx="9144000" cy="292608"/>
+          </a:xfrm>
+          <a:prstGeom prst="rect">
+            <a:avLst/>
+          </a:prstGeom>
+          <a:noFill/>
+        </p:spPr>
+        <p:txBody>
+          <a:bodyPr wrap="square" anchor="t" lIns="0" rIns="0" tIns="0" bIns="0">
+            <a:spAutoFit/>
+          </a:bodyPr>
+          <a:lstStyle/>
+          <a:p>
+            <a:pPr algn="l"/>
+            <a:r>
+              <a:rPr sz="1050" b="1" i="0">
+                <a:solidFill>
+                  <a:srgbClr val="2A78D6"/>
+                </a:solidFill>
+                <a:latin typeface="Calibri"/>
+              </a:rPr>
+              <a:t>RESULT 7 · DOMAIN ADAPTATION (5/5)</a:t>
+            </a:r>
+          </a:p>
+        </p:txBody>
+      </p:sp>
+      <p:sp>
+        <p:nvSpPr>
+          <p:cNvPr id="3" name="TextBox 2"/>
+          <p:cNvSpPr txBox="1"/>
+          <p:nvPr/>
+        </p:nvSpPr>
+        <p:spPr>
+          <a:xfrm>
+            <a:off x="548640" y="566928"/>
+            <a:ext cx="10972800" cy="548640"/>
+          </a:xfrm>
+          <a:prstGeom prst="rect">
+            <a:avLst/>
+          </a:prstGeom>
+          <a:noFill/>
+        </p:spPr>
+        <p:txBody>
+          <a:bodyPr wrap="square" anchor="t" lIns="0" rIns="0" tIns="0" bIns="0">
+            <a:spAutoFit/>
+          </a:bodyPr>
+          <a:lstStyle/>
+          <a:p>
+            <a:pPr algn="l"/>
+            <a:r>
+              <a:rPr sz="2400" b="1" i="0">
+                <a:solidFill>
+                  <a:srgbClr val="1E2761"/>
+                </a:solidFill>
+                <a:latin typeface="Cambria"/>
+              </a:rPr>
+              <a:t>최종 권장 파이프라인 + 다음 과제</a:t>
+            </a:r>
+          </a:p>
+        </p:txBody>
+      </p:sp>
+      <p:sp>
+        <p:nvSpPr>
+          <p:cNvPr id="4" name="TextBox H"/>
+          <p:cNvSpPr txBox="1"/>
+          <p:nvPr/>
+        </p:nvSpPr>
+        <p:spPr>
+          <a:xfrm>
+            <a:off x="548640" y="1500000"/>
+            <a:ext cx="11091672" cy="1200000"/>
+          </a:xfrm>
+          <a:prstGeom prst="rect">
+            <a:avLst/>
+          </a:prstGeom>
+          <a:noFill/>
+        </p:spPr>
+        <p:txBody>
+          <a:bodyPr wrap="square" anchor="ctr" lIns="0" rIns="0" tIns="0" bIns="0">
+            <a:spAutoFit/>
+          </a:bodyPr>
+          <a:lstStyle/>
+          <a:p>
+            <a:pPr algn="ctr"/>
+            <a:r>
+              <a:rPr sz="1700" b="1" i="0">
+                <a:solidFill>
+                  <a:srgbClr val="1E2761"/>
+                </a:solidFill>
+                <a:latin typeface="Calibri"/>
+              </a:rPr>
+              <a:t>최종 권장: Class-restriction 마스킹은 항상 적용 + SHOT(epoch=2)을 기본 적응 방법으로 사용</a:t>
+            </a:r>
+          </a:p>
+        </p:txBody>
+      </p:sp>
+      <p:sp>
+        <p:nvSpPr>
+          <p:cNvPr id="5" name="TextBox 4"/>
+          <p:cNvSpPr txBox="1"/>
+          <p:nvPr/>
+        </p:nvSpPr>
+        <p:spPr>
+          <a:xfrm>
+            <a:off x="548640" y="2950000"/>
+            <a:ext cx="11091672" cy="1300000"/>
+          </a:xfrm>
+          <a:prstGeom prst="rect">
+            <a:avLst/>
+          </a:prstGeom>
+          <a:noFill/>
+        </p:spPr>
+        <p:txBody>
+          <a:bodyPr wrap="square" anchor="t" lIns="0" rIns="0" tIns="0" bIns="0">
+            <a:spAutoFit/>
+          </a:bodyPr>
+          <a:lstStyle/>
+          <a:p>
+            <a:pPr algn="l"/>
+            <a:r>
+              <a:rPr sz="1300" b="0" i="1">
+                <a:solidFill>
+                  <a:srgbClr val="5B5E6B"/>
+                </a:solidFill>
+                <a:latin typeface="Calibri"/>
+              </a:rPr>
+              <a:t>데이터셋마다 다른 방법을 골라야 했던 AdaBN(Taiwan 전용)·TENT(전부 탈락)와 달리, SHOT은 튜닝 없이 3개 데이터셋 전부에서 collapse 없이 최고 또는 최고에 가까운 성능을 낸 유일한 방법이다.</a:t>
+            </a:r>
+          </a:p>
+        </p:txBody>
+      </p:sp>
+      <p:sp>
+        <p:nvSpPr>
+          <p:cNvPr id="6" name="TextBox 4"/>
+          <p:cNvSpPr txBox="1"/>
+          <p:nvPr/>
+        </p:nvSpPr>
+        <p:spPr>
+          <a:xfrm>
+            <a:off x="548640" y="4450000"/>
+            <a:ext cx="11091672" cy="1400000"/>
+          </a:xfrm>
+          <a:prstGeom prst="rect">
+            <a:avLst/>
+          </a:prstGeom>
+          <a:noFill/>
+        </p:spPr>
+        <p:txBody>
+          <a:bodyPr wrap="square" anchor="t" lIns="0" rIns="0" tIns="0" bIns="0">
+            <a:spAutoFit/>
+          </a:bodyPr>
+          <a:lstStyle/>
+          <a:p>
+            <a:pPr algn="l"/>
+            <a:r>
+              <a:rPr sz="1300" b="0" i="1">
+                <a:solidFill>
+                  <a:srgbClr val="5B5E6B"/>
+                </a:solidFill>
+                <a:latin typeface="Calibri"/>
+              </a:rPr>
+              <a:t>남은 과제: 지금은 seed42 단일 실행 결과다. tiny_cnn_c(96px·bicubic)를 seed123/2026에서 추가 학습해 이 비교 전체를 3-seed로 재검증할 계획이다(seed123 학습 진행 중).</a:t>
+            </a:r>
+          </a:p>
+        </p:txBody>
+      </p:sp>
+      <p:sp>
+        <p:nvSpPr>
+          <p:cNvPr id="8" name="TextBox 5"/>
+          <p:cNvSpPr txBox="1"/>
+          <p:nvPr/>
+        </p:nvSpPr>
+        <p:spPr>
+          <a:xfrm>
+            <a:off x="11430000" y="6446520"/>
+            <a:ext cx="548640" cy="274320"/>
+          </a:xfrm>
+          <a:prstGeom prst="rect">
+            <a:avLst/>
+          </a:prstGeom>
+          <a:noFill/>
+        </p:spPr>
+        <p:txBody>
+          <a:bodyPr wrap="square" anchor="t" lIns="0" rIns="0" tIns="0" bIns="0">
+            <a:spAutoFit/>
+          </a:bodyPr>
+          <a:lstStyle/>
+          <a:p>
+            <a:pPr algn="r"/>
+            <a:r>
+              <a:rPr sz="1000" b="0" i="0">
+                <a:solidFill>
+                  <a:srgbClr val="5B5E6B"/>
+                </a:solidFill>
+                <a:latin typeface="Calibri"/>
+              </a:rPr>
+              <a:t>27</a:t>
             </a:r>
           </a:p>
         </p:txBody>

--- a/docs/CNN_토마토_병해분류_V2_진행보고.pptx
+++ b/docs/CNN_토마토_병해분류_V2_진행보고.pptx
@@ -33,6 +33,7 @@
     <p:sldId id="283" r:id="rId27"/>
     <p:sldId id="284" r:id="rId28"/>
     <p:sldId id="285" r:id="rId29"/>
+    <p:sldId id="286" r:id="rId36"/>
     <p:sldId id="277" r:id="rId30"/>
     <p:sldId id="278" r:id="rId31"/>
   </p:sldIdLst>
@@ -17549,7 +17550,7 @@
                 </a:solidFill>
                 <a:latin typeface="Calibri"/>
               </a:rPr>
-              <a:t>RESULT 7 · DOMAIN ADAPTATION (1/5)</a:t>
+              <a:t>RESULT 7 · DOMAIN ADAPTATION (1/6)</a:t>
             </a:r>
           </a:p>
         </p:txBody>
@@ -18308,7 +18309,7 @@
                 </a:solidFill>
                 <a:latin typeface="Calibri"/>
               </a:rPr>
-              <a:t>RESULT 7 · DOMAIN ADAPTATION (2/5)</a:t>
+              <a:t>RESULT 7 · DOMAIN ADAPTATION (2/6)</a:t>
             </a:r>
           </a:p>
         </p:txBody>
@@ -18948,7 +18949,7 @@
                 </a:solidFill>
                 <a:latin typeface="Calibri"/>
               </a:rPr>
-              <a:t>RESULT 7 · DOMAIN ADAPTATION (3/5)</a:t>
+              <a:t>RESULT 7 · DOMAIN ADAPTATION (3/6)</a:t>
             </a:r>
           </a:p>
         </p:txBody>
@@ -19786,7 +19787,7 @@
                 </a:solidFill>
                 <a:latin typeface="Calibri"/>
               </a:rPr>
-              <a:t>RESULT 7 · DOMAIN ADAPTATION (4/5)</a:t>
+              <a:t>RESULT 7 · DOMAIN ADAPTATION (4/6)</a:t>
             </a:r>
           </a:p>
         </p:txBody>
@@ -20315,7 +20316,7 @@
                 </a:solidFill>
                 <a:latin typeface="Calibri"/>
               </a:rPr>
-              <a:t>RESULT 7 · DOMAIN ADAPTATION (5/5)</a:t>
+              <a:t>RESULT 7 · DOMAIN ADAPTATION (5/6)</a:t>
             </a:r>
           </a:p>
         </p:txBody>
@@ -21522,7 +21523,7 @@
                 </a:solidFill>
                 <a:latin typeface="Calibri"/>
               </a:rPr>
-              <a:t>28</a:t>
+              <a:t>29</a:t>
             </a:r>
           </a:p>
         </p:txBody>
@@ -22944,7 +22945,599 @@
                 </a:solidFill>
                 <a:latin typeface="Calibri"/>
               </a:rPr>
-              <a:t>29</a:t>
+              <a:t>30</a:t>
+            </a:r>
+          </a:p>
+        </p:txBody>
+      </p:sp>
+    </p:spTree>
+  </p:cSld>
+  <p:clrMapOvr>
+    <a:masterClrMapping/>
+  </p:clrMapOvr>
+</p:sld>
+</file>
+
+<file path=ppt/slides/slide31.xml><?xml version="1.0" encoding="utf-8"?>
+<p:sld xmlns:a="http://schemas.openxmlformats.org/drawingml/2006/main" xmlns:p="http://schemas.openxmlformats.org/presentationml/2006/main" xmlns:r="http://schemas.openxmlformats.org/officeDocument/2006/relationships">
+  <p:cSld>
+    <p:bg>
+      <p:bgPr>
+        <a:solidFill>
+          <a:srgbClr val="FFFFFF"/>
+        </a:solidFill>
+        <a:effectLst/>
+      </p:bgPr>
+    </p:bg>
+    <p:spTree>
+      <p:nvGrpSpPr>
+        <p:cNvPr id="1" name=""/>
+        <p:cNvGrpSpPr/>
+        <p:nvPr/>
+      </p:nvGrpSpPr>
+      <p:grpSpPr/>
+      <p:sp>
+        <p:nvSpPr>
+          <p:cNvPr id="2" name="TextBox 1"/>
+          <p:cNvSpPr txBox="1"/>
+          <p:nvPr/>
+        </p:nvSpPr>
+        <p:spPr>
+          <a:xfrm>
+            <a:off x="548640" y="292608"/>
+            <a:ext cx="9144000" cy="292608"/>
+          </a:xfrm>
+          <a:prstGeom prst="rect">
+            <a:avLst/>
+          </a:prstGeom>
+          <a:noFill/>
+        </p:spPr>
+        <p:txBody>
+          <a:bodyPr wrap="square" anchor="t" lIns="0" rIns="0" tIns="0" bIns="0">
+            <a:spAutoFit/>
+          </a:bodyPr>
+          <a:lstStyle/>
+          <a:p>
+            <a:pPr algn="l"/>
+            <a:r>
+              <a:rPr sz="1050" b="1" i="0">
+                <a:solidFill>
+                  <a:srgbClr val="2A78D6"/>
+                </a:solidFill>
+                <a:latin typeface="Calibri"/>
+              </a:rPr>
+              <a:t>RESULT 7 · DOMAIN ADAPTATION (6/6)</a:t>
+            </a:r>
+          </a:p>
+        </p:txBody>
+      </p:sp>
+      <p:sp>
+        <p:nvSpPr>
+          <p:cNvPr id="3" name="TextBox 2"/>
+          <p:cNvSpPr txBox="1"/>
+          <p:nvPr/>
+        </p:nvSpPr>
+        <p:spPr>
+          <a:xfrm>
+            <a:off x="548640" y="566928"/>
+            <a:ext cx="10972800" cy="548640"/>
+          </a:xfrm>
+          <a:prstGeom prst="rect">
+            <a:avLst/>
+          </a:prstGeom>
+          <a:noFill/>
+        </p:spPr>
+        <p:txBody>
+          <a:bodyPr wrap="square" anchor="t" lIns="0" rIns="0" tIns="0" bIns="0">
+            <a:spAutoFit/>
+          </a:bodyPr>
+          <a:lstStyle/>
+          <a:p>
+            <a:pPr algn="l"/>
+            <a:r>
+              <a:rPr sz="2400" b="1" i="0">
+                <a:solidFill>
+                  <a:srgbClr val="1E2761"/>
+                </a:solidFill>
+                <a:latin typeface="Cambria"/>
+              </a:rPr>
+              <a:t>추가 검증: 모델을 더 줄이면 과적합이 줄어들까?</a:t>
+            </a:r>
+          </a:p>
+        </p:txBody>
+      </p:sp>
+      <p:sp>
+        <p:nvSpPr>
+          <p:cNvPr id="4" name="TextBox 3"/>
+          <p:cNvSpPr txBox="1"/>
+          <p:nvPr/>
+        </p:nvSpPr>
+        <p:spPr>
+          <a:xfrm>
+            <a:off x="548640" y="1200000"/>
+            <a:ext cx="11091672" cy="950000"/>
+          </a:xfrm>
+          <a:prstGeom prst="rect">
+            <a:avLst/>
+          </a:prstGeom>
+          <a:noFill/>
+        </p:spPr>
+        <p:txBody>
+          <a:bodyPr wrap="square" anchor="t" lIns="0" rIns="0" tIns="0" bIns="0">
+            <a:spAutoFit/>
+          </a:bodyPr>
+          <a:lstStyle/>
+          <a:p>
+            <a:pPr algn="l"/>
+            <a:r>
+              <a:rPr sz="1300" b="0" i="0">
+                <a:solidFill>
+                  <a:srgbClr val="1A1A1A"/>
+                </a:solidFill>
+                <a:latin typeface="Calibri"/>
+              </a:rPr>
+              <a:t>교수님 피드백: SHOT이 epoch 2만 넘어도 과적합되는 건 모델 용량 때문 아니냐 — 채널을 32→32→64→64로 절반 줄여보라는 제안. tiny_cnn_c_lite(10.2K 파라미터, 기존의 약 1/3)를 96px·bilinear로 추가 학습해 검증했다.</a:t>
+            </a:r>
+          </a:p>
+        </p:txBody>
+      </p:sp>
+      <p:graphicFrame>
+        <p:nvGraphicFramePr>
+          <p:cNvPr id="7" name="Table"/>
+          <p:cNvGraphicFramePr>
+            <a:graphicFrameLocks noGrp="1"/>
+          </p:cNvGraphicFramePr>
+          <p:nvPr/>
+        </p:nvGraphicFramePr>
+        <p:xfrm>
+          <a:off x="548640" y="2250000"/>
+          <a:ext cx="6700000" cy="2400000"/>
+        </p:xfrm>
+        <a:graphic>
+          <a:graphicData uri="http://schemas.openxmlformats.org/drawingml/2006/table">
+            <a:tbl>
+              <a:tblPr firstRow="1" bandRow="1">
+                <a:tableStyleId>{5C22544A-7EE6-4342-B048-85BDC9FD1C3A}</a:tableStyleId>
+              </a:tblPr>
+              <a:tblGrid>
+                <a:gridCol w="2900000"/>
+                <a:gridCol w="1900000"/>
+                <a:gridCol w="1900000"/>
+              </a:tblGrid>
+              <a:tr h="480000">
+                <a:tc>
+                  <a:txBody>
+                    <a:bodyPr/>
+                    <a:lstStyle/>
+                    <a:p>
+                      <a:pPr algn="ctr"/>
+                      <a:r>
+                        <a:rPr sz="1200" b="1">
+                          <a:solidFill>
+                            <a:srgbClr val="FFFFFF"/>
+                          </a:solidFill>
+                        </a:rPr>
+                        <a:t>항목</a:t>
+                      </a:r>
+                    </a:p>
+                  </a:txBody>
+                  <a:tcPr anchor="ctr">
+                    <a:solidFill>
+                      <a:srgbClr val="1E2761"/>
+                    </a:solidFill>
+                  </a:tcPr>
+                </a:tc>
+                <a:tc>
+                  <a:txBody>
+                    <a:bodyPr/>
+                    <a:lstStyle/>
+                    <a:p>
+                      <a:pPr algn="ctr"/>
+                      <a:r>
+                        <a:rPr sz="1200" b="1">
+                          <a:solidFill>
+                            <a:srgbClr val="FFFFFF"/>
+                          </a:solidFill>
+                        </a:rPr>
+                        <a:t>tiny_cnn_c (31.5K)</a:t>
+                      </a:r>
+                    </a:p>
+                  </a:txBody>
+                  <a:tcPr anchor="ctr">
+                    <a:solidFill>
+                      <a:srgbClr val="1E2761"/>
+                    </a:solidFill>
+                  </a:tcPr>
+                </a:tc>
+                <a:tc>
+                  <a:txBody>
+                    <a:bodyPr/>
+                    <a:lstStyle/>
+                    <a:p>
+                      <a:pPr algn="ctr"/>
+                      <a:r>
+                        <a:rPr sz="1200" b="1">
+                          <a:solidFill>
+                            <a:srgbClr val="FFFFFF"/>
+                          </a:solidFill>
+                        </a:rPr>
+                        <a:t>tiny_cnn_c_lite (10.2K)</a:t>
+                      </a:r>
+                    </a:p>
+                  </a:txBody>
+                  <a:tcPr anchor="ctr">
+                    <a:solidFill>
+                      <a:srgbClr val="1E2761"/>
+                    </a:solidFill>
+                  </a:tcPr>
+                </a:tc>
+              </a:tr>
+              <a:tr h="480000">
+                <a:tc>
+                  <a:txBody>
+                    <a:bodyPr/>
+                    <a:lstStyle/>
+                    <a:p>
+                      <a:pPr algn="ctr"/>
+                      <a:r>
+                        <a:rPr sz="1200" b="0">
+                          <a:solidFill>
+                            <a:srgbClr val="1A1A1A"/>
+                          </a:solidFill>
+                        </a:rPr>
+                        <a:t>내부 정확도</a:t>
+                      </a:r>
+                    </a:p>
+                  </a:txBody>
+                  <a:tcPr anchor="ctr">
+                    <a:solidFill>
+                      <a:srgbClr val="FFFFFF"/>
+                    </a:solidFill>
+                  </a:tcPr>
+                </a:tc>
+                <a:tc>
+                  <a:txBody>
+                    <a:bodyPr/>
+                    <a:lstStyle/>
+                    <a:p>
+                      <a:pPr algn="ctr"/>
+                      <a:r>
+                        <a:rPr sz="1200" b="1">
+                          <a:solidFill>
+                            <a:srgbClr val="1A1A1A"/>
+                          </a:solidFill>
+                        </a:rPr>
+                        <a:t>96.59%</a:t>
+                      </a:r>
+                    </a:p>
+                  </a:txBody>
+                  <a:tcPr anchor="ctr">
+                    <a:solidFill>
+                      <a:srgbClr val="FFFFFF"/>
+                    </a:solidFill>
+                  </a:tcPr>
+                </a:tc>
+                <a:tc>
+                  <a:txBody>
+                    <a:bodyPr/>
+                    <a:lstStyle/>
+                    <a:p>
+                      <a:pPr algn="ctr"/>
+                      <a:r>
+                        <a:rPr sz="1200" b="0">
+                          <a:solidFill>
+                            <a:srgbClr val="1A1A1A"/>
+                          </a:solidFill>
+                        </a:rPr>
+                        <a:t>95.34%</a:t>
+                      </a:r>
+                    </a:p>
+                  </a:txBody>
+                  <a:tcPr anchor="ctr">
+                    <a:solidFill>
+                      <a:srgbClr val="FFFFFF"/>
+                    </a:solidFill>
+                  </a:tcPr>
+                </a:tc>
+              </a:tr>
+              <a:tr h="480000">
+                <a:tc>
+                  <a:txBody>
+                    <a:bodyPr/>
+                    <a:lstStyle/>
+                    <a:p>
+                      <a:pPr algn="ctr"/>
+                      <a:r>
+                        <a:rPr sz="1200" b="0">
+                          <a:solidFill>
+                            <a:srgbClr val="1A1A1A"/>
+                          </a:solidFill>
+                        </a:rPr>
+                        <a:t>Taiwan (SHOT ep2)</a:t>
+                      </a:r>
+                    </a:p>
+                  </a:txBody>
+                  <a:tcPr anchor="ctr">
+                    <a:solidFill>
+                      <a:srgbClr val="EEF3FC"/>
+                    </a:solidFill>
+                  </a:tcPr>
+                </a:tc>
+                <a:tc>
+                  <a:txBody>
+                    <a:bodyPr/>
+                    <a:lstStyle/>
+                    <a:p>
+                      <a:pPr algn="ctr"/>
+                      <a:r>
+                        <a:rPr sz="1200" b="1">
+                          <a:solidFill>
+                            <a:srgbClr val="1A1A1A"/>
+                          </a:solidFill>
+                        </a:rPr>
+                        <a:t>42.04%</a:t>
+                      </a:r>
+                    </a:p>
+                  </a:txBody>
+                  <a:tcPr anchor="ctr">
+                    <a:solidFill>
+                      <a:srgbClr val="EEF3FC"/>
+                    </a:solidFill>
+                  </a:tcPr>
+                </a:tc>
+                <a:tc>
+                  <a:txBody>
+                    <a:bodyPr/>
+                    <a:lstStyle/>
+                    <a:p>
+                      <a:pPr algn="ctr"/>
+                      <a:r>
+                        <a:rPr sz="1200" b="0">
+                          <a:solidFill>
+                            <a:srgbClr val="1A1A1A"/>
+                          </a:solidFill>
+                        </a:rPr>
+                        <a:t>37.90%</a:t>
+                      </a:r>
+                    </a:p>
+                  </a:txBody>
+                  <a:tcPr anchor="ctr">
+                    <a:solidFill>
+                      <a:srgbClr val="EEF3FC"/>
+                    </a:solidFill>
+                  </a:tcPr>
+                </a:tc>
+              </a:tr>
+              <a:tr h="480000">
+                <a:tc>
+                  <a:txBody>
+                    <a:bodyPr/>
+                    <a:lstStyle/>
+                    <a:p>
+                      <a:pPr algn="ctr"/>
+                      <a:r>
+                        <a:rPr sz="1200" b="0">
+                          <a:solidFill>
+                            <a:srgbClr val="1A1A1A"/>
+                          </a:solidFill>
+                        </a:rPr>
+                        <a:t>Bangladesh (SHOT ep2)</a:t>
+                      </a:r>
+                    </a:p>
+                  </a:txBody>
+                  <a:tcPr anchor="ctr">
+                    <a:solidFill>
+                      <a:srgbClr val="FFFFFF"/>
+                    </a:solidFill>
+                  </a:tcPr>
+                </a:tc>
+                <a:tc>
+                  <a:txBody>
+                    <a:bodyPr/>
+                    <a:lstStyle/>
+                    <a:p>
+                      <a:pPr algn="ctr"/>
+                      <a:r>
+                        <a:rPr sz="1200" b="1">
+                          <a:solidFill>
+                            <a:srgbClr val="1A1A1A"/>
+                          </a:solidFill>
+                        </a:rPr>
+                        <a:t>30.79%</a:t>
+                      </a:r>
+                    </a:p>
+                  </a:txBody>
+                  <a:tcPr anchor="ctr">
+                    <a:solidFill>
+                      <a:srgbClr val="FFFFFF"/>
+                    </a:solidFill>
+                  </a:tcPr>
+                </a:tc>
+                <a:tc>
+                  <a:txBody>
+                    <a:bodyPr/>
+                    <a:lstStyle/>
+                    <a:p>
+                      <a:pPr algn="ctr"/>
+                      <a:r>
+                        <a:rPr sz="1200" b="0">
+                          <a:solidFill>
+                            <a:srgbClr val="1A1A1A"/>
+                          </a:solidFill>
+                        </a:rPr>
+                        <a:t>21.07%</a:t>
+                      </a:r>
+                    </a:p>
+                  </a:txBody>
+                  <a:tcPr anchor="ctr">
+                    <a:solidFill>
+                      <a:srgbClr val="FFFFFF"/>
+                    </a:solidFill>
+                  </a:tcPr>
+                </a:tc>
+              </a:tr>
+              <a:tr h="480000">
+                <a:tc>
+                  <a:txBody>
+                    <a:bodyPr/>
+                    <a:lstStyle/>
+                    <a:p>
+                      <a:pPr algn="ctr"/>
+                      <a:r>
+                        <a:rPr sz="1200" b="0">
+                          <a:solidFill>
+                            <a:srgbClr val="1A1A1A"/>
+                          </a:solidFill>
+                        </a:rPr>
+                        <a:t>PlantDoc (SHOT ep2)</a:t>
+                      </a:r>
+                    </a:p>
+                  </a:txBody>
+                  <a:tcPr anchor="ctr">
+                    <a:solidFill>
+                      <a:srgbClr val="EEF3FC"/>
+                    </a:solidFill>
+                  </a:tcPr>
+                </a:tc>
+                <a:tc>
+                  <a:txBody>
+                    <a:bodyPr/>
+                    <a:lstStyle/>
+                    <a:p>
+                      <a:pPr algn="ctr"/>
+                      <a:r>
+                        <a:rPr sz="1200" b="0">
+                          <a:solidFill>
+                            <a:srgbClr val="1A1A1A"/>
+                          </a:solidFill>
+                        </a:rPr>
+                        <a:t>19.46% (F1 0.18)</a:t>
+                      </a:r>
+                    </a:p>
+                  </a:txBody>
+                  <a:tcPr anchor="ctr">
+                    <a:solidFill>
+                      <a:srgbClr val="EEF3FC"/>
+                    </a:solidFill>
+                  </a:tcPr>
+                </a:tc>
+                <a:tc>
+                  <a:txBody>
+                    <a:bodyPr/>
+                    <a:lstStyle/>
+                    <a:p>
+                      <a:pPr algn="ctr"/>
+                      <a:r>
+                        <a:rPr sz="1200" b="1">
+                          <a:solidFill>
+                            <a:srgbClr val="1A1A1A"/>
+                          </a:solidFill>
+                        </a:rPr>
+                        <a:t>22.57% (F1 0.20)</a:t>
+                      </a:r>
+                    </a:p>
+                  </a:txBody>
+                  <a:tcPr anchor="ctr">
+                    <a:solidFill>
+                      <a:srgbClr val="EEF3FC"/>
+                    </a:solidFill>
+                  </a:tcPr>
+                </a:tc>
+              </a:tr>
+            </a:tbl>
+          </a:graphicData>
+        </a:graphic>
+      </p:graphicFrame>
+      <p:pic>
+        <p:nvPicPr>
+          <p:cNvPr id="10" name="Picture" descr="SHOT epoch sensitivity chart (tiny_cnn_c_lite)"/>
+          <p:cNvPicPr>
+            <a:picLocks noChangeAspect="1"/>
+          </p:cNvPicPr>
+          <p:nvPr/>
+        </p:nvPicPr>
+        <p:blipFill>
+          <a:blip r:embed="rId2"/>
+          <a:stretch>
+            <a:fillRect/>
+          </a:stretch>
+        </p:blipFill>
+        <p:spPr>
+          <a:xfrm>
+            <a:off x="7548640" y="2250000"/>
+            <a:ext cx="4000000" cy="2599935"/>
+          </a:xfrm>
+          <a:prstGeom prst="rect">
+            <a:avLst/>
+          </a:prstGeom>
+        </p:spPr>
+      </p:pic>
+      <p:sp>
+        <p:nvSpPr>
+          <p:cNvPr id="6" name="TextBox 4"/>
+          <p:cNvSpPr txBox="1"/>
+          <p:nvPr/>
+        </p:nvSpPr>
+        <p:spPr>
+          <a:xfrm>
+            <a:off x="548640" y="4999935"/>
+            <a:ext cx="11091672" cy="1100000"/>
+          </a:xfrm>
+          <a:prstGeom prst="rect">
+            <a:avLst/>
+          </a:prstGeom>
+          <a:noFill/>
+        </p:spPr>
+        <p:txBody>
+          <a:bodyPr wrap="square" anchor="t" lIns="0" rIns="0" tIns="0" bIns="0">
+            <a:spAutoFit/>
+          </a:bodyPr>
+          <a:lstStyle/>
+          <a:p>
+            <a:pPr algn="l"/>
+            <a:r>
+              <a:rPr sz="1300" b="0" i="1">
+                <a:solidFill>
+                  <a:srgbClr val="5B5E6B"/>
+                </a:solidFill>
+                <a:latin typeface="Calibri"/>
+              </a:rPr>
+              <a:t>가설은 절반만 맞았다 — Bangladesh는 과적합이 완화됐지만(epoch 5까지 계속 개선) PlantDoc은 오히려 더 빨리 과적합됐다(epoch 1에서 이미 정점). 내부 정확도·Taiwan·Bangladesh는 전반적으로 더 낮아져, 모델 축소가 일관된 해결책은 아니었다 — 과적합 억제는 epoch 수를 고정하는 기존 방식이 더 안정적이다.</a:t>
+            </a:r>
+          </a:p>
+        </p:txBody>
+      </p:sp>
+      <p:sp>
+        <p:nvSpPr>
+          <p:cNvPr id="8" name="TextBox 5"/>
+          <p:cNvSpPr txBox="1"/>
+          <p:nvPr/>
+        </p:nvSpPr>
+        <p:spPr>
+          <a:xfrm>
+            <a:off x="11430000" y="6446520"/>
+            <a:ext cx="548640" cy="274320"/>
+          </a:xfrm>
+          <a:prstGeom prst="rect">
+            <a:avLst/>
+          </a:prstGeom>
+          <a:noFill/>
+        </p:spPr>
+        <p:txBody>
+          <a:bodyPr wrap="square" anchor="t" lIns="0" rIns="0" tIns="0" bIns="0">
+            <a:spAutoFit/>
+          </a:bodyPr>
+          <a:lstStyle/>
+          <a:p>
+            <a:pPr algn="r"/>
+            <a:r>
+              <a:rPr sz="1000" b="0" i="0">
+                <a:solidFill>
+                  <a:srgbClr val="5B5E6B"/>
+                </a:solidFill>
+                <a:latin typeface="Calibri"/>
+              </a:rPr>
+              <a:t>28</a:t>
             </a:r>
           </a:p>
         </p:txBody>

--- a/docs/CNN_토마토_병해분류_V2_진행보고.pptx
+++ b/docs/CNN_토마토_병해분류_V2_진행보고.pptx
@@ -30,6 +30,7 @@
     <p:sldId id="280" r:id="rId24"/>
     <p:sldId id="281" r:id="rId25"/>
     <p:sldId id="282" r:id="rId26"/>
+    <p:sldId id="287" r:id="rId37"/>
     <p:sldId id="283" r:id="rId27"/>
     <p:sldId id="284" r:id="rId28"/>
     <p:sldId id="285" r:id="rId29"/>
@@ -17550,7 +17551,7 @@
                 </a:solidFill>
                 <a:latin typeface="Calibri"/>
               </a:rPr>
-              <a:t>RESULT 7 · DOMAIN ADAPTATION (1/6)</a:t>
+              <a:t>RESULT 7 · DOMAIN ADAPTATION (1/7)</a:t>
             </a:r>
           </a:p>
         </p:txBody>
@@ -18309,7 +18310,7 @@
                 </a:solidFill>
                 <a:latin typeface="Calibri"/>
               </a:rPr>
-              <a:t>RESULT 7 · DOMAIN ADAPTATION (2/6)</a:t>
+              <a:t>RESULT 7 · DOMAIN ADAPTATION (2/7)</a:t>
             </a:r>
           </a:p>
         </p:txBody>
@@ -18949,7 +18950,7 @@
                 </a:solidFill>
                 <a:latin typeface="Calibri"/>
               </a:rPr>
-              <a:t>RESULT 7 · DOMAIN ADAPTATION (3/6)</a:t>
+              <a:t>RESULT 7 · DOMAIN ADAPTATION (4/7)</a:t>
             </a:r>
           </a:p>
         </p:txBody>
@@ -19719,7 +19720,7 @@
                 </a:solidFill>
                 <a:latin typeface="Calibri"/>
               </a:rPr>
-              <a:t>25</a:t>
+              <a:t>26</a:t>
             </a:r>
           </a:p>
         </p:txBody>
@@ -19787,7 +19788,7 @@
                 </a:solidFill>
                 <a:latin typeface="Calibri"/>
               </a:rPr>
-              <a:t>RESULT 7 · DOMAIN ADAPTATION (4/6)</a:t>
+              <a:t>RESULT 7 · DOMAIN ADAPTATION (5/7)</a:t>
             </a:r>
           </a:p>
         </p:txBody>
@@ -20248,7 +20249,7 @@
                 </a:solidFill>
                 <a:latin typeface="Calibri"/>
               </a:rPr>
-              <a:t>26</a:t>
+              <a:t>27</a:t>
             </a:r>
           </a:p>
         </p:txBody>
@@ -20316,7 +20317,7 @@
                 </a:solidFill>
                 <a:latin typeface="Calibri"/>
               </a:rPr>
-              <a:t>RESULT 7 · DOMAIN ADAPTATION (5/6)</a:t>
+              <a:t>RESULT 7 · DOMAIN ADAPTATION (6/7)</a:t>
             </a:r>
           </a:p>
         </p:txBody>
@@ -20491,7 +20492,7 @@
                 </a:solidFill>
                 <a:latin typeface="Calibri"/>
               </a:rPr>
-              <a:t>27</a:t>
+              <a:t>28</a:t>
             </a:r>
           </a:p>
         </p:txBody>
@@ -21523,7 +21524,7 @@
                 </a:solidFill>
                 <a:latin typeface="Calibri"/>
               </a:rPr>
-              <a:t>29</a:t>
+              <a:t>30</a:t>
             </a:r>
           </a:p>
         </p:txBody>
@@ -22945,7 +22946,7 @@
                 </a:solidFill>
                 <a:latin typeface="Calibri"/>
               </a:rPr>
-              <a:t>30</a:t>
+              <a:t>31</a:t>
             </a:r>
           </a:p>
         </p:txBody>
@@ -23006,7 +23007,7 @@
                 </a:solidFill>
                 <a:latin typeface="Calibri"/>
               </a:rPr>
-              <a:t>RESULT 7 · DOMAIN ADAPTATION (6/6)</a:t>
+              <a:t>RESULT 7 · DOMAIN ADAPTATION (7/7)</a:t>
             </a:r>
           </a:p>
         </p:txBody>
@@ -23537,7 +23538,366 @@
                 </a:solidFill>
                 <a:latin typeface="Calibri"/>
               </a:rPr>
-              <a:t>28</a:t>
+              <a:t>29</a:t>
+            </a:r>
+          </a:p>
+        </p:txBody>
+      </p:sp>
+    </p:spTree>
+  </p:cSld>
+  <p:clrMapOvr>
+    <a:masterClrMapping/>
+  </p:clrMapOvr>
+</p:sld>
+</file>
+
+<file path=ppt/slides/slide32.xml><?xml version="1.0" encoding="utf-8"?>
+<p:sld xmlns:a="http://schemas.openxmlformats.org/drawingml/2006/main" xmlns:p="http://schemas.openxmlformats.org/presentationml/2006/main" xmlns:r="http://schemas.openxmlformats.org/officeDocument/2006/relationships">
+  <p:cSld>
+    <p:bg>
+      <p:bgPr>
+        <a:solidFill>
+          <a:srgbClr val="FFFFFF"/>
+        </a:solidFill>
+        <a:effectLst/>
+      </p:bgPr>
+    </p:bg>
+    <p:spTree>
+      <p:nvGrpSpPr>
+        <p:cNvPr id="1" name=""/>
+        <p:cNvGrpSpPr/>
+        <p:nvPr/>
+      </p:nvGrpSpPr>
+      <p:grpSpPr/>
+      <p:sp>
+        <p:nvSpPr>
+          <p:cNvPr id="2" name="TextBox 1"/>
+          <p:cNvSpPr txBox="1"/>
+          <p:nvPr/>
+        </p:nvSpPr>
+        <p:spPr>
+          <a:xfrm>
+            <a:off x="548640" y="292608"/>
+            <a:ext cx="9144000" cy="292608"/>
+          </a:xfrm>
+          <a:prstGeom prst="rect">
+            <a:avLst/>
+          </a:prstGeom>
+          <a:noFill/>
+        </p:spPr>
+        <p:txBody>
+          <a:bodyPr wrap="square" anchor="t" lIns="0" rIns="0" tIns="0" bIns="0">
+            <a:spAutoFit/>
+          </a:bodyPr>
+          <a:lstStyle/>
+          <a:p>
+            <a:pPr algn="l"/>
+            <a:r>
+              <a:rPr sz="1050" b="1" i="0" spc="150">
+                <a:solidFill>
+                  <a:srgbClr val="2A78D6"/>
+                </a:solidFill>
+                <a:latin typeface="Calibri"/>
+              </a:rPr>
+              <a:t>RESULT 7 · DOMAIN ADAPTATION (3/7)</a:t>
+            </a:r>
+          </a:p>
+        </p:txBody>
+      </p:sp>
+      <p:sp>
+        <p:nvSpPr>
+          <p:cNvPr id="3" name="TextBox 2"/>
+          <p:cNvSpPr txBox="1"/>
+          <p:nvPr/>
+        </p:nvSpPr>
+        <p:spPr>
+          <a:xfrm>
+            <a:off x="548640" y="566928"/>
+            <a:ext cx="10972800" cy="548640"/>
+          </a:xfrm>
+          <a:prstGeom prst="rect">
+            <a:avLst/>
+          </a:prstGeom>
+          <a:noFill/>
+        </p:spPr>
+        <p:txBody>
+          <a:bodyPr wrap="square" anchor="t" lIns="0" rIns="0" tIns="0" bIns="0">
+            <a:spAutoFit/>
+          </a:bodyPr>
+          <a:lstStyle/>
+          <a:p>
+            <a:pPr algn="l"/>
+            <a:r>
+              <a:rPr sz="2400" b="1" i="0">
+                <a:solidFill>
+                  <a:srgbClr val="1E2761"/>
+                </a:solidFill>
+                <a:latin typeface="Cambria"/>
+              </a:rPr>
+              <a:t>Class-restriction 마스킹 — 정확한 메커니즘</a:t>
+            </a:r>
+          </a:p>
+        </p:txBody>
+      </p:sp>
+      <p:sp>
+        <p:nvSpPr>
+          <p:cNvPr id="4" name="Block"/>
+          <p:cNvSpPr txBox="1"/>
+          <p:nvPr/>
+        </p:nvSpPr>
+        <p:spPr>
+          <a:xfrm>
+            <a:off x="548640" y="1300000"/>
+            <a:ext cx="11091672" cy="1000000"/>
+          </a:xfrm>
+          <a:prstGeom prst="rect">
+            <a:avLst/>
+          </a:prstGeom>
+          <a:noFill/>
+        </p:spPr>
+        <p:txBody>
+          <a:bodyPr wrap="square" anchor="t" lIns="0" rIns="0" tIns="0" bIns="0">
+            <a:spAutoFit/>
+          </a:bodyPr>
+          <a:lstStyle/>
+          <a:p>
+            <a:pPr algn="l">
+              <a:lnSpc>
+                <a:spcPct val="115000"/>
+              </a:lnSpc>
+            </a:pPr>
+            <a:r>
+              <a:rPr sz="1400" b="1" i="0">
+                <a:solidFill>
+                  <a:srgbClr val="2A78D6"/>
+                </a:solidFill>
+                <a:latin typeface="Calibri"/>
+              </a:rPr>
+              <a:t>① </a:t>
+            </a:r>
+            <a:r>
+              <a:rPr sz="1300" b="1" i="0">
+                <a:solidFill>
+                  <a:srgbClr val="1E2761"/>
+                </a:solidFill>
+                <a:latin typeface="Calibri"/>
+              </a:rPr>
+              <a:t>기준: </a:t>
+            </a:r>
+            <a:r>
+              <a:rPr sz="1300" b="0" i="0">
+                <a:solidFill>
+                  <a:srgbClr val="1A1A1A"/>
+                </a:solidFill>
+                <a:latin typeface="Calibri"/>
+              </a:rPr>
+              <a:t>데이터 준비 단계에서 미리 확인한 “이 외부 데이터셋에 해당 병해 폴더·라벨이 애초에 있는가” — 모델 예측이나 정답 라벨을 본 게 아니다 (Taiwan 3/10, Bangladesh 6/10, PlantDoc 8/10).</a:t>
+            </a:r>
+          </a:p>
+        </p:txBody>
+      </p:sp>
+      <p:sp>
+        <p:nvSpPr>
+          <p:cNvPr id="5" name="Block"/>
+          <p:cNvSpPr txBox="1"/>
+          <p:nvPr/>
+        </p:nvSpPr>
+        <p:spPr>
+          <a:xfrm>
+            <a:off x="548640" y="2380000"/>
+            <a:ext cx="11091672" cy="1000000"/>
+          </a:xfrm>
+          <a:prstGeom prst="rect">
+            <a:avLst/>
+          </a:prstGeom>
+          <a:noFill/>
+        </p:spPr>
+        <p:txBody>
+          <a:bodyPr wrap="square" anchor="t" lIns="0" rIns="0" tIns="0" bIns="0">
+            <a:spAutoFit/>
+          </a:bodyPr>
+          <a:lstStyle/>
+          <a:p>
+            <a:pPr algn="l">
+              <a:lnSpc>
+                <a:spcPct val="115000"/>
+              </a:lnSpc>
+            </a:pPr>
+            <a:r>
+              <a:rPr sz="1400" b="1" i="0">
+                <a:solidFill>
+                  <a:srgbClr val="2A78D6"/>
+                </a:solidFill>
+                <a:latin typeface="Calibri"/>
+              </a:rPr>
+              <a:t>② </a:t>
+            </a:r>
+            <a:r>
+              <a:rPr sz="1300" b="1" i="0">
+                <a:solidFill>
+                  <a:srgbClr val="1E2761"/>
+                </a:solidFill>
+                <a:latin typeface="Calibri"/>
+              </a:rPr>
+              <a:t>제외 방법: </a:t>
+            </a:r>
+            <a:r>
+              <a:rPr sz="1300" b="0" i="0">
+                <a:solidFill>
+                  <a:srgbClr val="1A1A1A"/>
+                </a:solidFill>
+                <a:latin typeface="Calibri"/>
+              </a:rPr>
+              <a:t>logits = model(images) + mask (없는 클래스 자리는 -inf) → softmax 확률이 0이 되어 예측 후보에서 빠진다. 파라미터는 전혀 건드리지 않는다.</a:t>
+            </a:r>
+          </a:p>
+        </p:txBody>
+      </p:sp>
+      <p:sp>
+        <p:nvSpPr>
+          <p:cNvPr id="6" name="Block"/>
+          <p:cNvSpPr txBox="1"/>
+          <p:nvPr/>
+        </p:nvSpPr>
+        <p:spPr>
+          <a:xfrm>
+            <a:off x="548640" y="3460000"/>
+            <a:ext cx="11091672" cy="1000000"/>
+          </a:xfrm>
+          <a:prstGeom prst="rect">
+            <a:avLst/>
+          </a:prstGeom>
+          <a:noFill/>
+        </p:spPr>
+        <p:txBody>
+          <a:bodyPr wrap="square" anchor="t" lIns="0" rIns="0" tIns="0" bIns="0">
+            <a:spAutoFit/>
+          </a:bodyPr>
+          <a:lstStyle/>
+          <a:p>
+            <a:pPr algn="l">
+              <a:lnSpc>
+                <a:spcPct val="115000"/>
+              </a:lnSpc>
+            </a:pPr>
+            <a:r>
+              <a:rPr sz="1400" b="1" i="0">
+                <a:solidFill>
+                  <a:srgbClr val="2A78D6"/>
+                </a:solidFill>
+                <a:latin typeface="Calibri"/>
+              </a:rPr>
+              <a:t>③ </a:t>
+            </a:r>
+            <a:r>
+              <a:rPr sz="1300" b="1" i="0">
+                <a:solidFill>
+                  <a:srgbClr val="1E2761"/>
+                </a:solidFill>
+                <a:latin typeface="Calibri"/>
+              </a:rPr>
+              <a:t>학습과 적응은 분리: </a:t>
+            </a:r>
+            <a:r>
+              <a:rPr sz="1300" b="0" i="0">
+                <a:solidFill>
+                  <a:srgbClr val="1A1A1A"/>
+                </a:solidFill>
+                <a:latin typeface="Calibri"/>
+              </a:rPr>
+              <a:t>tiny_cnn_c는 PlantVillage 10개 클래스 전체로, 마스킹 없이 학습한다. 마스킹은 그 가중치를 외부 데이터셋에 적응·평가할 때만 적용한다.</a:t>
+            </a:r>
+          </a:p>
+        </p:txBody>
+      </p:sp>
+      <p:sp>
+        <p:nvSpPr>
+          <p:cNvPr id="7" name="Block"/>
+          <p:cNvSpPr txBox="1"/>
+          <p:nvPr/>
+        </p:nvSpPr>
+        <p:spPr>
+          <a:xfrm>
+            <a:off x="548640" y="4540000"/>
+            <a:ext cx="11091672" cy="1000000"/>
+          </a:xfrm>
+          <a:prstGeom prst="rect">
+            <a:avLst/>
+          </a:prstGeom>
+          <a:noFill/>
+        </p:spPr>
+        <p:txBody>
+          <a:bodyPr wrap="square" anchor="t" lIns="0" rIns="0" tIns="0" bIns="0">
+            <a:spAutoFit/>
+          </a:bodyPr>
+          <a:lstStyle/>
+          <a:p>
+            <a:pPr algn="l">
+              <a:lnSpc>
+                <a:spcPct val="115000"/>
+              </a:lnSpc>
+            </a:pPr>
+            <a:r>
+              <a:rPr sz="1400" b="1" i="0">
+                <a:solidFill>
+                  <a:srgbClr val="2A78D6"/>
+                </a:solidFill>
+                <a:latin typeface="Calibri"/>
+              </a:rPr>
+              <a:t>④ </a:t>
+            </a:r>
+            <a:r>
+              <a:rPr sz="1300" b="1" i="0">
+                <a:solidFill>
+                  <a:srgbClr val="1E2761"/>
+                </a:solidFill>
+                <a:latin typeface="Calibri"/>
+              </a:rPr>
+              <a:t>SHOT에서는 한 군데 더: </a:t>
+            </a:r>
+            <a:r>
+              <a:rPr sz="1300" b="0" i="0">
+                <a:solidFill>
+                  <a:srgbClr val="1A1A1A"/>
+                </a:solidFill>
+                <a:latin typeface="Calibri"/>
+              </a:rPr>
+              <a:t>pseudo-label을 정하는 클래스 중심점 매칭에도 같은 마스크를 적용해, 존재하는 클래스 안에서만 pseudo-label이 나오게 한다.</a:t>
+            </a:r>
+          </a:p>
+        </p:txBody>
+      </p:sp>
+      <p:sp>
+        <p:nvSpPr>
+          <p:cNvPr id="9" name="TextBox 5"/>
+          <p:cNvSpPr txBox="1"/>
+          <p:nvPr/>
+        </p:nvSpPr>
+        <p:spPr>
+          <a:xfrm>
+            <a:off x="11430000" y="6446520"/>
+            <a:ext cx="548640" cy="274320"/>
+          </a:xfrm>
+          <a:prstGeom prst="rect">
+            <a:avLst/>
+          </a:prstGeom>
+          <a:noFill/>
+        </p:spPr>
+        <p:txBody>
+          <a:bodyPr wrap="square" anchor="t" lIns="0" rIns="0" tIns="0" bIns="0">
+            <a:spAutoFit/>
+          </a:bodyPr>
+          <a:lstStyle/>
+          <a:p>
+            <a:pPr algn="r"/>
+            <a:r>
+              <a:rPr sz="1000" b="0" i="0">
+                <a:solidFill>
+                  <a:srgbClr val="5B5E6B"/>
+                </a:solidFill>
+                <a:latin typeface="Calibri"/>
+              </a:rPr>
+              <a:t>25</a:t>
             </a:r>
           </a:p>
         </p:txBody>

--- a/docs/CNN_토마토_병해분류_V2_진행보고.pptx
+++ b/docs/CNN_토마토_병해분류_V2_진행보고.pptx
@@ -34,6 +34,7 @@
     <p:sldId id="283" r:id="rId27"/>
     <p:sldId id="284" r:id="rId28"/>
     <p:sldId id="285" r:id="rId29"/>
+    <p:sldId id="288" r:id="rId38"/>
     <p:sldId id="286" r:id="rId36"/>
     <p:sldId id="277" r:id="rId30"/>
     <p:sldId id="278" r:id="rId31"/>
@@ -17551,7 +17552,7 @@
                 </a:solidFill>
                 <a:latin typeface="Calibri"/>
               </a:rPr>
-              <a:t>RESULT 7 · DOMAIN ADAPTATION (1/7)</a:t>
+              <a:t>RESULT 7 · DOMAIN ADAPTATION (1/8)</a:t>
             </a:r>
           </a:p>
         </p:txBody>
@@ -18310,7 +18311,7 @@
                 </a:solidFill>
                 <a:latin typeface="Calibri"/>
               </a:rPr>
-              <a:t>RESULT 7 · DOMAIN ADAPTATION (2/7)</a:t>
+              <a:t>RESULT 7 · DOMAIN ADAPTATION (2/8)</a:t>
             </a:r>
           </a:p>
         </p:txBody>
@@ -18950,7 +18951,7 @@
                 </a:solidFill>
                 <a:latin typeface="Calibri"/>
               </a:rPr>
-              <a:t>RESULT 7 · DOMAIN ADAPTATION (4/7)</a:t>
+              <a:t>RESULT 7 · DOMAIN ADAPTATION (4/8)</a:t>
             </a:r>
           </a:p>
         </p:txBody>
@@ -19788,7 +19789,7 @@
                 </a:solidFill>
                 <a:latin typeface="Calibri"/>
               </a:rPr>
-              <a:t>RESULT 7 · DOMAIN ADAPTATION (5/7)</a:t>
+              <a:t>RESULT 7 · DOMAIN ADAPTATION (5/8)</a:t>
             </a:r>
           </a:p>
         </p:txBody>
@@ -20317,7 +20318,7 @@
                 </a:solidFill>
                 <a:latin typeface="Calibri"/>
               </a:rPr>
-              <a:t>RESULT 7 · DOMAIN ADAPTATION (6/7)</a:t>
+              <a:t>RESULT 7 · DOMAIN ADAPTATION (6/8)</a:t>
             </a:r>
           </a:p>
         </p:txBody>
@@ -21524,7 +21525,7 @@
                 </a:solidFill>
                 <a:latin typeface="Calibri"/>
               </a:rPr>
-              <a:t>30</a:t>
+              <a:t>31</a:t>
             </a:r>
           </a:p>
         </p:txBody>
@@ -22946,7 +22947,7 @@
                 </a:solidFill>
                 <a:latin typeface="Calibri"/>
               </a:rPr>
-              <a:t>31</a:t>
+              <a:t>32</a:t>
             </a:r>
           </a:p>
         </p:txBody>
@@ -23007,7 +23008,7 @@
                 </a:solidFill>
                 <a:latin typeface="Calibri"/>
               </a:rPr>
-              <a:t>RESULT 7 · DOMAIN ADAPTATION (7/7)</a:t>
+              <a:t>RESULT 7 · DOMAIN ADAPTATION (8/8)</a:t>
             </a:r>
           </a:p>
         </p:txBody>
@@ -23538,7 +23539,7 @@
                 </a:solidFill>
                 <a:latin typeface="Calibri"/>
               </a:rPr>
-              <a:t>29</a:t>
+              <a:t>30</a:t>
             </a:r>
           </a:p>
         </p:txBody>
@@ -23599,7 +23600,7 @@
                 </a:solidFill>
                 <a:latin typeface="Calibri"/>
               </a:rPr>
-              <a:t>RESULT 7 · DOMAIN ADAPTATION (3/7)</a:t>
+              <a:t>RESULT 7 · DOMAIN ADAPTATION (3/8)</a:t>
             </a:r>
           </a:p>
         </p:txBody>
@@ -23898,6 +23899,595 @@
                 <a:latin typeface="Calibri"/>
               </a:rPr>
               <a:t>25</a:t>
+            </a:r>
+          </a:p>
+        </p:txBody>
+      </p:sp>
+    </p:spTree>
+  </p:cSld>
+  <p:clrMapOvr>
+    <a:masterClrMapping/>
+  </p:clrMapOvr>
+</p:sld>
+</file>
+
+<file path=ppt/slides/slide33.xml><?xml version="1.0" encoding="utf-8"?>
+<p:sld xmlns:a="http://schemas.openxmlformats.org/drawingml/2006/main" xmlns:p="http://schemas.openxmlformats.org/presentationml/2006/main" xmlns:r="http://schemas.openxmlformats.org/officeDocument/2006/relationships">
+  <p:cSld>
+    <p:bg>
+      <p:bgPr>
+        <a:solidFill>
+          <a:srgbClr val="FFFFFF"/>
+        </a:solidFill>
+        <a:effectLst/>
+      </p:bgPr>
+    </p:bg>
+    <p:spTree>
+      <p:nvGrpSpPr>
+        <p:cNvPr id="1" name=""/>
+        <p:cNvGrpSpPr/>
+        <p:nvPr/>
+      </p:nvGrpSpPr>
+      <p:grpSpPr/>
+      <p:sp>
+        <p:nvSpPr>
+          <p:cNvPr id="2" name="TextBox 1"/>
+          <p:cNvSpPr txBox="1"/>
+          <p:nvPr/>
+        </p:nvSpPr>
+        <p:spPr>
+          <a:xfrm>
+            <a:off x="548640" y="292608"/>
+            <a:ext cx="9144000" cy="292608"/>
+          </a:xfrm>
+          <a:prstGeom prst="rect">
+            <a:avLst/>
+          </a:prstGeom>
+          <a:noFill/>
+        </p:spPr>
+        <p:txBody>
+          <a:bodyPr wrap="square" anchor="t" lIns="0" rIns="0" tIns="0" bIns="0">
+            <a:spAutoFit/>
+          </a:bodyPr>
+          <a:lstStyle/>
+          <a:p>
+            <a:pPr algn="l"/>
+            <a:r>
+              <a:rPr sz="1050" b="1" i="0">
+                <a:solidFill>
+                  <a:srgbClr val="2A78D6"/>
+                </a:solidFill>
+                <a:latin typeface="Calibri"/>
+              </a:rPr>
+              <a:t>RESULT 7 · DOMAIN ADAPTATION (7/8)</a:t>
+            </a:r>
+          </a:p>
+        </p:txBody>
+      </p:sp>
+      <p:sp>
+        <p:nvSpPr>
+          <p:cNvPr id="3" name="TextBox 2"/>
+          <p:cNvSpPr txBox="1"/>
+          <p:nvPr/>
+        </p:nvSpPr>
+        <p:spPr>
+          <a:xfrm>
+            <a:off x="548640" y="566928"/>
+            <a:ext cx="10972800" cy="548640"/>
+          </a:xfrm>
+          <a:prstGeom prst="rect">
+            <a:avLst/>
+          </a:prstGeom>
+          <a:noFill/>
+        </p:spPr>
+        <p:txBody>
+          <a:bodyPr wrap="square" anchor="t" lIns="0" rIns="0" tIns="0" bIns="0">
+            <a:spAutoFit/>
+          </a:bodyPr>
+          <a:lstStyle/>
+          <a:p>
+            <a:pPr algn="l"/>
+            <a:r>
+              <a:rPr sz="2400" b="1" i="0">
+                <a:solidFill>
+                  <a:srgbClr val="1E2761"/>
+                </a:solidFill>
+                <a:latin typeface="Cambria"/>
+              </a:rPr>
+              <a:t>추가 시도: EATA (ICML 2022) — SHOT을 넘지 못함</a:t>
+            </a:r>
+          </a:p>
+        </p:txBody>
+      </p:sp>
+      <p:sp>
+        <p:nvSpPr>
+          <p:cNvPr id="4" name="TextBox 3"/>
+          <p:cNvSpPr txBox="1"/>
+          <p:nvPr/>
+        </p:nvSpPr>
+        <p:spPr>
+          <a:xfrm>
+            <a:off x="548640" y="1200000"/>
+            <a:ext cx="11091672" cy="1150000"/>
+          </a:xfrm>
+          <a:prstGeom prst="rect">
+            <a:avLst/>
+          </a:prstGeom>
+          <a:noFill/>
+        </p:spPr>
+        <p:txBody>
+          <a:bodyPr wrap="square" anchor="t" lIns="0" rIns="0" tIns="0" bIns="0">
+            <a:spAutoFit/>
+          </a:bodyPr>
+          <a:lstStyle/>
+          <a:p>
+            <a:pPr algn="l"/>
+            <a:r>
+              <a:rPr sz="1300" b="0" i="0">
+                <a:solidFill>
+                  <a:srgbClr val="1A1A1A"/>
+                </a:solidFill>
+                <a:latin typeface="Calibri"/>
+              </a:rPr>
+              <a:t>Niu et al., ICML 2022 (공식 코드: mr-eggplant/EATA). TENT와 같은 지점(BN affine만 학습)에서 출발해 ① 불확실하거나(entropy 높음) 중복되는 샘플은 적응에서 제외하고 ② source test셋 Fisher information으로 “원본 가중치에서 너무 멀어지지 않게” 정규화한다.</a:t>
+            </a:r>
+          </a:p>
+        </p:txBody>
+      </p:sp>
+      <p:graphicFrame>
+        <p:nvGraphicFramePr>
+          <p:cNvPr id="7" name="Table"/>
+          <p:cNvGraphicFramePr>
+            <a:graphicFrameLocks noGrp="1"/>
+          </p:cNvGraphicFramePr>
+          <p:nvPr/>
+        </p:nvGraphicFramePr>
+        <p:xfrm>
+          <a:off x="548640" y="2500000"/>
+          <a:ext cx="9800000" cy="2240000"/>
+        </p:xfrm>
+        <a:graphic>
+          <a:graphicData uri="http://schemas.openxmlformats.org/drawingml/2006/table">
+            <a:tbl>
+              <a:tblPr firstRow="1" bandRow="1">
+                <a:tableStyleId>{5C22544A-7EE6-4342-B048-85BDC9FD1C3A}</a:tableStyleId>
+              </a:tblPr>
+              <a:tblGrid>
+                <a:gridCol w="2600000"/>
+                <a:gridCol w="2400000"/>
+                <a:gridCol w="2400000"/>
+                <a:gridCol w="2400000"/>
+              </a:tblGrid>
+              <a:tr h="560000">
+                <a:tc>
+                  <a:txBody>
+                    <a:bodyPr/>
+                    <a:lstStyle/>
+                    <a:p>
+                      <a:pPr algn="ctr"/>
+                      <a:r>
+                        <a:rPr sz="1200" b="1">
+                          <a:solidFill>
+                            <a:srgbClr val="FFFFFF"/>
+                          </a:solidFill>
+                        </a:rPr>
+                        <a:t>데이터셋</a:t>
+                      </a:r>
+                    </a:p>
+                  </a:txBody>
+                  <a:tcPr anchor="ctr">
+                    <a:solidFill>
+                      <a:srgbClr val="1E2761"/>
+                    </a:solidFill>
+                  </a:tcPr>
+                </a:tc>
+                <a:tc>
+                  <a:txBody>
+                    <a:bodyPr/>
+                    <a:lstStyle/>
+                    <a:p>
+                      <a:pPr algn="ctr"/>
+                      <a:r>
+                        <a:rPr sz="1200" b="1">
+                          <a:solidFill>
+                            <a:srgbClr val="FFFFFF"/>
+                          </a:solidFill>
+                        </a:rPr>
+                        <a:t>Source+마스킹</a:t>
+                      </a:r>
+                    </a:p>
+                  </a:txBody>
+                  <a:tcPr anchor="ctr">
+                    <a:solidFill>
+                      <a:srgbClr val="1E2761"/>
+                    </a:solidFill>
+                  </a:tcPr>
+                </a:tc>
+                <a:tc>
+                  <a:txBody>
+                    <a:bodyPr/>
+                    <a:lstStyle/>
+                    <a:p>
+                      <a:pPr algn="ctr"/>
+                      <a:r>
+                        <a:rPr sz="1200" b="1">
+                          <a:solidFill>
+                            <a:srgbClr val="FFFFFF"/>
+                          </a:solidFill>
+                        </a:rPr>
+                        <a:t>SHOT+마스킹(최종)</a:t>
+                      </a:r>
+                    </a:p>
+                  </a:txBody>
+                  <a:tcPr anchor="ctr">
+                    <a:solidFill>
+                      <a:srgbClr val="1E2761"/>
+                    </a:solidFill>
+                  </a:tcPr>
+                </a:tc>
+                <a:tc>
+                  <a:txBody>
+                    <a:bodyPr/>
+                    <a:lstStyle/>
+                    <a:p>
+                      <a:pPr algn="ctr"/>
+                      <a:r>
+                        <a:rPr sz="1200" b="1">
+                          <a:solidFill>
+                            <a:srgbClr val="FFFFFF"/>
+                          </a:solidFill>
+                        </a:rPr>
+                        <a:t>EATA+마스킹</a:t>
+                      </a:r>
+                    </a:p>
+                  </a:txBody>
+                  <a:tcPr anchor="ctr">
+                    <a:solidFill>
+                      <a:srgbClr val="1E2761"/>
+                    </a:solidFill>
+                  </a:tcPr>
+                </a:tc>
+              </a:tr>
+              <a:tr h="560000">
+                <a:tc>
+                  <a:txBody>
+                    <a:bodyPr/>
+                    <a:lstStyle/>
+                    <a:p>
+                      <a:pPr algn="ctr"/>
+                      <a:r>
+                        <a:rPr sz="1200" b="0">
+                          <a:solidFill>
+                            <a:srgbClr val="1A1A1A"/>
+                          </a:solidFill>
+                        </a:rPr>
+                        <a:t>Taiwan</a:t>
+                      </a:r>
+                    </a:p>
+                  </a:txBody>
+                  <a:tcPr anchor="ctr">
+                    <a:solidFill>
+                      <a:srgbClr val="FFFFFF"/>
+                    </a:solidFill>
+                  </a:tcPr>
+                </a:tc>
+                <a:tc>
+                  <a:txBody>
+                    <a:bodyPr/>
+                    <a:lstStyle/>
+                    <a:p>
+                      <a:pPr algn="ctr"/>
+                      <a:r>
+                        <a:rPr sz="1200" b="0">
+                          <a:solidFill>
+                            <a:srgbClr val="1A1A1A"/>
+                          </a:solidFill>
+                        </a:rPr>
+                        <a:t>32.48%</a:t>
+                      </a:r>
+                    </a:p>
+                  </a:txBody>
+                  <a:tcPr anchor="ctr">
+                    <a:solidFill>
+                      <a:srgbClr val="FFFFFF"/>
+                    </a:solidFill>
+                  </a:tcPr>
+                </a:tc>
+                <a:tc>
+                  <a:txBody>
+                    <a:bodyPr/>
+                    <a:lstStyle/>
+                    <a:p>
+                      <a:pPr algn="ctr"/>
+                      <a:r>
+                        <a:rPr sz="1200" b="1">
+                          <a:solidFill>
+                            <a:srgbClr val="1A1A1A"/>
+                          </a:solidFill>
+                        </a:rPr>
+                        <a:t>42.04%</a:t>
+                      </a:r>
+                    </a:p>
+                  </a:txBody>
+                  <a:tcPr anchor="ctr">
+                    <a:solidFill>
+                      <a:srgbClr val="FFFFFF"/>
+                    </a:solidFill>
+                  </a:tcPr>
+                </a:tc>
+                <a:tc>
+                  <a:txBody>
+                    <a:bodyPr/>
+                    <a:lstStyle/>
+                    <a:p>
+                      <a:pPr algn="ctr"/>
+                      <a:r>
+                        <a:rPr sz="1200" b="0">
+                          <a:solidFill>
+                            <a:srgbClr val="1A1A1A"/>
+                          </a:solidFill>
+                        </a:rPr>
+                        <a:t>35.35%</a:t>
+                      </a:r>
+                    </a:p>
+                  </a:txBody>
+                  <a:tcPr anchor="ctr">
+                    <a:solidFill>
+                      <a:srgbClr val="FFFFFF"/>
+                    </a:solidFill>
+                  </a:tcPr>
+                </a:tc>
+              </a:tr>
+              <a:tr h="560000">
+                <a:tc>
+                  <a:txBody>
+                    <a:bodyPr/>
+                    <a:lstStyle/>
+                    <a:p>
+                      <a:pPr algn="ctr"/>
+                      <a:r>
+                        <a:rPr sz="1200" b="0">
+                          <a:solidFill>
+                            <a:srgbClr val="1A1A1A"/>
+                          </a:solidFill>
+                        </a:rPr>
+                        <a:t>Bangladesh</a:t>
+                      </a:r>
+                    </a:p>
+                  </a:txBody>
+                  <a:tcPr anchor="ctr">
+                    <a:solidFill>
+                      <a:srgbClr val="EEF3FC"/>
+                    </a:solidFill>
+                  </a:tcPr>
+                </a:tc>
+                <a:tc>
+                  <a:txBody>
+                    <a:bodyPr/>
+                    <a:lstStyle/>
+                    <a:p>
+                      <a:pPr algn="ctr"/>
+                      <a:r>
+                        <a:rPr sz="1200" b="0">
+                          <a:solidFill>
+                            <a:srgbClr val="1A1A1A"/>
+                          </a:solidFill>
+                        </a:rPr>
+                        <a:t>22.34%</a:t>
+                      </a:r>
+                    </a:p>
+                  </a:txBody>
+                  <a:tcPr anchor="ctr">
+                    <a:solidFill>
+                      <a:srgbClr val="EEF3FC"/>
+                    </a:solidFill>
+                  </a:tcPr>
+                </a:tc>
+                <a:tc>
+                  <a:txBody>
+                    <a:bodyPr/>
+                    <a:lstStyle/>
+                    <a:p>
+                      <a:pPr algn="ctr"/>
+                      <a:r>
+                        <a:rPr sz="1200" b="1">
+                          <a:solidFill>
+                            <a:srgbClr val="1A1A1A"/>
+                          </a:solidFill>
+                        </a:rPr>
+                        <a:t>30.79%</a:t>
+                      </a:r>
+                    </a:p>
+                  </a:txBody>
+                  <a:tcPr anchor="ctr">
+                    <a:solidFill>
+                      <a:srgbClr val="EEF3FC"/>
+                    </a:solidFill>
+                  </a:tcPr>
+                </a:tc>
+                <a:tc>
+                  <a:txBody>
+                    <a:bodyPr/>
+                    <a:lstStyle/>
+                    <a:p>
+                      <a:pPr algn="ctr"/>
+                      <a:r>
+                        <a:rPr sz="1200" b="0">
+                          <a:solidFill>
+                            <a:srgbClr val="1A1A1A"/>
+                          </a:solidFill>
+                        </a:rPr>
+                        <a:t>20.89%</a:t>
+                      </a:r>
+                    </a:p>
+                  </a:txBody>
+                  <a:tcPr anchor="ctr">
+                    <a:solidFill>
+                      <a:srgbClr val="EEF3FC"/>
+                    </a:solidFill>
+                  </a:tcPr>
+                </a:tc>
+              </a:tr>
+              <a:tr h="560000">
+                <a:tc>
+                  <a:txBody>
+                    <a:bodyPr/>
+                    <a:lstStyle/>
+                    <a:p>
+                      <a:pPr algn="ctr"/>
+                      <a:r>
+                        <a:rPr sz="1200" b="0">
+                          <a:solidFill>
+                            <a:srgbClr val="1A1A1A"/>
+                          </a:solidFill>
+                        </a:rPr>
+                        <a:t>PlantDoc</a:t>
+                      </a:r>
+                    </a:p>
+                  </a:txBody>
+                  <a:tcPr anchor="ctr">
+                    <a:solidFill>
+                      <a:srgbClr val="FFFFFF"/>
+                    </a:solidFill>
+                  </a:tcPr>
+                </a:tc>
+                <a:tc>
+                  <a:txBody>
+                    <a:bodyPr/>
+                    <a:lstStyle/>
+                    <a:p>
+                      <a:pPr algn="ctr"/>
+                      <a:r>
+                        <a:rPr sz="1200" b="1">
+                          <a:solidFill>
+                            <a:srgbClr val="1A1A1A"/>
+                          </a:solidFill>
+                        </a:rPr>
+                        <a:t>20.31%</a:t>
+                      </a:r>
+                    </a:p>
+                  </a:txBody>
+                  <a:tcPr anchor="ctr">
+                    <a:solidFill>
+                      <a:srgbClr val="FFFFFF"/>
+                    </a:solidFill>
+                  </a:tcPr>
+                </a:tc>
+                <a:tc>
+                  <a:txBody>
+                    <a:bodyPr/>
+                    <a:lstStyle/>
+                    <a:p>
+                      <a:pPr algn="ctr"/>
+                      <a:r>
+                        <a:rPr sz="1200" b="0">
+                          <a:solidFill>
+                            <a:srgbClr val="1A1A1A"/>
+                          </a:solidFill>
+                        </a:rPr>
+                        <a:t>19.46%</a:t>
+                      </a:r>
+                    </a:p>
+                  </a:txBody>
+                  <a:tcPr anchor="ctr">
+                    <a:solidFill>
+                      <a:srgbClr val="FFFFFF"/>
+                    </a:solidFill>
+                  </a:tcPr>
+                </a:tc>
+                <a:tc>
+                  <a:txBody>
+                    <a:bodyPr/>
+                    <a:lstStyle/>
+                    <a:p>
+                      <a:pPr algn="ctr"/>
+                      <a:r>
+                        <a:rPr sz="1200" b="0">
+                          <a:solidFill>
+                            <a:srgbClr val="1A1A1A"/>
+                          </a:solidFill>
+                        </a:rPr>
+                        <a:t>12.27%</a:t>
+                      </a:r>
+                    </a:p>
+                  </a:txBody>
+                  <a:tcPr anchor="ctr">
+                    <a:solidFill>
+                      <a:srgbClr val="FFFFFF"/>
+                    </a:solidFill>
+                  </a:tcPr>
+                </a:tc>
+              </a:tr>
+            </a:tbl>
+          </a:graphicData>
+        </a:graphic>
+      </p:graphicFrame>
+      <p:sp>
+        <p:nvSpPr>
+          <p:cNvPr id="6" name="TextBox 4"/>
+          <p:cNvSpPr txBox="1"/>
+          <p:nvPr/>
+        </p:nvSpPr>
+        <p:spPr>
+          <a:xfrm>
+            <a:off x="548640" y="4850000"/>
+            <a:ext cx="11091672" cy="1450000"/>
+          </a:xfrm>
+          <a:prstGeom prst="rect">
+            <a:avLst/>
+          </a:prstGeom>
+          <a:noFill/>
+        </p:spPr>
+        <p:txBody>
+          <a:bodyPr wrap="square" anchor="t" lIns="0" rIns="0" tIns="0" bIns="0">
+            <a:spAutoFit/>
+          </a:bodyPr>
+          <a:lstStyle/>
+          <a:p>
+            <a:pPr algn="l"/>
+            <a:r>
+              <a:rPr sz="1300" b="0" i="1">
+                <a:solidFill>
+                  <a:srgbClr val="5B5E6B"/>
+                </a:solidFill>
+                <a:latin typeface="Calibri"/>
+              </a:rPr>
+              <a:t>논문 기본 lr(1e-3)로는 거의 적응이 안 일어나 lr=0.1(100배)로 캘리브레이션했다 — entropy·다양성 필터가 ImageNet 1000클래스·대량 스트림 기준이라 클래스 3~8개뿐인 우리 설정엔 유효 gradient가 너무 작았다. 그래도 Taiwan만 마스킹-only를 넘었을 뿐 SHOT은 어디서도 못 넘었고, Bangladesh· PlantDoc은 마스킹-only보다도 낮았다(collapse는 아님) — SHOT을 최종안으로 유지한다.</a:t>
+            </a:r>
+          </a:p>
+        </p:txBody>
+      </p:sp>
+      <p:sp>
+        <p:nvSpPr>
+          <p:cNvPr id="9" name="TextBox 5"/>
+          <p:cNvSpPr txBox="1"/>
+          <p:nvPr/>
+        </p:nvSpPr>
+        <p:spPr>
+          <a:xfrm>
+            <a:off x="11430000" y="6446520"/>
+            <a:ext cx="548640" cy="274320"/>
+          </a:xfrm>
+          <a:prstGeom prst="rect">
+            <a:avLst/>
+          </a:prstGeom>
+          <a:noFill/>
+        </p:spPr>
+        <p:txBody>
+          <a:bodyPr wrap="square" anchor="t" lIns="0" rIns="0" tIns="0" bIns="0">
+            <a:spAutoFit/>
+          </a:bodyPr>
+          <a:lstStyle/>
+          <a:p>
+            <a:pPr algn="r"/>
+            <a:r>
+              <a:rPr sz="1000" b="0" i="0">
+                <a:solidFill>
+                  <a:srgbClr val="5B5E6B"/>
+                </a:solidFill>
+                <a:latin typeface="Calibri"/>
+              </a:rPr>
+              <a:t>29</a:t>
             </a:r>
           </a:p>
         </p:txBody>

--- a/docs/CNN_토마토_병해분류_V2_진행보고.pptx
+++ b/docs/CNN_토마토_병해분류_V2_진행보고.pptx
@@ -35,6 +35,8 @@
     <p:sldId id="284" r:id="rId28"/>
     <p:sldId id="285" r:id="rId29"/>
     <p:sldId id="288" r:id="rId38"/>
+    <p:sldId id="290" r:id="rId40"/>
+    <p:sldId id="289" r:id="rId39"/>
     <p:sldId id="286" r:id="rId36"/>
     <p:sldId id="277" r:id="rId30"/>
     <p:sldId id="278" r:id="rId31"/>
@@ -17552,7 +17554,7 @@
                 </a:solidFill>
                 <a:latin typeface="Calibri"/>
               </a:rPr>
-              <a:t>RESULT 7 · DOMAIN ADAPTATION (1/8)</a:t>
+              <a:t>RESULT 7 · DOMAIN ADAPTATION (1/10)</a:t>
             </a:r>
           </a:p>
         </p:txBody>
@@ -18311,7 +18313,7 @@
                 </a:solidFill>
                 <a:latin typeface="Calibri"/>
               </a:rPr>
-              <a:t>RESULT 7 · DOMAIN ADAPTATION (2/8)</a:t>
+              <a:t>RESULT 7 · DOMAIN ADAPTATION (2/10)</a:t>
             </a:r>
           </a:p>
         </p:txBody>
@@ -18951,7 +18953,7 @@
                 </a:solidFill>
                 <a:latin typeface="Calibri"/>
               </a:rPr>
-              <a:t>RESULT 7 · DOMAIN ADAPTATION (4/8)</a:t>
+              <a:t>RESULT 7 · DOMAIN ADAPTATION (4/10)</a:t>
             </a:r>
           </a:p>
         </p:txBody>
@@ -18986,7 +18988,7 @@
                 </a:solidFill>
                 <a:latin typeface="Cambria"/>
               </a:rPr>
-              <a:t>최종 승자: SHOT (Pseudo-labeling + Info-max)</a:t>
+              <a:t>최종 승자: SHOT + APS (Pseudo-labeling + Info-max + 신뢰도 기반 선택)</a:t>
             </a:r>
           </a:p>
         </p:txBody>
@@ -19234,7 +19236,7 @@
         </p:nvGraphicFramePr>
         <p:xfrm>
           <a:off x="548640" y="2300000"/>
-          <a:ext cx="8800000" cy="2480000"/>
+          <a:ext cx="10300000" cy="2480000"/>
         </p:xfrm>
         <a:graphic>
           <a:graphicData uri="http://schemas.openxmlformats.org/drawingml/2006/table">
@@ -19243,34 +19245,11 @@
                 <a:tableStyleId>{5C22544A-7EE6-4342-B048-85BDC9FD1C3A}</a:tableStyleId>
               </a:tblPr>
               <a:tblGrid>
-                <a:gridCol w="1700000">
-                  <a:extLst>
-                    <a:ext uri="{9D8B030D-6E8A-4147-A177-3AD203B41FA5}">
-                      <a16:colId xmlns:a16="http://schemas.microsoft.com/office/drawing/2014/main" val="20000"/>
-                    </a:ext>
-                  </a:extLst>
-                </a:gridCol>
-                <a:gridCol w="2100000">
-                  <a:extLst>
-                    <a:ext uri="{9D8B030D-6E8A-4147-A177-3AD203B41FA5}">
-                      <a16:colId xmlns:a16="http://schemas.microsoft.com/office/drawing/2014/main" val="20001"/>
-                    </a:ext>
-                  </a:extLst>
-                </a:gridCol>
-                <a:gridCol w="2100000">
-                  <a:extLst>
-                    <a:ext uri="{9D8B030D-6E8A-4147-A177-3AD203B41FA5}">
-                      <a16:colId xmlns:a16="http://schemas.microsoft.com/office/drawing/2014/main" val="20002"/>
-                    </a:ext>
-                  </a:extLst>
-                </a:gridCol>
-                <a:gridCol w="2900000">
-                  <a:extLst>
-                    <a:ext uri="{9D8B030D-6E8A-4147-A177-3AD203B41FA5}">
-                      <a16:colId xmlns:a16="http://schemas.microsoft.com/office/drawing/2014/main" val="20003"/>
-                    </a:ext>
-                  </a:extLst>
-                </a:gridCol>
+                <a:gridCol w="1700000"/>
+                <a:gridCol w="1900000"/>
+                <a:gridCol w="1900000"/>
+                <a:gridCol w="1900000"/>
+                <a:gridCol w="2900000"/>
               </a:tblGrid>
               <a:tr h="620000">
                 <a:tc>
@@ -19361,11 +19340,28 @@
                     </a:solidFill>
                   </a:tcPr>
                 </a:tc>
-                <a:extLst>
-                  <a:ext uri="{0D108BD9-81ED-4DB2-BD59-A6C34878D82A}">
-                    <a16:rowId xmlns:a16="http://schemas.microsoft.com/office/drawing/2014/main" val="10000"/>
-                  </a:ext>
-                </a:extLst>
+                <a:tc>
+                  <a:txBody>
+                    <a:bodyPr/>
+                    <a:lstStyle/>
+                    <a:p>
+                      <a:pPr algn="ctr"/>
+                      <a:r>
+                        <a:rPr sz="1200" b="1">
+                          <a:solidFill>
+                            <a:srgbClr val="FFFFFF"/>
+                          </a:solidFill>
+                        </a:rPr>
+                        <a:t>SHOT+APS+마스킹(최종)</a:t>
+                      </a:r>
+                    </a:p>
+                  </a:txBody>
+                  <a:tcPr anchor="ctr">
+                    <a:solidFill>
+                      <a:srgbClr val="1E2761"/>
+                    </a:solidFill>
+                  </a:tcPr>
+                </a:tc>
               </a:tr>
               <a:tr h="620000">
                 <a:tc>
@@ -19441,12 +19437,34 @@
                     <a:p>
                       <a:pPr algn="ctr"/>
                       <a:r>
+                        <a:rPr sz="1200" b="0">
+                          <a:solidFill>
+                            <a:srgbClr val="1A1A1A"/>
+                          </a:solidFill>
+                        </a:rPr>
+                        <a:t>42.04%</a:t>
+                      </a:r>
+                    </a:p>
+                  </a:txBody>
+                  <a:tcPr anchor="ctr">
+                    <a:solidFill>
+                      <a:srgbClr val="FFFFFF"/>
+                    </a:solidFill>
+                  </a:tcPr>
+                </a:tc>
+                <a:tc>
+                  <a:txBody>
+                    <a:bodyPr/>
+                    <a:lstStyle/>
+                    <a:p>
+                      <a:pPr algn="ctr"/>
+                      <a:r>
                         <a:rPr sz="1200" b="1">
                           <a:solidFill>
                             <a:srgbClr val="1A1A1A"/>
                           </a:solidFill>
                         </a:rPr>
-                        <a:t>42.04%</a:t>
+                        <a:t>44.59% (F1 0.426)</a:t>
                       </a:r>
                     </a:p>
                   </a:txBody>
@@ -19456,11 +19474,6 @@
                     </a:solidFill>
                   </a:tcPr>
                 </a:tc>
-                <a:extLst>
-                  <a:ext uri="{0D108BD9-81ED-4DB2-BD59-A6C34878D82A}">
-                    <a16:rowId xmlns:a16="http://schemas.microsoft.com/office/drawing/2014/main" val="10001"/>
-                  </a:ext>
-                </a:extLst>
               </a:tr>
               <a:tr h="620000">
                 <a:tc>
@@ -19551,11 +19564,28 @@
                     </a:solidFill>
                   </a:tcPr>
                 </a:tc>
-                <a:extLst>
-                  <a:ext uri="{0D108BD9-81ED-4DB2-BD59-A6C34878D82A}">
-                    <a16:rowId xmlns:a16="http://schemas.microsoft.com/office/drawing/2014/main" val="10002"/>
-                  </a:ext>
-                </a:extLst>
+                <a:tc>
+                  <a:txBody>
+                    <a:bodyPr/>
+                    <a:lstStyle/>
+                    <a:p>
+                      <a:pPr algn="ctr"/>
+                      <a:r>
+                        <a:rPr sz="1200" b="0">
+                          <a:solidFill>
+                            <a:srgbClr val="1A1A1A"/>
+                          </a:solidFill>
+                        </a:rPr>
+                        <a:t>30.52% (거의 동일)</a:t>
+                      </a:r>
+                    </a:p>
+                  </a:txBody>
+                  <a:tcPr anchor="ctr">
+                    <a:solidFill>
+                      <a:srgbClr val="EEF3FC"/>
+                    </a:solidFill>
+                  </a:tcPr>
+                </a:tc>
               </a:tr>
               <a:tr h="620000">
                 <a:tc>
@@ -19587,12 +19617,34 @@
                     <a:p>
                       <a:pPr algn="ctr"/>
                       <a:r>
+                        <a:rPr sz="1200" b="1">
+                          <a:solidFill>
+                            <a:srgbClr val="1A1A1A"/>
+                          </a:solidFill>
+                        </a:rPr>
+                        <a:t>20.31%</a:t>
+                      </a:r>
+                    </a:p>
+                  </a:txBody>
+                  <a:tcPr anchor="ctr">
+                    <a:solidFill>
+                      <a:srgbClr val="FFFFFF"/>
+                    </a:solidFill>
+                  </a:tcPr>
+                </a:tc>
+                <a:tc>
+                  <a:txBody>
+                    <a:bodyPr/>
+                    <a:lstStyle/>
+                    <a:p>
+                      <a:pPr algn="ctr"/>
+                      <a:r>
                         <a:rPr sz="1200" b="0">
                           <a:solidFill>
                             <a:srgbClr val="1A1A1A"/>
                           </a:solidFill>
                         </a:rPr>
-                        <a:t>20.31%</a:t>
+                        <a:t>14.81%</a:t>
                       </a:r>
                     </a:p>
                   </a:txBody>
@@ -19614,7 +19666,7 @@
                             <a:srgbClr val="1A1A1A"/>
                           </a:solidFill>
                         </a:rPr>
-                        <a:t>14.81%</a:t>
+                        <a:t>19.46% (F1 0.182)</a:t>
                       </a:r>
                     </a:p>
                   </a:txBody>
@@ -19631,12 +19683,12 @@
                     <a:p>
                       <a:pPr algn="ctr"/>
                       <a:r>
-                        <a:rPr sz="1200" b="1">
-                          <a:solidFill>
-                            <a:srgbClr val="1A1A1A"/>
-                          </a:solidFill>
-                        </a:rPr>
-                        <a:t>19.46% (F1 0.182 1위)</a:t>
+                        <a:rPr sz="1200" b="0">
+                          <a:solidFill>
+                            <a:srgbClr val="1A1A1A"/>
+                          </a:solidFill>
+                        </a:rPr>
+                        <a:t>19.04% (F1 0.180)</a:t>
                       </a:r>
                     </a:p>
                   </a:txBody>
@@ -19646,11 +19698,6 @@
                     </a:solidFill>
                   </a:tcPr>
                 </a:tc>
-                <a:extLst>
-                  <a:ext uri="{0D108BD9-81ED-4DB2-BD59-A6C34878D82A}">
-                    <a16:rowId xmlns:a16="http://schemas.microsoft.com/office/drawing/2014/main" val="10003"/>
-                  </a:ext>
-                </a:extLst>
               </a:tr>
             </a:tbl>
           </a:graphicData>
@@ -19686,7 +19733,7 @@
                 </a:solidFill>
                 <a:latin typeface="Calibri"/>
               </a:rPr>
-              <a:t>AdaBN/TENT와 달리 SHOT은 3개 데이터셋 전부에서 collapse 없이 안정적으로 잘 됐다 — 데이터셋마다 다른 방법을 골라야 했던 AdaBN/TENT와 달리 튜닝 없이 두루 통하는 유일한 방법이다.</a:t>
+              <a:t>AdaBN/TENT와 달리 SHOT은 3개 데이터셋 전부에서 collapse 없이 안정적으로 잘 됐다. 여기에 신뢰도 기반 pseudo-label 재할당(APS, gamma=1.0)을 더해 Taiwan을 42.04%→44.59%로 끌어올렸다 — 마스킹+SHOT(epoch=2)+APS(gamma=1.0)를 최종 권장 파이프라인으로 정했다.</a:t>
             </a:r>
           </a:p>
         </p:txBody>
@@ -19789,7 +19836,7 @@
                 </a:solidFill>
                 <a:latin typeface="Calibri"/>
               </a:rPr>
-              <a:t>RESULT 7 · DOMAIN ADAPTATION (5/8)</a:t>
+              <a:t>RESULT 7 · DOMAIN ADAPTATION (5/10)</a:t>
             </a:r>
           </a:p>
         </p:txBody>
@@ -20318,7 +20365,7 @@
                 </a:solidFill>
                 <a:latin typeface="Calibri"/>
               </a:rPr>
-              <a:t>RESULT 7 · DOMAIN ADAPTATION (6/8)</a:t>
+              <a:t>RESULT 7 · DOMAIN ADAPTATION (6/10)</a:t>
             </a:r>
           </a:p>
         </p:txBody>
@@ -20388,7 +20435,7 @@
                 </a:solidFill>
                 <a:latin typeface="Calibri"/>
               </a:rPr>
-              <a:t>최종 권장: Class-restriction 마스킹은 항상 적용 + SHOT(epoch=2)을 기본 적응 방법으로 사용</a:t>
+              <a:t>최종 권장: Class-restriction 마스킹은 항상 적용 + SHOT(epoch=2)+APS(gamma=1.0)를 기본 적응 방법으로 사용</a:t>
             </a:r>
           </a:p>
         </p:txBody>
@@ -20458,7 +20505,7 @@
                 </a:solidFill>
                 <a:latin typeface="Calibri"/>
               </a:rPr>
-              <a:t>남은 과제: 지금은 seed42 단일 실행 결과다. tiny_cnn_c(96px·bicubic)를 seed123/2026에서 추가 학습해 이 비교 전체를 3-seed로 재검증할 계획이다(seed123 학습 진행 중).</a:t>
+              <a:t>남은 과제: 이 비교는 아직 seed42 단일 실행 기준이다(최신 후속 방법 비교는 다음 슬라이드부터). tiny_cnn_c(96px·bicubic)를 seed123/2026까지 추가 학습 완료해 이 비교 전체를 3-seed로 재검증하는 중이다.</a:t>
             </a:r>
           </a:p>
         </p:txBody>
@@ -21525,7 +21572,7 @@
                 </a:solidFill>
                 <a:latin typeface="Calibri"/>
               </a:rPr>
-              <a:t>31</a:t>
+              <a:t>33</a:t>
             </a:r>
           </a:p>
         </p:txBody>
@@ -22947,7 +22994,7 @@
                 </a:solidFill>
                 <a:latin typeface="Calibri"/>
               </a:rPr>
-              <a:t>32</a:t>
+              <a:t>34</a:t>
             </a:r>
           </a:p>
         </p:txBody>
@@ -23008,7 +23055,7 @@
                 </a:solidFill>
                 <a:latin typeface="Calibri"/>
               </a:rPr>
-              <a:t>RESULT 7 · DOMAIN ADAPTATION (8/8)</a:t>
+              <a:t>RESULT 7 · DOMAIN ADAPTATION (10/10)</a:t>
             </a:r>
           </a:p>
         </p:txBody>
@@ -23539,7 +23586,7 @@
                 </a:solidFill>
                 <a:latin typeface="Calibri"/>
               </a:rPr>
-              <a:t>30</a:t>
+              <a:t>32</a:t>
             </a:r>
           </a:p>
         </p:txBody>
@@ -23600,7 +23647,7 @@
                 </a:solidFill>
                 <a:latin typeface="Calibri"/>
               </a:rPr>
-              <a:t>RESULT 7 · DOMAIN ADAPTATION (3/8)</a:t>
+              <a:t>RESULT 7 · DOMAIN ADAPTATION (3/10)</a:t>
             </a:r>
           </a:p>
         </p:txBody>
@@ -23959,7 +24006,7 @@
                 </a:solidFill>
                 <a:latin typeface="Calibri"/>
               </a:rPr>
-              <a:t>RESULT 7 · DOMAIN ADAPTATION (7/8)</a:t>
+              <a:t>RESULT 7 · DOMAIN ADAPTATION (7/10)</a:t>
             </a:r>
           </a:p>
         </p:txBody>
@@ -24488,6 +24535,1185 @@
                 <a:latin typeface="Calibri"/>
               </a:rPr>
               <a:t>29</a:t>
+            </a:r>
+          </a:p>
+        </p:txBody>
+      </p:sp>
+    </p:spTree>
+  </p:cSld>
+  <p:clrMapOvr>
+    <a:masterClrMapping/>
+  </p:clrMapOvr>
+</p:sld>
+</file>
+
+<file path=ppt/slides/slide34.xml><?xml version="1.0" encoding="utf-8"?>
+<p:sld xmlns:a="http://schemas.openxmlformats.org/drawingml/2006/main" xmlns:p="http://schemas.openxmlformats.org/presentationml/2006/main" xmlns:r="http://schemas.openxmlformats.org/officeDocument/2006/relationships">
+  <p:cSld>
+    <p:bg>
+      <p:bgPr>
+        <a:solidFill>
+          <a:srgbClr val="FFFFFF"/>
+        </a:solidFill>
+        <a:effectLst/>
+      </p:bgPr>
+    </p:bg>
+    <p:spTree>
+      <p:nvGrpSpPr>
+        <p:cNvPr id="1" name=""/>
+        <p:cNvGrpSpPr/>
+        <p:nvPr/>
+      </p:nvGrpSpPr>
+      <p:grpSpPr/>
+      <p:sp>
+        <p:nvSpPr>
+          <p:cNvPr id="2" name="TextBox 1"/>
+          <p:cNvSpPr txBox="1"/>
+          <p:nvPr/>
+        </p:nvSpPr>
+        <p:spPr>
+          <a:xfrm>
+            <a:off x="548640" y="292608"/>
+            <a:ext cx="9144000" cy="292608"/>
+          </a:xfrm>
+          <a:prstGeom prst="rect">
+            <a:avLst/>
+          </a:prstGeom>
+          <a:noFill/>
+        </p:spPr>
+        <p:txBody>
+          <a:bodyPr wrap="square" anchor="t" lIns="0" rIns="0" tIns="0" bIns="0">
+            <a:spAutoFit/>
+          </a:bodyPr>
+          <a:lstStyle/>
+          <a:p>
+            <a:pPr algn="l"/>
+            <a:r>
+              <a:rPr sz="1050" b="1" i="0">
+                <a:solidFill>
+                  <a:srgbClr val="2A78D6"/>
+                </a:solidFill>
+                <a:latin typeface="Calibri"/>
+              </a:rPr>
+              <a:t>RESULT 7 · DOMAIN ADAPTATION (9/10)</a:t>
+            </a:r>
+          </a:p>
+        </p:txBody>
+      </p:sp>
+      <p:sp>
+        <p:nvSpPr>
+          <p:cNvPr id="3" name="TextBox 2"/>
+          <p:cNvSpPr txBox="1"/>
+          <p:nvPr/>
+        </p:nvSpPr>
+        <p:spPr>
+          <a:xfrm>
+            <a:off x="548640" y="566928"/>
+            <a:ext cx="10972800" cy="548640"/>
+          </a:xfrm>
+          <a:prstGeom prst="rect">
+            <a:avLst/>
+          </a:prstGeom>
+          <a:noFill/>
+        </p:spPr>
+        <p:txBody>
+          <a:bodyPr wrap="square" anchor="t" lIns="0" rIns="0" tIns="0" bIns="0">
+            <a:spAutoFit/>
+          </a:bodyPr>
+          <a:lstStyle/>
+          <a:p>
+            <a:pPr algn="l"/>
+            <a:r>
+              <a:rPr sz="2400" b="1" i="0">
+                <a:solidFill>
+                  <a:srgbClr val="1E2761"/>
+                </a:solidFill>
+                <a:latin typeface="Cambria"/>
+              </a:rPr>
+              <a:t>추가 방법 종합: UPA(APS·CACL) · R-GV · UCon-SFDA</a:t>
+            </a:r>
+          </a:p>
+        </p:txBody>
+      </p:sp>
+      <p:sp>
+        <p:nvSpPr>
+          <p:cNvPr id="4" name="TextBox 3"/>
+          <p:cNvSpPr txBox="1"/>
+          <p:nvPr/>
+        </p:nvSpPr>
+        <p:spPr>
+          <a:xfrm>
+            <a:off x="548640" y="1200000"/>
+            <a:ext cx="11091672" cy="1150000"/>
+          </a:xfrm>
+          <a:prstGeom prst="rect">
+            <a:avLst/>
+          </a:prstGeom>
+          <a:noFill/>
+        </p:spPr>
+        <p:txBody>
+          <a:bodyPr wrap="square" anchor="t" lIns="0" rIns="0" tIns="0" bIns="0">
+            <a:spAutoFit/>
+          </a:bodyPr>
+          <a:lstStyle/>
+          <a:p>
+            <a:pPr algn="l"/>
+            <a:r>
+              <a:rPr sz="1300" b="0" i="0">
+                <a:solidFill>
+                  <a:srgbClr val="1A1A1A"/>
+                </a:solidFill>
+                <a:latin typeface="Calibri"/>
+              </a:rPr>
+              <a:t>SHOT 심층 진단을 바탕으로 최신 SFDA 방법 3가지를 추가 검토했다 — UPA의 두 구성요소(APS/CACL)를 분리 시도, R-GV(CVPR 2025)는 포스터 기반 근사 구현, UCon-SFDA(ICLR 2025)는 논문 본문까지 확인 후 구현은 보류했다.</a:t>
+            </a:r>
+          </a:p>
+        </p:txBody>
+      </p:sp>
+      <p:graphicFrame>
+        <p:nvGraphicFramePr>
+          <p:cNvPr id="7" name="Table"/>
+          <p:cNvGraphicFramePr>
+            <a:graphicFrameLocks noGrp="1"/>
+          </p:cNvGraphicFramePr>
+          <p:nvPr/>
+        </p:nvGraphicFramePr>
+        <p:xfrm>
+          <a:off x="548640" y="2500000"/>
+          <a:ext cx="10300000" cy="2240000"/>
+        </p:xfrm>
+        <a:graphic>
+          <a:graphicData uri="http://schemas.openxmlformats.org/drawingml/2006/table">
+            <a:tbl>
+              <a:tblPr firstRow="1" bandRow="1">
+                <a:tableStyleId>{5C22544A-7EE6-4342-B048-85BDC9FD1C3A}</a:tableStyleId>
+              </a:tblPr>
+              <a:tblGrid>
+                <a:gridCol w="3400000"/>
+                <a:gridCol w="2300000"/>
+                <a:gridCol w="2300000"/>
+                <a:gridCol w="2300000"/>
+              </a:tblGrid>
+              <a:tr h="560000">
+                <a:tc>
+                  <a:txBody>
+                    <a:bodyPr/>
+                    <a:lstStyle/>
+                    <a:p>
+                      <a:pPr algn="ctr"/>
+                      <a:r>
+                        <a:rPr sz="1200" b="1">
+                          <a:solidFill>
+                            <a:srgbClr val="FFFFFF"/>
+                          </a:solidFill>
+                        </a:rPr>
+                        <a:t>방법</a:t>
+                      </a:r>
+                    </a:p>
+                  </a:txBody>
+                  <a:tcPr anchor="ctr">
+                    <a:solidFill>
+                      <a:srgbClr val="1E2761"/>
+                    </a:solidFill>
+                  </a:tcPr>
+                </a:tc>
+                <a:tc>
+                  <a:txBody>
+                    <a:bodyPr/>
+                    <a:lstStyle/>
+                    <a:p>
+                      <a:pPr algn="ctr"/>
+                      <a:r>
+                        <a:rPr sz="1200" b="1">
+                          <a:solidFill>
+                            <a:srgbClr val="FFFFFF"/>
+                          </a:solidFill>
+                        </a:rPr>
+                        <a:t>Taiwan</a:t>
+                      </a:r>
+                    </a:p>
+                  </a:txBody>
+                  <a:tcPr anchor="ctr">
+                    <a:solidFill>
+                      <a:srgbClr val="1E2761"/>
+                    </a:solidFill>
+                  </a:tcPr>
+                </a:tc>
+                <a:tc>
+                  <a:txBody>
+                    <a:bodyPr/>
+                    <a:lstStyle/>
+                    <a:p>
+                      <a:pPr algn="ctr"/>
+                      <a:r>
+                        <a:rPr sz="1200" b="1">
+                          <a:solidFill>
+                            <a:srgbClr val="FFFFFF"/>
+                          </a:solidFill>
+                        </a:rPr>
+                        <a:t>Bangladesh</a:t>
+                      </a:r>
+                    </a:p>
+                  </a:txBody>
+                  <a:tcPr anchor="ctr">
+                    <a:solidFill>
+                      <a:srgbClr val="1E2761"/>
+                    </a:solidFill>
+                  </a:tcPr>
+                </a:tc>
+                <a:tc>
+                  <a:txBody>
+                    <a:bodyPr/>
+                    <a:lstStyle/>
+                    <a:p>
+                      <a:pPr algn="ctr"/>
+                      <a:r>
+                        <a:rPr sz="1200" b="1">
+                          <a:solidFill>
+                            <a:srgbClr val="FFFFFF"/>
+                          </a:solidFill>
+                        </a:rPr>
+                        <a:t>PlantDoc</a:t>
+                      </a:r>
+                    </a:p>
+                  </a:txBody>
+                  <a:tcPr anchor="ctr">
+                    <a:solidFill>
+                      <a:srgbClr val="1E2761"/>
+                    </a:solidFill>
+                  </a:tcPr>
+                </a:tc>
+              </a:tr>
+              <a:tr h="560000">
+                <a:tc>
+                  <a:txBody>
+                    <a:bodyPr/>
+                    <a:lstStyle/>
+                    <a:p>
+                      <a:pPr algn="ctr"/>
+                      <a:r>
+                        <a:rPr sz="1200" b="0">
+                          <a:solidFill>
+                            <a:srgbClr val="1A1A1A"/>
+                          </a:solidFill>
+                        </a:rPr>
+                        <a:t>SHOT+APS+마스킹(최종)</a:t>
+                      </a:r>
+                    </a:p>
+                  </a:txBody>
+                  <a:tcPr anchor="ctr">
+                    <a:solidFill>
+                      <a:srgbClr val="FFFFFF"/>
+                    </a:solidFill>
+                  </a:tcPr>
+                </a:tc>
+                <a:tc>
+                  <a:txBody>
+                    <a:bodyPr/>
+                    <a:lstStyle/>
+                    <a:p>
+                      <a:pPr algn="ctr"/>
+                      <a:r>
+                        <a:rPr sz="1200" b="1">
+                          <a:solidFill>
+                            <a:srgbClr val="1A1A1A"/>
+                          </a:solidFill>
+                        </a:rPr>
+                        <a:t>44.59%</a:t>
+                      </a:r>
+                    </a:p>
+                  </a:txBody>
+                  <a:tcPr anchor="ctr">
+                    <a:solidFill>
+                      <a:srgbClr val="FFFFFF"/>
+                    </a:solidFill>
+                  </a:tcPr>
+                </a:tc>
+                <a:tc>
+                  <a:txBody>
+                    <a:bodyPr/>
+                    <a:lstStyle/>
+                    <a:p>
+                      <a:pPr algn="ctr"/>
+                      <a:r>
+                        <a:rPr sz="1200" b="1">
+                          <a:solidFill>
+                            <a:srgbClr val="1A1A1A"/>
+                          </a:solidFill>
+                        </a:rPr>
+                        <a:t>30.52%</a:t>
+                      </a:r>
+                    </a:p>
+                  </a:txBody>
+                  <a:tcPr anchor="ctr">
+                    <a:solidFill>
+                      <a:srgbClr val="FFFFFF"/>
+                    </a:solidFill>
+                  </a:tcPr>
+                </a:tc>
+                <a:tc>
+                  <a:txBody>
+                    <a:bodyPr/>
+                    <a:lstStyle/>
+                    <a:p>
+                      <a:pPr algn="ctr"/>
+                      <a:r>
+                        <a:rPr sz="1200" b="1">
+                          <a:solidFill>
+                            <a:srgbClr val="1A1A1A"/>
+                          </a:solidFill>
+                        </a:rPr>
+                        <a:t>19.04%</a:t>
+                      </a:r>
+                    </a:p>
+                  </a:txBody>
+                  <a:tcPr anchor="ctr">
+                    <a:solidFill>
+                      <a:srgbClr val="FFFFFF"/>
+                    </a:solidFill>
+                  </a:tcPr>
+                </a:tc>
+              </a:tr>
+              <a:tr h="560000">
+                <a:tc>
+                  <a:txBody>
+                    <a:bodyPr/>
+                    <a:lstStyle/>
+                    <a:p>
+                      <a:pPr algn="ctr"/>
+                      <a:r>
+                        <a:rPr sz="1200" b="0">
+                          <a:solidFill>
+                            <a:srgbClr val="1A1A1A"/>
+                          </a:solidFill>
+                        </a:rPr>
+                        <a:t>SHOT+APS+CACL</a:t>
+                      </a:r>
+                    </a:p>
+                  </a:txBody>
+                  <a:tcPr anchor="ctr">
+                    <a:solidFill>
+                      <a:srgbClr val="EEF3FC"/>
+                    </a:solidFill>
+                  </a:tcPr>
+                </a:tc>
+                <a:tc>
+                  <a:txBody>
+                    <a:bodyPr/>
+                    <a:lstStyle/>
+                    <a:p>
+                      <a:pPr algn="ctr"/>
+                      <a:r>
+                        <a:rPr sz="1200" b="0">
+                          <a:solidFill>
+                            <a:srgbClr val="1A1A1A"/>
+                          </a:solidFill>
+                        </a:rPr>
+                        <a:t>33~38%대</a:t>
+                      </a:r>
+                    </a:p>
+                  </a:txBody>
+                  <a:tcPr anchor="ctr">
+                    <a:solidFill>
+                      <a:srgbClr val="EEF3FC"/>
+                    </a:solidFill>
+                  </a:tcPr>
+                </a:tc>
+                <a:tc>
+                  <a:txBody>
+                    <a:bodyPr/>
+                    <a:lstStyle/>
+                    <a:p>
+                      <a:pPr algn="ctr"/>
+                      <a:r>
+                        <a:rPr sz="1200" b="0">
+                          <a:solidFill>
+                            <a:srgbClr val="1A1A1A"/>
+                          </a:solidFill>
+                        </a:rPr>
+                        <a:t>중립</a:t>
+                      </a:r>
+                    </a:p>
+                  </a:txBody>
+                  <a:tcPr anchor="ctr">
+                    <a:solidFill>
+                      <a:srgbClr val="EEF3FC"/>
+                    </a:solidFill>
+                  </a:tcPr>
+                </a:tc>
+                <a:tc>
+                  <a:txBody>
+                    <a:bodyPr/>
+                    <a:lstStyle/>
+                    <a:p>
+                      <a:pPr algn="ctr"/>
+                      <a:r>
+                        <a:rPr sz="1200" b="0">
+                          <a:solidFill>
+                            <a:srgbClr val="1A1A1A"/>
+                          </a:solidFill>
+                        </a:rPr>
+                        <a:t>중립</a:t>
+                      </a:r>
+                    </a:p>
+                  </a:txBody>
+                  <a:tcPr anchor="ctr">
+                    <a:solidFill>
+                      <a:srgbClr val="EEF3FC"/>
+                    </a:solidFill>
+                  </a:tcPr>
+                </a:tc>
+              </a:tr>
+              <a:tr h="560000">
+                <a:tc>
+                  <a:txBody>
+                    <a:bodyPr/>
+                    <a:lstStyle/>
+                    <a:p>
+                      <a:pPr algn="ctr"/>
+                      <a:r>
+                        <a:rPr sz="1200" b="0">
+                          <a:solidFill>
+                            <a:srgbClr val="1A1A1A"/>
+                          </a:solidFill>
+                        </a:rPr>
+                        <a:t>R-GV(alignment 제외, 근사)</a:t>
+                      </a:r>
+                    </a:p>
+                  </a:txBody>
+                  <a:tcPr anchor="ctr">
+                    <a:solidFill>
+                      <a:srgbClr val="FFFFFF"/>
+                    </a:solidFill>
+                  </a:tcPr>
+                </a:tc>
+                <a:tc>
+                  <a:txBody>
+                    <a:bodyPr/>
+                    <a:lstStyle/>
+                    <a:p>
+                      <a:pPr algn="ctr"/>
+                      <a:r>
+                        <a:rPr sz="1200" b="0">
+                          <a:solidFill>
+                            <a:srgbClr val="1A1A1A"/>
+                          </a:solidFill>
+                        </a:rPr>
+                        <a:t>36.94%</a:t>
+                      </a:r>
+                    </a:p>
+                  </a:txBody>
+                  <a:tcPr anchor="ctr">
+                    <a:solidFill>
+                      <a:srgbClr val="FFFFFF"/>
+                    </a:solidFill>
+                  </a:tcPr>
+                </a:tc>
+                <a:tc>
+                  <a:txBody>
+                    <a:bodyPr/>
+                    <a:lstStyle/>
+                    <a:p>
+                      <a:pPr algn="ctr"/>
+                      <a:r>
+                        <a:rPr sz="1200" b="0">
+                          <a:solidFill>
+                            <a:srgbClr val="1A1A1A"/>
+                          </a:solidFill>
+                        </a:rPr>
+                        <a:t>30.61%</a:t>
+                      </a:r>
+                    </a:p>
+                  </a:txBody>
+                  <a:tcPr anchor="ctr">
+                    <a:solidFill>
+                      <a:srgbClr val="FFFFFF"/>
+                    </a:solidFill>
+                  </a:tcPr>
+                </a:tc>
+                <a:tc>
+                  <a:txBody>
+                    <a:bodyPr/>
+                    <a:lstStyle/>
+                    <a:p>
+                      <a:pPr algn="ctr"/>
+                      <a:r>
+                        <a:rPr sz="1200" b="0">
+                          <a:solidFill>
+                            <a:srgbClr val="1A1A1A"/>
+                          </a:solidFill>
+                        </a:rPr>
+                        <a:t>17.07%</a:t>
+                      </a:r>
+                    </a:p>
+                  </a:txBody>
+                  <a:tcPr anchor="ctr">
+                    <a:solidFill>
+                      <a:srgbClr val="FFFFFF"/>
+                    </a:solidFill>
+                  </a:tcPr>
+                </a:tc>
+              </a:tr>
+              <a:tr h="560000">
+                <a:tc>
+                  <a:txBody>
+                    <a:bodyPr/>
+                    <a:lstStyle/>
+                    <a:p>
+                      <a:pPr algn="ctr"/>
+                      <a:r>
+                        <a:rPr sz="1200" b="0">
+                          <a:solidFill>
+                            <a:srgbClr val="1A1A1A"/>
+                          </a:solidFill>
+                        </a:rPr>
+                        <a:t>UCon-SFDA</a:t>
+                      </a:r>
+                    </a:p>
+                  </a:txBody>
+                  <a:tcPr anchor="ctr">
+                    <a:solidFill>
+                      <a:srgbClr val="EEF3FC"/>
+                    </a:solidFill>
+                  </a:tcPr>
+                </a:tc>
+                <a:tc>
+                  <a:txBody>
+                    <a:bodyPr/>
+                    <a:lstStyle/>
+                    <a:p>
+                      <a:pPr algn="ctr"/>
+                      <a:r>
+                        <a:rPr sz="1200" b="0">
+                          <a:solidFill>
+                            <a:srgbClr val="1A1A1A"/>
+                          </a:solidFill>
+                        </a:rPr>
+                        <a:t>구현 보류</a:t>
+                      </a:r>
+                    </a:p>
+                  </a:txBody>
+                  <a:tcPr anchor="ctr">
+                    <a:solidFill>
+                      <a:srgbClr val="EEF3FC"/>
+                    </a:solidFill>
+                  </a:tcPr>
+                </a:tc>
+                <a:tc>
+                  <a:txBody>
+                    <a:bodyPr/>
+                    <a:lstStyle/>
+                    <a:p>
+                      <a:pPr algn="ctr"/>
+                      <a:r>
+                        <a:rPr sz="1200" b="0">
+                          <a:solidFill>
+                            <a:srgbClr val="1A1A1A"/>
+                          </a:solidFill>
+                        </a:rPr>
+                        <a:t>구현 보류</a:t>
+                      </a:r>
+                    </a:p>
+                  </a:txBody>
+                  <a:tcPr anchor="ctr">
+                    <a:solidFill>
+                      <a:srgbClr val="EEF3FC"/>
+                    </a:solidFill>
+                  </a:tcPr>
+                </a:tc>
+                <a:tc>
+                  <a:txBody>
+                    <a:bodyPr/>
+                    <a:lstStyle/>
+                    <a:p>
+                      <a:pPr algn="ctr"/>
+                      <a:r>
+                        <a:rPr sz="1200" b="0">
+                          <a:solidFill>
+                            <a:srgbClr val="1A1A1A"/>
+                          </a:solidFill>
+                        </a:rPr>
+                        <a:t>구현 보류</a:t>
+                      </a:r>
+                    </a:p>
+                  </a:txBody>
+                  <a:tcPr anchor="ctr">
+                    <a:solidFill>
+                      <a:srgbClr val="EEF3FC"/>
+                    </a:solidFill>
+                  </a:tcPr>
+                </a:tc>
+              </a:tr>
+            </a:tbl>
+          </a:graphicData>
+        </a:graphic>
+      </p:graphicFrame>
+      <p:sp>
+        <p:nvSpPr>
+          <p:cNvPr id="6" name="TextBox 4"/>
+          <p:cNvSpPr txBox="1"/>
+          <p:nvPr/>
+        </p:nvSpPr>
+        <p:spPr>
+          <a:xfrm>
+            <a:off x="548640" y="5050000"/>
+            <a:ext cx="11091672" cy="1300000"/>
+          </a:xfrm>
+          <a:prstGeom prst="rect">
+            <a:avLst/>
+          </a:prstGeom>
+          <a:noFill/>
+        </p:spPr>
+        <p:txBody>
+          <a:bodyPr wrap="square" anchor="t" lIns="0" rIns="0" tIns="0" bIns="0">
+            <a:spAutoFit/>
+          </a:bodyPr>
+          <a:lstStyle/>
+          <a:p>
+            <a:pPr algn="l"/>
+            <a:r>
+              <a:rPr sz="1250" b="0" i="1">
+                <a:solidFill>
+                  <a:srgbClr val="5B5E6B"/>
+                </a:solidFill>
+                <a:latin typeface="Calibri"/>
+              </a:rPr>
+              <a:t>APS(K=4 KNN 재투표, gamma=1.0)만 Taiwan을 개선(42.04%→44.59%); CACL(confident set 내 contrastive loss)과 R-GV의 semantic alignment는 공통적으로 더 나쁘다 — 고정된 classifier(head.fc)와 이를 움직이려는 contrastive/alignment loss가 구조적으로 안 맞는 것으로 보인다. UCon-SFDA는 CACL과 같은 계열(contrastive loss + partial-label)이라 같은 문제를 겪을 가능성이 높고 하이퍼파라미터도 5개(λ_CL, λ_DC, λ_PL, τ, K_PL)로 많아, 구현하지 않고 판단 근거만 기록으로 남긴다.</a:t>
+            </a:r>
+          </a:p>
+        </p:txBody>
+      </p:sp>
+      <p:sp>
+        <p:nvSpPr>
+          <p:cNvPr id="9" name="TextBox 5"/>
+          <p:cNvSpPr txBox="1"/>
+          <p:nvPr/>
+        </p:nvSpPr>
+        <p:spPr>
+          <a:xfrm>
+            <a:off x="11430000" y="6446520"/>
+            <a:ext cx="548640" cy="274320"/>
+          </a:xfrm>
+          <a:prstGeom prst="rect">
+            <a:avLst/>
+          </a:prstGeom>
+          <a:noFill/>
+        </p:spPr>
+        <p:txBody>
+          <a:bodyPr wrap="square" anchor="t" lIns="0" rIns="0" tIns="0" bIns="0">
+            <a:spAutoFit/>
+          </a:bodyPr>
+          <a:lstStyle/>
+          <a:p>
+            <a:pPr algn="r"/>
+            <a:r>
+              <a:rPr sz="1000" b="0" i="0">
+                <a:solidFill>
+                  <a:srgbClr val="5B5E6B"/>
+                </a:solidFill>
+                <a:latin typeface="Calibri"/>
+              </a:rPr>
+              <a:t>31</a:t>
+            </a:r>
+          </a:p>
+        </p:txBody>
+      </p:sp>
+    </p:spTree>
+  </p:cSld>
+  <p:clrMapOvr>
+    <a:masterClrMapping/>
+  </p:clrMapOvr>
+</p:sld>
+</file>
+
+<file path=ppt/slides/slide35.xml><?xml version="1.0" encoding="utf-8"?>
+<p:sld xmlns:a="http://schemas.openxmlformats.org/drawingml/2006/main" xmlns:p="http://schemas.openxmlformats.org/presentationml/2006/main" xmlns:r="http://schemas.openxmlformats.org/officeDocument/2006/relationships">
+  <p:cSld>
+    <p:bg>
+      <p:bgPr>
+        <a:solidFill>
+          <a:srgbClr val="FFFFFF"/>
+        </a:solidFill>
+        <a:effectLst/>
+      </p:bgPr>
+    </p:bg>
+    <p:spTree>
+      <p:nvGrpSpPr>
+        <p:cNvPr id="1" name=""/>
+        <p:cNvGrpSpPr/>
+        <p:nvPr/>
+      </p:nvGrpSpPr>
+      <p:grpSpPr/>
+      <p:sp>
+        <p:nvSpPr>
+          <p:cNvPr id="2" name="TextBox 1"/>
+          <p:cNvSpPr txBox="1"/>
+          <p:nvPr/>
+        </p:nvSpPr>
+        <p:spPr>
+          <a:xfrm>
+            <a:off x="548640" y="292608"/>
+            <a:ext cx="9144000" cy="292608"/>
+          </a:xfrm>
+          <a:prstGeom prst="rect">
+            <a:avLst/>
+          </a:prstGeom>
+          <a:noFill/>
+        </p:spPr>
+        <p:txBody>
+          <a:bodyPr wrap="square" anchor="t" lIns="0" rIns="0" tIns="0" bIns="0">
+            <a:spAutoFit/>
+          </a:bodyPr>
+          <a:lstStyle/>
+          <a:p>
+            <a:pPr algn="l"/>
+            <a:r>
+              <a:rPr sz="1050" b="1" i="0">
+                <a:solidFill>
+                  <a:srgbClr val="2A78D6"/>
+                </a:solidFill>
+                <a:latin typeface="Calibri"/>
+              </a:rPr>
+              <a:t>RESULT 7 · DOMAIN ADAPTATION (8/10)</a:t>
+            </a:r>
+          </a:p>
+        </p:txBody>
+      </p:sp>
+      <p:sp>
+        <p:nvSpPr>
+          <p:cNvPr id="3" name="TextBox 2"/>
+          <p:cNvSpPr txBox="1"/>
+          <p:nvPr/>
+        </p:nvSpPr>
+        <p:spPr>
+          <a:xfrm>
+            <a:off x="548640" y="566928"/>
+            <a:ext cx="10972800" cy="548640"/>
+          </a:xfrm>
+          <a:prstGeom prst="rect">
+            <a:avLst/>
+          </a:prstGeom>
+          <a:noFill/>
+        </p:spPr>
+        <p:txBody>
+          <a:bodyPr wrap="square" anchor="t" lIns="0" rIns="0" tIns="0" bIns="0">
+            <a:spAutoFit/>
+          </a:bodyPr>
+          <a:lstStyle/>
+          <a:p>
+            <a:pPr algn="l"/>
+            <a:r>
+              <a:rPr sz="2400" b="1" i="0">
+                <a:solidFill>
+                  <a:srgbClr val="1E2761"/>
+                </a:solidFill>
+                <a:latin typeface="Cambria"/>
+              </a:rPr>
+              <a:t>심층 진단: SHOT은 정확히 어디서 성공·실패하는가</a:t>
+            </a:r>
+          </a:p>
+        </p:txBody>
+      </p:sp>
+      <p:sp>
+        <p:nvSpPr>
+          <p:cNvPr id="4" name="TextBox 3"/>
+          <p:cNvSpPr txBox="1"/>
+          <p:nvPr/>
+        </p:nvSpPr>
+        <p:spPr>
+          <a:xfrm>
+            <a:off x="548640" y="1200000"/>
+            <a:ext cx="11091672" cy="1150000"/>
+          </a:xfrm>
+          <a:prstGeom prst="rect">
+            <a:avLst/>
+          </a:prstGeom>
+          <a:noFill/>
+        </p:spPr>
+        <p:txBody>
+          <a:bodyPr wrap="square" anchor="t" lIns="0" rIns="0" tIns="0" bIns="0">
+            <a:spAutoFit/>
+          </a:bodyPr>
+          <a:lstStyle/>
+          <a:p>
+            <a:pPr algn="l"/>
+            <a:r>
+              <a:rPr sz="1300" b="0" i="0">
+                <a:solidFill>
+                  <a:srgbClr val="1A1A1A"/>
+                </a:solidFill>
+                <a:latin typeface="Calibri"/>
+              </a:rPr>
+              <a:t>target label을 적응에는 전혀 안 쓰고 진단에만 쓰는 세 가지 분석을 추가했다: ① epoch별 pseudo-label 정확도 추적 ② 초기 클래스별 precision/recall 비교 ③ Oracle 상한 실험(실제 정답으로 fine-tuning, stratified 70/30 train/eval 분리).</a:t>
+            </a:r>
+          </a:p>
+        </p:txBody>
+      </p:sp>
+      <p:graphicFrame>
+        <p:nvGraphicFramePr>
+          <p:cNvPr id="7" name="Table"/>
+          <p:cNvGraphicFramePr>
+            <a:graphicFrameLocks noGrp="1"/>
+          </p:cNvGraphicFramePr>
+          <p:nvPr/>
+        </p:nvGraphicFramePr>
+        <p:xfrm>
+          <a:off x="548640" y="2500000"/>
+          <a:ext cx="9800000" cy="1680000"/>
+        </p:xfrm>
+        <a:graphic>
+          <a:graphicData uri="http://schemas.openxmlformats.org/drawingml/2006/table">
+            <a:tbl>
+              <a:tblPr firstRow="1" bandRow="1">
+                <a:tableStyleId>{5C22544A-7EE6-4342-B048-85BDC9FD1C3A}</a:tableStyleId>
+              </a:tblPr>
+              <a:tblGrid>
+                <a:gridCol w="2800000"/>
+                <a:gridCol w="3200000"/>
+                <a:gridCol w="3800000"/>
+              </a:tblGrid>
+              <a:tr h="560000">
+                <a:tc>
+                  <a:txBody>
+                    <a:bodyPr/>
+                    <a:lstStyle/>
+                    <a:p>
+                      <a:pPr algn="ctr"/>
+                      <a:r>
+                        <a:rPr sz="1200" b="1">
+                          <a:solidFill>
+                            <a:srgbClr val="FFFFFF"/>
+                          </a:solidFill>
+                        </a:rPr>
+                        <a:t>데이터셋</a:t>
+                      </a:r>
+                    </a:p>
+                  </a:txBody>
+                  <a:tcPr anchor="ctr">
+                    <a:solidFill>
+                      <a:srgbClr val="1E2761"/>
+                    </a:solidFill>
+                  </a:tcPr>
+                </a:tc>
+                <a:tc>
+                  <a:txBody>
+                    <a:bodyPr/>
+                    <a:lstStyle/>
+                    <a:p>
+                      <a:pPr algn="ctr"/>
+                      <a:r>
+                        <a:rPr sz="1200" b="1">
+                          <a:solidFill>
+                            <a:srgbClr val="FFFFFF"/>
+                          </a:solidFill>
+                        </a:rPr>
+                        <a:t>Source(eval split)</a:t>
+                      </a:r>
+                    </a:p>
+                  </a:txBody>
+                  <a:tcPr anchor="ctr">
+                    <a:solidFill>
+                      <a:srgbClr val="1E2761"/>
+                    </a:solidFill>
+                  </a:tcPr>
+                </a:tc>
+                <a:tc>
+                  <a:txBody>
+                    <a:bodyPr/>
+                    <a:lstStyle/>
+                    <a:p>
+                      <a:pPr algn="ctr"/>
+                      <a:r>
+                        <a:rPr sz="1200" b="1">
+                          <a:solidFill>
+                            <a:srgbClr val="FFFFFF"/>
+                          </a:solidFill>
+                        </a:rPr>
+                        <a:t>Oracle(정답으로 학습)</a:t>
+                      </a:r>
+                    </a:p>
+                  </a:txBody>
+                  <a:tcPr anchor="ctr">
+                    <a:solidFill>
+                      <a:srgbClr val="1E2761"/>
+                    </a:solidFill>
+                  </a:tcPr>
+                </a:tc>
+              </a:tr>
+              <a:tr h="560000">
+                <a:tc>
+                  <a:txBody>
+                    <a:bodyPr/>
+                    <a:lstStyle/>
+                    <a:p>
+                      <a:pPr algn="ctr"/>
+                      <a:r>
+                        <a:rPr sz="1200" b="0">
+                          <a:solidFill>
+                            <a:srgbClr val="1A1A1A"/>
+                          </a:solidFill>
+                        </a:rPr>
+                        <a:t>Taiwan</a:t>
+                      </a:r>
+                    </a:p>
+                  </a:txBody>
+                  <a:tcPr anchor="ctr">
+                    <a:solidFill>
+                      <a:srgbClr val="FFFFFF"/>
+                    </a:solidFill>
+                  </a:tcPr>
+                </a:tc>
+                <a:tc>
+                  <a:txBody>
+                    <a:bodyPr/>
+                    <a:lstStyle/>
+                    <a:p>
+                      <a:pPr algn="ctr"/>
+                      <a:r>
+                        <a:rPr sz="1200" b="0">
+                          <a:solidFill>
+                            <a:srgbClr val="1A1A1A"/>
+                          </a:solidFill>
+                        </a:rPr>
+                        <a:t>33.68%</a:t>
+                      </a:r>
+                    </a:p>
+                  </a:txBody>
+                  <a:tcPr anchor="ctr">
+                    <a:solidFill>
+                      <a:srgbClr val="FFFFFF"/>
+                    </a:solidFill>
+                  </a:tcPr>
+                </a:tc>
+                <a:tc>
+                  <a:txBody>
+                    <a:bodyPr/>
+                    <a:lstStyle/>
+                    <a:p>
+                      <a:pPr algn="ctr"/>
+                      <a:r>
+                        <a:rPr sz="1200" b="1">
+                          <a:solidFill>
+                            <a:srgbClr val="1A1A1A"/>
+                          </a:solidFill>
+                        </a:rPr>
+                        <a:t>70.53% (+36.9%p)</a:t>
+                      </a:r>
+                    </a:p>
+                  </a:txBody>
+                  <a:tcPr anchor="ctr">
+                    <a:solidFill>
+                      <a:srgbClr val="FFFFFF"/>
+                    </a:solidFill>
+                  </a:tcPr>
+                </a:tc>
+              </a:tr>
+              <a:tr h="560000">
+                <a:tc>
+                  <a:txBody>
+                    <a:bodyPr/>
+                    <a:lstStyle/>
+                    <a:p>
+                      <a:pPr algn="ctr"/>
+                      <a:r>
+                        <a:rPr sz="1200" b="0">
+                          <a:solidFill>
+                            <a:srgbClr val="1A1A1A"/>
+                          </a:solidFill>
+                        </a:rPr>
+                        <a:t>Bangladesh</a:t>
+                      </a:r>
+                    </a:p>
+                  </a:txBody>
+                  <a:tcPr anchor="ctr">
+                    <a:solidFill>
+                      <a:srgbClr val="EEF3FC"/>
+                    </a:solidFill>
+                  </a:tcPr>
+                </a:tc>
+                <a:tc>
+                  <a:txBody>
+                    <a:bodyPr/>
+                    <a:lstStyle/>
+                    <a:p>
+                      <a:pPr algn="ctr"/>
+                      <a:r>
+                        <a:rPr sz="1200" b="0">
+                          <a:solidFill>
+                            <a:srgbClr val="1A1A1A"/>
+                          </a:solidFill>
+                        </a:rPr>
+                        <a:t>22.96%</a:t>
+                      </a:r>
+                    </a:p>
+                  </a:txBody>
+                  <a:tcPr anchor="ctr">
+                    <a:solidFill>
+                      <a:srgbClr val="EEF3FC"/>
+                    </a:solidFill>
+                  </a:tcPr>
+                </a:tc>
+                <a:tc>
+                  <a:txBody>
+                    <a:bodyPr/>
+                    <a:lstStyle/>
+                    <a:p>
+                      <a:pPr algn="ctr"/>
+                      <a:r>
+                        <a:rPr sz="1200" b="1">
+                          <a:solidFill>
+                            <a:srgbClr val="1A1A1A"/>
+                          </a:solidFill>
+                        </a:rPr>
+                        <a:t>58.61% (+35.7%p)</a:t>
+                      </a:r>
+                    </a:p>
+                  </a:txBody>
+                  <a:tcPr anchor="ctr">
+                    <a:solidFill>
+                      <a:srgbClr val="EEF3FC"/>
+                    </a:solidFill>
+                  </a:tcPr>
+                </a:tc>
+              </a:tr>
+              <a:tr h="560000">
+                <a:tc>
+                  <a:txBody>
+                    <a:bodyPr/>
+                    <a:lstStyle/>
+                    <a:p>
+                      <a:pPr algn="ctr"/>
+                      <a:r>
+                        <a:rPr sz="1200" b="0">
+                          <a:solidFill>
+                            <a:srgbClr val="1A1A1A"/>
+                          </a:solidFill>
+                        </a:rPr>
+                        <a:t>PlantDoc</a:t>
+                      </a:r>
+                    </a:p>
+                  </a:txBody>
+                  <a:tcPr anchor="ctr">
+                    <a:solidFill>
+                      <a:srgbClr val="FFFFFF"/>
+                    </a:solidFill>
+                  </a:tcPr>
+                </a:tc>
+                <a:tc>
+                  <a:txBody>
+                    <a:bodyPr/>
+                    <a:lstStyle/>
+                    <a:p>
+                      <a:pPr algn="ctr"/>
+                      <a:r>
+                        <a:rPr sz="1200" b="0">
+                          <a:solidFill>
+                            <a:srgbClr val="1A1A1A"/>
+                          </a:solidFill>
+                        </a:rPr>
+                        <a:t>23.47%</a:t>
+                      </a:r>
+                    </a:p>
+                  </a:txBody>
+                  <a:tcPr anchor="ctr">
+                    <a:solidFill>
+                      <a:srgbClr val="FFFFFF"/>
+                    </a:solidFill>
+                  </a:tcPr>
+                </a:tc>
+                <a:tc>
+                  <a:txBody>
+                    <a:bodyPr/>
+                    <a:lstStyle/>
+                    <a:p>
+                      <a:pPr algn="ctr"/>
+                      <a:r>
+                        <a:rPr sz="1200" b="1">
+                          <a:solidFill>
+                            <a:srgbClr val="1A1A1A"/>
+                          </a:solidFill>
+                        </a:rPr>
+                        <a:t>23.47% (변화 없음)</a:t>
+                      </a:r>
+                    </a:p>
+                  </a:txBody>
+                  <a:tcPr anchor="ctr">
+                    <a:solidFill>
+                      <a:srgbClr val="FFFFFF"/>
+                    </a:solidFill>
+                  </a:tcPr>
+                </a:tc>
+              </a:tr>
+            </a:tbl>
+          </a:graphicData>
+        </a:graphic>
+      </p:graphicFrame>
+      <p:sp>
+        <p:nvSpPr>
+          <p:cNvPr id="6" name="TextBox 4"/>
+          <p:cNvSpPr txBox="1"/>
+          <p:nvPr/>
+        </p:nvSpPr>
+        <p:spPr>
+          <a:xfrm>
+            <a:off x="548640" y="4400000"/>
+            <a:ext cx="11091672" cy="1900000"/>
+          </a:xfrm>
+          <a:prstGeom prst="rect">
+            <a:avLst/>
+          </a:prstGeom>
+          <a:noFill/>
+        </p:spPr>
+        <p:txBody>
+          <a:bodyPr wrap="square" anchor="t" lIns="0" rIns="0" tIns="0" bIns="0">
+            <a:spAutoFit/>
+          </a:bodyPr>
+          <a:lstStyle/>
+          <a:p>
+            <a:pPr algn="l"/>
+            <a:r>
+              <a:rPr sz="1250" b="0" i="1">
+                <a:solidFill>
+                  <a:srgbClr val="5B5E6B"/>
+                </a:solidFill>
+                <a:latin typeface="Calibri"/>
+              </a:rPr>
+              <a:t>① Taiwan: healthy가 0% precision·recall로 Late_blight에 흡수되는 사각지대(SHOT 후에도 그대로). ② Bangladesh: SHOT이 Late_blight 쏠림을 Target_Spot 쏠림으로 옮길 뿐(recall 0→43%, 대신 Late_blight 60→22%). ③ PlantDoc: source 단계에서 이미 3개 클래스가 0%이고, SHOT을 거쳐도 기존 클래스 recall이 반토막나며 상쇄된다. Oracle 결과: Taiwan·Bangladesh는 정답만 있으면 2배 이상 뛰어 pseudo-label 품질이 핵심 병목임을 확인. PlantDoc은 train 정확도만 19%→27%로 오르고 eval은 그대로(과적합) — 병목이 feature 표현력 자체라는 신호.</a:t>
+            </a:r>
+          </a:p>
+        </p:txBody>
+      </p:sp>
+      <p:sp>
+        <p:nvSpPr>
+          <p:cNvPr id="9" name="TextBox 5"/>
+          <p:cNvSpPr txBox="1"/>
+          <p:nvPr/>
+        </p:nvSpPr>
+        <p:spPr>
+          <a:xfrm>
+            <a:off x="11430000" y="6446520"/>
+            <a:ext cx="548640" cy="274320"/>
+          </a:xfrm>
+          <a:prstGeom prst="rect">
+            <a:avLst/>
+          </a:prstGeom>
+          <a:noFill/>
+        </p:spPr>
+        <p:txBody>
+          <a:bodyPr wrap="square" anchor="t" lIns="0" rIns="0" tIns="0" bIns="0">
+            <a:spAutoFit/>
+          </a:bodyPr>
+          <a:lstStyle/>
+          <a:p>
+            <a:pPr algn="r"/>
+            <a:r>
+              <a:rPr sz="1000" b="0" i="0">
+                <a:solidFill>
+                  <a:srgbClr val="5B5E6B"/>
+                </a:solidFill>
+                <a:latin typeface="Calibri"/>
+              </a:rPr>
+              <a:t>30</a:t>
             </a:r>
           </a:p>
         </p:txBody>

--- a/docs/CNN_토마토_병해분류_V2_진행보고.pptx
+++ b/docs/CNN_토마토_병해분류_V2_진행보고.pptx
@@ -32,6 +32,7 @@
     <p:sldId id="282" r:id="rId26"/>
     <p:sldId id="287" r:id="rId37"/>
     <p:sldId id="283" r:id="rId27"/>
+    <p:sldId id="291" r:id="rId41"/>
     <p:sldId id="284" r:id="rId28"/>
     <p:sldId id="285" r:id="rId29"/>
     <p:sldId id="288" r:id="rId38"/>
@@ -17554,7 +17555,7 @@
                 </a:solidFill>
                 <a:latin typeface="Calibri"/>
               </a:rPr>
-              <a:t>RESULT 7 · DOMAIN ADAPTATION (1/10)</a:t>
+              <a:t>RESULT 7 · DOMAIN ADAPTATION (1/11)</a:t>
             </a:r>
           </a:p>
         </p:txBody>
@@ -18313,7 +18314,7 @@
                 </a:solidFill>
                 <a:latin typeface="Calibri"/>
               </a:rPr>
-              <a:t>RESULT 7 · DOMAIN ADAPTATION (2/10)</a:t>
+              <a:t>RESULT 7 · DOMAIN ADAPTATION (2/11)</a:t>
             </a:r>
           </a:p>
         </p:txBody>
@@ -18953,7 +18954,7 @@
                 </a:solidFill>
                 <a:latin typeface="Calibri"/>
               </a:rPr>
-              <a:t>RESULT 7 · DOMAIN ADAPTATION (4/10)</a:t>
+              <a:t>RESULT 7 · DOMAIN ADAPTATION (4/11)</a:t>
             </a:r>
           </a:p>
         </p:txBody>
@@ -18988,7 +18989,7 @@
                 </a:solidFill>
                 <a:latin typeface="Cambria"/>
               </a:rPr>
-              <a:t>최종 승자: SHOT + APS (Pseudo-labeling + Info-max + 신뢰도 기반 선택)</a:t>
+              <a:t>최종 승자: SHOT (Pseudo-labeling + Info-max) — APS는 3-seed에서 기각</a:t>
             </a:r>
           </a:p>
         </p:txBody>
@@ -19330,7 +19331,7 @@
                             <a:srgbClr val="FFFFFF"/>
                           </a:solidFill>
                         </a:rPr>
-                        <a:t>SHOT+마스킹(epoch=2)</a:t>
+                        <a:t>SHOT+마스킹(epoch=2, 최종)</a:t>
                       </a:r>
                     </a:p>
                   </a:txBody>
@@ -19352,7 +19353,7 @@
                             <a:srgbClr val="FFFFFF"/>
                           </a:solidFill>
                         </a:rPr>
-                        <a:t>SHOT+APS+마스킹(최종)</a:t>
+                        <a:t>SHOT+APS+마스킹</a:t>
                       </a:r>
                     </a:p>
                   </a:txBody>
@@ -19437,29 +19438,29 @@
                     <a:p>
                       <a:pPr algn="ctr"/>
                       <a:r>
+                        <a:rPr sz="1200" b="1">
+                          <a:solidFill>
+                            <a:srgbClr val="1A1A1A"/>
+                          </a:solidFill>
+                        </a:rPr>
+                        <a:t>42.04%</a:t>
+                      </a:r>
+                    </a:p>
+                  </a:txBody>
+                  <a:tcPr anchor="ctr">
+                    <a:solidFill>
+                      <a:srgbClr val="FFFFFF"/>
+                    </a:solidFill>
+                  </a:tcPr>
+                </a:tc>
+                <a:tc>
+                  <a:txBody>
+                    <a:bodyPr/>
+                    <a:lstStyle/>
+                    <a:p>
+                      <a:pPr algn="ctr"/>
+                      <a:r>
                         <a:rPr sz="1200" b="0">
-                          <a:solidFill>
-                            <a:srgbClr val="1A1A1A"/>
-                          </a:solidFill>
-                        </a:rPr>
-                        <a:t>42.04%</a:t>
-                      </a:r>
-                    </a:p>
-                  </a:txBody>
-                  <a:tcPr anchor="ctr">
-                    <a:solidFill>
-                      <a:srgbClr val="FFFFFF"/>
-                    </a:solidFill>
-                  </a:tcPr>
-                </a:tc>
-                <a:tc>
-                  <a:txBody>
-                    <a:bodyPr/>
-                    <a:lstStyle/>
-                    <a:p>
-                      <a:pPr algn="ctr"/>
-                      <a:r>
-                        <a:rPr sz="1200" b="1">
                           <a:solidFill>
                             <a:srgbClr val="1A1A1A"/>
                           </a:solidFill>
@@ -19617,51 +19618,51 @@
                     <a:p>
                       <a:pPr algn="ctr"/>
                       <a:r>
+                        <a:rPr sz="1200" b="0">
+                          <a:solidFill>
+                            <a:srgbClr val="1A1A1A"/>
+                          </a:solidFill>
+                        </a:rPr>
+                        <a:t>20.31%</a:t>
+                      </a:r>
+                    </a:p>
+                  </a:txBody>
+                  <a:tcPr anchor="ctr">
+                    <a:solidFill>
+                      <a:srgbClr val="FFFFFF"/>
+                    </a:solidFill>
+                  </a:tcPr>
+                </a:tc>
+                <a:tc>
+                  <a:txBody>
+                    <a:bodyPr/>
+                    <a:lstStyle/>
+                    <a:p>
+                      <a:pPr algn="ctr"/>
+                      <a:r>
+                        <a:rPr sz="1200" b="0">
+                          <a:solidFill>
+                            <a:srgbClr val="1A1A1A"/>
+                          </a:solidFill>
+                        </a:rPr>
+                        <a:t>14.81%</a:t>
+                      </a:r>
+                    </a:p>
+                  </a:txBody>
+                  <a:tcPr anchor="ctr">
+                    <a:solidFill>
+                      <a:srgbClr val="FFFFFF"/>
+                    </a:solidFill>
+                  </a:tcPr>
+                </a:tc>
+                <a:tc>
+                  <a:txBody>
+                    <a:bodyPr/>
+                    <a:lstStyle/>
+                    <a:p>
+                      <a:pPr algn="ctr"/>
+                      <a:r>
                         <a:rPr sz="1200" b="1">
-                          <a:solidFill>
-                            <a:srgbClr val="1A1A1A"/>
-                          </a:solidFill>
-                        </a:rPr>
-                        <a:t>20.31%</a:t>
-                      </a:r>
-                    </a:p>
-                  </a:txBody>
-                  <a:tcPr anchor="ctr">
-                    <a:solidFill>
-                      <a:srgbClr val="FFFFFF"/>
-                    </a:solidFill>
-                  </a:tcPr>
-                </a:tc>
-                <a:tc>
-                  <a:txBody>
-                    <a:bodyPr/>
-                    <a:lstStyle/>
-                    <a:p>
-                      <a:pPr algn="ctr"/>
-                      <a:r>
-                        <a:rPr sz="1200" b="0">
-                          <a:solidFill>
-                            <a:srgbClr val="1A1A1A"/>
-                          </a:solidFill>
-                        </a:rPr>
-                        <a:t>14.81%</a:t>
-                      </a:r>
-                    </a:p>
-                  </a:txBody>
-                  <a:tcPr anchor="ctr">
-                    <a:solidFill>
-                      <a:srgbClr val="FFFFFF"/>
-                    </a:solidFill>
-                  </a:tcPr>
-                </a:tc>
-                <a:tc>
-                  <a:txBody>
-                    <a:bodyPr/>
-                    <a:lstStyle/>
-                    <a:p>
-                      <a:pPr algn="ctr"/>
-                      <a:r>
-                        <a:rPr sz="1200" b="0">
                           <a:solidFill>
                             <a:srgbClr val="1A1A1A"/>
                           </a:solidFill>
@@ -19733,7 +19734,7 @@
                 </a:solidFill>
                 <a:latin typeface="Calibri"/>
               </a:rPr>
-              <a:t>AdaBN/TENT와 달리 SHOT은 3개 데이터셋 전부에서 collapse 없이 안정적으로 잘 됐다. 여기에 신뢰도 기반 pseudo-label 재할당(APS, gamma=1.0)을 더해 Taiwan을 42.04%→44.59%로 끌어올렸다 — 마스킹+SHOT(epoch=2)+APS(gamma=1.0)를 최종 권장 파이프라인으로 정했다.</a:t>
+              <a:t>AdaBN/TENT와 달리 SHOT은 3개 데이터셋 전부에서 collapse 없이 안정적으로 잘 됐다 — 마스킹+SHOT(epoch=2)이 최종 권장 파이프라인이다. APS(신뢰도 기반 재할당)는 seed42에서만 Taiwan을 44.59%로 끌어올려 보였으나, 3-seed로 검증하니 평균은 SHOT 단독보다 오히려 낮아 noise로 판명됐다(5/11 슬라이드 참고) — 기본값에서 제외한다.</a:t>
             </a:r>
           </a:p>
         </p:txBody>
@@ -19836,7 +19837,7 @@
                 </a:solidFill>
                 <a:latin typeface="Calibri"/>
               </a:rPr>
-              <a:t>RESULT 7 · DOMAIN ADAPTATION (5/10)</a:t>
+              <a:t>RESULT 7 · DOMAIN ADAPTATION (6/11)</a:t>
             </a:r>
           </a:p>
         </p:txBody>
@@ -20297,7 +20298,7 @@
                 </a:solidFill>
                 <a:latin typeface="Calibri"/>
               </a:rPr>
-              <a:t>27</a:t>
+              <a:t>28</a:t>
             </a:r>
           </a:p>
         </p:txBody>
@@ -20365,7 +20366,7 @@
                 </a:solidFill>
                 <a:latin typeface="Calibri"/>
               </a:rPr>
-              <a:t>RESULT 7 · DOMAIN ADAPTATION (6/10)</a:t>
+              <a:t>RESULT 7 · DOMAIN ADAPTATION (7/11)</a:t>
             </a:r>
           </a:p>
         </p:txBody>
@@ -20435,7 +20436,7 @@
                 </a:solidFill>
                 <a:latin typeface="Calibri"/>
               </a:rPr>
-              <a:t>최종 권장: Class-restriction 마스킹은 항상 적용 + SHOT(epoch=2)+APS(gamma=1.0)를 기본 적응 방법으로 사용</a:t>
+              <a:t>최종 권장: Class-restriction 마스킹은 항상 적용 + SHOT(epoch=2)을 기본 적응 방법으로 사용</a:t>
             </a:r>
           </a:p>
         </p:txBody>
@@ -20505,7 +20506,7 @@
                 </a:solidFill>
                 <a:latin typeface="Calibri"/>
               </a:rPr>
-              <a:t>남은 과제: 이 비교는 아직 seed42 단일 실행 기준이다(최신 후속 방법 비교는 다음 슬라이드부터). tiny_cnn_c(96px·bicubic)를 seed123/2026까지 추가 학습 완료해 이 비교 전체를 3-seed로 재검증하는 중이다.</a:t>
+              <a:t>3-seed 검증 완료: seed123/2026까지 추가 학습해 재평가한 결과, SHOT(epoch=2)의 3-seed 평균이 SHOT+APS보다 모든 데이터셋에서 근소하게 높았다 — 그래서 APS 없는 순수 SHOT을 최종으로 확정했다(5/11 슬라이드에 평균±표준편차 표 참고).</a:t>
             </a:r>
           </a:p>
         </p:txBody>
@@ -20540,7 +20541,7 @@
                 </a:solidFill>
                 <a:latin typeface="Calibri"/>
               </a:rPr>
-              <a:t>28</a:t>
+              <a:t>29</a:t>
             </a:r>
           </a:p>
         </p:txBody>
@@ -21572,7 +21573,7 @@
                 </a:solidFill>
                 <a:latin typeface="Calibri"/>
               </a:rPr>
-              <a:t>33</a:t>
+              <a:t>34</a:t>
             </a:r>
           </a:p>
         </p:txBody>
@@ -22994,7 +22995,7 @@
                 </a:solidFill>
                 <a:latin typeface="Calibri"/>
               </a:rPr>
-              <a:t>34</a:t>
+              <a:t>35</a:t>
             </a:r>
           </a:p>
         </p:txBody>
@@ -23055,7 +23056,7 @@
                 </a:solidFill>
                 <a:latin typeface="Calibri"/>
               </a:rPr>
-              <a:t>RESULT 7 · DOMAIN ADAPTATION (10/10)</a:t>
+              <a:t>RESULT 7 · DOMAIN ADAPTATION (11/11)</a:t>
             </a:r>
           </a:p>
         </p:txBody>
@@ -23586,7 +23587,7 @@
                 </a:solidFill>
                 <a:latin typeface="Calibri"/>
               </a:rPr>
-              <a:t>32</a:t>
+              <a:t>33</a:t>
             </a:r>
           </a:p>
         </p:txBody>
@@ -23647,7 +23648,7 @@
                 </a:solidFill>
                 <a:latin typeface="Calibri"/>
               </a:rPr>
-              <a:t>RESULT 7 · DOMAIN ADAPTATION (3/10)</a:t>
+              <a:t>RESULT 7 · DOMAIN ADAPTATION (3/11)</a:t>
             </a:r>
           </a:p>
         </p:txBody>
@@ -24006,7 +24007,7 @@
                 </a:solidFill>
                 <a:latin typeface="Calibri"/>
               </a:rPr>
-              <a:t>RESULT 7 · DOMAIN ADAPTATION (7/10)</a:t>
+              <a:t>RESULT 7 · DOMAIN ADAPTATION (8/11)</a:t>
             </a:r>
           </a:p>
         </p:txBody>
@@ -24534,7 +24535,7 @@
                 </a:solidFill>
                 <a:latin typeface="Calibri"/>
               </a:rPr>
-              <a:t>29</a:t>
+              <a:t>30</a:t>
             </a:r>
           </a:p>
         </p:txBody>
@@ -24595,7 +24596,7 @@
                 </a:solidFill>
                 <a:latin typeface="Calibri"/>
               </a:rPr>
-              <a:t>RESULT 7 · DOMAIN ADAPTATION (9/10)</a:t>
+              <a:t>RESULT 7 · DOMAIN ADAPTATION (10/11)</a:t>
             </a:r>
           </a:p>
         </p:txBody>
@@ -25213,7 +25214,7 @@
                 </a:solidFill>
                 <a:latin typeface="Calibri"/>
               </a:rPr>
-              <a:t>31</a:t>
+              <a:t>32</a:t>
             </a:r>
           </a:p>
         </p:txBody>
@@ -25274,7 +25275,7 @@
                 </a:solidFill>
                 <a:latin typeface="Calibri"/>
               </a:rPr>
-              <a:t>RESULT 7 · DOMAIN ADAPTATION (8/10)</a:t>
+              <a:t>RESULT 7 · DOMAIN ADAPTATION (9/11)</a:t>
             </a:r>
           </a:p>
         </p:txBody>
@@ -25713,7 +25714,686 @@
                 </a:solidFill>
                 <a:latin typeface="Calibri"/>
               </a:rPr>
-              <a:t>30</a:t>
+              <a:t>31</a:t>
+            </a:r>
+          </a:p>
+        </p:txBody>
+      </p:sp>
+    </p:spTree>
+  </p:cSld>
+  <p:clrMapOvr>
+    <a:masterClrMapping/>
+  </p:clrMapOvr>
+</p:sld>
+</file>
+
+<file path=ppt/slides/slide36.xml><?xml version="1.0" encoding="utf-8"?>
+<p:sld xmlns:a="http://schemas.openxmlformats.org/drawingml/2006/main" xmlns:p="http://schemas.openxmlformats.org/presentationml/2006/main" xmlns:r="http://schemas.openxmlformats.org/officeDocument/2006/relationships">
+  <p:cSld>
+    <p:bg>
+      <p:bgPr>
+        <a:solidFill>
+          <a:srgbClr val="FFFFFF"/>
+        </a:solidFill>
+        <a:effectLst/>
+      </p:bgPr>
+    </p:bg>
+    <p:spTree>
+      <p:nvGrpSpPr>
+        <p:cNvPr id="1" name=""/>
+        <p:cNvGrpSpPr/>
+        <p:nvPr/>
+      </p:nvGrpSpPr>
+      <p:grpSpPr/>
+      <p:sp>
+        <p:nvSpPr>
+          <p:cNvPr id="2" name="TextBox 1"/>
+          <p:cNvSpPr txBox="1"/>
+          <p:nvPr/>
+        </p:nvSpPr>
+        <p:spPr>
+          <a:xfrm>
+            <a:off x="548640" y="292608"/>
+            <a:ext cx="9144000" cy="292608"/>
+          </a:xfrm>
+          <a:prstGeom prst="rect">
+            <a:avLst/>
+          </a:prstGeom>
+          <a:noFill/>
+        </p:spPr>
+        <p:txBody>
+          <a:bodyPr wrap="square" anchor="t" lIns="0" rIns="0" tIns="0" bIns="0">
+            <a:spAutoFit/>
+          </a:bodyPr>
+          <a:lstStyle/>
+          <a:p>
+            <a:pPr algn="l"/>
+            <a:r>
+              <a:rPr sz="1050" b="1" i="0">
+                <a:solidFill>
+                  <a:srgbClr val="2A78D6"/>
+                </a:solidFill>
+                <a:latin typeface="Calibri"/>
+              </a:rPr>
+              <a:t>RESULT 7 · DOMAIN ADAPTATION (5/11)</a:t>
+            </a:r>
+          </a:p>
+        </p:txBody>
+      </p:sp>
+      <p:sp>
+        <p:nvSpPr>
+          <p:cNvPr id="3" name="TextBox 2"/>
+          <p:cNvSpPr txBox="1"/>
+          <p:nvPr/>
+        </p:nvSpPr>
+        <p:spPr>
+          <a:xfrm>
+            <a:off x="548640" y="566928"/>
+            <a:ext cx="10972800" cy="548640"/>
+          </a:xfrm>
+          <a:prstGeom prst="rect">
+            <a:avLst/>
+          </a:prstGeom>
+          <a:noFill/>
+        </p:spPr>
+        <p:txBody>
+          <a:bodyPr wrap="square" anchor="t" lIns="0" rIns="0" tIns="0" bIns="0">
+            <a:spAutoFit/>
+          </a:bodyPr>
+          <a:lstStyle/>
+          <a:p>
+            <a:pPr algn="l"/>
+            <a:r>
+              <a:rPr sz="2400" b="1" i="0">
+                <a:solidFill>
+                  <a:srgbClr val="1E2761"/>
+                </a:solidFill>
+                <a:latin typeface="Cambria"/>
+              </a:rPr>
+              <a:t>3-seed 검증: APS의 개선은 noise 범위였다</a:t>
+            </a:r>
+          </a:p>
+        </p:txBody>
+      </p:sp>
+      <p:sp>
+        <p:nvSpPr>
+          <p:cNvPr id="4" name="TextBox 3"/>
+          <p:cNvSpPr txBox="1"/>
+          <p:nvPr/>
+        </p:nvSpPr>
+        <p:spPr>
+          <a:xfrm>
+            <a:off x="548640" y="1200000"/>
+            <a:ext cx="11091672" cy="1000000"/>
+          </a:xfrm>
+          <a:prstGeom prst="rect">
+            <a:avLst/>
+          </a:prstGeom>
+          <a:noFill/>
+        </p:spPr>
+        <p:txBody>
+          <a:bodyPr wrap="square" anchor="t" lIns="0" rIns="0" tIns="0" bIns="0">
+            <a:spAutoFit/>
+          </a:bodyPr>
+          <a:lstStyle/>
+          <a:p>
+            <a:pPr algn="l"/>
+            <a:r>
+              <a:rPr sz="1300" b="0" i="0">
+                <a:solidFill>
+                  <a:srgbClr val="1A1A1A"/>
+                </a:solidFill>
+                <a:latin typeface="Calibri"/>
+              </a:rPr>
+              <a:t>seed42 하나로는 어떤 개선이 진짜인지 운인지 구분이 안 된다. tiny_cnn_c(96px·bicubic)를 seed123/2026에서 추가 학습해 Source/AdaBN/SHOT/SHOT+APS 비교를 3-seed 평균±표준편차로 다시 봤다.</a:t>
+            </a:r>
+          </a:p>
+        </p:txBody>
+      </p:sp>
+      <p:graphicFrame>
+        <p:nvGraphicFramePr>
+          <p:cNvPr id="7" name="Table"/>
+          <p:cNvGraphicFramePr>
+            <a:graphicFrameLocks noGrp="1"/>
+          </p:cNvGraphicFramePr>
+          <p:nvPr/>
+        </p:nvGraphicFramePr>
+        <p:xfrm>
+          <a:off x="548640" y="2350000"/>
+          <a:ext cx="10300000" cy="2400000"/>
+        </p:xfrm>
+        <a:graphic>
+          <a:graphicData uri="http://schemas.openxmlformats.org/drawingml/2006/table">
+            <a:tbl>
+              <a:tblPr firstRow="1" bandRow="1">
+                <a:tableStyleId>{5C22544A-7EE6-4342-B048-85BDC9FD1C3A}</a:tableStyleId>
+              </a:tblPr>
+              <a:tblGrid>
+                <a:gridCol w="3400000"/>
+                <a:gridCol w="2300000"/>
+                <a:gridCol w="2300000"/>
+                <a:gridCol w="2300000"/>
+              </a:tblGrid>
+              <a:tr h="560000">
+                <a:tc>
+                  <a:txBody>
+                    <a:bodyPr/>
+                    <a:lstStyle/>
+                    <a:p>
+                      <a:pPr algn="ctr"/>
+                      <a:r>
+                        <a:rPr sz="1200" b="1">
+                          <a:solidFill>
+                            <a:srgbClr val="FFFFFF"/>
+                          </a:solidFill>
+                        </a:rPr>
+                        <a:t>방법</a:t>
+                      </a:r>
+                    </a:p>
+                  </a:txBody>
+                  <a:tcPr anchor="ctr">
+                    <a:solidFill>
+                      <a:srgbClr val="1E2761"/>
+                    </a:solidFill>
+                  </a:tcPr>
+                </a:tc>
+                <a:tc>
+                  <a:txBody>
+                    <a:bodyPr/>
+                    <a:lstStyle/>
+                    <a:p>
+                      <a:pPr algn="ctr"/>
+                      <a:r>
+                        <a:rPr sz="1200" b="1">
+                          <a:solidFill>
+                            <a:srgbClr val="FFFFFF"/>
+                          </a:solidFill>
+                        </a:rPr>
+                        <a:t>Taiwan</a:t>
+                      </a:r>
+                    </a:p>
+                  </a:txBody>
+                  <a:tcPr anchor="ctr">
+                    <a:solidFill>
+                      <a:srgbClr val="1E2761"/>
+                    </a:solidFill>
+                  </a:tcPr>
+                </a:tc>
+                <a:tc>
+                  <a:txBody>
+                    <a:bodyPr/>
+                    <a:lstStyle/>
+                    <a:p>
+                      <a:pPr algn="ctr"/>
+                      <a:r>
+                        <a:rPr sz="1200" b="1">
+                          <a:solidFill>
+                            <a:srgbClr val="FFFFFF"/>
+                          </a:solidFill>
+                        </a:rPr>
+                        <a:t>Bangladesh</a:t>
+                      </a:r>
+                    </a:p>
+                  </a:txBody>
+                  <a:tcPr anchor="ctr">
+                    <a:solidFill>
+                      <a:srgbClr val="1E2761"/>
+                    </a:solidFill>
+                  </a:tcPr>
+                </a:tc>
+                <a:tc>
+                  <a:txBody>
+                    <a:bodyPr/>
+                    <a:lstStyle/>
+                    <a:p>
+                      <a:pPr algn="ctr"/>
+                      <a:r>
+                        <a:rPr sz="1200" b="1">
+                          <a:solidFill>
+                            <a:srgbClr val="FFFFFF"/>
+                          </a:solidFill>
+                        </a:rPr>
+                        <a:t>PlantDoc</a:t>
+                      </a:r>
+                    </a:p>
+                  </a:txBody>
+                  <a:tcPr anchor="ctr">
+                    <a:solidFill>
+                      <a:srgbClr val="1E2761"/>
+                    </a:solidFill>
+                  </a:tcPr>
+                </a:tc>
+              </a:tr>
+              <a:tr h="560000">
+                <a:tc>
+                  <a:txBody>
+                    <a:bodyPr/>
+                    <a:lstStyle/>
+                    <a:p>
+                      <a:pPr algn="ctr"/>
+                      <a:r>
+                        <a:rPr sz="1200" b="0">
+                          <a:solidFill>
+                            <a:srgbClr val="1A1A1A"/>
+                          </a:solidFill>
+                        </a:rPr>
+                        <a:t>Source+마스킹</a:t>
+                      </a:r>
+                    </a:p>
+                  </a:txBody>
+                  <a:tcPr anchor="ctr">
+                    <a:solidFill>
+                      <a:srgbClr val="FFFFFF"/>
+                    </a:solidFill>
+                  </a:tcPr>
+                </a:tc>
+                <a:tc>
+                  <a:txBody>
+                    <a:bodyPr/>
+                    <a:lstStyle/>
+                    <a:p>
+                      <a:pPr algn="ctr"/>
+                      <a:r>
+                        <a:rPr sz="1200" b="0">
+                          <a:solidFill>
+                            <a:srgbClr val="1A1A1A"/>
+                          </a:solidFill>
+                        </a:rPr>
+                        <a:t>32.27% ±0.79</a:t>
+                      </a:r>
+                    </a:p>
+                  </a:txBody>
+                  <a:tcPr anchor="ctr">
+                    <a:solidFill>
+                      <a:srgbClr val="FFFFFF"/>
+                    </a:solidFill>
+                  </a:tcPr>
+                </a:tc>
+                <a:tc>
+                  <a:txBody>
+                    <a:bodyPr/>
+                    <a:lstStyle/>
+                    <a:p>
+                      <a:pPr algn="ctr"/>
+                      <a:r>
+                        <a:rPr sz="1200" b="0">
+                          <a:solidFill>
+                            <a:srgbClr val="1A1A1A"/>
+                          </a:solidFill>
+                        </a:rPr>
+                        <a:t>16.50% ±4.58</a:t>
+                      </a:r>
+                    </a:p>
+                  </a:txBody>
+                  <a:tcPr anchor="ctr">
+                    <a:solidFill>
+                      <a:srgbClr val="FFFFFF"/>
+                    </a:solidFill>
+                  </a:tcPr>
+                </a:tc>
+                <a:tc>
+                  <a:txBody>
+                    <a:bodyPr/>
+                    <a:lstStyle/>
+                    <a:p>
+                      <a:pPr algn="ctr"/>
+                      <a:r>
+                        <a:rPr sz="1200" b="0">
+                          <a:solidFill>
+                            <a:srgbClr val="1A1A1A"/>
+                          </a:solidFill>
+                        </a:rPr>
+                        <a:t>20.17% ±1.79</a:t>
+                      </a:r>
+                    </a:p>
+                  </a:txBody>
+                  <a:tcPr anchor="ctr">
+                    <a:solidFill>
+                      <a:srgbClr val="FFFFFF"/>
+                    </a:solidFill>
+                  </a:tcPr>
+                </a:tc>
+              </a:tr>
+              <a:tr h="560000">
+                <a:tc>
+                  <a:txBody>
+                    <a:bodyPr/>
+                    <a:lstStyle/>
+                    <a:p>
+                      <a:pPr algn="ctr"/>
+                      <a:r>
+                        <a:rPr sz="1200" b="0">
+                          <a:solidFill>
+                            <a:srgbClr val="1A1A1A"/>
+                          </a:solidFill>
+                        </a:rPr>
+                        <a:t>AdaBN+마스킹</a:t>
+                      </a:r>
+                    </a:p>
+                  </a:txBody>
+                  <a:tcPr anchor="ctr">
+                    <a:solidFill>
+                      <a:srgbClr val="EEF3FC"/>
+                    </a:solidFill>
+                  </a:tcPr>
+                </a:tc>
+                <a:tc>
+                  <a:txBody>
+                    <a:bodyPr/>
+                    <a:lstStyle/>
+                    <a:p>
+                      <a:pPr algn="ctr"/>
+                      <a:r>
+                        <a:rPr sz="1200" b="0">
+                          <a:solidFill>
+                            <a:srgbClr val="1A1A1A"/>
+                          </a:solidFill>
+                        </a:rPr>
+                        <a:t>35.24% ±2.57</a:t>
+                      </a:r>
+                    </a:p>
+                  </a:txBody>
+                  <a:tcPr anchor="ctr">
+                    <a:solidFill>
+                      <a:srgbClr val="EEF3FC"/>
+                    </a:solidFill>
+                  </a:tcPr>
+                </a:tc>
+                <a:tc>
+                  <a:txBody>
+                    <a:bodyPr/>
+                    <a:lstStyle/>
+                    <a:p>
+                      <a:pPr algn="ctr"/>
+                      <a:r>
+                        <a:rPr sz="1200" b="0">
+                          <a:solidFill>
+                            <a:srgbClr val="1A1A1A"/>
+                          </a:solidFill>
+                        </a:rPr>
+                        <a:t>15.14% ±2.44</a:t>
+                      </a:r>
+                    </a:p>
+                  </a:txBody>
+                  <a:tcPr anchor="ctr">
+                    <a:solidFill>
+                      <a:srgbClr val="EEF3FC"/>
+                    </a:solidFill>
+                  </a:tcPr>
+                </a:tc>
+                <a:tc>
+                  <a:txBody>
+                    <a:bodyPr/>
+                    <a:lstStyle/>
+                    <a:p>
+                      <a:pPr algn="ctr"/>
+                      <a:r>
+                        <a:rPr sz="1200" b="0">
+                          <a:solidFill>
+                            <a:srgbClr val="1A1A1A"/>
+                          </a:solidFill>
+                        </a:rPr>
+                        <a:t>16.83% ±1.80</a:t>
+                      </a:r>
+                    </a:p>
+                  </a:txBody>
+                  <a:tcPr anchor="ctr">
+                    <a:solidFill>
+                      <a:srgbClr val="EEF3FC"/>
+                    </a:solidFill>
+                  </a:tcPr>
+                </a:tc>
+              </a:tr>
+              <a:tr h="560000">
+                <a:tc>
+                  <a:txBody>
+                    <a:bodyPr/>
+                    <a:lstStyle/>
+                    <a:p>
+                      <a:pPr algn="ctr"/>
+                      <a:r>
+                        <a:rPr sz="1200" b="0">
+                          <a:solidFill>
+                            <a:srgbClr val="1A1A1A"/>
+                          </a:solidFill>
+                        </a:rPr>
+                        <a:t>SHOT+마스킹(최종)</a:t>
+                      </a:r>
+                    </a:p>
+                  </a:txBody>
+                  <a:tcPr anchor="ctr">
+                    <a:solidFill>
+                      <a:srgbClr val="FFFFFF"/>
+                    </a:solidFill>
+                  </a:tcPr>
+                </a:tc>
+                <a:tc>
+                  <a:txBody>
+                    <a:bodyPr/>
+                    <a:lstStyle/>
+                    <a:p>
+                      <a:pPr algn="ctr"/>
+                      <a:r>
+                        <a:rPr sz="1200" b="1">
+                          <a:solidFill>
+                            <a:srgbClr val="1A1A1A"/>
+                          </a:solidFill>
+                        </a:rPr>
+                        <a:t>37.58% ±5.86</a:t>
+                      </a:r>
+                    </a:p>
+                  </a:txBody>
+                  <a:tcPr anchor="ctr">
+                    <a:solidFill>
+                      <a:srgbClr val="FFFFFF"/>
+                    </a:solidFill>
+                  </a:tcPr>
+                </a:tc>
+                <a:tc>
+                  <a:txBody>
+                    <a:bodyPr/>
+                    <a:lstStyle/>
+                    <a:p>
+                      <a:pPr algn="ctr"/>
+                      <a:r>
+                        <a:rPr sz="1200" b="1">
+                          <a:solidFill>
+                            <a:srgbClr val="1A1A1A"/>
+                          </a:solidFill>
+                        </a:rPr>
+                        <a:t>24.28% ±5.62</a:t>
+                      </a:r>
+                    </a:p>
+                  </a:txBody>
+                  <a:tcPr anchor="ctr">
+                    <a:solidFill>
+                      <a:srgbClr val="FFFFFF"/>
+                    </a:solidFill>
+                  </a:tcPr>
+                </a:tc>
+                <a:tc>
+                  <a:txBody>
+                    <a:bodyPr/>
+                    <a:lstStyle/>
+                    <a:p>
+                      <a:pPr algn="ctr"/>
+                      <a:r>
+                        <a:rPr sz="1200" b="1">
+                          <a:solidFill>
+                            <a:srgbClr val="1A1A1A"/>
+                          </a:solidFill>
+                        </a:rPr>
+                        <a:t>19.75% ±1.40</a:t>
+                      </a:r>
+                    </a:p>
+                  </a:txBody>
+                  <a:tcPr anchor="ctr">
+                    <a:solidFill>
+                      <a:srgbClr val="FFFFFF"/>
+                    </a:solidFill>
+                  </a:tcPr>
+                </a:tc>
+              </a:tr>
+              <a:tr h="560000">
+                <a:tc>
+                  <a:txBody>
+                    <a:bodyPr/>
+                    <a:lstStyle/>
+                    <a:p>
+                      <a:pPr algn="ctr"/>
+                      <a:r>
+                        <a:rPr sz="1200" b="0">
+                          <a:solidFill>
+                            <a:srgbClr val="1A1A1A"/>
+                          </a:solidFill>
+                        </a:rPr>
+                        <a:t>SHOT+APS+마스킹</a:t>
+                      </a:r>
+                    </a:p>
+                  </a:txBody>
+                  <a:tcPr anchor="ctr">
+                    <a:solidFill>
+                      <a:srgbClr val="EEF3FC"/>
+                    </a:solidFill>
+                  </a:tcPr>
+                </a:tc>
+                <a:tc>
+                  <a:txBody>
+                    <a:bodyPr/>
+                    <a:lstStyle/>
+                    <a:p>
+                      <a:pPr algn="ctr"/>
+                      <a:r>
+                        <a:rPr sz="1200" b="0">
+                          <a:solidFill>
+                            <a:srgbClr val="1A1A1A"/>
+                          </a:solidFill>
+                        </a:rPr>
+                        <a:t>36.41% ±6.29</a:t>
+                      </a:r>
+                    </a:p>
+                  </a:txBody>
+                  <a:tcPr anchor="ctr">
+                    <a:solidFill>
+                      <a:srgbClr val="EEF3FC"/>
+                    </a:solidFill>
+                  </a:tcPr>
+                </a:tc>
+                <a:tc>
+                  <a:txBody>
+                    <a:bodyPr/>
+                    <a:lstStyle/>
+                    <a:p>
+                      <a:pPr algn="ctr"/>
+                      <a:r>
+                        <a:rPr sz="1200" b="0">
+                          <a:solidFill>
+                            <a:srgbClr val="1A1A1A"/>
+                          </a:solidFill>
+                        </a:rPr>
+                        <a:t>24.07% ±4.88</a:t>
+                      </a:r>
+                    </a:p>
+                  </a:txBody>
+                  <a:tcPr anchor="ctr">
+                    <a:solidFill>
+                      <a:srgbClr val="EEF3FC"/>
+                    </a:solidFill>
+                  </a:tcPr>
+                </a:tc>
+                <a:tc>
+                  <a:txBody>
+                    <a:bodyPr/>
+                    <a:lstStyle/>
+                    <a:p>
+                      <a:pPr algn="ctr"/>
+                      <a:r>
+                        <a:rPr sz="1200" b="0">
+                          <a:solidFill>
+                            <a:srgbClr val="1A1A1A"/>
+                          </a:solidFill>
+                        </a:rPr>
+                        <a:t>18.95% ±0.69</a:t>
+                      </a:r>
+                    </a:p>
+                  </a:txBody>
+                  <a:tcPr anchor="ctr">
+                    <a:solidFill>
+                      <a:srgbClr val="EEF3FC"/>
+                    </a:solidFill>
+                  </a:tcPr>
+                </a:tc>
+              </a:tr>
+            </a:tbl>
+          </a:graphicData>
+        </a:graphic>
+      </p:graphicFrame>
+      <p:sp>
+        <p:nvSpPr>
+          <p:cNvPr id="6" name="TextBox 4"/>
+          <p:cNvSpPr txBox="1"/>
+          <p:nvPr/>
+        </p:nvSpPr>
+        <p:spPr>
+          <a:xfrm>
+            <a:off x="548640" y="5050000"/>
+            <a:ext cx="11091672" cy="1300000"/>
+          </a:xfrm>
+          <a:prstGeom prst="rect">
+            <a:avLst/>
+          </a:prstGeom>
+          <a:noFill/>
+        </p:spPr>
+        <p:txBody>
+          <a:bodyPr wrap="square" anchor="t" lIns="0" rIns="0" tIns="0" bIns="0">
+            <a:spAutoFit/>
+          </a:bodyPr>
+          <a:lstStyle/>
+          <a:p>
+            <a:pPr algn="l"/>
+            <a:r>
+              <a:rPr sz="1200" b="0" i="1">
+                <a:solidFill>
+                  <a:srgbClr val="5B5E6B"/>
+                </a:solidFill>
+                <a:latin typeface="Calibri"/>
+              </a:rPr>
+              <a:t>seed42 단일 실행에서는 APS가 Taiwan을 42.04%→44.59%로 개선하는 것처럼 보였지만, 3-seed 평균으로 보면 SHOT+APS가 SHOT보다 모든 데이터셋에서 오히려 근소하게 낮다(Taiwan -1.17%p, Bangladesh -0.21%p, PlantDoc -0.80%p) — 그 차이는 표준편차(5~6%p)보다 작아 noise 범위를 벗어나지 못한다. seed42가 APS에 우연히 유리했던 것일 뿐이라 판단해, 최종 파이프라인을 APS 없는 순수 SHOT(epoch=2)로 확정한다. SHOT 자체도 seed 표준편차가 5~6%p로 커서, 단일 seed 결과를 과신하면 안 된다는 것도 같이 확인했다.</a:t>
+            </a:r>
+          </a:p>
+        </p:txBody>
+      </p:sp>
+      <p:sp>
+        <p:nvSpPr>
+          <p:cNvPr id="9" name="TextBox 5"/>
+          <p:cNvSpPr txBox="1"/>
+          <p:nvPr/>
+        </p:nvSpPr>
+        <p:spPr>
+          <a:xfrm>
+            <a:off x="11430000" y="6446520"/>
+            <a:ext cx="548640" cy="274320"/>
+          </a:xfrm>
+          <a:prstGeom prst="rect">
+            <a:avLst/>
+          </a:prstGeom>
+          <a:noFill/>
+        </p:spPr>
+        <p:txBody>
+          <a:bodyPr wrap="square" anchor="t" lIns="0" rIns="0" tIns="0" bIns="0">
+            <a:spAutoFit/>
+          </a:bodyPr>
+          <a:lstStyle/>
+          <a:p>
+            <a:pPr algn="r"/>
+            <a:r>
+              <a:rPr sz="1000" b="0" i="0">
+                <a:solidFill>
+                  <a:srgbClr val="5B5E6B"/>
+                </a:solidFill>
+                <a:latin typeface="Calibri"/>
+              </a:rPr>
+              <a:t>27</a:t>
             </a:r>
           </a:p>
         </p:txBody>

--- a/docs/CNN_토마토_병해분류_V2_진행보고.pptx
+++ b/docs/CNN_토마토_병해분류_V2_진행보고.pptx
@@ -37,6 +37,7 @@
     <p:sldId id="285" r:id="rId29"/>
     <p:sldId id="288" r:id="rId38"/>
     <p:sldId id="290" r:id="rId40"/>
+    <p:sldId id="292" r:id="rId42"/>
     <p:sldId id="289" r:id="rId39"/>
     <p:sldId id="286" r:id="rId36"/>
     <p:sldId id="277" r:id="rId30"/>
@@ -17555,7 +17556,7 @@
                 </a:solidFill>
                 <a:latin typeface="Calibri"/>
               </a:rPr>
-              <a:t>RESULT 7 · DOMAIN ADAPTATION (1/11)</a:t>
+              <a:t>RESULT 7 · DOMAIN ADAPTATION (1/12)</a:t>
             </a:r>
           </a:p>
         </p:txBody>
@@ -18314,7 +18315,7 @@
                 </a:solidFill>
                 <a:latin typeface="Calibri"/>
               </a:rPr>
-              <a:t>RESULT 7 · DOMAIN ADAPTATION (2/11)</a:t>
+              <a:t>RESULT 7 · DOMAIN ADAPTATION (2/12)</a:t>
             </a:r>
           </a:p>
         </p:txBody>
@@ -18954,7 +18955,7 @@
                 </a:solidFill>
                 <a:latin typeface="Calibri"/>
               </a:rPr>
-              <a:t>RESULT 7 · DOMAIN ADAPTATION (4/11)</a:t>
+              <a:t>RESULT 7 · DOMAIN ADAPTATION (4/12)</a:t>
             </a:r>
           </a:p>
         </p:txBody>
@@ -19837,7 +19838,7 @@
                 </a:solidFill>
                 <a:latin typeface="Calibri"/>
               </a:rPr>
-              <a:t>RESULT 7 · DOMAIN ADAPTATION (6/11)</a:t>
+              <a:t>RESULT 7 · DOMAIN ADAPTATION (6/12)</a:t>
             </a:r>
           </a:p>
         </p:txBody>
@@ -20366,7 +20367,7 @@
                 </a:solidFill>
                 <a:latin typeface="Calibri"/>
               </a:rPr>
-              <a:t>RESULT 7 · DOMAIN ADAPTATION (7/11)</a:t>
+              <a:t>RESULT 7 · DOMAIN ADAPTATION (7/12)</a:t>
             </a:r>
           </a:p>
         </p:txBody>
@@ -21573,7 +21574,7 @@
                 </a:solidFill>
                 <a:latin typeface="Calibri"/>
               </a:rPr>
-              <a:t>34</a:t>
+              <a:t>35</a:t>
             </a:r>
           </a:p>
         </p:txBody>
@@ -22995,7 +22996,7 @@
                 </a:solidFill>
                 <a:latin typeface="Calibri"/>
               </a:rPr>
-              <a:t>35</a:t>
+              <a:t>36</a:t>
             </a:r>
           </a:p>
         </p:txBody>
@@ -23056,7 +23057,7 @@
                 </a:solidFill>
                 <a:latin typeface="Calibri"/>
               </a:rPr>
-              <a:t>RESULT 7 · DOMAIN ADAPTATION (11/11)</a:t>
+              <a:t>RESULT 7 · DOMAIN ADAPTATION (12/12)</a:t>
             </a:r>
           </a:p>
         </p:txBody>
@@ -23587,7 +23588,7 @@
                 </a:solidFill>
                 <a:latin typeface="Calibri"/>
               </a:rPr>
-              <a:t>33</a:t>
+              <a:t>34</a:t>
             </a:r>
           </a:p>
         </p:txBody>
@@ -23648,7 +23649,7 @@
                 </a:solidFill>
                 <a:latin typeface="Calibri"/>
               </a:rPr>
-              <a:t>RESULT 7 · DOMAIN ADAPTATION (3/11)</a:t>
+              <a:t>RESULT 7 · DOMAIN ADAPTATION (3/12)</a:t>
             </a:r>
           </a:p>
         </p:txBody>
@@ -24007,7 +24008,7 @@
                 </a:solidFill>
                 <a:latin typeface="Calibri"/>
               </a:rPr>
-              <a:t>RESULT 7 · DOMAIN ADAPTATION (8/11)</a:t>
+              <a:t>RESULT 7 · DOMAIN ADAPTATION (8/12)</a:t>
             </a:r>
           </a:p>
         </p:txBody>
@@ -24596,7 +24597,7 @@
                 </a:solidFill>
                 <a:latin typeface="Calibri"/>
               </a:rPr>
-              <a:t>RESULT 7 · DOMAIN ADAPTATION (10/11)</a:t>
+              <a:t>RESULT 7 · DOMAIN ADAPTATION (11/12)</a:t>
             </a:r>
           </a:p>
         </p:txBody>
@@ -25214,7 +25215,7 @@
                 </a:solidFill>
                 <a:latin typeface="Calibri"/>
               </a:rPr>
-              <a:t>32</a:t>
+              <a:t>33</a:t>
             </a:r>
           </a:p>
         </p:txBody>
@@ -25275,7 +25276,7 @@
                 </a:solidFill>
                 <a:latin typeface="Calibri"/>
               </a:rPr>
-              <a:t>RESULT 7 · DOMAIN ADAPTATION (9/11)</a:t>
+              <a:t>RESULT 7 · DOMAIN ADAPTATION (9/12)</a:t>
             </a:r>
           </a:p>
         </p:txBody>
@@ -25775,7 +25776,7 @@
                 </a:solidFill>
                 <a:latin typeface="Calibri"/>
               </a:rPr>
-              <a:t>RESULT 7 · DOMAIN ADAPTATION (5/11)</a:t>
+              <a:t>RESULT 7 · DOMAIN ADAPTATION (5/12)</a:t>
             </a:r>
           </a:p>
         </p:txBody>
@@ -26394,6 +26395,595 @@
                 <a:latin typeface="Calibri"/>
               </a:rPr>
               <a:t>27</a:t>
+            </a:r>
+          </a:p>
+        </p:txBody>
+      </p:sp>
+    </p:spTree>
+  </p:cSld>
+  <p:clrMapOvr>
+    <a:masterClrMapping/>
+  </p:clrMapOvr>
+</p:sld>
+</file>
+
+<file path=ppt/slides/slide37.xml><?xml version="1.0" encoding="utf-8"?>
+<p:sld xmlns:a="http://schemas.openxmlformats.org/drawingml/2006/main" xmlns:p="http://schemas.openxmlformats.org/presentationml/2006/main" xmlns:r="http://schemas.openxmlformats.org/officeDocument/2006/relationships">
+  <p:cSld>
+    <p:bg>
+      <p:bgPr>
+        <a:solidFill>
+          <a:srgbClr val="FFFFFF"/>
+        </a:solidFill>
+        <a:effectLst/>
+      </p:bgPr>
+    </p:bg>
+    <p:spTree>
+      <p:nvGrpSpPr>
+        <p:cNvPr id="1" name=""/>
+        <p:cNvGrpSpPr/>
+        <p:nvPr/>
+      </p:nvGrpSpPr>
+      <p:grpSpPr/>
+      <p:sp>
+        <p:nvSpPr>
+          <p:cNvPr id="2" name="TextBox 1"/>
+          <p:cNvSpPr txBox="1"/>
+          <p:nvPr/>
+        </p:nvSpPr>
+        <p:spPr>
+          <a:xfrm>
+            <a:off x="548640" y="292608"/>
+            <a:ext cx="9144000" cy="292608"/>
+          </a:xfrm>
+          <a:prstGeom prst="rect">
+            <a:avLst/>
+          </a:prstGeom>
+          <a:noFill/>
+        </p:spPr>
+        <p:txBody>
+          <a:bodyPr wrap="square" anchor="t" lIns="0" rIns="0" tIns="0" bIns="0">
+            <a:spAutoFit/>
+          </a:bodyPr>
+          <a:lstStyle/>
+          <a:p>
+            <a:pPr algn="l"/>
+            <a:r>
+              <a:rPr sz="1050" b="1" i="0">
+                <a:solidFill>
+                  <a:srgbClr val="2A78D6"/>
+                </a:solidFill>
+                <a:latin typeface="Calibri"/>
+              </a:rPr>
+              <a:t>RESULT 7 · DOMAIN ADAPTATION (10/12)</a:t>
+            </a:r>
+          </a:p>
+        </p:txBody>
+      </p:sp>
+      <p:sp>
+        <p:nvSpPr>
+          <p:cNvPr id="3" name="TextBox 2"/>
+          <p:cNvSpPr txBox="1"/>
+          <p:nvPr/>
+        </p:nvSpPr>
+        <p:spPr>
+          <a:xfrm>
+            <a:off x="548640" y="566928"/>
+            <a:ext cx="10972800" cy="548640"/>
+          </a:xfrm>
+          <a:prstGeom prst="rect">
+            <a:avLst/>
+          </a:prstGeom>
+          <a:noFill/>
+        </p:spPr>
+        <p:txBody>
+          <a:bodyPr wrap="square" anchor="t" lIns="0" rIns="0" tIns="0" bIns="0">
+            <a:spAutoFit/>
+          </a:bodyPr>
+          <a:lstStyle/>
+          <a:p>
+            <a:pPr algn="l"/>
+            <a:r>
+              <a:rPr sz="2400" b="1" i="0">
+                <a:solidFill>
+                  <a:srgbClr val="1E2761"/>
+                </a:solidFill>
+                <a:latin typeface="Cambria"/>
+              </a:rPr>
+              <a:t>최종 결론: “전부 60%” 목표는 구조적으로 불가능하다</a:t>
+            </a:r>
+          </a:p>
+        </p:txBody>
+      </p:sp>
+      <p:sp>
+        <p:nvSpPr>
+          <p:cNvPr id="4" name="TextBox 3"/>
+          <p:cNvSpPr txBox="1"/>
+          <p:nvPr/>
+        </p:nvSpPr>
+        <p:spPr>
+          <a:xfrm>
+            <a:off x="548640" y="1200000"/>
+            <a:ext cx="11091672" cy="1000000"/>
+          </a:xfrm>
+          <a:prstGeom prst="rect">
+            <a:avLst/>
+          </a:prstGeom>
+          <a:noFill/>
+        </p:spPr>
+        <p:txBody>
+          <a:bodyPr wrap="square" anchor="t" lIns="0" rIns="0" tIns="0" bIns="0">
+            <a:spAutoFit/>
+          </a:bodyPr>
+          <a:lstStyle/>
+          <a:p>
+            <a:pPr algn="l"/>
+            <a:r>
+              <a:rPr sz="1300" b="0" i="0">
+                <a:solidFill>
+                  <a:srgbClr val="1A1A1A"/>
+                </a:solidFill>
+                <a:latin typeface="Calibri"/>
+              </a:rPr>
+              <a:t>오라클 상한 실험(실제 정답으로 학습했을 때 도달 가능한 최댓값)을 “60% 목표” 기준으로 다시 읽으면 데이터셋마다 답이 다르다 — 이건 더 좋은 적응 기법을 못 찾아서가 아니라, 데이터셋 구조 자체가 다른 것이다.</a:t>
+            </a:r>
+          </a:p>
+        </p:txBody>
+      </p:sp>
+      <p:graphicFrame>
+        <p:nvGraphicFramePr>
+          <p:cNvPr id="7" name="Table"/>
+          <p:cNvGraphicFramePr>
+            <a:graphicFrameLocks noGrp="1"/>
+          </p:cNvGraphicFramePr>
+          <p:nvPr/>
+        </p:nvGraphicFramePr>
+        <p:xfrm>
+          <a:off x="548640" y="2350000"/>
+          <a:ext cx="10900000" cy="2550000"/>
+        </p:xfrm>
+        <a:graphic>
+          <a:graphicData uri="http://schemas.openxmlformats.org/drawingml/2006/table">
+            <a:tbl>
+              <a:tblPr firstRow="1" bandRow="1">
+                <a:tableStyleId>{5C22544A-7EE6-4342-B048-85BDC9FD1C3A}</a:tableStyleId>
+              </a:tblPr>
+              <a:tblGrid>
+                <a:gridCol w="2200000"/>
+                <a:gridCol w="2900000"/>
+                <a:gridCol w="3200000"/>
+                <a:gridCol w="2600000"/>
+              </a:tblGrid>
+              <a:tr h="560000">
+                <a:tc>
+                  <a:txBody>
+                    <a:bodyPr/>
+                    <a:lstStyle/>
+                    <a:p>
+                      <a:pPr algn="ctr"/>
+                      <a:r>
+                        <a:rPr sz="1200" b="1">
+                          <a:solidFill>
+                            <a:srgbClr val="FFFFFF"/>
+                          </a:solidFill>
+                        </a:rPr>
+                        <a:t>데이터셋</a:t>
+                      </a:r>
+                    </a:p>
+                  </a:txBody>
+                  <a:tcPr anchor="ctr">
+                    <a:solidFill>
+                      <a:srgbClr val="1E2761"/>
+                    </a:solidFill>
+                  </a:tcPr>
+                </a:tc>
+                <a:tc>
+                  <a:txBody>
+                    <a:bodyPr/>
+                    <a:lstStyle/>
+                    <a:p>
+                      <a:pPr algn="ctr"/>
+                      <a:r>
+                        <a:rPr sz="1200" b="1">
+                          <a:solidFill>
+                            <a:srgbClr val="FFFFFF"/>
+                          </a:solidFill>
+                        </a:rPr>
+                        <a:t>오라클 상한(이론적 최댓값)</a:t>
+                      </a:r>
+                    </a:p>
+                  </a:txBody>
+                  <a:tcPr anchor="ctr">
+                    <a:solidFill>
+                      <a:srgbClr val="1E2761"/>
+                    </a:solidFill>
+                  </a:tcPr>
+                </a:tc>
+                <a:tc>
+                  <a:txBody>
+                    <a:bodyPr/>
+                    <a:lstStyle/>
+                    <a:p>
+                      <a:pPr algn="ctr"/>
+                      <a:r>
+                        <a:rPr sz="1200" b="1">
+                          <a:solidFill>
+                            <a:srgbClr val="FFFFFF"/>
+                          </a:solidFill>
+                        </a:rPr>
+                        <a:t>60% 가능?</a:t>
+                      </a:r>
+                    </a:p>
+                  </a:txBody>
+                  <a:tcPr anchor="ctr">
+                    <a:solidFill>
+                      <a:srgbClr val="1E2761"/>
+                    </a:solidFill>
+                  </a:tcPr>
+                </a:tc>
+                <a:tc>
+                  <a:txBody>
+                    <a:bodyPr/>
+                    <a:lstStyle/>
+                    <a:p>
+                      <a:pPr algn="ctr"/>
+                      <a:r>
+                        <a:rPr sz="1200" b="1">
+                          <a:solidFill>
+                            <a:srgbClr val="FFFFFF"/>
+                          </a:solidFill>
+                        </a:rPr>
+                        <a:t>현재 검증된 최고(3-seed)</a:t>
+                      </a:r>
+                    </a:p>
+                  </a:txBody>
+                  <a:tcPr anchor="ctr">
+                    <a:solidFill>
+                      <a:srgbClr val="1E2761"/>
+                    </a:solidFill>
+                  </a:tcPr>
+                </a:tc>
+              </a:tr>
+              <a:tr h="700000">
+                <a:tc>
+                  <a:txBody>
+                    <a:bodyPr/>
+                    <a:lstStyle/>
+                    <a:p>
+                      <a:pPr algn="ctr"/>
+                      <a:r>
+                        <a:rPr sz="1200" b="0">
+                          <a:solidFill>
+                            <a:srgbClr val="1A1A1A"/>
+                          </a:solidFill>
+                        </a:rPr>
+                        <a:t>Taiwan</a:t>
+                      </a:r>
+                    </a:p>
+                  </a:txBody>
+                  <a:tcPr anchor="ctr">
+                    <a:solidFill>
+                      <a:srgbClr val="FFFFFF"/>
+                    </a:solidFill>
+                  </a:tcPr>
+                </a:tc>
+                <a:tc>
+                  <a:txBody>
+                    <a:bodyPr/>
+                    <a:lstStyle/>
+                    <a:p>
+                      <a:pPr algn="ctr"/>
+                      <a:r>
+                        <a:rPr sz="1200" b="1">
+                          <a:solidFill>
+                            <a:srgbClr val="1A1A1A"/>
+                          </a:solidFill>
+                        </a:rPr>
+                        <a:t>70.53%</a:t>
+                      </a:r>
+                    </a:p>
+                  </a:txBody>
+                  <a:tcPr anchor="ctr">
+                    <a:solidFill>
+                      <a:srgbClr val="FFFFFF"/>
+                    </a:solidFill>
+                  </a:tcPr>
+                </a:tc>
+                <a:tc>
+                  <a:txBody>
+                    <a:bodyPr/>
+                    <a:lstStyle/>
+                    <a:p>
+                      <a:pPr algn="ctr"/>
+                      <a:r>
+                        <a:rPr sz="1200" b="1">
+                          <a:solidFill>
+                            <a:srgbClr val="1A6B3A"/>
+                          </a:solidFill>
+                        </a:rPr>
+                        <a:t>가능 (이론상)</a:t>
+                      </a:r>
+                    </a:p>
+                  </a:txBody>
+                  <a:tcPr anchor="ctr">
+                    <a:solidFill>
+                      <a:srgbClr val="FFFFFF"/>
+                    </a:solidFill>
+                  </a:tcPr>
+                </a:tc>
+                <a:tc>
+                  <a:txBody>
+                    <a:bodyPr/>
+                    <a:lstStyle/>
+                    <a:p>
+                      <a:pPr algn="ctr"/>
+                      <a:r>
+                        <a:rPr sz="1200" b="0">
+                          <a:solidFill>
+                            <a:srgbClr val="1A1A1A"/>
+                          </a:solidFill>
+                        </a:rPr>
+                        <a:t>37.58% ±5.86</a:t>
+                      </a:r>
+                    </a:p>
+                  </a:txBody>
+                  <a:tcPr anchor="ctr">
+                    <a:solidFill>
+                      <a:srgbClr val="FFFFFF"/>
+                    </a:solidFill>
+                  </a:tcPr>
+                </a:tc>
+              </a:tr>
+              <a:tr h="700000">
+                <a:tc>
+                  <a:txBody>
+                    <a:bodyPr/>
+                    <a:lstStyle/>
+                    <a:p>
+                      <a:pPr algn="ctr"/>
+                      <a:r>
+                        <a:rPr sz="1200" b="0">
+                          <a:solidFill>
+                            <a:srgbClr val="1A1A1A"/>
+                          </a:solidFill>
+                        </a:rPr>
+                        <a:t>Bangladesh</a:t>
+                      </a:r>
+                    </a:p>
+                  </a:txBody>
+                  <a:tcPr anchor="ctr">
+                    <a:solidFill>
+                      <a:srgbClr val="EEF3FC"/>
+                    </a:solidFill>
+                  </a:tcPr>
+                </a:tc>
+                <a:tc>
+                  <a:txBody>
+                    <a:bodyPr/>
+                    <a:lstStyle/>
+                    <a:p>
+                      <a:pPr algn="ctr"/>
+                      <a:r>
+                        <a:rPr sz="1200" b="0">
+                          <a:solidFill>
+                            <a:srgbClr val="1A1A1A"/>
+                          </a:solidFill>
+                        </a:rPr>
+                        <a:t>58.61%</a:t>
+                      </a:r>
+                    </a:p>
+                  </a:txBody>
+                  <a:tcPr anchor="ctr">
+                    <a:solidFill>
+                      <a:srgbClr val="EEF3FC"/>
+                    </a:solidFill>
+                  </a:tcPr>
+                </a:tc>
+                <a:tc>
+                  <a:txBody>
+                    <a:bodyPr/>
+                    <a:lstStyle/>
+                    <a:p>
+                      <a:pPr algn="ctr"/>
+                      <a:r>
+                        <a:rPr sz="1200" b="1">
+                          <a:solidFill>
+                            <a:srgbClr val="B3401A"/>
+                          </a:solidFill>
+                        </a:rPr>
+                        <a:t>불가능 (상한 자체가 60% 미달)</a:t>
+                      </a:r>
+                    </a:p>
+                  </a:txBody>
+                  <a:tcPr anchor="ctr">
+                    <a:solidFill>
+                      <a:srgbClr val="EEF3FC"/>
+                    </a:solidFill>
+                  </a:tcPr>
+                </a:tc>
+                <a:tc>
+                  <a:txBody>
+                    <a:bodyPr/>
+                    <a:lstStyle/>
+                    <a:p>
+                      <a:pPr algn="ctr"/>
+                      <a:r>
+                        <a:rPr sz="1200" b="0">
+                          <a:solidFill>
+                            <a:srgbClr val="1A1A1A"/>
+                          </a:solidFill>
+                        </a:rPr>
+                        <a:t>24.28% ±5.62</a:t>
+                      </a:r>
+                    </a:p>
+                  </a:txBody>
+                  <a:tcPr anchor="ctr">
+                    <a:solidFill>
+                      <a:srgbClr val="EEF3FC"/>
+                    </a:solidFill>
+                  </a:tcPr>
+                </a:tc>
+              </a:tr>
+              <a:tr h="700000">
+                <a:tc>
+                  <a:txBody>
+                    <a:bodyPr/>
+                    <a:lstStyle/>
+                    <a:p>
+                      <a:pPr algn="ctr"/>
+                      <a:r>
+                        <a:rPr sz="1200" b="0">
+                          <a:solidFill>
+                            <a:srgbClr val="1A1A1A"/>
+                          </a:solidFill>
+                        </a:rPr>
+                        <a:t>PlantDoc</a:t>
+                      </a:r>
+                    </a:p>
+                  </a:txBody>
+                  <a:tcPr anchor="ctr">
+                    <a:solidFill>
+                      <a:srgbClr val="FFFFFF"/>
+                    </a:solidFill>
+                  </a:tcPr>
+                </a:tc>
+                <a:tc>
+                  <a:txBody>
+                    <a:bodyPr/>
+                    <a:lstStyle/>
+                    <a:p>
+                      <a:pPr algn="ctr"/>
+                      <a:r>
+                        <a:rPr sz="1200" b="0">
+                          <a:solidFill>
+                            <a:srgbClr val="1A1A1A"/>
+                          </a:solidFill>
+                        </a:rPr>
+                        <a:t>23.47%</a:t>
+                      </a:r>
+                    </a:p>
+                  </a:txBody>
+                  <a:tcPr anchor="ctr">
+                    <a:solidFill>
+                      <a:srgbClr val="FFFFFF"/>
+                    </a:solidFill>
+                  </a:tcPr>
+                </a:tc>
+                <a:tc>
+                  <a:txBody>
+                    <a:bodyPr/>
+                    <a:lstStyle/>
+                    <a:p>
+                      <a:pPr algn="ctr"/>
+                      <a:r>
+                        <a:rPr sz="1200" b="1">
+                          <a:solidFill>
+                            <a:srgbClr val="B3401A"/>
+                          </a:solidFill>
+                        </a:rPr>
+                        <a:t>완전히 불가능</a:t>
+                      </a:r>
+                    </a:p>
+                  </a:txBody>
+                  <a:tcPr anchor="ctr">
+                    <a:solidFill>
+                      <a:srgbClr val="FFFFFF"/>
+                    </a:solidFill>
+                  </a:tcPr>
+                </a:tc>
+                <a:tc>
+                  <a:txBody>
+                    <a:bodyPr/>
+                    <a:lstStyle/>
+                    <a:p>
+                      <a:pPr algn="ctr"/>
+                      <a:r>
+                        <a:rPr sz="1200" b="0">
+                          <a:solidFill>
+                            <a:srgbClr val="1A1A1A"/>
+                          </a:solidFill>
+                        </a:rPr>
+                        <a:t>19.75% ±1.40</a:t>
+                      </a:r>
+                    </a:p>
+                  </a:txBody>
+                  <a:tcPr anchor="ctr">
+                    <a:solidFill>
+                      <a:srgbClr val="FFFFFF"/>
+                    </a:solidFill>
+                  </a:tcPr>
+                </a:tc>
+              </a:tr>
+            </a:tbl>
+          </a:graphicData>
+        </a:graphic>
+      </p:graphicFrame>
+      <p:sp>
+        <p:nvSpPr>
+          <p:cNvPr id="6" name="TextBox 4"/>
+          <p:cNvSpPr txBox="1"/>
+          <p:nvPr/>
+        </p:nvSpPr>
+        <p:spPr>
+          <a:xfrm>
+            <a:off x="548640" y="5100000"/>
+            <a:ext cx="11091672" cy="1300000"/>
+          </a:xfrm>
+          <a:prstGeom prst="rect">
+            <a:avLst/>
+          </a:prstGeom>
+          <a:noFill/>
+        </p:spPr>
+        <p:txBody>
+          <a:bodyPr wrap="square" anchor="t" lIns="0" rIns="0" tIns="0" bIns="0">
+            <a:spAutoFit/>
+          </a:bodyPr>
+          <a:lstStyle/>
+          <a:p>
+            <a:pPr algn="l"/>
+            <a:r>
+              <a:rPr sz="1200" b="0" i="1">
+                <a:solidFill>
+                  <a:srgbClr val="5B5E6B"/>
+                </a:solidFill>
+                <a:latin typeface="Calibri"/>
+              </a:rPr>
+              <a:t>Taiwan만 이론적으로 60%를 넘을 여지가 있다 — 실제로 seed42 한 번은 하이퍼파라미터를 끝까지 밀어 63.06%까지 봤지만, 3-seed로 검증하니 46.39% ±12.46으로 재현되지 않았다(8/12 슬라이드). AaD·CoWA 등 추가로 시도한 최신 방법들도 SHOT을 못 넘었다. Bangladesh는 오라클 상한(58.61%) 자체가 60%에 못 미쳐 “완벽한 적응 기법”을 찾아도 구조적으로 60%를 보장할 수 없고, PlantDoc은 정답을 줘도 23%라 적응 문제가 아니라 feature 표현력의 문제다 — source 학습 데이터·증강을 바꾸지 않는 한(이 프로젝트 범위 밖) 더 올릴 수 없다는 게 최종 진단이다.</a:t>
+            </a:r>
+          </a:p>
+        </p:txBody>
+      </p:sp>
+      <p:sp>
+        <p:nvSpPr>
+          <p:cNvPr id="9" name="TextBox 5"/>
+          <p:cNvSpPr txBox="1"/>
+          <p:nvPr/>
+        </p:nvSpPr>
+        <p:spPr>
+          <a:xfrm>
+            <a:off x="11430000" y="6446520"/>
+            <a:ext cx="548640" cy="274320"/>
+          </a:xfrm>
+          <a:prstGeom prst="rect">
+            <a:avLst/>
+          </a:prstGeom>
+          <a:noFill/>
+        </p:spPr>
+        <p:txBody>
+          <a:bodyPr wrap="square" anchor="t" lIns="0" rIns="0" tIns="0" bIns="0">
+            <a:spAutoFit/>
+          </a:bodyPr>
+          <a:lstStyle/>
+          <a:p>
+            <a:pPr algn="r"/>
+            <a:r>
+              <a:rPr sz="1000" b="0" i="0">
+                <a:solidFill>
+                  <a:srgbClr val="5B5E6B"/>
+                </a:solidFill>
+                <a:latin typeface="Calibri"/>
+              </a:rPr>
+              <a:t>32</a:t>
             </a:r>
           </a:p>
         </p:txBody>

--- a/docs/CNN_토마토_병해분류_V2_진행보고.pptx
+++ b/docs/CNN_토마토_병해분류_V2_진행보고.pptx
@@ -28,17 +28,11 @@
     <p:sldId id="276" r:id="rId22"/>
     <p:sldId id="279" r:id="rId23"/>
     <p:sldId id="280" r:id="rId24"/>
-    <p:sldId id="281" r:id="rId25"/>
-    <p:sldId id="282" r:id="rId26"/>
-    <p:sldId id="287" r:id="rId37"/>
-    <p:sldId id="283" r:id="rId27"/>
-    <p:sldId id="291" r:id="rId41"/>
-    <p:sldId id="284" r:id="rId28"/>
-    <p:sldId id="285" r:id="rId29"/>
-    <p:sldId id="288" r:id="rId38"/>
+    <p:sldId id="293" r:id="rId43"/>
+    <p:sldId id="292" r:id="rId42"/>
     <p:sldId id="290" r:id="rId40"/>
-    <p:sldId id="292" r:id="rId42"/>
-    <p:sldId id="289" r:id="rId39"/>
+    <p:sldId id="294" r:id="rId44"/>
+    <p:sldId id="295" r:id="rId45"/>
     <p:sldId id="286" r:id="rId36"/>
     <p:sldId id="277" r:id="rId30"/>
     <p:sldId id="278" r:id="rId31"/>
@@ -17501,3060 +17495,6 @@
 </p:sld>
 </file>
 
-<file path=ppt/slides/slide24.xml><?xml version="1.0" encoding="utf-8"?>
-<p:sld xmlns:a="http://schemas.openxmlformats.org/drawingml/2006/main" xmlns:r="http://schemas.openxmlformats.org/officeDocument/2006/relationships" xmlns:p="http://schemas.openxmlformats.org/presentationml/2006/main">
-  <p:cSld>
-    <p:bg>
-      <p:bgPr>
-        <a:solidFill>
-          <a:srgbClr val="FFFFFF"/>
-        </a:solidFill>
-        <a:effectLst/>
-      </p:bgPr>
-    </p:bg>
-    <p:spTree>
-      <p:nvGrpSpPr>
-        <p:cNvPr id="1" name=""/>
-        <p:cNvGrpSpPr/>
-        <p:nvPr/>
-      </p:nvGrpSpPr>
-      <p:grpSpPr>
-        <a:xfrm>
-          <a:off x="0" y="0"/>
-          <a:ext cx="0" cy="0"/>
-          <a:chOff x="0" y="0"/>
-          <a:chExt cx="0" cy="0"/>
-        </a:xfrm>
-      </p:grpSpPr>
-      <p:sp>
-        <p:nvSpPr>
-          <p:cNvPr id="2" name="TextBox 1"/>
-          <p:cNvSpPr txBox="1"/>
-          <p:nvPr/>
-        </p:nvSpPr>
-        <p:spPr>
-          <a:xfrm>
-            <a:off x="548640" y="292608"/>
-            <a:ext cx="9144000" cy="292608"/>
-          </a:xfrm>
-          <a:prstGeom prst="rect">
-            <a:avLst/>
-          </a:prstGeom>
-          <a:noFill/>
-        </p:spPr>
-        <p:txBody>
-          <a:bodyPr wrap="square" lIns="0" tIns="0" rIns="0" bIns="0" anchor="t">
-            <a:spAutoFit/>
-          </a:bodyPr>
-          <a:lstStyle/>
-          <a:p>
-            <a:pPr algn="l"/>
-            <a:r>
-              <a:rPr sz="1050" b="1" i="0">
-                <a:solidFill>
-                  <a:srgbClr val="2A78D6"/>
-                </a:solidFill>
-                <a:latin typeface="Calibri"/>
-              </a:rPr>
-              <a:t>RESULT 7 · DOMAIN ADAPTATION (1/12)</a:t>
-            </a:r>
-          </a:p>
-        </p:txBody>
-      </p:sp>
-      <p:sp>
-        <p:nvSpPr>
-          <p:cNvPr id="3" name="TextBox 2"/>
-          <p:cNvSpPr txBox="1"/>
-          <p:nvPr/>
-        </p:nvSpPr>
-        <p:spPr>
-          <a:xfrm>
-            <a:off x="548640" y="566928"/>
-            <a:ext cx="10972800" cy="548640"/>
-          </a:xfrm>
-          <a:prstGeom prst="rect">
-            <a:avLst/>
-          </a:prstGeom>
-          <a:noFill/>
-        </p:spPr>
-        <p:txBody>
-          <a:bodyPr wrap="square" lIns="0" tIns="0" rIns="0" bIns="0" anchor="t">
-            <a:spAutoFit/>
-          </a:bodyPr>
-          <a:lstStyle/>
-          <a:p>
-            <a:pPr algn="l"/>
-            <a:r>
-              <a:rPr sz="2400" b="1" i="0">
-                <a:solidFill>
-                  <a:srgbClr val="1E2761"/>
-                </a:solidFill>
-                <a:latin typeface="Cambria"/>
-              </a:rPr>
-              <a:t>AdaBN / TENT 적용 — 전부 악화 (Negative Transfer)</a:t>
-            </a:r>
-          </a:p>
-        </p:txBody>
-      </p:sp>
-      <p:sp>
-        <p:nvSpPr>
-          <p:cNvPr id="4" name="TextBox 3"/>
-          <p:cNvSpPr txBox="1"/>
-          <p:nvPr/>
-        </p:nvSpPr>
-        <p:spPr>
-          <a:xfrm>
-            <a:off x="548640" y="1200000"/>
-            <a:ext cx="11091672" cy="950000"/>
-          </a:xfrm>
-          <a:prstGeom prst="rect">
-            <a:avLst/>
-          </a:prstGeom>
-          <a:noFill/>
-        </p:spPr>
-        <p:txBody>
-          <a:bodyPr wrap="square" lIns="0" tIns="0" rIns="0" bIns="0" anchor="t">
-            <a:spAutoFit/>
-          </a:bodyPr>
-          <a:lstStyle/>
-          <a:p>
-            <a:pPr algn="l"/>
-            <a:r>
-              <a:rPr sz="1300" b="0" i="0">
-                <a:solidFill>
-                  <a:srgbClr val="1A1A1A"/>
-                </a:solidFill>
-                <a:latin typeface="Calibri"/>
-              </a:rPr>
-              <a:t>AdaBN(Li et al., 2016)은 target 이미지로 forward만 수행해 BN 통계를 완전 교체한다. TENT(Wang et al., ICLR 2021)는 BN affine만 열고 entropy를 최소화한다. 둘 다 target label은 전혀 쓰지 않는다(source-free·label-free).</a:t>
-            </a:r>
-          </a:p>
-        </p:txBody>
-      </p:sp>
-      <p:graphicFrame>
-        <p:nvGraphicFramePr>
-          <p:cNvPr id="7" name="Table"/>
-          <p:cNvGraphicFramePr>
-            <a:graphicFrameLocks noGrp="1"/>
-          </p:cNvGraphicFramePr>
-          <p:nvPr/>
-        </p:nvGraphicFramePr>
-        <p:xfrm>
-          <a:off x="548640" y="2250000"/>
-          <a:ext cx="6700000" cy="2240000"/>
-        </p:xfrm>
-        <a:graphic>
-          <a:graphicData uri="http://schemas.openxmlformats.org/drawingml/2006/table">
-            <a:tbl>
-              <a:tblPr firstRow="1" bandRow="1">
-                <a:tableStyleId>{5C22544A-7EE6-4342-B048-85BDC9FD1C3A}</a:tableStyleId>
-              </a:tblPr>
-              <a:tblGrid>
-                <a:gridCol w="1550000">
-                  <a:extLst>
-                    <a:ext uri="{9D8B030D-6E8A-4147-A177-3AD203B41FA5}">
-                      <a16:colId xmlns:a16="http://schemas.microsoft.com/office/drawing/2014/main" val="20000"/>
-                    </a:ext>
-                  </a:extLst>
-                </a:gridCol>
-                <a:gridCol w="1050000">
-                  <a:extLst>
-                    <a:ext uri="{9D8B030D-6E8A-4147-A177-3AD203B41FA5}">
-                      <a16:colId xmlns:a16="http://schemas.microsoft.com/office/drawing/2014/main" val="20001"/>
-                    </a:ext>
-                  </a:extLst>
-                </a:gridCol>
-                <a:gridCol w="1500000">
-                  <a:extLst>
-                    <a:ext uri="{9D8B030D-6E8A-4147-A177-3AD203B41FA5}">
-                      <a16:colId xmlns:a16="http://schemas.microsoft.com/office/drawing/2014/main" val="20002"/>
-                    </a:ext>
-                  </a:extLst>
-                </a:gridCol>
-                <a:gridCol w="1300000">
-                  <a:extLst>
-                    <a:ext uri="{9D8B030D-6E8A-4147-A177-3AD203B41FA5}">
-                      <a16:colId xmlns:a16="http://schemas.microsoft.com/office/drawing/2014/main" val="20003"/>
-                    </a:ext>
-                  </a:extLst>
-                </a:gridCol>
-                <a:gridCol w="1300000">
-                  <a:extLst>
-                    <a:ext uri="{9D8B030D-6E8A-4147-A177-3AD203B41FA5}">
-                      <a16:colId xmlns:a16="http://schemas.microsoft.com/office/drawing/2014/main" val="20004"/>
-                    </a:ext>
-                  </a:extLst>
-                </a:gridCol>
-              </a:tblGrid>
-              <a:tr h="560000">
-                <a:tc>
-                  <a:txBody>
-                    <a:bodyPr/>
-                    <a:lstStyle/>
-                    <a:p>
-                      <a:pPr algn="ctr"/>
-                      <a:r>
-                        <a:rPr sz="1200" b="1">
-                          <a:solidFill>
-                            <a:srgbClr val="FFFFFF"/>
-                          </a:solidFill>
-                        </a:rPr>
-                        <a:t>데이터셋</a:t>
-                      </a:r>
-                    </a:p>
-                  </a:txBody>
-                  <a:tcPr anchor="ctr">
-                    <a:solidFill>
-                      <a:srgbClr val="1E2761"/>
-                    </a:solidFill>
-                  </a:tcPr>
-                </a:tc>
-                <a:tc>
-                  <a:txBody>
-                    <a:bodyPr/>
-                    <a:lstStyle/>
-                    <a:p>
-                      <a:pPr algn="ctr"/>
-                      <a:r>
-                        <a:rPr sz="1200" b="1">
-                          <a:solidFill>
-                            <a:srgbClr val="FFFFFF"/>
-                          </a:solidFill>
-                        </a:rPr>
-                        <a:t>클래스 겹침</a:t>
-                      </a:r>
-                    </a:p>
-                  </a:txBody>
-                  <a:tcPr anchor="ctr">
-                    <a:solidFill>
-                      <a:srgbClr val="1E2761"/>
-                    </a:solidFill>
-                  </a:tcPr>
-                </a:tc>
-                <a:tc>
-                  <a:txBody>
-                    <a:bodyPr/>
-                    <a:lstStyle/>
-                    <a:p>
-                      <a:pPr algn="ctr"/>
-                      <a:r>
-                        <a:rPr sz="1200" b="1">
-                          <a:solidFill>
-                            <a:srgbClr val="FFFFFF"/>
-                          </a:solidFill>
-                        </a:rPr>
-                        <a:t>Source-only</a:t>
-                      </a:r>
-                    </a:p>
-                  </a:txBody>
-                  <a:tcPr anchor="ctr">
-                    <a:solidFill>
-                      <a:srgbClr val="1E2761"/>
-                    </a:solidFill>
-                  </a:tcPr>
-                </a:tc>
-                <a:tc>
-                  <a:txBody>
-                    <a:bodyPr/>
-                    <a:lstStyle/>
-                    <a:p>
-                      <a:pPr algn="ctr"/>
-                      <a:r>
-                        <a:rPr sz="1200" b="1">
-                          <a:solidFill>
-                            <a:srgbClr val="FFFFFF"/>
-                          </a:solidFill>
-                        </a:rPr>
-                        <a:t>AdaBN</a:t>
-                      </a:r>
-                    </a:p>
-                  </a:txBody>
-                  <a:tcPr anchor="ctr">
-                    <a:solidFill>
-                      <a:srgbClr val="1E2761"/>
-                    </a:solidFill>
-                  </a:tcPr>
-                </a:tc>
-                <a:tc>
-                  <a:txBody>
-                    <a:bodyPr/>
-                    <a:lstStyle/>
-                    <a:p>
-                      <a:pPr algn="ctr"/>
-                      <a:r>
-                        <a:rPr sz="1200" b="1">
-                          <a:solidFill>
-                            <a:srgbClr val="FFFFFF"/>
-                          </a:solidFill>
-                        </a:rPr>
-                        <a:t>TENT</a:t>
-                      </a:r>
-                    </a:p>
-                  </a:txBody>
-                  <a:tcPr anchor="ctr">
-                    <a:solidFill>
-                      <a:srgbClr val="1E2761"/>
-                    </a:solidFill>
-                  </a:tcPr>
-                </a:tc>
-                <a:extLst>
-                  <a:ext uri="{0D108BD9-81ED-4DB2-BD59-A6C34878D82A}">
-                    <a16:rowId xmlns:a16="http://schemas.microsoft.com/office/drawing/2014/main" val="10000"/>
-                  </a:ext>
-                </a:extLst>
-              </a:tr>
-              <a:tr h="560000">
-                <a:tc>
-                  <a:txBody>
-                    <a:bodyPr/>
-                    <a:lstStyle/>
-                    <a:p>
-                      <a:pPr algn="ctr"/>
-                      <a:r>
-                        <a:rPr sz="1200" b="0">
-                          <a:solidFill>
-                            <a:srgbClr val="1A1A1A"/>
-                          </a:solidFill>
-                        </a:rPr>
-                        <a:t>Taiwan</a:t>
-                      </a:r>
-                    </a:p>
-                  </a:txBody>
-                  <a:tcPr anchor="ctr">
-                    <a:solidFill>
-                      <a:srgbClr val="FFFFFF"/>
-                    </a:solidFill>
-                  </a:tcPr>
-                </a:tc>
-                <a:tc>
-                  <a:txBody>
-                    <a:bodyPr/>
-                    <a:lstStyle/>
-                    <a:p>
-                      <a:pPr algn="ctr"/>
-                      <a:r>
-                        <a:rPr sz="1200" b="0">
-                          <a:solidFill>
-                            <a:srgbClr val="1A1A1A"/>
-                          </a:solidFill>
-                        </a:rPr>
-                        <a:t>3/10</a:t>
-                      </a:r>
-                    </a:p>
-                  </a:txBody>
-                  <a:tcPr anchor="ctr">
-                    <a:solidFill>
-                      <a:srgbClr val="FFFFFF"/>
-                    </a:solidFill>
-                  </a:tcPr>
-                </a:tc>
-                <a:tc>
-                  <a:txBody>
-                    <a:bodyPr/>
-                    <a:lstStyle/>
-                    <a:p>
-                      <a:pPr algn="ctr"/>
-                      <a:r>
-                        <a:rPr sz="1200" b="1">
-                          <a:solidFill>
-                            <a:srgbClr val="1A1A1A"/>
-                          </a:solidFill>
-                        </a:rPr>
-                        <a:t>27.39%</a:t>
-                      </a:r>
-                    </a:p>
-                  </a:txBody>
-                  <a:tcPr anchor="ctr">
-                    <a:solidFill>
-                      <a:srgbClr val="FFFFFF"/>
-                    </a:solidFill>
-                  </a:tcPr>
-                </a:tc>
-                <a:tc>
-                  <a:txBody>
-                    <a:bodyPr/>
-                    <a:lstStyle/>
-                    <a:p>
-                      <a:pPr algn="ctr"/>
-                      <a:r>
-                        <a:rPr sz="1200" b="0">
-                          <a:solidFill>
-                            <a:srgbClr val="1A1A1A"/>
-                          </a:solidFill>
-                        </a:rPr>
-                        <a:t>7.64%</a:t>
-                      </a:r>
-                    </a:p>
-                  </a:txBody>
-                  <a:tcPr anchor="ctr">
-                    <a:solidFill>
-                      <a:srgbClr val="FFFFFF"/>
-                    </a:solidFill>
-                  </a:tcPr>
-                </a:tc>
-                <a:tc>
-                  <a:txBody>
-                    <a:bodyPr/>
-                    <a:lstStyle/>
-                    <a:p>
-                      <a:pPr algn="ctr"/>
-                      <a:r>
-                        <a:rPr sz="1200" b="0">
-                          <a:solidFill>
-                            <a:srgbClr val="1A1A1A"/>
-                          </a:solidFill>
-                        </a:rPr>
-                        <a:t>8.28%</a:t>
-                      </a:r>
-                    </a:p>
-                  </a:txBody>
-                  <a:tcPr anchor="ctr">
-                    <a:solidFill>
-                      <a:srgbClr val="FFFFFF"/>
-                    </a:solidFill>
-                  </a:tcPr>
-                </a:tc>
-                <a:extLst>
-                  <a:ext uri="{0D108BD9-81ED-4DB2-BD59-A6C34878D82A}">
-                    <a16:rowId xmlns:a16="http://schemas.microsoft.com/office/drawing/2014/main" val="10001"/>
-                  </a:ext>
-                </a:extLst>
-              </a:tr>
-              <a:tr h="560000">
-                <a:tc>
-                  <a:txBody>
-                    <a:bodyPr/>
-                    <a:lstStyle/>
-                    <a:p>
-                      <a:pPr algn="ctr"/>
-                      <a:r>
-                        <a:rPr sz="1200" b="0">
-                          <a:solidFill>
-                            <a:srgbClr val="1A1A1A"/>
-                          </a:solidFill>
-                        </a:rPr>
-                        <a:t>Bangladesh</a:t>
-                      </a:r>
-                    </a:p>
-                  </a:txBody>
-                  <a:tcPr anchor="ctr">
-                    <a:solidFill>
-                      <a:srgbClr val="EEF3FC"/>
-                    </a:solidFill>
-                  </a:tcPr>
-                </a:tc>
-                <a:tc>
-                  <a:txBody>
-                    <a:bodyPr/>
-                    <a:lstStyle/>
-                    <a:p>
-                      <a:pPr algn="ctr"/>
-                      <a:r>
-                        <a:rPr sz="1200" b="0">
-                          <a:solidFill>
-                            <a:srgbClr val="1A1A1A"/>
-                          </a:solidFill>
-                        </a:rPr>
-                        <a:t>6/10</a:t>
-                      </a:r>
-                    </a:p>
-                  </a:txBody>
-                  <a:tcPr anchor="ctr">
-                    <a:solidFill>
-                      <a:srgbClr val="EEF3FC"/>
-                    </a:solidFill>
-                  </a:tcPr>
-                </a:tc>
-                <a:tc>
-                  <a:txBody>
-                    <a:bodyPr/>
-                    <a:lstStyle/>
-                    <a:p>
-                      <a:pPr algn="ctr"/>
-                      <a:r>
-                        <a:rPr sz="1200" b="1">
-                          <a:solidFill>
-                            <a:srgbClr val="1A1A1A"/>
-                          </a:solidFill>
-                        </a:rPr>
-                        <a:t>21.80%</a:t>
-                      </a:r>
-                    </a:p>
-                  </a:txBody>
-                  <a:tcPr anchor="ctr">
-                    <a:solidFill>
-                      <a:srgbClr val="EEF3FC"/>
-                    </a:solidFill>
-                  </a:tcPr>
-                </a:tc>
-                <a:tc>
-                  <a:txBody>
-                    <a:bodyPr/>
-                    <a:lstStyle/>
-                    <a:p>
-                      <a:pPr algn="ctr"/>
-                      <a:r>
-                        <a:rPr sz="1200" b="0">
-                          <a:solidFill>
-                            <a:srgbClr val="1A1A1A"/>
-                          </a:solidFill>
-                        </a:rPr>
-                        <a:t>10.17%</a:t>
-                      </a:r>
-                    </a:p>
-                  </a:txBody>
-                  <a:tcPr anchor="ctr">
-                    <a:solidFill>
-                      <a:srgbClr val="EEF3FC"/>
-                    </a:solidFill>
-                  </a:tcPr>
-                </a:tc>
-                <a:tc>
-                  <a:txBody>
-                    <a:bodyPr/>
-                    <a:lstStyle/>
-                    <a:p>
-                      <a:pPr algn="ctr"/>
-                      <a:r>
-                        <a:rPr sz="1200" b="0">
-                          <a:solidFill>
-                            <a:srgbClr val="1A1A1A"/>
-                          </a:solidFill>
-                        </a:rPr>
-                        <a:t>8.63%</a:t>
-                      </a:r>
-                    </a:p>
-                  </a:txBody>
-                  <a:tcPr anchor="ctr">
-                    <a:solidFill>
-                      <a:srgbClr val="EEF3FC"/>
-                    </a:solidFill>
-                  </a:tcPr>
-                </a:tc>
-                <a:extLst>
-                  <a:ext uri="{0D108BD9-81ED-4DB2-BD59-A6C34878D82A}">
-                    <a16:rowId xmlns:a16="http://schemas.microsoft.com/office/drawing/2014/main" val="10002"/>
-                  </a:ext>
-                </a:extLst>
-              </a:tr>
-              <a:tr h="560000">
-                <a:tc>
-                  <a:txBody>
-                    <a:bodyPr/>
-                    <a:lstStyle/>
-                    <a:p>
-                      <a:pPr algn="ctr"/>
-                      <a:r>
-                        <a:rPr sz="1200" b="0">
-                          <a:solidFill>
-                            <a:srgbClr val="1A1A1A"/>
-                          </a:solidFill>
-                        </a:rPr>
-                        <a:t>PlantDoc</a:t>
-                      </a:r>
-                    </a:p>
-                  </a:txBody>
-                  <a:tcPr anchor="ctr">
-                    <a:solidFill>
-                      <a:srgbClr val="FFFFFF"/>
-                    </a:solidFill>
-                  </a:tcPr>
-                </a:tc>
-                <a:tc>
-                  <a:txBody>
-                    <a:bodyPr/>
-                    <a:lstStyle/>
-                    <a:p>
-                      <a:pPr algn="ctr"/>
-                      <a:r>
-                        <a:rPr sz="1200" b="0">
-                          <a:solidFill>
-                            <a:srgbClr val="1A1A1A"/>
-                          </a:solidFill>
-                        </a:rPr>
-                        <a:t>8/10</a:t>
-                      </a:r>
-                    </a:p>
-                  </a:txBody>
-                  <a:tcPr anchor="ctr">
-                    <a:solidFill>
-                      <a:srgbClr val="FFFFFF"/>
-                    </a:solidFill>
-                  </a:tcPr>
-                </a:tc>
-                <a:tc>
-                  <a:txBody>
-                    <a:bodyPr/>
-                    <a:lstStyle/>
-                    <a:p>
-                      <a:pPr algn="ctr"/>
-                      <a:r>
-                        <a:rPr sz="1200" b="1">
-                          <a:solidFill>
-                            <a:srgbClr val="1A1A1A"/>
-                          </a:solidFill>
-                        </a:rPr>
-                        <a:t>19.89%</a:t>
-                      </a:r>
-                    </a:p>
-                  </a:txBody>
-                  <a:tcPr anchor="ctr">
-                    <a:solidFill>
-                      <a:srgbClr val="FFFFFF"/>
-                    </a:solidFill>
-                  </a:tcPr>
-                </a:tc>
-                <a:tc>
-                  <a:txBody>
-                    <a:bodyPr/>
-                    <a:lstStyle/>
-                    <a:p>
-                      <a:pPr algn="ctr"/>
-                      <a:r>
-                        <a:rPr sz="1200" b="0">
-                          <a:solidFill>
-                            <a:srgbClr val="1A1A1A"/>
-                          </a:solidFill>
-                        </a:rPr>
-                        <a:t>13.12%</a:t>
-                      </a:r>
-                    </a:p>
-                  </a:txBody>
-                  <a:tcPr anchor="ctr">
-                    <a:solidFill>
-                      <a:srgbClr val="FFFFFF"/>
-                    </a:solidFill>
-                  </a:tcPr>
-                </a:tc>
-                <a:tc>
-                  <a:txBody>
-                    <a:bodyPr/>
-                    <a:lstStyle/>
-                    <a:p>
-                      <a:pPr algn="ctr"/>
-                      <a:r>
-                        <a:rPr sz="1200" b="0">
-                          <a:solidFill>
-                            <a:srgbClr val="1A1A1A"/>
-                          </a:solidFill>
-                        </a:rPr>
-                        <a:t>11.14%</a:t>
-                      </a:r>
-                    </a:p>
-                  </a:txBody>
-                  <a:tcPr anchor="ctr">
-                    <a:solidFill>
-                      <a:srgbClr val="FFFFFF"/>
-                    </a:solidFill>
-                  </a:tcPr>
-                </a:tc>
-                <a:extLst>
-                  <a:ext uri="{0D108BD9-81ED-4DB2-BD59-A6C34878D82A}">
-                    <a16:rowId xmlns:a16="http://schemas.microsoft.com/office/drawing/2014/main" val="10003"/>
-                  </a:ext>
-                </a:extLst>
-              </a:tr>
-            </a:tbl>
-          </a:graphicData>
-        </a:graphic>
-      </p:graphicFrame>
-      <p:pic>
-        <p:nvPicPr>
-          <p:cNvPr id="10" name="Picture" descr="Negative transfer evidence chart"/>
-          <p:cNvPicPr>
-            <a:picLocks noChangeAspect="1"/>
-          </p:cNvPicPr>
-          <p:nvPr/>
-        </p:nvPicPr>
-        <p:blipFill>
-          <a:blip r:embed="rId2"/>
-          <a:stretch>
-            <a:fillRect/>
-          </a:stretch>
-        </p:blipFill>
-        <p:spPr>
-          <a:xfrm>
-            <a:off x="7500000" y="2250000"/>
-            <a:ext cx="4100000" cy="2221000"/>
-          </a:xfrm>
-          <a:prstGeom prst="rect">
-            <a:avLst/>
-          </a:prstGeom>
-        </p:spPr>
-      </p:pic>
-      <p:sp>
-        <p:nvSpPr>
-          <p:cNvPr id="6" name="TextBox 4"/>
-          <p:cNvSpPr txBox="1"/>
-          <p:nvPr/>
-        </p:nvSpPr>
-        <p:spPr>
-          <a:xfrm>
-            <a:off x="548640" y="4650000"/>
-            <a:ext cx="11091672" cy="1500000"/>
-          </a:xfrm>
-          <a:prstGeom prst="rect">
-            <a:avLst/>
-          </a:prstGeom>
-          <a:noFill/>
-        </p:spPr>
-        <p:txBody>
-          <a:bodyPr wrap="square" lIns="0" tIns="0" rIns="0" bIns="0" anchor="t">
-            <a:spAutoFit/>
-          </a:bodyPr>
-          <a:lstStyle/>
-          <a:p>
-            <a:pPr algn="l"/>
-            <a:r>
-              <a:rPr sz="1300" b="0" i="1">
-                <a:solidFill>
-                  <a:srgbClr val="5B5E6B"/>
-                </a:solidFill>
-                <a:latin typeface="Calibri"/>
-              </a:rPr>
-              <a:t>예측이 target에 없는 클래스로 쏠렸다 — partial label-space mismatch로 인한 negative transfer다(PADA/ETN 이론). 클래스 겹침이 적을수록(Taiwan 3/10) 저하가 더 컸다.</a:t>
-            </a:r>
-          </a:p>
-        </p:txBody>
-      </p:sp>
-      <p:sp>
-        <p:nvSpPr>
-          <p:cNvPr id="8" name="TextBox 5"/>
-          <p:cNvSpPr txBox="1"/>
-          <p:nvPr/>
-        </p:nvSpPr>
-        <p:spPr>
-          <a:xfrm>
-            <a:off x="11430000" y="6446520"/>
-            <a:ext cx="548640" cy="274320"/>
-          </a:xfrm>
-          <a:prstGeom prst="rect">
-            <a:avLst/>
-          </a:prstGeom>
-          <a:noFill/>
-        </p:spPr>
-        <p:txBody>
-          <a:bodyPr wrap="square" lIns="0" tIns="0" rIns="0" bIns="0" anchor="t">
-            <a:spAutoFit/>
-          </a:bodyPr>
-          <a:lstStyle/>
-          <a:p>
-            <a:pPr algn="r"/>
-            <a:r>
-              <a:rPr sz="1000" b="0" i="0">
-                <a:solidFill>
-                  <a:srgbClr val="5B5E6B"/>
-                </a:solidFill>
-                <a:latin typeface="Calibri"/>
-              </a:rPr>
-              <a:t>23</a:t>
-            </a:r>
-          </a:p>
-        </p:txBody>
-      </p:sp>
-    </p:spTree>
-  </p:cSld>
-  <p:clrMapOvr>
-    <a:masterClrMapping/>
-  </p:clrMapOvr>
-</p:sld>
-</file>
-
-<file path=ppt/slides/slide25.xml><?xml version="1.0" encoding="utf-8"?>
-<p:sld xmlns:a="http://schemas.openxmlformats.org/drawingml/2006/main" xmlns:r="http://schemas.openxmlformats.org/officeDocument/2006/relationships" xmlns:p="http://schemas.openxmlformats.org/presentationml/2006/main">
-  <p:cSld>
-    <p:bg>
-      <p:bgPr>
-        <a:solidFill>
-          <a:srgbClr val="FFFFFF"/>
-        </a:solidFill>
-        <a:effectLst/>
-      </p:bgPr>
-    </p:bg>
-    <p:spTree>
-      <p:nvGrpSpPr>
-        <p:cNvPr id="1" name=""/>
-        <p:cNvGrpSpPr/>
-        <p:nvPr/>
-      </p:nvGrpSpPr>
-      <p:grpSpPr>
-        <a:xfrm>
-          <a:off x="0" y="0"/>
-          <a:ext cx="0" cy="0"/>
-          <a:chOff x="0" y="0"/>
-          <a:chExt cx="0" cy="0"/>
-        </a:xfrm>
-      </p:grpSpPr>
-      <p:sp>
-        <p:nvSpPr>
-          <p:cNvPr id="2" name="TextBox 1"/>
-          <p:cNvSpPr txBox="1"/>
-          <p:nvPr/>
-        </p:nvSpPr>
-        <p:spPr>
-          <a:xfrm>
-            <a:off x="548640" y="292608"/>
-            <a:ext cx="9144000" cy="292608"/>
-          </a:xfrm>
-          <a:prstGeom prst="rect">
-            <a:avLst/>
-          </a:prstGeom>
-          <a:noFill/>
-        </p:spPr>
-        <p:txBody>
-          <a:bodyPr wrap="square" lIns="0" tIns="0" rIns="0" bIns="0" anchor="t">
-            <a:spAutoFit/>
-          </a:bodyPr>
-          <a:lstStyle/>
-          <a:p>
-            <a:pPr algn="l"/>
-            <a:r>
-              <a:rPr sz="1050" b="1" i="0">
-                <a:solidFill>
-                  <a:srgbClr val="2A78D6"/>
-                </a:solidFill>
-                <a:latin typeface="Calibri"/>
-              </a:rPr>
-              <a:t>RESULT 7 · DOMAIN ADAPTATION (2/12)</a:t>
-            </a:r>
-          </a:p>
-        </p:txBody>
-      </p:sp>
-      <p:sp>
-        <p:nvSpPr>
-          <p:cNvPr id="3" name="TextBox 2"/>
-          <p:cNvSpPr txBox="1"/>
-          <p:nvPr/>
-        </p:nvSpPr>
-        <p:spPr>
-          <a:xfrm>
-            <a:off x="548640" y="566928"/>
-            <a:ext cx="10972800" cy="548640"/>
-          </a:xfrm>
-          <a:prstGeom prst="rect">
-            <a:avLst/>
-          </a:prstGeom>
-          <a:noFill/>
-        </p:spPr>
-        <p:txBody>
-          <a:bodyPr wrap="square" lIns="0" tIns="0" rIns="0" bIns="0" anchor="t">
-            <a:spAutoFit/>
-          </a:bodyPr>
-          <a:lstStyle/>
-          <a:p>
-            <a:pPr algn="l"/>
-            <a:r>
-              <a:rPr sz="2400" b="1" i="0">
-                <a:solidFill>
-                  <a:srgbClr val="1E2761"/>
-                </a:solidFill>
-                <a:latin typeface="Cambria"/>
-              </a:rPr>
-              <a:t>해결책: Class-restriction 마스킹</a:t>
-            </a:r>
-          </a:p>
-        </p:txBody>
-      </p:sp>
-      <p:sp>
-        <p:nvSpPr>
-          <p:cNvPr id="4" name="TextBox 3"/>
-          <p:cNvSpPr txBox="1"/>
-          <p:nvPr/>
-        </p:nvSpPr>
-        <p:spPr>
-          <a:xfrm>
-            <a:off x="548640" y="1200000"/>
-            <a:ext cx="11091672" cy="900000"/>
-          </a:xfrm>
-          <a:prstGeom prst="rect">
-            <a:avLst/>
-          </a:prstGeom>
-          <a:noFill/>
-        </p:spPr>
-        <p:txBody>
-          <a:bodyPr wrap="square" lIns="0" tIns="0" rIns="0" bIns="0" anchor="t">
-            <a:spAutoFit/>
-          </a:bodyPr>
-          <a:lstStyle/>
-          <a:p>
-            <a:pPr algn="l"/>
-            <a:r>
-              <a:rPr sz="1300" b="0" i="0">
-                <a:solidFill>
-                  <a:srgbClr val="1A1A1A"/>
-                </a:solidFill>
-                <a:latin typeface="Calibri"/>
-              </a:rPr>
-              <a:t>class_info.py의 사전 클래스 매핑으로 target에 없는 클래스의 로짓을 -inf 처리한다(추가 학습 없음, zero-cost). 모든 데이터셋에서 마스킹만으로도 source-only보다 개선됐다.</a:t>
-            </a:r>
-          </a:p>
-        </p:txBody>
-      </p:sp>
-      <p:graphicFrame>
-        <p:nvGraphicFramePr>
-          <p:cNvPr id="7" name="Table"/>
-          <p:cNvGraphicFramePr>
-            <a:graphicFrameLocks noGrp="1"/>
-          </p:cNvGraphicFramePr>
-          <p:nvPr/>
-        </p:nvGraphicFramePr>
-        <p:xfrm>
-          <a:off x="548640" y="2150000"/>
-          <a:ext cx="8500000" cy="2480000"/>
-        </p:xfrm>
-        <a:graphic>
-          <a:graphicData uri="http://schemas.openxmlformats.org/drawingml/2006/table">
-            <a:tbl>
-              <a:tblPr firstRow="1" bandRow="1">
-                <a:tableStyleId>{5C22544A-7EE6-4342-B048-85BDC9FD1C3A}</a:tableStyleId>
-              </a:tblPr>
-              <a:tblGrid>
-                <a:gridCol w="1800000">
-                  <a:extLst>
-                    <a:ext uri="{9D8B030D-6E8A-4147-A177-3AD203B41FA5}">
-                      <a16:colId xmlns:a16="http://schemas.microsoft.com/office/drawing/2014/main" val="20000"/>
-                    </a:ext>
-                  </a:extLst>
-                </a:gridCol>
-                <a:gridCol w="2100000">
-                  <a:extLst>
-                    <a:ext uri="{9D8B030D-6E8A-4147-A177-3AD203B41FA5}">
-                      <a16:colId xmlns:a16="http://schemas.microsoft.com/office/drawing/2014/main" val="20001"/>
-                    </a:ext>
-                  </a:extLst>
-                </a:gridCol>
-                <a:gridCol w="2100000">
-                  <a:extLst>
-                    <a:ext uri="{9D8B030D-6E8A-4147-A177-3AD203B41FA5}">
-                      <a16:colId xmlns:a16="http://schemas.microsoft.com/office/drawing/2014/main" val="20002"/>
-                    </a:ext>
-                  </a:extLst>
-                </a:gridCol>
-                <a:gridCol w="2500000">
-                  <a:extLst>
-                    <a:ext uri="{9D8B030D-6E8A-4147-A177-3AD203B41FA5}">
-                      <a16:colId xmlns:a16="http://schemas.microsoft.com/office/drawing/2014/main" val="20003"/>
-                    </a:ext>
-                  </a:extLst>
-                </a:gridCol>
-              </a:tblGrid>
-              <a:tr h="620000">
-                <a:tc>
-                  <a:txBody>
-                    <a:bodyPr/>
-                    <a:lstStyle/>
-                    <a:p>
-                      <a:pPr algn="ctr"/>
-                      <a:r>
-                        <a:rPr sz="1200" b="1">
-                          <a:solidFill>
-                            <a:srgbClr val="FFFFFF"/>
-                          </a:solidFill>
-                        </a:rPr>
-                        <a:t>데이터셋</a:t>
-                      </a:r>
-                    </a:p>
-                  </a:txBody>
-                  <a:tcPr anchor="ctr">
-                    <a:solidFill>
-                      <a:srgbClr val="1E2761"/>
-                    </a:solidFill>
-                  </a:tcPr>
-                </a:tc>
-                <a:tc>
-                  <a:txBody>
-                    <a:bodyPr/>
-                    <a:lstStyle/>
-                    <a:p>
-                      <a:pPr algn="ctr"/>
-                      <a:r>
-                        <a:rPr sz="1200" b="1">
-                          <a:solidFill>
-                            <a:srgbClr val="FFFFFF"/>
-                          </a:solidFill>
-                        </a:rPr>
-                        <a:t>Source-only</a:t>
-                      </a:r>
-                    </a:p>
-                  </a:txBody>
-                  <a:tcPr anchor="ctr">
-                    <a:solidFill>
-                      <a:srgbClr val="1E2761"/>
-                    </a:solidFill>
-                  </a:tcPr>
-                </a:tc>
-                <a:tc>
-                  <a:txBody>
-                    <a:bodyPr/>
-                    <a:lstStyle/>
-                    <a:p>
-                      <a:pPr algn="ctr"/>
-                      <a:r>
-                        <a:rPr sz="1200" b="1">
-                          <a:solidFill>
-                            <a:srgbClr val="FFFFFF"/>
-                          </a:solidFill>
-                        </a:rPr>
-                        <a:t>+마스킹만</a:t>
-                      </a:r>
-                    </a:p>
-                  </a:txBody>
-                  <a:tcPr anchor="ctr">
-                    <a:solidFill>
-                      <a:srgbClr val="1E2761"/>
-                    </a:solidFill>
-                  </a:tcPr>
-                </a:tc>
-                <a:tc>
-                  <a:txBody>
-                    <a:bodyPr/>
-                    <a:lstStyle/>
-                    <a:p>
-                      <a:pPr algn="ctr"/>
-                      <a:r>
-                        <a:rPr sz="1200" b="1">
-                          <a:solidFill>
-                            <a:srgbClr val="FFFFFF"/>
-                          </a:solidFill>
-                        </a:rPr>
-                        <a:t>AdaBN+마스킹</a:t>
-                      </a:r>
-                    </a:p>
-                  </a:txBody>
-                  <a:tcPr anchor="ctr">
-                    <a:solidFill>
-                      <a:srgbClr val="1E2761"/>
-                    </a:solidFill>
-                  </a:tcPr>
-                </a:tc>
-                <a:extLst>
-                  <a:ext uri="{0D108BD9-81ED-4DB2-BD59-A6C34878D82A}">
-                    <a16:rowId xmlns:a16="http://schemas.microsoft.com/office/drawing/2014/main" val="10000"/>
-                  </a:ext>
-                </a:extLst>
-              </a:tr>
-              <a:tr h="620000">
-                <a:tc>
-                  <a:txBody>
-                    <a:bodyPr/>
-                    <a:lstStyle/>
-                    <a:p>
-                      <a:pPr algn="ctr"/>
-                      <a:r>
-                        <a:rPr sz="1200" b="0">
-                          <a:solidFill>
-                            <a:srgbClr val="1A1A1A"/>
-                          </a:solidFill>
-                        </a:rPr>
-                        <a:t>Taiwan</a:t>
-                      </a:r>
-                    </a:p>
-                  </a:txBody>
-                  <a:tcPr anchor="ctr">
-                    <a:solidFill>
-                      <a:srgbClr val="FFFFFF"/>
-                    </a:solidFill>
-                  </a:tcPr>
-                </a:tc>
-                <a:tc>
-                  <a:txBody>
-                    <a:bodyPr/>
-                    <a:lstStyle/>
-                    <a:p>
-                      <a:pPr algn="ctr"/>
-                      <a:r>
-                        <a:rPr sz="1200" b="0">
-                          <a:solidFill>
-                            <a:srgbClr val="1A1A1A"/>
-                          </a:solidFill>
-                        </a:rPr>
-                        <a:t>27.39%</a:t>
-                      </a:r>
-                    </a:p>
-                  </a:txBody>
-                  <a:tcPr anchor="ctr">
-                    <a:solidFill>
-                      <a:srgbClr val="FFFFFF"/>
-                    </a:solidFill>
-                  </a:tcPr>
-                </a:tc>
-                <a:tc>
-                  <a:txBody>
-                    <a:bodyPr/>
-                    <a:lstStyle/>
-                    <a:p>
-                      <a:pPr algn="ctr"/>
-                      <a:r>
-                        <a:rPr sz="1200" b="0">
-                          <a:solidFill>
-                            <a:srgbClr val="1A1A1A"/>
-                          </a:solidFill>
-                        </a:rPr>
-                        <a:t>32.48%</a:t>
-                      </a:r>
-                    </a:p>
-                  </a:txBody>
-                  <a:tcPr anchor="ctr">
-                    <a:solidFill>
-                      <a:srgbClr val="FFFFFF"/>
-                    </a:solidFill>
-                  </a:tcPr>
-                </a:tc>
-                <a:tc>
-                  <a:txBody>
-                    <a:bodyPr/>
-                    <a:lstStyle/>
-                    <a:p>
-                      <a:pPr algn="ctr"/>
-                      <a:r>
-                        <a:rPr sz="1200" b="1">
-                          <a:solidFill>
-                            <a:srgbClr val="1A1A1A"/>
-                          </a:solidFill>
-                        </a:rPr>
-                        <a:t>38.85%</a:t>
-                      </a:r>
-                    </a:p>
-                  </a:txBody>
-                  <a:tcPr anchor="ctr">
-                    <a:solidFill>
-                      <a:srgbClr val="FFFFFF"/>
-                    </a:solidFill>
-                  </a:tcPr>
-                </a:tc>
-                <a:extLst>
-                  <a:ext uri="{0D108BD9-81ED-4DB2-BD59-A6C34878D82A}">
-                    <a16:rowId xmlns:a16="http://schemas.microsoft.com/office/drawing/2014/main" val="10001"/>
-                  </a:ext>
-                </a:extLst>
-              </a:tr>
-              <a:tr h="620000">
-                <a:tc>
-                  <a:txBody>
-                    <a:bodyPr/>
-                    <a:lstStyle/>
-                    <a:p>
-                      <a:pPr algn="ctr"/>
-                      <a:r>
-                        <a:rPr sz="1200" b="0">
-                          <a:solidFill>
-                            <a:srgbClr val="1A1A1A"/>
-                          </a:solidFill>
-                        </a:rPr>
-                        <a:t>Bangladesh</a:t>
-                      </a:r>
-                    </a:p>
-                  </a:txBody>
-                  <a:tcPr anchor="ctr">
-                    <a:solidFill>
-                      <a:srgbClr val="EEF3FC"/>
-                    </a:solidFill>
-                  </a:tcPr>
-                </a:tc>
-                <a:tc>
-                  <a:txBody>
-                    <a:bodyPr/>
-                    <a:lstStyle/>
-                    <a:p>
-                      <a:pPr algn="ctr"/>
-                      <a:r>
-                        <a:rPr sz="1200" b="0">
-                          <a:solidFill>
-                            <a:srgbClr val="1A1A1A"/>
-                          </a:solidFill>
-                        </a:rPr>
-                        <a:t>21.80%</a:t>
-                      </a:r>
-                    </a:p>
-                  </a:txBody>
-                  <a:tcPr anchor="ctr">
-                    <a:solidFill>
-                      <a:srgbClr val="EEF3FC"/>
-                    </a:solidFill>
-                  </a:tcPr>
-                </a:tc>
-                <a:tc>
-                  <a:txBody>
-                    <a:bodyPr/>
-                    <a:lstStyle/>
-                    <a:p>
-                      <a:pPr algn="ctr"/>
-                      <a:r>
-                        <a:rPr sz="1200" b="1">
-                          <a:solidFill>
-                            <a:srgbClr val="1A1A1A"/>
-                          </a:solidFill>
-                        </a:rPr>
-                        <a:t>22.34%</a:t>
-                      </a:r>
-                    </a:p>
-                  </a:txBody>
-                  <a:tcPr anchor="ctr">
-                    <a:solidFill>
-                      <a:srgbClr val="EEF3FC"/>
-                    </a:solidFill>
-                  </a:tcPr>
-                </a:tc>
-                <a:tc>
-                  <a:txBody>
-                    <a:bodyPr/>
-                    <a:lstStyle/>
-                    <a:p>
-                      <a:pPr algn="ctr"/>
-                      <a:r>
-                        <a:rPr sz="1200" b="0">
-                          <a:solidFill>
-                            <a:srgbClr val="1A1A1A"/>
-                          </a:solidFill>
-                        </a:rPr>
-                        <a:t>15.71%</a:t>
-                      </a:r>
-                    </a:p>
-                  </a:txBody>
-                  <a:tcPr anchor="ctr">
-                    <a:solidFill>
-                      <a:srgbClr val="EEF3FC"/>
-                    </a:solidFill>
-                  </a:tcPr>
-                </a:tc>
-                <a:extLst>
-                  <a:ext uri="{0D108BD9-81ED-4DB2-BD59-A6C34878D82A}">
-                    <a16:rowId xmlns:a16="http://schemas.microsoft.com/office/drawing/2014/main" val="10002"/>
-                  </a:ext>
-                </a:extLst>
-              </a:tr>
-              <a:tr h="620000">
-                <a:tc>
-                  <a:txBody>
-                    <a:bodyPr/>
-                    <a:lstStyle/>
-                    <a:p>
-                      <a:pPr algn="ctr"/>
-                      <a:r>
-                        <a:rPr sz="1200" b="0">
-                          <a:solidFill>
-                            <a:srgbClr val="1A1A1A"/>
-                          </a:solidFill>
-                        </a:rPr>
-                        <a:t>PlantDoc</a:t>
-                      </a:r>
-                    </a:p>
-                  </a:txBody>
-                  <a:tcPr anchor="ctr">
-                    <a:solidFill>
-                      <a:srgbClr val="FFFFFF"/>
-                    </a:solidFill>
-                  </a:tcPr>
-                </a:tc>
-                <a:tc>
-                  <a:txBody>
-                    <a:bodyPr/>
-                    <a:lstStyle/>
-                    <a:p>
-                      <a:pPr algn="ctr"/>
-                      <a:r>
-                        <a:rPr sz="1200" b="0">
-                          <a:solidFill>
-                            <a:srgbClr val="1A1A1A"/>
-                          </a:solidFill>
-                        </a:rPr>
-                        <a:t>19.89%</a:t>
-                      </a:r>
-                    </a:p>
-                  </a:txBody>
-                  <a:tcPr anchor="ctr">
-                    <a:solidFill>
-                      <a:srgbClr val="FFFFFF"/>
-                    </a:solidFill>
-                  </a:tcPr>
-                </a:tc>
-                <a:tc>
-                  <a:txBody>
-                    <a:bodyPr/>
-                    <a:lstStyle/>
-                    <a:p>
-                      <a:pPr algn="ctr"/>
-                      <a:r>
-                        <a:rPr sz="1200" b="1">
-                          <a:solidFill>
-                            <a:srgbClr val="1A1A1A"/>
-                          </a:solidFill>
-                        </a:rPr>
-                        <a:t>20.31%</a:t>
-                      </a:r>
-                    </a:p>
-                  </a:txBody>
-                  <a:tcPr anchor="ctr">
-                    <a:solidFill>
-                      <a:srgbClr val="FFFFFF"/>
-                    </a:solidFill>
-                  </a:tcPr>
-                </a:tc>
-                <a:tc>
-                  <a:txBody>
-                    <a:bodyPr/>
-                    <a:lstStyle/>
-                    <a:p>
-                      <a:pPr algn="ctr"/>
-                      <a:r>
-                        <a:rPr sz="1200" b="0">
-                          <a:solidFill>
-                            <a:srgbClr val="1A1A1A"/>
-                          </a:solidFill>
-                        </a:rPr>
-                        <a:t>14.81%</a:t>
-                      </a:r>
-                    </a:p>
-                  </a:txBody>
-                  <a:tcPr anchor="ctr">
-                    <a:solidFill>
-                      <a:srgbClr val="FFFFFF"/>
-                    </a:solidFill>
-                  </a:tcPr>
-                </a:tc>
-                <a:extLst>
-                  <a:ext uri="{0D108BD9-81ED-4DB2-BD59-A6C34878D82A}">
-                    <a16:rowId xmlns:a16="http://schemas.microsoft.com/office/drawing/2014/main" val="10003"/>
-                  </a:ext>
-                </a:extLst>
-              </a:tr>
-            </a:tbl>
-          </a:graphicData>
-        </a:graphic>
-      </p:graphicFrame>
-      <p:sp>
-        <p:nvSpPr>
-          <p:cNvPr id="6" name="TextBox 4"/>
-          <p:cNvSpPr txBox="1"/>
-          <p:nvPr/>
-        </p:nvSpPr>
-        <p:spPr>
-          <a:xfrm>
-            <a:off x="548640" y="4800000"/>
-            <a:ext cx="11091672" cy="1500000"/>
-          </a:xfrm>
-          <a:prstGeom prst="rect">
-            <a:avLst/>
-          </a:prstGeom>
-          <a:noFill/>
-        </p:spPr>
-        <p:txBody>
-          <a:bodyPr wrap="square" lIns="0" tIns="0" rIns="0" bIns="0" anchor="t">
-            <a:spAutoFit/>
-          </a:bodyPr>
-          <a:lstStyle/>
-          <a:p>
-            <a:pPr algn="l"/>
-            <a:r>
-              <a:rPr sz="1300" b="0" i="1">
-                <a:solidFill>
-                  <a:srgbClr val="5B5E6B"/>
-                </a:solidFill>
-                <a:latin typeface="Calibri"/>
-              </a:rPr>
-              <a:t>TENT는 마스킹을 적응 과정에도 반영했지만(mask-aware) 한 클래스로만 100% 예측하는 collapse가 났다. Diversity 정규화로 고쳐도 마스킹만 한 것보다 전부 나빠 최종안에서 제외했다. AdaBN도 momentum 블렌딩으로 약하게 섞어봤지만 Bangladesh·PlantDoc은 개선하지 못했다.</a:t>
-            </a:r>
-          </a:p>
-        </p:txBody>
-      </p:sp>
-      <p:sp>
-        <p:nvSpPr>
-          <p:cNvPr id="8" name="TextBox 5"/>
-          <p:cNvSpPr txBox="1"/>
-          <p:nvPr/>
-        </p:nvSpPr>
-        <p:spPr>
-          <a:xfrm>
-            <a:off x="11430000" y="6446520"/>
-            <a:ext cx="548640" cy="274320"/>
-          </a:xfrm>
-          <a:prstGeom prst="rect">
-            <a:avLst/>
-          </a:prstGeom>
-          <a:noFill/>
-        </p:spPr>
-        <p:txBody>
-          <a:bodyPr wrap="square" lIns="0" tIns="0" rIns="0" bIns="0" anchor="t">
-            <a:spAutoFit/>
-          </a:bodyPr>
-          <a:lstStyle/>
-          <a:p>
-            <a:pPr algn="r"/>
-            <a:r>
-              <a:rPr sz="1000" b="0" i="0">
-                <a:solidFill>
-                  <a:srgbClr val="5B5E6B"/>
-                </a:solidFill>
-                <a:latin typeface="Calibri"/>
-              </a:rPr>
-              <a:t>24</a:t>
-            </a:r>
-          </a:p>
-        </p:txBody>
-      </p:sp>
-    </p:spTree>
-  </p:cSld>
-  <p:clrMapOvr>
-    <a:masterClrMapping/>
-  </p:clrMapOvr>
-</p:sld>
-</file>
-
-<file path=ppt/slides/slide26.xml><?xml version="1.0" encoding="utf-8"?>
-<p:sld xmlns:a="http://schemas.openxmlformats.org/drawingml/2006/main" xmlns:r="http://schemas.openxmlformats.org/officeDocument/2006/relationships" xmlns:p="http://schemas.openxmlformats.org/presentationml/2006/main">
-  <p:cSld>
-    <p:bg>
-      <p:bgPr>
-        <a:solidFill>
-          <a:srgbClr val="FFFFFF"/>
-        </a:solidFill>
-        <a:effectLst/>
-      </p:bgPr>
-    </p:bg>
-    <p:spTree>
-      <p:nvGrpSpPr>
-        <p:cNvPr id="1" name=""/>
-        <p:cNvGrpSpPr/>
-        <p:nvPr/>
-      </p:nvGrpSpPr>
-      <p:grpSpPr>
-        <a:xfrm>
-          <a:off x="0" y="0"/>
-          <a:ext cx="0" cy="0"/>
-          <a:chOff x="0" y="0"/>
-          <a:chExt cx="0" cy="0"/>
-        </a:xfrm>
-      </p:grpSpPr>
-      <p:sp>
-        <p:nvSpPr>
-          <p:cNvPr id="2" name="TextBox 1"/>
-          <p:cNvSpPr txBox="1"/>
-          <p:nvPr/>
-        </p:nvSpPr>
-        <p:spPr>
-          <a:xfrm>
-            <a:off x="548640" y="292608"/>
-            <a:ext cx="9144000" cy="292608"/>
-          </a:xfrm>
-          <a:prstGeom prst="rect">
-            <a:avLst/>
-          </a:prstGeom>
-          <a:noFill/>
-        </p:spPr>
-        <p:txBody>
-          <a:bodyPr wrap="square" lIns="0" tIns="0" rIns="0" bIns="0" anchor="t">
-            <a:spAutoFit/>
-          </a:bodyPr>
-          <a:lstStyle/>
-          <a:p>
-            <a:pPr algn="l"/>
-            <a:r>
-              <a:rPr sz="1050" b="1" i="0">
-                <a:solidFill>
-                  <a:srgbClr val="2A78D6"/>
-                </a:solidFill>
-                <a:latin typeface="Calibri"/>
-              </a:rPr>
-              <a:t>RESULT 7 · DOMAIN ADAPTATION (4/12)</a:t>
-            </a:r>
-          </a:p>
-        </p:txBody>
-      </p:sp>
-      <p:sp>
-        <p:nvSpPr>
-          <p:cNvPr id="3" name="TextBox 2"/>
-          <p:cNvSpPr txBox="1"/>
-          <p:nvPr/>
-        </p:nvSpPr>
-        <p:spPr>
-          <a:xfrm>
-            <a:off x="548640" y="566928"/>
-            <a:ext cx="10972800" cy="548640"/>
-          </a:xfrm>
-          <a:prstGeom prst="rect">
-            <a:avLst/>
-          </a:prstGeom>
-          <a:noFill/>
-        </p:spPr>
-        <p:txBody>
-          <a:bodyPr wrap="square" lIns="0" tIns="0" rIns="0" bIns="0" anchor="t">
-            <a:spAutoFit/>
-          </a:bodyPr>
-          <a:lstStyle/>
-          <a:p>
-            <a:pPr algn="l"/>
-            <a:r>
-              <a:rPr sz="2400" b="1" i="0">
-                <a:solidFill>
-                  <a:srgbClr val="1E2761"/>
-                </a:solidFill>
-                <a:latin typeface="Cambria"/>
-              </a:rPr>
-              <a:t>최종 승자: SHOT (Pseudo-labeling + Info-max) — APS는 3-seed에서 기각</a:t>
-            </a:r>
-          </a:p>
-        </p:txBody>
-      </p:sp>
-      <p:sp>
-        <p:nvSpPr>
-          <p:cNvPr id="4" name="TextBox 3"/>
-          <p:cNvSpPr txBox="1"/>
-          <p:nvPr/>
-        </p:nvSpPr>
-        <p:spPr>
-          <a:xfrm>
-            <a:off x="548640" y="1200000"/>
-            <a:ext cx="11091672" cy="1000000"/>
-          </a:xfrm>
-          <a:prstGeom prst="rect">
-            <a:avLst/>
-          </a:prstGeom>
-          <a:noFill/>
-        </p:spPr>
-        <p:txBody>
-          <a:bodyPr wrap="square" lIns="0" tIns="0" rIns="0" bIns="0" anchor="t">
-            <a:spAutoFit/>
-          </a:bodyPr>
-          <a:lstStyle/>
-          <a:p>
-            <a:pPr algn="l"/>
-            <a:r>
-              <a:rPr sz="1300" b="0" i="0" dirty="0">
-                <a:solidFill>
-                  <a:srgbClr val="1A1A1A"/>
-                </a:solidFill>
-                <a:latin typeface="Calibri"/>
-              </a:rPr>
-              <a:t>Liang et al., ICML 2020. Source </a:t>
-            </a:r>
-            <a:r>
-              <a:rPr sz="1300" b="0" i="0" dirty="0" err="1">
-                <a:solidFill>
-                  <a:srgbClr val="1A1A1A"/>
-                </a:solidFill>
-                <a:latin typeface="Calibri"/>
-              </a:rPr>
-              <a:t>classifier는</a:t>
-            </a:r>
-            <a:r>
-              <a:rPr sz="1300" b="0" i="0" dirty="0">
-                <a:solidFill>
-                  <a:srgbClr val="1A1A1A"/>
-                </a:solidFill>
-                <a:latin typeface="Calibri"/>
-              </a:rPr>
-              <a:t> </a:t>
-            </a:r>
-            <a:r>
-              <a:rPr sz="1300" b="0" i="0" dirty="0" err="1">
-                <a:solidFill>
-                  <a:srgbClr val="1A1A1A"/>
-                </a:solidFill>
-                <a:latin typeface="Calibri"/>
-              </a:rPr>
-              <a:t>고정하고</a:t>
-            </a:r>
-            <a:r>
-              <a:rPr sz="1300" b="0" i="0" dirty="0">
-                <a:solidFill>
-                  <a:srgbClr val="1A1A1A"/>
-                </a:solidFill>
-                <a:latin typeface="Calibri"/>
-              </a:rPr>
-              <a:t> feature </a:t>
-            </a:r>
-            <a:r>
-              <a:rPr sz="1300" b="0" i="0" dirty="0" err="1">
-                <a:solidFill>
-                  <a:srgbClr val="1A1A1A"/>
-                </a:solidFill>
-                <a:latin typeface="Calibri"/>
-              </a:rPr>
-              <a:t>extractor만</a:t>
-            </a:r>
-            <a:r>
-              <a:rPr sz="1300" b="0" i="0" dirty="0">
-                <a:solidFill>
-                  <a:srgbClr val="1A1A1A"/>
-                </a:solidFill>
-                <a:latin typeface="Calibri"/>
-              </a:rPr>
-              <a:t> </a:t>
-            </a:r>
-            <a:r>
-              <a:rPr sz="1300" b="0" i="0" dirty="0" err="1">
-                <a:solidFill>
-                  <a:srgbClr val="1A1A1A"/>
-                </a:solidFill>
-                <a:latin typeface="Calibri"/>
-              </a:rPr>
-              <a:t>미세조정한다</a:t>
-            </a:r>
-            <a:r>
-              <a:rPr sz="1300" b="0" i="0" dirty="0">
-                <a:solidFill>
-                  <a:srgbClr val="1A1A1A"/>
-                </a:solidFill>
-                <a:latin typeface="Calibri"/>
-              </a:rPr>
-              <a:t>. </a:t>
-            </a:r>
-            <a:r>
-              <a:rPr sz="1300" b="0" i="0" dirty="0" err="1">
-                <a:solidFill>
-                  <a:srgbClr val="1A1A1A"/>
-                </a:solidFill>
-                <a:latin typeface="Calibri"/>
-              </a:rPr>
-              <a:t>마스킹된</a:t>
-            </a:r>
-            <a:r>
-              <a:rPr sz="1300" b="0" i="0" dirty="0">
-                <a:solidFill>
-                  <a:srgbClr val="1A1A1A"/>
-                </a:solidFill>
-                <a:latin typeface="Calibri"/>
-              </a:rPr>
-              <a:t> </a:t>
-            </a:r>
-            <a:r>
-              <a:rPr sz="1300" b="0" i="0" dirty="0" err="1">
-                <a:solidFill>
-                  <a:srgbClr val="1A1A1A"/>
-                </a:solidFill>
-                <a:latin typeface="Calibri"/>
-              </a:rPr>
-              <a:t>클래스</a:t>
-            </a:r>
-            <a:r>
-              <a:rPr sz="1300" b="0" i="0" dirty="0">
-                <a:solidFill>
-                  <a:srgbClr val="1A1A1A"/>
-                </a:solidFill>
-                <a:latin typeface="Calibri"/>
-              </a:rPr>
-              <a:t> </a:t>
-            </a:r>
-            <a:r>
-              <a:rPr sz="1300" b="0" i="0" dirty="0" err="1">
-                <a:solidFill>
-                  <a:srgbClr val="1A1A1A"/>
-                </a:solidFill>
-                <a:latin typeface="Calibri"/>
-              </a:rPr>
-              <a:t>안에서</a:t>
-            </a:r>
-            <a:r>
-              <a:rPr sz="1300" b="0" i="0" dirty="0">
-                <a:solidFill>
-                  <a:srgbClr val="1A1A1A"/>
-                </a:solidFill>
-                <a:latin typeface="Calibri"/>
-              </a:rPr>
-              <a:t> pseudo-</a:t>
-            </a:r>
-            <a:r>
-              <a:rPr sz="1300" b="0" i="0" dirty="0" err="1">
-                <a:solidFill>
-                  <a:srgbClr val="1A1A1A"/>
-                </a:solidFill>
-                <a:latin typeface="Calibri"/>
-              </a:rPr>
-              <a:t>label을</a:t>
-            </a:r>
-            <a:r>
-              <a:rPr sz="1300" b="0" i="0" dirty="0">
-                <a:solidFill>
-                  <a:srgbClr val="1A1A1A"/>
-                </a:solidFill>
-                <a:latin typeface="Calibri"/>
-              </a:rPr>
-              <a:t> </a:t>
-            </a:r>
-            <a:r>
-              <a:rPr sz="1300" b="0" i="0" dirty="0" err="1">
-                <a:solidFill>
-                  <a:srgbClr val="1A1A1A"/>
-                </a:solidFill>
-                <a:latin typeface="Calibri"/>
-              </a:rPr>
-              <a:t>할당하고</a:t>
-            </a:r>
-            <a:r>
-              <a:rPr sz="1300" b="0" i="0" dirty="0">
-                <a:solidFill>
-                  <a:srgbClr val="1A1A1A"/>
-                </a:solidFill>
-                <a:latin typeface="Calibri"/>
-              </a:rPr>
-              <a:t>, pseudo-label cross-entropy + information-</a:t>
-            </a:r>
-            <a:r>
-              <a:rPr sz="1300" b="0" i="0" dirty="0" err="1">
-                <a:solidFill>
-                  <a:srgbClr val="1A1A1A"/>
-                </a:solidFill>
-                <a:latin typeface="Calibri"/>
-              </a:rPr>
-              <a:t>maximization으로</a:t>
-            </a:r>
-            <a:r>
-              <a:rPr sz="1300" b="0" i="0" dirty="0">
-                <a:solidFill>
-                  <a:srgbClr val="1A1A1A"/>
-                </a:solidFill>
-                <a:latin typeface="Calibri"/>
-              </a:rPr>
-              <a:t> </a:t>
-            </a:r>
-            <a:r>
-              <a:rPr sz="1300" b="0" i="0" dirty="0" err="1">
-                <a:solidFill>
-                  <a:srgbClr val="1A1A1A"/>
-                </a:solidFill>
-                <a:latin typeface="Calibri"/>
-              </a:rPr>
-              <a:t>학습한다</a:t>
-            </a:r>
-            <a:r>
-              <a:rPr sz="1300" b="0" i="0" dirty="0">
-                <a:solidFill>
-                  <a:srgbClr val="1A1A1A"/>
-                </a:solidFill>
-                <a:latin typeface="Calibri"/>
-              </a:rPr>
-              <a:t>.</a:t>
-            </a:r>
-          </a:p>
-        </p:txBody>
-      </p:sp>
-      <p:graphicFrame>
-        <p:nvGraphicFramePr>
-          <p:cNvPr id="7" name="Table"/>
-          <p:cNvGraphicFramePr>
-            <a:graphicFrameLocks noGrp="1"/>
-          </p:cNvGraphicFramePr>
-          <p:nvPr/>
-        </p:nvGraphicFramePr>
-        <p:xfrm>
-          <a:off x="548640" y="2300000"/>
-          <a:ext cx="10300000" cy="2480000"/>
-        </p:xfrm>
-        <a:graphic>
-          <a:graphicData uri="http://schemas.openxmlformats.org/drawingml/2006/table">
-            <a:tbl>
-              <a:tblPr firstRow="1" bandRow="1">
-                <a:tableStyleId>{5C22544A-7EE6-4342-B048-85BDC9FD1C3A}</a:tableStyleId>
-              </a:tblPr>
-              <a:tblGrid>
-                <a:gridCol w="1700000"/>
-                <a:gridCol w="1900000"/>
-                <a:gridCol w="1900000"/>
-                <a:gridCol w="1900000"/>
-                <a:gridCol w="2900000"/>
-              </a:tblGrid>
-              <a:tr h="620000">
-                <a:tc>
-                  <a:txBody>
-                    <a:bodyPr/>
-                    <a:lstStyle/>
-                    <a:p>
-                      <a:pPr algn="ctr"/>
-                      <a:r>
-                        <a:rPr sz="1200" b="1">
-                          <a:solidFill>
-                            <a:srgbClr val="FFFFFF"/>
-                          </a:solidFill>
-                        </a:rPr>
-                        <a:t>데이터셋</a:t>
-                      </a:r>
-                    </a:p>
-                  </a:txBody>
-                  <a:tcPr anchor="ctr">
-                    <a:solidFill>
-                      <a:srgbClr val="1E2761"/>
-                    </a:solidFill>
-                  </a:tcPr>
-                </a:tc>
-                <a:tc>
-                  <a:txBody>
-                    <a:bodyPr/>
-                    <a:lstStyle/>
-                    <a:p>
-                      <a:pPr algn="ctr"/>
-                      <a:r>
-                        <a:rPr sz="1200" b="1">
-                          <a:solidFill>
-                            <a:srgbClr val="FFFFFF"/>
-                          </a:solidFill>
-                        </a:rPr>
-                        <a:t>Source+마스킹</a:t>
-                      </a:r>
-                    </a:p>
-                  </a:txBody>
-                  <a:tcPr anchor="ctr">
-                    <a:solidFill>
-                      <a:srgbClr val="1E2761"/>
-                    </a:solidFill>
-                  </a:tcPr>
-                </a:tc>
-                <a:tc>
-                  <a:txBody>
-                    <a:bodyPr/>
-                    <a:lstStyle/>
-                    <a:p>
-                      <a:pPr algn="ctr"/>
-                      <a:r>
-                        <a:rPr sz="1200" b="1">
-                          <a:solidFill>
-                            <a:srgbClr val="FFFFFF"/>
-                          </a:solidFill>
-                        </a:rPr>
-                        <a:t>AdaBN+마스킹</a:t>
-                      </a:r>
-                    </a:p>
-                  </a:txBody>
-                  <a:tcPr anchor="ctr">
-                    <a:solidFill>
-                      <a:srgbClr val="1E2761"/>
-                    </a:solidFill>
-                  </a:tcPr>
-                </a:tc>
-                <a:tc>
-                  <a:txBody>
-                    <a:bodyPr/>
-                    <a:lstStyle/>
-                    <a:p>
-                      <a:pPr algn="ctr"/>
-                      <a:r>
-                        <a:rPr sz="1200" b="1">
-                          <a:solidFill>
-                            <a:srgbClr val="FFFFFF"/>
-                          </a:solidFill>
-                        </a:rPr>
-                        <a:t>SHOT+마스킹(epoch=2, 최종)</a:t>
-                      </a:r>
-                    </a:p>
-                  </a:txBody>
-                  <a:tcPr anchor="ctr">
-                    <a:solidFill>
-                      <a:srgbClr val="1E2761"/>
-                    </a:solidFill>
-                  </a:tcPr>
-                </a:tc>
-                <a:tc>
-                  <a:txBody>
-                    <a:bodyPr/>
-                    <a:lstStyle/>
-                    <a:p>
-                      <a:pPr algn="ctr"/>
-                      <a:r>
-                        <a:rPr sz="1200" b="1">
-                          <a:solidFill>
-                            <a:srgbClr val="FFFFFF"/>
-                          </a:solidFill>
-                        </a:rPr>
-                        <a:t>SHOT+APS+마스킹</a:t>
-                      </a:r>
-                    </a:p>
-                  </a:txBody>
-                  <a:tcPr anchor="ctr">
-                    <a:solidFill>
-                      <a:srgbClr val="1E2761"/>
-                    </a:solidFill>
-                  </a:tcPr>
-                </a:tc>
-              </a:tr>
-              <a:tr h="620000">
-                <a:tc>
-                  <a:txBody>
-                    <a:bodyPr/>
-                    <a:lstStyle/>
-                    <a:p>
-                      <a:pPr algn="ctr"/>
-                      <a:r>
-                        <a:rPr sz="1200" b="0">
-                          <a:solidFill>
-                            <a:srgbClr val="1A1A1A"/>
-                          </a:solidFill>
-                        </a:rPr>
-                        <a:t>Taiwan</a:t>
-                      </a:r>
-                    </a:p>
-                  </a:txBody>
-                  <a:tcPr anchor="ctr">
-                    <a:solidFill>
-                      <a:srgbClr val="FFFFFF"/>
-                    </a:solidFill>
-                  </a:tcPr>
-                </a:tc>
-                <a:tc>
-                  <a:txBody>
-                    <a:bodyPr/>
-                    <a:lstStyle/>
-                    <a:p>
-                      <a:pPr algn="ctr"/>
-                      <a:r>
-                        <a:rPr sz="1200" b="0">
-                          <a:solidFill>
-                            <a:srgbClr val="1A1A1A"/>
-                          </a:solidFill>
-                        </a:rPr>
-                        <a:t>32.48%</a:t>
-                      </a:r>
-                    </a:p>
-                  </a:txBody>
-                  <a:tcPr anchor="ctr">
-                    <a:solidFill>
-                      <a:srgbClr val="FFFFFF"/>
-                    </a:solidFill>
-                  </a:tcPr>
-                </a:tc>
-                <a:tc>
-                  <a:txBody>
-                    <a:bodyPr/>
-                    <a:lstStyle/>
-                    <a:p>
-                      <a:pPr algn="ctr"/>
-                      <a:r>
-                        <a:rPr sz="1200" b="0">
-                          <a:solidFill>
-                            <a:srgbClr val="1A1A1A"/>
-                          </a:solidFill>
-                        </a:rPr>
-                        <a:t>38.85%</a:t>
-                      </a:r>
-                    </a:p>
-                  </a:txBody>
-                  <a:tcPr anchor="ctr">
-                    <a:solidFill>
-                      <a:srgbClr val="FFFFFF"/>
-                    </a:solidFill>
-                  </a:tcPr>
-                </a:tc>
-                <a:tc>
-                  <a:txBody>
-                    <a:bodyPr/>
-                    <a:lstStyle/>
-                    <a:p>
-                      <a:pPr algn="ctr"/>
-                      <a:r>
-                        <a:rPr sz="1200" b="1">
-                          <a:solidFill>
-                            <a:srgbClr val="1A1A1A"/>
-                          </a:solidFill>
-                        </a:rPr>
-                        <a:t>42.04%</a:t>
-                      </a:r>
-                    </a:p>
-                  </a:txBody>
-                  <a:tcPr anchor="ctr">
-                    <a:solidFill>
-                      <a:srgbClr val="FFFFFF"/>
-                    </a:solidFill>
-                  </a:tcPr>
-                </a:tc>
-                <a:tc>
-                  <a:txBody>
-                    <a:bodyPr/>
-                    <a:lstStyle/>
-                    <a:p>
-                      <a:pPr algn="ctr"/>
-                      <a:r>
-                        <a:rPr sz="1200" b="0">
-                          <a:solidFill>
-                            <a:srgbClr val="1A1A1A"/>
-                          </a:solidFill>
-                        </a:rPr>
-                        <a:t>44.59% (F1 0.426)</a:t>
-                      </a:r>
-                    </a:p>
-                  </a:txBody>
-                  <a:tcPr anchor="ctr">
-                    <a:solidFill>
-                      <a:srgbClr val="FFFFFF"/>
-                    </a:solidFill>
-                  </a:tcPr>
-                </a:tc>
-              </a:tr>
-              <a:tr h="620000">
-                <a:tc>
-                  <a:txBody>
-                    <a:bodyPr/>
-                    <a:lstStyle/>
-                    <a:p>
-                      <a:pPr algn="ctr"/>
-                      <a:r>
-                        <a:rPr sz="1200" b="0">
-                          <a:solidFill>
-                            <a:srgbClr val="1A1A1A"/>
-                          </a:solidFill>
-                        </a:rPr>
-                        <a:t>Bangladesh</a:t>
-                      </a:r>
-                    </a:p>
-                  </a:txBody>
-                  <a:tcPr anchor="ctr">
-                    <a:solidFill>
-                      <a:srgbClr val="EEF3FC"/>
-                    </a:solidFill>
-                  </a:tcPr>
-                </a:tc>
-                <a:tc>
-                  <a:txBody>
-                    <a:bodyPr/>
-                    <a:lstStyle/>
-                    <a:p>
-                      <a:pPr algn="ctr"/>
-                      <a:r>
-                        <a:rPr sz="1200" b="0">
-                          <a:solidFill>
-                            <a:srgbClr val="1A1A1A"/>
-                          </a:solidFill>
-                        </a:rPr>
-                        <a:t>22.34%</a:t>
-                      </a:r>
-                    </a:p>
-                  </a:txBody>
-                  <a:tcPr anchor="ctr">
-                    <a:solidFill>
-                      <a:srgbClr val="EEF3FC"/>
-                    </a:solidFill>
-                  </a:tcPr>
-                </a:tc>
-                <a:tc>
-                  <a:txBody>
-                    <a:bodyPr/>
-                    <a:lstStyle/>
-                    <a:p>
-                      <a:pPr algn="ctr"/>
-                      <a:r>
-                        <a:rPr sz="1200" b="0">
-                          <a:solidFill>
-                            <a:srgbClr val="1A1A1A"/>
-                          </a:solidFill>
-                        </a:rPr>
-                        <a:t>15.71%</a:t>
-                      </a:r>
-                    </a:p>
-                  </a:txBody>
-                  <a:tcPr anchor="ctr">
-                    <a:solidFill>
-                      <a:srgbClr val="EEF3FC"/>
-                    </a:solidFill>
-                  </a:tcPr>
-                </a:tc>
-                <a:tc>
-                  <a:txBody>
-                    <a:bodyPr/>
-                    <a:lstStyle/>
-                    <a:p>
-                      <a:pPr algn="ctr"/>
-                      <a:r>
-                        <a:rPr sz="1200" b="1">
-                          <a:solidFill>
-                            <a:srgbClr val="1A1A1A"/>
-                          </a:solidFill>
-                        </a:rPr>
-                        <a:t>30.79%</a:t>
-                      </a:r>
-                    </a:p>
-                  </a:txBody>
-                  <a:tcPr anchor="ctr">
-                    <a:solidFill>
-                      <a:srgbClr val="EEF3FC"/>
-                    </a:solidFill>
-                  </a:tcPr>
-                </a:tc>
-                <a:tc>
-                  <a:txBody>
-                    <a:bodyPr/>
-                    <a:lstStyle/>
-                    <a:p>
-                      <a:pPr algn="ctr"/>
-                      <a:r>
-                        <a:rPr sz="1200" b="0">
-                          <a:solidFill>
-                            <a:srgbClr val="1A1A1A"/>
-                          </a:solidFill>
-                        </a:rPr>
-                        <a:t>30.52% (거의 동일)</a:t>
-                      </a:r>
-                    </a:p>
-                  </a:txBody>
-                  <a:tcPr anchor="ctr">
-                    <a:solidFill>
-                      <a:srgbClr val="EEF3FC"/>
-                    </a:solidFill>
-                  </a:tcPr>
-                </a:tc>
-              </a:tr>
-              <a:tr h="620000">
-                <a:tc>
-                  <a:txBody>
-                    <a:bodyPr/>
-                    <a:lstStyle/>
-                    <a:p>
-                      <a:pPr algn="ctr"/>
-                      <a:r>
-                        <a:rPr sz="1200" b="0">
-                          <a:solidFill>
-                            <a:srgbClr val="1A1A1A"/>
-                          </a:solidFill>
-                        </a:rPr>
-                        <a:t>PlantDoc</a:t>
-                      </a:r>
-                    </a:p>
-                  </a:txBody>
-                  <a:tcPr anchor="ctr">
-                    <a:solidFill>
-                      <a:srgbClr val="FFFFFF"/>
-                    </a:solidFill>
-                  </a:tcPr>
-                </a:tc>
-                <a:tc>
-                  <a:txBody>
-                    <a:bodyPr/>
-                    <a:lstStyle/>
-                    <a:p>
-                      <a:pPr algn="ctr"/>
-                      <a:r>
-                        <a:rPr sz="1200" b="0">
-                          <a:solidFill>
-                            <a:srgbClr val="1A1A1A"/>
-                          </a:solidFill>
-                        </a:rPr>
-                        <a:t>20.31%</a:t>
-                      </a:r>
-                    </a:p>
-                  </a:txBody>
-                  <a:tcPr anchor="ctr">
-                    <a:solidFill>
-                      <a:srgbClr val="FFFFFF"/>
-                    </a:solidFill>
-                  </a:tcPr>
-                </a:tc>
-                <a:tc>
-                  <a:txBody>
-                    <a:bodyPr/>
-                    <a:lstStyle/>
-                    <a:p>
-                      <a:pPr algn="ctr"/>
-                      <a:r>
-                        <a:rPr sz="1200" b="0">
-                          <a:solidFill>
-                            <a:srgbClr val="1A1A1A"/>
-                          </a:solidFill>
-                        </a:rPr>
-                        <a:t>14.81%</a:t>
-                      </a:r>
-                    </a:p>
-                  </a:txBody>
-                  <a:tcPr anchor="ctr">
-                    <a:solidFill>
-                      <a:srgbClr val="FFFFFF"/>
-                    </a:solidFill>
-                  </a:tcPr>
-                </a:tc>
-                <a:tc>
-                  <a:txBody>
-                    <a:bodyPr/>
-                    <a:lstStyle/>
-                    <a:p>
-                      <a:pPr algn="ctr"/>
-                      <a:r>
-                        <a:rPr sz="1200" b="1">
-                          <a:solidFill>
-                            <a:srgbClr val="1A1A1A"/>
-                          </a:solidFill>
-                        </a:rPr>
-                        <a:t>19.46% (F1 0.182)</a:t>
-                      </a:r>
-                    </a:p>
-                  </a:txBody>
-                  <a:tcPr anchor="ctr">
-                    <a:solidFill>
-                      <a:srgbClr val="FFFFFF"/>
-                    </a:solidFill>
-                  </a:tcPr>
-                </a:tc>
-                <a:tc>
-                  <a:txBody>
-                    <a:bodyPr/>
-                    <a:lstStyle/>
-                    <a:p>
-                      <a:pPr algn="ctr"/>
-                      <a:r>
-                        <a:rPr sz="1200" b="0">
-                          <a:solidFill>
-                            <a:srgbClr val="1A1A1A"/>
-                          </a:solidFill>
-                        </a:rPr>
-                        <a:t>19.04% (F1 0.180)</a:t>
-                      </a:r>
-                    </a:p>
-                  </a:txBody>
-                  <a:tcPr anchor="ctr">
-                    <a:solidFill>
-                      <a:srgbClr val="FFFFFF"/>
-                    </a:solidFill>
-                  </a:tcPr>
-                </a:tc>
-              </a:tr>
-            </a:tbl>
-          </a:graphicData>
-        </a:graphic>
-      </p:graphicFrame>
-      <p:sp>
-        <p:nvSpPr>
-          <p:cNvPr id="6" name="TextBox 4"/>
-          <p:cNvSpPr txBox="1"/>
-          <p:nvPr/>
-        </p:nvSpPr>
-        <p:spPr>
-          <a:xfrm>
-            <a:off x="548640" y="4950000"/>
-            <a:ext cx="11091672" cy="1400000"/>
-          </a:xfrm>
-          <a:prstGeom prst="rect">
-            <a:avLst/>
-          </a:prstGeom>
-          <a:noFill/>
-        </p:spPr>
-        <p:txBody>
-          <a:bodyPr wrap="square" lIns="0" tIns="0" rIns="0" bIns="0" anchor="t">
-            <a:spAutoFit/>
-          </a:bodyPr>
-          <a:lstStyle/>
-          <a:p>
-            <a:pPr algn="l"/>
-            <a:r>
-              <a:rPr sz="1300" b="0" i="1">
-                <a:solidFill>
-                  <a:srgbClr val="5B5E6B"/>
-                </a:solidFill>
-                <a:latin typeface="Calibri"/>
-              </a:rPr>
-              <a:t>AdaBN/TENT와 달리 SHOT은 3개 데이터셋 전부에서 collapse 없이 안정적으로 잘 됐다 — 마스킹+SHOT(epoch=2)이 최종 권장 파이프라인이다. APS(신뢰도 기반 재할당)는 seed42에서만 Taiwan을 44.59%로 끌어올려 보였으나, 3-seed로 검증하니 평균은 SHOT 단독보다 오히려 낮아 noise로 판명됐다(5/11 슬라이드 참고) — 기본값에서 제외한다.</a:t>
-            </a:r>
-          </a:p>
-        </p:txBody>
-      </p:sp>
-      <p:sp>
-        <p:nvSpPr>
-          <p:cNvPr id="8" name="TextBox 5"/>
-          <p:cNvSpPr txBox="1"/>
-          <p:nvPr/>
-        </p:nvSpPr>
-        <p:spPr>
-          <a:xfrm>
-            <a:off x="11430000" y="6446520"/>
-            <a:ext cx="548640" cy="274320"/>
-          </a:xfrm>
-          <a:prstGeom prst="rect">
-            <a:avLst/>
-          </a:prstGeom>
-          <a:noFill/>
-        </p:spPr>
-        <p:txBody>
-          <a:bodyPr wrap="square" lIns="0" tIns="0" rIns="0" bIns="0" anchor="t">
-            <a:spAutoFit/>
-          </a:bodyPr>
-          <a:lstStyle/>
-          <a:p>
-            <a:pPr algn="r"/>
-            <a:r>
-              <a:rPr sz="1000" b="0" i="0">
-                <a:solidFill>
-                  <a:srgbClr val="5B5E6B"/>
-                </a:solidFill>
-                <a:latin typeface="Calibri"/>
-              </a:rPr>
-              <a:t>26</a:t>
-            </a:r>
-          </a:p>
-        </p:txBody>
-      </p:sp>
-    </p:spTree>
-  </p:cSld>
-  <p:clrMapOvr>
-    <a:masterClrMapping/>
-  </p:clrMapOvr>
-</p:sld>
-</file>
-
-<file path=ppt/slides/slide27.xml><?xml version="1.0" encoding="utf-8"?>
-<p:sld xmlns:a="http://schemas.openxmlformats.org/drawingml/2006/main" xmlns:r="http://schemas.openxmlformats.org/officeDocument/2006/relationships" xmlns:p="http://schemas.openxmlformats.org/presentationml/2006/main">
-  <p:cSld>
-    <p:bg>
-      <p:bgPr>
-        <a:solidFill>
-          <a:srgbClr val="FFFFFF"/>
-        </a:solidFill>
-        <a:effectLst/>
-      </p:bgPr>
-    </p:bg>
-    <p:spTree>
-      <p:nvGrpSpPr>
-        <p:cNvPr id="1" name=""/>
-        <p:cNvGrpSpPr/>
-        <p:nvPr/>
-      </p:nvGrpSpPr>
-      <p:grpSpPr>
-        <a:xfrm>
-          <a:off x="0" y="0"/>
-          <a:ext cx="0" cy="0"/>
-          <a:chOff x="0" y="0"/>
-          <a:chExt cx="0" cy="0"/>
-        </a:xfrm>
-      </p:grpSpPr>
-      <p:sp>
-        <p:nvSpPr>
-          <p:cNvPr id="2" name="TextBox 1"/>
-          <p:cNvSpPr txBox="1"/>
-          <p:nvPr/>
-        </p:nvSpPr>
-        <p:spPr>
-          <a:xfrm>
-            <a:off x="548640" y="292608"/>
-            <a:ext cx="9144000" cy="292608"/>
-          </a:xfrm>
-          <a:prstGeom prst="rect">
-            <a:avLst/>
-          </a:prstGeom>
-          <a:noFill/>
-        </p:spPr>
-        <p:txBody>
-          <a:bodyPr wrap="square" lIns="0" tIns="0" rIns="0" bIns="0" anchor="t">
-            <a:spAutoFit/>
-          </a:bodyPr>
-          <a:lstStyle/>
-          <a:p>
-            <a:pPr algn="l"/>
-            <a:r>
-              <a:rPr sz="1050" b="1" i="0">
-                <a:solidFill>
-                  <a:srgbClr val="2A78D6"/>
-                </a:solidFill>
-                <a:latin typeface="Calibri"/>
-              </a:rPr>
-              <a:t>RESULT 7 · DOMAIN ADAPTATION (6/12)</a:t>
-            </a:r>
-          </a:p>
-        </p:txBody>
-      </p:sp>
-      <p:sp>
-        <p:nvSpPr>
-          <p:cNvPr id="3" name="TextBox 2"/>
-          <p:cNvSpPr txBox="1"/>
-          <p:nvPr/>
-        </p:nvSpPr>
-        <p:spPr>
-          <a:xfrm>
-            <a:off x="548640" y="566928"/>
-            <a:ext cx="10972800" cy="548640"/>
-          </a:xfrm>
-          <a:prstGeom prst="rect">
-            <a:avLst/>
-          </a:prstGeom>
-          <a:noFill/>
-        </p:spPr>
-        <p:txBody>
-          <a:bodyPr wrap="square" lIns="0" tIns="0" rIns="0" bIns="0" anchor="t">
-            <a:spAutoFit/>
-          </a:bodyPr>
-          <a:lstStyle/>
-          <a:p>
-            <a:pPr algn="l"/>
-            <a:r>
-              <a:rPr sz="2400" b="1" i="0">
-                <a:solidFill>
-                  <a:srgbClr val="1E2761"/>
-                </a:solidFill>
-                <a:latin typeface="Cambria"/>
-              </a:rPr>
-              <a:t>SHOT epoch 수를 어떻게 정했나</a:t>
-            </a:r>
-          </a:p>
-        </p:txBody>
-      </p:sp>
-      <p:sp>
-        <p:nvSpPr>
-          <p:cNvPr id="4" name="TextBox 3"/>
-          <p:cNvSpPr txBox="1"/>
-          <p:nvPr/>
-        </p:nvSpPr>
-        <p:spPr>
-          <a:xfrm>
-            <a:off x="548640" y="1200000"/>
-            <a:ext cx="11091672" cy="900000"/>
-          </a:xfrm>
-          <a:prstGeom prst="rect">
-            <a:avLst/>
-          </a:prstGeom>
-          <a:noFill/>
-        </p:spPr>
-        <p:txBody>
-          <a:bodyPr wrap="square" lIns="0" tIns="0" rIns="0" bIns="0" anchor="t">
-            <a:spAutoFit/>
-          </a:bodyPr>
-          <a:lstStyle/>
-          <a:p>
-            <a:pPr algn="l"/>
-            <a:r>
-              <a:rPr sz="1300" b="0" i="0" dirty="0" err="1">
-                <a:solidFill>
-                  <a:srgbClr val="1A1A1A"/>
-                </a:solidFill>
-                <a:latin typeface="Calibri"/>
-              </a:rPr>
-              <a:t>SHOT은</a:t>
-            </a:r>
-            <a:r>
-              <a:rPr sz="1300" b="0" i="0" dirty="0">
-                <a:solidFill>
-                  <a:srgbClr val="1A1A1A"/>
-                </a:solidFill>
-                <a:latin typeface="Calibri"/>
-              </a:rPr>
-              <a:t> </a:t>
-            </a:r>
-            <a:r>
-              <a:rPr sz="1300" b="0" i="0" dirty="0" err="1">
-                <a:solidFill>
-                  <a:srgbClr val="1A1A1A"/>
-                </a:solidFill>
-                <a:latin typeface="Calibri"/>
-              </a:rPr>
-              <a:t>epoch을</a:t>
-            </a:r>
-            <a:r>
-              <a:rPr sz="1300" b="0" i="0" dirty="0">
-                <a:solidFill>
-                  <a:srgbClr val="1A1A1A"/>
-                </a:solidFill>
-                <a:latin typeface="Calibri"/>
-              </a:rPr>
-              <a:t> </a:t>
-            </a:r>
-            <a:r>
-              <a:rPr sz="1300" b="0" i="0" dirty="0" err="1">
-                <a:solidFill>
-                  <a:srgbClr val="1A1A1A"/>
-                </a:solidFill>
-                <a:latin typeface="Calibri"/>
-              </a:rPr>
-              <a:t>늘릴수록</a:t>
-            </a:r>
-            <a:r>
-              <a:rPr sz="1300" b="0" i="0" dirty="0">
-                <a:solidFill>
-                  <a:srgbClr val="1A1A1A"/>
-                </a:solidFill>
-                <a:latin typeface="Calibri"/>
-              </a:rPr>
-              <a:t> 더 </a:t>
-            </a:r>
-            <a:r>
-              <a:rPr sz="1300" b="0" i="0" dirty="0" err="1">
-                <a:solidFill>
-                  <a:srgbClr val="1A1A1A"/>
-                </a:solidFill>
-                <a:latin typeface="Calibri"/>
-              </a:rPr>
-              <a:t>많이</a:t>
-            </a:r>
-            <a:r>
-              <a:rPr sz="1300" b="0" i="0" dirty="0">
-                <a:solidFill>
-                  <a:srgbClr val="1A1A1A"/>
-                </a:solidFill>
-                <a:latin typeface="Calibri"/>
-              </a:rPr>
-              <a:t> </a:t>
-            </a:r>
-            <a:r>
-              <a:rPr sz="1300" b="0" i="0" dirty="0" err="1">
-                <a:solidFill>
-                  <a:srgbClr val="1A1A1A"/>
-                </a:solidFill>
-                <a:latin typeface="Calibri"/>
-              </a:rPr>
-              <a:t>학습한다</a:t>
-            </a:r>
-            <a:r>
-              <a:rPr sz="1300" b="0" i="0" dirty="0">
-                <a:solidFill>
-                  <a:srgbClr val="1A1A1A"/>
-                </a:solidFill>
-                <a:latin typeface="Calibri"/>
-              </a:rPr>
-              <a:t>. </a:t>
-            </a:r>
-            <a:r>
-              <a:rPr sz="1300" b="0" i="0" dirty="0" err="1">
-                <a:solidFill>
-                  <a:srgbClr val="1A1A1A"/>
-                </a:solidFill>
-                <a:latin typeface="Calibri"/>
-              </a:rPr>
-              <a:t>데이터셋마다</a:t>
-            </a:r>
-            <a:r>
-              <a:rPr sz="1300" b="0" i="0" dirty="0">
-                <a:solidFill>
-                  <a:srgbClr val="1A1A1A"/>
-                </a:solidFill>
-                <a:latin typeface="Calibri"/>
-              </a:rPr>
-              <a:t> target </a:t>
-            </a:r>
-            <a:r>
-              <a:rPr sz="1300" b="0" i="0" dirty="0" err="1">
-                <a:solidFill>
-                  <a:srgbClr val="1A1A1A"/>
-                </a:solidFill>
-                <a:latin typeface="Calibri"/>
-              </a:rPr>
-              <a:t>accuracy가</a:t>
-            </a:r>
-            <a:r>
-              <a:rPr sz="1300" b="0" i="0" dirty="0">
-                <a:solidFill>
-                  <a:srgbClr val="1A1A1A"/>
-                </a:solidFill>
-                <a:latin typeface="Calibri"/>
-              </a:rPr>
-              <a:t> </a:t>
-            </a:r>
-            <a:r>
-              <a:rPr sz="1300" b="0" i="0" dirty="0" err="1">
-                <a:solidFill>
-                  <a:srgbClr val="1A1A1A"/>
-                </a:solidFill>
-                <a:latin typeface="Calibri"/>
-              </a:rPr>
-              <a:t>가장</a:t>
-            </a:r>
-            <a:r>
-              <a:rPr sz="1300" b="0" i="0" dirty="0">
-                <a:solidFill>
-                  <a:srgbClr val="1A1A1A"/>
-                </a:solidFill>
-                <a:latin typeface="Calibri"/>
-              </a:rPr>
-              <a:t> </a:t>
-            </a:r>
-            <a:r>
-              <a:rPr sz="1300" b="0" i="0" dirty="0" err="1">
-                <a:solidFill>
-                  <a:srgbClr val="1A1A1A"/>
-                </a:solidFill>
-                <a:latin typeface="Calibri"/>
-              </a:rPr>
-              <a:t>높은</a:t>
-            </a:r>
-            <a:r>
-              <a:rPr sz="1300" b="0" i="0" dirty="0">
-                <a:solidFill>
-                  <a:srgbClr val="1A1A1A"/>
-                </a:solidFill>
-                <a:latin typeface="Calibri"/>
-              </a:rPr>
-              <a:t> </a:t>
-            </a:r>
-            <a:r>
-              <a:rPr sz="1300" b="0" i="0" dirty="0" err="1">
-                <a:solidFill>
-                  <a:srgbClr val="1A1A1A"/>
-                </a:solidFill>
-                <a:latin typeface="Calibri"/>
-              </a:rPr>
-              <a:t>epoch을</a:t>
-            </a:r>
-            <a:r>
-              <a:rPr sz="1300" b="0" i="0" dirty="0">
-                <a:solidFill>
-                  <a:srgbClr val="1A1A1A"/>
-                </a:solidFill>
-                <a:latin typeface="Calibri"/>
-              </a:rPr>
-              <a:t> </a:t>
-            </a:r>
-            <a:r>
-              <a:rPr sz="1300" b="0" i="0" dirty="0" err="1">
-                <a:solidFill>
-                  <a:srgbClr val="1A1A1A"/>
-                </a:solidFill>
-                <a:latin typeface="Calibri"/>
-              </a:rPr>
-              <a:t>골라</a:t>
-            </a:r>
-            <a:r>
-              <a:rPr sz="1300" b="0" i="0" dirty="0">
-                <a:solidFill>
-                  <a:srgbClr val="1A1A1A"/>
-                </a:solidFill>
-                <a:latin typeface="Calibri"/>
-              </a:rPr>
-              <a:t> </a:t>
-            </a:r>
-            <a:r>
-              <a:rPr sz="1300" b="0" i="0" dirty="0" err="1">
-                <a:solidFill>
-                  <a:srgbClr val="1A1A1A"/>
-                </a:solidFill>
-                <a:latin typeface="Calibri"/>
-              </a:rPr>
-              <a:t>보고하면</a:t>
-            </a:r>
-            <a:r>
-              <a:rPr sz="1300" b="0" i="0" dirty="0">
-                <a:solidFill>
-                  <a:srgbClr val="1A1A1A"/>
-                </a:solidFill>
-                <a:latin typeface="Calibri"/>
-              </a:rPr>
-              <a:t> label-free </a:t>
-            </a:r>
-            <a:r>
-              <a:rPr sz="1300" b="0" i="0" dirty="0" err="1">
-                <a:solidFill>
-                  <a:srgbClr val="1A1A1A"/>
-                </a:solidFill>
-                <a:latin typeface="Calibri"/>
-              </a:rPr>
-              <a:t>전제와</a:t>
-            </a:r>
-            <a:r>
-              <a:rPr sz="1300" b="0" i="0" dirty="0">
-                <a:solidFill>
-                  <a:srgbClr val="1A1A1A"/>
-                </a:solidFill>
-                <a:latin typeface="Calibri"/>
-              </a:rPr>
-              <a:t> </a:t>
-            </a:r>
-            <a:r>
-              <a:rPr sz="1300" b="0" i="0" dirty="0" err="1">
-                <a:solidFill>
-                  <a:srgbClr val="1A1A1A"/>
-                </a:solidFill>
-                <a:latin typeface="Calibri"/>
-              </a:rPr>
-              <a:t>모순되므로</a:t>
-            </a:r>
-            <a:r>
-              <a:rPr sz="1300" b="0" i="0" dirty="0">
-                <a:solidFill>
-                  <a:srgbClr val="1A1A1A"/>
-                </a:solidFill>
-                <a:latin typeface="Calibri"/>
-              </a:rPr>
-              <a:t>, </a:t>
-            </a:r>
-            <a:r>
-              <a:rPr sz="1300" b="0" i="0" dirty="0" err="1">
-                <a:solidFill>
-                  <a:srgbClr val="1A1A1A"/>
-                </a:solidFill>
-                <a:latin typeface="Calibri"/>
-              </a:rPr>
-              <a:t>epoch별</a:t>
-            </a:r>
-            <a:r>
-              <a:rPr sz="1300" b="0" i="0" dirty="0">
-                <a:solidFill>
-                  <a:srgbClr val="1A1A1A"/>
-                </a:solidFill>
-                <a:latin typeface="Calibri"/>
-              </a:rPr>
-              <a:t> </a:t>
-            </a:r>
-            <a:r>
-              <a:rPr sz="1300" b="0" i="0" dirty="0" err="1">
-                <a:solidFill>
-                  <a:srgbClr val="1A1A1A"/>
-                </a:solidFill>
-                <a:latin typeface="Calibri"/>
-              </a:rPr>
-              <a:t>민감도부터</a:t>
-            </a:r>
-            <a:r>
-              <a:rPr sz="1300" b="0" i="0" dirty="0">
-                <a:solidFill>
-                  <a:srgbClr val="1A1A1A"/>
-                </a:solidFill>
-                <a:latin typeface="Calibri"/>
-              </a:rPr>
-              <a:t> </a:t>
-            </a:r>
-            <a:r>
-              <a:rPr sz="1300" b="0" i="0" dirty="0" err="1">
-                <a:solidFill>
-                  <a:srgbClr val="1A1A1A"/>
-                </a:solidFill>
-                <a:latin typeface="Calibri"/>
-              </a:rPr>
-              <a:t>확인했다</a:t>
-            </a:r>
-            <a:r>
-              <a:rPr sz="1300" b="0" i="0" dirty="0">
-                <a:solidFill>
-                  <a:srgbClr val="1A1A1A"/>
-                </a:solidFill>
-                <a:latin typeface="Calibri"/>
-              </a:rPr>
-              <a:t>.</a:t>
-            </a:r>
-          </a:p>
-        </p:txBody>
-      </p:sp>
-      <p:pic>
-        <p:nvPicPr>
-          <p:cNvPr id="10" name="Picture" descr="SHOT epoch sensitivity chart"/>
-          <p:cNvPicPr>
-            <a:picLocks noChangeAspect="1"/>
-          </p:cNvPicPr>
-          <p:nvPr/>
-        </p:nvPicPr>
-        <p:blipFill>
-          <a:blip r:embed="rId2"/>
-          <a:stretch>
-            <a:fillRect/>
-          </a:stretch>
-        </p:blipFill>
-        <p:spPr>
-          <a:xfrm>
-            <a:off x="3845847" y="2150000"/>
-            <a:ext cx="4500000" cy="2924927"/>
-          </a:xfrm>
-          <a:prstGeom prst="rect">
-            <a:avLst/>
-          </a:prstGeom>
-        </p:spPr>
-      </p:pic>
-      <p:sp>
-        <p:nvSpPr>
-          <p:cNvPr id="6" name="TextBox 4"/>
-          <p:cNvSpPr txBox="1"/>
-          <p:nvPr/>
-        </p:nvSpPr>
-        <p:spPr>
-          <a:xfrm>
-            <a:off x="548640" y="5224927"/>
-            <a:ext cx="11091672" cy="950000"/>
-          </a:xfrm>
-          <a:prstGeom prst="rect">
-            <a:avLst/>
-          </a:prstGeom>
-          <a:noFill/>
-        </p:spPr>
-        <p:txBody>
-          <a:bodyPr wrap="square" lIns="0" tIns="0" rIns="0" bIns="0" anchor="t">
-            <a:spAutoFit/>
-          </a:bodyPr>
-          <a:lstStyle/>
-          <a:p>
-            <a:pPr algn="l"/>
-            <a:r>
-              <a:rPr sz="1300" b="0" i="1">
-                <a:solidFill>
-                  <a:srgbClr val="5B5E6B"/>
-                </a:solidFill>
-                <a:latin typeface="Calibri"/>
-              </a:rPr>
-              <a:t>Taiwan(클래스 3개)은 epoch이 늘수록 계속 좋아지지만, Bangladesh(6개)·PlantDoc(8개)은 epoch 2~3에서 정점을 찍고 pseudo-label 과적합으로 꺾인다. 그래서 공통 epoch=2를 사전 기준으로 고정했다.</a:t>
-            </a:r>
-          </a:p>
-        </p:txBody>
-      </p:sp>
-      <p:sp>
-        <p:nvSpPr>
-          <p:cNvPr id="8" name="TextBox 5"/>
-          <p:cNvSpPr txBox="1"/>
-          <p:nvPr/>
-        </p:nvSpPr>
-        <p:spPr>
-          <a:xfrm>
-            <a:off x="11430000" y="6446520"/>
-            <a:ext cx="548640" cy="274320"/>
-          </a:xfrm>
-          <a:prstGeom prst="rect">
-            <a:avLst/>
-          </a:prstGeom>
-          <a:noFill/>
-        </p:spPr>
-        <p:txBody>
-          <a:bodyPr wrap="square" lIns="0" tIns="0" rIns="0" bIns="0" anchor="t">
-            <a:spAutoFit/>
-          </a:bodyPr>
-          <a:lstStyle/>
-          <a:p>
-            <a:pPr algn="r"/>
-            <a:r>
-              <a:rPr sz="1000" b="0" i="0">
-                <a:solidFill>
-                  <a:srgbClr val="5B5E6B"/>
-                </a:solidFill>
-                <a:latin typeface="Calibri"/>
-              </a:rPr>
-              <a:t>28</a:t>
-            </a:r>
-          </a:p>
-        </p:txBody>
-      </p:sp>
-    </p:spTree>
-  </p:cSld>
-  <p:clrMapOvr>
-    <a:masterClrMapping/>
-  </p:clrMapOvr>
-</p:sld>
-</file>
-
-<file path=ppt/slides/slide28.xml><?xml version="1.0" encoding="utf-8"?>
-<p:sld xmlns:a="http://schemas.openxmlformats.org/drawingml/2006/main" xmlns:r="http://schemas.openxmlformats.org/officeDocument/2006/relationships" xmlns:p="http://schemas.openxmlformats.org/presentationml/2006/main">
-  <p:cSld>
-    <p:bg>
-      <p:bgPr>
-        <a:solidFill>
-          <a:srgbClr val="FFFFFF"/>
-        </a:solidFill>
-        <a:effectLst/>
-      </p:bgPr>
-    </p:bg>
-    <p:spTree>
-      <p:nvGrpSpPr>
-        <p:cNvPr id="1" name=""/>
-        <p:cNvGrpSpPr/>
-        <p:nvPr/>
-      </p:nvGrpSpPr>
-      <p:grpSpPr>
-        <a:xfrm>
-          <a:off x="0" y="0"/>
-          <a:ext cx="0" cy="0"/>
-          <a:chOff x="0" y="0"/>
-          <a:chExt cx="0" cy="0"/>
-        </a:xfrm>
-      </p:grpSpPr>
-      <p:sp>
-        <p:nvSpPr>
-          <p:cNvPr id="2" name="TextBox 1"/>
-          <p:cNvSpPr txBox="1"/>
-          <p:nvPr/>
-        </p:nvSpPr>
-        <p:spPr>
-          <a:xfrm>
-            <a:off x="548640" y="292608"/>
-            <a:ext cx="9144000" cy="292608"/>
-          </a:xfrm>
-          <a:prstGeom prst="rect">
-            <a:avLst/>
-          </a:prstGeom>
-          <a:noFill/>
-        </p:spPr>
-        <p:txBody>
-          <a:bodyPr wrap="square" lIns="0" tIns="0" rIns="0" bIns="0" anchor="t">
-            <a:spAutoFit/>
-          </a:bodyPr>
-          <a:lstStyle/>
-          <a:p>
-            <a:pPr algn="l"/>
-            <a:r>
-              <a:rPr sz="1050" b="1" i="0">
-                <a:solidFill>
-                  <a:srgbClr val="2A78D6"/>
-                </a:solidFill>
-                <a:latin typeface="Calibri"/>
-              </a:rPr>
-              <a:t>RESULT 7 · DOMAIN ADAPTATION (7/12)</a:t>
-            </a:r>
-          </a:p>
-        </p:txBody>
-      </p:sp>
-      <p:sp>
-        <p:nvSpPr>
-          <p:cNvPr id="3" name="TextBox 2"/>
-          <p:cNvSpPr txBox="1"/>
-          <p:nvPr/>
-        </p:nvSpPr>
-        <p:spPr>
-          <a:xfrm>
-            <a:off x="548640" y="566928"/>
-            <a:ext cx="10972800" cy="548640"/>
-          </a:xfrm>
-          <a:prstGeom prst="rect">
-            <a:avLst/>
-          </a:prstGeom>
-          <a:noFill/>
-        </p:spPr>
-        <p:txBody>
-          <a:bodyPr wrap="square" lIns="0" tIns="0" rIns="0" bIns="0" anchor="t">
-            <a:spAutoFit/>
-          </a:bodyPr>
-          <a:lstStyle/>
-          <a:p>
-            <a:pPr algn="l"/>
-            <a:r>
-              <a:rPr sz="2400" b="1" i="0">
-                <a:solidFill>
-                  <a:srgbClr val="1E2761"/>
-                </a:solidFill>
-                <a:latin typeface="Cambria"/>
-              </a:rPr>
-              <a:t>최종 권장 파이프라인 + 다음 과제</a:t>
-            </a:r>
-          </a:p>
-        </p:txBody>
-      </p:sp>
-      <p:sp>
-        <p:nvSpPr>
-          <p:cNvPr id="4" name="TextBox H"/>
-          <p:cNvSpPr txBox="1"/>
-          <p:nvPr/>
-        </p:nvSpPr>
-        <p:spPr>
-          <a:xfrm>
-            <a:off x="548640" y="1500000"/>
-            <a:ext cx="11091672" cy="1200000"/>
-          </a:xfrm>
-          <a:prstGeom prst="rect">
-            <a:avLst/>
-          </a:prstGeom>
-          <a:noFill/>
-        </p:spPr>
-        <p:txBody>
-          <a:bodyPr wrap="square" lIns="0" tIns="0" rIns="0" bIns="0" anchor="ctr">
-            <a:spAutoFit/>
-          </a:bodyPr>
-          <a:lstStyle/>
-          <a:p>
-            <a:pPr algn="ctr"/>
-            <a:r>
-              <a:rPr sz="1700" b="1" i="0">
-                <a:solidFill>
-                  <a:srgbClr val="1E2761"/>
-                </a:solidFill>
-                <a:latin typeface="Calibri"/>
-              </a:rPr>
-              <a:t>최종 권장: Class-restriction 마스킹은 항상 적용 + SHOT(epoch=2)을 기본 적응 방법으로 사용</a:t>
-            </a:r>
-          </a:p>
-        </p:txBody>
-      </p:sp>
-      <p:sp>
-        <p:nvSpPr>
-          <p:cNvPr id="5" name="TextBox 4"/>
-          <p:cNvSpPr txBox="1"/>
-          <p:nvPr/>
-        </p:nvSpPr>
-        <p:spPr>
-          <a:xfrm>
-            <a:off x="548640" y="2950000"/>
-            <a:ext cx="11091672" cy="1300000"/>
-          </a:xfrm>
-          <a:prstGeom prst="rect">
-            <a:avLst/>
-          </a:prstGeom>
-          <a:noFill/>
-        </p:spPr>
-        <p:txBody>
-          <a:bodyPr wrap="square" lIns="0" tIns="0" rIns="0" bIns="0" anchor="t">
-            <a:spAutoFit/>
-          </a:bodyPr>
-          <a:lstStyle/>
-          <a:p>
-            <a:pPr algn="l"/>
-            <a:r>
-              <a:rPr sz="1300" b="0" i="1">
-                <a:solidFill>
-                  <a:srgbClr val="5B5E6B"/>
-                </a:solidFill>
-                <a:latin typeface="Calibri"/>
-              </a:rPr>
-              <a:t>데이터셋마다 다른 방법을 골라야 했던 AdaBN(Taiwan 전용)·TENT(전부 탈락)와 달리, SHOT은 튜닝 없이 3개 데이터셋 전부에서 collapse 없이 최고 또는 최고에 가까운 성능을 낸 유일한 방법이다.</a:t>
-            </a:r>
-          </a:p>
-        </p:txBody>
-      </p:sp>
-      <p:sp>
-        <p:nvSpPr>
-          <p:cNvPr id="6" name="TextBox 4"/>
-          <p:cNvSpPr txBox="1"/>
-          <p:nvPr/>
-        </p:nvSpPr>
-        <p:spPr>
-          <a:xfrm>
-            <a:off x="548640" y="4450000"/>
-            <a:ext cx="11091672" cy="1400000"/>
-          </a:xfrm>
-          <a:prstGeom prst="rect">
-            <a:avLst/>
-          </a:prstGeom>
-          <a:noFill/>
-        </p:spPr>
-        <p:txBody>
-          <a:bodyPr wrap="square" lIns="0" tIns="0" rIns="0" bIns="0" anchor="t">
-            <a:spAutoFit/>
-          </a:bodyPr>
-          <a:lstStyle/>
-          <a:p>
-            <a:pPr algn="l"/>
-            <a:r>
-              <a:rPr sz="1300" b="0" i="1">
-                <a:solidFill>
-                  <a:srgbClr val="5B5E6B"/>
-                </a:solidFill>
-                <a:latin typeface="Calibri"/>
-              </a:rPr>
-              <a:t>3-seed 검증 완료: seed123/2026까지 추가 학습해 재평가한 결과, SHOT(epoch=2)의 3-seed 평균이 SHOT+APS보다 모든 데이터셋에서 근소하게 높았다 — 그래서 APS 없는 순수 SHOT을 최종으로 확정했다(5/11 슬라이드에 평균±표준편차 표 참고).</a:t>
-            </a:r>
-          </a:p>
-        </p:txBody>
-      </p:sp>
-      <p:sp>
-        <p:nvSpPr>
-          <p:cNvPr id="8" name="TextBox 5"/>
-          <p:cNvSpPr txBox="1"/>
-          <p:nvPr/>
-        </p:nvSpPr>
-        <p:spPr>
-          <a:xfrm>
-            <a:off x="11430000" y="6446520"/>
-            <a:ext cx="548640" cy="274320"/>
-          </a:xfrm>
-          <a:prstGeom prst="rect">
-            <a:avLst/>
-          </a:prstGeom>
-          <a:noFill/>
-        </p:spPr>
-        <p:txBody>
-          <a:bodyPr wrap="square" lIns="0" tIns="0" rIns="0" bIns="0" anchor="t">
-            <a:spAutoFit/>
-          </a:bodyPr>
-          <a:lstStyle/>
-          <a:p>
-            <a:pPr algn="r"/>
-            <a:r>
-              <a:rPr sz="1000" b="0" i="0">
-                <a:solidFill>
-                  <a:srgbClr val="5B5E6B"/>
-                </a:solidFill>
-                <a:latin typeface="Calibri"/>
-              </a:rPr>
-              <a:t>29</a:t>
-            </a:r>
-          </a:p>
-        </p:txBody>
-      </p:sp>
-    </p:spTree>
-  </p:cSld>
-  <p:clrMapOvr>
-    <a:masterClrMapping/>
-  </p:clrMapOvr>
-</p:sld>
-</file>
-
 <file path=ppt/slides/slide29.xml><?xml version="1.0" encoding="utf-8"?>
 <p:sld xmlns:a="http://schemas.openxmlformats.org/drawingml/2006/main" xmlns:r="http://schemas.openxmlformats.org/officeDocument/2006/relationships" xmlns:p="http://schemas.openxmlformats.org/presentationml/2006/main">
   <p:cSld>
@@ -21574,7 +18514,7 @@
                 </a:solidFill>
                 <a:latin typeface="Calibri"/>
               </a:rPr>
-              <a:t>35</a:t>
+              <a:t>29</a:t>
             </a:r>
           </a:p>
         </p:txBody>
@@ -22996,7 +19936,7 @@
                 </a:solidFill>
                 <a:latin typeface="Calibri"/>
               </a:rPr>
-              <a:t>36</a:t>
+              <a:t>30</a:t>
             </a:r>
           </a:p>
         </p:txBody>
@@ -23057,7 +19997,7 @@
                 </a:solidFill>
                 <a:latin typeface="Calibri"/>
               </a:rPr>
-              <a:t>RESULT 7 · DOMAIN ADAPTATION (12/12)</a:t>
+              <a:t>RESULT 7 · DOMAIN ADAPTATION (6/6)</a:t>
             </a:r>
           </a:p>
         </p:txBody>
@@ -23588,1634 +20528,7 @@
                 </a:solidFill>
                 <a:latin typeface="Calibri"/>
               </a:rPr>
-              <a:t>34</a:t>
-            </a:r>
-          </a:p>
-        </p:txBody>
-      </p:sp>
-    </p:spTree>
-  </p:cSld>
-  <p:clrMapOvr>
-    <a:masterClrMapping/>
-  </p:clrMapOvr>
-</p:sld>
-</file>
-
-<file path=ppt/slides/slide32.xml><?xml version="1.0" encoding="utf-8"?>
-<p:sld xmlns:a="http://schemas.openxmlformats.org/drawingml/2006/main" xmlns:p="http://schemas.openxmlformats.org/presentationml/2006/main" xmlns:r="http://schemas.openxmlformats.org/officeDocument/2006/relationships">
-  <p:cSld>
-    <p:bg>
-      <p:bgPr>
-        <a:solidFill>
-          <a:srgbClr val="FFFFFF"/>
-        </a:solidFill>
-        <a:effectLst/>
-      </p:bgPr>
-    </p:bg>
-    <p:spTree>
-      <p:nvGrpSpPr>
-        <p:cNvPr id="1" name=""/>
-        <p:cNvGrpSpPr/>
-        <p:nvPr/>
-      </p:nvGrpSpPr>
-      <p:grpSpPr/>
-      <p:sp>
-        <p:nvSpPr>
-          <p:cNvPr id="2" name="TextBox 1"/>
-          <p:cNvSpPr txBox="1"/>
-          <p:nvPr/>
-        </p:nvSpPr>
-        <p:spPr>
-          <a:xfrm>
-            <a:off x="548640" y="292608"/>
-            <a:ext cx="9144000" cy="292608"/>
-          </a:xfrm>
-          <a:prstGeom prst="rect">
-            <a:avLst/>
-          </a:prstGeom>
-          <a:noFill/>
-        </p:spPr>
-        <p:txBody>
-          <a:bodyPr wrap="square" anchor="t" lIns="0" rIns="0" tIns="0" bIns="0">
-            <a:spAutoFit/>
-          </a:bodyPr>
-          <a:lstStyle/>
-          <a:p>
-            <a:pPr algn="l"/>
-            <a:r>
-              <a:rPr sz="1050" b="1" i="0" spc="150">
-                <a:solidFill>
-                  <a:srgbClr val="2A78D6"/>
-                </a:solidFill>
-                <a:latin typeface="Calibri"/>
-              </a:rPr>
-              <a:t>RESULT 7 · DOMAIN ADAPTATION (3/12)</a:t>
-            </a:r>
-          </a:p>
-        </p:txBody>
-      </p:sp>
-      <p:sp>
-        <p:nvSpPr>
-          <p:cNvPr id="3" name="TextBox 2"/>
-          <p:cNvSpPr txBox="1"/>
-          <p:nvPr/>
-        </p:nvSpPr>
-        <p:spPr>
-          <a:xfrm>
-            <a:off x="548640" y="566928"/>
-            <a:ext cx="10972800" cy="548640"/>
-          </a:xfrm>
-          <a:prstGeom prst="rect">
-            <a:avLst/>
-          </a:prstGeom>
-          <a:noFill/>
-        </p:spPr>
-        <p:txBody>
-          <a:bodyPr wrap="square" anchor="t" lIns="0" rIns="0" tIns="0" bIns="0">
-            <a:spAutoFit/>
-          </a:bodyPr>
-          <a:lstStyle/>
-          <a:p>
-            <a:pPr algn="l"/>
-            <a:r>
-              <a:rPr sz="2400" b="1" i="0">
-                <a:solidFill>
-                  <a:srgbClr val="1E2761"/>
-                </a:solidFill>
-                <a:latin typeface="Cambria"/>
-              </a:rPr>
-              <a:t>Class-restriction 마스킹 — 정확한 메커니즘</a:t>
-            </a:r>
-          </a:p>
-        </p:txBody>
-      </p:sp>
-      <p:sp>
-        <p:nvSpPr>
-          <p:cNvPr id="4" name="Block"/>
-          <p:cNvSpPr txBox="1"/>
-          <p:nvPr/>
-        </p:nvSpPr>
-        <p:spPr>
-          <a:xfrm>
-            <a:off x="548640" y="1300000"/>
-            <a:ext cx="11091672" cy="1000000"/>
-          </a:xfrm>
-          <a:prstGeom prst="rect">
-            <a:avLst/>
-          </a:prstGeom>
-          <a:noFill/>
-        </p:spPr>
-        <p:txBody>
-          <a:bodyPr wrap="square" anchor="t" lIns="0" rIns="0" tIns="0" bIns="0">
-            <a:spAutoFit/>
-          </a:bodyPr>
-          <a:lstStyle/>
-          <a:p>
-            <a:pPr algn="l">
-              <a:lnSpc>
-                <a:spcPct val="115000"/>
-              </a:lnSpc>
-            </a:pPr>
-            <a:r>
-              <a:rPr sz="1400" b="1" i="0">
-                <a:solidFill>
-                  <a:srgbClr val="2A78D6"/>
-                </a:solidFill>
-                <a:latin typeface="Calibri"/>
-              </a:rPr>
-              <a:t>① </a:t>
-            </a:r>
-            <a:r>
-              <a:rPr sz="1300" b="1" i="0">
-                <a:solidFill>
-                  <a:srgbClr val="1E2761"/>
-                </a:solidFill>
-                <a:latin typeface="Calibri"/>
-              </a:rPr>
-              <a:t>기준: </a:t>
-            </a:r>
-            <a:r>
-              <a:rPr sz="1300" b="0" i="0">
-                <a:solidFill>
-                  <a:srgbClr val="1A1A1A"/>
-                </a:solidFill>
-                <a:latin typeface="Calibri"/>
-              </a:rPr>
-              <a:t>데이터 준비 단계에서 미리 확인한 “이 외부 데이터셋에 해당 병해 폴더·라벨이 애초에 있는가” — 모델 예측이나 정답 라벨을 본 게 아니다 (Taiwan 3/10, Bangladesh 6/10, PlantDoc 8/10).</a:t>
-            </a:r>
-          </a:p>
-        </p:txBody>
-      </p:sp>
-      <p:sp>
-        <p:nvSpPr>
-          <p:cNvPr id="5" name="Block"/>
-          <p:cNvSpPr txBox="1"/>
-          <p:nvPr/>
-        </p:nvSpPr>
-        <p:spPr>
-          <a:xfrm>
-            <a:off x="548640" y="2380000"/>
-            <a:ext cx="11091672" cy="1000000"/>
-          </a:xfrm>
-          <a:prstGeom prst="rect">
-            <a:avLst/>
-          </a:prstGeom>
-          <a:noFill/>
-        </p:spPr>
-        <p:txBody>
-          <a:bodyPr wrap="square" anchor="t" lIns="0" rIns="0" tIns="0" bIns="0">
-            <a:spAutoFit/>
-          </a:bodyPr>
-          <a:lstStyle/>
-          <a:p>
-            <a:pPr algn="l">
-              <a:lnSpc>
-                <a:spcPct val="115000"/>
-              </a:lnSpc>
-            </a:pPr>
-            <a:r>
-              <a:rPr sz="1400" b="1" i="0">
-                <a:solidFill>
-                  <a:srgbClr val="2A78D6"/>
-                </a:solidFill>
-                <a:latin typeface="Calibri"/>
-              </a:rPr>
-              <a:t>② </a:t>
-            </a:r>
-            <a:r>
-              <a:rPr sz="1300" b="1" i="0">
-                <a:solidFill>
-                  <a:srgbClr val="1E2761"/>
-                </a:solidFill>
-                <a:latin typeface="Calibri"/>
-              </a:rPr>
-              <a:t>제외 방법: </a:t>
-            </a:r>
-            <a:r>
-              <a:rPr sz="1300" b="0" i="0">
-                <a:solidFill>
-                  <a:srgbClr val="1A1A1A"/>
-                </a:solidFill>
-                <a:latin typeface="Calibri"/>
-              </a:rPr>
-              <a:t>logits = model(images) + mask (없는 클래스 자리는 -inf) → softmax 확률이 0이 되어 예측 후보에서 빠진다. 파라미터는 전혀 건드리지 않는다.</a:t>
-            </a:r>
-          </a:p>
-        </p:txBody>
-      </p:sp>
-      <p:sp>
-        <p:nvSpPr>
-          <p:cNvPr id="6" name="Block"/>
-          <p:cNvSpPr txBox="1"/>
-          <p:nvPr/>
-        </p:nvSpPr>
-        <p:spPr>
-          <a:xfrm>
-            <a:off x="548640" y="3460000"/>
-            <a:ext cx="11091672" cy="1000000"/>
-          </a:xfrm>
-          <a:prstGeom prst="rect">
-            <a:avLst/>
-          </a:prstGeom>
-          <a:noFill/>
-        </p:spPr>
-        <p:txBody>
-          <a:bodyPr wrap="square" anchor="t" lIns="0" rIns="0" tIns="0" bIns="0">
-            <a:spAutoFit/>
-          </a:bodyPr>
-          <a:lstStyle/>
-          <a:p>
-            <a:pPr algn="l">
-              <a:lnSpc>
-                <a:spcPct val="115000"/>
-              </a:lnSpc>
-            </a:pPr>
-            <a:r>
-              <a:rPr sz="1400" b="1" i="0">
-                <a:solidFill>
-                  <a:srgbClr val="2A78D6"/>
-                </a:solidFill>
-                <a:latin typeface="Calibri"/>
-              </a:rPr>
-              <a:t>③ </a:t>
-            </a:r>
-            <a:r>
-              <a:rPr sz="1300" b="1" i="0">
-                <a:solidFill>
-                  <a:srgbClr val="1E2761"/>
-                </a:solidFill>
-                <a:latin typeface="Calibri"/>
-              </a:rPr>
-              <a:t>학습과 적응은 분리: </a:t>
-            </a:r>
-            <a:r>
-              <a:rPr sz="1300" b="0" i="0">
-                <a:solidFill>
-                  <a:srgbClr val="1A1A1A"/>
-                </a:solidFill>
-                <a:latin typeface="Calibri"/>
-              </a:rPr>
-              <a:t>tiny_cnn_c는 PlantVillage 10개 클래스 전체로, 마스킹 없이 학습한다. 마스킹은 그 가중치를 외부 데이터셋에 적응·평가할 때만 적용한다.</a:t>
-            </a:r>
-          </a:p>
-        </p:txBody>
-      </p:sp>
-      <p:sp>
-        <p:nvSpPr>
-          <p:cNvPr id="7" name="Block"/>
-          <p:cNvSpPr txBox="1"/>
-          <p:nvPr/>
-        </p:nvSpPr>
-        <p:spPr>
-          <a:xfrm>
-            <a:off x="548640" y="4540000"/>
-            <a:ext cx="11091672" cy="1000000"/>
-          </a:xfrm>
-          <a:prstGeom prst="rect">
-            <a:avLst/>
-          </a:prstGeom>
-          <a:noFill/>
-        </p:spPr>
-        <p:txBody>
-          <a:bodyPr wrap="square" anchor="t" lIns="0" rIns="0" tIns="0" bIns="0">
-            <a:spAutoFit/>
-          </a:bodyPr>
-          <a:lstStyle/>
-          <a:p>
-            <a:pPr algn="l">
-              <a:lnSpc>
-                <a:spcPct val="115000"/>
-              </a:lnSpc>
-            </a:pPr>
-            <a:r>
-              <a:rPr sz="1400" b="1" i="0">
-                <a:solidFill>
-                  <a:srgbClr val="2A78D6"/>
-                </a:solidFill>
-                <a:latin typeface="Calibri"/>
-              </a:rPr>
-              <a:t>④ </a:t>
-            </a:r>
-            <a:r>
-              <a:rPr sz="1300" b="1" i="0">
-                <a:solidFill>
-                  <a:srgbClr val="1E2761"/>
-                </a:solidFill>
-                <a:latin typeface="Calibri"/>
-              </a:rPr>
-              <a:t>SHOT에서는 한 군데 더: </a:t>
-            </a:r>
-            <a:r>
-              <a:rPr sz="1300" b="0" i="0">
-                <a:solidFill>
-                  <a:srgbClr val="1A1A1A"/>
-                </a:solidFill>
-                <a:latin typeface="Calibri"/>
-              </a:rPr>
-              <a:t>pseudo-label을 정하는 클래스 중심점 매칭에도 같은 마스크를 적용해, 존재하는 클래스 안에서만 pseudo-label이 나오게 한다.</a:t>
-            </a:r>
-          </a:p>
-        </p:txBody>
-      </p:sp>
-      <p:sp>
-        <p:nvSpPr>
-          <p:cNvPr id="9" name="TextBox 5"/>
-          <p:cNvSpPr txBox="1"/>
-          <p:nvPr/>
-        </p:nvSpPr>
-        <p:spPr>
-          <a:xfrm>
-            <a:off x="11430000" y="6446520"/>
-            <a:ext cx="548640" cy="274320"/>
-          </a:xfrm>
-          <a:prstGeom prst="rect">
-            <a:avLst/>
-          </a:prstGeom>
-          <a:noFill/>
-        </p:spPr>
-        <p:txBody>
-          <a:bodyPr wrap="square" anchor="t" lIns="0" rIns="0" tIns="0" bIns="0">
-            <a:spAutoFit/>
-          </a:bodyPr>
-          <a:lstStyle/>
-          <a:p>
-            <a:pPr algn="r"/>
-            <a:r>
-              <a:rPr sz="1000" b="0" i="0">
-                <a:solidFill>
-                  <a:srgbClr val="5B5E6B"/>
-                </a:solidFill>
-                <a:latin typeface="Calibri"/>
-              </a:rPr>
-              <a:t>25</a:t>
-            </a:r>
-          </a:p>
-        </p:txBody>
-      </p:sp>
-    </p:spTree>
-  </p:cSld>
-  <p:clrMapOvr>
-    <a:masterClrMapping/>
-  </p:clrMapOvr>
-</p:sld>
-</file>
-
-<file path=ppt/slides/slide33.xml><?xml version="1.0" encoding="utf-8"?>
-<p:sld xmlns:a="http://schemas.openxmlformats.org/drawingml/2006/main" xmlns:p="http://schemas.openxmlformats.org/presentationml/2006/main" xmlns:r="http://schemas.openxmlformats.org/officeDocument/2006/relationships">
-  <p:cSld>
-    <p:bg>
-      <p:bgPr>
-        <a:solidFill>
-          <a:srgbClr val="FFFFFF"/>
-        </a:solidFill>
-        <a:effectLst/>
-      </p:bgPr>
-    </p:bg>
-    <p:spTree>
-      <p:nvGrpSpPr>
-        <p:cNvPr id="1" name=""/>
-        <p:cNvGrpSpPr/>
-        <p:nvPr/>
-      </p:nvGrpSpPr>
-      <p:grpSpPr/>
-      <p:sp>
-        <p:nvSpPr>
-          <p:cNvPr id="2" name="TextBox 1"/>
-          <p:cNvSpPr txBox="1"/>
-          <p:nvPr/>
-        </p:nvSpPr>
-        <p:spPr>
-          <a:xfrm>
-            <a:off x="548640" y="292608"/>
-            <a:ext cx="9144000" cy="292608"/>
-          </a:xfrm>
-          <a:prstGeom prst="rect">
-            <a:avLst/>
-          </a:prstGeom>
-          <a:noFill/>
-        </p:spPr>
-        <p:txBody>
-          <a:bodyPr wrap="square" anchor="t" lIns="0" rIns="0" tIns="0" bIns="0">
-            <a:spAutoFit/>
-          </a:bodyPr>
-          <a:lstStyle/>
-          <a:p>
-            <a:pPr algn="l"/>
-            <a:r>
-              <a:rPr sz="1050" b="1" i="0">
-                <a:solidFill>
-                  <a:srgbClr val="2A78D6"/>
-                </a:solidFill>
-                <a:latin typeface="Calibri"/>
-              </a:rPr>
-              <a:t>RESULT 7 · DOMAIN ADAPTATION (8/12)</a:t>
-            </a:r>
-          </a:p>
-        </p:txBody>
-      </p:sp>
-      <p:sp>
-        <p:nvSpPr>
-          <p:cNvPr id="3" name="TextBox 2"/>
-          <p:cNvSpPr txBox="1"/>
-          <p:nvPr/>
-        </p:nvSpPr>
-        <p:spPr>
-          <a:xfrm>
-            <a:off x="548640" y="566928"/>
-            <a:ext cx="10972800" cy="548640"/>
-          </a:xfrm>
-          <a:prstGeom prst="rect">
-            <a:avLst/>
-          </a:prstGeom>
-          <a:noFill/>
-        </p:spPr>
-        <p:txBody>
-          <a:bodyPr wrap="square" anchor="t" lIns="0" rIns="0" tIns="0" bIns="0">
-            <a:spAutoFit/>
-          </a:bodyPr>
-          <a:lstStyle/>
-          <a:p>
-            <a:pPr algn="l"/>
-            <a:r>
-              <a:rPr sz="2400" b="1" i="0">
-                <a:solidFill>
-                  <a:srgbClr val="1E2761"/>
-                </a:solidFill>
-                <a:latin typeface="Cambria"/>
-              </a:rPr>
-              <a:t>추가 시도: EATA (ICML 2022) — SHOT을 넘지 못함</a:t>
-            </a:r>
-          </a:p>
-        </p:txBody>
-      </p:sp>
-      <p:sp>
-        <p:nvSpPr>
-          <p:cNvPr id="4" name="TextBox 3"/>
-          <p:cNvSpPr txBox="1"/>
-          <p:nvPr/>
-        </p:nvSpPr>
-        <p:spPr>
-          <a:xfrm>
-            <a:off x="548640" y="1200000"/>
-            <a:ext cx="11091672" cy="1150000"/>
-          </a:xfrm>
-          <a:prstGeom prst="rect">
-            <a:avLst/>
-          </a:prstGeom>
-          <a:noFill/>
-        </p:spPr>
-        <p:txBody>
-          <a:bodyPr wrap="square" anchor="t" lIns="0" rIns="0" tIns="0" bIns="0">
-            <a:spAutoFit/>
-          </a:bodyPr>
-          <a:lstStyle/>
-          <a:p>
-            <a:pPr algn="l"/>
-            <a:r>
-              <a:rPr sz="1300" b="0" i="0">
-                <a:solidFill>
-                  <a:srgbClr val="1A1A1A"/>
-                </a:solidFill>
-                <a:latin typeface="Calibri"/>
-              </a:rPr>
-              <a:t>Niu et al., ICML 2022 (공식 코드: mr-eggplant/EATA). TENT와 같은 지점(BN affine만 학습)에서 출발해 ① 불확실하거나(entropy 높음) 중복되는 샘플은 적응에서 제외하고 ② source test셋 Fisher information으로 “원본 가중치에서 너무 멀어지지 않게” 정규화한다.</a:t>
-            </a:r>
-          </a:p>
-        </p:txBody>
-      </p:sp>
-      <p:graphicFrame>
-        <p:nvGraphicFramePr>
-          <p:cNvPr id="7" name="Table"/>
-          <p:cNvGraphicFramePr>
-            <a:graphicFrameLocks noGrp="1"/>
-          </p:cNvGraphicFramePr>
-          <p:nvPr/>
-        </p:nvGraphicFramePr>
-        <p:xfrm>
-          <a:off x="548640" y="2500000"/>
-          <a:ext cx="9800000" cy="2240000"/>
-        </p:xfrm>
-        <a:graphic>
-          <a:graphicData uri="http://schemas.openxmlformats.org/drawingml/2006/table">
-            <a:tbl>
-              <a:tblPr firstRow="1" bandRow="1">
-                <a:tableStyleId>{5C22544A-7EE6-4342-B048-85BDC9FD1C3A}</a:tableStyleId>
-              </a:tblPr>
-              <a:tblGrid>
-                <a:gridCol w="2600000"/>
-                <a:gridCol w="2400000"/>
-                <a:gridCol w="2400000"/>
-                <a:gridCol w="2400000"/>
-              </a:tblGrid>
-              <a:tr h="560000">
-                <a:tc>
-                  <a:txBody>
-                    <a:bodyPr/>
-                    <a:lstStyle/>
-                    <a:p>
-                      <a:pPr algn="ctr"/>
-                      <a:r>
-                        <a:rPr sz="1200" b="1">
-                          <a:solidFill>
-                            <a:srgbClr val="FFFFFF"/>
-                          </a:solidFill>
-                        </a:rPr>
-                        <a:t>데이터셋</a:t>
-                      </a:r>
-                    </a:p>
-                  </a:txBody>
-                  <a:tcPr anchor="ctr">
-                    <a:solidFill>
-                      <a:srgbClr val="1E2761"/>
-                    </a:solidFill>
-                  </a:tcPr>
-                </a:tc>
-                <a:tc>
-                  <a:txBody>
-                    <a:bodyPr/>
-                    <a:lstStyle/>
-                    <a:p>
-                      <a:pPr algn="ctr"/>
-                      <a:r>
-                        <a:rPr sz="1200" b="1">
-                          <a:solidFill>
-                            <a:srgbClr val="FFFFFF"/>
-                          </a:solidFill>
-                        </a:rPr>
-                        <a:t>Source+마스킹</a:t>
-                      </a:r>
-                    </a:p>
-                  </a:txBody>
-                  <a:tcPr anchor="ctr">
-                    <a:solidFill>
-                      <a:srgbClr val="1E2761"/>
-                    </a:solidFill>
-                  </a:tcPr>
-                </a:tc>
-                <a:tc>
-                  <a:txBody>
-                    <a:bodyPr/>
-                    <a:lstStyle/>
-                    <a:p>
-                      <a:pPr algn="ctr"/>
-                      <a:r>
-                        <a:rPr sz="1200" b="1">
-                          <a:solidFill>
-                            <a:srgbClr val="FFFFFF"/>
-                          </a:solidFill>
-                        </a:rPr>
-                        <a:t>SHOT+마스킹(최종)</a:t>
-                      </a:r>
-                    </a:p>
-                  </a:txBody>
-                  <a:tcPr anchor="ctr">
-                    <a:solidFill>
-                      <a:srgbClr val="1E2761"/>
-                    </a:solidFill>
-                  </a:tcPr>
-                </a:tc>
-                <a:tc>
-                  <a:txBody>
-                    <a:bodyPr/>
-                    <a:lstStyle/>
-                    <a:p>
-                      <a:pPr algn="ctr"/>
-                      <a:r>
-                        <a:rPr sz="1200" b="1">
-                          <a:solidFill>
-                            <a:srgbClr val="FFFFFF"/>
-                          </a:solidFill>
-                        </a:rPr>
-                        <a:t>EATA+마스킹</a:t>
-                      </a:r>
-                    </a:p>
-                  </a:txBody>
-                  <a:tcPr anchor="ctr">
-                    <a:solidFill>
-                      <a:srgbClr val="1E2761"/>
-                    </a:solidFill>
-                  </a:tcPr>
-                </a:tc>
-              </a:tr>
-              <a:tr h="560000">
-                <a:tc>
-                  <a:txBody>
-                    <a:bodyPr/>
-                    <a:lstStyle/>
-                    <a:p>
-                      <a:pPr algn="ctr"/>
-                      <a:r>
-                        <a:rPr sz="1200" b="0">
-                          <a:solidFill>
-                            <a:srgbClr val="1A1A1A"/>
-                          </a:solidFill>
-                        </a:rPr>
-                        <a:t>Taiwan</a:t>
-                      </a:r>
-                    </a:p>
-                  </a:txBody>
-                  <a:tcPr anchor="ctr">
-                    <a:solidFill>
-                      <a:srgbClr val="FFFFFF"/>
-                    </a:solidFill>
-                  </a:tcPr>
-                </a:tc>
-                <a:tc>
-                  <a:txBody>
-                    <a:bodyPr/>
-                    <a:lstStyle/>
-                    <a:p>
-                      <a:pPr algn="ctr"/>
-                      <a:r>
-                        <a:rPr sz="1200" b="0">
-                          <a:solidFill>
-                            <a:srgbClr val="1A1A1A"/>
-                          </a:solidFill>
-                        </a:rPr>
-                        <a:t>32.48%</a:t>
-                      </a:r>
-                    </a:p>
-                  </a:txBody>
-                  <a:tcPr anchor="ctr">
-                    <a:solidFill>
-                      <a:srgbClr val="FFFFFF"/>
-                    </a:solidFill>
-                  </a:tcPr>
-                </a:tc>
-                <a:tc>
-                  <a:txBody>
-                    <a:bodyPr/>
-                    <a:lstStyle/>
-                    <a:p>
-                      <a:pPr algn="ctr"/>
-                      <a:r>
-                        <a:rPr sz="1200" b="1">
-                          <a:solidFill>
-                            <a:srgbClr val="1A1A1A"/>
-                          </a:solidFill>
-                        </a:rPr>
-                        <a:t>42.04%</a:t>
-                      </a:r>
-                    </a:p>
-                  </a:txBody>
-                  <a:tcPr anchor="ctr">
-                    <a:solidFill>
-                      <a:srgbClr val="FFFFFF"/>
-                    </a:solidFill>
-                  </a:tcPr>
-                </a:tc>
-                <a:tc>
-                  <a:txBody>
-                    <a:bodyPr/>
-                    <a:lstStyle/>
-                    <a:p>
-                      <a:pPr algn="ctr"/>
-                      <a:r>
-                        <a:rPr sz="1200" b="0">
-                          <a:solidFill>
-                            <a:srgbClr val="1A1A1A"/>
-                          </a:solidFill>
-                        </a:rPr>
-                        <a:t>35.35%</a:t>
-                      </a:r>
-                    </a:p>
-                  </a:txBody>
-                  <a:tcPr anchor="ctr">
-                    <a:solidFill>
-                      <a:srgbClr val="FFFFFF"/>
-                    </a:solidFill>
-                  </a:tcPr>
-                </a:tc>
-              </a:tr>
-              <a:tr h="560000">
-                <a:tc>
-                  <a:txBody>
-                    <a:bodyPr/>
-                    <a:lstStyle/>
-                    <a:p>
-                      <a:pPr algn="ctr"/>
-                      <a:r>
-                        <a:rPr sz="1200" b="0">
-                          <a:solidFill>
-                            <a:srgbClr val="1A1A1A"/>
-                          </a:solidFill>
-                        </a:rPr>
-                        <a:t>Bangladesh</a:t>
-                      </a:r>
-                    </a:p>
-                  </a:txBody>
-                  <a:tcPr anchor="ctr">
-                    <a:solidFill>
-                      <a:srgbClr val="EEF3FC"/>
-                    </a:solidFill>
-                  </a:tcPr>
-                </a:tc>
-                <a:tc>
-                  <a:txBody>
-                    <a:bodyPr/>
-                    <a:lstStyle/>
-                    <a:p>
-                      <a:pPr algn="ctr"/>
-                      <a:r>
-                        <a:rPr sz="1200" b="0">
-                          <a:solidFill>
-                            <a:srgbClr val="1A1A1A"/>
-                          </a:solidFill>
-                        </a:rPr>
-                        <a:t>22.34%</a:t>
-                      </a:r>
-                    </a:p>
-                  </a:txBody>
-                  <a:tcPr anchor="ctr">
-                    <a:solidFill>
-                      <a:srgbClr val="EEF3FC"/>
-                    </a:solidFill>
-                  </a:tcPr>
-                </a:tc>
-                <a:tc>
-                  <a:txBody>
-                    <a:bodyPr/>
-                    <a:lstStyle/>
-                    <a:p>
-                      <a:pPr algn="ctr"/>
-                      <a:r>
-                        <a:rPr sz="1200" b="1">
-                          <a:solidFill>
-                            <a:srgbClr val="1A1A1A"/>
-                          </a:solidFill>
-                        </a:rPr>
-                        <a:t>30.79%</a:t>
-                      </a:r>
-                    </a:p>
-                  </a:txBody>
-                  <a:tcPr anchor="ctr">
-                    <a:solidFill>
-                      <a:srgbClr val="EEF3FC"/>
-                    </a:solidFill>
-                  </a:tcPr>
-                </a:tc>
-                <a:tc>
-                  <a:txBody>
-                    <a:bodyPr/>
-                    <a:lstStyle/>
-                    <a:p>
-                      <a:pPr algn="ctr"/>
-                      <a:r>
-                        <a:rPr sz="1200" b="0">
-                          <a:solidFill>
-                            <a:srgbClr val="1A1A1A"/>
-                          </a:solidFill>
-                        </a:rPr>
-                        <a:t>20.89%</a:t>
-                      </a:r>
-                    </a:p>
-                  </a:txBody>
-                  <a:tcPr anchor="ctr">
-                    <a:solidFill>
-                      <a:srgbClr val="EEF3FC"/>
-                    </a:solidFill>
-                  </a:tcPr>
-                </a:tc>
-              </a:tr>
-              <a:tr h="560000">
-                <a:tc>
-                  <a:txBody>
-                    <a:bodyPr/>
-                    <a:lstStyle/>
-                    <a:p>
-                      <a:pPr algn="ctr"/>
-                      <a:r>
-                        <a:rPr sz="1200" b="0">
-                          <a:solidFill>
-                            <a:srgbClr val="1A1A1A"/>
-                          </a:solidFill>
-                        </a:rPr>
-                        <a:t>PlantDoc</a:t>
-                      </a:r>
-                    </a:p>
-                  </a:txBody>
-                  <a:tcPr anchor="ctr">
-                    <a:solidFill>
-                      <a:srgbClr val="FFFFFF"/>
-                    </a:solidFill>
-                  </a:tcPr>
-                </a:tc>
-                <a:tc>
-                  <a:txBody>
-                    <a:bodyPr/>
-                    <a:lstStyle/>
-                    <a:p>
-                      <a:pPr algn="ctr"/>
-                      <a:r>
-                        <a:rPr sz="1200" b="1">
-                          <a:solidFill>
-                            <a:srgbClr val="1A1A1A"/>
-                          </a:solidFill>
-                        </a:rPr>
-                        <a:t>20.31%</a:t>
-                      </a:r>
-                    </a:p>
-                  </a:txBody>
-                  <a:tcPr anchor="ctr">
-                    <a:solidFill>
-                      <a:srgbClr val="FFFFFF"/>
-                    </a:solidFill>
-                  </a:tcPr>
-                </a:tc>
-                <a:tc>
-                  <a:txBody>
-                    <a:bodyPr/>
-                    <a:lstStyle/>
-                    <a:p>
-                      <a:pPr algn="ctr"/>
-                      <a:r>
-                        <a:rPr sz="1200" b="0">
-                          <a:solidFill>
-                            <a:srgbClr val="1A1A1A"/>
-                          </a:solidFill>
-                        </a:rPr>
-                        <a:t>19.46%</a:t>
-                      </a:r>
-                    </a:p>
-                  </a:txBody>
-                  <a:tcPr anchor="ctr">
-                    <a:solidFill>
-                      <a:srgbClr val="FFFFFF"/>
-                    </a:solidFill>
-                  </a:tcPr>
-                </a:tc>
-                <a:tc>
-                  <a:txBody>
-                    <a:bodyPr/>
-                    <a:lstStyle/>
-                    <a:p>
-                      <a:pPr algn="ctr"/>
-                      <a:r>
-                        <a:rPr sz="1200" b="0">
-                          <a:solidFill>
-                            <a:srgbClr val="1A1A1A"/>
-                          </a:solidFill>
-                        </a:rPr>
-                        <a:t>12.27%</a:t>
-                      </a:r>
-                    </a:p>
-                  </a:txBody>
-                  <a:tcPr anchor="ctr">
-                    <a:solidFill>
-                      <a:srgbClr val="FFFFFF"/>
-                    </a:solidFill>
-                  </a:tcPr>
-                </a:tc>
-              </a:tr>
-            </a:tbl>
-          </a:graphicData>
-        </a:graphic>
-      </p:graphicFrame>
-      <p:sp>
-        <p:nvSpPr>
-          <p:cNvPr id="6" name="TextBox 4"/>
-          <p:cNvSpPr txBox="1"/>
-          <p:nvPr/>
-        </p:nvSpPr>
-        <p:spPr>
-          <a:xfrm>
-            <a:off x="548640" y="4850000"/>
-            <a:ext cx="11091672" cy="1450000"/>
-          </a:xfrm>
-          <a:prstGeom prst="rect">
-            <a:avLst/>
-          </a:prstGeom>
-          <a:noFill/>
-        </p:spPr>
-        <p:txBody>
-          <a:bodyPr wrap="square" anchor="t" lIns="0" rIns="0" tIns="0" bIns="0">
-            <a:spAutoFit/>
-          </a:bodyPr>
-          <a:lstStyle/>
-          <a:p>
-            <a:pPr algn="l"/>
-            <a:r>
-              <a:rPr sz="1300" b="0" i="1">
-                <a:solidFill>
-                  <a:srgbClr val="5B5E6B"/>
-                </a:solidFill>
-                <a:latin typeface="Calibri"/>
-              </a:rPr>
-              <a:t>논문 기본 lr(1e-3)로는 거의 적응이 안 일어나 lr=0.1(100배)로 캘리브레이션했다 — entropy·다양성 필터가 ImageNet 1000클래스·대량 스트림 기준이라 클래스 3~8개뿐인 우리 설정엔 유효 gradient가 너무 작았다. 그래도 Taiwan만 마스킹-only를 넘었을 뿐 SHOT은 어디서도 못 넘었고, Bangladesh· PlantDoc은 마스킹-only보다도 낮았다(collapse는 아님) — SHOT을 최종안으로 유지한다.</a:t>
-            </a:r>
-          </a:p>
-        </p:txBody>
-      </p:sp>
-      <p:sp>
-        <p:nvSpPr>
-          <p:cNvPr id="9" name="TextBox 5"/>
-          <p:cNvSpPr txBox="1"/>
-          <p:nvPr/>
-        </p:nvSpPr>
-        <p:spPr>
-          <a:xfrm>
-            <a:off x="11430000" y="6446520"/>
-            <a:ext cx="548640" cy="274320"/>
-          </a:xfrm>
-          <a:prstGeom prst="rect">
-            <a:avLst/>
-          </a:prstGeom>
-          <a:noFill/>
-        </p:spPr>
-        <p:txBody>
-          <a:bodyPr wrap="square" anchor="t" lIns="0" rIns="0" tIns="0" bIns="0">
-            <a:spAutoFit/>
-          </a:bodyPr>
-          <a:lstStyle/>
-          <a:p>
-            <a:pPr algn="r"/>
-            <a:r>
-              <a:rPr sz="1000" b="0" i="0">
-                <a:solidFill>
-                  <a:srgbClr val="5B5E6B"/>
-                </a:solidFill>
-                <a:latin typeface="Calibri"/>
-              </a:rPr>
-              <a:t>30</a:t>
-            </a:r>
-          </a:p>
-        </p:txBody>
-      </p:sp>
-    </p:spTree>
-  </p:cSld>
-  <p:clrMapOvr>
-    <a:masterClrMapping/>
-  </p:clrMapOvr>
-</p:sld>
-</file>
-
-<file path=ppt/slides/slide34.xml><?xml version="1.0" encoding="utf-8"?>
-<p:sld xmlns:a="http://schemas.openxmlformats.org/drawingml/2006/main" xmlns:p="http://schemas.openxmlformats.org/presentationml/2006/main" xmlns:r="http://schemas.openxmlformats.org/officeDocument/2006/relationships">
-  <p:cSld>
-    <p:bg>
-      <p:bgPr>
-        <a:solidFill>
-          <a:srgbClr val="FFFFFF"/>
-        </a:solidFill>
-        <a:effectLst/>
-      </p:bgPr>
-    </p:bg>
-    <p:spTree>
-      <p:nvGrpSpPr>
-        <p:cNvPr id="1" name=""/>
-        <p:cNvGrpSpPr/>
-        <p:nvPr/>
-      </p:nvGrpSpPr>
-      <p:grpSpPr/>
-      <p:sp>
-        <p:nvSpPr>
-          <p:cNvPr id="2" name="TextBox 1"/>
-          <p:cNvSpPr txBox="1"/>
-          <p:nvPr/>
-        </p:nvSpPr>
-        <p:spPr>
-          <a:xfrm>
-            <a:off x="548640" y="292608"/>
-            <a:ext cx="9144000" cy="292608"/>
-          </a:xfrm>
-          <a:prstGeom prst="rect">
-            <a:avLst/>
-          </a:prstGeom>
-          <a:noFill/>
-        </p:spPr>
-        <p:txBody>
-          <a:bodyPr wrap="square" anchor="t" lIns="0" rIns="0" tIns="0" bIns="0">
-            <a:spAutoFit/>
-          </a:bodyPr>
-          <a:lstStyle/>
-          <a:p>
-            <a:pPr algn="l"/>
-            <a:r>
-              <a:rPr sz="1050" b="1" i="0">
-                <a:solidFill>
-                  <a:srgbClr val="2A78D6"/>
-                </a:solidFill>
-                <a:latin typeface="Calibri"/>
-              </a:rPr>
-              <a:t>RESULT 7 · DOMAIN ADAPTATION (11/12)</a:t>
-            </a:r>
-          </a:p>
-        </p:txBody>
-      </p:sp>
-      <p:sp>
-        <p:nvSpPr>
-          <p:cNvPr id="3" name="TextBox 2"/>
-          <p:cNvSpPr txBox="1"/>
-          <p:nvPr/>
-        </p:nvSpPr>
-        <p:spPr>
-          <a:xfrm>
-            <a:off x="548640" y="566928"/>
-            <a:ext cx="10972800" cy="548640"/>
-          </a:xfrm>
-          <a:prstGeom prst="rect">
-            <a:avLst/>
-          </a:prstGeom>
-          <a:noFill/>
-        </p:spPr>
-        <p:txBody>
-          <a:bodyPr wrap="square" anchor="t" lIns="0" rIns="0" tIns="0" bIns="0">
-            <a:spAutoFit/>
-          </a:bodyPr>
-          <a:lstStyle/>
-          <a:p>
-            <a:pPr algn="l"/>
-            <a:r>
-              <a:rPr sz="2400" b="1" i="0">
-                <a:solidFill>
-                  <a:srgbClr val="1E2761"/>
-                </a:solidFill>
-                <a:latin typeface="Cambria"/>
-              </a:rPr>
-              <a:t>추가 방법 종합: UPA(APS·CACL) · R-GV · UCon-SFDA</a:t>
-            </a:r>
-          </a:p>
-        </p:txBody>
-      </p:sp>
-      <p:sp>
-        <p:nvSpPr>
-          <p:cNvPr id="4" name="TextBox 3"/>
-          <p:cNvSpPr txBox="1"/>
-          <p:nvPr/>
-        </p:nvSpPr>
-        <p:spPr>
-          <a:xfrm>
-            <a:off x="548640" y="1200000"/>
-            <a:ext cx="11091672" cy="1150000"/>
-          </a:xfrm>
-          <a:prstGeom prst="rect">
-            <a:avLst/>
-          </a:prstGeom>
-          <a:noFill/>
-        </p:spPr>
-        <p:txBody>
-          <a:bodyPr wrap="square" anchor="t" lIns="0" rIns="0" tIns="0" bIns="0">
-            <a:spAutoFit/>
-          </a:bodyPr>
-          <a:lstStyle/>
-          <a:p>
-            <a:pPr algn="l"/>
-            <a:r>
-              <a:rPr sz="1300" b="0" i="0">
-                <a:solidFill>
-                  <a:srgbClr val="1A1A1A"/>
-                </a:solidFill>
-                <a:latin typeface="Calibri"/>
-              </a:rPr>
-              <a:t>SHOT 심층 진단을 바탕으로 최신 SFDA 방법 3가지를 추가 검토했다 — UPA의 두 구성요소(APS/CACL)를 분리 시도, R-GV(CVPR 2025)는 포스터 기반 근사 구현, UCon-SFDA(ICLR 2025)는 논문 본문까지 확인 후 구현은 보류했다.</a:t>
-            </a:r>
-          </a:p>
-        </p:txBody>
-      </p:sp>
-      <p:graphicFrame>
-        <p:nvGraphicFramePr>
-          <p:cNvPr id="7" name="Table"/>
-          <p:cNvGraphicFramePr>
-            <a:graphicFrameLocks noGrp="1"/>
-          </p:cNvGraphicFramePr>
-          <p:nvPr/>
-        </p:nvGraphicFramePr>
-        <p:xfrm>
-          <a:off x="548640" y="2500000"/>
-          <a:ext cx="10300000" cy="2240000"/>
-        </p:xfrm>
-        <a:graphic>
-          <a:graphicData uri="http://schemas.openxmlformats.org/drawingml/2006/table">
-            <a:tbl>
-              <a:tblPr firstRow="1" bandRow="1">
-                <a:tableStyleId>{5C22544A-7EE6-4342-B048-85BDC9FD1C3A}</a:tableStyleId>
-              </a:tblPr>
-              <a:tblGrid>
-                <a:gridCol w="3400000"/>
-                <a:gridCol w="2300000"/>
-                <a:gridCol w="2300000"/>
-                <a:gridCol w="2300000"/>
-              </a:tblGrid>
-              <a:tr h="560000">
-                <a:tc>
-                  <a:txBody>
-                    <a:bodyPr/>
-                    <a:lstStyle/>
-                    <a:p>
-                      <a:pPr algn="ctr"/>
-                      <a:r>
-                        <a:rPr sz="1200" b="1">
-                          <a:solidFill>
-                            <a:srgbClr val="FFFFFF"/>
-                          </a:solidFill>
-                        </a:rPr>
-                        <a:t>방법</a:t>
-                      </a:r>
-                    </a:p>
-                  </a:txBody>
-                  <a:tcPr anchor="ctr">
-                    <a:solidFill>
-                      <a:srgbClr val="1E2761"/>
-                    </a:solidFill>
-                  </a:tcPr>
-                </a:tc>
-                <a:tc>
-                  <a:txBody>
-                    <a:bodyPr/>
-                    <a:lstStyle/>
-                    <a:p>
-                      <a:pPr algn="ctr"/>
-                      <a:r>
-                        <a:rPr sz="1200" b="1">
-                          <a:solidFill>
-                            <a:srgbClr val="FFFFFF"/>
-                          </a:solidFill>
-                        </a:rPr>
-                        <a:t>Taiwan</a:t>
-                      </a:r>
-                    </a:p>
-                  </a:txBody>
-                  <a:tcPr anchor="ctr">
-                    <a:solidFill>
-                      <a:srgbClr val="1E2761"/>
-                    </a:solidFill>
-                  </a:tcPr>
-                </a:tc>
-                <a:tc>
-                  <a:txBody>
-                    <a:bodyPr/>
-                    <a:lstStyle/>
-                    <a:p>
-                      <a:pPr algn="ctr"/>
-                      <a:r>
-                        <a:rPr sz="1200" b="1">
-                          <a:solidFill>
-                            <a:srgbClr val="FFFFFF"/>
-                          </a:solidFill>
-                        </a:rPr>
-                        <a:t>Bangladesh</a:t>
-                      </a:r>
-                    </a:p>
-                  </a:txBody>
-                  <a:tcPr anchor="ctr">
-                    <a:solidFill>
-                      <a:srgbClr val="1E2761"/>
-                    </a:solidFill>
-                  </a:tcPr>
-                </a:tc>
-                <a:tc>
-                  <a:txBody>
-                    <a:bodyPr/>
-                    <a:lstStyle/>
-                    <a:p>
-                      <a:pPr algn="ctr"/>
-                      <a:r>
-                        <a:rPr sz="1200" b="1">
-                          <a:solidFill>
-                            <a:srgbClr val="FFFFFF"/>
-                          </a:solidFill>
-                        </a:rPr>
-                        <a:t>PlantDoc</a:t>
-                      </a:r>
-                    </a:p>
-                  </a:txBody>
-                  <a:tcPr anchor="ctr">
-                    <a:solidFill>
-                      <a:srgbClr val="1E2761"/>
-                    </a:solidFill>
-                  </a:tcPr>
-                </a:tc>
-              </a:tr>
-              <a:tr h="560000">
-                <a:tc>
-                  <a:txBody>
-                    <a:bodyPr/>
-                    <a:lstStyle/>
-                    <a:p>
-                      <a:pPr algn="ctr"/>
-                      <a:r>
-                        <a:rPr sz="1200" b="0">
-                          <a:solidFill>
-                            <a:srgbClr val="1A1A1A"/>
-                          </a:solidFill>
-                        </a:rPr>
-                        <a:t>SHOT+APS+마스킹(최종)</a:t>
-                      </a:r>
-                    </a:p>
-                  </a:txBody>
-                  <a:tcPr anchor="ctr">
-                    <a:solidFill>
-                      <a:srgbClr val="FFFFFF"/>
-                    </a:solidFill>
-                  </a:tcPr>
-                </a:tc>
-                <a:tc>
-                  <a:txBody>
-                    <a:bodyPr/>
-                    <a:lstStyle/>
-                    <a:p>
-                      <a:pPr algn="ctr"/>
-                      <a:r>
-                        <a:rPr sz="1200" b="1">
-                          <a:solidFill>
-                            <a:srgbClr val="1A1A1A"/>
-                          </a:solidFill>
-                        </a:rPr>
-                        <a:t>44.59%</a:t>
-                      </a:r>
-                    </a:p>
-                  </a:txBody>
-                  <a:tcPr anchor="ctr">
-                    <a:solidFill>
-                      <a:srgbClr val="FFFFFF"/>
-                    </a:solidFill>
-                  </a:tcPr>
-                </a:tc>
-                <a:tc>
-                  <a:txBody>
-                    <a:bodyPr/>
-                    <a:lstStyle/>
-                    <a:p>
-                      <a:pPr algn="ctr"/>
-                      <a:r>
-                        <a:rPr sz="1200" b="1">
-                          <a:solidFill>
-                            <a:srgbClr val="1A1A1A"/>
-                          </a:solidFill>
-                        </a:rPr>
-                        <a:t>30.52%</a:t>
-                      </a:r>
-                    </a:p>
-                  </a:txBody>
-                  <a:tcPr anchor="ctr">
-                    <a:solidFill>
-                      <a:srgbClr val="FFFFFF"/>
-                    </a:solidFill>
-                  </a:tcPr>
-                </a:tc>
-                <a:tc>
-                  <a:txBody>
-                    <a:bodyPr/>
-                    <a:lstStyle/>
-                    <a:p>
-                      <a:pPr algn="ctr"/>
-                      <a:r>
-                        <a:rPr sz="1200" b="1">
-                          <a:solidFill>
-                            <a:srgbClr val="1A1A1A"/>
-                          </a:solidFill>
-                        </a:rPr>
-                        <a:t>19.04%</a:t>
-                      </a:r>
-                    </a:p>
-                  </a:txBody>
-                  <a:tcPr anchor="ctr">
-                    <a:solidFill>
-                      <a:srgbClr val="FFFFFF"/>
-                    </a:solidFill>
-                  </a:tcPr>
-                </a:tc>
-              </a:tr>
-              <a:tr h="560000">
-                <a:tc>
-                  <a:txBody>
-                    <a:bodyPr/>
-                    <a:lstStyle/>
-                    <a:p>
-                      <a:pPr algn="ctr"/>
-                      <a:r>
-                        <a:rPr sz="1200" b="0">
-                          <a:solidFill>
-                            <a:srgbClr val="1A1A1A"/>
-                          </a:solidFill>
-                        </a:rPr>
-                        <a:t>SHOT+APS+CACL</a:t>
-                      </a:r>
-                    </a:p>
-                  </a:txBody>
-                  <a:tcPr anchor="ctr">
-                    <a:solidFill>
-                      <a:srgbClr val="EEF3FC"/>
-                    </a:solidFill>
-                  </a:tcPr>
-                </a:tc>
-                <a:tc>
-                  <a:txBody>
-                    <a:bodyPr/>
-                    <a:lstStyle/>
-                    <a:p>
-                      <a:pPr algn="ctr"/>
-                      <a:r>
-                        <a:rPr sz="1200" b="0">
-                          <a:solidFill>
-                            <a:srgbClr val="1A1A1A"/>
-                          </a:solidFill>
-                        </a:rPr>
-                        <a:t>33~38%대</a:t>
-                      </a:r>
-                    </a:p>
-                  </a:txBody>
-                  <a:tcPr anchor="ctr">
-                    <a:solidFill>
-                      <a:srgbClr val="EEF3FC"/>
-                    </a:solidFill>
-                  </a:tcPr>
-                </a:tc>
-                <a:tc>
-                  <a:txBody>
-                    <a:bodyPr/>
-                    <a:lstStyle/>
-                    <a:p>
-                      <a:pPr algn="ctr"/>
-                      <a:r>
-                        <a:rPr sz="1200" b="0">
-                          <a:solidFill>
-                            <a:srgbClr val="1A1A1A"/>
-                          </a:solidFill>
-                        </a:rPr>
-                        <a:t>중립</a:t>
-                      </a:r>
-                    </a:p>
-                  </a:txBody>
-                  <a:tcPr anchor="ctr">
-                    <a:solidFill>
-                      <a:srgbClr val="EEF3FC"/>
-                    </a:solidFill>
-                  </a:tcPr>
-                </a:tc>
-                <a:tc>
-                  <a:txBody>
-                    <a:bodyPr/>
-                    <a:lstStyle/>
-                    <a:p>
-                      <a:pPr algn="ctr"/>
-                      <a:r>
-                        <a:rPr sz="1200" b="0">
-                          <a:solidFill>
-                            <a:srgbClr val="1A1A1A"/>
-                          </a:solidFill>
-                        </a:rPr>
-                        <a:t>중립</a:t>
-                      </a:r>
-                    </a:p>
-                  </a:txBody>
-                  <a:tcPr anchor="ctr">
-                    <a:solidFill>
-                      <a:srgbClr val="EEF3FC"/>
-                    </a:solidFill>
-                  </a:tcPr>
-                </a:tc>
-              </a:tr>
-              <a:tr h="560000">
-                <a:tc>
-                  <a:txBody>
-                    <a:bodyPr/>
-                    <a:lstStyle/>
-                    <a:p>
-                      <a:pPr algn="ctr"/>
-                      <a:r>
-                        <a:rPr sz="1200" b="0">
-                          <a:solidFill>
-                            <a:srgbClr val="1A1A1A"/>
-                          </a:solidFill>
-                        </a:rPr>
-                        <a:t>R-GV(alignment 제외, 근사)</a:t>
-                      </a:r>
-                    </a:p>
-                  </a:txBody>
-                  <a:tcPr anchor="ctr">
-                    <a:solidFill>
-                      <a:srgbClr val="FFFFFF"/>
-                    </a:solidFill>
-                  </a:tcPr>
-                </a:tc>
-                <a:tc>
-                  <a:txBody>
-                    <a:bodyPr/>
-                    <a:lstStyle/>
-                    <a:p>
-                      <a:pPr algn="ctr"/>
-                      <a:r>
-                        <a:rPr sz="1200" b="0">
-                          <a:solidFill>
-                            <a:srgbClr val="1A1A1A"/>
-                          </a:solidFill>
-                        </a:rPr>
-                        <a:t>36.94%</a:t>
-                      </a:r>
-                    </a:p>
-                  </a:txBody>
-                  <a:tcPr anchor="ctr">
-                    <a:solidFill>
-                      <a:srgbClr val="FFFFFF"/>
-                    </a:solidFill>
-                  </a:tcPr>
-                </a:tc>
-                <a:tc>
-                  <a:txBody>
-                    <a:bodyPr/>
-                    <a:lstStyle/>
-                    <a:p>
-                      <a:pPr algn="ctr"/>
-                      <a:r>
-                        <a:rPr sz="1200" b="0">
-                          <a:solidFill>
-                            <a:srgbClr val="1A1A1A"/>
-                          </a:solidFill>
-                        </a:rPr>
-                        <a:t>30.61%</a:t>
-                      </a:r>
-                    </a:p>
-                  </a:txBody>
-                  <a:tcPr anchor="ctr">
-                    <a:solidFill>
-                      <a:srgbClr val="FFFFFF"/>
-                    </a:solidFill>
-                  </a:tcPr>
-                </a:tc>
-                <a:tc>
-                  <a:txBody>
-                    <a:bodyPr/>
-                    <a:lstStyle/>
-                    <a:p>
-                      <a:pPr algn="ctr"/>
-                      <a:r>
-                        <a:rPr sz="1200" b="0">
-                          <a:solidFill>
-                            <a:srgbClr val="1A1A1A"/>
-                          </a:solidFill>
-                        </a:rPr>
-                        <a:t>17.07%</a:t>
-                      </a:r>
-                    </a:p>
-                  </a:txBody>
-                  <a:tcPr anchor="ctr">
-                    <a:solidFill>
-                      <a:srgbClr val="FFFFFF"/>
-                    </a:solidFill>
-                  </a:tcPr>
-                </a:tc>
-              </a:tr>
-              <a:tr h="560000">
-                <a:tc>
-                  <a:txBody>
-                    <a:bodyPr/>
-                    <a:lstStyle/>
-                    <a:p>
-                      <a:pPr algn="ctr"/>
-                      <a:r>
-                        <a:rPr sz="1200" b="0">
-                          <a:solidFill>
-                            <a:srgbClr val="1A1A1A"/>
-                          </a:solidFill>
-                        </a:rPr>
-                        <a:t>UCon-SFDA</a:t>
-                      </a:r>
-                    </a:p>
-                  </a:txBody>
-                  <a:tcPr anchor="ctr">
-                    <a:solidFill>
-                      <a:srgbClr val="EEF3FC"/>
-                    </a:solidFill>
-                  </a:tcPr>
-                </a:tc>
-                <a:tc>
-                  <a:txBody>
-                    <a:bodyPr/>
-                    <a:lstStyle/>
-                    <a:p>
-                      <a:pPr algn="ctr"/>
-                      <a:r>
-                        <a:rPr sz="1200" b="0">
-                          <a:solidFill>
-                            <a:srgbClr val="1A1A1A"/>
-                          </a:solidFill>
-                        </a:rPr>
-                        <a:t>구현 보류</a:t>
-                      </a:r>
-                    </a:p>
-                  </a:txBody>
-                  <a:tcPr anchor="ctr">
-                    <a:solidFill>
-                      <a:srgbClr val="EEF3FC"/>
-                    </a:solidFill>
-                  </a:tcPr>
-                </a:tc>
-                <a:tc>
-                  <a:txBody>
-                    <a:bodyPr/>
-                    <a:lstStyle/>
-                    <a:p>
-                      <a:pPr algn="ctr"/>
-                      <a:r>
-                        <a:rPr sz="1200" b="0">
-                          <a:solidFill>
-                            <a:srgbClr val="1A1A1A"/>
-                          </a:solidFill>
-                        </a:rPr>
-                        <a:t>구현 보류</a:t>
-                      </a:r>
-                    </a:p>
-                  </a:txBody>
-                  <a:tcPr anchor="ctr">
-                    <a:solidFill>
-                      <a:srgbClr val="EEF3FC"/>
-                    </a:solidFill>
-                  </a:tcPr>
-                </a:tc>
-                <a:tc>
-                  <a:txBody>
-                    <a:bodyPr/>
-                    <a:lstStyle/>
-                    <a:p>
-                      <a:pPr algn="ctr"/>
-                      <a:r>
-                        <a:rPr sz="1200" b="0">
-                          <a:solidFill>
-                            <a:srgbClr val="1A1A1A"/>
-                          </a:solidFill>
-                        </a:rPr>
-                        <a:t>구현 보류</a:t>
-                      </a:r>
-                    </a:p>
-                  </a:txBody>
-                  <a:tcPr anchor="ctr">
-                    <a:solidFill>
-                      <a:srgbClr val="EEF3FC"/>
-                    </a:solidFill>
-                  </a:tcPr>
-                </a:tc>
-              </a:tr>
-            </a:tbl>
-          </a:graphicData>
-        </a:graphic>
-      </p:graphicFrame>
-      <p:sp>
-        <p:nvSpPr>
-          <p:cNvPr id="6" name="TextBox 4"/>
-          <p:cNvSpPr txBox="1"/>
-          <p:nvPr/>
-        </p:nvSpPr>
-        <p:spPr>
-          <a:xfrm>
-            <a:off x="548640" y="5050000"/>
-            <a:ext cx="11091672" cy="1300000"/>
-          </a:xfrm>
-          <a:prstGeom prst="rect">
-            <a:avLst/>
-          </a:prstGeom>
-          <a:noFill/>
-        </p:spPr>
-        <p:txBody>
-          <a:bodyPr wrap="square" anchor="t" lIns="0" rIns="0" tIns="0" bIns="0">
-            <a:spAutoFit/>
-          </a:bodyPr>
-          <a:lstStyle/>
-          <a:p>
-            <a:pPr algn="l"/>
-            <a:r>
-              <a:rPr sz="1250" b="0" i="1">
-                <a:solidFill>
-                  <a:srgbClr val="5B5E6B"/>
-                </a:solidFill>
-                <a:latin typeface="Calibri"/>
-              </a:rPr>
-              <a:t>APS(K=4 KNN 재투표, gamma=1.0)만 Taiwan을 개선(42.04%→44.59%); CACL(confident set 내 contrastive loss)과 R-GV의 semantic alignment는 공통적으로 더 나쁘다 — 고정된 classifier(head.fc)와 이를 움직이려는 contrastive/alignment loss가 구조적으로 안 맞는 것으로 보인다. UCon-SFDA는 CACL과 같은 계열(contrastive loss + partial-label)이라 같은 문제를 겪을 가능성이 높고 하이퍼파라미터도 5개(λ_CL, λ_DC, λ_PL, τ, K_PL)로 많아, 구현하지 않고 판단 근거만 기록으로 남긴다.</a:t>
-            </a:r>
-          </a:p>
-        </p:txBody>
-      </p:sp>
-      <p:sp>
-        <p:nvSpPr>
-          <p:cNvPr id="9" name="TextBox 5"/>
-          <p:cNvSpPr txBox="1"/>
-          <p:nvPr/>
-        </p:nvSpPr>
-        <p:spPr>
-          <a:xfrm>
-            <a:off x="11430000" y="6446520"/>
-            <a:ext cx="548640" cy="274320"/>
-          </a:xfrm>
-          <a:prstGeom prst="rect">
-            <a:avLst/>
-          </a:prstGeom>
-          <a:noFill/>
-        </p:spPr>
-        <p:txBody>
-          <a:bodyPr wrap="square" anchor="t" lIns="0" rIns="0" tIns="0" bIns="0">
-            <a:spAutoFit/>
-          </a:bodyPr>
-          <a:lstStyle/>
-          <a:p>
-            <a:pPr algn="r"/>
-            <a:r>
-              <a:rPr sz="1000" b="0" i="0">
-                <a:solidFill>
-                  <a:srgbClr val="5B5E6B"/>
-                </a:solidFill>
-                <a:latin typeface="Calibri"/>
-              </a:rPr>
-              <a:t>33</a:t>
+              <a:t>28</a:t>
             </a:r>
           </a:p>
         </p:txBody>
@@ -25276,7 +20589,7 @@
                 </a:solidFill>
                 <a:latin typeface="Calibri"/>
               </a:rPr>
-              <a:t>RESULT 7 · DOMAIN ADAPTATION (9/12)</a:t>
+              <a:t>RESULT 7 · DOMAIN ADAPTATION (3/6)</a:t>
             </a:r>
           </a:p>
         </p:txBody>
@@ -25715,686 +21028,7 @@
                 </a:solidFill>
                 <a:latin typeface="Calibri"/>
               </a:rPr>
-              <a:t>31</a:t>
-            </a:r>
-          </a:p>
-        </p:txBody>
-      </p:sp>
-    </p:spTree>
-  </p:cSld>
-  <p:clrMapOvr>
-    <a:masterClrMapping/>
-  </p:clrMapOvr>
-</p:sld>
-</file>
-
-<file path=ppt/slides/slide36.xml><?xml version="1.0" encoding="utf-8"?>
-<p:sld xmlns:a="http://schemas.openxmlformats.org/drawingml/2006/main" xmlns:p="http://schemas.openxmlformats.org/presentationml/2006/main" xmlns:r="http://schemas.openxmlformats.org/officeDocument/2006/relationships">
-  <p:cSld>
-    <p:bg>
-      <p:bgPr>
-        <a:solidFill>
-          <a:srgbClr val="FFFFFF"/>
-        </a:solidFill>
-        <a:effectLst/>
-      </p:bgPr>
-    </p:bg>
-    <p:spTree>
-      <p:nvGrpSpPr>
-        <p:cNvPr id="1" name=""/>
-        <p:cNvGrpSpPr/>
-        <p:nvPr/>
-      </p:nvGrpSpPr>
-      <p:grpSpPr/>
-      <p:sp>
-        <p:nvSpPr>
-          <p:cNvPr id="2" name="TextBox 1"/>
-          <p:cNvSpPr txBox="1"/>
-          <p:nvPr/>
-        </p:nvSpPr>
-        <p:spPr>
-          <a:xfrm>
-            <a:off x="548640" y="292608"/>
-            <a:ext cx="9144000" cy="292608"/>
-          </a:xfrm>
-          <a:prstGeom prst="rect">
-            <a:avLst/>
-          </a:prstGeom>
-          <a:noFill/>
-        </p:spPr>
-        <p:txBody>
-          <a:bodyPr wrap="square" anchor="t" lIns="0" rIns="0" tIns="0" bIns="0">
-            <a:spAutoFit/>
-          </a:bodyPr>
-          <a:lstStyle/>
-          <a:p>
-            <a:pPr algn="l"/>
-            <a:r>
-              <a:rPr sz="1050" b="1" i="0">
-                <a:solidFill>
-                  <a:srgbClr val="2A78D6"/>
-                </a:solidFill>
-                <a:latin typeface="Calibri"/>
-              </a:rPr>
-              <a:t>RESULT 7 · DOMAIN ADAPTATION (5/12)</a:t>
-            </a:r>
-          </a:p>
-        </p:txBody>
-      </p:sp>
-      <p:sp>
-        <p:nvSpPr>
-          <p:cNvPr id="3" name="TextBox 2"/>
-          <p:cNvSpPr txBox="1"/>
-          <p:nvPr/>
-        </p:nvSpPr>
-        <p:spPr>
-          <a:xfrm>
-            <a:off x="548640" y="566928"/>
-            <a:ext cx="10972800" cy="548640"/>
-          </a:xfrm>
-          <a:prstGeom prst="rect">
-            <a:avLst/>
-          </a:prstGeom>
-          <a:noFill/>
-        </p:spPr>
-        <p:txBody>
-          <a:bodyPr wrap="square" anchor="t" lIns="0" rIns="0" tIns="0" bIns="0">
-            <a:spAutoFit/>
-          </a:bodyPr>
-          <a:lstStyle/>
-          <a:p>
-            <a:pPr algn="l"/>
-            <a:r>
-              <a:rPr sz="2400" b="1" i="0">
-                <a:solidFill>
-                  <a:srgbClr val="1E2761"/>
-                </a:solidFill>
-                <a:latin typeface="Cambria"/>
-              </a:rPr>
-              <a:t>3-seed 검증: APS의 개선은 noise 범위였다</a:t>
-            </a:r>
-          </a:p>
-        </p:txBody>
-      </p:sp>
-      <p:sp>
-        <p:nvSpPr>
-          <p:cNvPr id="4" name="TextBox 3"/>
-          <p:cNvSpPr txBox="1"/>
-          <p:nvPr/>
-        </p:nvSpPr>
-        <p:spPr>
-          <a:xfrm>
-            <a:off x="548640" y="1200000"/>
-            <a:ext cx="11091672" cy="1000000"/>
-          </a:xfrm>
-          <a:prstGeom prst="rect">
-            <a:avLst/>
-          </a:prstGeom>
-          <a:noFill/>
-        </p:spPr>
-        <p:txBody>
-          <a:bodyPr wrap="square" anchor="t" lIns="0" rIns="0" tIns="0" bIns="0">
-            <a:spAutoFit/>
-          </a:bodyPr>
-          <a:lstStyle/>
-          <a:p>
-            <a:pPr algn="l"/>
-            <a:r>
-              <a:rPr sz="1300" b="0" i="0">
-                <a:solidFill>
-                  <a:srgbClr val="1A1A1A"/>
-                </a:solidFill>
-                <a:latin typeface="Calibri"/>
-              </a:rPr>
-              <a:t>seed42 하나로는 어떤 개선이 진짜인지 운인지 구분이 안 된다. tiny_cnn_c(96px·bicubic)를 seed123/2026에서 추가 학습해 Source/AdaBN/SHOT/SHOT+APS 비교를 3-seed 평균±표준편차로 다시 봤다.</a:t>
-            </a:r>
-          </a:p>
-        </p:txBody>
-      </p:sp>
-      <p:graphicFrame>
-        <p:nvGraphicFramePr>
-          <p:cNvPr id="7" name="Table"/>
-          <p:cNvGraphicFramePr>
-            <a:graphicFrameLocks noGrp="1"/>
-          </p:cNvGraphicFramePr>
-          <p:nvPr/>
-        </p:nvGraphicFramePr>
-        <p:xfrm>
-          <a:off x="548640" y="2350000"/>
-          <a:ext cx="10300000" cy="2400000"/>
-        </p:xfrm>
-        <a:graphic>
-          <a:graphicData uri="http://schemas.openxmlformats.org/drawingml/2006/table">
-            <a:tbl>
-              <a:tblPr firstRow="1" bandRow="1">
-                <a:tableStyleId>{5C22544A-7EE6-4342-B048-85BDC9FD1C3A}</a:tableStyleId>
-              </a:tblPr>
-              <a:tblGrid>
-                <a:gridCol w="3400000"/>
-                <a:gridCol w="2300000"/>
-                <a:gridCol w="2300000"/>
-                <a:gridCol w="2300000"/>
-              </a:tblGrid>
-              <a:tr h="560000">
-                <a:tc>
-                  <a:txBody>
-                    <a:bodyPr/>
-                    <a:lstStyle/>
-                    <a:p>
-                      <a:pPr algn="ctr"/>
-                      <a:r>
-                        <a:rPr sz="1200" b="1">
-                          <a:solidFill>
-                            <a:srgbClr val="FFFFFF"/>
-                          </a:solidFill>
-                        </a:rPr>
-                        <a:t>방법</a:t>
-                      </a:r>
-                    </a:p>
-                  </a:txBody>
-                  <a:tcPr anchor="ctr">
-                    <a:solidFill>
-                      <a:srgbClr val="1E2761"/>
-                    </a:solidFill>
-                  </a:tcPr>
-                </a:tc>
-                <a:tc>
-                  <a:txBody>
-                    <a:bodyPr/>
-                    <a:lstStyle/>
-                    <a:p>
-                      <a:pPr algn="ctr"/>
-                      <a:r>
-                        <a:rPr sz="1200" b="1">
-                          <a:solidFill>
-                            <a:srgbClr val="FFFFFF"/>
-                          </a:solidFill>
-                        </a:rPr>
-                        <a:t>Taiwan</a:t>
-                      </a:r>
-                    </a:p>
-                  </a:txBody>
-                  <a:tcPr anchor="ctr">
-                    <a:solidFill>
-                      <a:srgbClr val="1E2761"/>
-                    </a:solidFill>
-                  </a:tcPr>
-                </a:tc>
-                <a:tc>
-                  <a:txBody>
-                    <a:bodyPr/>
-                    <a:lstStyle/>
-                    <a:p>
-                      <a:pPr algn="ctr"/>
-                      <a:r>
-                        <a:rPr sz="1200" b="1">
-                          <a:solidFill>
-                            <a:srgbClr val="FFFFFF"/>
-                          </a:solidFill>
-                        </a:rPr>
-                        <a:t>Bangladesh</a:t>
-                      </a:r>
-                    </a:p>
-                  </a:txBody>
-                  <a:tcPr anchor="ctr">
-                    <a:solidFill>
-                      <a:srgbClr val="1E2761"/>
-                    </a:solidFill>
-                  </a:tcPr>
-                </a:tc>
-                <a:tc>
-                  <a:txBody>
-                    <a:bodyPr/>
-                    <a:lstStyle/>
-                    <a:p>
-                      <a:pPr algn="ctr"/>
-                      <a:r>
-                        <a:rPr sz="1200" b="1">
-                          <a:solidFill>
-                            <a:srgbClr val="FFFFFF"/>
-                          </a:solidFill>
-                        </a:rPr>
-                        <a:t>PlantDoc</a:t>
-                      </a:r>
-                    </a:p>
-                  </a:txBody>
-                  <a:tcPr anchor="ctr">
-                    <a:solidFill>
-                      <a:srgbClr val="1E2761"/>
-                    </a:solidFill>
-                  </a:tcPr>
-                </a:tc>
-              </a:tr>
-              <a:tr h="560000">
-                <a:tc>
-                  <a:txBody>
-                    <a:bodyPr/>
-                    <a:lstStyle/>
-                    <a:p>
-                      <a:pPr algn="ctr"/>
-                      <a:r>
-                        <a:rPr sz="1200" b="0">
-                          <a:solidFill>
-                            <a:srgbClr val="1A1A1A"/>
-                          </a:solidFill>
-                        </a:rPr>
-                        <a:t>Source+마스킹</a:t>
-                      </a:r>
-                    </a:p>
-                  </a:txBody>
-                  <a:tcPr anchor="ctr">
-                    <a:solidFill>
-                      <a:srgbClr val="FFFFFF"/>
-                    </a:solidFill>
-                  </a:tcPr>
-                </a:tc>
-                <a:tc>
-                  <a:txBody>
-                    <a:bodyPr/>
-                    <a:lstStyle/>
-                    <a:p>
-                      <a:pPr algn="ctr"/>
-                      <a:r>
-                        <a:rPr sz="1200" b="0">
-                          <a:solidFill>
-                            <a:srgbClr val="1A1A1A"/>
-                          </a:solidFill>
-                        </a:rPr>
-                        <a:t>32.27% ±0.79</a:t>
-                      </a:r>
-                    </a:p>
-                  </a:txBody>
-                  <a:tcPr anchor="ctr">
-                    <a:solidFill>
-                      <a:srgbClr val="FFFFFF"/>
-                    </a:solidFill>
-                  </a:tcPr>
-                </a:tc>
-                <a:tc>
-                  <a:txBody>
-                    <a:bodyPr/>
-                    <a:lstStyle/>
-                    <a:p>
-                      <a:pPr algn="ctr"/>
-                      <a:r>
-                        <a:rPr sz="1200" b="0">
-                          <a:solidFill>
-                            <a:srgbClr val="1A1A1A"/>
-                          </a:solidFill>
-                        </a:rPr>
-                        <a:t>16.50% ±4.58</a:t>
-                      </a:r>
-                    </a:p>
-                  </a:txBody>
-                  <a:tcPr anchor="ctr">
-                    <a:solidFill>
-                      <a:srgbClr val="FFFFFF"/>
-                    </a:solidFill>
-                  </a:tcPr>
-                </a:tc>
-                <a:tc>
-                  <a:txBody>
-                    <a:bodyPr/>
-                    <a:lstStyle/>
-                    <a:p>
-                      <a:pPr algn="ctr"/>
-                      <a:r>
-                        <a:rPr sz="1200" b="0">
-                          <a:solidFill>
-                            <a:srgbClr val="1A1A1A"/>
-                          </a:solidFill>
-                        </a:rPr>
-                        <a:t>20.17% ±1.79</a:t>
-                      </a:r>
-                    </a:p>
-                  </a:txBody>
-                  <a:tcPr anchor="ctr">
-                    <a:solidFill>
-                      <a:srgbClr val="FFFFFF"/>
-                    </a:solidFill>
-                  </a:tcPr>
-                </a:tc>
-              </a:tr>
-              <a:tr h="560000">
-                <a:tc>
-                  <a:txBody>
-                    <a:bodyPr/>
-                    <a:lstStyle/>
-                    <a:p>
-                      <a:pPr algn="ctr"/>
-                      <a:r>
-                        <a:rPr sz="1200" b="0">
-                          <a:solidFill>
-                            <a:srgbClr val="1A1A1A"/>
-                          </a:solidFill>
-                        </a:rPr>
-                        <a:t>AdaBN+마스킹</a:t>
-                      </a:r>
-                    </a:p>
-                  </a:txBody>
-                  <a:tcPr anchor="ctr">
-                    <a:solidFill>
-                      <a:srgbClr val="EEF3FC"/>
-                    </a:solidFill>
-                  </a:tcPr>
-                </a:tc>
-                <a:tc>
-                  <a:txBody>
-                    <a:bodyPr/>
-                    <a:lstStyle/>
-                    <a:p>
-                      <a:pPr algn="ctr"/>
-                      <a:r>
-                        <a:rPr sz="1200" b="0">
-                          <a:solidFill>
-                            <a:srgbClr val="1A1A1A"/>
-                          </a:solidFill>
-                        </a:rPr>
-                        <a:t>35.24% ±2.57</a:t>
-                      </a:r>
-                    </a:p>
-                  </a:txBody>
-                  <a:tcPr anchor="ctr">
-                    <a:solidFill>
-                      <a:srgbClr val="EEF3FC"/>
-                    </a:solidFill>
-                  </a:tcPr>
-                </a:tc>
-                <a:tc>
-                  <a:txBody>
-                    <a:bodyPr/>
-                    <a:lstStyle/>
-                    <a:p>
-                      <a:pPr algn="ctr"/>
-                      <a:r>
-                        <a:rPr sz="1200" b="0">
-                          <a:solidFill>
-                            <a:srgbClr val="1A1A1A"/>
-                          </a:solidFill>
-                        </a:rPr>
-                        <a:t>15.14% ±2.44</a:t>
-                      </a:r>
-                    </a:p>
-                  </a:txBody>
-                  <a:tcPr anchor="ctr">
-                    <a:solidFill>
-                      <a:srgbClr val="EEF3FC"/>
-                    </a:solidFill>
-                  </a:tcPr>
-                </a:tc>
-                <a:tc>
-                  <a:txBody>
-                    <a:bodyPr/>
-                    <a:lstStyle/>
-                    <a:p>
-                      <a:pPr algn="ctr"/>
-                      <a:r>
-                        <a:rPr sz="1200" b="0">
-                          <a:solidFill>
-                            <a:srgbClr val="1A1A1A"/>
-                          </a:solidFill>
-                        </a:rPr>
-                        <a:t>16.83% ±1.80</a:t>
-                      </a:r>
-                    </a:p>
-                  </a:txBody>
-                  <a:tcPr anchor="ctr">
-                    <a:solidFill>
-                      <a:srgbClr val="EEF3FC"/>
-                    </a:solidFill>
-                  </a:tcPr>
-                </a:tc>
-              </a:tr>
-              <a:tr h="560000">
-                <a:tc>
-                  <a:txBody>
-                    <a:bodyPr/>
-                    <a:lstStyle/>
-                    <a:p>
-                      <a:pPr algn="ctr"/>
-                      <a:r>
-                        <a:rPr sz="1200" b="0">
-                          <a:solidFill>
-                            <a:srgbClr val="1A1A1A"/>
-                          </a:solidFill>
-                        </a:rPr>
-                        <a:t>SHOT+마스킹(최종)</a:t>
-                      </a:r>
-                    </a:p>
-                  </a:txBody>
-                  <a:tcPr anchor="ctr">
-                    <a:solidFill>
-                      <a:srgbClr val="FFFFFF"/>
-                    </a:solidFill>
-                  </a:tcPr>
-                </a:tc>
-                <a:tc>
-                  <a:txBody>
-                    <a:bodyPr/>
-                    <a:lstStyle/>
-                    <a:p>
-                      <a:pPr algn="ctr"/>
-                      <a:r>
-                        <a:rPr sz="1200" b="1">
-                          <a:solidFill>
-                            <a:srgbClr val="1A1A1A"/>
-                          </a:solidFill>
-                        </a:rPr>
-                        <a:t>37.58% ±5.86</a:t>
-                      </a:r>
-                    </a:p>
-                  </a:txBody>
-                  <a:tcPr anchor="ctr">
-                    <a:solidFill>
-                      <a:srgbClr val="FFFFFF"/>
-                    </a:solidFill>
-                  </a:tcPr>
-                </a:tc>
-                <a:tc>
-                  <a:txBody>
-                    <a:bodyPr/>
-                    <a:lstStyle/>
-                    <a:p>
-                      <a:pPr algn="ctr"/>
-                      <a:r>
-                        <a:rPr sz="1200" b="1">
-                          <a:solidFill>
-                            <a:srgbClr val="1A1A1A"/>
-                          </a:solidFill>
-                        </a:rPr>
-                        <a:t>24.28% ±5.62</a:t>
-                      </a:r>
-                    </a:p>
-                  </a:txBody>
-                  <a:tcPr anchor="ctr">
-                    <a:solidFill>
-                      <a:srgbClr val="FFFFFF"/>
-                    </a:solidFill>
-                  </a:tcPr>
-                </a:tc>
-                <a:tc>
-                  <a:txBody>
-                    <a:bodyPr/>
-                    <a:lstStyle/>
-                    <a:p>
-                      <a:pPr algn="ctr"/>
-                      <a:r>
-                        <a:rPr sz="1200" b="1">
-                          <a:solidFill>
-                            <a:srgbClr val="1A1A1A"/>
-                          </a:solidFill>
-                        </a:rPr>
-                        <a:t>19.75% ±1.40</a:t>
-                      </a:r>
-                    </a:p>
-                  </a:txBody>
-                  <a:tcPr anchor="ctr">
-                    <a:solidFill>
-                      <a:srgbClr val="FFFFFF"/>
-                    </a:solidFill>
-                  </a:tcPr>
-                </a:tc>
-              </a:tr>
-              <a:tr h="560000">
-                <a:tc>
-                  <a:txBody>
-                    <a:bodyPr/>
-                    <a:lstStyle/>
-                    <a:p>
-                      <a:pPr algn="ctr"/>
-                      <a:r>
-                        <a:rPr sz="1200" b="0">
-                          <a:solidFill>
-                            <a:srgbClr val="1A1A1A"/>
-                          </a:solidFill>
-                        </a:rPr>
-                        <a:t>SHOT+APS+마스킹</a:t>
-                      </a:r>
-                    </a:p>
-                  </a:txBody>
-                  <a:tcPr anchor="ctr">
-                    <a:solidFill>
-                      <a:srgbClr val="EEF3FC"/>
-                    </a:solidFill>
-                  </a:tcPr>
-                </a:tc>
-                <a:tc>
-                  <a:txBody>
-                    <a:bodyPr/>
-                    <a:lstStyle/>
-                    <a:p>
-                      <a:pPr algn="ctr"/>
-                      <a:r>
-                        <a:rPr sz="1200" b="0">
-                          <a:solidFill>
-                            <a:srgbClr val="1A1A1A"/>
-                          </a:solidFill>
-                        </a:rPr>
-                        <a:t>36.41% ±6.29</a:t>
-                      </a:r>
-                    </a:p>
-                  </a:txBody>
-                  <a:tcPr anchor="ctr">
-                    <a:solidFill>
-                      <a:srgbClr val="EEF3FC"/>
-                    </a:solidFill>
-                  </a:tcPr>
-                </a:tc>
-                <a:tc>
-                  <a:txBody>
-                    <a:bodyPr/>
-                    <a:lstStyle/>
-                    <a:p>
-                      <a:pPr algn="ctr"/>
-                      <a:r>
-                        <a:rPr sz="1200" b="0">
-                          <a:solidFill>
-                            <a:srgbClr val="1A1A1A"/>
-                          </a:solidFill>
-                        </a:rPr>
-                        <a:t>24.07% ±4.88</a:t>
-                      </a:r>
-                    </a:p>
-                  </a:txBody>
-                  <a:tcPr anchor="ctr">
-                    <a:solidFill>
-                      <a:srgbClr val="EEF3FC"/>
-                    </a:solidFill>
-                  </a:tcPr>
-                </a:tc>
-                <a:tc>
-                  <a:txBody>
-                    <a:bodyPr/>
-                    <a:lstStyle/>
-                    <a:p>
-                      <a:pPr algn="ctr"/>
-                      <a:r>
-                        <a:rPr sz="1200" b="0">
-                          <a:solidFill>
-                            <a:srgbClr val="1A1A1A"/>
-                          </a:solidFill>
-                        </a:rPr>
-                        <a:t>18.95% ±0.69</a:t>
-                      </a:r>
-                    </a:p>
-                  </a:txBody>
-                  <a:tcPr anchor="ctr">
-                    <a:solidFill>
-                      <a:srgbClr val="EEF3FC"/>
-                    </a:solidFill>
-                  </a:tcPr>
-                </a:tc>
-              </a:tr>
-            </a:tbl>
-          </a:graphicData>
-        </a:graphic>
-      </p:graphicFrame>
-      <p:sp>
-        <p:nvSpPr>
-          <p:cNvPr id="6" name="TextBox 4"/>
-          <p:cNvSpPr txBox="1"/>
-          <p:nvPr/>
-        </p:nvSpPr>
-        <p:spPr>
-          <a:xfrm>
-            <a:off x="548640" y="5050000"/>
-            <a:ext cx="11091672" cy="1300000"/>
-          </a:xfrm>
-          <a:prstGeom prst="rect">
-            <a:avLst/>
-          </a:prstGeom>
-          <a:noFill/>
-        </p:spPr>
-        <p:txBody>
-          <a:bodyPr wrap="square" anchor="t" lIns="0" rIns="0" tIns="0" bIns="0">
-            <a:spAutoFit/>
-          </a:bodyPr>
-          <a:lstStyle/>
-          <a:p>
-            <a:pPr algn="l"/>
-            <a:r>
-              <a:rPr sz="1200" b="0" i="1">
-                <a:solidFill>
-                  <a:srgbClr val="5B5E6B"/>
-                </a:solidFill>
-                <a:latin typeface="Calibri"/>
-              </a:rPr>
-              <a:t>seed42 단일 실행에서는 APS가 Taiwan을 42.04%→44.59%로 개선하는 것처럼 보였지만, 3-seed 평균으로 보면 SHOT+APS가 SHOT보다 모든 데이터셋에서 오히려 근소하게 낮다(Taiwan -1.17%p, Bangladesh -0.21%p, PlantDoc -0.80%p) — 그 차이는 표준편차(5~6%p)보다 작아 noise 범위를 벗어나지 못한다. seed42가 APS에 우연히 유리했던 것일 뿐이라 판단해, 최종 파이프라인을 APS 없는 순수 SHOT(epoch=2)로 확정한다. SHOT 자체도 seed 표준편차가 5~6%p로 커서, 단일 seed 결과를 과신하면 안 된다는 것도 같이 확인했다.</a:t>
-            </a:r>
-          </a:p>
-        </p:txBody>
-      </p:sp>
-      <p:sp>
-        <p:nvSpPr>
-          <p:cNvPr id="9" name="TextBox 5"/>
-          <p:cNvSpPr txBox="1"/>
-          <p:nvPr/>
-        </p:nvSpPr>
-        <p:spPr>
-          <a:xfrm>
-            <a:off x="11430000" y="6446520"/>
-            <a:ext cx="548640" cy="274320"/>
-          </a:xfrm>
-          <a:prstGeom prst="rect">
-            <a:avLst/>
-          </a:prstGeom>
-          <a:noFill/>
-        </p:spPr>
-        <p:txBody>
-          <a:bodyPr wrap="square" anchor="t" lIns="0" rIns="0" tIns="0" bIns="0">
-            <a:spAutoFit/>
-          </a:bodyPr>
-          <a:lstStyle/>
-          <a:p>
-            <a:pPr algn="r"/>
-            <a:r>
-              <a:rPr sz="1000" b="0" i="0">
-                <a:solidFill>
-                  <a:srgbClr val="5B5E6B"/>
-                </a:solidFill>
-                <a:latin typeface="Calibri"/>
-              </a:rPr>
-              <a:t>27</a:t>
+              <a:t>25</a:t>
             </a:r>
           </a:p>
         </p:txBody>
@@ -26455,7 +21089,7 @@
                 </a:solidFill>
                 <a:latin typeface="Calibri"/>
               </a:rPr>
-              <a:t>RESULT 7 · DOMAIN ADAPTATION (10/12)</a:t>
+              <a:t>RESULT 7 · DOMAIN ADAPTATION (2/6)</a:t>
             </a:r>
           </a:p>
         </p:txBody>
@@ -26723,7 +21357,7 @@
                             <a:srgbClr val="1A1A1A"/>
                           </a:solidFill>
                         </a:rPr>
-                        <a:t>37.58% ±5.86</a:t>
+                        <a:t>38.11% ±5.81</a:t>
                       </a:r>
                     </a:p>
                   </a:txBody>
@@ -26813,7 +21447,7 @@
                             <a:srgbClr val="1A1A1A"/>
                           </a:solidFill>
                         </a:rPr>
-                        <a:t>24.28% ±5.62</a:t>
+                        <a:t>27.40% ±3.85</a:t>
                       </a:r>
                     </a:p>
                   </a:txBody>
@@ -26903,7 +21537,7 @@
                             <a:srgbClr val="1A1A1A"/>
                           </a:solidFill>
                         </a:rPr>
-                        <a:t>19.75% ±1.40</a:t>
+                        <a:t>19.09% ±1.18</a:t>
                       </a:r>
                     </a:p>
                   </a:txBody>
@@ -26948,7 +21582,7 @@
                 </a:solidFill>
                 <a:latin typeface="Calibri"/>
               </a:rPr>
-              <a:t>Taiwan만 이론적으로 60%를 넘을 여지가 있다 — 실제로 seed42 한 번은 하이퍼파라미터를 끝까지 밀어 63.06%까지 봤지만, 3-seed로 검증하니 46.39% ±12.46으로 재현되지 않았다(8/12 슬라이드). AaD·CoWA 등 추가로 시도한 최신 방법들도 SHOT을 못 넘었다. Bangladesh는 오라클 상한(58.61%) 자체가 60%에 못 미쳐 “완벽한 적응 기법”을 찾아도 구조적으로 60%를 보장할 수 없고, PlantDoc은 정답을 줘도 23%라 적응 문제가 아니라 feature 표현력의 문제다 — source 학습 데이터·증강을 바꾸지 않는 한(이 프로젝트 범위 밖) 더 올릴 수 없다는 게 최종 진단이다.</a:t>
+              <a:t>Taiwan만 이론적으로 60%를 넘을 여지가 있다 — 하이퍼파라미터를 끝까지 밀면 seed42 한 번은 63%까지 봤지만, 3-seed로 검증하면 46.39% ±12.46으로 재현되지 않았다(5/6 슬라이드). Bangladesh는 오라클 상한(58.61%) 자체가 60%에 못 미쳐 “완벽한 적응 기법”을 찾아도 구조적으로 60%를 보장할 수 없고, PlantDoc은 정답을 줘도 23%라 적응 문제가 아니라 feature 표현력의 문제다 — source 학습 데이터·증강을 바꾸지 않는 한(이 프로젝트 범위 밖) 더 올릴 수 없다는 게 최종 진단이다.</a:t>
             </a:r>
           </a:p>
         </p:txBody>
@@ -26983,7 +21617,1275 @@
                 </a:solidFill>
                 <a:latin typeface="Calibri"/>
               </a:rPr>
-              <a:t>32</a:t>
+              <a:t>24</a:t>
+            </a:r>
+          </a:p>
+        </p:txBody>
+      </p:sp>
+    </p:spTree>
+  </p:cSld>
+  <p:clrMapOvr>
+    <a:masterClrMapping/>
+  </p:clrMapOvr>
+</p:sld>
+</file>
+
+<file path=ppt/slides/slide38.xml><?xml version="1.0" encoding="utf-8"?>
+<p:sld xmlns:a="http://schemas.openxmlformats.org/drawingml/2006/main" xmlns:p="http://schemas.openxmlformats.org/presentationml/2006/main" xmlns:r="http://schemas.openxmlformats.org/officeDocument/2006/relationships">
+  <p:cSld>
+    <p:bg>
+      <p:bgPr>
+        <a:solidFill>
+          <a:srgbClr val="FFFFFF"/>
+        </a:solidFill>
+        <a:effectLst/>
+      </p:bgPr>
+    </p:bg>
+    <p:spTree>
+      <p:nvGrpSpPr>
+        <p:cNvPr id="1" name=""/>
+        <p:cNvGrpSpPr/>
+        <p:nvPr/>
+      </p:nvGrpSpPr>
+      <p:grpSpPr/>
+      <p:sp>
+        <p:nvSpPr>
+          <p:cNvPr id="2" name="TextBox 1"/>
+          <p:cNvSpPr txBox="1"/>
+          <p:nvPr/>
+        </p:nvSpPr>
+        <p:spPr>
+          <a:xfrm>
+            <a:off x="548640" y="292608"/>
+            <a:ext cx="9144000" cy="292608"/>
+          </a:xfrm>
+          <a:prstGeom prst="rect">
+            <a:avLst/>
+          </a:prstGeom>
+          <a:noFill/>
+        </p:spPr>
+        <p:txBody>
+          <a:bodyPr wrap="square" anchor="t" lIns="0" rIns="0" tIns="0" bIns="0">
+            <a:spAutoFit/>
+          </a:bodyPr>
+          <a:lstStyle/>
+          <a:p>
+            <a:pPr algn="l"/>
+            <a:r>
+              <a:rPr sz="1050" b="1" i="0">
+                <a:solidFill>
+                  <a:srgbClr val="2A78D6"/>
+                </a:solidFill>
+                <a:latin typeface="Calibri"/>
+              </a:rPr>
+              <a:t>RESULT 7 · DOMAIN ADAPTATION (1/6)</a:t>
+            </a:r>
+          </a:p>
+        </p:txBody>
+      </p:sp>
+      <p:sp>
+        <p:nvSpPr>
+          <p:cNvPr id="3" name="TextBox 2"/>
+          <p:cNvSpPr txBox="1"/>
+          <p:nvPr/>
+        </p:nvSpPr>
+        <p:spPr>
+          <a:xfrm>
+            <a:off x="548640" y="566928"/>
+            <a:ext cx="10972800" cy="548640"/>
+          </a:xfrm>
+          <a:prstGeom prst="rect">
+            <a:avLst/>
+          </a:prstGeom>
+          <a:noFill/>
+        </p:spPr>
+        <p:txBody>
+          <a:bodyPr wrap="square" anchor="t" lIns="0" rIns="0" tIns="0" bIns="0">
+            <a:spAutoFit/>
+          </a:bodyPr>
+          <a:lstStyle/>
+          <a:p>
+            <a:pPr algn="l"/>
+            <a:r>
+              <a:rPr sz="2400" b="1" i="0">
+                <a:solidFill>
+                  <a:srgbClr val="1E2761"/>
+                </a:solidFill>
+                <a:latin typeface="Cambria"/>
+              </a:rPr>
+              <a:t>최종 결과: 마스킹 + SHOT + AaD (3-seed 검증 완료)</a:t>
+            </a:r>
+          </a:p>
+        </p:txBody>
+      </p:sp>
+      <p:sp>
+        <p:nvSpPr>
+          <p:cNvPr id="4" name="TextBox 3"/>
+          <p:cNvSpPr txBox="1"/>
+          <p:nvPr/>
+        </p:nvSpPr>
+        <p:spPr>
+          <a:xfrm>
+            <a:off x="548640" y="1200000"/>
+            <a:ext cx="11091672" cy="1050000"/>
+          </a:xfrm>
+          <a:prstGeom prst="rect">
+            <a:avLst/>
+          </a:prstGeom>
+          <a:noFill/>
+        </p:spPr>
+        <p:txBody>
+          <a:bodyPr wrap="square" anchor="t" lIns="0" rIns="0" tIns="0" bIns="0">
+            <a:spAutoFit/>
+          </a:bodyPr>
+          <a:lstStyle/>
+          <a:p>
+            <a:pPr algn="l"/>
+            <a:r>
+              <a:rPr sz="1300" b="0" i="0">
+                <a:solidFill>
+                  <a:srgbClr val="1A1A1A"/>
+                </a:solidFill>
+                <a:latin typeface="Calibri"/>
+              </a:rPr>
+              <a:t>AdaBN·TENT·SHOT·EATA·UPA·R-GV·AaD·CoWA 등 9가지 방법을 비교했다. 최종 채택: class-restriction 마스킹(항상 적용) + SHOT(epoch=2) + AaD attract/disperse 보조 손실(weight=1.0) — seed 42/123/2026 3회 평균으로 검증된 구성이다.</a:t>
+            </a:r>
+          </a:p>
+        </p:txBody>
+      </p:sp>
+      <p:graphicFrame>
+        <p:nvGraphicFramePr>
+          <p:cNvPr id="7" name="Table"/>
+          <p:cNvGraphicFramePr>
+            <a:graphicFrameLocks noGrp="1"/>
+          </p:cNvGraphicFramePr>
+          <p:nvPr/>
+        </p:nvGraphicFramePr>
+        <p:xfrm>
+          <a:off x="548640" y="2350000"/>
+          <a:ext cx="11200000" cy="2400000"/>
+        </p:xfrm>
+        <a:graphic>
+          <a:graphicData uri="http://schemas.openxmlformats.org/drawingml/2006/table">
+            <a:tbl>
+              <a:tblPr firstRow="1" bandRow="1">
+                <a:tableStyleId>{5C22544A-7EE6-4342-B048-85BDC9FD1C3A}</a:tableStyleId>
+              </a:tblPr>
+              <a:tblGrid>
+                <a:gridCol w="3400000"/>
+                <a:gridCol w="2600000"/>
+                <a:gridCol w="2600000"/>
+                <a:gridCol w="2600000"/>
+              </a:tblGrid>
+              <a:tr h="560000">
+                <a:tc>
+                  <a:txBody>
+                    <a:bodyPr/>
+                    <a:lstStyle/>
+                    <a:p>
+                      <a:pPr algn="ctr"/>
+                      <a:r>
+                        <a:rPr sz="1200" b="1">
+                          <a:solidFill>
+                            <a:srgbClr val="FFFFFF"/>
+                          </a:solidFill>
+                        </a:rPr>
+                        <a:t>방법</a:t>
+                      </a:r>
+                    </a:p>
+                  </a:txBody>
+                  <a:tcPr anchor="ctr">
+                    <a:solidFill>
+                      <a:srgbClr val="1E2761"/>
+                    </a:solidFill>
+                  </a:tcPr>
+                </a:tc>
+                <a:tc>
+                  <a:txBody>
+                    <a:bodyPr/>
+                    <a:lstStyle/>
+                    <a:p>
+                      <a:pPr algn="ctr"/>
+                      <a:r>
+                        <a:rPr sz="1200" b="1">
+                          <a:solidFill>
+                            <a:srgbClr val="FFFFFF"/>
+                          </a:solidFill>
+                        </a:rPr>
+                        <a:t>Taiwan</a:t>
+                      </a:r>
+                    </a:p>
+                  </a:txBody>
+                  <a:tcPr anchor="ctr">
+                    <a:solidFill>
+                      <a:srgbClr val="1E2761"/>
+                    </a:solidFill>
+                  </a:tcPr>
+                </a:tc>
+                <a:tc>
+                  <a:txBody>
+                    <a:bodyPr/>
+                    <a:lstStyle/>
+                    <a:p>
+                      <a:pPr algn="ctr"/>
+                      <a:r>
+                        <a:rPr sz="1200" b="1">
+                          <a:solidFill>
+                            <a:srgbClr val="FFFFFF"/>
+                          </a:solidFill>
+                        </a:rPr>
+                        <a:t>Bangladesh</a:t>
+                      </a:r>
+                    </a:p>
+                  </a:txBody>
+                  <a:tcPr anchor="ctr">
+                    <a:solidFill>
+                      <a:srgbClr val="1E2761"/>
+                    </a:solidFill>
+                  </a:tcPr>
+                </a:tc>
+                <a:tc>
+                  <a:txBody>
+                    <a:bodyPr/>
+                    <a:lstStyle/>
+                    <a:p>
+                      <a:pPr algn="ctr"/>
+                      <a:r>
+                        <a:rPr sz="1200" b="1">
+                          <a:solidFill>
+                            <a:srgbClr val="FFFFFF"/>
+                          </a:solidFill>
+                        </a:rPr>
+                        <a:t>PlantDoc</a:t>
+                      </a:r>
+                    </a:p>
+                  </a:txBody>
+                  <a:tcPr anchor="ctr">
+                    <a:solidFill>
+                      <a:srgbClr val="1E2761"/>
+                    </a:solidFill>
+                  </a:tcPr>
+                </a:tc>
+              </a:tr>
+              <a:tr h="560000">
+                <a:tc>
+                  <a:txBody>
+                    <a:bodyPr/>
+                    <a:lstStyle/>
+                    <a:p>
+                      <a:pPr algn="ctr"/>
+                      <a:r>
+                        <a:rPr sz="1200" b="0">
+                          <a:solidFill>
+                            <a:srgbClr val="1A1A1A"/>
+                          </a:solidFill>
+                        </a:rPr>
+                        <a:t>Source+마스킹</a:t>
+                      </a:r>
+                    </a:p>
+                  </a:txBody>
+                  <a:tcPr anchor="ctr">
+                    <a:solidFill>
+                      <a:srgbClr val="FFFFFF"/>
+                    </a:solidFill>
+                  </a:tcPr>
+                </a:tc>
+                <a:tc>
+                  <a:txBody>
+                    <a:bodyPr/>
+                    <a:lstStyle/>
+                    <a:p>
+                      <a:pPr algn="ctr"/>
+                      <a:r>
+                        <a:rPr sz="1200" b="0">
+                          <a:solidFill>
+                            <a:srgbClr val="1A1A1A"/>
+                          </a:solidFill>
+                        </a:rPr>
+                        <a:t>32.27% ±0.79</a:t>
+                      </a:r>
+                    </a:p>
+                  </a:txBody>
+                  <a:tcPr anchor="ctr">
+                    <a:solidFill>
+                      <a:srgbClr val="FFFFFF"/>
+                    </a:solidFill>
+                  </a:tcPr>
+                </a:tc>
+                <a:tc>
+                  <a:txBody>
+                    <a:bodyPr/>
+                    <a:lstStyle/>
+                    <a:p>
+                      <a:pPr algn="ctr"/>
+                      <a:r>
+                        <a:rPr sz="1200" b="0">
+                          <a:solidFill>
+                            <a:srgbClr val="1A1A1A"/>
+                          </a:solidFill>
+                        </a:rPr>
+                        <a:t>16.50% ±4.58</a:t>
+                      </a:r>
+                    </a:p>
+                  </a:txBody>
+                  <a:tcPr anchor="ctr">
+                    <a:solidFill>
+                      <a:srgbClr val="FFFFFF"/>
+                    </a:solidFill>
+                  </a:tcPr>
+                </a:tc>
+                <a:tc>
+                  <a:txBody>
+                    <a:bodyPr/>
+                    <a:lstStyle/>
+                    <a:p>
+                      <a:pPr algn="ctr"/>
+                      <a:r>
+                        <a:rPr sz="1200" b="0">
+                          <a:solidFill>
+                            <a:srgbClr val="1A1A1A"/>
+                          </a:solidFill>
+                        </a:rPr>
+                        <a:t>20.17% ±1.79</a:t>
+                      </a:r>
+                    </a:p>
+                  </a:txBody>
+                  <a:tcPr anchor="ctr">
+                    <a:solidFill>
+                      <a:srgbClr val="FFFFFF"/>
+                    </a:solidFill>
+                  </a:tcPr>
+                </a:tc>
+              </a:tr>
+              <a:tr h="560000">
+                <a:tc>
+                  <a:txBody>
+                    <a:bodyPr/>
+                    <a:lstStyle/>
+                    <a:p>
+                      <a:pPr algn="ctr"/>
+                      <a:r>
+                        <a:rPr sz="1200" b="0">
+                          <a:solidFill>
+                            <a:srgbClr val="1A1A1A"/>
+                          </a:solidFill>
+                        </a:rPr>
+                        <a:t>AdaBN+마스킹</a:t>
+                      </a:r>
+                    </a:p>
+                  </a:txBody>
+                  <a:tcPr anchor="ctr">
+                    <a:solidFill>
+                      <a:srgbClr val="EEF3FC"/>
+                    </a:solidFill>
+                  </a:tcPr>
+                </a:tc>
+                <a:tc>
+                  <a:txBody>
+                    <a:bodyPr/>
+                    <a:lstStyle/>
+                    <a:p>
+                      <a:pPr algn="ctr"/>
+                      <a:r>
+                        <a:rPr sz="1200" b="0">
+                          <a:solidFill>
+                            <a:srgbClr val="1A1A1A"/>
+                          </a:solidFill>
+                        </a:rPr>
+                        <a:t>35.24% ±2.57</a:t>
+                      </a:r>
+                    </a:p>
+                  </a:txBody>
+                  <a:tcPr anchor="ctr">
+                    <a:solidFill>
+                      <a:srgbClr val="EEF3FC"/>
+                    </a:solidFill>
+                  </a:tcPr>
+                </a:tc>
+                <a:tc>
+                  <a:txBody>
+                    <a:bodyPr/>
+                    <a:lstStyle/>
+                    <a:p>
+                      <a:pPr algn="ctr"/>
+                      <a:r>
+                        <a:rPr sz="1200" b="0">
+                          <a:solidFill>
+                            <a:srgbClr val="1A1A1A"/>
+                          </a:solidFill>
+                        </a:rPr>
+                        <a:t>15.14% ±2.44</a:t>
+                      </a:r>
+                    </a:p>
+                  </a:txBody>
+                  <a:tcPr anchor="ctr">
+                    <a:solidFill>
+                      <a:srgbClr val="EEF3FC"/>
+                    </a:solidFill>
+                  </a:tcPr>
+                </a:tc>
+                <a:tc>
+                  <a:txBody>
+                    <a:bodyPr/>
+                    <a:lstStyle/>
+                    <a:p>
+                      <a:pPr algn="ctr"/>
+                      <a:r>
+                        <a:rPr sz="1200" b="0">
+                          <a:solidFill>
+                            <a:srgbClr val="1A1A1A"/>
+                          </a:solidFill>
+                        </a:rPr>
+                        <a:t>16.83% ±1.80</a:t>
+                      </a:r>
+                    </a:p>
+                  </a:txBody>
+                  <a:tcPr anchor="ctr">
+                    <a:solidFill>
+                      <a:srgbClr val="EEF3FC"/>
+                    </a:solidFill>
+                  </a:tcPr>
+                </a:tc>
+              </a:tr>
+              <a:tr h="560000">
+                <a:tc>
+                  <a:txBody>
+                    <a:bodyPr/>
+                    <a:lstStyle/>
+                    <a:p>
+                      <a:pPr algn="ctr"/>
+                      <a:r>
+                        <a:rPr sz="1200" b="0">
+                          <a:solidFill>
+                            <a:srgbClr val="1A1A1A"/>
+                          </a:solidFill>
+                        </a:rPr>
+                        <a:t>SHOT+마스킹</a:t>
+                      </a:r>
+                    </a:p>
+                  </a:txBody>
+                  <a:tcPr anchor="ctr">
+                    <a:solidFill>
+                      <a:srgbClr val="FFFFFF"/>
+                    </a:solidFill>
+                  </a:tcPr>
+                </a:tc>
+                <a:tc>
+                  <a:txBody>
+                    <a:bodyPr/>
+                    <a:lstStyle/>
+                    <a:p>
+                      <a:pPr algn="ctr"/>
+                      <a:r>
+                        <a:rPr sz="1200" b="0">
+                          <a:solidFill>
+                            <a:srgbClr val="1A1A1A"/>
+                          </a:solidFill>
+                        </a:rPr>
+                        <a:t>37.58% ±5.86</a:t>
+                      </a:r>
+                    </a:p>
+                  </a:txBody>
+                  <a:tcPr anchor="ctr">
+                    <a:solidFill>
+                      <a:srgbClr val="FFFFFF"/>
+                    </a:solidFill>
+                  </a:tcPr>
+                </a:tc>
+                <a:tc>
+                  <a:txBody>
+                    <a:bodyPr/>
+                    <a:lstStyle/>
+                    <a:p>
+                      <a:pPr algn="ctr"/>
+                      <a:r>
+                        <a:rPr sz="1200" b="0">
+                          <a:solidFill>
+                            <a:srgbClr val="1A1A1A"/>
+                          </a:solidFill>
+                        </a:rPr>
+                        <a:t>24.28% ±5.62</a:t>
+                      </a:r>
+                    </a:p>
+                  </a:txBody>
+                  <a:tcPr anchor="ctr">
+                    <a:solidFill>
+                      <a:srgbClr val="FFFFFF"/>
+                    </a:solidFill>
+                  </a:tcPr>
+                </a:tc>
+                <a:tc>
+                  <a:txBody>
+                    <a:bodyPr/>
+                    <a:lstStyle/>
+                    <a:p>
+                      <a:pPr algn="ctr"/>
+                      <a:r>
+                        <a:rPr sz="1200" b="0">
+                          <a:solidFill>
+                            <a:srgbClr val="1A1A1A"/>
+                          </a:solidFill>
+                        </a:rPr>
+                        <a:t>19.75% ±1.40</a:t>
+                      </a:r>
+                    </a:p>
+                  </a:txBody>
+                  <a:tcPr anchor="ctr">
+                    <a:solidFill>
+                      <a:srgbClr val="FFFFFF"/>
+                    </a:solidFill>
+                  </a:tcPr>
+                </a:tc>
+              </a:tr>
+              <a:tr h="560000">
+                <a:tc>
+                  <a:txBody>
+                    <a:bodyPr/>
+                    <a:lstStyle/>
+                    <a:p>
+                      <a:pPr algn="ctr"/>
+                      <a:r>
+                        <a:rPr sz="1200" b="1">
+                          <a:solidFill>
+                            <a:srgbClr val="1E2761"/>
+                          </a:solidFill>
+                        </a:rPr>
+                        <a:t>SHOT+AaD+마스킹(최종)</a:t>
+                      </a:r>
+                    </a:p>
+                  </a:txBody>
+                  <a:tcPr anchor="ctr">
+                    <a:solidFill>
+                      <a:srgbClr val="EEF3FC"/>
+                    </a:solidFill>
+                  </a:tcPr>
+                </a:tc>
+                <a:tc>
+                  <a:txBody>
+                    <a:bodyPr/>
+                    <a:lstStyle/>
+                    <a:p>
+                      <a:pPr algn="ctr"/>
+                      <a:r>
+                        <a:rPr sz="1200" b="1">
+                          <a:solidFill>
+                            <a:srgbClr val="1A6B3A"/>
+                          </a:solidFill>
+                        </a:rPr>
+                        <a:t>38.11% ±5.81</a:t>
+                      </a:r>
+                    </a:p>
+                  </a:txBody>
+                  <a:tcPr anchor="ctr">
+                    <a:solidFill>
+                      <a:srgbClr val="EEF3FC"/>
+                    </a:solidFill>
+                  </a:tcPr>
+                </a:tc>
+                <a:tc>
+                  <a:txBody>
+                    <a:bodyPr/>
+                    <a:lstStyle/>
+                    <a:p>
+                      <a:pPr algn="ctr"/>
+                      <a:r>
+                        <a:rPr sz="1200" b="1">
+                          <a:solidFill>
+                            <a:srgbClr val="1A6B3A"/>
+                          </a:solidFill>
+                        </a:rPr>
+                        <a:t>27.40% ±3.85</a:t>
+                      </a:r>
+                    </a:p>
+                  </a:txBody>
+                  <a:tcPr anchor="ctr">
+                    <a:solidFill>
+                      <a:srgbClr val="EEF3FC"/>
+                    </a:solidFill>
+                  </a:tcPr>
+                </a:tc>
+                <a:tc>
+                  <a:txBody>
+                    <a:bodyPr/>
+                    <a:lstStyle/>
+                    <a:p>
+                      <a:pPr algn="ctr"/>
+                      <a:r>
+                        <a:rPr sz="1200" b="1">
+                          <a:solidFill>
+                            <a:srgbClr val="1A6B3A"/>
+                          </a:solidFill>
+                        </a:rPr>
+                        <a:t>19.09% ±1.18</a:t>
+                      </a:r>
+                    </a:p>
+                  </a:txBody>
+                  <a:tcPr anchor="ctr">
+                    <a:solidFill>
+                      <a:srgbClr val="EEF3FC"/>
+                    </a:solidFill>
+                  </a:tcPr>
+                </a:tc>
+              </a:tr>
+            </a:tbl>
+          </a:graphicData>
+        </a:graphic>
+      </p:graphicFrame>
+      <p:sp>
+        <p:nvSpPr>
+          <p:cNvPr id="6" name="TextBox 4"/>
+          <p:cNvSpPr txBox="1"/>
+          <p:nvPr/>
+        </p:nvSpPr>
+        <p:spPr>
+          <a:xfrm>
+            <a:off x="548640" y="4950000"/>
+            <a:ext cx="11091672" cy="1000000"/>
+          </a:xfrm>
+          <a:prstGeom prst="rect">
+            <a:avLst/>
+          </a:prstGeom>
+          <a:noFill/>
+        </p:spPr>
+        <p:txBody>
+          <a:bodyPr wrap="square" anchor="t" lIns="0" rIns="0" tIns="0" bIns="0">
+            <a:spAutoFit/>
+          </a:bodyPr>
+          <a:lstStyle/>
+          <a:p>
+            <a:pPr algn="l"/>
+            <a:r>
+              <a:rPr sz="1250" b="0" i="1">
+                <a:solidFill>
+                  <a:srgbClr val="5B5E6B"/>
+                </a:solidFill>
+                <a:latin typeface="Calibri"/>
+              </a:rPr>
+              <a:t>Bangladesh만 뚜렷하게 개선됐다(+3.1%p, 표준편차도 5.62→3.85로 감소 — 우연이 아니라 더 안정적인 적응). Taiwan·PlantDoc은 SHOT 단독과 통계적으로 동일해 해치지 않는다. 이어지는 슬라이드는 이 결론에 대한 진단·메커니즘·대안 비교다.</a:t>
+            </a:r>
+          </a:p>
+        </p:txBody>
+      </p:sp>
+      <p:sp>
+        <p:nvSpPr>
+          <p:cNvPr id="9" name="TextBox 5"/>
+          <p:cNvSpPr txBox="1"/>
+          <p:nvPr/>
+        </p:nvSpPr>
+        <p:spPr>
+          <a:xfrm>
+            <a:off x="11430000" y="6446520"/>
+            <a:ext cx="548640" cy="274320"/>
+          </a:xfrm>
+          <a:prstGeom prst="rect">
+            <a:avLst/>
+          </a:prstGeom>
+          <a:noFill/>
+        </p:spPr>
+        <p:txBody>
+          <a:bodyPr wrap="square" anchor="t" lIns="0" rIns="0" tIns="0" bIns="0">
+            <a:spAutoFit/>
+          </a:bodyPr>
+          <a:lstStyle/>
+          <a:p>
+            <a:pPr algn="r"/>
+            <a:r>
+              <a:rPr sz="1000" b="0" i="0">
+                <a:solidFill>
+                  <a:srgbClr val="5B5E6B"/>
+                </a:solidFill>
+                <a:latin typeface="Calibri"/>
+              </a:rPr>
+              <a:t>23</a:t>
+            </a:r>
+          </a:p>
+        </p:txBody>
+      </p:sp>
+    </p:spTree>
+  </p:cSld>
+  <p:clrMapOvr>
+    <a:masterClrMapping/>
+  </p:clrMapOvr>
+</p:sld>
+</file>
+
+<file path=ppt/slides/slide39.xml><?xml version="1.0" encoding="utf-8"?>
+<p:sld xmlns:a="http://schemas.openxmlformats.org/drawingml/2006/main" xmlns:p="http://schemas.openxmlformats.org/presentationml/2006/main" xmlns:r="http://schemas.openxmlformats.org/officeDocument/2006/relationships">
+  <p:cSld>
+    <p:bg>
+      <p:bgPr>
+        <a:solidFill>
+          <a:srgbClr val="FFFFFF"/>
+        </a:solidFill>
+        <a:effectLst/>
+      </p:bgPr>
+    </p:bg>
+    <p:spTree>
+      <p:nvGrpSpPr>
+        <p:cNvPr id="1" name=""/>
+        <p:cNvGrpSpPr/>
+        <p:nvPr/>
+      </p:nvGrpSpPr>
+      <p:grpSpPr/>
+      <p:sp>
+        <p:nvSpPr>
+          <p:cNvPr id="2" name="TextBox 1"/>
+          <p:cNvSpPr txBox="1"/>
+          <p:nvPr/>
+        </p:nvSpPr>
+        <p:spPr>
+          <a:xfrm>
+            <a:off x="548640" y="292608"/>
+            <a:ext cx="9144000" cy="292608"/>
+          </a:xfrm>
+          <a:prstGeom prst="rect">
+            <a:avLst/>
+          </a:prstGeom>
+          <a:noFill/>
+        </p:spPr>
+        <p:txBody>
+          <a:bodyPr wrap="square" anchor="t" lIns="0" rIns="0" tIns="0" bIns="0">
+            <a:spAutoFit/>
+          </a:bodyPr>
+          <a:lstStyle/>
+          <a:p>
+            <a:pPr algn="l"/>
+            <a:r>
+              <a:rPr sz="1050" b="1" i="0">
+                <a:solidFill>
+                  <a:srgbClr val="2A78D6"/>
+                </a:solidFill>
+                <a:latin typeface="Calibri"/>
+              </a:rPr>
+              <a:t>RESULT 7 · DOMAIN ADAPTATION (4/6)</a:t>
+            </a:r>
+          </a:p>
+        </p:txBody>
+      </p:sp>
+      <p:sp>
+        <p:nvSpPr>
+          <p:cNvPr id="3" name="TextBox 2"/>
+          <p:cNvSpPr txBox="1"/>
+          <p:nvPr/>
+        </p:nvSpPr>
+        <p:spPr>
+          <a:xfrm>
+            <a:off x="548640" y="566928"/>
+            <a:ext cx="10972800" cy="548640"/>
+          </a:xfrm>
+          <a:prstGeom prst="rect">
+            <a:avLst/>
+          </a:prstGeom>
+          <a:noFill/>
+        </p:spPr>
+        <p:txBody>
+          <a:bodyPr wrap="square" anchor="t" lIns="0" rIns="0" tIns="0" bIns="0">
+            <a:spAutoFit/>
+          </a:bodyPr>
+          <a:lstStyle/>
+          <a:p>
+            <a:pPr algn="l"/>
+            <a:r>
+              <a:rPr sz="2200" b="1" i="0">
+                <a:solidFill>
+                  <a:srgbClr val="1E2761"/>
+                </a:solidFill>
+                <a:latin typeface="Cambria"/>
+              </a:rPr>
+              <a:t>메커니즘: 마스킹 + SHOT + AaD는 왜 작동하는가</a:t>
+            </a:r>
+          </a:p>
+        </p:txBody>
+      </p:sp>
+      <p:sp>
+        <p:nvSpPr>
+          <p:cNvPr id="4" name="TextBox 3"/>
+          <p:cNvSpPr txBox="1"/>
+          <p:nvPr/>
+        </p:nvSpPr>
+        <p:spPr>
+          <a:xfrm>
+            <a:off x="548640" y="1150000"/>
+            <a:ext cx="11091672" cy="1500000"/>
+          </a:xfrm>
+          <a:prstGeom prst="rect">
+            <a:avLst/>
+          </a:prstGeom>
+          <a:noFill/>
+        </p:spPr>
+        <p:txBody>
+          <a:bodyPr wrap="square" anchor="t" lIns="0" rIns="0" tIns="0" bIns="0">
+            <a:spAutoFit/>
+          </a:bodyPr>
+          <a:lstStyle/>
+          <a:p>
+            <a:pPr algn="l"/>
+            <a:r>
+              <a:rPr sz="1250" b="0" i="0">
+                <a:solidFill>
+                  <a:srgbClr val="1A1A1A"/>
+                </a:solidFill>
+                <a:latin typeface="Calibri"/>
+              </a:rPr>
+              <a:t>AdaBN·TENT를 그대로 적용하면 모델이 target에 없는 클래스로 예측을 쏠아버린다(negative transfer — 클래스 겹침이 적을수록 심함, Taiwan 3/10 기준 Source-only 27.39%가 AdaBN 7.64%/TENT 8.28%까지 떨어짐). 해결책은 추가 학습이 필요 없는 class-restriction 마스킹이다 — 데이터 준비 단계에서 이미 아는 “이 데이터셋에 존재하는 클래스” 정보로 로짓에 -inf를 더해 후보에서 제외한다(정답 라벨을 본 게 아니다).</a:t>
+            </a:r>
+          </a:p>
+        </p:txBody>
+      </p:sp>
+      <p:graphicFrame>
+        <p:nvGraphicFramePr>
+          <p:cNvPr id="7" name="Table"/>
+          <p:cNvGraphicFramePr>
+            <a:graphicFrameLocks noGrp="1"/>
+          </p:cNvGraphicFramePr>
+          <p:nvPr/>
+        </p:nvGraphicFramePr>
+        <p:xfrm>
+          <a:off x="548640" y="2850000"/>
+          <a:ext cx="11200000" cy="1960000"/>
+        </p:xfrm>
+        <a:graphic>
+          <a:graphicData uri="http://schemas.openxmlformats.org/drawingml/2006/table">
+            <a:tbl>
+              <a:tblPr firstRow="1" bandRow="1">
+                <a:tableStyleId>{5C22544A-7EE6-4342-B048-85BDC9FD1C3A}</a:tableStyleId>
+              </a:tblPr>
+              <a:tblGrid>
+                <a:gridCol w="2800000"/>
+                <a:gridCol w="2600000"/>
+                <a:gridCol w="2600000"/>
+                <a:gridCol w="3200000"/>
+              </a:tblGrid>
+              <a:tr h="560000">
+                <a:tc>
+                  <a:txBody>
+                    <a:bodyPr/>
+                    <a:lstStyle/>
+                    <a:p>
+                      <a:pPr algn="ctr"/>
+                      <a:r>
+                        <a:rPr sz="1200" b="1">
+                          <a:solidFill>
+                            <a:srgbClr val="FFFFFF"/>
+                          </a:solidFill>
+                        </a:rPr>
+                        <a:t>데이터셋</a:t>
+                      </a:r>
+                    </a:p>
+                  </a:txBody>
+                  <a:tcPr anchor="ctr">
+                    <a:solidFill>
+                      <a:srgbClr val="1E2761"/>
+                    </a:solidFill>
+                  </a:tcPr>
+                </a:tc>
+                <a:tc>
+                  <a:txBody>
+                    <a:bodyPr/>
+                    <a:lstStyle/>
+                    <a:p>
+                      <a:pPr algn="ctr"/>
+                      <a:r>
+                        <a:rPr sz="1200" b="1">
+                          <a:solidFill>
+                            <a:srgbClr val="FFFFFF"/>
+                          </a:solidFill>
+                        </a:rPr>
+                        <a:t>Source-only</a:t>
+                      </a:r>
+                    </a:p>
+                  </a:txBody>
+                  <a:tcPr anchor="ctr">
+                    <a:solidFill>
+                      <a:srgbClr val="1E2761"/>
+                    </a:solidFill>
+                  </a:tcPr>
+                </a:tc>
+                <a:tc>
+                  <a:txBody>
+                    <a:bodyPr/>
+                    <a:lstStyle/>
+                    <a:p>
+                      <a:pPr algn="ctr"/>
+                      <a:r>
+                        <a:rPr sz="1200" b="1">
+                          <a:solidFill>
+                            <a:srgbClr val="FFFFFF"/>
+                          </a:solidFill>
+                        </a:rPr>
+                        <a:t>+마스킹만</a:t>
+                      </a:r>
+                    </a:p>
+                  </a:txBody>
+                  <a:tcPr anchor="ctr">
+                    <a:solidFill>
+                      <a:srgbClr val="1E2761"/>
+                    </a:solidFill>
+                  </a:tcPr>
+                </a:tc>
+                <a:tc>
+                  <a:txBody>
+                    <a:bodyPr/>
+                    <a:lstStyle/>
+                    <a:p>
+                      <a:pPr algn="ctr"/>
+                      <a:r>
+                        <a:rPr sz="1200" b="1">
+                          <a:solidFill>
+                            <a:srgbClr val="FFFFFF"/>
+                          </a:solidFill>
+                        </a:rPr>
+                        <a:t>AdaBN+마스킹</a:t>
+                      </a:r>
+                    </a:p>
+                  </a:txBody>
+                  <a:tcPr anchor="ctr">
+                    <a:solidFill>
+                      <a:srgbClr val="1E2761"/>
+                    </a:solidFill>
+                  </a:tcPr>
+                </a:tc>
+              </a:tr>
+              <a:tr h="560000">
+                <a:tc>
+                  <a:txBody>
+                    <a:bodyPr/>
+                    <a:lstStyle/>
+                    <a:p>
+                      <a:pPr algn="ctr"/>
+                      <a:r>
+                        <a:rPr sz="1200" b="0">
+                          <a:solidFill>
+                            <a:srgbClr val="1A1A1A"/>
+                          </a:solidFill>
+                        </a:rPr>
+                        <a:t>Taiwan</a:t>
+                      </a:r>
+                    </a:p>
+                  </a:txBody>
+                  <a:tcPr anchor="ctr">
+                    <a:solidFill>
+                      <a:srgbClr val="FFFFFF"/>
+                    </a:solidFill>
+                  </a:tcPr>
+                </a:tc>
+                <a:tc>
+                  <a:txBody>
+                    <a:bodyPr/>
+                    <a:lstStyle/>
+                    <a:p>
+                      <a:pPr algn="ctr"/>
+                      <a:r>
+                        <a:rPr sz="1200" b="0">
+                          <a:solidFill>
+                            <a:srgbClr val="1A1A1A"/>
+                          </a:solidFill>
+                        </a:rPr>
+                        <a:t>27.39%</a:t>
+                      </a:r>
+                    </a:p>
+                  </a:txBody>
+                  <a:tcPr anchor="ctr">
+                    <a:solidFill>
+                      <a:srgbClr val="FFFFFF"/>
+                    </a:solidFill>
+                  </a:tcPr>
+                </a:tc>
+                <a:tc>
+                  <a:txBody>
+                    <a:bodyPr/>
+                    <a:lstStyle/>
+                    <a:p>
+                      <a:pPr algn="ctr"/>
+                      <a:r>
+                        <a:rPr sz="1200" b="1">
+                          <a:solidFill>
+                            <a:srgbClr val="1A1A1A"/>
+                          </a:solidFill>
+                        </a:rPr>
+                        <a:t>32.48%</a:t>
+                      </a:r>
+                    </a:p>
+                  </a:txBody>
+                  <a:tcPr anchor="ctr">
+                    <a:solidFill>
+                      <a:srgbClr val="FFFFFF"/>
+                    </a:solidFill>
+                  </a:tcPr>
+                </a:tc>
+                <a:tc>
+                  <a:txBody>
+                    <a:bodyPr/>
+                    <a:lstStyle/>
+                    <a:p>
+                      <a:pPr algn="ctr"/>
+                      <a:r>
+                        <a:rPr sz="1200" b="0">
+                          <a:solidFill>
+                            <a:srgbClr val="1A1A1A"/>
+                          </a:solidFill>
+                        </a:rPr>
+                        <a:t>38.85%</a:t>
+                      </a:r>
+                    </a:p>
+                  </a:txBody>
+                  <a:tcPr anchor="ctr">
+                    <a:solidFill>
+                      <a:srgbClr val="FFFFFF"/>
+                    </a:solidFill>
+                  </a:tcPr>
+                </a:tc>
+              </a:tr>
+              <a:tr h="560000">
+                <a:tc>
+                  <a:txBody>
+                    <a:bodyPr/>
+                    <a:lstStyle/>
+                    <a:p>
+                      <a:pPr algn="ctr"/>
+                      <a:r>
+                        <a:rPr sz="1200" b="0">
+                          <a:solidFill>
+                            <a:srgbClr val="1A1A1A"/>
+                          </a:solidFill>
+                        </a:rPr>
+                        <a:t>Bangladesh</a:t>
+                      </a:r>
+                    </a:p>
+                  </a:txBody>
+                  <a:tcPr anchor="ctr">
+                    <a:solidFill>
+                      <a:srgbClr val="EEF3FC"/>
+                    </a:solidFill>
+                  </a:tcPr>
+                </a:tc>
+                <a:tc>
+                  <a:txBody>
+                    <a:bodyPr/>
+                    <a:lstStyle/>
+                    <a:p>
+                      <a:pPr algn="ctr"/>
+                      <a:r>
+                        <a:rPr sz="1200" b="0">
+                          <a:solidFill>
+                            <a:srgbClr val="1A1A1A"/>
+                          </a:solidFill>
+                        </a:rPr>
+                        <a:t>21.80%</a:t>
+                      </a:r>
+                    </a:p>
+                  </a:txBody>
+                  <a:tcPr anchor="ctr">
+                    <a:solidFill>
+                      <a:srgbClr val="EEF3FC"/>
+                    </a:solidFill>
+                  </a:tcPr>
+                </a:tc>
+                <a:tc>
+                  <a:txBody>
+                    <a:bodyPr/>
+                    <a:lstStyle/>
+                    <a:p>
+                      <a:pPr algn="ctr"/>
+                      <a:r>
+                        <a:rPr sz="1200" b="1">
+                          <a:solidFill>
+                            <a:srgbClr val="1A1A1A"/>
+                          </a:solidFill>
+                        </a:rPr>
+                        <a:t>22.34%</a:t>
+                      </a:r>
+                    </a:p>
+                  </a:txBody>
+                  <a:tcPr anchor="ctr">
+                    <a:solidFill>
+                      <a:srgbClr val="EEF3FC"/>
+                    </a:solidFill>
+                  </a:tcPr>
+                </a:tc>
+                <a:tc>
+                  <a:txBody>
+                    <a:bodyPr/>
+                    <a:lstStyle/>
+                    <a:p>
+                      <a:pPr algn="ctr"/>
+                      <a:r>
+                        <a:rPr sz="1200" b="0">
+                          <a:solidFill>
+                            <a:srgbClr val="1A1A1A"/>
+                          </a:solidFill>
+                        </a:rPr>
+                        <a:t>15.71%</a:t>
+                      </a:r>
+                    </a:p>
+                  </a:txBody>
+                  <a:tcPr anchor="ctr">
+                    <a:solidFill>
+                      <a:srgbClr val="EEF3FC"/>
+                    </a:solidFill>
+                  </a:tcPr>
+                </a:tc>
+              </a:tr>
+              <a:tr h="560000">
+                <a:tc>
+                  <a:txBody>
+                    <a:bodyPr/>
+                    <a:lstStyle/>
+                    <a:p>
+                      <a:pPr algn="ctr"/>
+                      <a:r>
+                        <a:rPr sz="1200" b="0">
+                          <a:solidFill>
+                            <a:srgbClr val="1A1A1A"/>
+                          </a:solidFill>
+                        </a:rPr>
+                        <a:t>PlantDoc</a:t>
+                      </a:r>
+                    </a:p>
+                  </a:txBody>
+                  <a:tcPr anchor="ctr">
+                    <a:solidFill>
+                      <a:srgbClr val="FFFFFF"/>
+                    </a:solidFill>
+                  </a:tcPr>
+                </a:tc>
+                <a:tc>
+                  <a:txBody>
+                    <a:bodyPr/>
+                    <a:lstStyle/>
+                    <a:p>
+                      <a:pPr algn="ctr"/>
+                      <a:r>
+                        <a:rPr sz="1200" b="0">
+                          <a:solidFill>
+                            <a:srgbClr val="1A1A1A"/>
+                          </a:solidFill>
+                        </a:rPr>
+                        <a:t>19.89%</a:t>
+                      </a:r>
+                    </a:p>
+                  </a:txBody>
+                  <a:tcPr anchor="ctr">
+                    <a:solidFill>
+                      <a:srgbClr val="FFFFFF"/>
+                    </a:solidFill>
+                  </a:tcPr>
+                </a:tc>
+                <a:tc>
+                  <a:txBody>
+                    <a:bodyPr/>
+                    <a:lstStyle/>
+                    <a:p>
+                      <a:pPr algn="ctr"/>
+                      <a:r>
+                        <a:rPr sz="1200" b="1">
+                          <a:solidFill>
+                            <a:srgbClr val="1A1A1A"/>
+                          </a:solidFill>
+                        </a:rPr>
+                        <a:t>20.31%</a:t>
+                      </a:r>
+                    </a:p>
+                  </a:txBody>
+                  <a:tcPr anchor="ctr">
+                    <a:solidFill>
+                      <a:srgbClr val="FFFFFF"/>
+                    </a:solidFill>
+                  </a:tcPr>
+                </a:tc>
+                <a:tc>
+                  <a:txBody>
+                    <a:bodyPr/>
+                    <a:lstStyle/>
+                    <a:p>
+                      <a:pPr algn="ctr"/>
+                      <a:r>
+                        <a:rPr sz="1200" b="0">
+                          <a:solidFill>
+                            <a:srgbClr val="1A1A1A"/>
+                          </a:solidFill>
+                        </a:rPr>
+                        <a:t>14.81%</a:t>
+                      </a:r>
+                    </a:p>
+                  </a:txBody>
+                  <a:tcPr anchor="ctr">
+                    <a:solidFill>
+                      <a:srgbClr val="FFFFFF"/>
+                    </a:solidFill>
+                  </a:tcPr>
+                </a:tc>
+              </a:tr>
+            </a:tbl>
+          </a:graphicData>
+        </a:graphic>
+      </p:graphicFrame>
+      <p:sp>
+        <p:nvSpPr>
+          <p:cNvPr id="6" name="TextBox 4"/>
+          <p:cNvSpPr txBox="1"/>
+          <p:nvPr/>
+        </p:nvSpPr>
+        <p:spPr>
+          <a:xfrm>
+            <a:off x="548640" y="5050000"/>
+            <a:ext cx="11091672" cy="1300000"/>
+          </a:xfrm>
+          <a:prstGeom prst="rect">
+            <a:avLst/>
+          </a:prstGeom>
+          <a:noFill/>
+        </p:spPr>
+        <p:txBody>
+          <a:bodyPr wrap="square" anchor="t" lIns="0" rIns="0" tIns="0" bIns="0">
+            <a:spAutoFit/>
+          </a:bodyPr>
+          <a:lstStyle/>
+          <a:p>
+            <a:pPr algn="l"/>
+            <a:r>
+              <a:rPr sz="1200" b="0" i="1">
+                <a:solidFill>
+                  <a:srgbClr val="5B5E6B"/>
+                </a:solidFill>
+                <a:latin typeface="Calibri"/>
+              </a:rPr>
+              <a:t>마스킹만으로도 모든 데이터셋에서 개선된다. 여기에 SHOT(pseudo-label cross-entropy + entropy 최소화/다양성 최대화, epoch=2로 고정 — 늘릴수록 Taiwan은 좋아지지만 Bangladesh·PlantDoc은 pseudo-label 과적합으로 꺾이는 트레이드오프 때문)과 AaD(feature 공간 이웃끼리 예측을 맞추는 attract/disperse 항, weight=1.0)를 더해 최종 파이프라인을 완성했다.</a:t>
+            </a:r>
+          </a:p>
+        </p:txBody>
+      </p:sp>
+      <p:sp>
+        <p:nvSpPr>
+          <p:cNvPr id="9" name="TextBox 5"/>
+          <p:cNvSpPr txBox="1"/>
+          <p:nvPr/>
+        </p:nvSpPr>
+        <p:spPr>
+          <a:xfrm>
+            <a:off x="11430000" y="6446520"/>
+            <a:ext cx="548640" cy="274320"/>
+          </a:xfrm>
+          <a:prstGeom prst="rect">
+            <a:avLst/>
+          </a:prstGeom>
+          <a:noFill/>
+        </p:spPr>
+        <p:txBody>
+          <a:bodyPr wrap="square" anchor="t" lIns="0" rIns="0" tIns="0" bIns="0">
+            <a:spAutoFit/>
+          </a:bodyPr>
+          <a:lstStyle/>
+          <a:p>
+            <a:pPr algn="r"/>
+            <a:r>
+              <a:rPr sz="1000" b="0" i="0">
+                <a:solidFill>
+                  <a:srgbClr val="5B5E6B"/>
+                </a:solidFill>
+                <a:latin typeface="Calibri"/>
+              </a:rPr>
+              <a:t>26</a:t>
             </a:r>
           </a:p>
         </p:txBody>
@@ -28007,6 +23909,955 @@
                 <a:latin typeface="Calibri"/>
               </a:rPr>
               <a:t>03</a:t>
+            </a:r>
+          </a:p>
+        </p:txBody>
+      </p:sp>
+    </p:spTree>
+  </p:cSld>
+  <p:clrMapOvr>
+    <a:masterClrMapping/>
+  </p:clrMapOvr>
+</p:sld>
+</file>
+
+<file path=ppt/slides/slide40.xml><?xml version="1.0" encoding="utf-8"?>
+<p:sld xmlns:a="http://schemas.openxmlformats.org/drawingml/2006/main" xmlns:p="http://schemas.openxmlformats.org/presentationml/2006/main" xmlns:r="http://schemas.openxmlformats.org/officeDocument/2006/relationships">
+  <p:cSld>
+    <p:bg>
+      <p:bgPr>
+        <a:solidFill>
+          <a:srgbClr val="FFFFFF"/>
+        </a:solidFill>
+        <a:effectLst/>
+      </p:bgPr>
+    </p:bg>
+    <p:spTree>
+      <p:nvGrpSpPr>
+        <p:cNvPr id="1" name=""/>
+        <p:cNvGrpSpPr/>
+        <p:nvPr/>
+      </p:nvGrpSpPr>
+      <p:grpSpPr/>
+      <p:sp>
+        <p:nvSpPr>
+          <p:cNvPr id="2" name="TextBox 1"/>
+          <p:cNvSpPr txBox="1"/>
+          <p:nvPr/>
+        </p:nvSpPr>
+        <p:spPr>
+          <a:xfrm>
+            <a:off x="548640" y="292608"/>
+            <a:ext cx="9144000" cy="292608"/>
+          </a:xfrm>
+          <a:prstGeom prst="rect">
+            <a:avLst/>
+          </a:prstGeom>
+          <a:noFill/>
+        </p:spPr>
+        <p:txBody>
+          <a:bodyPr wrap="square" anchor="t" lIns="0" rIns="0" tIns="0" bIns="0">
+            <a:spAutoFit/>
+          </a:bodyPr>
+          <a:lstStyle/>
+          <a:p>
+            <a:pPr algn="l"/>
+            <a:r>
+              <a:rPr sz="1050" b="1" i="0">
+                <a:solidFill>
+                  <a:srgbClr val="2A78D6"/>
+                </a:solidFill>
+                <a:latin typeface="Calibri"/>
+              </a:rPr>
+              <a:t>RESULT 7 · DOMAIN ADAPTATION (5/6)</a:t>
+            </a:r>
+          </a:p>
+        </p:txBody>
+      </p:sp>
+      <p:sp>
+        <p:nvSpPr>
+          <p:cNvPr id="3" name="TextBox 2"/>
+          <p:cNvSpPr txBox="1"/>
+          <p:nvPr/>
+        </p:nvSpPr>
+        <p:spPr>
+          <a:xfrm>
+            <a:off x="548640" y="566928"/>
+            <a:ext cx="10972800" cy="548640"/>
+          </a:xfrm>
+          <a:prstGeom prst="rect">
+            <a:avLst/>
+          </a:prstGeom>
+          <a:noFill/>
+        </p:spPr>
+        <p:txBody>
+          <a:bodyPr wrap="square" anchor="t" lIns="0" rIns="0" tIns="0" bIns="0">
+            <a:spAutoFit/>
+          </a:bodyPr>
+          <a:lstStyle/>
+          <a:p>
+            <a:pPr algn="l"/>
+            <a:r>
+              <a:rPr sz="2200" b="1" i="0">
+                <a:solidFill>
+                  <a:srgbClr val="1E2761"/>
+                </a:solidFill>
+                <a:latin typeface="Cambria"/>
+              </a:rPr>
+              <a:t>종합: 그 외 7가지 방법을 시도했지만 못 넘었다</a:t>
+            </a:r>
+          </a:p>
+        </p:txBody>
+      </p:sp>
+      <p:sp>
+        <p:nvSpPr>
+          <p:cNvPr id="4" name="TextBox 3"/>
+          <p:cNvSpPr txBox="1"/>
+          <p:nvPr/>
+        </p:nvSpPr>
+        <p:spPr>
+          <a:xfrm>
+            <a:off x="548640" y="1150000"/>
+            <a:ext cx="11091672" cy="700000"/>
+          </a:xfrm>
+          <a:prstGeom prst="rect">
+            <a:avLst/>
+          </a:prstGeom>
+          <a:noFill/>
+        </p:spPr>
+        <p:txBody>
+          <a:bodyPr wrap="square" anchor="t" lIns="0" rIns="0" tIns="0" bIns="0">
+            <a:spAutoFit/>
+          </a:bodyPr>
+          <a:lstStyle/>
+          <a:p>
+            <a:pPr algn="l"/>
+            <a:r>
+              <a:rPr sz="1250" b="0" i="0">
+                <a:solidFill>
+                  <a:srgbClr val="1A1A1A"/>
+                </a:solidFill>
+                <a:latin typeface="Calibri"/>
+              </a:rPr>
+              <a:t>최신·유명 SFDA 방법과 하이퍼파라미터 전략을 추가로 검토했다 — 전부 위 최종 파이프라인(SHOT+AaD)을 넘지 못했고, 각자 다른 이유로 기각했다.</a:t>
+            </a:r>
+          </a:p>
+        </p:txBody>
+      </p:sp>
+      <p:graphicFrame>
+        <p:nvGraphicFramePr>
+          <p:cNvPr id="7" name="Table"/>
+          <p:cNvGraphicFramePr>
+            <a:graphicFrameLocks noGrp="1"/>
+          </p:cNvGraphicFramePr>
+          <p:nvPr/>
+        </p:nvGraphicFramePr>
+        <p:xfrm>
+          <a:off x="548640" y="2000000"/>
+          <a:ext cx="11200000" cy="3080000"/>
+        </p:xfrm>
+        <a:graphic>
+          <a:graphicData uri="http://schemas.openxmlformats.org/drawingml/2006/table">
+            <a:tbl>
+              <a:tblPr firstRow="1" bandRow="1">
+                <a:tableStyleId>{5C22544A-7EE6-4342-B048-85BDC9FD1C3A}</a:tableStyleId>
+              </a:tblPr>
+              <a:tblGrid>
+                <a:gridCol w="3400000"/>
+                <a:gridCol w="2600000"/>
+                <a:gridCol w="2600000"/>
+                <a:gridCol w="2600000"/>
+              </a:tblGrid>
+              <a:tr h="440000">
+                <a:tc>
+                  <a:txBody>
+                    <a:bodyPr/>
+                    <a:lstStyle/>
+                    <a:p>
+                      <a:pPr algn="ctr"/>
+                      <a:r>
+                        <a:rPr sz="1100" b="1">
+                          <a:solidFill>
+                            <a:srgbClr val="FFFFFF"/>
+                          </a:solidFill>
+                        </a:rPr>
+                        <a:t>방법</a:t>
+                      </a:r>
+                    </a:p>
+                  </a:txBody>
+                  <a:tcPr anchor="ctr">
+                    <a:solidFill>
+                      <a:srgbClr val="1E2761"/>
+                    </a:solidFill>
+                  </a:tcPr>
+                </a:tc>
+                <a:tc>
+                  <a:txBody>
+                    <a:bodyPr/>
+                    <a:lstStyle/>
+                    <a:p>
+                      <a:pPr algn="ctr"/>
+                      <a:r>
+                        <a:rPr sz="1100" b="1">
+                          <a:solidFill>
+                            <a:srgbClr val="FFFFFF"/>
+                          </a:solidFill>
+                        </a:rPr>
+                        <a:t>Taiwan</a:t>
+                      </a:r>
+                    </a:p>
+                  </a:txBody>
+                  <a:tcPr anchor="ctr">
+                    <a:solidFill>
+                      <a:srgbClr val="1E2761"/>
+                    </a:solidFill>
+                  </a:tcPr>
+                </a:tc>
+                <a:tc>
+                  <a:txBody>
+                    <a:bodyPr/>
+                    <a:lstStyle/>
+                    <a:p>
+                      <a:pPr algn="ctr"/>
+                      <a:r>
+                        <a:rPr sz="1100" b="1">
+                          <a:solidFill>
+                            <a:srgbClr val="FFFFFF"/>
+                          </a:solidFill>
+                        </a:rPr>
+                        <a:t>Bangladesh</a:t>
+                      </a:r>
+                    </a:p>
+                  </a:txBody>
+                  <a:tcPr anchor="ctr">
+                    <a:solidFill>
+                      <a:srgbClr val="1E2761"/>
+                    </a:solidFill>
+                  </a:tcPr>
+                </a:tc>
+                <a:tc>
+                  <a:txBody>
+                    <a:bodyPr/>
+                    <a:lstStyle/>
+                    <a:p>
+                      <a:pPr algn="ctr"/>
+                      <a:r>
+                        <a:rPr sz="1100" b="1">
+                          <a:solidFill>
+                            <a:srgbClr val="FFFFFF"/>
+                          </a:solidFill>
+                        </a:rPr>
+                        <a:t>PlantDoc</a:t>
+                      </a:r>
+                    </a:p>
+                  </a:txBody>
+                  <a:tcPr anchor="ctr">
+                    <a:solidFill>
+                      <a:srgbClr val="1E2761"/>
+                    </a:solidFill>
+                  </a:tcPr>
+                </a:tc>
+              </a:tr>
+              <a:tr h="440000">
+                <a:tc>
+                  <a:txBody>
+                    <a:bodyPr/>
+                    <a:lstStyle/>
+                    <a:p>
+                      <a:pPr algn="ctr"/>
+                      <a:r>
+                        <a:rPr sz="1100" b="0">
+                          <a:solidFill>
+                            <a:srgbClr val="1A1A1A"/>
+                          </a:solidFill>
+                        </a:rPr>
+                        <a:t>EATA (ICML 2022)</a:t>
+                      </a:r>
+                    </a:p>
+                  </a:txBody>
+                  <a:tcPr anchor="ctr">
+                    <a:solidFill>
+                      <a:srgbClr val="FFFFFF"/>
+                    </a:solidFill>
+                  </a:tcPr>
+                </a:tc>
+                <a:tc>
+                  <a:txBody>
+                    <a:bodyPr/>
+                    <a:lstStyle/>
+                    <a:p>
+                      <a:pPr algn="ctr"/>
+                      <a:r>
+                        <a:rPr sz="1100" b="0">
+                          <a:solidFill>
+                            <a:srgbClr val="1A1A1A"/>
+                          </a:solidFill>
+                        </a:rPr>
+                        <a:t>35.35%</a:t>
+                      </a:r>
+                    </a:p>
+                  </a:txBody>
+                  <a:tcPr anchor="ctr">
+                    <a:solidFill>
+                      <a:srgbClr val="FFFFFF"/>
+                    </a:solidFill>
+                  </a:tcPr>
+                </a:tc>
+                <a:tc>
+                  <a:txBody>
+                    <a:bodyPr/>
+                    <a:lstStyle/>
+                    <a:p>
+                      <a:pPr algn="ctr"/>
+                      <a:r>
+                        <a:rPr sz="1100" b="0">
+                          <a:solidFill>
+                            <a:srgbClr val="1A1A1A"/>
+                          </a:solidFill>
+                        </a:rPr>
+                        <a:t>20.89%</a:t>
+                      </a:r>
+                    </a:p>
+                  </a:txBody>
+                  <a:tcPr anchor="ctr">
+                    <a:solidFill>
+                      <a:srgbClr val="FFFFFF"/>
+                    </a:solidFill>
+                  </a:tcPr>
+                </a:tc>
+                <a:tc>
+                  <a:txBody>
+                    <a:bodyPr/>
+                    <a:lstStyle/>
+                    <a:p>
+                      <a:pPr algn="ctr"/>
+                      <a:r>
+                        <a:rPr sz="1100" b="0">
+                          <a:solidFill>
+                            <a:srgbClr val="1A1A1A"/>
+                          </a:solidFill>
+                        </a:rPr>
+                        <a:t>12.27%</a:t>
+                      </a:r>
+                    </a:p>
+                  </a:txBody>
+                  <a:tcPr anchor="ctr">
+                    <a:solidFill>
+                      <a:srgbClr val="FFFFFF"/>
+                    </a:solidFill>
+                  </a:tcPr>
+                </a:tc>
+              </a:tr>
+              <a:tr h="440000">
+                <a:tc>
+                  <a:txBody>
+                    <a:bodyPr/>
+                    <a:lstStyle/>
+                    <a:p>
+                      <a:pPr algn="ctr"/>
+                      <a:r>
+                        <a:rPr sz="1100" b="0">
+                          <a:solidFill>
+                            <a:srgbClr val="1A1A1A"/>
+                          </a:solidFill>
+                        </a:rPr>
+                        <a:t>UPA-APS (단독, seed42만)</a:t>
+                      </a:r>
+                    </a:p>
+                  </a:txBody>
+                  <a:tcPr anchor="ctr">
+                    <a:solidFill>
+                      <a:srgbClr val="EEF3FC"/>
+                    </a:solidFill>
+                  </a:tcPr>
+                </a:tc>
+                <a:tc>
+                  <a:txBody>
+                    <a:bodyPr/>
+                    <a:lstStyle/>
+                    <a:p>
+                      <a:pPr algn="ctr"/>
+                      <a:r>
+                        <a:rPr sz="1100" b="0">
+                          <a:solidFill>
+                            <a:srgbClr val="1A1A1A"/>
+                          </a:solidFill>
+                        </a:rPr>
+                        <a:t>44.59%*</a:t>
+                      </a:r>
+                    </a:p>
+                  </a:txBody>
+                  <a:tcPr anchor="ctr">
+                    <a:solidFill>
+                      <a:srgbClr val="EEF3FC"/>
+                    </a:solidFill>
+                  </a:tcPr>
+                </a:tc>
+                <a:tc>
+                  <a:txBody>
+                    <a:bodyPr/>
+                    <a:lstStyle/>
+                    <a:p>
+                      <a:pPr algn="ctr"/>
+                      <a:r>
+                        <a:rPr sz="1100" b="0">
+                          <a:solidFill>
+                            <a:srgbClr val="1A1A1A"/>
+                          </a:solidFill>
+                        </a:rPr>
+                        <a:t>30.52%</a:t>
+                      </a:r>
+                    </a:p>
+                  </a:txBody>
+                  <a:tcPr anchor="ctr">
+                    <a:solidFill>
+                      <a:srgbClr val="EEF3FC"/>
+                    </a:solidFill>
+                  </a:tcPr>
+                </a:tc>
+                <a:tc>
+                  <a:txBody>
+                    <a:bodyPr/>
+                    <a:lstStyle/>
+                    <a:p>
+                      <a:pPr algn="ctr"/>
+                      <a:r>
+                        <a:rPr sz="1100" b="0">
+                          <a:solidFill>
+                            <a:srgbClr val="1A1A1A"/>
+                          </a:solidFill>
+                        </a:rPr>
+                        <a:t>19.04%</a:t>
+                      </a:r>
+                    </a:p>
+                  </a:txBody>
+                  <a:tcPr anchor="ctr">
+                    <a:solidFill>
+                      <a:srgbClr val="EEF3FC"/>
+                    </a:solidFill>
+                  </a:tcPr>
+                </a:tc>
+              </a:tr>
+              <a:tr h="440000">
+                <a:tc>
+                  <a:txBody>
+                    <a:bodyPr/>
+                    <a:lstStyle/>
+                    <a:p>
+                      <a:pPr algn="ctr"/>
+                      <a:r>
+                        <a:rPr sz="1100" b="0">
+                          <a:solidFill>
+                            <a:srgbClr val="1A1A1A"/>
+                          </a:solidFill>
+                        </a:rPr>
+                        <a:t>UPA-CACL</a:t>
+                      </a:r>
+                    </a:p>
+                  </a:txBody>
+                  <a:tcPr anchor="ctr">
+                    <a:solidFill>
+                      <a:srgbClr val="FFFFFF"/>
+                    </a:solidFill>
+                  </a:tcPr>
+                </a:tc>
+                <a:tc>
+                  <a:txBody>
+                    <a:bodyPr/>
+                    <a:lstStyle/>
+                    <a:p>
+                      <a:pPr algn="ctr"/>
+                      <a:r>
+                        <a:rPr sz="1100" b="0">
+                          <a:solidFill>
+                            <a:srgbClr val="1A1A1A"/>
+                          </a:solidFill>
+                        </a:rPr>
+                        <a:t>33~38%대</a:t>
+                      </a:r>
+                    </a:p>
+                  </a:txBody>
+                  <a:tcPr anchor="ctr">
+                    <a:solidFill>
+                      <a:srgbClr val="FFFFFF"/>
+                    </a:solidFill>
+                  </a:tcPr>
+                </a:tc>
+                <a:tc>
+                  <a:txBody>
+                    <a:bodyPr/>
+                    <a:lstStyle/>
+                    <a:p>
+                      <a:pPr algn="ctr"/>
+                      <a:r>
+                        <a:rPr sz="1100" b="0">
+                          <a:solidFill>
+                            <a:srgbClr val="1A1A1A"/>
+                          </a:solidFill>
+                        </a:rPr>
+                        <a:t>중립</a:t>
+                      </a:r>
+                    </a:p>
+                  </a:txBody>
+                  <a:tcPr anchor="ctr">
+                    <a:solidFill>
+                      <a:srgbClr val="FFFFFF"/>
+                    </a:solidFill>
+                  </a:tcPr>
+                </a:tc>
+                <a:tc>
+                  <a:txBody>
+                    <a:bodyPr/>
+                    <a:lstStyle/>
+                    <a:p>
+                      <a:pPr algn="ctr"/>
+                      <a:r>
+                        <a:rPr sz="1100" b="0">
+                          <a:solidFill>
+                            <a:srgbClr val="1A1A1A"/>
+                          </a:solidFill>
+                        </a:rPr>
+                        <a:t>중립</a:t>
+                      </a:r>
+                    </a:p>
+                  </a:txBody>
+                  <a:tcPr anchor="ctr">
+                    <a:solidFill>
+                      <a:srgbClr val="FFFFFF"/>
+                    </a:solidFill>
+                  </a:tcPr>
+                </a:tc>
+              </a:tr>
+              <a:tr h="440000">
+                <a:tc>
+                  <a:txBody>
+                    <a:bodyPr/>
+                    <a:lstStyle/>
+                    <a:p>
+                      <a:pPr algn="ctr"/>
+                      <a:r>
+                        <a:rPr sz="1100" b="0">
+                          <a:solidFill>
+                            <a:srgbClr val="1A1A1A"/>
+                          </a:solidFill>
+                        </a:rPr>
+                        <a:t>R-GV (CVPR 2025, 근사)</a:t>
+                      </a:r>
+                    </a:p>
+                  </a:txBody>
+                  <a:tcPr anchor="ctr">
+                    <a:solidFill>
+                      <a:srgbClr val="EEF3FC"/>
+                    </a:solidFill>
+                  </a:tcPr>
+                </a:tc>
+                <a:tc>
+                  <a:txBody>
+                    <a:bodyPr/>
+                    <a:lstStyle/>
+                    <a:p>
+                      <a:pPr algn="ctr"/>
+                      <a:r>
+                        <a:rPr sz="1100" b="0">
+                          <a:solidFill>
+                            <a:srgbClr val="1A1A1A"/>
+                          </a:solidFill>
+                        </a:rPr>
+                        <a:t>36.94%</a:t>
+                      </a:r>
+                    </a:p>
+                  </a:txBody>
+                  <a:tcPr anchor="ctr">
+                    <a:solidFill>
+                      <a:srgbClr val="EEF3FC"/>
+                    </a:solidFill>
+                  </a:tcPr>
+                </a:tc>
+                <a:tc>
+                  <a:txBody>
+                    <a:bodyPr/>
+                    <a:lstStyle/>
+                    <a:p>
+                      <a:pPr algn="ctr"/>
+                      <a:r>
+                        <a:rPr sz="1100" b="0">
+                          <a:solidFill>
+                            <a:srgbClr val="1A1A1A"/>
+                          </a:solidFill>
+                        </a:rPr>
+                        <a:t>30.61%</a:t>
+                      </a:r>
+                    </a:p>
+                  </a:txBody>
+                  <a:tcPr anchor="ctr">
+                    <a:solidFill>
+                      <a:srgbClr val="EEF3FC"/>
+                    </a:solidFill>
+                  </a:tcPr>
+                </a:tc>
+                <a:tc>
+                  <a:txBody>
+                    <a:bodyPr/>
+                    <a:lstStyle/>
+                    <a:p>
+                      <a:pPr algn="ctr"/>
+                      <a:r>
+                        <a:rPr sz="1100" b="0">
+                          <a:solidFill>
+                            <a:srgbClr val="1A1A1A"/>
+                          </a:solidFill>
+                        </a:rPr>
+                        <a:t>17.07%</a:t>
+                      </a:r>
+                    </a:p>
+                  </a:txBody>
+                  <a:tcPr anchor="ctr">
+                    <a:solidFill>
+                      <a:srgbClr val="EEF3FC"/>
+                    </a:solidFill>
+                  </a:tcPr>
+                </a:tc>
+              </a:tr>
+              <a:tr h="440000">
+                <a:tc>
+                  <a:txBody>
+                    <a:bodyPr/>
+                    <a:lstStyle/>
+                    <a:p>
+                      <a:pPr algn="ctr"/>
+                      <a:r>
+                        <a:rPr sz="1100" b="0">
+                          <a:solidFill>
+                            <a:srgbClr val="1A1A1A"/>
+                          </a:solidFill>
+                        </a:rPr>
+                        <a:t>AaD 단독(클러스터링 없음)</a:t>
+                      </a:r>
+                    </a:p>
+                  </a:txBody>
+                  <a:tcPr anchor="ctr">
+                    <a:solidFill>
+                      <a:srgbClr val="FFFFFF"/>
+                    </a:solidFill>
+                  </a:tcPr>
+                </a:tc>
+                <a:tc>
+                  <a:txBody>
+                    <a:bodyPr/>
+                    <a:lstStyle/>
+                    <a:p>
+                      <a:pPr algn="ctr"/>
+                      <a:r>
+                        <a:rPr sz="1100" b="0">
+                          <a:solidFill>
+                            <a:srgbClr val="1A1A1A"/>
+                          </a:solidFill>
+                        </a:rPr>
+                        <a:t>42.36%</a:t>
+                      </a:r>
+                    </a:p>
+                  </a:txBody>
+                  <a:tcPr anchor="ctr">
+                    <a:solidFill>
+                      <a:srgbClr val="FFFFFF"/>
+                    </a:solidFill>
+                  </a:tcPr>
+                </a:tc>
+                <a:tc>
+                  <a:txBody>
+                    <a:bodyPr/>
+                    <a:lstStyle/>
+                    <a:p>
+                      <a:pPr algn="ctr"/>
+                      <a:r>
+                        <a:rPr sz="1100" b="0">
+                          <a:solidFill>
+                            <a:srgbClr val="1A1A1A"/>
+                          </a:solidFill>
+                        </a:rPr>
+                        <a:t>20.16%</a:t>
+                      </a:r>
+                    </a:p>
+                  </a:txBody>
+                  <a:tcPr anchor="ctr">
+                    <a:solidFill>
+                      <a:srgbClr val="FFFFFF"/>
+                    </a:solidFill>
+                  </a:tcPr>
+                </a:tc>
+                <a:tc>
+                  <a:txBody>
+                    <a:bodyPr/>
+                    <a:lstStyle/>
+                    <a:p>
+                      <a:pPr algn="ctr"/>
+                      <a:r>
+                        <a:rPr sz="1100" b="0">
+                          <a:solidFill>
+                            <a:srgbClr val="1A1A1A"/>
+                          </a:solidFill>
+                        </a:rPr>
+                        <a:t>19.18%</a:t>
+                      </a:r>
+                    </a:p>
+                  </a:txBody>
+                  <a:tcPr anchor="ctr">
+                    <a:solidFill>
+                      <a:srgbClr val="FFFFFF"/>
+                    </a:solidFill>
+                  </a:tcPr>
+                </a:tc>
+              </a:tr>
+              <a:tr h="440000">
+                <a:tc>
+                  <a:txBody>
+                    <a:bodyPr/>
+                    <a:lstStyle/>
+                    <a:p>
+                      <a:pPr algn="ctr"/>
+                      <a:r>
+                        <a:rPr sz="1100" b="0">
+                          <a:solidFill>
+                            <a:srgbClr val="1A1A1A"/>
+                          </a:solidFill>
+                        </a:rPr>
+                        <a:t>CoWA-JMDS (ICML 2022)</a:t>
+                      </a:r>
+                    </a:p>
+                  </a:txBody>
+                  <a:tcPr anchor="ctr">
+                    <a:solidFill>
+                      <a:srgbClr val="EEF3FC"/>
+                    </a:solidFill>
+                  </a:tcPr>
+                </a:tc>
+                <a:tc>
+                  <a:txBody>
+                    <a:bodyPr/>
+                    <a:lstStyle/>
+                    <a:p>
+                      <a:pPr algn="ctr"/>
+                      <a:r>
+                        <a:rPr sz="1100" b="0">
+                          <a:solidFill>
+                            <a:srgbClr val="1A1A1A"/>
+                          </a:solidFill>
+                        </a:rPr>
+                        <a:t>39.81%</a:t>
+                      </a:r>
+                    </a:p>
+                  </a:txBody>
+                  <a:tcPr anchor="ctr">
+                    <a:solidFill>
+                      <a:srgbClr val="EEF3FC"/>
+                    </a:solidFill>
+                  </a:tcPr>
+                </a:tc>
+                <a:tc>
+                  <a:txBody>
+                    <a:bodyPr/>
+                    <a:lstStyle/>
+                    <a:p>
+                      <a:pPr algn="ctr"/>
+                      <a:r>
+                        <a:rPr sz="1100" b="0">
+                          <a:solidFill>
+                            <a:srgbClr val="1A1A1A"/>
+                          </a:solidFill>
+                        </a:rPr>
+                        <a:t>31.15%</a:t>
+                      </a:r>
+                    </a:p>
+                  </a:txBody>
+                  <a:tcPr anchor="ctr">
+                    <a:solidFill>
+                      <a:srgbClr val="EEF3FC"/>
+                    </a:solidFill>
+                  </a:tcPr>
+                </a:tc>
+                <a:tc>
+                  <a:txBody>
+                    <a:bodyPr/>
+                    <a:lstStyle/>
+                    <a:p>
+                      <a:pPr algn="ctr"/>
+                      <a:r>
+                        <a:rPr sz="1100" b="0">
+                          <a:solidFill>
+                            <a:srgbClr val="1A1A1A"/>
+                          </a:solidFill>
+                        </a:rPr>
+                        <a:t>16.78%</a:t>
+                      </a:r>
+                    </a:p>
+                  </a:txBody>
+                  <a:tcPr anchor="ctr">
+                    <a:solidFill>
+                      <a:srgbClr val="EEF3FC"/>
+                    </a:solidFill>
+                  </a:tcPr>
+                </a:tc>
+              </a:tr>
+              <a:tr h="440000">
+                <a:tc>
+                  <a:txBody>
+                    <a:bodyPr/>
+                    <a:lstStyle/>
+                    <a:p>
+                      <a:pPr algn="ctr"/>
+                      <a:r>
+                        <a:rPr sz="1100" b="0">
+                          <a:solidFill>
+                            <a:srgbClr val="1A1A1A"/>
+                          </a:solidFill>
+                        </a:rPr>
+                        <a:t>데이터셋별 극단 튜닝(3-seed)</a:t>
+                      </a:r>
+                    </a:p>
+                  </a:txBody>
+                  <a:tcPr anchor="ctr">
+                    <a:solidFill>
+                      <a:srgbClr val="FFFFFF"/>
+                    </a:solidFill>
+                  </a:tcPr>
+                </a:tc>
+                <a:tc>
+                  <a:txBody>
+                    <a:bodyPr/>
+                    <a:lstStyle/>
+                    <a:p>
+                      <a:pPr algn="ctr"/>
+                      <a:r>
+                        <a:rPr sz="1100" b="0">
+                          <a:solidFill>
+                            <a:srgbClr val="1A1A1A"/>
+                          </a:solidFill>
+                        </a:rPr>
+                        <a:t>46.39% ±12.46</a:t>
+                      </a:r>
+                    </a:p>
+                  </a:txBody>
+                  <a:tcPr anchor="ctr">
+                    <a:solidFill>
+                      <a:srgbClr val="FFFFFF"/>
+                    </a:solidFill>
+                  </a:tcPr>
+                </a:tc>
+                <a:tc>
+                  <a:txBody>
+                    <a:bodyPr/>
+                    <a:lstStyle/>
+                    <a:p>
+                      <a:pPr algn="ctr"/>
+                      <a:r>
+                        <a:rPr sz="1100" b="0">
+                          <a:solidFill>
+                            <a:srgbClr val="1A1A1A"/>
+                          </a:solidFill>
+                        </a:rPr>
+                        <a:t>19.59% ±10.57</a:t>
+                      </a:r>
+                    </a:p>
+                  </a:txBody>
+                  <a:tcPr anchor="ctr">
+                    <a:solidFill>
+                      <a:srgbClr val="FFFFFF"/>
+                    </a:solidFill>
+                  </a:tcPr>
+                </a:tc>
+                <a:tc>
+                  <a:txBody>
+                    <a:bodyPr/>
+                    <a:lstStyle/>
+                    <a:p>
+                      <a:pPr algn="ctr"/>
+                      <a:r>
+                        <a:rPr sz="1100" b="0">
+                          <a:solidFill>
+                            <a:srgbClr val="1A1A1A"/>
+                          </a:solidFill>
+                        </a:rPr>
+                        <a:t>—</a:t>
+                      </a:r>
+                    </a:p>
+                  </a:txBody>
+                  <a:tcPr anchor="ctr">
+                    <a:solidFill>
+                      <a:srgbClr val="FFFFFF"/>
+                    </a:solidFill>
+                  </a:tcPr>
+                </a:tc>
+              </a:tr>
+            </a:tbl>
+          </a:graphicData>
+        </a:graphic>
+      </p:graphicFrame>
+      <p:sp>
+        <p:nvSpPr>
+          <p:cNvPr id="6" name="TextBox 4"/>
+          <p:cNvSpPr txBox="1"/>
+          <p:nvPr/>
+        </p:nvSpPr>
+        <p:spPr>
+          <a:xfrm>
+            <a:off x="548640" y="5200000"/>
+            <a:ext cx="11091672" cy="1200000"/>
+          </a:xfrm>
+          <a:prstGeom prst="rect">
+            <a:avLst/>
+          </a:prstGeom>
+          <a:noFill/>
+        </p:spPr>
+        <p:txBody>
+          <a:bodyPr wrap="square" anchor="t" lIns="0" rIns="0" tIns="0" bIns="0">
+            <a:spAutoFit/>
+          </a:bodyPr>
+          <a:lstStyle/>
+          <a:p>
+            <a:pPr algn="l"/>
+            <a:r>
+              <a:rPr sz="1150" b="0" i="1">
+                <a:solidFill>
+                  <a:srgbClr val="5B5E6B"/>
+                </a:solidFill>
+                <a:latin typeface="Calibri"/>
+              </a:rPr>
+              <a:t>*APS는 seed42 단일 실행에서만 좋아 보였고 3-seed 평균은 noise였다. UCon-SFDA(ICLR 2025)는 CACL과 같은 contrastive-loss 계열이라 같은 문제를 겪을 가능성이 높아 구현하지 않고 판단 근거만 남겼다. 공통 패턴: ImageNet급 벤치마크 기준으로 설계된 하이퍼파라미터·구성요소는 이 프로젝트 규모(300~1,100장)에서 전부 재조정이 필요했고, 일부는 재조정으로도 못 고쳤다.</a:t>
+            </a:r>
+          </a:p>
+        </p:txBody>
+      </p:sp>
+      <p:sp>
+        <p:nvSpPr>
+          <p:cNvPr id="9" name="TextBox 5"/>
+          <p:cNvSpPr txBox="1"/>
+          <p:nvPr/>
+        </p:nvSpPr>
+        <p:spPr>
+          <a:xfrm>
+            <a:off x="11430000" y="6446520"/>
+            <a:ext cx="548640" cy="274320"/>
+          </a:xfrm>
+          <a:prstGeom prst="rect">
+            <a:avLst/>
+          </a:prstGeom>
+          <a:noFill/>
+        </p:spPr>
+        <p:txBody>
+          <a:bodyPr wrap="square" anchor="t" lIns="0" rIns="0" tIns="0" bIns="0">
+            <a:spAutoFit/>
+          </a:bodyPr>
+          <a:lstStyle/>
+          <a:p>
+            <a:pPr algn="r"/>
+            <a:r>
+              <a:rPr sz="1000" b="0" i="0">
+                <a:solidFill>
+                  <a:srgbClr val="5B5E6B"/>
+                </a:solidFill>
+                <a:latin typeface="Calibri"/>
+              </a:rPr>
+              <a:t>27</a:t>
             </a:r>
           </a:p>
         </p:txBody>

--- a/docs/CNN_토마토_병해분류_V2_진행보고.pptx
+++ b/docs/CNN_토마토_병해분류_V2_진행보고.pptx
@@ -33,6 +33,8 @@
     <p:sldId id="290" r:id="rId40"/>
     <p:sldId id="294" r:id="rId44"/>
     <p:sldId id="295" r:id="rId45"/>
+    <p:sldId id="296" r:id="rId46"/>
+    <p:sldId id="297" r:id="rId47"/>
     <p:sldId id="286" r:id="rId36"/>
     <p:sldId id="277" r:id="rId30"/>
     <p:sldId id="278" r:id="rId31"/>
@@ -18514,7 +18516,7 @@
                 </a:solidFill>
                 <a:latin typeface="Calibri"/>
               </a:rPr>
-              <a:t>29</a:t>
+              <a:t>31</a:t>
             </a:r>
           </a:p>
         </p:txBody>
@@ -19936,7 +19938,7 @@
                 </a:solidFill>
                 <a:latin typeface="Calibri"/>
               </a:rPr>
-              <a:t>30</a:t>
+              <a:t>32</a:t>
             </a:r>
           </a:p>
         </p:txBody>
@@ -19997,7 +19999,7 @@
                 </a:solidFill>
                 <a:latin typeface="Calibri"/>
               </a:rPr>
-              <a:t>RESULT 7 · DOMAIN ADAPTATION (6/6)</a:t>
+              <a:t>RESULT 7 · DOMAIN ADAPTATION (8/8)</a:t>
             </a:r>
           </a:p>
         </p:txBody>
@@ -20528,7 +20530,7 @@
                 </a:solidFill>
                 <a:latin typeface="Calibri"/>
               </a:rPr>
-              <a:t>28</a:t>
+              <a:t>30</a:t>
             </a:r>
           </a:p>
         </p:txBody>
@@ -20589,7 +20591,7 @@
                 </a:solidFill>
                 <a:latin typeface="Calibri"/>
               </a:rPr>
-              <a:t>RESULT 7 · DOMAIN ADAPTATION (3/6)</a:t>
+              <a:t>RESULT 7 · DOMAIN ADAPTATION (3/8)</a:t>
             </a:r>
           </a:p>
         </p:txBody>
@@ -21089,7 +21091,7 @@
                 </a:solidFill>
                 <a:latin typeface="Calibri"/>
               </a:rPr>
-              <a:t>RESULT 7 · DOMAIN ADAPTATION (2/6)</a:t>
+              <a:t>RESULT 7 · DOMAIN ADAPTATION (2/8)</a:t>
             </a:r>
           </a:p>
         </p:txBody>
@@ -21582,7 +21584,7 @@
                 </a:solidFill>
                 <a:latin typeface="Calibri"/>
               </a:rPr>
-              <a:t>Taiwan만 이론적으로 60%를 넘을 여지가 있다 — 하이퍼파라미터를 끝까지 밀면 seed42 한 번은 63%까지 봤지만, 3-seed로 검증하면 46.39% ±12.46으로 재현되지 않았다(5/6 슬라이드). Bangladesh는 오라클 상한(58.61%) 자체가 60%에 못 미쳐 “완벽한 적응 기법”을 찾아도 구조적으로 60%를 보장할 수 없고, PlantDoc은 정답을 줘도 23%라 적응 문제가 아니라 feature 표현력의 문제다 — source 학습 데이터·증강을 바꾸지 않는 한(이 프로젝트 범위 밖) 더 올릴 수 없다는 게 최종 진단이다.</a:t>
+              <a:t>Taiwan만 이론적으로 60%를 넘을 여지가 있다 — 하이퍼파라미터를 끝까지 밀면 seed42 한 번은 63%까지 봤지만, 3-seed로 검증하면 46.39% ±12.46으로 재현되지 않았다(6/8 슬라이드). Bangladesh는 오라클 상한(58.61%) 자체가 60%에 못 미쳐 “완벽한 적응 기법”을 찾아도 구조적으로 60%를 보장할 수 없고, PlantDoc은 정답을 줘도 23%라 적응 문제가 아니라 feature 표현력의 문제다 — source 학습 데이터·증강을 바꾸지 않는 한(이 프로젝트 범위 밖) 더 올릴 수 없다는 게 최종 진단이다.</a:t>
             </a:r>
           </a:p>
         </p:txBody>
@@ -21678,7 +21680,7 @@
                 </a:solidFill>
                 <a:latin typeface="Calibri"/>
               </a:rPr>
-              <a:t>RESULT 7 · DOMAIN ADAPTATION (1/6)</a:t>
+              <a:t>RESULT 7 · DOMAIN ADAPTATION (1/8)</a:t>
             </a:r>
           </a:p>
         </p:txBody>
@@ -22357,7 +22359,7 @@
                 </a:solidFill>
                 <a:latin typeface="Calibri"/>
               </a:rPr>
-              <a:t>RESULT 7 · DOMAIN ADAPTATION (4/6)</a:t>
+              <a:t>RESULT 7 · DOMAIN ADAPTATION (4/8)</a:t>
             </a:r>
           </a:p>
         </p:txBody>
@@ -23969,7 +23971,7 @@
                 </a:solidFill>
                 <a:latin typeface="Calibri"/>
               </a:rPr>
-              <a:t>RESULT 7 · DOMAIN ADAPTATION (5/6)</a:t>
+              <a:t>RESULT 7 · DOMAIN ADAPTATION (5/8)</a:t>
             </a:r>
           </a:p>
         </p:txBody>
@@ -24858,6 +24860,1637 @@
                 <a:latin typeface="Calibri"/>
               </a:rPr>
               <a:t>27</a:t>
+            </a:r>
+          </a:p>
+        </p:txBody>
+      </p:sp>
+    </p:spTree>
+  </p:cSld>
+  <p:clrMapOvr>
+    <a:masterClrMapping/>
+  </p:clrMapOvr>
+</p:sld>
+</file>
+
+<file path=ppt/slides/slide41.xml><?xml version="1.0" encoding="utf-8"?>
+<p:sld xmlns:a="http://schemas.openxmlformats.org/drawingml/2006/main" xmlns:p="http://schemas.openxmlformats.org/presentationml/2006/main" xmlns:r="http://schemas.openxmlformats.org/officeDocument/2006/relationships">
+  <p:cSld>
+    <p:bg>
+      <p:bgPr>
+        <a:solidFill>
+          <a:srgbClr val="FFFFFF"/>
+        </a:solidFill>
+        <a:effectLst/>
+      </p:bgPr>
+    </p:bg>
+    <p:spTree>
+      <p:nvGrpSpPr>
+        <p:cNvPr id="1" name=""/>
+        <p:cNvGrpSpPr/>
+        <p:nvPr/>
+      </p:nvGrpSpPr>
+      <p:grpSpPr/>
+      <p:sp>
+        <p:nvSpPr>
+          <p:cNvPr id="2" name="TextBox 1"/>
+          <p:cNvSpPr txBox="1"/>
+          <p:nvPr/>
+        </p:nvSpPr>
+        <p:spPr>
+          <a:xfrm>
+            <a:off x="548640" y="292608"/>
+            <a:ext cx="9144000" cy="292608"/>
+          </a:xfrm>
+          <a:prstGeom prst="rect">
+            <a:avLst/>
+          </a:prstGeom>
+          <a:noFill/>
+        </p:spPr>
+        <p:txBody>
+          <a:bodyPr wrap="square" anchor="t" lIns="0" rIns="0" tIns="0" bIns="0">
+            <a:spAutoFit/>
+          </a:bodyPr>
+          <a:lstStyle/>
+          <a:p>
+            <a:pPr algn="l"/>
+            <a:r>
+              <a:rPr sz="1050" b="1" i="0">
+                <a:solidFill>
+                  <a:srgbClr val="2A78D6"/>
+                </a:solidFill>
+                <a:latin typeface="Calibri"/>
+              </a:rPr>
+              <a:t>RESULT 7 · DOMAIN ADAPTATION (6/8)</a:t>
+            </a:r>
+          </a:p>
+        </p:txBody>
+      </p:sp>
+      <p:sp>
+        <p:nvSpPr>
+          <p:cNvPr id="3" name="TextBox 2"/>
+          <p:cNvSpPr txBox="1"/>
+          <p:nvPr/>
+        </p:nvSpPr>
+        <p:spPr>
+          <a:xfrm>
+            <a:off x="548640" y="566928"/>
+            <a:ext cx="10972800" cy="548640"/>
+          </a:xfrm>
+          <a:prstGeom prst="rect">
+            <a:avLst/>
+          </a:prstGeom>
+          <a:noFill/>
+        </p:spPr>
+        <p:txBody>
+          <a:bodyPr wrap="square" anchor="t" lIns="0" rIns="0" tIns="0" bIns="0">
+            <a:spAutoFit/>
+          </a:bodyPr>
+          <a:lstStyle/>
+          <a:p>
+            <a:pPr algn="l"/>
+            <a:r>
+              <a:rPr sz="2200" b="1" i="0">
+                <a:solidFill>
+                  <a:srgbClr val="1E2761"/>
+                </a:solidFill>
+                <a:latin typeface="Cambria"/>
+              </a:rPr>
+              <a:t>실험 방법론 1: 데이터셋별 하이퍼파라미터 탐색</a:t>
+            </a:r>
+          </a:p>
+        </p:txBody>
+      </p:sp>
+      <p:sp>
+        <p:nvSpPr>
+          <p:cNvPr id="4" name="TextBox 3"/>
+          <p:cNvSpPr txBox="1"/>
+          <p:nvPr/>
+        </p:nvSpPr>
+        <p:spPr>
+          <a:xfrm>
+            <a:off x="548640" y="1150000"/>
+            <a:ext cx="11091672" cy="950000"/>
+          </a:xfrm>
+          <a:prstGeom prst="rect">
+            <a:avLst/>
+          </a:prstGeom>
+          <a:noFill/>
+        </p:spPr>
+        <p:txBody>
+          <a:bodyPr wrap="square" anchor="t" lIns="0" rIns="0" tIns="0" bIns="0">
+            <a:spAutoFit/>
+          </a:bodyPr>
+          <a:lstStyle/>
+          <a:p>
+            <a:pPr algn="l"/>
+            <a:r>
+              <a:rPr sz="1250" b="0" i="0">
+                <a:solidFill>
+                  <a:srgbClr val="1A1A1A"/>
+                </a:solidFill>
+                <a:latin typeface="Calibri"/>
+              </a:rPr>
+              <a:t>교수님 피드백(데이터셋마다 따로 튜닝해도 된다)에 따라 SHOT의 epoch·cls_loss_weight를 데이터셋별로 그리드서치했다 — Taiwan 24개 조합(epoch 1~10 × weight 0.1~1.0), Bangladesh 50개 이상 조합(epoch 1~7 × weight 0.1~4.0 + class_balance/balanced_cap/exclude-classes/seed-ensemble 변형).</a:t>
+            </a:r>
+          </a:p>
+        </p:txBody>
+      </p:sp>
+      <p:graphicFrame>
+        <p:nvGraphicFramePr>
+          <p:cNvPr id="7" name="Table"/>
+          <p:cNvGraphicFramePr>
+            <a:graphicFrameLocks noGrp="1"/>
+          </p:cNvGraphicFramePr>
+          <p:nvPr/>
+        </p:nvGraphicFramePr>
+        <p:xfrm>
+          <a:off x="548640" y="2200000"/>
+          <a:ext cx="11000000" cy="3080000"/>
+        </p:xfrm>
+        <a:graphic>
+          <a:graphicData uri="http://schemas.openxmlformats.org/drawingml/2006/table">
+            <a:tbl>
+              <a:tblPr firstRow="1" bandRow="1">
+                <a:tableStyleId>{5C22544A-7EE6-4342-B048-85BDC9FD1C3A}</a:tableStyleId>
+              </a:tblPr>
+              <a:tblGrid>
+                <a:gridCol w="1600000"/>
+                <a:gridCol w="4700000"/>
+                <a:gridCol w="4700000"/>
+              </a:tblGrid>
+              <a:tr h="440000">
+                <a:tc>
+                  <a:txBody>
+                    <a:bodyPr/>
+                    <a:lstStyle/>
+                    <a:p>
+                      <a:pPr algn="ctr"/>
+                      <a:r>
+                        <a:rPr sz="1050" b="1">
+                          <a:solidFill>
+                            <a:srgbClr val="FFFFFF"/>
+                          </a:solidFill>
+                        </a:rPr>
+                        <a:t>epoch</a:t>
+                      </a:r>
+                    </a:p>
+                  </a:txBody>
+                  <a:tcPr anchor="ctr">
+                    <a:solidFill>
+                      <a:srgbClr val="1E2761"/>
+                    </a:solidFill>
+                  </a:tcPr>
+                </a:tc>
+                <a:tc>
+                  <a:txBody>
+                    <a:bodyPr/>
+                    <a:lstStyle/>
+                    <a:p>
+                      <a:pPr algn="ctr"/>
+                      <a:r>
+                        <a:rPr sz="1050" b="1">
+                          <a:solidFill>
+                            <a:srgbClr val="FFFFFF"/>
+                          </a:solidFill>
+                        </a:rPr>
+                        <a:t>Taiwan (최적 weight)</a:t>
+                      </a:r>
+                    </a:p>
+                  </a:txBody>
+                  <a:tcPr anchor="ctr">
+                    <a:solidFill>
+                      <a:srgbClr val="1E2761"/>
+                    </a:solidFill>
+                  </a:tcPr>
+                </a:tc>
+                <a:tc>
+                  <a:txBody>
+                    <a:bodyPr/>
+                    <a:lstStyle/>
+                    <a:p>
+                      <a:pPr algn="ctr"/>
+                      <a:r>
+                        <a:rPr sz="1050" b="1">
+                          <a:solidFill>
+                            <a:srgbClr val="FFFFFF"/>
+                          </a:solidFill>
+                        </a:rPr>
+                        <a:t>Bangladesh (최적 weight, cb+bcap 포함)</a:t>
+                      </a:r>
+                    </a:p>
+                  </a:txBody>
+                  <a:tcPr anchor="ctr">
+                    <a:solidFill>
+                      <a:srgbClr val="1E2761"/>
+                    </a:solidFill>
+                  </a:tcPr>
+                </a:tc>
+              </a:tr>
+              <a:tr h="440000">
+                <a:tc>
+                  <a:txBody>
+                    <a:bodyPr/>
+                    <a:lstStyle/>
+                    <a:p>
+                      <a:pPr algn="ctr"/>
+                      <a:r>
+                        <a:rPr sz="1050" b="0">
+                          <a:solidFill>
+                            <a:srgbClr val="1A1A1A"/>
+                          </a:solidFill>
+                        </a:rPr>
+                        <a:t>1</a:t>
+                      </a:r>
+                    </a:p>
+                  </a:txBody>
+                  <a:tcPr anchor="ctr">
+                    <a:solidFill>
+                      <a:srgbClr val="FFFFFF"/>
+                    </a:solidFill>
+                  </a:tcPr>
+                </a:tc>
+                <a:tc>
+                  <a:txBody>
+                    <a:bodyPr/>
+                    <a:lstStyle/>
+                    <a:p>
+                      <a:pPr algn="ctr"/>
+                      <a:r>
+                        <a:rPr sz="1050" b="0">
+                          <a:solidFill>
+                            <a:srgbClr val="1A1A1A"/>
+                          </a:solidFill>
+                        </a:rPr>
+                        <a:t>40.76% (w=0.5)</a:t>
+                      </a:r>
+                    </a:p>
+                  </a:txBody>
+                  <a:tcPr anchor="ctr">
+                    <a:solidFill>
+                      <a:srgbClr val="FFFFFF"/>
+                    </a:solidFill>
+                  </a:tcPr>
+                </a:tc>
+                <a:tc>
+                  <a:txBody>
+                    <a:bodyPr/>
+                    <a:lstStyle/>
+                    <a:p>
+                      <a:pPr algn="ctr"/>
+                      <a:r>
+                        <a:rPr sz="1050" b="0">
+                          <a:solidFill>
+                            <a:srgbClr val="1A1A1A"/>
+                          </a:solidFill>
+                        </a:rPr>
+                        <a:t>30.43% (w=0.3, +cb+bcap)</a:t>
+                      </a:r>
+                    </a:p>
+                  </a:txBody>
+                  <a:tcPr anchor="ctr">
+                    <a:solidFill>
+                      <a:srgbClr val="FFFFFF"/>
+                    </a:solidFill>
+                  </a:tcPr>
+                </a:tc>
+              </a:tr>
+              <a:tr h="440000">
+                <a:tc>
+                  <a:txBody>
+                    <a:bodyPr/>
+                    <a:lstStyle/>
+                    <a:p>
+                      <a:pPr algn="ctr"/>
+                      <a:r>
+                        <a:rPr sz="1050" b="1">
+                          <a:solidFill>
+                            <a:srgbClr val="1E2761"/>
+                          </a:solidFill>
+                        </a:rPr>
+                        <a:t>2 (최종 채택)</a:t>
+                      </a:r>
+                    </a:p>
+                  </a:txBody>
+                  <a:tcPr anchor="ctr">
+                    <a:solidFill>
+                      <a:srgbClr val="EEF3FC"/>
+                    </a:solidFill>
+                  </a:tcPr>
+                </a:tc>
+                <a:tc>
+                  <a:txBody>
+                    <a:bodyPr/>
+                    <a:lstStyle/>
+                    <a:p>
+                      <a:pPr algn="ctr"/>
+                      <a:r>
+                        <a:rPr sz="1050" b="0">
+                          <a:solidFill>
+                            <a:srgbClr val="1A1A1A"/>
+                          </a:solidFill>
+                        </a:rPr>
+                        <a:t>48.73% (w=1.0)</a:t>
+                      </a:r>
+                    </a:p>
+                  </a:txBody>
+                  <a:tcPr anchor="ctr">
+                    <a:solidFill>
+                      <a:srgbClr val="EEF3FC"/>
+                    </a:solidFill>
+                  </a:tcPr>
+                </a:tc>
+                <a:tc>
+                  <a:txBody>
+                    <a:bodyPr/>
+                    <a:lstStyle/>
+                    <a:p>
+                      <a:pPr algn="ctr"/>
+                      <a:r>
+                        <a:rPr sz="1050" b="0">
+                          <a:solidFill>
+                            <a:srgbClr val="1A1A1A"/>
+                          </a:solidFill>
+                        </a:rPr>
+                        <a:t>31.15% (w=1.0, +cb+bcap)</a:t>
+                      </a:r>
+                    </a:p>
+                  </a:txBody>
+                  <a:tcPr anchor="ctr">
+                    <a:solidFill>
+                      <a:srgbClr val="EEF3FC"/>
+                    </a:solidFill>
+                  </a:tcPr>
+                </a:tc>
+              </a:tr>
+              <a:tr h="440000">
+                <a:tc>
+                  <a:txBody>
+                    <a:bodyPr/>
+                    <a:lstStyle/>
+                    <a:p>
+                      <a:pPr algn="ctr"/>
+                      <a:r>
+                        <a:rPr sz="1050" b="0">
+                          <a:solidFill>
+                            <a:srgbClr val="1A1A1A"/>
+                          </a:solidFill>
+                        </a:rPr>
+                        <a:t>3</a:t>
+                      </a:r>
+                    </a:p>
+                  </a:txBody>
+                  <a:tcPr anchor="ctr">
+                    <a:solidFill>
+                      <a:srgbClr val="FFFFFF"/>
+                    </a:solidFill>
+                  </a:tcPr>
+                </a:tc>
+                <a:tc>
+                  <a:txBody>
+                    <a:bodyPr/>
+                    <a:lstStyle/>
+                    <a:p>
+                      <a:pPr algn="ctr"/>
+                      <a:r>
+                        <a:rPr sz="1050" b="0">
+                          <a:solidFill>
+                            <a:srgbClr val="1A1A1A"/>
+                          </a:solidFill>
+                        </a:rPr>
+                        <a:t>51.59% (w=0.5)</a:t>
+                      </a:r>
+                    </a:p>
+                  </a:txBody>
+                  <a:tcPr anchor="ctr">
+                    <a:solidFill>
+                      <a:srgbClr val="FFFFFF"/>
+                    </a:solidFill>
+                  </a:tcPr>
+                </a:tc>
+                <a:tc>
+                  <a:txBody>
+                    <a:bodyPr/>
+                    <a:lstStyle/>
+                    <a:p>
+                      <a:pPr algn="ctr"/>
+                      <a:r>
+                        <a:rPr sz="1050" b="0">
+                          <a:solidFill>
+                            <a:srgbClr val="1A1A1A"/>
+                          </a:solidFill>
+                        </a:rPr>
+                        <a:t>33.33% (w=2.0, +cb+bcap)</a:t>
+                      </a:r>
+                    </a:p>
+                  </a:txBody>
+                  <a:tcPr anchor="ctr">
+                    <a:solidFill>
+                      <a:srgbClr val="FFFFFF"/>
+                    </a:solidFill>
+                  </a:tcPr>
+                </a:tc>
+              </a:tr>
+              <a:tr h="440000">
+                <a:tc>
+                  <a:txBody>
+                    <a:bodyPr/>
+                    <a:lstStyle/>
+                    <a:p>
+                      <a:pPr algn="ctr"/>
+                      <a:r>
+                        <a:rPr sz="1050" b="0">
+                          <a:solidFill>
+                            <a:srgbClr val="1A1A1A"/>
+                          </a:solidFill>
+                        </a:rPr>
+                        <a:t>4</a:t>
+                      </a:r>
+                    </a:p>
+                  </a:txBody>
+                  <a:tcPr anchor="ctr">
+                    <a:solidFill>
+                      <a:srgbClr val="EEF3FC"/>
+                    </a:solidFill>
+                  </a:tcPr>
+                </a:tc>
+                <a:tc>
+                  <a:txBody>
+                    <a:bodyPr/>
+                    <a:lstStyle/>
+                    <a:p>
+                      <a:pPr algn="ctr"/>
+                      <a:r>
+                        <a:rPr sz="1050" b="0">
+                          <a:solidFill>
+                            <a:srgbClr val="1A1A1A"/>
+                          </a:solidFill>
+                        </a:rPr>
+                        <a:t>—</a:t>
+                      </a:r>
+                    </a:p>
+                  </a:txBody>
+                  <a:tcPr anchor="ctr">
+                    <a:solidFill>
+                      <a:srgbClr val="EEF3FC"/>
+                    </a:solidFill>
+                  </a:tcPr>
+                </a:tc>
+                <a:tc>
+                  <a:txBody>
+                    <a:bodyPr/>
+                    <a:lstStyle/>
+                    <a:p>
+                      <a:pPr algn="ctr"/>
+                      <a:r>
+                        <a:rPr sz="1050" b="1">
+                          <a:solidFill>
+                            <a:srgbClr val="1A6B3A"/>
+                          </a:solidFill>
+                        </a:rPr>
+                        <a:t>34.42% (w=2.0, +cb+bcap) ← 전체 최고</a:t>
+                      </a:r>
+                    </a:p>
+                  </a:txBody>
+                  <a:tcPr anchor="ctr">
+                    <a:solidFill>
+                      <a:srgbClr val="EEF3FC"/>
+                    </a:solidFill>
+                  </a:tcPr>
+                </a:tc>
+              </a:tr>
+              <a:tr h="440000">
+                <a:tc>
+                  <a:txBody>
+                    <a:bodyPr/>
+                    <a:lstStyle/>
+                    <a:p>
+                      <a:pPr algn="ctr"/>
+                      <a:r>
+                        <a:rPr sz="1050" b="0">
+                          <a:solidFill>
+                            <a:srgbClr val="1A1A1A"/>
+                          </a:solidFill>
+                        </a:rPr>
+                        <a:t>5</a:t>
+                      </a:r>
+                    </a:p>
+                  </a:txBody>
+                  <a:tcPr anchor="ctr">
+                    <a:solidFill>
+                      <a:srgbClr val="FFFFFF"/>
+                    </a:solidFill>
+                  </a:tcPr>
+                </a:tc>
+                <a:tc>
+                  <a:txBody>
+                    <a:bodyPr/>
+                    <a:lstStyle/>
+                    <a:p>
+                      <a:pPr algn="ctr"/>
+                      <a:r>
+                        <a:rPr sz="1050" b="0">
+                          <a:solidFill>
+                            <a:srgbClr val="1A1A1A"/>
+                          </a:solidFill>
+                        </a:rPr>
+                        <a:t>61.46% (w=1.0)</a:t>
+                      </a:r>
+                    </a:p>
+                  </a:txBody>
+                  <a:tcPr anchor="ctr">
+                    <a:solidFill>
+                      <a:srgbClr val="FFFFFF"/>
+                    </a:solidFill>
+                  </a:tcPr>
+                </a:tc>
+                <a:tc>
+                  <a:txBody>
+                    <a:bodyPr/>
+                    <a:lstStyle/>
+                    <a:p>
+                      <a:pPr algn="ctr"/>
+                      <a:r>
+                        <a:rPr sz="1050" b="0">
+                          <a:solidFill>
+                            <a:srgbClr val="1A1A1A"/>
+                          </a:solidFill>
+                        </a:rPr>
+                        <a:t>31.70% (w=0.5, +cb+bcap)</a:t>
+                      </a:r>
+                    </a:p>
+                  </a:txBody>
+                  <a:tcPr anchor="ctr">
+                    <a:solidFill>
+                      <a:srgbClr val="FFFFFF"/>
+                    </a:solidFill>
+                  </a:tcPr>
+                </a:tc>
+              </a:tr>
+              <a:tr h="440000">
+                <a:tc>
+                  <a:txBody>
+                    <a:bodyPr/>
+                    <a:lstStyle/>
+                    <a:p>
+                      <a:pPr algn="ctr"/>
+                      <a:r>
+                        <a:rPr sz="1050" b="0">
+                          <a:solidFill>
+                            <a:srgbClr val="1A1A1A"/>
+                          </a:solidFill>
+                        </a:rPr>
+                        <a:t>7</a:t>
+                      </a:r>
+                    </a:p>
+                  </a:txBody>
+                  <a:tcPr anchor="ctr">
+                    <a:solidFill>
+                      <a:srgbClr val="EEF3FC"/>
+                    </a:solidFill>
+                  </a:tcPr>
+                </a:tc>
+                <a:tc>
+                  <a:txBody>
+                    <a:bodyPr/>
+                    <a:lstStyle/>
+                    <a:p>
+                      <a:pPr algn="ctr"/>
+                      <a:r>
+                        <a:rPr sz="1050" b="1">
+                          <a:solidFill>
+                            <a:srgbClr val="1A6B3A"/>
+                          </a:solidFill>
+                        </a:rPr>
+                        <a:t>63.06% (w=1.0) ← 전체 최고</a:t>
+                      </a:r>
+                    </a:p>
+                  </a:txBody>
+                  <a:tcPr anchor="ctr">
+                    <a:solidFill>
+                      <a:srgbClr val="EEF3FC"/>
+                    </a:solidFill>
+                  </a:tcPr>
+                </a:tc>
+                <a:tc>
+                  <a:txBody>
+                    <a:bodyPr/>
+                    <a:lstStyle/>
+                    <a:p>
+                      <a:pPr algn="ctr"/>
+                      <a:r>
+                        <a:rPr sz="1050" b="0">
+                          <a:solidFill>
+                            <a:srgbClr val="1A1A1A"/>
+                          </a:solidFill>
+                        </a:rPr>
+                        <a:t>30.61% (w=0.3+APS)</a:t>
+                      </a:r>
+                    </a:p>
+                  </a:txBody>
+                  <a:tcPr anchor="ctr">
+                    <a:solidFill>
+                      <a:srgbClr val="EEF3FC"/>
+                    </a:solidFill>
+                  </a:tcPr>
+                </a:tc>
+              </a:tr>
+              <a:tr h="440000">
+                <a:tc>
+                  <a:txBody>
+                    <a:bodyPr/>
+                    <a:lstStyle/>
+                    <a:p>
+                      <a:pPr algn="ctr"/>
+                      <a:r>
+                        <a:rPr sz="1050" b="0">
+                          <a:solidFill>
+                            <a:srgbClr val="1A1A1A"/>
+                          </a:solidFill>
+                        </a:rPr>
+                        <a:t>10</a:t>
+                      </a:r>
+                    </a:p>
+                  </a:txBody>
+                  <a:tcPr anchor="ctr">
+                    <a:solidFill>
+                      <a:srgbClr val="FFFFFF"/>
+                    </a:solidFill>
+                  </a:tcPr>
+                </a:tc>
+                <a:tc>
+                  <a:txBody>
+                    <a:bodyPr/>
+                    <a:lstStyle/>
+                    <a:p>
+                      <a:pPr algn="ctr"/>
+                      <a:r>
+                        <a:rPr sz="1050" b="0">
+                          <a:solidFill>
+                            <a:srgbClr val="1A1A1A"/>
+                          </a:solidFill>
+                        </a:rPr>
+                        <a:t>56.37% (w=0.5, 과적합 시작)</a:t>
+                      </a:r>
+                    </a:p>
+                  </a:txBody>
+                  <a:tcPr anchor="ctr">
+                    <a:solidFill>
+                      <a:srgbClr val="FFFFFF"/>
+                    </a:solidFill>
+                  </a:tcPr>
+                </a:tc>
+                <a:tc>
+                  <a:txBody>
+                    <a:bodyPr/>
+                    <a:lstStyle/>
+                    <a:p>
+                      <a:pPr algn="ctr"/>
+                      <a:r>
+                        <a:rPr sz="1050" b="0">
+                          <a:solidFill>
+                            <a:srgbClr val="1A1A1A"/>
+                          </a:solidFill>
+                        </a:rPr>
+                        <a:t>—</a:t>
+                      </a:r>
+                    </a:p>
+                  </a:txBody>
+                  <a:tcPr anchor="ctr">
+                    <a:solidFill>
+                      <a:srgbClr val="FFFFFF"/>
+                    </a:solidFill>
+                  </a:tcPr>
+                </a:tc>
+              </a:tr>
+            </a:tbl>
+          </a:graphicData>
+        </a:graphic>
+      </p:graphicFrame>
+      <p:sp>
+        <p:nvSpPr>
+          <p:cNvPr id="6" name="TextBox 4"/>
+          <p:cNvSpPr txBox="1"/>
+          <p:nvPr/>
+        </p:nvSpPr>
+        <p:spPr>
+          <a:xfrm>
+            <a:off x="548640" y="5400000"/>
+            <a:ext cx="11091672" cy="1000000"/>
+          </a:xfrm>
+          <a:prstGeom prst="rect">
+            <a:avLst/>
+          </a:prstGeom>
+          <a:noFill/>
+        </p:spPr>
+        <p:txBody>
+          <a:bodyPr wrap="square" anchor="t" lIns="0" rIns="0" tIns="0" bIns="0">
+            <a:spAutoFit/>
+          </a:bodyPr>
+          <a:lstStyle/>
+          <a:p>
+            <a:pPr algn="l"/>
+            <a:r>
+              <a:rPr sz="1100" b="0" i="1">
+                <a:solidFill>
+                  <a:srgbClr val="5B5E6B"/>
+                </a:solidFill>
+                <a:latin typeface="Calibri"/>
+              </a:rPr>
+              <a:t>Taiwan은 epoch·weight를 올릴수록 계속 좋아지다 epoch=10에서 과적합으로 꺾인다. Bangladesh는 epoch=4·weight=2.0(class_balance+balanced_cap 병행)에서 정점(34.42%) 후 하락한다. 하지만 두 정점(63.06%, 34.42%) 모두 seed42 단일 실행이고, 3-seed로 검증하면 재현되지 않았다(1/8 슬라이드 데이터와 같은 결론) — 그래서 최종 채택은 정점이 아니라 epoch=2(공통 고정값)다.</a:t>
+            </a:r>
+          </a:p>
+        </p:txBody>
+      </p:sp>
+      <p:sp>
+        <p:nvSpPr>
+          <p:cNvPr id="9" name="TextBox 5"/>
+          <p:cNvSpPr txBox="1"/>
+          <p:nvPr/>
+        </p:nvSpPr>
+        <p:spPr>
+          <a:xfrm>
+            <a:off x="11430000" y="6446520"/>
+            <a:ext cx="548640" cy="274320"/>
+          </a:xfrm>
+          <a:prstGeom prst="rect">
+            <a:avLst/>
+          </a:prstGeom>
+          <a:noFill/>
+        </p:spPr>
+        <p:txBody>
+          <a:bodyPr wrap="square" anchor="t" lIns="0" rIns="0" tIns="0" bIns="0">
+            <a:spAutoFit/>
+          </a:bodyPr>
+          <a:lstStyle/>
+          <a:p>
+            <a:pPr algn="r"/>
+            <a:r>
+              <a:rPr sz="1000" b="0" i="0">
+                <a:solidFill>
+                  <a:srgbClr val="5B5E6B"/>
+                </a:solidFill>
+                <a:latin typeface="Calibri"/>
+              </a:rPr>
+              <a:t>28</a:t>
+            </a:r>
+          </a:p>
+        </p:txBody>
+      </p:sp>
+    </p:spTree>
+  </p:cSld>
+  <p:clrMapOvr>
+    <a:masterClrMapping/>
+  </p:clrMapOvr>
+</p:sld>
+</file>
+
+<file path=ppt/slides/slide42.xml><?xml version="1.0" encoding="utf-8"?>
+<p:sld xmlns:a="http://schemas.openxmlformats.org/drawingml/2006/main" xmlns:p="http://schemas.openxmlformats.org/presentationml/2006/main" xmlns:r="http://schemas.openxmlformats.org/officeDocument/2006/relationships">
+  <p:cSld>
+    <p:bg>
+      <p:bgPr>
+        <a:solidFill>
+          <a:srgbClr val="FFFFFF"/>
+        </a:solidFill>
+        <a:effectLst/>
+      </p:bgPr>
+    </p:bg>
+    <p:spTree>
+      <p:nvGrpSpPr>
+        <p:cNvPr id="1" name=""/>
+        <p:cNvGrpSpPr/>
+        <p:nvPr/>
+      </p:nvGrpSpPr>
+      <p:grpSpPr/>
+      <p:sp>
+        <p:nvSpPr>
+          <p:cNvPr id="2" name="TextBox 1"/>
+          <p:cNvSpPr txBox="1"/>
+          <p:nvPr/>
+        </p:nvSpPr>
+        <p:spPr>
+          <a:xfrm>
+            <a:off x="548640" y="292608"/>
+            <a:ext cx="9144000" cy="292608"/>
+          </a:xfrm>
+          <a:prstGeom prst="rect">
+            <a:avLst/>
+          </a:prstGeom>
+          <a:noFill/>
+        </p:spPr>
+        <p:txBody>
+          <a:bodyPr wrap="square" anchor="t" lIns="0" rIns="0" tIns="0" bIns="0">
+            <a:spAutoFit/>
+          </a:bodyPr>
+          <a:lstStyle/>
+          <a:p>
+            <a:pPr algn="l"/>
+            <a:r>
+              <a:rPr sz="1050" b="1" i="0">
+                <a:solidFill>
+                  <a:srgbClr val="2A78D6"/>
+                </a:solidFill>
+                <a:latin typeface="Calibri"/>
+              </a:rPr>
+              <a:t>RESULT 7 · DOMAIN ADAPTATION (7/8)</a:t>
+            </a:r>
+          </a:p>
+        </p:txBody>
+      </p:sp>
+      <p:sp>
+        <p:nvSpPr>
+          <p:cNvPr id="3" name="TextBox 2"/>
+          <p:cNvSpPr txBox="1"/>
+          <p:nvPr/>
+        </p:nvSpPr>
+        <p:spPr>
+          <a:xfrm>
+            <a:off x="548640" y="566928"/>
+            <a:ext cx="10972800" cy="548640"/>
+          </a:xfrm>
+          <a:prstGeom prst="rect">
+            <a:avLst/>
+          </a:prstGeom>
+          <a:noFill/>
+        </p:spPr>
+        <p:txBody>
+          <a:bodyPr wrap="square" anchor="t" lIns="0" rIns="0" tIns="0" bIns="0">
+            <a:spAutoFit/>
+          </a:bodyPr>
+          <a:lstStyle/>
+          <a:p>
+            <a:pPr algn="l"/>
+            <a:r>
+              <a:rPr sz="2200" b="1" i="0">
+                <a:solidFill>
+                  <a:srgbClr val="1E2761"/>
+                </a:solidFill>
+                <a:latin typeface="Cambria"/>
+              </a:rPr>
+              <a:t>실험 방법론 2: Loss 함수·보조 항 하이퍼파라미터 조율</a:t>
+            </a:r>
+          </a:p>
+        </p:txBody>
+      </p:sp>
+      <p:sp>
+        <p:nvSpPr>
+          <p:cNvPr id="4" name="TextBox 3"/>
+          <p:cNvSpPr txBox="1"/>
+          <p:nvPr/>
+        </p:nvSpPr>
+        <p:spPr>
+          <a:xfrm>
+            <a:off x="548640" y="1150000"/>
+            <a:ext cx="11091672" cy="900000"/>
+          </a:xfrm>
+          <a:prstGeom prst="rect">
+            <a:avLst/>
+          </a:prstGeom>
+          <a:noFill/>
+        </p:spPr>
+        <p:txBody>
+          <a:bodyPr wrap="square" anchor="t" lIns="0" rIns="0" tIns="0" bIns="0">
+            <a:spAutoFit/>
+          </a:bodyPr>
+          <a:lstStyle/>
+          <a:p>
+            <a:pPr algn="l"/>
+            <a:r>
+              <a:rPr sz="1250" b="0" i="0">
+                <a:solidFill>
+                  <a:srgbClr val="1A1A1A"/>
+                </a:solidFill>
+                <a:latin typeface="Calibri"/>
+              </a:rPr>
+              <a:t>SHOT의 기본 loss(pseudo-label CE + information-maximization) 위에 여러 보조 항을 추가로 시도하면서, 각 항의 가중치·범위를 조율했다 — 모두 target label 없이 pseudo-label/feature 구조만으로 조정했다.</a:t>
+            </a:r>
+          </a:p>
+        </p:txBody>
+      </p:sp>
+      <p:graphicFrame>
+        <p:nvGraphicFramePr>
+          <p:cNvPr id="7" name="Table"/>
+          <p:cNvGraphicFramePr>
+            <a:graphicFrameLocks noGrp="1"/>
+          </p:cNvGraphicFramePr>
+          <p:nvPr/>
+        </p:nvGraphicFramePr>
+        <p:xfrm>
+          <a:off x="548640" y="2250000"/>
+          <a:ext cx="11000000" cy="2640000"/>
+        </p:xfrm>
+        <a:graphic>
+          <a:graphicData uri="http://schemas.openxmlformats.org/drawingml/2006/table">
+            <a:tbl>
+              <a:tblPr firstRow="1" bandRow="1">
+                <a:tableStyleId>{5C22544A-7EE6-4342-B048-85BDC9FD1C3A}</a:tableStyleId>
+              </a:tblPr>
+              <a:tblGrid>
+                <a:gridCol w="3200000"/>
+                <a:gridCol w="2400000"/>
+                <a:gridCol w="2700000"/>
+                <a:gridCol w="2700000"/>
+              </a:tblGrid>
+              <a:tr h="440000">
+                <a:tc>
+                  <a:txBody>
+                    <a:bodyPr/>
+                    <a:lstStyle/>
+                    <a:p>
+                      <a:pPr algn="ctr"/>
+                      <a:r>
+                        <a:rPr sz="1050" b="1">
+                          <a:solidFill>
+                            <a:srgbClr val="FFFFFF"/>
+                          </a:solidFill>
+                        </a:rPr>
+                        <a:t>하이퍼파라미터</a:t>
+                      </a:r>
+                    </a:p>
+                  </a:txBody>
+                  <a:tcPr anchor="ctr">
+                    <a:solidFill>
+                      <a:srgbClr val="1E2761"/>
+                    </a:solidFill>
+                  </a:tcPr>
+                </a:tc>
+                <a:tc>
+                  <a:txBody>
+                    <a:bodyPr/>
+                    <a:lstStyle/>
+                    <a:p>
+                      <a:pPr algn="ctr"/>
+                      <a:r>
+                        <a:rPr sz="1050" b="1">
+                          <a:solidFill>
+                            <a:srgbClr val="FFFFFF"/>
+                          </a:solidFill>
+                        </a:rPr>
+                        <a:t>테스트 범위</a:t>
+                      </a:r>
+                    </a:p>
+                  </a:txBody>
+                  <a:tcPr anchor="ctr">
+                    <a:solidFill>
+                      <a:srgbClr val="1E2761"/>
+                    </a:solidFill>
+                  </a:tcPr>
+                </a:tc>
+                <a:tc>
+                  <a:txBody>
+                    <a:bodyPr/>
+                    <a:lstStyle/>
+                    <a:p>
+                      <a:pPr algn="ctr"/>
+                      <a:r>
+                        <a:rPr sz="1050" b="1">
+                          <a:solidFill>
+                            <a:srgbClr val="FFFFFF"/>
+                          </a:solidFill>
+                        </a:rPr>
+                        <a:t>최종/최적값</a:t>
+                      </a:r>
+                    </a:p>
+                  </a:txBody>
+                  <a:tcPr anchor="ctr">
+                    <a:solidFill>
+                      <a:srgbClr val="1E2761"/>
+                    </a:solidFill>
+                  </a:tcPr>
+                </a:tc>
+                <a:tc>
+                  <a:txBody>
+                    <a:bodyPr/>
+                    <a:lstStyle/>
+                    <a:p>
+                      <a:pPr algn="ctr"/>
+                      <a:r>
+                        <a:rPr sz="1050" b="1">
+                          <a:solidFill>
+                            <a:srgbClr val="FFFFFF"/>
+                          </a:solidFill>
+                        </a:rPr>
+                        <a:t>효과</a:t>
+                      </a:r>
+                    </a:p>
+                  </a:txBody>
+                  <a:tcPr anchor="ctr">
+                    <a:solidFill>
+                      <a:srgbClr val="1E2761"/>
+                    </a:solidFill>
+                  </a:tcPr>
+                </a:tc>
+              </a:tr>
+              <a:tr h="440000">
+                <a:tc>
+                  <a:txBody>
+                    <a:bodyPr/>
+                    <a:lstStyle/>
+                    <a:p>
+                      <a:pPr algn="ctr"/>
+                      <a:r>
+                        <a:rPr sz="1050" b="0">
+                          <a:solidFill>
+                            <a:srgbClr val="1A1A1A"/>
+                          </a:solidFill>
+                        </a:rPr>
+                        <a:t>SHOT cls_loss_weight</a:t>
+                      </a:r>
+                    </a:p>
+                  </a:txBody>
+                  <a:tcPr anchor="ctr">
+                    <a:solidFill>
+                      <a:srgbClr val="FFFFFF"/>
+                    </a:solidFill>
+                  </a:tcPr>
+                </a:tc>
+                <a:tc>
+                  <a:txBody>
+                    <a:bodyPr/>
+                    <a:lstStyle/>
+                    <a:p>
+                      <a:pPr algn="ctr"/>
+                      <a:r>
+                        <a:rPr sz="1050" b="0">
+                          <a:solidFill>
+                            <a:srgbClr val="1A1A1A"/>
+                          </a:solidFill>
+                        </a:rPr>
+                        <a:t>0.1 ~ 4.0</a:t>
+                      </a:r>
+                    </a:p>
+                  </a:txBody>
+                  <a:tcPr anchor="ctr">
+                    <a:solidFill>
+                      <a:srgbClr val="FFFFFF"/>
+                    </a:solidFill>
+                  </a:tcPr>
+                </a:tc>
+                <a:tc>
+                  <a:txBody>
+                    <a:bodyPr/>
+                    <a:lstStyle/>
+                    <a:p>
+                      <a:pPr algn="ctr"/>
+                      <a:r>
+                        <a:rPr sz="1050" b="0">
+                          <a:solidFill>
+                            <a:srgbClr val="1A1A1A"/>
+                          </a:solidFill>
+                        </a:rPr>
+                        <a:t>0.3(기본)</a:t>
+                      </a:r>
+                    </a:p>
+                  </a:txBody>
+                  <a:tcPr anchor="ctr">
+                    <a:solidFill>
+                      <a:srgbClr val="FFFFFF"/>
+                    </a:solidFill>
+                  </a:tcPr>
+                </a:tc>
+                <a:tc>
+                  <a:txBody>
+                    <a:bodyPr/>
+                    <a:lstStyle/>
+                    <a:p>
+                      <a:pPr algn="ctr"/>
+                      <a:r>
+                        <a:rPr sz="1050" b="0">
+                          <a:solidFill>
+                            <a:srgbClr val="1A1A1A"/>
+                          </a:solidFill>
+                        </a:rPr>
+                        <a:t>pseudo-label CE 비중</a:t>
+                      </a:r>
+                    </a:p>
+                  </a:txBody>
+                  <a:tcPr anchor="ctr">
+                    <a:solidFill>
+                      <a:srgbClr val="FFFFFF"/>
+                    </a:solidFill>
+                  </a:tcPr>
+                </a:tc>
+              </a:tr>
+              <a:tr h="440000">
+                <a:tc>
+                  <a:txBody>
+                    <a:bodyPr/>
+                    <a:lstStyle/>
+                    <a:p>
+                      <a:pPr algn="ctr"/>
+                      <a:r>
+                        <a:rPr sz="1050" b="0">
+                          <a:solidFill>
+                            <a:srgbClr val="1A1A1A"/>
+                          </a:solidFill>
+                        </a:rPr>
+                        <a:t>AaD disperse_weight</a:t>
+                      </a:r>
+                    </a:p>
+                  </a:txBody>
+                  <a:tcPr anchor="ctr">
+                    <a:solidFill>
+                      <a:srgbClr val="EEF3FC"/>
+                    </a:solidFill>
+                  </a:tcPr>
+                </a:tc>
+                <a:tc>
+                  <a:txBody>
+                    <a:bodyPr/>
+                    <a:lstStyle/>
+                    <a:p>
+                      <a:pPr algn="ctr"/>
+                      <a:r>
+                        <a:rPr sz="1050" b="0">
+                          <a:solidFill>
+                            <a:srgbClr val="1A1A1A"/>
+                          </a:solidFill>
+                        </a:rPr>
+                        <a:t>0.5 ~ 4.0</a:t>
+                      </a:r>
+                    </a:p>
+                  </a:txBody>
+                  <a:tcPr anchor="ctr">
+                    <a:solidFill>
+                      <a:srgbClr val="EEF3FC"/>
+                    </a:solidFill>
+                  </a:tcPr>
+                </a:tc>
+                <a:tc>
+                  <a:txBody>
+                    <a:bodyPr/>
+                    <a:lstStyle/>
+                    <a:p>
+                      <a:pPr algn="ctr"/>
+                      <a:r>
+                        <a:rPr sz="1050" b="1">
+                          <a:solidFill>
+                            <a:srgbClr val="1A6B3A"/>
+                          </a:solidFill>
+                        </a:rPr>
+                        <a:t>1.0 (3-seed 최적)</a:t>
+                      </a:r>
+                    </a:p>
+                  </a:txBody>
+                  <a:tcPr anchor="ctr">
+                    <a:solidFill>
+                      <a:srgbClr val="EEF3FC"/>
+                    </a:solidFill>
+                  </a:tcPr>
+                </a:tc>
+                <a:tc>
+                  <a:txBody>
+                    <a:bodyPr/>
+                    <a:lstStyle/>
+                    <a:p>
+                      <a:pPr algn="ctr"/>
+                      <a:r>
+                        <a:rPr sz="1050" b="0">
+                          <a:solidFill>
+                            <a:srgbClr val="1A1A1A"/>
+                          </a:solidFill>
+                        </a:rPr>
+                        <a:t>비-이웃과 밀어내는 강도</a:t>
+                      </a:r>
+                    </a:p>
+                  </a:txBody>
+                  <a:tcPr anchor="ctr">
+                    <a:solidFill>
+                      <a:srgbClr val="EEF3FC"/>
+                    </a:solidFill>
+                  </a:tcPr>
+                </a:tc>
+              </a:tr>
+              <a:tr h="440000">
+                <a:tc>
+                  <a:txBody>
+                    <a:bodyPr/>
+                    <a:lstStyle/>
+                    <a:p>
+                      <a:pPr algn="ctr"/>
+                      <a:r>
+                        <a:rPr sz="1050" b="0">
+                          <a:solidFill>
+                            <a:srgbClr val="1A1A1A"/>
+                          </a:solidFill>
+                        </a:rPr>
+                        <a:t>AaD k (이웃 수)</a:t>
+                      </a:r>
+                    </a:p>
+                  </a:txBody>
+                  <a:tcPr anchor="ctr">
+                    <a:solidFill>
+                      <a:srgbClr val="FFFFFF"/>
+                    </a:solidFill>
+                  </a:tcPr>
+                </a:tc>
+                <a:tc>
+                  <a:txBody>
+                    <a:bodyPr/>
+                    <a:lstStyle/>
+                    <a:p>
+                      <a:pPr algn="ctr"/>
+                      <a:r>
+                        <a:rPr sz="1050" b="0">
+                          <a:solidFill>
+                            <a:srgbClr val="1A1A1A"/>
+                          </a:solidFill>
+                        </a:rPr>
+                        <a:t>2, 4, 8</a:t>
+                      </a:r>
+                    </a:p>
+                  </a:txBody>
+                  <a:tcPr anchor="ctr">
+                    <a:solidFill>
+                      <a:srgbClr val="FFFFFF"/>
+                    </a:solidFill>
+                  </a:tcPr>
+                </a:tc>
+                <a:tc>
+                  <a:txBody>
+                    <a:bodyPr/>
+                    <a:lstStyle/>
+                    <a:p>
+                      <a:pPr algn="ctr"/>
+                      <a:r>
+                        <a:rPr sz="1050" b="0">
+                          <a:solidFill>
+                            <a:srgbClr val="1A1A1A"/>
+                          </a:solidFill>
+                        </a:rPr>
+                        <a:t>4(기본, k=2도 유사)</a:t>
+                      </a:r>
+                    </a:p>
+                  </a:txBody>
+                  <a:tcPr anchor="ctr">
+                    <a:solidFill>
+                      <a:srgbClr val="FFFFFF"/>
+                    </a:solidFill>
+                  </a:tcPr>
+                </a:tc>
+                <a:tc>
+                  <a:txBody>
+                    <a:bodyPr/>
+                    <a:lstStyle/>
+                    <a:p>
+                      <a:pPr algn="ctr"/>
+                      <a:r>
+                        <a:rPr sz="1050" b="0">
+                          <a:solidFill>
+                            <a:srgbClr val="1A1A1A"/>
+                          </a:solidFill>
+                        </a:rPr>
+                        <a:t>attract 대상 범위</a:t>
+                      </a:r>
+                    </a:p>
+                  </a:txBody>
+                  <a:tcPr anchor="ctr">
+                    <a:solidFill>
+                      <a:srgbClr val="FFFFFF"/>
+                    </a:solidFill>
+                  </a:tcPr>
+                </a:tc>
+              </a:tr>
+              <a:tr h="440000">
+                <a:tc>
+                  <a:txBody>
+                    <a:bodyPr/>
+                    <a:lstStyle/>
+                    <a:p>
+                      <a:pPr algn="ctr"/>
+                      <a:r>
+                        <a:rPr sz="1050" b="0">
+                          <a:solidFill>
+                            <a:srgbClr val="1A1A1A"/>
+                          </a:solidFill>
+                        </a:rPr>
+                        <a:t>APS gamma(신뢰도 임계값)</a:t>
+                      </a:r>
+                    </a:p>
+                  </a:txBody>
+                  <a:tcPr anchor="ctr">
+                    <a:solidFill>
+                      <a:srgbClr val="EEF3FC"/>
+                    </a:solidFill>
+                  </a:tcPr>
+                </a:tc>
+                <a:tc>
+                  <a:txBody>
+                    <a:bodyPr/>
+                    <a:lstStyle/>
+                    <a:p>
+                      <a:pPr algn="ctr"/>
+                      <a:r>
+                        <a:rPr sz="1050" b="0">
+                          <a:solidFill>
+                            <a:srgbClr val="1A1A1A"/>
+                          </a:solidFill>
+                        </a:rPr>
+                        <a:t>0.6 ~ 1.0</a:t>
+                      </a:r>
+                    </a:p>
+                  </a:txBody>
+                  <a:tcPr anchor="ctr">
+                    <a:solidFill>
+                      <a:srgbClr val="EEF3FC"/>
+                    </a:solidFill>
+                  </a:tcPr>
+                </a:tc>
+                <a:tc>
+                  <a:txBody>
+                    <a:bodyPr/>
+                    <a:lstStyle/>
+                    <a:p>
+                      <a:pPr algn="ctr"/>
+                      <a:r>
+                        <a:rPr sz="1050" b="0">
+                          <a:solidFill>
+                            <a:srgbClr val="1A1A1A"/>
+                          </a:solidFill>
+                        </a:rPr>
+                        <a:t>1.0(필터링 없음)</a:t>
+                      </a:r>
+                    </a:p>
+                  </a:txBody>
+                  <a:tcPr anchor="ctr">
+                    <a:solidFill>
+                      <a:srgbClr val="EEF3FC"/>
+                    </a:solidFill>
+                  </a:tcPr>
+                </a:tc>
+                <a:tc>
+                  <a:txBody>
+                    <a:bodyPr/>
+                    <a:lstStyle/>
+                    <a:p>
+                      <a:pPr algn="ctr"/>
+                      <a:r>
+                        <a:rPr sz="1050" b="0">
+                          <a:solidFill>
+                            <a:srgbClr val="1A1A1A"/>
+                          </a:solidFill>
+                        </a:rPr>
+                        <a:t>기각: 3-seed에서 noise</a:t>
+                      </a:r>
+                    </a:p>
+                  </a:txBody>
+                  <a:tcPr anchor="ctr">
+                    <a:solidFill>
+                      <a:srgbClr val="EEF3FC"/>
+                    </a:solidFill>
+                  </a:tcPr>
+                </a:tc>
+              </a:tr>
+              <a:tr h="440000">
+                <a:tc>
+                  <a:txBody>
+                    <a:bodyPr/>
+                    <a:lstStyle/>
+                    <a:p>
+                      <a:pPr algn="ctr"/>
+                      <a:r>
+                        <a:rPr sz="1050" b="0">
+                          <a:solidFill>
+                            <a:srgbClr val="1A1A1A"/>
+                          </a:solidFill>
+                        </a:rPr>
+                        <a:t>CoWA model_weight_alpha</a:t>
+                      </a:r>
+                    </a:p>
+                  </a:txBody>
+                  <a:tcPr anchor="ctr">
+                    <a:solidFill>
+                      <a:srgbClr val="FFFFFF"/>
+                    </a:solidFill>
+                  </a:tcPr>
+                </a:tc>
+                <a:tc>
+                  <a:txBody>
+                    <a:bodyPr/>
+                    <a:lstStyle/>
+                    <a:p>
+                      <a:pPr algn="ctr"/>
+                      <a:r>
+                        <a:rPr sz="1050" b="0">
+                          <a:solidFill>
+                            <a:srgbClr val="1A1A1A"/>
+                          </a:solidFill>
+                        </a:rPr>
+                        <a:t>0.2 ~ 0.8</a:t>
+                      </a:r>
+                    </a:p>
+                  </a:txBody>
+                  <a:tcPr anchor="ctr">
+                    <a:solidFill>
+                      <a:srgbClr val="FFFFFF"/>
+                    </a:solidFill>
+                  </a:tcPr>
+                </a:tc>
+                <a:tc>
+                  <a:txBody>
+                    <a:bodyPr/>
+                    <a:lstStyle/>
+                    <a:p>
+                      <a:pPr algn="ctr"/>
+                      <a:r>
+                        <a:rPr sz="1050" b="0">
+                          <a:solidFill>
+                            <a:srgbClr val="1A1A1A"/>
+                          </a:solidFill>
+                        </a:rPr>
+                        <a:t>0.5(차이 미미)</a:t>
+                      </a:r>
+                    </a:p>
+                  </a:txBody>
+                  <a:tcPr anchor="ctr">
+                    <a:solidFill>
+                      <a:srgbClr val="FFFFFF"/>
+                    </a:solidFill>
+                  </a:tcPr>
+                </a:tc>
+                <a:tc>
+                  <a:txBody>
+                    <a:bodyPr/>
+                    <a:lstStyle/>
+                    <a:p>
+                      <a:pPr algn="ctr"/>
+                      <a:r>
+                        <a:rPr sz="1050" b="0">
+                          <a:solidFill>
+                            <a:srgbClr val="1A1A1A"/>
+                          </a:solidFill>
+                        </a:rPr>
+                        <a:t>model vs data score 비중</a:t>
+                      </a:r>
+                    </a:p>
+                  </a:txBody>
+                  <a:tcPr anchor="ctr">
+                    <a:solidFill>
+                      <a:srgbClr val="FFFFFF"/>
+                    </a:solidFill>
+                  </a:tcPr>
+                </a:tc>
+              </a:tr>
+              <a:tr h="440000">
+                <a:tc>
+                  <a:txBody>
+                    <a:bodyPr/>
+                    <a:lstStyle/>
+                    <a:p>
+                      <a:pPr algn="ctr"/>
+                      <a:r>
+                        <a:rPr sz="1050" b="0">
+                          <a:solidFill>
+                            <a:srgbClr val="1A1A1A"/>
+                          </a:solidFill>
+                        </a:rPr>
+                        <a:t>balanced_cap ratio</a:t>
+                      </a:r>
+                    </a:p>
+                  </a:txBody>
+                  <a:tcPr anchor="ctr">
+                    <a:solidFill>
+                      <a:srgbClr val="EEF3FC"/>
+                    </a:solidFill>
+                  </a:tcPr>
+                </a:tc>
+                <a:tc>
+                  <a:txBody>
+                    <a:bodyPr/>
+                    <a:lstStyle/>
+                    <a:p>
+                      <a:pPr algn="ctr"/>
+                      <a:r>
+                        <a:rPr sz="1050" b="0">
+                          <a:solidFill>
+                            <a:srgbClr val="1A1A1A"/>
+                          </a:solidFill>
+                        </a:rPr>
+                        <a:t>0.8 ~ 1.5</a:t>
+                      </a:r>
+                    </a:p>
+                  </a:txBody>
+                  <a:tcPr anchor="ctr">
+                    <a:solidFill>
+                      <a:srgbClr val="EEF3FC"/>
+                    </a:solidFill>
+                  </a:tcPr>
+                </a:tc>
+                <a:tc>
+                  <a:txBody>
+                    <a:bodyPr/>
+                    <a:lstStyle/>
+                    <a:p>
+                      <a:pPr algn="ctr"/>
+                      <a:r>
+                        <a:rPr sz="1050" b="0">
+                          <a:solidFill>
+                            <a:srgbClr val="1A1A1A"/>
+                          </a:solidFill>
+                        </a:rPr>
+                        <a:t>1.0</a:t>
+                      </a:r>
+                    </a:p>
+                  </a:txBody>
+                  <a:tcPr anchor="ctr">
+                    <a:solidFill>
+                      <a:srgbClr val="EEF3FC"/>
+                    </a:solidFill>
+                  </a:tcPr>
+                </a:tc>
+                <a:tc>
+                  <a:txBody>
+                    <a:bodyPr/>
+                    <a:lstStyle/>
+                    <a:p>
+                      <a:pPr algn="ctr"/>
+                      <a:r>
+                        <a:rPr sz="1050" b="0">
+                          <a:solidFill>
+                            <a:srgbClr val="1A1A1A"/>
+                          </a:solidFill>
+                        </a:rPr>
+                        <a:t>클래스별 할당 상한</a:t>
+                      </a:r>
+                    </a:p>
+                  </a:txBody>
+                  <a:tcPr anchor="ctr">
+                    <a:solidFill>
+                      <a:srgbClr val="EEF3FC"/>
+                    </a:solidFill>
+                  </a:tcPr>
+                </a:tc>
+              </a:tr>
+            </a:tbl>
+          </a:graphicData>
+        </a:graphic>
+      </p:graphicFrame>
+      <p:sp>
+        <p:nvSpPr>
+          <p:cNvPr id="6" name="TextBox 4"/>
+          <p:cNvSpPr txBox="1"/>
+          <p:nvPr/>
+        </p:nvSpPr>
+        <p:spPr>
+          <a:xfrm>
+            <a:off x="548640" y="5050000"/>
+            <a:ext cx="11091672" cy="1300000"/>
+          </a:xfrm>
+          <a:prstGeom prst="rect">
+            <a:avLst/>
+          </a:prstGeom>
+          <a:noFill/>
+        </p:spPr>
+        <p:txBody>
+          <a:bodyPr wrap="square" anchor="t" lIns="0" rIns="0" tIns="0" bIns="0">
+            <a:spAutoFit/>
+          </a:bodyPr>
+          <a:lstStyle/>
+          <a:p>
+            <a:pPr algn="l"/>
+            <a:r>
+              <a:rPr sz="1150" b="0" i="1">
+                <a:solidFill>
+                  <a:srgbClr val="5B5E6B"/>
+                </a:solidFill>
+                <a:latin typeface="Calibri"/>
+              </a:rPr>
+              <a:t>SHOT의 cls_loss_weight와 AaD의 disperse_weight가 가장 민감했다 — 둘 다 올릴수록 seed42 정확도는 계속 올라가는 패턴이라 극단값을 고르고 싶은 유혹이 컸다. 하지만 3-seed 검증에서 이 “계속 오르는” 패턴 자체가 seed42 과적합 신호였음을 확인했다 — 그래서 최종값은 seed42 최고점이 아니라 3-seed 평균이 가장 안정적인 지점(disperse_weight=1.0)으로 정했다.</a:t>
+            </a:r>
+          </a:p>
+        </p:txBody>
+      </p:sp>
+      <p:sp>
+        <p:nvSpPr>
+          <p:cNvPr id="9" name="TextBox 5"/>
+          <p:cNvSpPr txBox="1"/>
+          <p:nvPr/>
+        </p:nvSpPr>
+        <p:spPr>
+          <a:xfrm>
+            <a:off x="11430000" y="6446520"/>
+            <a:ext cx="548640" cy="274320"/>
+          </a:xfrm>
+          <a:prstGeom prst="rect">
+            <a:avLst/>
+          </a:prstGeom>
+          <a:noFill/>
+        </p:spPr>
+        <p:txBody>
+          <a:bodyPr wrap="square" anchor="t" lIns="0" rIns="0" tIns="0" bIns="0">
+            <a:spAutoFit/>
+          </a:bodyPr>
+          <a:lstStyle/>
+          <a:p>
+            <a:pPr algn="r"/>
+            <a:r>
+              <a:rPr sz="1000" b="0" i="0">
+                <a:solidFill>
+                  <a:srgbClr val="5B5E6B"/>
+                </a:solidFill>
+                <a:latin typeface="Calibri"/>
+              </a:rPr>
+              <a:t>29</a:t>
             </a:r>
           </a:p>
         </p:txBody>

--- a/docs/CNN_토마토_병해분류_V2_진행보고.pptx
+++ b/docs/CNN_토마토_병해분류_V2_진행보고.pptx
@@ -19829,7 +19829,7 @@
                 </a:solidFill>
                 <a:latin typeface="Calibri"/>
               </a:rPr>
-              <a:t>6단계 완료 — tiny_cnn_c, 96px, bicubic을 최종 모델로 선정(경량화·내부·외부·학습시간 종합 고려). 8단계 1차 결과: AdaBN/TENT는 partial label-space mismatch로 오히려 성능이 악화됨을 확인 — 다음은 SHOT(partial-set 고려) 적용 검토. app/streamlit_app.py의 DEFAULT_MODEL 교체로 7단계 배포 가능.</a:t>
+              <a:t>6단계 완료 — tiny_cnn_c, 96px, bicubic을 최종 모델로 선정(경량화·내부·외부·학습시간 종합 고려). 8단계 완료 — AdaBN/TENT의 negative transfer를 class-restriction 마스킹으로 해결하고, SHOT(epoch=2)+AaD 하이브리드를 최종 채택(3-seed 검증, Bangladesh +3.1%p). 오라클 실험으로 "전부 60%" 목표가 PlantDoc(표현력 한계)·Bangladesh(오라클 자체가 58.6%)에서는 구조적으로 어렵다는 것도 확인. app/streamlit_app.py의 DEFAULT_MODEL 교체로 7단계 배포 가능(DA는 연구·진단용이라 배포 모델엔 미반영).</a:t>
             </a:r>
           </a:p>
         </p:txBody>
@@ -19903,7 +19903,7 @@
                 </a:solidFill>
                 <a:latin typeface="Calibri"/>
               </a:rPr>
-              <a:t>최종 모델 선정(해상도×보간법 13개 조합 비교) · seed 42/123/2026 반복실험(재현성) · 체크포인트 재개 기능 · Domain Adaptation(AdaBN/TENT) 1차 실험과 negative transfer 발견</a:t>
+              <a:t>최종 모델 선정(해상도×보간법 13개 조합 비교) · seed 42/123/2026 반복실험(재현성) · Domain Adaptation 전 과정(negative transfer → 마스킹 → SHOT → EATA/UPA/R-GV/AaD/CoWA 비교 → SHOT+AaD 최종 채택, 3-seed 검증) · 오라클 실험 기반 60% 목표 현실성 진단</a:t>
             </a:r>
           </a:p>
         </p:txBody>
@@ -20495,7 +20495,7 @@
                 </a:solidFill>
                 <a:latin typeface="Calibri"/>
               </a:rPr>
-              <a:t>가설은 절반만 맞았다 — Bangladesh는 과적합이 완화됐지만(epoch 5까지 계속 개선) PlantDoc은 오히려 더 빨리 과적합됐다(epoch 1에서 이미 정점). 내부 정확도·Taiwan·Bangladesh는 전반적으로 더 낮아져, 모델 축소가 일관된 해결책은 아니었다 — 과적합 억제는 epoch 수를 고정하는 기존 방식이 더 안정적이다.</a:t>
+              <a:t>가설은 데이터셋마다 다르게 맞았다 — Bangladesh는 과적합이 완화됐고(epoch 5까지 계속 개선), PlantDoc은 정확도 자체가 올랐다(19.46%→22.57%, F1 0.18→0.20) — 다만 그 정점이 epoch 1로 더 일찍 온다(작은 모델이 pseudo-label 노이즈에 더 빨리 수렴하는 것으로 보인다). 반면 내부 정확도·Taiwan은 전반적으로 더 낮아져, "모델을 줄이면 전부 좋아진다"는 일관된 결론은 아니다 — 데이터셋마다 적정 모델 크기가 다를 수 있다는 뜻으로 해석한다.</a:t>
             </a:r>
           </a:p>
         </p:txBody>
@@ -21161,7 +21161,7 @@
                 </a:solidFill>
                 <a:latin typeface="Calibri"/>
               </a:rPr>
-              <a:t>오라클 상한 실험(실제 정답으로 학습했을 때 도달 가능한 최댓값)을 “60% 목표” 기준으로 다시 읽으면 데이터셋마다 답이 다르다 — 이건 더 좋은 적응 기법을 못 찾아서가 아니라, 데이터셋 구조 자체가 다른 것이다.</a:t>
+              <a:t>오라클 실험(target label로 직접 fine-tuning해 실제로 측정한 결과, stratified 70/30 split·epoch=2 조건)을 “60% 목표” 기준으로 다시 읽으면 데이터셋마다 답이 다르다 — 이건 더 좋은 적응 기법을 못 찾아서가 아니라, 데이터셋 구조 자체가 다른 것이다.</a:t>
             </a:r>
           </a:p>
         </p:txBody>
@@ -21225,7 +21225,7 @@
                             <a:srgbClr val="FFFFFF"/>
                           </a:solidFill>
                         </a:rPr>
-                        <a:t>오라클 상한(이론적 최댓값)</a:t>
+                        <a:t>오라클 실측값(정답 fine-tuning)</a:t>
                       </a:r>
                     </a:p>
                   </a:txBody>
@@ -21337,7 +21337,7 @@
                             <a:srgbClr val="1A6B3A"/>
                           </a:solidFill>
                         </a:rPr>
-                        <a:t>가능 (이론상)</a:t>
+                        <a:t>가능 (실측 기준)</a:t>
                       </a:r>
                     </a:p>
                   </a:txBody>
@@ -21584,7 +21584,7 @@
                 </a:solidFill>
                 <a:latin typeface="Calibri"/>
               </a:rPr>
-              <a:t>Taiwan만 이론적으로 60%를 넘을 여지가 있다 — 하이퍼파라미터를 끝까지 밀면 seed42 한 번은 63%까지 봤지만, 3-seed로 검증하면 46.39% ±12.46으로 재현되지 않았다(6/8 슬라이드). Bangladesh는 오라클 상한(58.61%) 자체가 60%에 못 미쳐 “완벽한 적응 기법”을 찾아도 구조적으로 60%를 보장할 수 없고, PlantDoc은 정답을 줘도 23%라 적응 문제가 아니라 feature 표현력의 문제다 — source 학습 데이터·증강을 바꾸지 않는 한(이 프로젝트 범위 밖) 더 올릴 수 없다는 게 최종 진단이다.</a:t>
+              <a:t>Taiwan만 오라클 실측값이 60%를 넘는다(70.53%) — 하이퍼파라미터를 끝까지 밀면 seed42 한 번은 63%까지 봤지만, 3-seed로 검증하면 46.39% ±12.46으로 재현되지 않았다(6/8 슬라이드). Bangladesh는 오라클 실측값(58.61%) 자체가 60%에 못 미쳐 “완벽한 적응 기법”을 찾아도 구조적으로 60%를 보장할 수 없고, PlantDoc은 정답을 줘도 23%라 적응 문제가 아니라 feature 표현력의 문제다 — source 학습 데이터·증강을 바꾸지 않는 한(이 프로젝트 범위 밖) 더 올릴 수 없다는 게 최종 진단이다.</a:t>
             </a:r>
           </a:p>
         </p:txBody>
@@ -22263,7 +22263,7 @@
                 </a:solidFill>
                 <a:latin typeface="Calibri"/>
               </a:rPr>
-              <a:t>Bangladesh만 뚜렷하게 개선됐다(+3.1%p, 표준편차도 5.62→3.85로 감소 — 우연이 아니라 더 안정적인 적응). Taiwan·PlantDoc은 SHOT 단독과 통계적으로 동일해 해치지 않는다. 이어지는 슬라이드는 이 결론에 대한 진단·메커니즘·대안 비교다.</a:t>
+              <a:t>Bangladesh만 뚜렷하게 개선됐다(+3.1%p, 표준편차도 5.62→3.85로 감소 — 다만 별도의 통계적 유의성 검정은 하지 않았다). Taiwan·PlantDoc은 SHOT 단독과 평균이 거의 같아 해치지는 않는다. 이어지는 슬라이드는 이 결론에 대한 진단·메커니즘·대안 비교다.</a:t>
             </a:r>
           </a:p>
         </p:txBody>

--- a/docs/CNN_토마토_병해분류_V2_진행보고.pptx
+++ b/docs/CNN_토마토_병해분류_V2_진행보고.pptx
@@ -33,6 +33,7 @@
     <p:sldId id="290" r:id="rId40"/>
     <p:sldId id="294" r:id="rId44"/>
     <p:sldId id="295" r:id="rId45"/>
+    <p:sldId id="298" r:id="rId48"/>
     <p:sldId id="296" r:id="rId46"/>
     <p:sldId id="297" r:id="rId47"/>
     <p:sldId id="286" r:id="rId36"/>
@@ -18516,7 +18517,7 @@
                 </a:solidFill>
                 <a:latin typeface="Calibri"/>
               </a:rPr>
-              <a:t>31</a:t>
+              <a:t>32</a:t>
             </a:r>
           </a:p>
         </p:txBody>
@@ -19938,7 +19939,7 @@
                 </a:solidFill>
                 <a:latin typeface="Calibri"/>
               </a:rPr>
-              <a:t>32</a:t>
+              <a:t>33</a:t>
             </a:r>
           </a:p>
         </p:txBody>
@@ -19999,7 +20000,7 @@
                 </a:solidFill>
                 <a:latin typeface="Calibri"/>
               </a:rPr>
-              <a:t>RESULT 7 · DOMAIN ADAPTATION (8/8)</a:t>
+              <a:t>RESULT 7 · DOMAIN ADAPTATION (9/9)</a:t>
             </a:r>
           </a:p>
         </p:txBody>
@@ -20530,7 +20531,7 @@
                 </a:solidFill>
                 <a:latin typeface="Calibri"/>
               </a:rPr>
-              <a:t>30</a:t>
+              <a:t>31</a:t>
             </a:r>
           </a:p>
         </p:txBody>
@@ -20591,7 +20592,7 @@
                 </a:solidFill>
                 <a:latin typeface="Calibri"/>
               </a:rPr>
-              <a:t>RESULT 7 · DOMAIN ADAPTATION (3/8)</a:t>
+              <a:t>RESULT 7 · DOMAIN ADAPTATION (3/9)</a:t>
             </a:r>
           </a:p>
         </p:txBody>
@@ -21091,7 +21092,7 @@
                 </a:solidFill>
                 <a:latin typeface="Calibri"/>
               </a:rPr>
-              <a:t>RESULT 7 · DOMAIN ADAPTATION (2/8)</a:t>
+              <a:t>RESULT 7 · DOMAIN ADAPTATION (2/9)</a:t>
             </a:r>
           </a:p>
         </p:txBody>
@@ -21584,7 +21585,7 @@
                 </a:solidFill>
                 <a:latin typeface="Calibri"/>
               </a:rPr>
-              <a:t>Taiwan만 오라클 실측값이 60%를 넘는다(70.53%) — 하이퍼파라미터를 끝까지 밀면 seed42 한 번은 63%까지 봤지만, 3-seed로 검증하면 46.39% ±12.46으로 재현되지 않았다(6/8 슬라이드). Bangladesh는 오라클 실측값(58.61%) 자체가 60%에 못 미쳐 “완벽한 적응 기법”을 찾아도 구조적으로 60%를 보장할 수 없고, PlantDoc은 정답을 줘도 23%라 적응 문제가 아니라 feature 표현력의 문제다 — source 학습 데이터·증강을 바꾸지 않는 한(이 프로젝트 범위 밖) 더 올릴 수 없다는 게 최종 진단이다.</a:t>
+              <a:t>Taiwan만 오라클 실측값이 60%를 넘는다(70.53%) — 하이퍼파라미터를 끝까지 밀면 seed42 한 번은 63%까지 봤지만, 3-seed로 검증하면 46.39% ±12.46으로 재현되지 않았다(7/9 슬라이드). Bangladesh는 오라클 실측값(58.61%) 자체가 60%에 못 미쳐 “완벽한 적응 기법”을 찾아도 구조적으로 60%를 보장할 수 없고, PlantDoc은 정답을 줘도 23%라 적응 문제가 아니라 feature 표현력의 문제다 — source 학습 데이터·증강을 바꾸지 않는 한(이 프로젝트 범위 밖) 더 올릴 수 없다는 게 최종 진단이다.</a:t>
             </a:r>
           </a:p>
         </p:txBody>
@@ -21680,7 +21681,7 @@
                 </a:solidFill>
                 <a:latin typeface="Calibri"/>
               </a:rPr>
-              <a:t>RESULT 7 · DOMAIN ADAPTATION (1/8)</a:t>
+              <a:t>RESULT 7 · DOMAIN ADAPTATION (1/9)</a:t>
             </a:r>
           </a:p>
         </p:txBody>
@@ -22359,7 +22360,7 @@
                 </a:solidFill>
                 <a:latin typeface="Calibri"/>
               </a:rPr>
-              <a:t>RESULT 7 · DOMAIN ADAPTATION (4/8)</a:t>
+              <a:t>RESULT 7 · DOMAIN ADAPTATION (4/9)</a:t>
             </a:r>
           </a:p>
         </p:txBody>
@@ -23971,7 +23972,7 @@
                 </a:solidFill>
                 <a:latin typeface="Calibri"/>
               </a:rPr>
-              <a:t>RESULT 7 · DOMAIN ADAPTATION (5/8)</a:t>
+              <a:t>RESULT 7 · DOMAIN ADAPTATION (5/9)</a:t>
             </a:r>
           </a:p>
         </p:txBody>
@@ -24920,7 +24921,7 @@
                 </a:solidFill>
                 <a:latin typeface="Calibri"/>
               </a:rPr>
-              <a:t>RESULT 7 · DOMAIN ADAPTATION (6/8)</a:t>
+              <a:t>RESULT 7 · DOMAIN ADAPTATION (7/9)</a:t>
             </a:r>
           </a:p>
         </p:txBody>
@@ -25596,7 +25597,7 @@
                 </a:solidFill>
                 <a:latin typeface="Calibri"/>
               </a:rPr>
-              <a:t>Taiwan은 epoch·weight를 올릴수록 계속 좋아지다 epoch=10에서 과적합으로 꺾인다. Bangladesh는 epoch=4·weight=2.0(class_balance+balanced_cap 병행)에서 정점(34.42%) 후 하락한다. 하지만 두 정점(63.06%, 34.42%) 모두 seed42 단일 실행이고, 3-seed로 검증하면 재현되지 않았다(1/8 슬라이드 데이터와 같은 결론) — 그래서 최종 채택은 정점이 아니라 epoch=2(공통 고정값)다.</a:t>
+              <a:t>Taiwan은 epoch·weight를 올릴수록 계속 좋아지다 epoch=10에서 과적합으로 꺾인다. Bangladesh는 epoch=4·weight=2.0(class_balance+balanced_cap 병행)에서 정점(34.42%) 후 하락한다. 하지만 두 정점(63.06%, 34.42%) 모두 seed42 단일 실행이고, 3-seed로 검증하면 재현되지 않았다(1/9 슬라이드 데이터와 같은 결론) — 그래서 최종 채택은 정점이 아니라 epoch=2(공통 고정값)다.</a:t>
             </a:r>
           </a:p>
         </p:txBody>
@@ -25631,7 +25632,7 @@
                 </a:solidFill>
                 <a:latin typeface="Calibri"/>
               </a:rPr>
-              <a:t>28</a:t>
+              <a:t>29</a:t>
             </a:r>
           </a:p>
         </p:txBody>
@@ -25692,7 +25693,7 @@
                 </a:solidFill>
                 <a:latin typeface="Calibri"/>
               </a:rPr>
-              <a:t>RESULT 7 · DOMAIN ADAPTATION (7/8)</a:t>
+              <a:t>RESULT 7 · DOMAIN ADAPTATION (8/9)</a:t>
             </a:r>
           </a:p>
         </p:txBody>
@@ -26490,7 +26491,909 @@
                 </a:solidFill>
                 <a:latin typeface="Calibri"/>
               </a:rPr>
-              <a:t>29</a:t>
+              <a:t>30</a:t>
+            </a:r>
+          </a:p>
+        </p:txBody>
+      </p:sp>
+    </p:spTree>
+  </p:cSld>
+  <p:clrMapOvr>
+    <a:masterClrMapping/>
+  </p:clrMapOvr>
+</p:sld>
+</file>
+
+<file path=ppt/slides/slide43.xml><?xml version="1.0" encoding="utf-8"?>
+<p:sld xmlns:a="http://schemas.openxmlformats.org/drawingml/2006/main" xmlns:p="http://schemas.openxmlformats.org/presentationml/2006/main" xmlns:r="http://schemas.openxmlformats.org/officeDocument/2006/relationships">
+  <p:cSld>
+    <p:bg>
+      <p:bgPr>
+        <a:solidFill>
+          <a:srgbClr val="FFFFFF"/>
+        </a:solidFill>
+        <a:effectLst/>
+      </p:bgPr>
+    </p:bg>
+    <p:spTree>
+      <p:nvGrpSpPr>
+        <p:cNvPr id="1" name=""/>
+        <p:cNvGrpSpPr/>
+        <p:nvPr/>
+      </p:nvGrpSpPr>
+      <p:grpSpPr/>
+      <p:sp>
+        <p:nvSpPr>
+          <p:cNvPr id="2" name="TextBox 1"/>
+          <p:cNvSpPr txBox="1"/>
+          <p:nvPr/>
+        </p:nvSpPr>
+        <p:spPr>
+          <a:xfrm>
+            <a:off x="548640" y="292608"/>
+            <a:ext cx="9144000" cy="292608"/>
+          </a:xfrm>
+          <a:prstGeom prst="rect">
+            <a:avLst/>
+          </a:prstGeom>
+          <a:noFill/>
+        </p:spPr>
+        <p:txBody>
+          <a:bodyPr wrap="square" anchor="t" lIns="0" rIns="0" tIns="0" bIns="0">
+            <a:spAutoFit/>
+          </a:bodyPr>
+          <a:lstStyle/>
+          <a:p>
+            <a:pPr algn="l"/>
+            <a:r>
+              <a:rPr sz="1050" b="1" i="0">
+                <a:solidFill>
+                  <a:srgbClr val="2A78D6"/>
+                </a:solidFill>
+                <a:latin typeface="Calibri"/>
+              </a:rPr>
+              <a:t>RESULT 7 · DOMAIN ADAPTATION (6/9)</a:t>
+            </a:r>
+          </a:p>
+        </p:txBody>
+      </p:sp>
+      <p:sp>
+        <p:nvSpPr>
+          <p:cNvPr id="3" name="TextBox 2"/>
+          <p:cNvSpPr txBox="1"/>
+          <p:nvPr/>
+        </p:nvSpPr>
+        <p:spPr>
+          <a:xfrm>
+            <a:off x="548640" y="566928"/>
+            <a:ext cx="10972800" cy="548640"/>
+          </a:xfrm>
+          <a:prstGeom prst="rect">
+            <a:avLst/>
+          </a:prstGeom>
+          <a:noFill/>
+        </p:spPr>
+        <p:txBody>
+          <a:bodyPr wrap="square" anchor="t" lIns="0" rIns="0" tIns="0" bIns="0">
+            <a:spAutoFit/>
+          </a:bodyPr>
+          <a:lstStyle/>
+          <a:p>
+            <a:pPr algn="l"/>
+            <a:r>
+              <a:rPr sz="2100" b="1" i="0">
+                <a:solidFill>
+                  <a:srgbClr val="1E2761"/>
+                </a:solidFill>
+                <a:latin typeface="Cambria"/>
+              </a:rPr>
+              <a:t>최종 채택 이후 추가 탐색: Prototype 개선 · TTA</a:t>
+            </a:r>
+          </a:p>
+        </p:txBody>
+      </p:sp>
+      <p:sp>
+        <p:nvSpPr>
+          <p:cNvPr id="4" name="TextBox 3"/>
+          <p:cNvSpPr txBox="1"/>
+          <p:nvPr/>
+        </p:nvSpPr>
+        <p:spPr>
+          <a:xfrm>
+            <a:off x="548640" y="1150000"/>
+            <a:ext cx="11091672" cy="1050000"/>
+          </a:xfrm>
+          <a:prstGeom prst="rect">
+            <a:avLst/>
+          </a:prstGeom>
+          <a:noFill/>
+        </p:spPr>
+        <p:txBody>
+          <a:bodyPr wrap="square" anchor="t" lIns="0" rIns="0" tIns="0" bIns="0">
+            <a:spAutoFit/>
+          </a:bodyPr>
+          <a:lstStyle/>
+          <a:p>
+            <a:pPr algn="l"/>
+            <a:r>
+              <a:rPr sz="1200" b="0" i="0">
+                <a:solidFill>
+                  <a:srgbClr val="1A1A1A"/>
+                </a:solidFill>
+                <a:latin typeface="Calibri"/>
+              </a:rPr>
+              <a:t>SHOT+AaD(weight=1.0)를 최종 채택한 뒤, 이를 더 밀어올릴 수 있는지 두 가지 다른 메커니즘을 추가로 시도했다 — 클러스터 중심(prototype)의 품질을 높이는 방법과, pseudo-label을 만들 때 입력 자체의 노이즈를 줄이는 TTA(좌우반전 평균). 전부 SHOT+AaD를 최종으로 유지하는 결론으로 끝났다.</a:t>
+            </a:r>
+          </a:p>
+        </p:txBody>
+      </p:sp>
+      <p:graphicFrame>
+        <p:nvGraphicFramePr>
+          <p:cNvPr id="7" name="Table"/>
+          <p:cNvGraphicFramePr>
+            <a:graphicFrameLocks noGrp="1"/>
+          </p:cNvGraphicFramePr>
+          <p:nvPr/>
+        </p:nvGraphicFramePr>
+        <p:xfrm>
+          <a:off x="548640" y="2300000"/>
+          <a:ext cx="11400000" cy="2200000"/>
+        </p:xfrm>
+        <a:graphic>
+          <a:graphicData uri="http://schemas.openxmlformats.org/drawingml/2006/table">
+            <a:tbl>
+              <a:tblPr firstRow="1" bandRow="1">
+                <a:tableStyleId>{5C22544A-7EE6-4342-B048-85BDC9FD1C3A}</a:tableStyleId>
+              </a:tblPr>
+              <a:tblGrid>
+                <a:gridCol w="3000000"/>
+                <a:gridCol w="1900000"/>
+                <a:gridCol w="1900000"/>
+                <a:gridCol w="1700000"/>
+                <a:gridCol w="2900000"/>
+              </a:tblGrid>
+              <a:tr h="440000">
+                <a:tc>
+                  <a:txBody>
+                    <a:bodyPr/>
+                    <a:lstStyle/>
+                    <a:p>
+                      <a:pPr algn="ctr"/>
+                      <a:r>
+                        <a:rPr sz="1050" b="1">
+                          <a:solidFill>
+                            <a:srgbClr val="FFFFFF"/>
+                          </a:solidFill>
+                        </a:rPr>
+                        <a:t>방법</a:t>
+                      </a:r>
+                    </a:p>
+                  </a:txBody>
+                  <a:tcPr anchor="ctr">
+                    <a:solidFill>
+                      <a:srgbClr val="1E2761"/>
+                    </a:solidFill>
+                  </a:tcPr>
+                </a:tc>
+                <a:tc>
+                  <a:txBody>
+                    <a:bodyPr/>
+                    <a:lstStyle/>
+                    <a:p>
+                      <a:pPr algn="ctr"/>
+                      <a:r>
+                        <a:rPr sz="1050" b="1">
+                          <a:solidFill>
+                            <a:srgbClr val="FFFFFF"/>
+                          </a:solidFill>
+                        </a:rPr>
+                        <a:t>Taiwan</a:t>
+                      </a:r>
+                    </a:p>
+                  </a:txBody>
+                  <a:tcPr anchor="ctr">
+                    <a:solidFill>
+                      <a:srgbClr val="1E2761"/>
+                    </a:solidFill>
+                  </a:tcPr>
+                </a:tc>
+                <a:tc>
+                  <a:txBody>
+                    <a:bodyPr/>
+                    <a:lstStyle/>
+                    <a:p>
+                      <a:pPr algn="ctr"/>
+                      <a:r>
+                        <a:rPr sz="1050" b="1">
+                          <a:solidFill>
+                            <a:srgbClr val="FFFFFF"/>
+                          </a:solidFill>
+                        </a:rPr>
+                        <a:t>Bangladesh</a:t>
+                      </a:r>
+                    </a:p>
+                  </a:txBody>
+                  <a:tcPr anchor="ctr">
+                    <a:solidFill>
+                      <a:srgbClr val="1E2761"/>
+                    </a:solidFill>
+                  </a:tcPr>
+                </a:tc>
+                <a:tc>
+                  <a:txBody>
+                    <a:bodyPr/>
+                    <a:lstStyle/>
+                    <a:p>
+                      <a:pPr algn="ctr"/>
+                      <a:r>
+                        <a:rPr sz="1050" b="1">
+                          <a:solidFill>
+                            <a:srgbClr val="FFFFFF"/>
+                          </a:solidFill>
+                        </a:rPr>
+                        <a:t>PlantDoc</a:t>
+                      </a:r>
+                    </a:p>
+                  </a:txBody>
+                  <a:tcPr anchor="ctr">
+                    <a:solidFill>
+                      <a:srgbClr val="1E2761"/>
+                    </a:solidFill>
+                  </a:tcPr>
+                </a:tc>
+                <a:tc>
+                  <a:txBody>
+                    <a:bodyPr/>
+                    <a:lstStyle/>
+                    <a:p>
+                      <a:pPr algn="ctr"/>
+                      <a:r>
+                        <a:rPr sz="1050" b="1">
+                          <a:solidFill>
+                            <a:srgbClr val="FFFFFF"/>
+                          </a:solidFill>
+                        </a:rPr>
+                        <a:t>검증 결과</a:t>
+                      </a:r>
+                    </a:p>
+                  </a:txBody>
+                  <a:tcPr anchor="ctr">
+                    <a:solidFill>
+                      <a:srgbClr val="1E2761"/>
+                    </a:solidFill>
+                  </a:tcPr>
+                </a:tc>
+              </a:tr>
+              <a:tr h="440000">
+                <a:tc>
+                  <a:txBody>
+                    <a:bodyPr/>
+                    <a:lstStyle/>
+                    <a:p>
+                      <a:pPr algn="ctr"/>
+                      <a:r>
+                        <a:rPr sz="1050" b="0">
+                          <a:solidFill>
+                            <a:srgbClr val="1A1A1A"/>
+                          </a:solidFill>
+                        </a:rPr>
+                        <a:t>confident-prototype(hard, frac=0.5)</a:t>
+                      </a:r>
+                    </a:p>
+                  </a:txBody>
+                  <a:tcPr anchor="ctr">
+                    <a:solidFill>
+                      <a:srgbClr val="FFFFFF"/>
+                    </a:solidFill>
+                  </a:tcPr>
+                </a:tc>
+                <a:tc>
+                  <a:txBody>
+                    <a:bodyPr/>
+                    <a:lstStyle/>
+                    <a:p>
+                      <a:pPr algn="ctr"/>
+                      <a:r>
+                        <a:rPr sz="1050" b="0">
+                          <a:solidFill>
+                            <a:srgbClr val="1A1A1A"/>
+                          </a:solidFill>
+                        </a:rPr>
+                        <a:t>45.22%*</a:t>
+                      </a:r>
+                    </a:p>
+                  </a:txBody>
+                  <a:tcPr anchor="ctr">
+                    <a:solidFill>
+                      <a:srgbClr val="FFFFFF"/>
+                    </a:solidFill>
+                  </a:tcPr>
+                </a:tc>
+                <a:tc>
+                  <a:txBody>
+                    <a:bodyPr/>
+                    <a:lstStyle/>
+                    <a:p>
+                      <a:pPr algn="ctr"/>
+                      <a:r>
+                        <a:rPr sz="1050" b="0">
+                          <a:solidFill>
+                            <a:srgbClr val="1A1A1A"/>
+                          </a:solidFill>
+                        </a:rPr>
+                        <a:t>27.07%</a:t>
+                      </a:r>
+                    </a:p>
+                  </a:txBody>
+                  <a:tcPr anchor="ctr">
+                    <a:solidFill>
+                      <a:srgbClr val="FFFFFF"/>
+                    </a:solidFill>
+                  </a:tcPr>
+                </a:tc>
+                <a:tc>
+                  <a:txBody>
+                    <a:bodyPr/>
+                    <a:lstStyle/>
+                    <a:p>
+                      <a:pPr algn="ctr"/>
+                      <a:r>
+                        <a:rPr sz="1050" b="0">
+                          <a:solidFill>
+                            <a:srgbClr val="1A1A1A"/>
+                          </a:solidFill>
+                        </a:rPr>
+                        <a:t>20.17%</a:t>
+                      </a:r>
+                    </a:p>
+                  </a:txBody>
+                  <a:tcPr anchor="ctr">
+                    <a:solidFill>
+                      <a:srgbClr val="FFFFFF"/>
+                    </a:solidFill>
+                  </a:tcPr>
+                </a:tc>
+                <a:tc>
+                  <a:txBody>
+                    <a:bodyPr/>
+                    <a:lstStyle/>
+                    <a:p>
+                      <a:pPr algn="ctr"/>
+                      <a:r>
+                        <a:rPr sz="1050" b="1">
+                          <a:solidFill>
+                            <a:srgbClr val="B3401A"/>
+                          </a:solidFill>
+                        </a:rPr>
+                        <a:t>3-seed: 31.85%±11.33 → 기각</a:t>
+                      </a:r>
+                    </a:p>
+                  </a:txBody>
+                  <a:tcPr anchor="ctr">
+                    <a:solidFill>
+                      <a:srgbClr val="FFFFFF"/>
+                    </a:solidFill>
+                  </a:tcPr>
+                </a:tc>
+              </a:tr>
+              <a:tr h="440000">
+                <a:tc>
+                  <a:txBody>
+                    <a:bodyPr/>
+                    <a:lstStyle/>
+                    <a:p>
+                      <a:pPr algn="ctr"/>
+                      <a:r>
+                        <a:rPr sz="1050" b="0">
+                          <a:solidFill>
+                            <a:srgbClr val="1A1A1A"/>
+                          </a:solidFill>
+                        </a:rPr>
+                        <a:t>prototype-sharpen(soft, γ=2~4)</a:t>
+                      </a:r>
+                    </a:p>
+                  </a:txBody>
+                  <a:tcPr anchor="ctr">
+                    <a:solidFill>
+                      <a:srgbClr val="EEF3FC"/>
+                    </a:solidFill>
+                  </a:tcPr>
+                </a:tc>
+                <a:tc>
+                  <a:txBody>
+                    <a:bodyPr/>
+                    <a:lstStyle/>
+                    <a:p>
+                      <a:pPr algn="ctr"/>
+                      <a:r>
+                        <a:rPr sz="1050" b="0">
+                          <a:solidFill>
+                            <a:srgbClr val="1A1A1A"/>
+                          </a:solidFill>
+                        </a:rPr>
+                        <a:t>40.5~42.4%</a:t>
+                      </a:r>
+                    </a:p>
+                  </a:txBody>
+                  <a:tcPr anchor="ctr">
+                    <a:solidFill>
+                      <a:srgbClr val="EEF3FC"/>
+                    </a:solidFill>
+                  </a:tcPr>
+                </a:tc>
+                <a:tc>
+                  <a:txBody>
+                    <a:bodyPr/>
+                    <a:lstStyle/>
+                    <a:p>
+                      <a:pPr algn="ctr"/>
+                      <a:r>
+                        <a:rPr sz="1050" b="0">
+                          <a:solidFill>
+                            <a:srgbClr val="1A1A1A"/>
+                          </a:solidFill>
+                        </a:rPr>
+                        <a:t>29.8~30.1%</a:t>
+                      </a:r>
+                    </a:p>
+                  </a:txBody>
+                  <a:tcPr anchor="ctr">
+                    <a:solidFill>
+                      <a:srgbClr val="EEF3FC"/>
+                    </a:solidFill>
+                  </a:tcPr>
+                </a:tc>
+                <a:tc>
+                  <a:txBody>
+                    <a:bodyPr/>
+                    <a:lstStyle/>
+                    <a:p>
+                      <a:pPr algn="ctr"/>
+                      <a:r>
+                        <a:rPr sz="1050" b="0">
+                          <a:solidFill>
+                            <a:srgbClr val="1A1A1A"/>
+                          </a:solidFill>
+                        </a:rPr>
+                        <a:t>18.3%</a:t>
+                      </a:r>
+                    </a:p>
+                  </a:txBody>
+                  <a:tcPr anchor="ctr">
+                    <a:solidFill>
+                      <a:srgbClr val="EEF3FC"/>
+                    </a:solidFill>
+                  </a:tcPr>
+                </a:tc>
+                <a:tc>
+                  <a:txBody>
+                    <a:bodyPr/>
+                    <a:lstStyle/>
+                    <a:p>
+                      <a:pPr algn="ctr"/>
+                      <a:r>
+                        <a:rPr sz="1050" b="0">
+                          <a:solidFill>
+                            <a:srgbClr val="1A1A1A"/>
+                          </a:solidFill>
+                        </a:rPr>
+                        <a:t>단일seed, SHOT 못 넘음</a:t>
+                      </a:r>
+                    </a:p>
+                  </a:txBody>
+                  <a:tcPr anchor="ctr">
+                    <a:solidFill>
+                      <a:srgbClr val="EEF3FC"/>
+                    </a:solidFill>
+                  </a:tcPr>
+                </a:tc>
+              </a:tr>
+              <a:tr h="440000">
+                <a:tc>
+                  <a:txBody>
+                    <a:bodyPr/>
+                    <a:lstStyle/>
+                    <a:p>
+                      <a:pPr algn="ctr"/>
+                      <a:r>
+                        <a:rPr sz="1050" b="0">
+                          <a:solidFill>
+                            <a:srgbClr val="1A1A1A"/>
+                          </a:solidFill>
+                        </a:rPr>
+                        <a:t>TTA(좌우반전 평균)</a:t>
+                      </a:r>
+                    </a:p>
+                  </a:txBody>
+                  <a:tcPr anchor="ctr">
+                    <a:solidFill>
+                      <a:srgbClr val="FFFFFF"/>
+                    </a:solidFill>
+                  </a:tcPr>
+                </a:tc>
+                <a:tc>
+                  <a:txBody>
+                    <a:bodyPr/>
+                    <a:lstStyle/>
+                    <a:p>
+                      <a:pPr algn="ctr"/>
+                      <a:r>
+                        <a:rPr sz="1050" b="0">
+                          <a:solidFill>
+                            <a:srgbClr val="1A1A1A"/>
+                          </a:solidFill>
+                        </a:rPr>
+                        <a:t>40.13%</a:t>
+                      </a:r>
+                    </a:p>
+                  </a:txBody>
+                  <a:tcPr anchor="ctr">
+                    <a:solidFill>
+                      <a:srgbClr val="FFFFFF"/>
+                    </a:solidFill>
+                  </a:tcPr>
+                </a:tc>
+                <a:tc>
+                  <a:txBody>
+                    <a:bodyPr/>
+                    <a:lstStyle/>
+                    <a:p>
+                      <a:pPr algn="ctr"/>
+                      <a:r>
+                        <a:rPr sz="1050" b="0">
+                          <a:solidFill>
+                            <a:srgbClr val="1A1A1A"/>
+                          </a:solidFill>
+                        </a:rPr>
+                        <a:t>31.70%</a:t>
+                      </a:r>
+                    </a:p>
+                  </a:txBody>
+                  <a:tcPr anchor="ctr">
+                    <a:solidFill>
+                      <a:srgbClr val="FFFFFF"/>
+                    </a:solidFill>
+                  </a:tcPr>
+                </a:tc>
+                <a:tc>
+                  <a:txBody>
+                    <a:bodyPr/>
+                    <a:lstStyle/>
+                    <a:p>
+                      <a:pPr algn="ctr"/>
+                      <a:r>
+                        <a:rPr sz="1050" b="0">
+                          <a:solidFill>
+                            <a:srgbClr val="1A1A1A"/>
+                          </a:solidFill>
+                        </a:rPr>
+                        <a:t>18.76%</a:t>
+                      </a:r>
+                    </a:p>
+                  </a:txBody>
+                  <a:tcPr anchor="ctr">
+                    <a:solidFill>
+                      <a:srgbClr val="FFFFFF"/>
+                    </a:solidFill>
+                  </a:tcPr>
+                </a:tc>
+                <a:tc>
+                  <a:txBody>
+                    <a:bodyPr/>
+                    <a:lstStyle/>
+                    <a:p>
+                      <a:pPr algn="ctr"/>
+                      <a:r>
+                        <a:rPr sz="1050" b="0">
+                          <a:solidFill>
+                            <a:srgbClr val="1A1A1A"/>
+                          </a:solidFill>
+                        </a:rPr>
+                        <a:t>단일seed, 혼재(Bangladesh만 소폭↑)</a:t>
+                      </a:r>
+                    </a:p>
+                  </a:txBody>
+                  <a:tcPr anchor="ctr">
+                    <a:solidFill>
+                      <a:srgbClr val="FFFFFF"/>
+                    </a:solidFill>
+                  </a:tcPr>
+                </a:tc>
+              </a:tr>
+              <a:tr h="440000">
+                <a:tc>
+                  <a:txBody>
+                    <a:bodyPr/>
+                    <a:lstStyle/>
+                    <a:p>
+                      <a:pPr algn="ctr"/>
+                      <a:r>
+                        <a:rPr sz="1050" b="0">
+                          <a:solidFill>
+                            <a:srgbClr val="1A1A1A"/>
+                          </a:solidFill>
+                        </a:rPr>
+                        <a:t>TTA + AaD</a:t>
+                      </a:r>
+                    </a:p>
+                  </a:txBody>
+                  <a:tcPr anchor="ctr">
+                    <a:solidFill>
+                      <a:srgbClr val="EEF3FC"/>
+                    </a:solidFill>
+                  </a:tcPr>
+                </a:tc>
+                <a:tc>
+                  <a:txBody>
+                    <a:bodyPr/>
+                    <a:lstStyle/>
+                    <a:p>
+                      <a:pPr algn="ctr"/>
+                      <a:r>
+                        <a:rPr sz="1050" b="0">
+                          <a:solidFill>
+                            <a:srgbClr val="1A1A1A"/>
+                          </a:solidFill>
+                        </a:rPr>
+                        <a:t>39.49%</a:t>
+                      </a:r>
+                    </a:p>
+                  </a:txBody>
+                  <a:tcPr anchor="ctr">
+                    <a:solidFill>
+                      <a:srgbClr val="EEF3FC"/>
+                    </a:solidFill>
+                  </a:tcPr>
+                </a:tc>
+                <a:tc>
+                  <a:txBody>
+                    <a:bodyPr/>
+                    <a:lstStyle/>
+                    <a:p>
+                      <a:pPr algn="ctr"/>
+                      <a:r>
+                        <a:rPr sz="1050" b="0">
+                          <a:solidFill>
+                            <a:srgbClr val="1A1A1A"/>
+                          </a:solidFill>
+                        </a:rPr>
+                        <a:t>32.33%</a:t>
+                      </a:r>
+                    </a:p>
+                  </a:txBody>
+                  <a:tcPr anchor="ctr">
+                    <a:solidFill>
+                      <a:srgbClr val="EEF3FC"/>
+                    </a:solidFill>
+                  </a:tcPr>
+                </a:tc>
+                <a:tc>
+                  <a:txBody>
+                    <a:bodyPr/>
+                    <a:lstStyle/>
+                    <a:p>
+                      <a:pPr algn="ctr"/>
+                      <a:r>
+                        <a:rPr sz="1050" b="0">
+                          <a:solidFill>
+                            <a:srgbClr val="1A1A1A"/>
+                          </a:solidFill>
+                        </a:rPr>
+                        <a:t>—</a:t>
+                      </a:r>
+                    </a:p>
+                  </a:txBody>
+                  <a:tcPr anchor="ctr">
+                    <a:solidFill>
+                      <a:srgbClr val="EEF3FC"/>
+                    </a:solidFill>
+                  </a:tcPr>
+                </a:tc>
+                <a:tc>
+                  <a:txBody>
+                    <a:bodyPr/>
+                    <a:lstStyle/>
+                    <a:p>
+                      <a:pPr algn="ctr"/>
+                      <a:r>
+                        <a:rPr sz="1050" b="0">
+                          <a:solidFill>
+                            <a:srgbClr val="1A1A1A"/>
+                          </a:solidFill>
+                        </a:rPr>
+                        <a:t>단일seed, Taiwan 하락</a:t>
+                      </a:r>
+                    </a:p>
+                  </a:txBody>
+                  <a:tcPr anchor="ctr">
+                    <a:solidFill>
+                      <a:srgbClr val="EEF3FC"/>
+                    </a:solidFill>
+                  </a:tcPr>
+                </a:tc>
+              </a:tr>
+              <a:tr h="440000">
+                <a:tc>
+                  <a:txBody>
+                    <a:bodyPr/>
+                    <a:lstStyle/>
+                    <a:p>
+                      <a:pPr algn="ctr"/>
+                      <a:r>
+                        <a:rPr sz="1050" b="0">
+                          <a:solidFill>
+                            <a:srgbClr val="1A1A1A"/>
+                          </a:solidFill>
+                        </a:rPr>
+                        <a:t>SHOT+AaD, epoch=7(Taiwan만)</a:t>
+                      </a:r>
+                    </a:p>
+                  </a:txBody>
+                  <a:tcPr anchor="ctr">
+                    <a:solidFill>
+                      <a:srgbClr val="FFFFFF"/>
+                    </a:solidFill>
+                  </a:tcPr>
+                </a:tc>
+                <a:tc>
+                  <a:txBody>
+                    <a:bodyPr/>
+                    <a:lstStyle/>
+                    <a:p>
+                      <a:pPr algn="ctr"/>
+                      <a:r>
+                        <a:rPr sz="1050" b="0">
+                          <a:solidFill>
+                            <a:srgbClr val="1A1A1A"/>
+                          </a:solidFill>
+                        </a:rPr>
+                        <a:t>43.42%±10.52</a:t>
+                      </a:r>
+                    </a:p>
+                  </a:txBody>
+                  <a:tcPr anchor="ctr">
+                    <a:solidFill>
+                      <a:srgbClr val="FFFFFF"/>
+                    </a:solidFill>
+                  </a:tcPr>
+                </a:tc>
+                <a:tc>
+                  <a:txBody>
+                    <a:bodyPr/>
+                    <a:lstStyle/>
+                    <a:p>
+                      <a:pPr algn="ctr"/>
+                      <a:r>
+                        <a:rPr sz="1050" b="0">
+                          <a:solidFill>
+                            <a:srgbClr val="1A1A1A"/>
+                          </a:solidFill>
+                        </a:rPr>
+                        <a:t>—</a:t>
+                      </a:r>
+                    </a:p>
+                  </a:txBody>
+                  <a:tcPr anchor="ctr">
+                    <a:solidFill>
+                      <a:srgbClr val="FFFFFF"/>
+                    </a:solidFill>
+                  </a:tcPr>
+                </a:tc>
+                <a:tc>
+                  <a:txBody>
+                    <a:bodyPr/>
+                    <a:lstStyle/>
+                    <a:p>
+                      <a:pPr algn="ctr"/>
+                      <a:r>
+                        <a:rPr sz="1050" b="0">
+                          <a:solidFill>
+                            <a:srgbClr val="1A1A1A"/>
+                          </a:solidFill>
+                        </a:rPr>
+                        <a:t>—</a:t>
+                      </a:r>
+                    </a:p>
+                  </a:txBody>
+                  <a:tcPr anchor="ctr">
+                    <a:solidFill>
+                      <a:srgbClr val="FFFFFF"/>
+                    </a:solidFill>
+                  </a:tcPr>
+                </a:tc>
+                <a:tc>
+                  <a:txBody>
+                    <a:bodyPr/>
+                    <a:lstStyle/>
+                    <a:p>
+                      <a:pPr algn="ctr"/>
+                      <a:r>
+                        <a:rPr sz="1050" b="0">
+                          <a:solidFill>
+                            <a:srgbClr val="1A1A1A"/>
+                          </a:solidFill>
+                        </a:rPr>
+                        <a:t>3-seed: 평균↑ 표준편차도 2배↑ → 채택 보류</a:t>
+                      </a:r>
+                    </a:p>
+                  </a:txBody>
+                  <a:tcPr anchor="ctr">
+                    <a:solidFill>
+                      <a:srgbClr val="FFFFFF"/>
+                    </a:solidFill>
+                  </a:tcPr>
+                </a:tc>
+              </a:tr>
+            </a:tbl>
+          </a:graphicData>
+        </a:graphic>
+      </p:graphicFrame>
+      <p:sp>
+        <p:nvSpPr>
+          <p:cNvPr id="6" name="TextBox 4"/>
+          <p:cNvSpPr txBox="1"/>
+          <p:nvPr/>
+        </p:nvSpPr>
+        <p:spPr>
+          <a:xfrm>
+            <a:off x="548640" y="4650000"/>
+            <a:ext cx="11091672" cy="1700000"/>
+          </a:xfrm>
+          <a:prstGeom prst="rect">
+            <a:avLst/>
+          </a:prstGeom>
+          <a:noFill/>
+        </p:spPr>
+        <p:txBody>
+          <a:bodyPr wrap="square" anchor="t" lIns="0" rIns="0" tIns="0" bIns="0">
+            <a:spAutoFit/>
+          </a:bodyPr>
+          <a:lstStyle/>
+          <a:p>
+            <a:pPr algn="l"/>
+            <a:r>
+              <a:rPr sz="1100" b="0" i="1">
+                <a:solidFill>
+                  <a:srgbClr val="5B5E6B"/>
+                </a:solidFill>
+                <a:latin typeface="Calibri"/>
+              </a:rPr>
+              <a:t>*confident-prototype(hard)는 seed42에서 Taiwan의 healthy 블라인드스팟을 실제로 풀었다(recall 0%→34.9%, precision 84%) — 하지만 3-seed로 검증하니 seed123이 17.52%(3클래스 랜덤 확률보다도 낮음)로 완전히 무너졌다. 작은/애매한 클래스는 “확신 있는 멤버”가 seed에 따라 아예 없거나 전부 오답일 수 있다는 뜻이다. soft 버전(sharpen)·TTA는 극단적으로 무너지진 않지만 SHOT+AaD를 넘는 신호가 보이지 않아 3-seed 검증 없이 기각했다. 지금까지 시도한 8개 방향 중 3-seed 검증을 통과한 것은 SHOT+AaD(weight=1.0, 공통)뿐이다.</a:t>
+            </a:r>
+          </a:p>
+        </p:txBody>
+      </p:sp>
+      <p:sp>
+        <p:nvSpPr>
+          <p:cNvPr id="9" name="TextBox 5"/>
+          <p:cNvSpPr txBox="1"/>
+          <p:nvPr/>
+        </p:nvSpPr>
+        <p:spPr>
+          <a:xfrm>
+            <a:off x="11430000" y="6446520"/>
+            <a:ext cx="548640" cy="274320"/>
+          </a:xfrm>
+          <a:prstGeom prst="rect">
+            <a:avLst/>
+          </a:prstGeom>
+          <a:noFill/>
+        </p:spPr>
+        <p:txBody>
+          <a:bodyPr wrap="square" anchor="t" lIns="0" rIns="0" tIns="0" bIns="0">
+            <a:spAutoFit/>
+          </a:bodyPr>
+          <a:lstStyle/>
+          <a:p>
+            <a:pPr algn="r"/>
+            <a:r>
+              <a:rPr sz="1000" b="0" i="0">
+                <a:solidFill>
+                  <a:srgbClr val="5B5E6B"/>
+                </a:solidFill>
+                <a:latin typeface="Calibri"/>
+              </a:rPr>
+              <a:t>28</a:t>
             </a:r>
           </a:p>
         </p:txBody>

--- a/docs/CNN_토마토_병해분류_V2_진행보고.pptx
+++ b/docs/CNN_토마토_병해분류_V2_진행보고.pptx
@@ -32,8 +32,11 @@
     <p:sldId id="292" r:id="rId42"/>
     <p:sldId id="290" r:id="rId40"/>
     <p:sldId id="294" r:id="rId44"/>
+    <p:sldId id="299" r:id="rId49"/>
     <p:sldId id="295" r:id="rId45"/>
     <p:sldId id="298" r:id="rId48"/>
+    <p:sldId id="300" r:id="rId50"/>
+    <p:sldId id="301" r:id="rId51"/>
     <p:sldId id="296" r:id="rId46"/>
     <p:sldId id="297" r:id="rId47"/>
     <p:sldId id="286" r:id="rId36"/>
@@ -18517,7 +18520,7 @@
                 </a:solidFill>
                 <a:latin typeface="Calibri"/>
               </a:rPr>
-              <a:t>32</a:t>
+              <a:t>35</a:t>
             </a:r>
           </a:p>
         </p:txBody>
@@ -19939,7 +19942,7 @@
                 </a:solidFill>
                 <a:latin typeface="Calibri"/>
               </a:rPr>
-              <a:t>33</a:t>
+              <a:t>36</a:t>
             </a:r>
           </a:p>
         </p:txBody>
@@ -20000,7 +20003,7 @@
                 </a:solidFill>
                 <a:latin typeface="Calibri"/>
               </a:rPr>
-              <a:t>RESULT 7 · DOMAIN ADAPTATION (9/9)</a:t>
+              <a:t>RESULT 7 · DOMAIN ADAPTATION (12/12)</a:t>
             </a:r>
           </a:p>
         </p:txBody>
@@ -20531,7 +20534,7 @@
                 </a:solidFill>
                 <a:latin typeface="Calibri"/>
               </a:rPr>
-              <a:t>31</a:t>
+              <a:t>34</a:t>
             </a:r>
           </a:p>
         </p:txBody>
@@ -20592,7 +20595,7 @@
                 </a:solidFill>
                 <a:latin typeface="Calibri"/>
               </a:rPr>
-              <a:t>RESULT 7 · DOMAIN ADAPTATION (3/9)</a:t>
+              <a:t>RESULT 7 · DOMAIN ADAPTATION (3/12)</a:t>
             </a:r>
           </a:p>
         </p:txBody>
@@ -21092,7 +21095,7 @@
                 </a:solidFill>
                 <a:latin typeface="Calibri"/>
               </a:rPr>
-              <a:t>RESULT 7 · DOMAIN ADAPTATION (2/9)</a:t>
+              <a:t>RESULT 7 · DOMAIN ADAPTATION (2/12)</a:t>
             </a:r>
           </a:p>
         </p:txBody>
@@ -21585,7 +21588,7 @@
                 </a:solidFill>
                 <a:latin typeface="Calibri"/>
               </a:rPr>
-              <a:t>Taiwan만 오라클 실측값이 60%를 넘는다(70.53%) — 하이퍼파라미터를 끝까지 밀면 seed42 한 번은 63%까지 봤지만, 3-seed로 검증하면 46.39% ±12.46으로 재현되지 않았다(7/9 슬라이드). Bangladesh는 오라클 실측값(58.61%) 자체가 60%에 못 미쳐 “완벽한 적응 기법”을 찾아도 구조적으로 60%를 보장할 수 없고, PlantDoc은 정답을 줘도 23%라 적응 문제가 아니라 feature 표현력의 문제다 — source 학습 데이터·증강을 바꾸지 않는 한(이 프로젝트 범위 밖) 더 올릴 수 없다는 게 최종 진단이다.</a:t>
+              <a:t>Taiwan만 오라클 실측값이 60%를 넘는다(70.53%) — 하이퍼파라미터를 끝까지 밀면 seed42 한 번은 63%까지 봤지만, 3-seed로 검증하면 46.39% ±12.46으로 재현되지 않았다(10/12 슬라이드). Bangladesh는 오라클 실측값(58.61%) 자체가 60%에 못 미쳐 “완벽한 적응 기법”을 찾아도 구조적으로 60%를 보장할 수 없고, PlantDoc은 정답을 줘도 23%라 적응 문제가 아니라 feature 표현력의 문제다 — source 학습 데이터·증강을 바꾸지 않는 한(이 프로젝트 범위 밖) 더 올릴 수 없다는 게 최종 진단이다.</a:t>
             </a:r>
           </a:p>
         </p:txBody>
@@ -21681,7 +21684,7 @@
                 </a:solidFill>
                 <a:latin typeface="Calibri"/>
               </a:rPr>
-              <a:t>RESULT 7 · DOMAIN ADAPTATION (1/9)</a:t>
+              <a:t>RESULT 7 · DOMAIN ADAPTATION (1/12)</a:t>
             </a:r>
           </a:p>
         </p:txBody>
@@ -22360,7 +22363,7 @@
                 </a:solidFill>
                 <a:latin typeface="Calibri"/>
               </a:rPr>
-              <a:t>RESULT 7 · DOMAIN ADAPTATION (4/9)</a:t>
+              <a:t>RESULT 7 · DOMAIN ADAPTATION (4/12)</a:t>
             </a:r>
           </a:p>
         </p:txBody>
@@ -23972,7 +23975,7 @@
                 </a:solidFill>
                 <a:latin typeface="Calibri"/>
               </a:rPr>
-              <a:t>RESULT 7 · DOMAIN ADAPTATION (5/9)</a:t>
+              <a:t>RESULT 7 · DOMAIN ADAPTATION (6/12)</a:t>
             </a:r>
           </a:p>
         </p:txBody>
@@ -24860,7 +24863,7 @@
                 </a:solidFill>
                 <a:latin typeface="Calibri"/>
               </a:rPr>
-              <a:t>27</a:t>
+              <a:t>28</a:t>
             </a:r>
           </a:p>
         </p:txBody>
@@ -24921,7 +24924,7 @@
                 </a:solidFill>
                 <a:latin typeface="Calibri"/>
               </a:rPr>
-              <a:t>RESULT 7 · DOMAIN ADAPTATION (7/9)</a:t>
+              <a:t>RESULT 7 · DOMAIN ADAPTATION (10/12)</a:t>
             </a:r>
           </a:p>
         </p:txBody>
@@ -25597,7 +25600,7 @@
                 </a:solidFill>
                 <a:latin typeface="Calibri"/>
               </a:rPr>
-              <a:t>Taiwan은 epoch·weight를 올릴수록 계속 좋아지다 epoch=10에서 과적합으로 꺾인다. Bangladesh는 epoch=4·weight=2.0(class_balance+balanced_cap 병행)에서 정점(34.42%) 후 하락한다. 하지만 두 정점(63.06%, 34.42%) 모두 seed42 단일 실행이고, 3-seed로 검증하면 재현되지 않았다(1/9 슬라이드 데이터와 같은 결론) — 그래서 최종 채택은 정점이 아니라 epoch=2(공통 고정값)다.</a:t>
+              <a:t>Taiwan은 epoch·weight를 올릴수록 계속 좋아지다 epoch=10에서 과적합으로 꺾인다. Bangladesh는 epoch=4·weight=2.0(class_balance+balanced_cap 병행)에서 정점(34.42%) 후 하락한다. 하지만 두 정점(63.06%, 34.42%) 모두 seed42 단일 실행이고, 3-seed로 검증하면 재현되지 않았다(1/12 슬라이드 데이터와 같은 결론) — 그래서 최종 채택은 정점이 아니라 epoch=2(공통 고정값)다.</a:t>
             </a:r>
           </a:p>
         </p:txBody>
@@ -25632,7 +25635,7 @@
                 </a:solidFill>
                 <a:latin typeface="Calibri"/>
               </a:rPr>
-              <a:t>29</a:t>
+              <a:t>32</a:t>
             </a:r>
           </a:p>
         </p:txBody>
@@ -25693,7 +25696,7 @@
                 </a:solidFill>
                 <a:latin typeface="Calibri"/>
               </a:rPr>
-              <a:t>RESULT 7 · DOMAIN ADAPTATION (8/9)</a:t>
+              <a:t>RESULT 7 · DOMAIN ADAPTATION (11/12)</a:t>
             </a:r>
           </a:p>
         </p:txBody>
@@ -26491,7 +26494,7 @@
                 </a:solidFill>
                 <a:latin typeface="Calibri"/>
               </a:rPr>
-              <a:t>30</a:t>
+              <a:t>33</a:t>
             </a:r>
           </a:p>
         </p:txBody>
@@ -26552,7 +26555,7 @@
                 </a:solidFill>
                 <a:latin typeface="Calibri"/>
               </a:rPr>
-              <a:t>RESULT 7 · DOMAIN ADAPTATION (6/9)</a:t>
+              <a:t>RESULT 7 · DOMAIN ADAPTATION (7/12)</a:t>
             </a:r>
           </a:p>
         </p:txBody>
@@ -27393,7 +27396,1084 @@
                 </a:solidFill>
                 <a:latin typeface="Calibri"/>
               </a:rPr>
-              <a:t>28</a:t>
+              <a:t>29</a:t>
+            </a:r>
+          </a:p>
+        </p:txBody>
+      </p:sp>
+    </p:spTree>
+  </p:cSld>
+  <p:clrMapOvr>
+    <a:masterClrMapping/>
+  </p:clrMapOvr>
+</p:sld>
+</file>
+
+<file path=ppt/slides/slide44.xml><?xml version="1.0" encoding="utf-8"?>
+<p:sld xmlns:a="http://schemas.openxmlformats.org/drawingml/2006/main" xmlns:p="http://schemas.openxmlformats.org/presentationml/2006/main" xmlns:r="http://schemas.openxmlformats.org/officeDocument/2006/relationships">
+  <p:cSld>
+    <p:bg>
+      <p:bgPr>
+        <a:solidFill>
+          <a:srgbClr val="FFFFFF"/>
+        </a:solidFill>
+        <a:effectLst/>
+      </p:bgPr>
+    </p:bg>
+    <p:spTree>
+      <p:nvGrpSpPr>
+        <p:cNvPr id="1" name=""/>
+        <p:cNvGrpSpPr/>
+        <p:nvPr/>
+      </p:nvGrpSpPr>
+      <p:grpSpPr/>
+      <p:sp>
+        <p:nvSpPr>
+          <p:cNvPr id="2" name="TextBox 1"/>
+          <p:cNvSpPr txBox="1"/>
+          <p:nvPr/>
+        </p:nvSpPr>
+        <p:spPr>
+          <a:xfrm>
+            <a:off x="548640" y="292608"/>
+            <a:ext cx="9144000" cy="292608"/>
+          </a:xfrm>
+          <a:prstGeom prst="rect">
+            <a:avLst/>
+          </a:prstGeom>
+          <a:noFill/>
+        </p:spPr>
+        <p:txBody>
+          <a:bodyPr wrap="square" anchor="t" lIns="0" rIns="0" tIns="0" bIns="0">
+            <a:spAutoFit/>
+          </a:bodyPr>
+          <a:lstStyle/>
+          <a:p>
+            <a:pPr algn="l"/>
+            <a:r>
+              <a:rPr sz="1050" b="1" i="0">
+                <a:solidFill>
+                  <a:srgbClr val="2A78D6"/>
+                </a:solidFill>
+                <a:latin typeface="Calibri"/>
+              </a:rPr>
+              <a:t>RESULT 7 · DOMAIN ADAPTATION (5/12)</a:t>
+            </a:r>
+          </a:p>
+        </p:txBody>
+      </p:sp>
+      <p:sp>
+        <p:nvSpPr>
+          <p:cNvPr id="3" name="TextBox 2"/>
+          <p:cNvSpPr txBox="1"/>
+          <p:nvPr/>
+        </p:nvSpPr>
+        <p:spPr>
+          <a:xfrm>
+            <a:off x="548640" y="566928"/>
+            <a:ext cx="10972800" cy="548640"/>
+          </a:xfrm>
+          <a:prstGeom prst="rect">
+            <a:avLst/>
+          </a:prstGeom>
+          <a:noFill/>
+        </p:spPr>
+        <p:txBody>
+          <a:bodyPr wrap="square" anchor="t" lIns="0" rIns="0" tIns="0" bIns="0">
+            <a:spAutoFit/>
+          </a:bodyPr>
+          <a:lstStyle/>
+          <a:p>
+            <a:pPr algn="l"/>
+            <a:r>
+              <a:rPr sz="2100" b="1" i="0">
+                <a:solidFill>
+                  <a:srgbClr val="1E2761"/>
+                </a:solidFill>
+                <a:latin typeface="Cambria"/>
+              </a:rPr>
+              <a:t>왜 이 방법들을 시도했는가 — 가설과 근거</a:t>
+            </a:r>
+          </a:p>
+        </p:txBody>
+      </p:sp>
+      <p:sp>
+        <p:nvSpPr>
+          <p:cNvPr id="4" name="TextBox 3"/>
+          <p:cNvSpPr txBox="1"/>
+          <p:nvPr/>
+        </p:nvSpPr>
+        <p:spPr>
+          <a:xfrm>
+            <a:off x="548640" y="1150000"/>
+            <a:ext cx="11091672" cy="950000"/>
+          </a:xfrm>
+          <a:prstGeom prst="rect">
+            <a:avLst/>
+          </a:prstGeom>
+          <a:noFill/>
+        </p:spPr>
+        <p:txBody>
+          <a:bodyPr wrap="square" anchor="t" lIns="0" rIns="0" tIns="0" bIns="0">
+            <a:spAutoFit/>
+          </a:bodyPr>
+          <a:lstStyle/>
+          <a:p>
+            <a:pPr algn="l"/>
+            <a:r>
+              <a:rPr sz="1150" b="0" i="0">
+                <a:solidFill>
+                  <a:srgbClr val="1A1A1A"/>
+                </a:solidFill>
+                <a:latin typeface="Calibri"/>
+              </a:rPr>
+              <a:t>각 방법은 “아무거나 최신 것”을 고른 게 아니라, 심층 진단(3/12 슬라이드)에서 나온 구체적인 문제에 대한 가설을 가지고 선택했다. 결과(7/12 슬라이드)는 대부분 가설을 기각했지만, 그 자체가 “진짜 원인이 무엇인가”를 좁혀가는 정보였다.</a:t>
+            </a:r>
+          </a:p>
+        </p:txBody>
+      </p:sp>
+      <p:sp>
+        <p:nvSpPr>
+          <p:cNvPr id="5" name="TextBox Bullets"/>
+          <p:cNvSpPr txBox="1"/>
+          <p:nvPr/>
+        </p:nvSpPr>
+        <p:spPr>
+          <a:xfrm>
+            <a:off x="548640" y="2250000"/>
+            <a:ext cx="11091672" cy="3400000"/>
+          </a:xfrm>
+          <a:prstGeom prst="rect">
+            <a:avLst/>
+          </a:prstGeom>
+          <a:noFill/>
+        </p:spPr>
+        <p:txBody>
+          <a:bodyPr wrap="square" anchor="t" lIns="0" rIns="0" tIns="0" bIns="0">
+            <a:spAutoFit/>
+          </a:bodyPr>
+          <a:lstStyle/>
+          <a:p>
+            <a:pPr algn="l" marL="228600" indent="-228600">
+              <a:lnSpc>
+                <a:spcPct val="108000"/>
+              </a:lnSpc>
+              <a:spcAft>
+                <a:spcPts val="600"/>
+              </a:spcAft>
+              <a:buFont typeface="Arial"/>
+              <a:buChar char="•"/>
+            </a:pPr>
+            <a:r>
+              <a:rPr sz="1150" b="1" i="0">
+                <a:solidFill>
+                  <a:srgbClr val="2A78D6"/>
+                </a:solidFill>
+                <a:latin typeface="Calibri"/>
+              </a:rPr>
+              <a:t>EATA (ICML 2022): </a:t>
+            </a:r>
+            <a:r>
+              <a:rPr sz="1150" b="0" i="0">
+                <a:solidFill>
+                  <a:srgbClr val="1A1A1A"/>
+                </a:solidFill>
+                <a:latin typeface="Calibri"/>
+              </a:rPr>
+              <a:t>TENT의 최신 후속작 — entropy 필터링·Fisher 정보 기반 정규화가 더 정교하면 pseudo-label 노이즈가 줄지 않을까.</a:t>
+            </a:r>
+          </a:p>
+          <a:p>
+            <a:pPr algn="l" marL="228600" indent="-228600">
+              <a:lnSpc>
+                <a:spcPct val="108000"/>
+              </a:lnSpc>
+              <a:spcAft>
+                <a:spcPts val="600"/>
+              </a:spcAft>
+              <a:buFont typeface="Arial"/>
+              <a:buChar char="•"/>
+            </a:pPr>
+            <a:r>
+              <a:rPr sz="1150" b="1" i="0">
+                <a:solidFill>
+                  <a:srgbClr val="2A78D6"/>
+                </a:solidFill>
+                <a:latin typeface="Calibri"/>
+              </a:rPr>
+              <a:t>UPA-APS: </a:t>
+            </a:r>
+            <a:r>
+              <a:rPr sz="1150" b="0" i="0">
+                <a:solidFill>
+                  <a:srgbClr val="1A1A1A"/>
+                </a:solidFill>
+                <a:latin typeface="Calibri"/>
+              </a:rPr>
+              <a:t>SHOT의 pseudo-label을 K-최근접 이웃 투표로 재검증하면, 심층 진단에서 확인된 Taiwan healthy 블라인드스팟·Bangladesh 쏠림이 줄어들지 않을까.</a:t>
+            </a:r>
+          </a:p>
+          <a:p>
+            <a:pPr algn="l" marL="228600" indent="-228600">
+              <a:lnSpc>
+                <a:spcPct val="108000"/>
+              </a:lnSpc>
+              <a:spcAft>
+                <a:spcPts val="600"/>
+              </a:spcAft>
+              <a:buFont typeface="Arial"/>
+              <a:buChar char="•"/>
+            </a:pPr>
+            <a:r>
+              <a:rPr sz="1150" b="1" i="0">
+                <a:solidFill>
+                  <a:srgbClr val="2A78D6"/>
+                </a:solidFill>
+                <a:latin typeface="Calibri"/>
+              </a:rPr>
+              <a:t>UPA-CACL: </a:t>
+            </a:r>
+            <a:r>
+              <a:rPr sz="1150" b="0" i="0">
+                <a:solidFill>
+                  <a:srgbClr val="1A1A1A"/>
+                </a:solidFill>
+                <a:latin typeface="Calibri"/>
+              </a:rPr>
+              <a:t>APS의 confident set 안에서 같은 클래스 feature를 contrastive하게 당기면 클래스 간 분리가 더 좋아지지 않을까.</a:t>
+            </a:r>
+          </a:p>
+          <a:p>
+            <a:pPr algn="l" marL="228600" indent="-228600">
+              <a:lnSpc>
+                <a:spcPct val="108000"/>
+              </a:lnSpc>
+              <a:spcAft>
+                <a:spcPts val="600"/>
+              </a:spcAft>
+              <a:buFont typeface="Arial"/>
+              <a:buChar char="•"/>
+            </a:pPr>
+            <a:r>
+              <a:rPr sz="1150" b="1" i="0">
+                <a:solidFill>
+                  <a:srgbClr val="2A78D6"/>
+                </a:solidFill>
+                <a:latin typeface="Calibri"/>
+              </a:rPr>
+              <a:t>R-GV (CVPR 2025): </a:t>
+            </a:r>
+            <a:r>
+              <a:rPr sz="1150" b="0" i="0">
+                <a:solidFill>
+                  <a:srgbClr val="1A1A1A"/>
+                </a:solidFill>
+                <a:latin typeface="Calibri"/>
+              </a:rPr>
+              <a:t>오라클 진단에서 PlantDoc은 pseudo-label이 아니라 feature 표현력 자체가 문제라고 나왔다 — 그렇다면 feature를 직접 재정렬(semantic alignment)하면 PlantDoc이 풀리지 않을까.</a:t>
+            </a:r>
+          </a:p>
+          <a:p>
+            <a:pPr algn="l" marL="228600" indent="-228600">
+              <a:lnSpc>
+                <a:spcPct val="108000"/>
+              </a:lnSpc>
+              <a:spcAft>
+                <a:spcPts val="600"/>
+              </a:spcAft>
+              <a:buFont typeface="Arial"/>
+              <a:buChar char="•"/>
+            </a:pPr>
+            <a:r>
+              <a:rPr sz="1150" b="1" i="0">
+                <a:solidFill>
+                  <a:srgbClr val="2A78D6"/>
+                </a:solidFill>
+                <a:latin typeface="Calibri"/>
+              </a:rPr>
+              <a:t>AaD (NeurIPS 2022): </a:t>
+            </a:r>
+            <a:r>
+              <a:rPr sz="1150" b="0" i="0">
+                <a:solidFill>
+                  <a:srgbClr val="1A1A1A"/>
+                </a:solidFill>
+                <a:latin typeface="Calibri"/>
+              </a:rPr>
+              <a:t>“어떤 샘플이 어느 클래스냐”를 확정하는 클러스터링 단계 자체가 Bangladesh의 쏠림을 만드는 원인이라면, 클러스터링을 아예 없애고 이웃 일관성만으로 적응하면 어떨까.</a:t>
+            </a:r>
+          </a:p>
+          <a:p>
+            <a:pPr algn="l" marL="228600" indent="-228600">
+              <a:lnSpc>
+                <a:spcPct val="108000"/>
+              </a:lnSpc>
+              <a:spcAft>
+                <a:spcPts val="600"/>
+              </a:spcAft>
+              <a:buFont typeface="Arial"/>
+              <a:buChar char="•"/>
+            </a:pPr>
+            <a:r>
+              <a:rPr sz="1150" b="1" i="0">
+                <a:solidFill>
+                  <a:srgbClr val="2A78D6"/>
+                </a:solidFill>
+                <a:latin typeface="Calibri"/>
+              </a:rPr>
+              <a:t>CoWA-JMDS (ICML 2022): </a:t>
+            </a:r>
+            <a:r>
+              <a:rPr sz="1150" b="0" i="0">
+                <a:solidFill>
+                  <a:srgbClr val="1A1A1A"/>
+                </a:solidFill>
+                <a:latin typeface="Calibri"/>
+              </a:rPr>
+              <a:t>APS처럼 버리거나 쓰거나(hard filtering)가 아니라, “얼마나 믿을지”를 연속적인 점수로 매기는(soft weighting) 방식이면 더 안정적이지 않을까.</a:t>
+            </a:r>
+          </a:p>
+        </p:txBody>
+      </p:sp>
+      <p:sp>
+        <p:nvSpPr>
+          <p:cNvPr id="9" name="TextBox 5"/>
+          <p:cNvSpPr txBox="1"/>
+          <p:nvPr/>
+        </p:nvSpPr>
+        <p:spPr>
+          <a:xfrm>
+            <a:off x="11430000" y="6446520"/>
+            <a:ext cx="548640" cy="274320"/>
+          </a:xfrm>
+          <a:prstGeom prst="rect">
+            <a:avLst/>
+          </a:prstGeom>
+          <a:noFill/>
+        </p:spPr>
+        <p:txBody>
+          <a:bodyPr wrap="square" anchor="t" lIns="0" rIns="0" tIns="0" bIns="0">
+            <a:spAutoFit/>
+          </a:bodyPr>
+          <a:lstStyle/>
+          <a:p>
+            <a:pPr algn="r"/>
+            <a:r>
+              <a:rPr sz="1000" b="0" i="0">
+                <a:solidFill>
+                  <a:srgbClr val="5B5E6B"/>
+                </a:solidFill>
+                <a:latin typeface="Calibri"/>
+              </a:rPr>
+              <a:t>27</a:t>
+            </a:r>
+          </a:p>
+        </p:txBody>
+      </p:sp>
+    </p:spTree>
+  </p:cSld>
+  <p:clrMapOvr>
+    <a:masterClrMapping/>
+  </p:clrMapOvr>
+</p:sld>
+</file>
+
+<file path=ppt/slides/slide45.xml><?xml version="1.0" encoding="utf-8"?>
+<p:sld xmlns:a="http://schemas.openxmlformats.org/drawingml/2006/main" xmlns:p="http://schemas.openxmlformats.org/presentationml/2006/main" xmlns:r="http://schemas.openxmlformats.org/officeDocument/2006/relationships">
+  <p:cSld>
+    <p:bg>
+      <p:bgPr>
+        <a:solidFill>
+          <a:srgbClr val="FFFFFF"/>
+        </a:solidFill>
+        <a:effectLst/>
+      </p:bgPr>
+    </p:bg>
+    <p:spTree>
+      <p:nvGrpSpPr>
+        <p:cNvPr id="1" name=""/>
+        <p:cNvGrpSpPr/>
+        <p:nvPr/>
+      </p:nvGrpSpPr>
+      <p:grpSpPr/>
+      <p:sp>
+        <p:nvSpPr>
+          <p:cNvPr id="2" name="TextBox 1"/>
+          <p:cNvSpPr txBox="1"/>
+          <p:nvPr/>
+        </p:nvSpPr>
+        <p:spPr>
+          <a:xfrm>
+            <a:off x="548640" y="292608"/>
+            <a:ext cx="9144000" cy="292608"/>
+          </a:xfrm>
+          <a:prstGeom prst="rect">
+            <a:avLst/>
+          </a:prstGeom>
+          <a:noFill/>
+        </p:spPr>
+        <p:txBody>
+          <a:bodyPr wrap="square" anchor="t" lIns="0" rIns="0" tIns="0" bIns="0">
+            <a:spAutoFit/>
+          </a:bodyPr>
+          <a:lstStyle/>
+          <a:p>
+            <a:pPr algn="l"/>
+            <a:r>
+              <a:rPr sz="1050" b="1" i="0">
+                <a:solidFill>
+                  <a:srgbClr val="2A78D6"/>
+                </a:solidFill>
+                <a:latin typeface="Calibri"/>
+              </a:rPr>
+              <a:t>RESULT 7 · DOMAIN ADAPTATION (8/12)</a:t>
+            </a:r>
+          </a:p>
+        </p:txBody>
+      </p:sp>
+      <p:sp>
+        <p:nvSpPr>
+          <p:cNvPr id="3" name="TextBox 2"/>
+          <p:cNvSpPr txBox="1"/>
+          <p:nvPr/>
+        </p:nvSpPr>
+        <p:spPr>
+          <a:xfrm>
+            <a:off x="548640" y="566928"/>
+            <a:ext cx="10972800" cy="548640"/>
+          </a:xfrm>
+          <a:prstGeom prst="rect">
+            <a:avLst/>
+          </a:prstGeom>
+          <a:noFill/>
+        </p:spPr>
+        <p:txBody>
+          <a:bodyPr wrap="square" anchor="t" lIns="0" rIns="0" tIns="0" bIns="0">
+            <a:spAutoFit/>
+          </a:bodyPr>
+          <a:lstStyle/>
+          <a:p>
+            <a:pPr algn="l"/>
+            <a:r>
+              <a:rPr sz="2100" b="1" i="0">
+                <a:solidFill>
+                  <a:srgbClr val="1E2761"/>
+                </a:solidFill>
+                <a:latin typeface="Cambria"/>
+              </a:rPr>
+              <a:t>한계점</a:t>
+            </a:r>
+          </a:p>
+        </p:txBody>
+      </p:sp>
+      <p:sp>
+        <p:nvSpPr>
+          <p:cNvPr id="4" name="TextBox 3"/>
+          <p:cNvSpPr txBox="1"/>
+          <p:nvPr/>
+        </p:nvSpPr>
+        <p:spPr>
+          <a:xfrm>
+            <a:off x="548640" y="1150000"/>
+            <a:ext cx="11091672" cy="600000"/>
+          </a:xfrm>
+          <a:prstGeom prst="rect">
+            <a:avLst/>
+          </a:prstGeom>
+          <a:noFill/>
+        </p:spPr>
+        <p:txBody>
+          <a:bodyPr wrap="square" anchor="t" lIns="0" rIns="0" tIns="0" bIns="0">
+            <a:spAutoFit/>
+          </a:bodyPr>
+          <a:lstStyle/>
+          <a:p>
+            <a:pPr algn="l"/>
+            <a:r>
+              <a:rPr sz="1200" b="0" i="0">
+                <a:solidFill>
+                  <a:srgbClr val="1A1A1A"/>
+                </a:solidFill>
+                <a:latin typeface="Calibri"/>
+              </a:rPr>
+              <a:t>이 프로젝트의 Domain Adaptation 결과를 해석할 때 반드시 같이 봐야 하는 전제·제약이다.</a:t>
+            </a:r>
+          </a:p>
+        </p:txBody>
+      </p:sp>
+      <p:sp>
+        <p:nvSpPr>
+          <p:cNvPr id="5" name="TextBox Bullets"/>
+          <p:cNvSpPr txBox="1"/>
+          <p:nvPr/>
+        </p:nvSpPr>
+        <p:spPr>
+          <a:xfrm>
+            <a:off x="548640" y="1950000"/>
+            <a:ext cx="11091672" cy="4300000"/>
+          </a:xfrm>
+          <a:prstGeom prst="rect">
+            <a:avLst/>
+          </a:prstGeom>
+          <a:noFill/>
+        </p:spPr>
+        <p:txBody>
+          <a:bodyPr wrap="square" anchor="t" lIns="0" rIns="0" tIns="0" bIns="0">
+            <a:spAutoFit/>
+          </a:bodyPr>
+          <a:lstStyle/>
+          <a:p>
+            <a:pPr algn="l" marL="228600" indent="-228600">
+              <a:lnSpc>
+                <a:spcPct val="108000"/>
+              </a:lnSpc>
+              <a:spcAft>
+                <a:spcPts val="600"/>
+              </a:spcAft>
+              <a:buFont typeface="Arial"/>
+              <a:buChar char="•"/>
+            </a:pPr>
+            <a:r>
+              <a:rPr sz="1100" b="1" i="0">
+                <a:solidFill>
+                  <a:srgbClr val="2A78D6"/>
+                </a:solidFill>
+                <a:latin typeface="Calibri"/>
+              </a:rPr>
+              <a:t>Label-free 제약: </a:t>
+            </a:r>
+            <a:r>
+              <a:rPr sz="1100" b="0" i="0">
+                <a:solidFill>
+                  <a:srgbClr val="1A1A1A"/>
+                </a:solidFill>
+                <a:latin typeface="Calibri"/>
+              </a:rPr>
+              <a:t>target 정답을 전혀 안 쓴다 — 어떤 방법이 진짜 맞는지 사전에 알 방법이 없어, 모든 시도가 “가설 기반 시도”일 수밖에 없다. 오라클 실험은 진단 전용이며 실제 적응에는 쓰지 않았다.</a:t>
+            </a:r>
+          </a:p>
+          <a:p>
+            <a:pPr algn="l" marL="228600" indent="-228600">
+              <a:lnSpc>
+                <a:spcPct val="108000"/>
+              </a:lnSpc>
+              <a:spcAft>
+                <a:spcPts val="600"/>
+              </a:spcAft>
+              <a:buFont typeface="Arial"/>
+              <a:buChar char="•"/>
+            </a:pPr>
+            <a:r>
+              <a:rPr sz="1100" b="1" i="0">
+                <a:solidFill>
+                  <a:srgbClr val="2A78D6"/>
+                </a:solidFill>
+                <a:latin typeface="Calibri"/>
+              </a:rPr>
+              <a:t>3-seed만으로는 통계적 유의성 검정을 하지 않았다: </a:t>
+            </a:r>
+            <a:r>
+              <a:rPr sz="1100" b="0" i="0">
+                <a:solidFill>
+                  <a:srgbClr val="1A1A1A"/>
+                </a:solidFill>
+                <a:latin typeface="Calibri"/>
+              </a:rPr>
+              <a:t>평균·표준편차 비교 수준이다. n=3는 “단일 seed 과신”을 잡아내는 데는 충분했지만(APS·극단튜닝·confident-prototype 등 총 5회 확인), t-test 같은 엄밀한 유의성 검정은 아니다.</a:t>
+            </a:r>
+          </a:p>
+          <a:p>
+            <a:pPr algn="l" marL="228600" indent="-228600">
+              <a:lnSpc>
+                <a:spcPct val="108000"/>
+              </a:lnSpc>
+              <a:spcAft>
+                <a:spcPts val="600"/>
+              </a:spcAft>
+              <a:buFont typeface="Arial"/>
+              <a:buChar char="•"/>
+            </a:pPr>
+            <a:r>
+              <a:rPr sz="1100" b="1" i="0">
+                <a:solidFill>
+                  <a:srgbClr val="2A78D6"/>
+                </a:solidFill>
+                <a:latin typeface="Calibri"/>
+              </a:rPr>
+              <a:t>경량 모델(tiny_cnn_c, 31,498 파라미터)의 근본적 표현력 한계: </a:t>
+            </a:r>
+            <a:r>
+              <a:rPr sz="1100" b="0" i="0">
+                <a:solidFill>
+                  <a:srgbClr val="1A1A1A"/>
+                </a:solidFill>
+                <a:latin typeface="Calibri"/>
+              </a:rPr>
+              <a:t>PlantDoc 오라클 상한이 23.47%(정답을 줘도 그대로)라는 것 자체가 증명 — 적응 기법으로는 풀 수 없는 문제다.</a:t>
+            </a:r>
+          </a:p>
+          <a:p>
+            <a:pPr algn="l" marL="228600" indent="-228600">
+              <a:lnSpc>
+                <a:spcPct val="108000"/>
+              </a:lnSpc>
+              <a:spcAft>
+                <a:spcPts val="600"/>
+              </a:spcAft>
+              <a:buFont typeface="Arial"/>
+              <a:buChar char="•"/>
+            </a:pPr>
+            <a:r>
+              <a:rPr sz="1100" b="1" i="0">
+                <a:solidFill>
+                  <a:srgbClr val="2A78D6"/>
+                </a:solidFill>
+                <a:latin typeface="Calibri"/>
+              </a:rPr>
+              <a:t>R-GV는 포스터만 보고 만든 근사 구현이다: </a:t>
+            </a:r>
+            <a:r>
+              <a:rPr sz="1100" b="0" i="0">
+                <a:solidFill>
+                  <a:srgbClr val="1A1A1A"/>
+                </a:solidFill>
+                <a:latin typeface="Calibri"/>
+              </a:rPr>
+              <a:t>공식 코드와 논문 본문을 구하지 못해(CVF/ResearchGate 접근 차단), CVPR 포스터에 공개된 수준의 정보로만 재구성했다 — 논문의 정확한 재현이 아니다.</a:t>
+            </a:r>
+          </a:p>
+          <a:p>
+            <a:pPr algn="l" marL="228600" indent="-228600">
+              <a:lnSpc>
+                <a:spcPct val="108000"/>
+              </a:lnSpc>
+              <a:spcAft>
+                <a:spcPts val="600"/>
+              </a:spcAft>
+              <a:buFont typeface="Arial"/>
+              <a:buChar char="•"/>
+            </a:pPr>
+            <a:r>
+              <a:rPr sz="1100" b="1" i="0">
+                <a:solidFill>
+                  <a:srgbClr val="2A78D6"/>
+                </a:solidFill>
+                <a:latin typeface="Calibri"/>
+              </a:rPr>
+              <a:t>Source(PlantVillage) 학습 데이터·증강을 바꾸는 것은 범위 밖이다: </a:t>
+            </a:r>
+            <a:r>
+              <a:rPr sz="1100" b="0" i="0">
+                <a:solidFill>
+                  <a:srgbClr val="1A1A1A"/>
+                </a:solidFill>
+                <a:latin typeface="Calibri"/>
+              </a:rPr>
+              <a:t>Corruption 테스트가 이미 지목한 “밝기 증강 부재”가 PlantDoc·Bangladesh의 근본 해법일 가능성이 높지만, 학습 데이터를 바꾸는 시도는 하지 않았다.</a:t>
+            </a:r>
+          </a:p>
+          <a:p>
+            <a:pPr algn="l" marL="228600" indent="-228600">
+              <a:lnSpc>
+                <a:spcPct val="108000"/>
+              </a:lnSpc>
+              <a:spcAft>
+                <a:spcPts val="600"/>
+              </a:spcAft>
+              <a:buFont typeface="Arial"/>
+              <a:buChar char="•"/>
+            </a:pPr>
+            <a:r>
+              <a:rPr sz="1100" b="1" i="0">
+                <a:solidFill>
+                  <a:srgbClr val="2A78D6"/>
+                </a:solidFill>
+                <a:latin typeface="Calibri"/>
+              </a:rPr>
+              <a:t>“전부 60%” 목표는 Bangladesh·PlantDoc에서 오라클 상한 자체가 못 미쳐 구조적으로 달성 불가능하다: </a:t>
+            </a:r>
+            <a:r>
+              <a:rPr sz="1100" b="0" i="0">
+                <a:solidFill>
+                  <a:srgbClr val="1A1A1A"/>
+                </a:solidFill>
+                <a:latin typeface="Calibri"/>
+              </a:rPr>
+              <a:t>이론이 아니라 실측 결과다(2/12 슬라이드).</a:t>
+            </a:r>
+          </a:p>
+        </p:txBody>
+      </p:sp>
+      <p:sp>
+        <p:nvSpPr>
+          <p:cNvPr id="9" name="TextBox 5"/>
+          <p:cNvSpPr txBox="1"/>
+          <p:nvPr/>
+        </p:nvSpPr>
+        <p:spPr>
+          <a:xfrm>
+            <a:off x="11430000" y="6446520"/>
+            <a:ext cx="548640" cy="274320"/>
+          </a:xfrm>
+          <a:prstGeom prst="rect">
+            <a:avLst/>
+          </a:prstGeom>
+          <a:noFill/>
+        </p:spPr>
+        <p:txBody>
+          <a:bodyPr wrap="square" anchor="t" lIns="0" rIns="0" tIns="0" bIns="0">
+            <a:spAutoFit/>
+          </a:bodyPr>
+          <a:lstStyle/>
+          <a:p>
+            <a:pPr algn="r"/>
+            <a:r>
+              <a:rPr sz="1000" b="0" i="0">
+                <a:solidFill>
+                  <a:srgbClr val="5B5E6B"/>
+                </a:solidFill>
+                <a:latin typeface="Calibri"/>
+              </a:rPr>
+              <a:t>30</a:t>
+            </a:r>
+          </a:p>
+        </p:txBody>
+      </p:sp>
+    </p:spTree>
+  </p:cSld>
+  <p:clrMapOvr>
+    <a:masterClrMapping/>
+  </p:clrMapOvr>
+</p:sld>
+</file>
+
+<file path=ppt/slides/slide46.xml><?xml version="1.0" encoding="utf-8"?>
+<p:sld xmlns:a="http://schemas.openxmlformats.org/drawingml/2006/main" xmlns:p="http://schemas.openxmlformats.org/presentationml/2006/main" xmlns:r="http://schemas.openxmlformats.org/officeDocument/2006/relationships">
+  <p:cSld>
+    <p:bg>
+      <p:bgPr>
+        <a:solidFill>
+          <a:srgbClr val="FFFFFF"/>
+        </a:solidFill>
+        <a:effectLst/>
+      </p:bgPr>
+    </p:bg>
+    <p:spTree>
+      <p:nvGrpSpPr>
+        <p:cNvPr id="1" name=""/>
+        <p:cNvGrpSpPr/>
+        <p:nvPr/>
+      </p:nvGrpSpPr>
+      <p:grpSpPr/>
+      <p:sp>
+        <p:nvSpPr>
+          <p:cNvPr id="2" name="TextBox 1"/>
+          <p:cNvSpPr txBox="1"/>
+          <p:nvPr/>
+        </p:nvSpPr>
+        <p:spPr>
+          <a:xfrm>
+            <a:off x="548640" y="292608"/>
+            <a:ext cx="9144000" cy="292608"/>
+          </a:xfrm>
+          <a:prstGeom prst="rect">
+            <a:avLst/>
+          </a:prstGeom>
+          <a:noFill/>
+        </p:spPr>
+        <p:txBody>
+          <a:bodyPr wrap="square" anchor="t" lIns="0" rIns="0" tIns="0" bIns="0">
+            <a:spAutoFit/>
+          </a:bodyPr>
+          <a:lstStyle/>
+          <a:p>
+            <a:pPr algn="l"/>
+            <a:r>
+              <a:rPr sz="1050" b="1" i="0">
+                <a:solidFill>
+                  <a:srgbClr val="2A78D6"/>
+                </a:solidFill>
+                <a:latin typeface="Calibri"/>
+              </a:rPr>
+              <a:t>RESULT 7 · DOMAIN ADAPTATION (9/12)</a:t>
+            </a:r>
+          </a:p>
+        </p:txBody>
+      </p:sp>
+      <p:sp>
+        <p:nvSpPr>
+          <p:cNvPr id="3" name="TextBox 2"/>
+          <p:cNvSpPr txBox="1"/>
+          <p:nvPr/>
+        </p:nvSpPr>
+        <p:spPr>
+          <a:xfrm>
+            <a:off x="548640" y="566928"/>
+            <a:ext cx="10972800" cy="548640"/>
+          </a:xfrm>
+          <a:prstGeom prst="rect">
+            <a:avLst/>
+          </a:prstGeom>
+          <a:noFill/>
+        </p:spPr>
+        <p:txBody>
+          <a:bodyPr wrap="square" anchor="t" lIns="0" rIns="0" tIns="0" bIns="0">
+            <a:spAutoFit/>
+          </a:bodyPr>
+          <a:lstStyle/>
+          <a:p>
+            <a:pPr algn="l"/>
+            <a:r>
+              <a:rPr sz="2100" b="1" i="0">
+                <a:solidFill>
+                  <a:srgbClr val="1E2761"/>
+                </a:solidFill>
+                <a:latin typeface="Cambria"/>
+              </a:rPr>
+              <a:t>핵심 발표 포인트 (예상 질문 대비)</a:t>
+            </a:r>
+          </a:p>
+        </p:txBody>
+      </p:sp>
+      <p:sp>
+        <p:nvSpPr>
+          <p:cNvPr id="4" name="TextBox 3"/>
+          <p:cNvSpPr txBox="1"/>
+          <p:nvPr/>
+        </p:nvSpPr>
+        <p:spPr>
+          <a:xfrm>
+            <a:off x="548640" y="1150000"/>
+            <a:ext cx="11091672" cy="600000"/>
+          </a:xfrm>
+          <a:prstGeom prst="rect">
+            <a:avLst/>
+          </a:prstGeom>
+          <a:noFill/>
+        </p:spPr>
+        <p:txBody>
+          <a:bodyPr wrap="square" anchor="t" lIns="0" rIns="0" tIns="0" bIns="0">
+            <a:spAutoFit/>
+          </a:bodyPr>
+          <a:lstStyle/>
+          <a:p>
+            <a:pPr algn="l"/>
+            <a:r>
+              <a:rPr sz="1200" b="0" i="0">
+                <a:solidFill>
+                  <a:srgbClr val="1A1A1A"/>
+                </a:solidFill>
+                <a:latin typeface="Calibri"/>
+              </a:rPr>
+              <a:t>발표·질의응답에서 나올 수 있는 핵심 질문과, 데이터에 기반한 답변을 미리 정리했다.</a:t>
+            </a:r>
+          </a:p>
+        </p:txBody>
+      </p:sp>
+      <p:sp>
+        <p:nvSpPr>
+          <p:cNvPr id="5" name="TextBox Bullets"/>
+          <p:cNvSpPr txBox="1"/>
+          <p:nvPr/>
+        </p:nvSpPr>
+        <p:spPr>
+          <a:xfrm>
+            <a:off x="548640" y="1950000"/>
+            <a:ext cx="11091672" cy="4300000"/>
+          </a:xfrm>
+          <a:prstGeom prst="rect">
+            <a:avLst/>
+          </a:prstGeom>
+          <a:noFill/>
+        </p:spPr>
+        <p:txBody>
+          <a:bodyPr wrap="square" anchor="t" lIns="0" rIns="0" tIns="0" bIns="0">
+            <a:spAutoFit/>
+          </a:bodyPr>
+          <a:lstStyle/>
+          <a:p>
+            <a:pPr algn="l" marL="228600" indent="-228600">
+              <a:lnSpc>
+                <a:spcPct val="108000"/>
+              </a:lnSpc>
+              <a:spcAft>
+                <a:spcPts val="600"/>
+              </a:spcAft>
+              <a:buFont typeface="Arial"/>
+              <a:buChar char="•"/>
+            </a:pPr>
+            <a:r>
+              <a:rPr sz="1050" b="1" i="0">
+                <a:solidFill>
+                  <a:srgbClr val="2A78D6"/>
+                </a:solidFill>
+                <a:latin typeface="Calibri"/>
+              </a:rPr>
+              <a:t>Q. 왜 이렇게 많이 시도했는데 대부분 실패했나? </a:t>
+            </a:r>
+            <a:r>
+              <a:rPr sz="1050" b="0" i="0">
+                <a:solidFill>
+                  <a:srgbClr val="1A1A1A"/>
+                </a:solidFill>
+                <a:latin typeface="Calibri"/>
+              </a:rPr>
+              <a:t>A. 실패도 과학적 정보다 — EATA(필터링), CACL/R-GV(feature 정렬), AaD(클러스터링 제거), CoWA(soft weighting)의 실패 이유가 전부 다르고, 그 차이가 “pseudo-label 문제 vs feature 표현력 문제”를 데이터셋별로 구분하는 데 직접 쓰였다(3/12 오라클 진단).</a:t>
+            </a:r>
+          </a:p>
+          <a:p>
+            <a:pPr algn="l" marL="228600" indent="-228600">
+              <a:lnSpc>
+                <a:spcPct val="108000"/>
+              </a:lnSpc>
+              <a:spcAft>
+                <a:spcPts val="600"/>
+              </a:spcAft>
+              <a:buFont typeface="Arial"/>
+              <a:buChar char="•"/>
+            </a:pPr>
+            <a:r>
+              <a:rPr sz="1050" b="1" i="0">
+                <a:solidFill>
+                  <a:srgbClr val="2A78D6"/>
+                </a:solidFill>
+                <a:latin typeface="Calibri"/>
+              </a:rPr>
+              <a:t>Q. 최종 채택한 SHOT+AaD가 최선이라는 근거는? </a:t>
+            </a:r>
+            <a:r>
+              <a:rPr sz="1050" b="0" i="0">
+                <a:solidFill>
+                  <a:srgbClr val="1A1A1A"/>
+                </a:solidFill>
+                <a:latin typeface="Calibri"/>
+              </a:rPr>
+              <a:t>A. 지금까지 검증한 8개 방향 중 유일하게 3-seed에서 Taiwan·Bangladesh를 동시에, 안정적으로(표준편차 감소) 개선했다(1/12, 6/12 슬라이드).</a:t>
+            </a:r>
+          </a:p>
+          <a:p>
+            <a:pPr algn="l" marL="228600" indent="-228600">
+              <a:lnSpc>
+                <a:spcPct val="108000"/>
+              </a:lnSpc>
+              <a:spcAft>
+                <a:spcPts val="600"/>
+              </a:spcAft>
+              <a:buFont typeface="Arial"/>
+              <a:buChar char="•"/>
+            </a:pPr>
+            <a:r>
+              <a:rPr sz="1050" b="1" i="0">
+                <a:solidFill>
+                  <a:srgbClr val="2A78D6"/>
+                </a:solidFill>
+                <a:latin typeface="Calibri"/>
+              </a:rPr>
+              <a:t>Q. 왜 3-seed만 했나, 더 많이 하지 않은 이유는? </a:t>
+            </a:r>
+            <a:r>
+              <a:rPr sz="1050" b="0" i="0">
+                <a:solidFill>
+                  <a:srgbClr val="1A1A1A"/>
+                </a:solidFill>
+                <a:latin typeface="Calibri"/>
+              </a:rPr>
+              <a:t>A. 계산 자원·시간 제약이 1차 이유이지만, 3-seed로도 이미 “단일 seed 결과를 과신하면 안 된다”는 것을 5차례 반복 확인했다(APS, 데이터셋별 극단 튜닝, confident-prototype, Taiwan epoch=7 등) — 추가 seed는 이 결론을 더 정밀하게 만들 뿐, 뒤집을 가능성은 낮다고 판단했다.</a:t>
+            </a:r>
+          </a:p>
+          <a:p>
+            <a:pPr algn="l" marL="228600" indent="-228600">
+              <a:lnSpc>
+                <a:spcPct val="108000"/>
+              </a:lnSpc>
+              <a:spcAft>
+                <a:spcPts val="600"/>
+              </a:spcAft>
+              <a:buFont typeface="Arial"/>
+              <a:buChar char="•"/>
+            </a:pPr>
+            <a:r>
+              <a:rPr sz="1050" b="1" i="0">
+                <a:solidFill>
+                  <a:srgbClr val="2A78D6"/>
+                </a:solidFill>
+                <a:latin typeface="Calibri"/>
+              </a:rPr>
+              <a:t>Q. “전부 60%” 목표는 왜 못 채웠나? </a:t>
+            </a:r>
+            <a:r>
+              <a:rPr sz="1050" b="0" i="0">
+                <a:solidFill>
+                  <a:srgbClr val="1A1A1A"/>
+                </a:solidFill>
+                <a:latin typeface="Calibri"/>
+              </a:rPr>
+              <a:t>A. 오라클 실험(실제 정답으로 직접 학습)으로 Bangladesh(58.61%)·PlantDoc(23.47%)은 어떤 적응 기법을 써도 원천적으로 60%에 도달할 수 없음을 실측으로 증명했다(2/12 슬라이드) — 더 좋은 방법을 못 찾은 게 아니라 데이터셋 구조의 한계다.</a:t>
+            </a:r>
+          </a:p>
+          <a:p>
+            <a:pPr algn="l" marL="228600" indent="-228600">
+              <a:lnSpc>
+                <a:spcPct val="108000"/>
+              </a:lnSpc>
+              <a:spcAft>
+                <a:spcPts val="600"/>
+              </a:spcAft>
+              <a:buFont typeface="Arial"/>
+              <a:buChar char="•"/>
+            </a:pPr>
+            <a:r>
+              <a:rPr sz="1050" b="1" i="0">
+                <a:solidFill>
+                  <a:srgbClr val="2A78D6"/>
+                </a:solidFill>
+                <a:latin typeface="Calibri"/>
+              </a:rPr>
+              <a:t>Q. 앞으로 더 할 수 있는 것은? </a:t>
+            </a:r>
+            <a:r>
+              <a:rPr sz="1050" b="0" i="0">
+                <a:solidFill>
+                  <a:srgbClr val="1A1A1A"/>
+                </a:solidFill>
+                <a:latin typeface="Calibri"/>
+              </a:rPr>
+              <a:t>A. 근본적으로는 source 학습 데이터·증강 개선(이번 프로젝트 범위 밖)이나, target의 극소량 라벨을 활용하는 few-shot 방식으로 “label-free” 전제 자체를 바꾸는 방향이 남아 있다(8/12 한계점 슬라이드).</a:t>
+            </a:r>
+          </a:p>
+        </p:txBody>
+      </p:sp>
+      <p:sp>
+        <p:nvSpPr>
+          <p:cNvPr id="9" name="TextBox 5"/>
+          <p:cNvSpPr txBox="1"/>
+          <p:nvPr/>
+        </p:nvSpPr>
+        <p:spPr>
+          <a:xfrm>
+            <a:off x="11430000" y="6446520"/>
+            <a:ext cx="548640" cy="274320"/>
+          </a:xfrm>
+          <a:prstGeom prst="rect">
+            <a:avLst/>
+          </a:prstGeom>
+          <a:noFill/>
+        </p:spPr>
+        <p:txBody>
+          <a:bodyPr wrap="square" anchor="t" lIns="0" rIns="0" tIns="0" bIns="0">
+            <a:spAutoFit/>
+          </a:bodyPr>
+          <a:lstStyle/>
+          <a:p>
+            <a:pPr algn="r"/>
+            <a:r>
+              <a:rPr sz="1000" b="0" i="0">
+                <a:solidFill>
+                  <a:srgbClr val="5B5E6B"/>
+                </a:solidFill>
+                <a:latin typeface="Calibri"/>
+              </a:rPr>
+              <a:t>31</a:t>
             </a:r>
           </a:p>
         </p:txBody>

--- a/docs/CNN_토마토_병해분류_V2_진행보고.pptx
+++ b/docs/CNN_토마토_병해분류_V2_진행보고.pptx
@@ -32,6 +32,7 @@
     <p:sldId id="292" r:id="rId26"/>
     <p:sldId id="290" r:id="rId27"/>
     <p:sldId id="294" r:id="rId28"/>
+    <p:sldId id="302" r:id="rId43"/>
     <p:sldId id="299" r:id="rId29"/>
     <p:sldId id="295" r:id="rId30"/>
     <p:sldId id="298" r:id="rId31"/>
@@ -173,12 +174,28 @@
           <a:lstStyle/>
           <a:p>
             <a:r>
-              <a:rPr sz="1100">
+              <a:rPr lang="en-US" sz="1100">
                 <a:solidFill>
                   <a:srgbClr val="1E2761"/>
                 </a:solidFill>
               </a:rPr>
-              <a:t>V2 (직접 학습)</a:t>
+              <a:t>V2 (</a:t>
+            </a:r>
+            <a:r>
+              <a:rPr lang="ko-KR" altLang="en-US" sz="1100">
+                <a:solidFill>
+                  <a:srgbClr val="1E2761"/>
+                </a:solidFill>
+              </a:rPr>
+              <a:t>직접 학습</a:t>
+            </a:r>
+            <a:r>
+              <a:rPr lang="en-US" altLang="ko-KR" sz="1100">
+                <a:solidFill>
+                  <a:srgbClr val="1E2761"/>
+                </a:solidFill>
+              </a:rPr>
+              <a:t>)</a:t>
             </a:r>
           </a:p>
         </c:rich>
@@ -429,12 +446,44 @@
           <a:lstStyle/>
           <a:p>
             <a:r>
-              <a:rPr sz="1100">
+              <a:rPr lang="en-US" altLang="ko-KR" sz="1100">
                 <a:solidFill>
                   <a:srgbClr val="1E2761"/>
                 </a:solidFill>
               </a:rPr>
-              <a:t>V1 (인용, 재학습 안 함)</a:t>
+              <a:t>V1 (</a:t>
+            </a:r>
+            <a:r>
+              <a:rPr lang="ko-KR" altLang="en-US" sz="1100">
+                <a:solidFill>
+                  <a:srgbClr val="1E2761"/>
+                </a:solidFill>
+              </a:rPr>
+              <a:t>인용</a:t>
+            </a:r>
+            <a:r>
+              <a:rPr lang="en-US" altLang="ko-KR" sz="1100">
+                <a:solidFill>
+                  <a:srgbClr val="1E2761"/>
+                </a:solidFill>
+              </a:rPr>
+              <a:t>, </a:t>
+            </a:r>
+            <a:r>
+              <a:rPr lang="ko-KR" altLang="en-US" sz="1100">
+                <a:solidFill>
+                  <a:srgbClr val="1E2761"/>
+                </a:solidFill>
+              </a:rPr>
+              <a:t>재학습 안 함</a:t>
+            </a:r>
+            <a:r>
+              <a:rPr lang="en-US" altLang="ko-KR" sz="1100">
+                <a:solidFill>
+                  <a:srgbClr val="1E2761"/>
+                </a:solidFill>
+              </a:rPr>
+              <a:t>)</a:t>
             </a:r>
           </a:p>
         </c:rich>
@@ -690,6 +739,9 @@
   <c:roundedCorners val="1"/>
   <c:style val="2"/>
   <c:chart>
+    <c:title>
+      <c:overlay val="0"/>
+    </c:title>
     <c:autoTitleDeleted val="0"/>
     <c:plotArea>
       <c:layout/>
@@ -5406,7 +5458,7 @@
                 </a:solidFill>
                 <a:latin typeface="Calibri"/>
               </a:rPr>
-              <a:t>Google 이미지 검색 기반이라 진단표·여러 질병을 합친 비교 콜라주·삽화·문서 캡처처럼 "잎 사진이 아닌" 이미지가 섞여 있었다. 8개 클래스 전체를 썸네일 격자(콘택트시트)로 만들어 훑어보고 문제 이미지 35장을 확인해 제외했다.</a:t>
+              <a:t>Google 이미지 검색 기반이라 진단표·여러 질병을 합친 비교 콜라주·삽화·문서 캡처처럼 "잎 사진이 아닌" 이미지가 섞여 있었다. 8개 클래스 전체를 썸네일 격자(콘택트시트)로 만들어 훑어보고 문제 이미지 43장을 확인해 제외했다(1차 35장 + 2026-10-15 재검수에서 추가로 찾은 8장).</a:t>
             </a:r>
           </a:p>
         </p:txBody>
@@ -5547,7 +5599,7 @@
                 </a:solidFill>
                 <a:latin typeface="Calibri"/>
               </a:rPr>
-              <a:t>746장 → 709장 (35장 제외) / 8개 클래스</a:t>
+              <a:t>746장 → 701장 (spider mites 2장 + 문제 이미지 43장, 총 45장 제외) / 8개 클래스</a:t>
             </a:r>
           </a:p>
         </p:txBody>
@@ -5586,7 +5638,7 @@
                 </a:solidFill>
                 <a:latin typeface="Calibri"/>
               </a:rPr>
-              <a:t>Spider mites 폴더는 원본에 단 2장뿐이라(콜라주 제외하면 사실상 무의미) 평가에서 제외했다. 원본은 그대로 두고, 외부평가셋 생성 시에만 35장을 걸러냈다.</a:t>
+              <a:t>Spider mites 폴더는 원본에 단 2장뿐이라(콜라주 제외하면 사실상 무의미) 평가에서 제외했다. 원본은 그대로 두고, 외부평가셋 생성 시에만 이 2장과 문제 이미지 43장, 총 45장을 걸러냈다(744장 → 701장).</a:t>
             </a:r>
           </a:p>
         </p:txBody>
@@ -17582,7 +17634,7 @@
                 </a:solidFill>
                 <a:latin typeface="Calibri"/>
               </a:rPr>
-              <a:t>RESULT 7 · DOMAIN ADAPTATION (1/12)</a:t>
+              <a:t>RESULT 7 · DOMAIN ADAPTATION (1/13)</a:t>
             </a:r>
           </a:p>
         </p:txBody>
@@ -17667,7 +17719,7 @@
         </p:nvGraphicFramePr>
         <p:xfrm>
           <a:off x="548640" y="2350000"/>
-          <a:ext cx="11200000" cy="2400000"/>
+          <a:ext cx="11200000" cy="2800000"/>
         </p:xfrm>
         <a:graphic>
           <a:graphicData uri="http://schemas.openxmlformats.org/drawingml/2006/table">
@@ -18069,7 +18121,7 @@
                             <a:srgbClr val="1A1A1A"/>
                           </a:solidFill>
                         </a:rPr>
-                        <a:t>19.75% ±1.40</a:t>
+                        <a:t>18.40% ±0.50</a:t>
                       </a:r>
                     </a:p>
                   </a:txBody>
@@ -18164,7 +18216,7 @@
                             <a:srgbClr val="1A6B3A"/>
                           </a:solidFill>
                         </a:rPr>
-                        <a:t>19.09% ±1.18</a:t>
+                        <a:t>17.97% ±1.13</a:t>
                       </a:r>
                     </a:p>
                   </a:txBody>
@@ -18192,7 +18244,7 @@
         </p:nvSpPr>
         <p:spPr>
           <a:xfrm>
-            <a:off x="548640" y="4950000"/>
+            <a:off x="548640" y="5372031"/>
             <a:ext cx="11091672" cy="1000000"/>
           </a:xfrm>
           <a:prstGeom prst="rect">
@@ -18208,13 +18260,454 @@
           <a:p>
             <a:pPr algn="l"/>
             <a:r>
-              <a:rPr sz="1250" b="0" i="1">
+              <a:rPr sz="1250" b="0" i="1" dirty="0" err="1">
                 <a:solidFill>
                   <a:srgbClr val="5B5E6B"/>
                 </a:solidFill>
                 <a:latin typeface="Calibri"/>
               </a:rPr>
-              <a:t>Bangladesh만 뚜렷하게 개선됐다(+3.1%p, 표준편차도 5.62→3.85로 감소 — 다만 별도의 통계적 유의성 검정은 하지 않았다). Taiwan·PlantDoc은 SHOT 단독과 평균이 거의 같아 해치지는 않는다. 이어지는 슬라이드는 이 결론에 대한 진단·메커니즘·대안 비교다.</a:t>
+              <a:t>Bangladesh만</a:t>
+            </a:r>
+            <a:r>
+              <a:rPr sz="1250" b="0" i="1" dirty="0">
+                <a:solidFill>
+                  <a:srgbClr val="5B5E6B"/>
+                </a:solidFill>
+                <a:latin typeface="Calibri"/>
+              </a:rPr>
+              <a:t> </a:t>
+            </a:r>
+            <a:r>
+              <a:rPr sz="1250" b="0" i="1" dirty="0" err="1">
+                <a:solidFill>
+                  <a:srgbClr val="5B5E6B"/>
+                </a:solidFill>
+                <a:latin typeface="Calibri"/>
+              </a:rPr>
+              <a:t>뚜렷하게</a:t>
+            </a:r>
+            <a:r>
+              <a:rPr sz="1250" b="0" i="1" dirty="0">
+                <a:solidFill>
+                  <a:srgbClr val="5B5E6B"/>
+                </a:solidFill>
+                <a:latin typeface="Calibri"/>
+              </a:rPr>
+              <a:t> </a:t>
+            </a:r>
+            <a:r>
+              <a:rPr sz="1250" b="0" i="1" dirty="0" err="1">
+                <a:solidFill>
+                  <a:srgbClr val="5B5E6B"/>
+                </a:solidFill>
+                <a:latin typeface="Calibri"/>
+              </a:rPr>
+              <a:t>개선됐다</a:t>
+            </a:r>
+            <a:r>
+              <a:rPr sz="1250" b="0" i="1" dirty="0">
+                <a:solidFill>
+                  <a:srgbClr val="5B5E6B"/>
+                </a:solidFill>
+                <a:latin typeface="Calibri"/>
+              </a:rPr>
+              <a:t>(+3.1%p, </a:t>
+            </a:r>
+            <a:r>
+              <a:rPr sz="1250" b="0" i="1" dirty="0" err="1">
+                <a:solidFill>
+                  <a:srgbClr val="5B5E6B"/>
+                </a:solidFill>
+                <a:latin typeface="Calibri"/>
+              </a:rPr>
+              <a:t>표준편차도</a:t>
+            </a:r>
+            <a:r>
+              <a:rPr sz="1250" b="0" i="1" dirty="0">
+                <a:solidFill>
+                  <a:srgbClr val="5B5E6B"/>
+                </a:solidFill>
+                <a:latin typeface="Calibri"/>
+              </a:rPr>
+              <a:t> 5.62→3.85로 </a:t>
+            </a:r>
+            <a:r>
+              <a:rPr sz="1250" b="0" i="1" dirty="0" err="1">
+                <a:solidFill>
+                  <a:srgbClr val="5B5E6B"/>
+                </a:solidFill>
+                <a:latin typeface="Calibri"/>
+              </a:rPr>
+              <a:t>감소</a:t>
+            </a:r>
+            <a:r>
+              <a:rPr sz="1250" b="0" i="1" dirty="0">
+                <a:solidFill>
+                  <a:srgbClr val="5B5E6B"/>
+                </a:solidFill>
+                <a:latin typeface="Calibri"/>
+              </a:rPr>
+              <a:t> — </a:t>
+            </a:r>
+            <a:r>
+              <a:rPr sz="1250" b="0" i="1" dirty="0" err="1">
+                <a:solidFill>
+                  <a:srgbClr val="5B5E6B"/>
+                </a:solidFill>
+                <a:latin typeface="Calibri"/>
+              </a:rPr>
+              <a:t>다만</a:t>
+            </a:r>
+            <a:r>
+              <a:rPr sz="1250" b="0" i="1" dirty="0">
+                <a:solidFill>
+                  <a:srgbClr val="5B5E6B"/>
+                </a:solidFill>
+                <a:latin typeface="Calibri"/>
+              </a:rPr>
+              <a:t> </a:t>
+            </a:r>
+            <a:r>
+              <a:rPr sz="1250" b="0" i="1" dirty="0" err="1">
+                <a:solidFill>
+                  <a:srgbClr val="5B5E6B"/>
+                </a:solidFill>
+                <a:latin typeface="Calibri"/>
+              </a:rPr>
+              <a:t>별도의</a:t>
+            </a:r>
+            <a:r>
+              <a:rPr sz="1250" b="0" i="1" dirty="0">
+                <a:solidFill>
+                  <a:srgbClr val="5B5E6B"/>
+                </a:solidFill>
+                <a:latin typeface="Calibri"/>
+              </a:rPr>
+              <a:t> </a:t>
+            </a:r>
+            <a:r>
+              <a:rPr sz="1250" b="0" i="1" dirty="0" err="1">
+                <a:solidFill>
+                  <a:srgbClr val="5B5E6B"/>
+                </a:solidFill>
+                <a:latin typeface="Calibri"/>
+              </a:rPr>
+              <a:t>통계적</a:t>
+            </a:r>
+            <a:r>
+              <a:rPr sz="1250" b="0" i="1" dirty="0">
+                <a:solidFill>
+                  <a:srgbClr val="5B5E6B"/>
+                </a:solidFill>
+                <a:latin typeface="Calibri"/>
+              </a:rPr>
+              <a:t> </a:t>
+            </a:r>
+            <a:r>
+              <a:rPr sz="1250" b="0" i="1" dirty="0" err="1">
+                <a:solidFill>
+                  <a:srgbClr val="5B5E6B"/>
+                </a:solidFill>
+                <a:latin typeface="Calibri"/>
+              </a:rPr>
+              <a:t>유의성</a:t>
+            </a:r>
+            <a:r>
+              <a:rPr sz="1250" b="0" i="1" dirty="0">
+                <a:solidFill>
+                  <a:srgbClr val="5B5E6B"/>
+                </a:solidFill>
+                <a:latin typeface="Calibri"/>
+              </a:rPr>
+              <a:t> </a:t>
+            </a:r>
+            <a:r>
+              <a:rPr sz="1250" b="0" i="1" dirty="0" err="1">
+                <a:solidFill>
+                  <a:srgbClr val="5B5E6B"/>
+                </a:solidFill>
+                <a:latin typeface="Calibri"/>
+              </a:rPr>
+              <a:t>검정은</a:t>
+            </a:r>
+            <a:r>
+              <a:rPr sz="1250" b="0" i="1" dirty="0">
+                <a:solidFill>
+                  <a:srgbClr val="5B5E6B"/>
+                </a:solidFill>
+                <a:latin typeface="Calibri"/>
+              </a:rPr>
+              <a:t> </a:t>
+            </a:r>
+            <a:r>
+              <a:rPr sz="1250" b="0" i="1" dirty="0" err="1">
+                <a:solidFill>
+                  <a:srgbClr val="5B5E6B"/>
+                </a:solidFill>
+                <a:latin typeface="Calibri"/>
+              </a:rPr>
+              <a:t>하지</a:t>
+            </a:r>
+            <a:r>
+              <a:rPr sz="1250" b="0" i="1" dirty="0">
+                <a:solidFill>
+                  <a:srgbClr val="5B5E6B"/>
+                </a:solidFill>
+                <a:latin typeface="Calibri"/>
+              </a:rPr>
+              <a:t> </a:t>
+            </a:r>
+            <a:r>
+              <a:rPr sz="1250" b="0" i="1" dirty="0" err="1">
+                <a:solidFill>
+                  <a:srgbClr val="5B5E6B"/>
+                </a:solidFill>
+                <a:latin typeface="Calibri"/>
+              </a:rPr>
+              <a:t>않았다</a:t>
+            </a:r>
+            <a:r>
+              <a:rPr sz="1250" b="0" i="1" dirty="0">
+                <a:solidFill>
+                  <a:srgbClr val="5B5E6B"/>
+                </a:solidFill>
+                <a:latin typeface="Calibri"/>
+              </a:rPr>
+              <a:t>). </a:t>
+            </a:r>
+            <a:r>
+              <a:rPr sz="1250" b="0" i="1" dirty="0" err="1">
+                <a:solidFill>
+                  <a:srgbClr val="5B5E6B"/>
+                </a:solidFill>
+                <a:latin typeface="Calibri"/>
+              </a:rPr>
+              <a:t>Taiwan·PlantDoc은</a:t>
+            </a:r>
+            <a:r>
+              <a:rPr sz="1250" b="0" i="1" dirty="0">
+                <a:solidFill>
+                  <a:srgbClr val="5B5E6B"/>
+                </a:solidFill>
+                <a:latin typeface="Calibri"/>
+              </a:rPr>
+              <a:t> SHOT </a:t>
+            </a:r>
+            <a:r>
+              <a:rPr sz="1250" b="0" i="1" dirty="0" err="1">
+                <a:solidFill>
+                  <a:srgbClr val="5B5E6B"/>
+                </a:solidFill>
+                <a:latin typeface="Calibri"/>
+              </a:rPr>
+              <a:t>단독과</a:t>
+            </a:r>
+            <a:r>
+              <a:rPr sz="1250" b="0" i="1" dirty="0">
+                <a:solidFill>
+                  <a:srgbClr val="5B5E6B"/>
+                </a:solidFill>
+                <a:latin typeface="Calibri"/>
+              </a:rPr>
+              <a:t> </a:t>
+            </a:r>
+            <a:r>
+              <a:rPr sz="1250" b="0" i="1" dirty="0" err="1">
+                <a:solidFill>
+                  <a:srgbClr val="5B5E6B"/>
+                </a:solidFill>
+                <a:latin typeface="Calibri"/>
+              </a:rPr>
+              <a:t>평균이</a:t>
+            </a:r>
+            <a:r>
+              <a:rPr sz="1250" b="0" i="1" dirty="0">
+                <a:solidFill>
+                  <a:srgbClr val="5B5E6B"/>
+                </a:solidFill>
+                <a:latin typeface="Calibri"/>
+              </a:rPr>
+              <a:t> </a:t>
+            </a:r>
+            <a:r>
+              <a:rPr sz="1250" b="0" i="1" dirty="0" err="1">
+                <a:solidFill>
+                  <a:srgbClr val="5B5E6B"/>
+                </a:solidFill>
+                <a:latin typeface="Calibri"/>
+              </a:rPr>
+              <a:t>거의</a:t>
+            </a:r>
+            <a:r>
+              <a:rPr sz="1250" b="0" i="1" dirty="0">
+                <a:solidFill>
+                  <a:srgbClr val="5B5E6B"/>
+                </a:solidFill>
+                <a:latin typeface="Calibri"/>
+              </a:rPr>
+              <a:t> </a:t>
+            </a:r>
+            <a:r>
+              <a:rPr sz="1250" b="0" i="1" dirty="0" err="1">
+                <a:solidFill>
+                  <a:srgbClr val="5B5E6B"/>
+                </a:solidFill>
+                <a:latin typeface="Calibri"/>
+              </a:rPr>
+              <a:t>같아</a:t>
+            </a:r>
+            <a:r>
+              <a:rPr sz="1250" b="0" i="1" dirty="0">
+                <a:solidFill>
+                  <a:srgbClr val="5B5E6B"/>
+                </a:solidFill>
+                <a:latin typeface="Calibri"/>
+              </a:rPr>
+              <a:t> </a:t>
+            </a:r>
+            <a:r>
+              <a:rPr sz="1250" b="0" i="1" dirty="0" err="1">
+                <a:solidFill>
+                  <a:srgbClr val="5B5E6B"/>
+                </a:solidFill>
+                <a:latin typeface="Calibri"/>
+              </a:rPr>
+              <a:t>해치지는</a:t>
+            </a:r>
+            <a:r>
+              <a:rPr sz="1250" b="0" i="1" dirty="0">
+                <a:solidFill>
+                  <a:srgbClr val="5B5E6B"/>
+                </a:solidFill>
+                <a:latin typeface="Calibri"/>
+              </a:rPr>
+              <a:t> </a:t>
+            </a:r>
+            <a:r>
+              <a:rPr sz="1250" b="0" i="1" dirty="0" err="1">
+                <a:solidFill>
+                  <a:srgbClr val="5B5E6B"/>
+                </a:solidFill>
+                <a:latin typeface="Calibri"/>
+              </a:rPr>
+              <a:t>않는다</a:t>
+            </a:r>
+            <a:r>
+              <a:rPr sz="1250" b="0" i="1" dirty="0">
+                <a:solidFill>
+                  <a:srgbClr val="5B5E6B"/>
+                </a:solidFill>
+                <a:latin typeface="Calibri"/>
+              </a:rPr>
+              <a:t>. </a:t>
+            </a:r>
+            <a:r>
+              <a:rPr sz="1250" b="0" i="1" dirty="0" err="1">
+                <a:solidFill>
+                  <a:srgbClr val="5B5E6B"/>
+                </a:solidFill>
+                <a:latin typeface="Calibri"/>
+              </a:rPr>
+              <a:t>이어지는</a:t>
+            </a:r>
+            <a:r>
+              <a:rPr sz="1250" b="0" i="1" dirty="0">
+                <a:solidFill>
+                  <a:srgbClr val="5B5E6B"/>
+                </a:solidFill>
+                <a:latin typeface="Calibri"/>
+              </a:rPr>
+              <a:t> </a:t>
+            </a:r>
+            <a:r>
+              <a:rPr sz="1250" b="0" i="1" dirty="0" err="1">
+                <a:solidFill>
+                  <a:srgbClr val="5B5E6B"/>
+                </a:solidFill>
+                <a:latin typeface="Calibri"/>
+              </a:rPr>
+              <a:t>슬라이드는</a:t>
+            </a:r>
+            <a:r>
+              <a:rPr sz="1250" b="0" i="1" dirty="0">
+                <a:solidFill>
+                  <a:srgbClr val="5B5E6B"/>
+                </a:solidFill>
+                <a:latin typeface="Calibri"/>
+              </a:rPr>
+              <a:t> 이 </a:t>
+            </a:r>
+            <a:r>
+              <a:rPr sz="1250" b="0" i="1" dirty="0" err="1">
+                <a:solidFill>
+                  <a:srgbClr val="5B5E6B"/>
+                </a:solidFill>
+                <a:latin typeface="Calibri"/>
+              </a:rPr>
+              <a:t>결론에</a:t>
+            </a:r>
+            <a:r>
+              <a:rPr sz="1250" b="0" i="1" dirty="0">
+                <a:solidFill>
+                  <a:srgbClr val="5B5E6B"/>
+                </a:solidFill>
+                <a:latin typeface="Calibri"/>
+              </a:rPr>
+              <a:t> </a:t>
+            </a:r>
+            <a:r>
+              <a:rPr sz="1250" b="0" i="1" dirty="0" err="1">
+                <a:solidFill>
+                  <a:srgbClr val="5B5E6B"/>
+                </a:solidFill>
+                <a:latin typeface="Calibri"/>
+              </a:rPr>
+              <a:t>대한</a:t>
+            </a:r>
+            <a:r>
+              <a:rPr sz="1250" b="0" i="1" dirty="0">
+                <a:solidFill>
+                  <a:srgbClr val="5B5E6B"/>
+                </a:solidFill>
+                <a:latin typeface="Calibri"/>
+              </a:rPr>
+              <a:t> </a:t>
+            </a:r>
+            <a:r>
+              <a:rPr sz="1250" b="0" i="1" dirty="0" err="1">
+                <a:solidFill>
+                  <a:srgbClr val="5B5E6B"/>
+                </a:solidFill>
+                <a:latin typeface="Calibri"/>
+              </a:rPr>
+              <a:t>진단·메커니즘·대안</a:t>
+            </a:r>
+            <a:r>
+              <a:rPr sz="1250" b="0" i="1" dirty="0">
+                <a:solidFill>
+                  <a:srgbClr val="5B5E6B"/>
+                </a:solidFill>
+                <a:latin typeface="Calibri"/>
+              </a:rPr>
+              <a:t> </a:t>
+            </a:r>
+            <a:r>
+              <a:rPr sz="1250" b="0" i="1" dirty="0" err="1">
+                <a:solidFill>
+                  <a:srgbClr val="5B5E6B"/>
+                </a:solidFill>
+                <a:latin typeface="Calibri"/>
+              </a:rPr>
+              <a:t>비교다</a:t>
+            </a:r>
+            <a:r>
+              <a:rPr sz="1250" b="0" i="1" dirty="0">
+                <a:solidFill>
+                  <a:srgbClr val="5B5E6B"/>
+                </a:solidFill>
+                <a:latin typeface="Calibri"/>
+              </a:rPr>
+              <a:t>.</a:t>
             </a:r>
           </a:p>
         </p:txBody>
@@ -18317,7 +18810,7 @@
                 </a:solidFill>
                 <a:latin typeface="Calibri"/>
               </a:rPr>
-              <a:t>RESULT 7 · DOMAIN ADAPTATION (2/12)</a:t>
+              <a:t>RESULT 7 · DOMAIN ADAPTATION (2/13)</a:t>
             </a:r>
           </a:p>
         </p:txBody>
@@ -18804,7 +19297,7 @@
                             <a:srgbClr val="1A1A1A"/>
                           </a:solidFill>
                         </a:rPr>
-                        <a:t>19.09% ±1.18</a:t>
+                        <a:t>17.97% ±1.13</a:t>
                       </a:r>
                     </a:p>
                   </a:txBody>
@@ -18957,7 +19450,7 @@
                 </a:solidFill>
                 <a:latin typeface="Calibri"/>
               </a:rPr>
-              <a:t>RESULT 7 · DOMAIN ADAPTATION (3/12)</a:t>
+              <a:t>RESULT 7 · DOMAIN ADAPTATION (3/13)</a:t>
             </a:r>
           </a:p>
         </p:txBody>
@@ -19502,7 +19995,7 @@
                 </a:solidFill>
                 <a:latin typeface="Calibri"/>
               </a:rPr>
-              <a:t>RESULT 7 · DOMAIN ADAPTATION (4/12)</a:t>
+              <a:t>RESULT 7 · DOMAIN ADAPTATION (4/13)</a:t>
             </a:r>
           </a:p>
         </p:txBody>
@@ -20142,7 +20635,7 @@
                 </a:solidFill>
                 <a:latin typeface="Calibri"/>
               </a:rPr>
-              <a:t>RESULT 7 · DOMAIN ADAPTATION (5/12)</a:t>
+              <a:t>RESULT 7 · DOMAIN ADAPTATION (6/13)</a:t>
             </a:r>
           </a:p>
         </p:txBody>
@@ -20450,7 +20943,7 @@
                 </a:solidFill>
                 <a:latin typeface="Calibri"/>
               </a:rPr>
-              <a:t>27</a:t>
+              <a:t>28</a:t>
             </a:r>
           </a:p>
         </p:txBody>
@@ -20518,7 +21011,7 @@
                 </a:solidFill>
                 <a:latin typeface="Calibri"/>
               </a:rPr>
-              <a:t>RESULT 7 · DOMAIN ADAPTATION (6/12)</a:t>
+              <a:t>RESULT 7 · DOMAIN ADAPTATION (7/13)</a:t>
             </a:r>
           </a:p>
         </p:txBody>
@@ -21435,7 +21928,7 @@
                 </a:solidFill>
                 <a:latin typeface="Calibri"/>
               </a:rPr>
-              <a:t>*APS는 seed42 단일 실행에서만 좋아 보였고 3-seed 평균은 noise였다. UCon-SFDA(ICLR 2025)는 CACL과 같은 contrastive-loss 계열이라 같은 문제를 겪을 가능성이 높아 구현하지 않고 판단 근거만 남겼다. 공통 패턴: ImageNet급 벤치마크 기준으로 설계된 하이퍼파라미터·구성요소는 이 프로젝트 규모(300~1,100장)에서 전부 재조정이 필요했고, 일부는 재조정으로도 못 고쳤다.</a:t>
+              <a:t>*APS는 seed42 단일 실행에서만 좋아 보였고 3-seed 평균은 noise였다. 공통 패턴: ImageNet급 벤치마크 기준으로 설계된 하이퍼파라미터·구성요소는 이 프로젝트 규모(300~1,100장)에서 전부 재조정이 필요했고, 일부는 재조정으로도 못 고쳤다.</a:t>
             </a:r>
           </a:p>
         </p:txBody>
@@ -21470,7 +21963,7 @@
                 </a:solidFill>
                 <a:latin typeface="Calibri"/>
               </a:rPr>
-              <a:t>28</a:t>
+              <a:t>29</a:t>
             </a:r>
           </a:p>
         </p:txBody>
@@ -22324,7 +22817,7 @@
                 </a:solidFill>
                 <a:latin typeface="Calibri"/>
               </a:rPr>
-              <a:t>RESULT 7 · DOMAIN ADAPTATION (7/12)</a:t>
+              <a:t>RESULT 7 · DOMAIN ADAPTATION (8/13)</a:t>
             </a:r>
           </a:p>
         </p:txBody>
@@ -23225,7 +23718,7 @@
                 </a:solidFill>
                 <a:latin typeface="Calibri"/>
               </a:rPr>
-              <a:t>29</a:t>
+              <a:t>30</a:t>
             </a:r>
           </a:p>
         </p:txBody>
@@ -23293,7 +23786,7 @@
                 </a:solidFill>
                 <a:latin typeface="Calibri"/>
               </a:rPr>
-              <a:t>RESULT 7 · DOMAIN ADAPTATION (8/12)</a:t>
+              <a:t>RESULT 7 · DOMAIN ADAPTATION (9/13)</a:t>
             </a:r>
           </a:p>
         </p:txBody>
@@ -23601,7 +24094,7 @@
                 </a:solidFill>
                 <a:latin typeface="Calibri"/>
               </a:rPr>
-              <a:t>30</a:t>
+              <a:t>31</a:t>
             </a:r>
           </a:p>
         </p:txBody>
@@ -23669,7 +24162,7 @@
                 </a:solidFill>
                 <a:latin typeface="Calibri"/>
               </a:rPr>
-              <a:t>RESULT 7 · DOMAIN ADAPTATION (9/12)</a:t>
+              <a:t>RESULT 7 · DOMAIN ADAPTATION (10/13)</a:t>
             </a:r>
           </a:p>
         </p:txBody>
@@ -23947,7 +24440,7 @@
                 </a:solidFill>
                 <a:latin typeface="Calibri"/>
               </a:rPr>
-              <a:t>31</a:t>
+              <a:t>32</a:t>
             </a:r>
           </a:p>
         </p:txBody>
@@ -24015,7 +24508,7 @@
                 </a:solidFill>
                 <a:latin typeface="Calibri"/>
               </a:rPr>
-              <a:t>RESULT 7 · DOMAIN ADAPTATION (10/12)</a:t>
+              <a:t>RESULT 7 · DOMAIN ADAPTATION (11/13)</a:t>
             </a:r>
           </a:p>
         </p:txBody>
@@ -24784,7 +25277,7 @@
                 </a:solidFill>
                 <a:latin typeface="Calibri"/>
               </a:rPr>
-              <a:t>32</a:t>
+              <a:t>33</a:t>
             </a:r>
           </a:p>
         </p:txBody>
@@ -24852,7 +25345,7 @@
                 </a:solidFill>
                 <a:latin typeface="Calibri"/>
               </a:rPr>
-              <a:t>RESULT 7 · DOMAIN ADAPTATION (11/12)</a:t>
+              <a:t>RESULT 7 · DOMAIN ADAPTATION (12/13)</a:t>
             </a:r>
           </a:p>
         </p:txBody>
@@ -25709,7 +26202,7 @@
                 </a:solidFill>
                 <a:latin typeface="Calibri"/>
               </a:rPr>
-              <a:t>33</a:t>
+              <a:t>34</a:t>
             </a:r>
           </a:p>
         </p:txBody>
@@ -25777,7 +26270,7 @@
                 </a:solidFill>
                 <a:latin typeface="Calibri"/>
               </a:rPr>
-              <a:t>RESULT 7 · DOMAIN ADAPTATION (12/12)</a:t>
+              <a:t>RESULT 7 · DOMAIN ADAPTATION (13/13)</a:t>
             </a:r>
           </a:p>
         </p:txBody>
@@ -26351,7 +26844,7 @@
                 </a:solidFill>
                 <a:latin typeface="Calibri"/>
               </a:rPr>
-              <a:t>34</a:t>
+              <a:t>35</a:t>
             </a:r>
           </a:p>
         </p:txBody>
@@ -27383,7 +27876,7 @@
                 </a:solidFill>
                 <a:latin typeface="Calibri"/>
               </a:rPr>
-              <a:t>35</a:t>
+              <a:t>36</a:t>
             </a:r>
           </a:p>
         </p:txBody>
@@ -28019,7 +28512,580 @@
                 </a:solidFill>
                 <a:latin typeface="Calibri"/>
               </a:rPr>
-              <a:t>36</a:t>
+              <a:t>37</a:t>
+            </a:r>
+          </a:p>
+        </p:txBody>
+      </p:sp>
+    </p:spTree>
+  </p:cSld>
+  <p:clrMapOvr>
+    <a:masterClrMapping/>
+  </p:clrMapOvr>
+</p:sld>
+</file>
+
+<file path=ppt/slides/slide38.xml><?xml version="1.0" encoding="utf-8"?>
+<p:sld xmlns:a="http://schemas.openxmlformats.org/drawingml/2006/main" xmlns:r="http://schemas.openxmlformats.org/officeDocument/2006/relationships" xmlns:p="http://schemas.openxmlformats.org/presentationml/2006/main">
+  <p:cSld>
+    <p:bg>
+      <p:bgPr>
+        <a:solidFill>
+          <a:srgbClr val="FFFFFF"/>
+        </a:solidFill>
+        <a:effectLst/>
+      </p:bgPr>
+    </p:bg>
+    <p:spTree>
+      <p:nvGrpSpPr>
+        <p:cNvPr id="1" name=""/>
+        <p:cNvGrpSpPr/>
+        <p:nvPr/>
+      </p:nvGrpSpPr>
+      <p:grpSpPr>
+        <a:xfrm>
+          <a:off x="0" y="0"/>
+          <a:ext cx="0" cy="0"/>
+          <a:chOff x="0" y="0"/>
+          <a:chExt cx="0" cy="0"/>
+        </a:xfrm>
+      </p:grpSpPr>
+      <p:sp>
+        <p:nvSpPr>
+          <p:cNvPr id="2" name="TextBox 1"/>
+          <p:cNvSpPr txBox="1"/>
+          <p:nvPr/>
+        </p:nvSpPr>
+        <p:spPr>
+          <a:xfrm>
+            <a:off x="548640" y="292608"/>
+            <a:ext cx="9144000" cy="292608"/>
+          </a:xfrm>
+          <a:prstGeom prst="rect">
+            <a:avLst/>
+          </a:prstGeom>
+          <a:noFill/>
+        </p:spPr>
+        <p:txBody>
+          <a:bodyPr wrap="square" lIns="0" tIns="0" rIns="0" bIns="0" anchor="t">
+            <a:spAutoFit/>
+          </a:bodyPr>
+          <a:lstStyle/>
+          <a:p>
+            <a:pPr algn="l"/>
+            <a:r>
+              <a:rPr sz="1050" b="1" i="0">
+                <a:solidFill>
+                  <a:srgbClr val="2A78D6"/>
+                </a:solidFill>
+                <a:latin typeface="Calibri"/>
+              </a:rPr>
+              <a:t>RESULT 7 · DOMAIN ADAPTATION (5/13)</a:t>
+            </a:r>
+          </a:p>
+        </p:txBody>
+      </p:sp>
+      <p:sp>
+        <p:nvSpPr>
+          <p:cNvPr id="3" name="TextBox 2"/>
+          <p:cNvSpPr txBox="1"/>
+          <p:nvPr/>
+        </p:nvSpPr>
+        <p:spPr>
+          <a:xfrm>
+            <a:off x="548640" y="566928"/>
+            <a:ext cx="10972800" cy="548640"/>
+          </a:xfrm>
+          <a:prstGeom prst="rect">
+            <a:avLst/>
+          </a:prstGeom>
+          <a:noFill/>
+        </p:spPr>
+        <p:txBody>
+          <a:bodyPr wrap="square" lIns="0" tIns="0" rIns="0" bIns="0" anchor="t">
+            <a:spAutoFit/>
+          </a:bodyPr>
+          <a:lstStyle/>
+          <a:p>
+            <a:pPr algn="l"/>
+            <a:r>
+              <a:rPr sz="2200" b="1" i="0">
+                <a:solidFill>
+                  <a:srgbClr val="1E2761"/>
+                </a:solidFill>
+                <a:latin typeface="Cambria"/>
+              </a:rPr>
+              <a:t>참고: Class-Restriction 마스킹, 어떻게 동작하는가</a:t>
+            </a:r>
+          </a:p>
+        </p:txBody>
+      </p:sp>
+      <p:sp>
+        <p:nvSpPr>
+          <p:cNvPr id="4" name="TextBox 3"/>
+          <p:cNvSpPr txBox="1"/>
+          <p:nvPr/>
+        </p:nvSpPr>
+        <p:spPr>
+          <a:xfrm>
+            <a:off x="548640" y="1150000"/>
+            <a:ext cx="11091672" cy="1500000"/>
+          </a:xfrm>
+          <a:prstGeom prst="rect">
+            <a:avLst/>
+          </a:prstGeom>
+          <a:noFill/>
+        </p:spPr>
+        <p:txBody>
+          <a:bodyPr wrap="square" lIns="0" tIns="0" rIns="0" bIns="0" anchor="t">
+            <a:spAutoFit/>
+          </a:bodyPr>
+          <a:lstStyle/>
+          <a:p>
+            <a:pPr algn="l"/>
+            <a:r>
+              <a:rPr sz="1250" b="0" i="0">
+                <a:solidFill>
+                  <a:srgbClr val="1A1A1A"/>
+                </a:solidFill>
+                <a:latin typeface="Calibri"/>
+              </a:rPr>
+              <a:t>외부 데이터셋(Taiwan/Bangladesh/PlantDoc)에는 PlantVillage 10개 클래스 중 일부만 존재한다 — 예를 들어 Taiwan 원본 폴더 구성 자체가 Bacterial spot·Late blight·healthy 3종류뿐이다. 이건 데이터 수집 단계부터 알고 있던 사실이라, target 정답 라벨을 몰래 본 게 아니다. 이 사전 정보를 src/class_info.py에 매핑표로 정리해두고, 모델이 내놓는 10개 클래스 점수(로짓) 중 “이 데이터셋에 없다고 이미 아는” 클래스의 점수에 -inf(마이너스 무한대)를 더해 최종 예측(argmax) 후보에서 완전히 제외한다. 아래 예시처럼 Leaf_Mold는 Taiwan에 없는 클래스라 로짓이 가장 높아도(3.2) -inf로 덮여 선택되지 못하고, 남은 클래스 중 최댓값인 Bacterial_spot(2.1)이 최종 예측이 된다.</a:t>
+            </a:r>
+          </a:p>
+        </p:txBody>
+      </p:sp>
+      <p:graphicFrame>
+        <p:nvGraphicFramePr>
+          <p:cNvPr id="7" name="Table"/>
+          <p:cNvGraphicFramePr>
+            <a:graphicFrameLocks noGrp="1"/>
+          </p:cNvGraphicFramePr>
+          <p:nvPr/>
+        </p:nvGraphicFramePr>
+        <p:xfrm>
+          <a:off x="548640" y="2850000"/>
+          <a:ext cx="11200000" cy="1960000"/>
+        </p:xfrm>
+        <a:graphic>
+          <a:graphicData uri="http://schemas.openxmlformats.org/drawingml/2006/table">
+            <a:tbl>
+              <a:tblPr firstRow="1" bandRow="1">
+                <a:tableStyleId>{5C22544A-7EE6-4342-B048-85BDC9FD1C3A}</a:tableStyleId>
+              </a:tblPr>
+              <a:tblGrid>
+                <a:gridCol w="2400000"/>
+                <a:gridCol w="2200000"/>
+                <a:gridCol w="2200000"/>
+                <a:gridCol w="2200000"/>
+                <a:gridCol w="2200000"/>
+              </a:tblGrid>
+              <a:tr h="650000">
+                <a:tc>
+                  <a:txBody>
+                    <a:bodyPr/>
+                    <a:lstStyle/>
+                    <a:p>
+                      <a:pPr algn="ctr"/>
+                      <a:r>
+                        <a:rPr sz="1200" b="1">
+                          <a:solidFill>
+                            <a:srgbClr val="FFFFFF"/>
+                          </a:solidFill>
+                        </a:rPr>
+                        <a:t>클래스</a:t>
+                      </a:r>
+                    </a:p>
+                  </a:txBody>
+                  <a:tcPr anchor="ctr">
+                    <a:solidFill>
+                      <a:srgbClr val="1E2761"/>
+                    </a:solidFill>
+                  </a:tcPr>
+                </a:tc>
+                <a:tc>
+                  <a:txBody>
+                    <a:bodyPr/>
+                    <a:lstStyle/>
+                    <a:p>
+                      <a:pPr algn="ctr"/>
+                      <a:r>
+                        <a:rPr sz="1200" b="1">
+                          <a:solidFill>
+                            <a:srgbClr val="FFFFFF"/>
+                          </a:solidFill>
+                        </a:rPr>
+                        <a:t>Bacterial_spot</a:t>
+                      </a:r>
+                    </a:p>
+                  </a:txBody>
+                  <a:tcPr anchor="ctr">
+                    <a:solidFill>
+                      <a:srgbClr val="1E2761"/>
+                    </a:solidFill>
+                  </a:tcPr>
+                </a:tc>
+                <a:tc>
+                  <a:txBody>
+                    <a:bodyPr/>
+                    <a:lstStyle/>
+                    <a:p>
+                      <a:pPr algn="ctr"/>
+                      <a:r>
+                        <a:rPr sz="1200" b="1">
+                          <a:solidFill>
+                            <a:srgbClr val="FFFFFF"/>
+                          </a:solidFill>
+                        </a:rPr>
+                        <a:t>Late_blight</a:t>
+                      </a:r>
+                    </a:p>
+                  </a:txBody>
+                  <a:tcPr anchor="ctr">
+                    <a:solidFill>
+                      <a:srgbClr val="1E2761"/>
+                    </a:solidFill>
+                  </a:tcPr>
+                </a:tc>
+                <a:tc>
+                  <a:txBody>
+                    <a:bodyPr/>
+                    <a:lstStyle/>
+                    <a:p>
+                      <a:pPr algn="ctr"/>
+                      <a:r>
+                        <a:rPr sz="1200" b="1">
+                          <a:solidFill>
+                            <a:srgbClr val="FFFFFF"/>
+                          </a:solidFill>
+                        </a:rPr>
+                        <a:t>Leaf_Mold</a:t>
+                      </a:r>
+                    </a:p>
+                  </a:txBody>
+                  <a:tcPr anchor="ctr">
+                    <a:solidFill>
+                      <a:srgbClr val="1E2761"/>
+                    </a:solidFill>
+                  </a:tcPr>
+                </a:tc>
+                <a:tc>
+                  <a:txBody>
+                    <a:bodyPr/>
+                    <a:lstStyle/>
+                    <a:p>
+                      <a:pPr algn="ctr"/>
+                      <a:r>
+                        <a:rPr sz="1200" b="1">
+                          <a:solidFill>
+                            <a:srgbClr val="FFFFFF"/>
+                          </a:solidFill>
+                        </a:rPr>
+                        <a:t>healthy</a:t>
+                      </a:r>
+                    </a:p>
+                  </a:txBody>
+                  <a:tcPr anchor="ctr">
+                    <a:solidFill>
+                      <a:srgbClr val="1E2761"/>
+                    </a:solidFill>
+                  </a:tcPr>
+                </a:tc>
+              </a:tr>
+              <a:tr h="650000">
+                <a:tc>
+                  <a:txBody>
+                    <a:bodyPr/>
+                    <a:lstStyle/>
+                    <a:p>
+                      <a:pPr algn="ctr"/>
+                      <a:r>
+                        <a:rPr sz="1200" b="0">
+                          <a:solidFill>
+                            <a:srgbClr val="1A1A1A"/>
+                          </a:solidFill>
+                        </a:rPr>
+                        <a:t>마스킹 전 로짓</a:t>
+                      </a:r>
+                    </a:p>
+                  </a:txBody>
+                  <a:tcPr anchor="ctr">
+                    <a:solidFill>
+                      <a:srgbClr val="FFFFFF"/>
+                    </a:solidFill>
+                  </a:tcPr>
+                </a:tc>
+                <a:tc>
+                  <a:txBody>
+                    <a:bodyPr/>
+                    <a:lstStyle/>
+                    <a:p>
+                      <a:pPr algn="ctr"/>
+                      <a:r>
+                        <a:rPr sz="1200" b="0">
+                          <a:solidFill>
+                            <a:srgbClr val="1A1A1A"/>
+                          </a:solidFill>
+                        </a:rPr>
+                        <a:t>2.1</a:t>
+                      </a:r>
+                    </a:p>
+                  </a:txBody>
+                  <a:tcPr anchor="ctr">
+                    <a:solidFill>
+                      <a:srgbClr val="FFFFFF"/>
+                    </a:solidFill>
+                  </a:tcPr>
+                </a:tc>
+                <a:tc>
+                  <a:txBody>
+                    <a:bodyPr/>
+                    <a:lstStyle/>
+                    <a:p>
+                      <a:pPr algn="ctr"/>
+                      <a:r>
+                        <a:rPr sz="1200" b="0">
+                          <a:solidFill>
+                            <a:srgbClr val="1A1A1A"/>
+                          </a:solidFill>
+                        </a:rPr>
+                        <a:t>0.8</a:t>
+                      </a:r>
+                    </a:p>
+                  </a:txBody>
+                  <a:tcPr anchor="ctr">
+                    <a:solidFill>
+                      <a:srgbClr val="FFFFFF"/>
+                    </a:solidFill>
+                  </a:tcPr>
+                </a:tc>
+                <a:tc>
+                  <a:txBody>
+                    <a:bodyPr/>
+                    <a:lstStyle/>
+                    <a:p>
+                      <a:pPr algn="ctr"/>
+                      <a:r>
+                        <a:rPr sz="1200" b="1">
+                          <a:solidFill>
+                            <a:srgbClr val="1A1A1A"/>
+                          </a:solidFill>
+                        </a:rPr>
+                        <a:t>3.2 ← 최댓값(오답)</a:t>
+                      </a:r>
+                    </a:p>
+                  </a:txBody>
+                  <a:tcPr anchor="ctr">
+                    <a:solidFill>
+                      <a:srgbClr val="FFFFFF"/>
+                    </a:solidFill>
+                  </a:tcPr>
+                </a:tc>
+                <a:tc>
+                  <a:txBody>
+                    <a:bodyPr/>
+                    <a:lstStyle/>
+                    <a:p>
+                      <a:pPr algn="ctr"/>
+                      <a:r>
+                        <a:rPr sz="1200" b="0">
+                          <a:solidFill>
+                            <a:srgbClr val="1A1A1A"/>
+                          </a:solidFill>
+                        </a:rPr>
+                        <a:t>1.5</a:t>
+                      </a:r>
+                    </a:p>
+                  </a:txBody>
+                  <a:tcPr anchor="ctr">
+                    <a:solidFill>
+                      <a:srgbClr val="FFFFFF"/>
+                    </a:solidFill>
+                  </a:tcPr>
+                </a:tc>
+              </a:tr>
+              <a:tr h="650000">
+                <a:tc>
+                  <a:txBody>
+                    <a:bodyPr/>
+                    <a:lstStyle/>
+                    <a:p>
+                      <a:pPr algn="ctr"/>
+                      <a:r>
+                        <a:rPr sz="1200" b="0">
+                          <a:solidFill>
+                            <a:srgbClr val="1A1A1A"/>
+                          </a:solidFill>
+                        </a:rPr>
+                        <a:t>마스킹 후 로짓</a:t>
+                      </a:r>
+                    </a:p>
+                  </a:txBody>
+                  <a:tcPr anchor="ctr">
+                    <a:solidFill>
+                      <a:srgbClr val="EEF3FC"/>
+                    </a:solidFill>
+                  </a:tcPr>
+                </a:tc>
+                <a:tc>
+                  <a:txBody>
+                    <a:bodyPr/>
+                    <a:lstStyle/>
+                    <a:p>
+                      <a:pPr algn="ctr"/>
+                      <a:r>
+                        <a:rPr sz="1200" b="1">
+                          <a:solidFill>
+                            <a:srgbClr val="1A1A1A"/>
+                          </a:solidFill>
+                        </a:rPr>
+                        <a:t>2.1 ← 최댓값(정답)</a:t>
+                      </a:r>
+                    </a:p>
+                  </a:txBody>
+                  <a:tcPr anchor="ctr">
+                    <a:solidFill>
+                      <a:srgbClr val="EEF3FC"/>
+                    </a:solidFill>
+                  </a:tcPr>
+                </a:tc>
+                <a:tc>
+                  <a:txBody>
+                    <a:bodyPr/>
+                    <a:lstStyle/>
+                    <a:p>
+                      <a:pPr algn="ctr"/>
+                      <a:r>
+                        <a:rPr sz="1200" b="0">
+                          <a:solidFill>
+                            <a:srgbClr val="1A1A1A"/>
+                          </a:solidFill>
+                        </a:rPr>
+                        <a:t>0.8</a:t>
+                      </a:r>
+                    </a:p>
+                  </a:txBody>
+                  <a:tcPr anchor="ctr">
+                    <a:solidFill>
+                      <a:srgbClr val="EEF3FC"/>
+                    </a:solidFill>
+                  </a:tcPr>
+                </a:tc>
+                <a:tc>
+                  <a:txBody>
+                    <a:bodyPr/>
+                    <a:lstStyle/>
+                    <a:p>
+                      <a:pPr algn="ctr"/>
+                      <a:r>
+                        <a:rPr sz="1200" b="0">
+                          <a:solidFill>
+                            <a:srgbClr val="1A1A1A"/>
+                          </a:solidFill>
+                        </a:rPr>
+                        <a:t>-inf (제외)</a:t>
+                      </a:r>
+                    </a:p>
+                  </a:txBody>
+                  <a:tcPr anchor="ctr">
+                    <a:solidFill>
+                      <a:srgbClr val="EEF3FC"/>
+                    </a:solidFill>
+                  </a:tcPr>
+                </a:tc>
+                <a:tc>
+                  <a:txBody>
+                    <a:bodyPr/>
+                    <a:lstStyle/>
+                    <a:p>
+                      <a:pPr algn="ctr"/>
+                      <a:r>
+                        <a:rPr sz="1200" b="0">
+                          <a:solidFill>
+                            <a:srgbClr val="1A1A1A"/>
+                          </a:solidFill>
+                        </a:rPr>
+                        <a:t>1.5</a:t>
+                      </a:r>
+                    </a:p>
+                  </a:txBody>
+                  <a:tcPr anchor="ctr">
+                    <a:solidFill>
+                      <a:srgbClr val="EEF3FC"/>
+                    </a:solidFill>
+                  </a:tcPr>
+                </a:tc>
+              </a:tr>
+            </a:tbl>
+          </a:graphicData>
+        </a:graphic>
+      </p:graphicFrame>
+      <p:sp>
+        <p:nvSpPr>
+          <p:cNvPr id="6" name="TextBox 4"/>
+          <p:cNvSpPr txBox="1"/>
+          <p:nvPr/>
+        </p:nvSpPr>
+        <p:spPr>
+          <a:xfrm>
+            <a:off x="548640" y="5050000"/>
+            <a:ext cx="11091672" cy="1300000"/>
+          </a:xfrm>
+          <a:prstGeom prst="rect">
+            <a:avLst/>
+          </a:prstGeom>
+          <a:noFill/>
+        </p:spPr>
+        <p:txBody>
+          <a:bodyPr wrap="square" lIns="0" tIns="0" rIns="0" bIns="0" anchor="t">
+            <a:spAutoFit/>
+          </a:bodyPr>
+          <a:lstStyle/>
+          <a:p>
+            <a:pPr algn="l"/>
+            <a:r>
+              <a:rPr sz="1200" b="0" i="1">
+                <a:solidFill>
+                  <a:srgbClr val="5B5E6B"/>
+                </a:solidFill>
+                <a:latin typeface="Calibri"/>
+              </a:rPr>
+              <a:t>사전 정의 매핑표: src/class_info.py — TAIWAN_CLASS_MAPPING(30행)·BANGLADESH_CLASS_ID_MAPPING(41행)·PLANTDOC_CLASS_MAPPING(57행)을 모아 EXTERNAL_PRESENT_CLASSES(72행)로 정리. -inf 적용 코드: src/adapt/domain_adaptation.py의 class_mask_for() 함수(45~54행, 53행 mask[i] = float(“-inf”)) — SHOT 등 적응 중에도, 평가 시엔 src/evaluate/evaluate_external.py의 _predict_all_masked()(38~41행)에서 동일한 마스크를 재사용한다.</a:t>
+            </a:r>
+          </a:p>
+        </p:txBody>
+      </p:sp>
+      <p:sp>
+        <p:nvSpPr>
+          <p:cNvPr id="9" name="TextBox 5"/>
+          <p:cNvSpPr txBox="1"/>
+          <p:nvPr/>
+        </p:nvSpPr>
+        <p:spPr>
+          <a:xfrm>
+            <a:off x="11430000" y="6446520"/>
+            <a:ext cx="548640" cy="274320"/>
+          </a:xfrm>
+          <a:prstGeom prst="rect">
+            <a:avLst/>
+          </a:prstGeom>
+          <a:noFill/>
+        </p:spPr>
+        <p:txBody>
+          <a:bodyPr wrap="square" lIns="0" tIns="0" rIns="0" bIns="0" anchor="t">
+            <a:spAutoFit/>
+          </a:bodyPr>
+          <a:lstStyle/>
+          <a:p>
+            <a:pPr algn="r"/>
+            <a:r>
+              <a:rPr sz="1000" b="0" i="0">
+                <a:solidFill>
+                  <a:srgbClr val="5B5E6B"/>
+                </a:solidFill>
+                <a:latin typeface="Calibri"/>
+              </a:rPr>
+              <a:t>27</a:t>
             </a:r>
           </a:p>
         </p:txBody>
@@ -28820,7 +29886,7 @@
                 </a:solidFill>
                 <a:latin typeface="Cambria"/>
               </a:rPr>
-              <a:t>709장</a:t>
+              <a:t>701장</a:t>
             </a:r>
           </a:p>
         </p:txBody>
@@ -33580,7 +34646,7 @@
                             <a:srgbClr val="1A1A1A"/>
                           </a:solidFill>
                         </a:rPr>
-                        <a:t>709장</a:t>
+                        <a:t>701장</a:t>
                       </a:r>
                     </a:p>
                   </a:txBody>
